--- a/docs/decks/L12.pptx
+++ b/docs/decks/L12.pptx
@@ -10105,7 +10105,7 @@
             </a:avLst>
           </a:prstGeom>
           <a:solidFill>
-            <a:srgbClr val="ECEBFB"/>
+            <a:srgbClr val="F8F0E2"/>
           </a:solidFill>
           <a:ln/>
         </p:spPr>
@@ -10137,13 +10137,13 @@
             <a:r>
               <a:rPr lang="en-US" sz="900" b="1" spc="100" kern="0" dirty="0">
                 <a:solidFill>
-                  <a:srgbClr val="4038C4"/>
+                  <a:srgbClr val="9A5B12"/>
                 </a:solidFill>
                 <a:latin typeface="Courier New" pitchFamily="34" charset="0"/>
                 <a:ea typeface="Courier New" pitchFamily="34" charset="-122"/>
                 <a:cs typeface="Courier New" pitchFamily="34" charset="-120"/>
               </a:rPr>
-              <a:t>ТЕОРІЯ</a:t>
+              <a:t>РЕФЛЕКСІЯ</a:t>
             </a:r>
             <a:endParaRPr lang="en-US" sz="900" dirty="0"/>
           </a:p>
@@ -11395,7 +11395,7 @@
             </a:avLst>
           </a:prstGeom>
           <a:solidFill>
-            <a:srgbClr val="ECEBFB"/>
+            <a:srgbClr val="F8F0E2"/>
           </a:solidFill>
           <a:ln/>
         </p:spPr>
@@ -11427,13 +11427,13 @@
             <a:r>
               <a:rPr lang="en-US" sz="900" b="1" spc="100" kern="0" dirty="0">
                 <a:solidFill>
-                  <a:srgbClr val="4038C4"/>
+                  <a:srgbClr val="9A5B12"/>
                 </a:solidFill>
                 <a:latin typeface="Courier New" pitchFamily="34" charset="0"/>
                 <a:ea typeface="Courier New" pitchFamily="34" charset="-122"/>
                 <a:cs typeface="Courier New" pitchFamily="34" charset="-120"/>
               </a:rPr>
-              <a:t>ТЕОРІЯ</a:t>
+              <a:t>РЕФЛЕКСІЯ</a:t>
             </a:r>
             <a:endParaRPr lang="en-US" sz="900" dirty="0"/>
           </a:p>

--- a/docs/decks/L12.pptx
+++ b/docs/decks/L12.pptx
@@ -14545,9 +14545,14 @@
             </a:avLst>
           </a:prstGeom>
           <a:solidFill>
-            <a:srgbClr val="ECEBFB"/>
+            <a:srgbClr val="FFFFFF"/>
           </a:solidFill>
-          <a:ln/>
+          <a:ln w="12700">
+            <a:solidFill>
+              <a:srgbClr val="E4E6EC"/>
+            </a:solidFill>
+            <a:prstDash val="solid"/>
+          </a:ln>
         </p:spPr>
       </p:sp>
       <p:sp>
@@ -14565,7 +14570,7 @@
             <a:avLst/>
           </a:prstGeom>
           <a:solidFill>
-            <a:srgbClr val="4038C4"/>
+            <a:srgbClr val="1B1D23"/>
           </a:solidFill>
           <a:ln/>
         </p:spPr>
@@ -14597,7 +14602,7 @@
             <a:r>
               <a:rPr lang="en-US" sz="1200" b="1" dirty="0">
                 <a:solidFill>
-                  <a:srgbClr val="ECEBFB"/>
+                  <a:srgbClr val="FFFFFF"/>
                 </a:solidFill>
                 <a:latin typeface="Courier New" pitchFamily="34" charset="0"/>
                 <a:ea typeface="Courier New" pitchFamily="34" charset="-122"/>
@@ -14636,7 +14641,7 @@
             <a:r>
               <a:rPr lang="en-US" sz="1450" b="1" dirty="0">
                 <a:solidFill>
-                  <a:srgbClr val="4038C4"/>
+                  <a:srgbClr val="1B1D23"/>
                 </a:solidFill>
                 <a:latin typeface="Calibri" pitchFamily="34" charset="0"/>
                 <a:ea typeface="Calibri" pitchFamily="34" charset="-122"/>
@@ -14665,9 +14670,14 @@
             </a:avLst>
           </a:prstGeom>
           <a:solidFill>
-            <a:srgbClr val="ECEBFB"/>
+            <a:srgbClr val="FFFFFF"/>
           </a:solidFill>
-          <a:ln/>
+          <a:ln w="12700">
+            <a:solidFill>
+              <a:srgbClr val="E4E6EC"/>
+            </a:solidFill>
+            <a:prstDash val="solid"/>
+          </a:ln>
         </p:spPr>
       </p:sp>
       <p:sp>
@@ -14685,7 +14695,7 @@
             <a:avLst/>
           </a:prstGeom>
           <a:solidFill>
-            <a:srgbClr val="4038C4"/>
+            <a:srgbClr val="1B1D23"/>
           </a:solidFill>
           <a:ln/>
         </p:spPr>
@@ -14717,7 +14727,7 @@
             <a:r>
               <a:rPr lang="en-US" sz="1200" b="1" dirty="0">
                 <a:solidFill>
-                  <a:srgbClr val="ECEBFB"/>
+                  <a:srgbClr val="FFFFFF"/>
                 </a:solidFill>
                 <a:latin typeface="Courier New" pitchFamily="34" charset="0"/>
                 <a:ea typeface="Courier New" pitchFamily="34" charset="-122"/>
@@ -14756,7 +14766,7 @@
             <a:r>
               <a:rPr lang="en-US" sz="1450" b="1" dirty="0">
                 <a:solidFill>
-                  <a:srgbClr val="4038C4"/>
+                  <a:srgbClr val="1B1D23"/>
                 </a:solidFill>
                 <a:latin typeface="Calibri" pitchFamily="34" charset="0"/>
                 <a:ea typeface="Calibri" pitchFamily="34" charset="-122"/>
@@ -14785,9 +14795,14 @@
             </a:avLst>
           </a:prstGeom>
           <a:solidFill>
-            <a:srgbClr val="ECEBFB"/>
+            <a:srgbClr val="FFFFFF"/>
           </a:solidFill>
-          <a:ln/>
+          <a:ln w="12700">
+            <a:solidFill>
+              <a:srgbClr val="E4E6EC"/>
+            </a:solidFill>
+            <a:prstDash val="solid"/>
+          </a:ln>
         </p:spPr>
       </p:sp>
       <p:sp>
@@ -14805,7 +14820,7 @@
             <a:avLst/>
           </a:prstGeom>
           <a:solidFill>
-            <a:srgbClr val="4038C4"/>
+            <a:srgbClr val="1B1D23"/>
           </a:solidFill>
           <a:ln/>
         </p:spPr>
@@ -14837,7 +14852,7 @@
             <a:r>
               <a:rPr lang="en-US" sz="1200" b="1" dirty="0">
                 <a:solidFill>
-                  <a:srgbClr val="ECEBFB"/>
+                  <a:srgbClr val="FFFFFF"/>
                 </a:solidFill>
                 <a:latin typeface="Courier New" pitchFamily="34" charset="0"/>
                 <a:ea typeface="Courier New" pitchFamily="34" charset="-122"/>
@@ -14876,7 +14891,7 @@
             <a:r>
               <a:rPr lang="en-US" sz="1450" b="1" dirty="0">
                 <a:solidFill>
-                  <a:srgbClr val="4038C4"/>
+                  <a:srgbClr val="1B1D23"/>
                 </a:solidFill>
                 <a:latin typeface="Calibri" pitchFamily="34" charset="0"/>
                 <a:ea typeface="Calibri" pitchFamily="34" charset="-122"/>
@@ -14905,9 +14920,14 @@
             </a:avLst>
           </a:prstGeom>
           <a:solidFill>
-            <a:srgbClr val="ECEBFB"/>
+            <a:srgbClr val="FFFFFF"/>
           </a:solidFill>
-          <a:ln/>
+          <a:ln w="12700">
+            <a:solidFill>
+              <a:srgbClr val="E4E6EC"/>
+            </a:solidFill>
+            <a:prstDash val="solid"/>
+          </a:ln>
         </p:spPr>
       </p:sp>
       <p:sp>
@@ -14925,7 +14945,7 @@
             <a:avLst/>
           </a:prstGeom>
           <a:solidFill>
-            <a:srgbClr val="4038C4"/>
+            <a:srgbClr val="1B1D23"/>
           </a:solidFill>
           <a:ln/>
         </p:spPr>
@@ -14957,7 +14977,7 @@
             <a:r>
               <a:rPr lang="en-US" sz="1200" b="1" dirty="0">
                 <a:solidFill>
-                  <a:srgbClr val="ECEBFB"/>
+                  <a:srgbClr val="FFFFFF"/>
                 </a:solidFill>
                 <a:latin typeface="Courier New" pitchFamily="34" charset="0"/>
                 <a:ea typeface="Courier New" pitchFamily="34" charset="-122"/>
@@ -14996,7 +15016,7 @@
             <a:r>
               <a:rPr lang="en-US" sz="1450" b="1" dirty="0">
                 <a:solidFill>
-                  <a:srgbClr val="4038C4"/>
+                  <a:srgbClr val="1B1D23"/>
                 </a:solidFill>
                 <a:latin typeface="Calibri" pitchFamily="34" charset="0"/>
                 <a:ea typeface="Calibri" pitchFamily="34" charset="-122"/>
@@ -15025,9 +15045,14 @@
             </a:avLst>
           </a:prstGeom>
           <a:solidFill>
-            <a:srgbClr val="ECEBFB"/>
+            <a:srgbClr val="FFFFFF"/>
           </a:solidFill>
-          <a:ln/>
+          <a:ln w="12700">
+            <a:solidFill>
+              <a:srgbClr val="E4E6EC"/>
+            </a:solidFill>
+            <a:prstDash val="solid"/>
+          </a:ln>
         </p:spPr>
       </p:sp>
       <p:sp>
@@ -15045,7 +15070,7 @@
             <a:avLst/>
           </a:prstGeom>
           <a:solidFill>
-            <a:srgbClr val="4038C4"/>
+            <a:srgbClr val="1B1D23"/>
           </a:solidFill>
           <a:ln/>
         </p:spPr>
@@ -15077,7 +15102,7 @@
             <a:r>
               <a:rPr lang="en-US" sz="1200" b="1" dirty="0">
                 <a:solidFill>
-                  <a:srgbClr val="ECEBFB"/>
+                  <a:srgbClr val="FFFFFF"/>
                 </a:solidFill>
                 <a:latin typeface="Courier New" pitchFamily="34" charset="0"/>
                 <a:ea typeface="Courier New" pitchFamily="34" charset="-122"/>
@@ -15116,7 +15141,7 @@
             <a:r>
               <a:rPr lang="en-US" sz="1450" b="1" dirty="0">
                 <a:solidFill>
-                  <a:srgbClr val="4038C4"/>
+                  <a:srgbClr val="1B1D23"/>
                 </a:solidFill>
                 <a:latin typeface="Calibri" pitchFamily="34" charset="0"/>
                 <a:ea typeface="Calibri" pitchFamily="34" charset="-122"/>

--- a/docs/decks/L12.pptx
+++ b/docs/decks/L12.pptx
@@ -20479,7 +20479,7 @@
                 <a:gridCol w="3108960"/>
                 <a:gridCol w="5760720"/>
               </a:tblGrid>
-              <a:tr h="603504">
+              <a:tr h="512064">
                 <a:tc>
                   <a:txBody>
                     <a:bodyPr/>
@@ -20685,7 +20685,7 @@
                   </a:tcPr>
                 </a:tc>
               </a:tr>
-              <a:tr h="603504">
+              <a:tr h="512064">
                 <a:tc>
                   <a:txBody>
                     <a:bodyPr/>
@@ -20891,7 +20891,7 @@
                   </a:tcPr>
                 </a:tc>
               </a:tr>
-              <a:tr h="603504">
+              <a:tr h="512064">
                 <a:tc>
                   <a:txBody>
                     <a:bodyPr/>
@@ -21097,7 +21097,7 @@
                   </a:tcPr>
                 </a:tc>
               </a:tr>
-              <a:tr h="603504">
+              <a:tr h="512064">
                 <a:tc>
                   <a:txBody>
                     <a:bodyPr/>
@@ -21303,7 +21303,7 @@
                   </a:tcPr>
                 </a:tc>
               </a:tr>
-              <a:tr h="603504">
+              <a:tr h="512064">
                 <a:tc>
                   <a:txBody>
                     <a:bodyPr/>
@@ -22753,7 +22753,7 @@
                 <a:gridCol w="4572000"/>
                 <a:gridCol w="6492240"/>
               </a:tblGrid>
-              <a:tr h="548640">
+              <a:tr h="475488">
                 <a:tc>
                   <a:txBody>
                     <a:bodyPr/>
@@ -22891,7 +22891,7 @@
                   </a:tcPr>
                 </a:tc>
               </a:tr>
-              <a:tr h="548640">
+              <a:tr h="475488">
                 <a:tc>
                   <a:txBody>
                     <a:bodyPr/>
@@ -23029,7 +23029,7 @@
                   </a:tcPr>
                 </a:tc>
               </a:tr>
-              <a:tr h="548640">
+              <a:tr h="475488">
                 <a:tc>
                   <a:txBody>
                     <a:bodyPr/>
@@ -23167,7 +23167,7 @@
                   </a:tcPr>
                 </a:tc>
               </a:tr>
-              <a:tr h="548640">
+              <a:tr h="475488">
                 <a:tc>
                   <a:txBody>
                     <a:bodyPr/>
@@ -23305,7 +23305,7 @@
                   </a:tcPr>
                 </a:tc>
               </a:tr>
-              <a:tr h="548640">
+              <a:tr h="475488">
                 <a:tc>
                   <a:txBody>
                     <a:bodyPr/>
@@ -23443,7 +23443,7 @@
                   </a:tcPr>
                 </a:tc>
               </a:tr>
-              <a:tr h="548640">
+              <a:tr h="475488">
                 <a:tc>
                   <a:txBody>
                     <a:bodyPr/>
@@ -23581,7 +23581,7 @@
                   </a:tcPr>
                 </a:tc>
               </a:tr>
-              <a:tr h="548640">
+              <a:tr h="475488">
                 <a:tc>
                   <a:txBody>
                     <a:bodyPr/>

--- a/docs/decks/L12.pptx
+++ b/docs/decks/L12.pptx
@@ -522,7 +522,7 @@
           <a:p>
             <a:r>
               <a:rPr lang="en-US" dirty="0"/>
-              <a:t/>
+              <a:t>Вітаю на дванадцятому, фінальному уроці курсу. Шість тижнів тому у вас було три рядки коду і чотири питання без відповідей — гроші, надійність, якість, видимість. Сьогодні у вас production-контур: routing, cost-облік, кеш, інструменти з HITL, fallback із деградацією, guardrail на межі, повна спостережуваність і eval-гейт у CI. Цей урок не додає жодної нової фічі — і це свідомо. Системами не користуються, ними володіють, і різниця проявляється у два моменти: коли щось ламається — руки знають ранбук чи гуглять? — і коли треба захистити бюджет — є KPI-мова чи тільки терміни? Обидва моменти настануть, тому сьогодні готуємось саме до них. Три вміння на сьогодні: прогнати все наскрізь із чистого клону, відпрацювати інцидент за ранбуком і розповісти про систему через наслідки, а не технології. Починаємо фінал.</a:t>
             </a:r>
             <a:endParaRPr lang="en-US" dirty="0"/>
           </a:p>
@@ -610,7 +610,7 @@
           <a:p>
             <a:r>
               <a:rPr lang="en-US" dirty="0"/>
-              <a:t/>
+              <a:t>Найчастіше питання після курсу: з чого почати у своєму проєкті, де вже є LLM-виклики і немає нічого навколо них? Реалістичний план на місяць. Тиждень перший: unified logging плюс вартість — один лог-рядок на запит, cost із usage. Найшвидший видимий ефект: уже за тиждень ви вперше знаєте, скільки що коштує. Критерій «зроблено»: будь-яке операційне питання про гроші закривається SQL-запитом. Тиждень другий: реєстр промптів — промпти з коду в реєстр, версія в лог; rollback за секунди замість археології. Критерій: відкат займає секунди і лишає слід. Тиждень третій: evals на критичні сценарії — десять-п'ятнадцять кейсів на те, що страшно зламати. Критерій: зламаний промпт робить прогін червоним відтворювано. Тиждень четвертий: гейт у CI — exit code вже є, лишилося повісити на PR і ввімкнути required check. Критерій: червоний прогін блокує merge, і в історії CI є доказ. Помітьте: це той самий порядок, яким ішов курс, — і він не випадковий: без лога нема вартості, без реєстру нема чистого відкату, без evals нема гейта. Спокуса «впровадимо все одразу» закінчується тим, що не впроваджено нічого. З практики: на реальній агентній платформі шари з'являлися рівно в цій послідовності — ніхто не планував її як методику, вона просто єдина, що працює. На заперечення «немає часу» — арифметика: перший тиждень самоокупний. Лог і вартість — один-два дні роботи, після яких з'являється цифра «скільки коштує наша LLM-фіча», а вона майже завжди знаходить економію, що покриває решту плану.</a:t>
             </a:r>
             <a:endParaRPr lang="en-US" dirty="0"/>
           </a:p>
@@ -698,7 +698,7 @@
           <a:p>
             <a:r>
               <a:rPr lang="en-US" dirty="0"/>
-              <a:t/>
+              <a:t>Опційна надбудова фінального тижня — індустріальна вітрина. Ідея: сервіс віддає свої лічильники у стандартному текстовому форматі на GET /metrics, а стек Prometheus плюс Grafana — його ви піднімаєте поруч самі, advanced-профіль compose дає Redis, дашборди в нього свідомо не зашиті — збирає їх за розкладом і малює графіки з історією, алертами і всім звичним арсеналом. Коли це варте зусиль: коли сервісів стає більше одного, коли потрібні алерти з маршрутизацією на чергового, коли тренди хочеться зберігати місяцями. Зверніть увагу: самі дані не змінюються — ті самі лічильники, той самий лог; міняється лише вітрина. Це пряме продовження принципу з уроку 9: налагодьте джерело, а вітрин може бути скільки завгодно. Якщо беретеся — почніть з експорту трьох цифр: requests, fallback, cache-hit — і одного графіка. Повний дашборд виростає ітераціями, а не проєктом на квартал.</a:t>
             </a:r>
             <a:endParaRPr lang="en-US" dirty="0"/>
           </a:p>
@@ -786,7 +786,7 @@
           <a:p>
             <a:r>
               <a:rPr lang="en-US" dirty="0"/>
-              <a:t/>
+              <a:t>Курс дав вісім механізмів і показав приблизно стільки ж опційних. Найчастіше питання після фіналу — що з цього ставити першим у себе. Відповідь «усе» не працює: кожен механізм має ціну в складності, і додавати його варто за сигналом із ваших же метрик. Semantic cache — коли точний кеш дає низький hit ratio, а в лозі багато різних формулювань того самого питання; не ставте його «бо звучить розумно» — він дорожчий і ризикує віддати відповідь на схоже, але інше питання. Circuit breaker — коли збої провайдера тривають хвилинами і кожен запит чекає таймаут; при поодиноких 5xx ретраїв із паузою достатньо. LLM-as-judge — коли rule-based кейси вже не ловлять «формально правильно, а по суті погано»; не починайте з judge — він дорогий, недетермінований і сам потребує перевірки. Модель-класифікатор у роутері — коли словник маркерів розповзся по мовах і правки стали регулярними; на двох класах правила дешевші й прозоріші. Індустріальний стек метрик — коли питання пішли за межі однієї системи. А черга approvals у базі — навпаки: не чекайте сигналу, це робиться відразу, урок 8. Принцип: механізм додається під виміряну проблему. Перевірка проста: якщо не можете назвати метрику, яка після впровадження мусить змінитися, — ви не знаєте, чого хочете від механізму. А коли метрика названа — маєте критерій «спрацювало / ні» і право відкотити складність, яка не окупилася. Єдиний виняток — речі, чия відсутність коштує незворотно: durability черги підтверджень, відсутність секретів у коді, ліміт витрат у кабінеті провайдера. Тут сигналом буде вже наслідок.</a:t>
             </a:r>
             <a:endParaRPr lang="en-US" dirty="0"/>
           </a:p>
@@ -874,7 +874,7 @@
           <a:p>
             <a:r>
               <a:rPr lang="en-US" dirty="0"/>
-              <a:t/>
+              <a:t>Курс закінчується на працюючому контурі, але системи не стоять на місці — і всі три напрямки, куди вона поїде, передбачувані. Перше: модель під вами зміниться. Провайдер оновить снапшот, виведе старий з обігу, змінить прайс або ліміти — це не гіпотеза, це графік. Що робить контур: снапшот запінений з уроку 3, тож зміна не приїде сама; перехід на новий — це PR через eval-гейт з уроку 11, тобто деградацію ви побачите до користувачів. Без цих двох речей оновлення провайдера виглядає як «бот раптом почав дурити», і зв'язок із причиною не встановлюється ніколи. Друге: промптів стане більше — під різні маршрути, мови, типи звернень, разом зі схемами інструментів і кейсами. Правило вже у вас є: усе, що впливає на поведінку, лежить у реєстрі з версіями, а не в коді, і зміна пари «промпт + механізм» їде одним релізом. Системи, де промпти розповзлися по коду і документах, потім збирають назад окремим проєктом — він нікому не подобається. Третє: трафік виросте, і вартість виросте нелінійно — не тому, що запитів більше, а тому, що контексти довшають, а довший контекст оплачується в кожному виклику. Захист: облік по зверненню з уроку 4, бюджет із алертом і кеш із метрикою з уроку 5. Найчастіший сюрприз у рахунку — тихе зростання середньої довжини промпта, якого ніхто не міряв. І принцип передачі: система, яку не можна передати іншій людині, не готова. Мінімальний комплект — рівно те, що ви зробили за курс: README, runbook, реєстр, golden dataset, CI-гейт. Якщо новий інженер за пів дня піднімає систему, ламає її навмисно і бачить червоний гейт — контур переданий. Якщо для цього потрібні ви — передана залежність від вас.</a:t>
             </a:r>
             <a:endParaRPr lang="en-US" dirty="0"/>
           </a:p>
@@ -962,7 +962,7 @@
           <a:p>
             <a:r>
               <a:rPr lang="en-US" dirty="0"/>
-              <a:t/>
+              <a:t>Чесний список того, що ми свідомо лишили за дужками — і що тепер, з контуром у руках, береться як надбудова, а не з нуля. Multi-turn діалог і streaming: історія розмови і її вартість, потік токенів, time-to-first-token. RAG — пошук по базі знань як джерело фактів; окремий капстоун сам по собі. Semantic cache — опційна доріжка уроку 5 є, за межами лишився продакшн-рівень: eviction, метрики схожості, окреме сховище. Canary в коді — план з уроку 11, доведений до механізму. Реальний хмарний деплой, autoscaling, мультитенантність — свідомо поза курсом: у нас локальний runtime і план rollout. Secrets і ротація ключів: у курсі ключ живе тільки в gateway, і для одного контуру цього достатньо; далі — сховище секретів, ротація без рестарту, окремі ключі на середовище і тенанта; сигнал — другий провайдер або другий контур. Quota і rate limiting: курс розбирає 429 від провайдера — наступний крок власні ліміти для клієнтів, будується на тому самому unified log; сигнал — перший зовнішній споживач. Fine-tuning: 80 відсотків операційних проблем вирішуються контуром керування, а не вагами; коли варто — стабільний домен, великий трафік, доведена межа промпта; і тоді fine-tuning стає ще одним версіонованим артефактом у тому самому реєстрі і гейті. Спільна риса всіх пунктів: жоден не вимагає переробляти контур. Лог прийме нові поля, роутер — нові критерії, evals — нові кейси, гейт не зміниться взагалі. Саме це і було метою: не набір фіч, а операційна модель, яка витримує ріст. Порада на перший крок: перш ніж додавати нове, підключіть реальний ключ до того, що є, і поживіть тиждень на живій моделі — зрозумієте, який пункт списку вам насправді потрібен першим.</a:t>
             </a:r>
             <a:endParaRPr lang="en-US" dirty="0"/>
           </a:p>
@@ -1050,7 +1050,7 @@
           <a:p>
             <a:r>
               <a:rPr lang="en-US" dirty="0"/>
-              <a:t/>
+              <a:t>Перш ніж перейти до екрана — що саме ви зараз побачите і навіщо. Послідовність із чотирьох кадрів. Перший: чистий клон репозиторію і docker compose up --build — єдиний чесний тест збірки. Другий: повний наскрізний сценарій з блоку 02 — від питання в чаті до гейта, без зупинок і підглядань. Третій: інцидент за ранбуком — серія __fail_503, консоль показує зростання fallback і error rate, користувач бачить заглушку, потім відновлення; таймлайн фіксується, як у постмортемі. Четвертий: KPI-проходка по плитках консолі — кожне число перекладається бізнес-мовою: гроші, користувачі, ризик. Навіщо це все: довести володіння, а не наявність фіч. Збірка відтворювана, інцидент відпрацьовується руками за сценарієм, кожна плитка пояснюється наслідками — це і є різниця між «зробив курсовий» і «володію системою». [Ведучому: сценарій рунбука (rb1/rb2/rb3) не містить ескалації — на KPI-проходці плитка /cost покаже $0.0000 (уся вартість mock сидить у mock-strong), тому перед кадром KPI зробити один ескалаційний запит: «поверніть гроші, терміново». Docker-образи мають бути в кеші, build прогнати ДО запису — інакше пів-хронометражу підуть на прогрес-бари; монтажні точки — на очікуваннях. Контрольне питання кадру «відновлення» НЕ має бути тим, що вже ставилося: воно в кеші і зеленіє навіть при відкритому breaker'і — брати нове питання або скинути кеш перед кадром. Прогін evals лишає pending-заявку в /approvals — перед кадром черги чистий стан через docker compose down -v. Тримати поруч скріншот «точки А» з уроку 1 — фінальне порівняння двох скріншотів.]</a:t>
             </a:r>
             <a:endParaRPr lang="en-US" dirty="0"/>
           </a:p>
@@ -1138,7 +1138,7 @@
           <a:p>
             <a:r>
               <a:rPr lang="en-US" dirty="0"/>
-              <a:t/>
+              <a:t>Фінальна лабораторна — чотири обов'язкові кроки і один опційний. Крок перший: повний прогін. Чистий клон свого репозиторію, docker compose up --build, наскрізний сценарій з блоку 02. Без підглядань: де спіткнулися — там і доопрацювання. Крок другий: інцидент за ранбуком. Серія __fail_503, на консолі fallback і error rate ростуть, користувач бачить заглушку; потім відновлення і підтвердження нормальної роботи. Зафіксуйте таймлайн, як у постмортемі: коли почалося, як виявили, що бачив користувач, коли відпустило. Крок третій: KPI-огляд. Кожну плитку консолі перекладіть бізнес-мовою — що це число означає для грошей, користувачів, ризику. П'ять хвилин, які варті більше за годину технічних деталей. Крок четвертий: свій 30-day план. Начерк для власної команди: що переносите першим і чому. Це не формальність — це найкорисніший артефакт для вашого наступного робочого тижня, і він же ляже в README-розділ ДЗ. І опційний п'ятий: /metrics — експортувати лічильники у Prometheus-форматі і підняти дашборд поверх advanced-профілю. [Ведучому: контрольне питання відновлення на кроці 2 — нове або зі скинутим кешем; для живої плитки вартості перед KPI-оглядом — один ескалаційний запит.]</a:t>
             </a:r>
             <a:endParaRPr lang="en-US" dirty="0"/>
           </a:p>
@@ -1226,7 +1226,7 @@
           <a:p>
             <a:r>
               <a:rPr lang="en-US" dirty="0"/>
-              <a:t/>
+              <a:t>Зафіксуємо, що ми щойно побачили — і що це доводить. Перше: збірка відтворювана. Система піднялася з чистого клону і пройшла наскрізний сценарій — а «чистий клон» це єдиний чесний тест збірки: ментор побачить рівно те, що побачить чистий клон, і демо працює не лише на машині автора. Друге: інцидент — керована процедура, а не паніка. Автоматика відпрацювала сама — fallback, деградація, відновлення; руки за ранбуком лише підтвердили симптом по плитках, переконалися новим питанням і зафіксували таймлайн. Це і є формат постмортема — сьогодні він відпрацьований там, де ставки нульові. Третє: система пояснюється наслідками. Кожна плитка консолі перекладається на гроші, користувачів і ризик, і кожне твердження підкріплене артефактом на екрані — а твердження з доказом коштує вдесятеро дорожче за твердження з ентузіазмом. Разом ці три картинки — і є те «володіння системою», про яке ми говорили на початку: точка Б досягнута, і ви вмієте нею користуватися, лагодити її і захищати її бюджет.</a:t>
             </a:r>
             <a:endParaRPr lang="en-US" dirty="0"/>
           </a:p>
@@ -1314,7 +1314,7 @@
           <a:p>
             <a:r>
               <a:rPr lang="en-US" dirty="0"/>
-              <a:t/>
+              <a:t>Перш ніж перейти до останнього ДЗ — чесна перевірка обов'язкової доріжки, без оцінок. Чотири пункти. Система піднімається з чистого клону і проходить наскрізний сценарій — не «на моїй машині працює», а саме з чистого клону. Інцидент відпрацьований за ранбуком, з таймлайном — не прочитаний, а програний руками. Можу за три хвилини пояснити систему людині без інженерного бекграунду — одне речення проблеми, три-чотири наслідки, один живий доказ. І є начерк 30-day rollout для своєї команди — що переносите першим і чому. Ці чотири пункти — це не просто чек-лист уроку: це рівно те, що перевіряє фінальне ДЗ, ваш зібраний капстоун. Де завагалися — туди і повертайтеся: блок 02 підкаже номер уроку для повторення. Питання — у канал потоку або на Q&amp;A.</a:t>
             </a:r>
             <a:endParaRPr lang="en-US" dirty="0"/>
           </a:p>
@@ -1402,7 +1402,7 @@
           <a:p>
             <a:r>
               <a:rPr lang="en-US" dirty="0"/>
-              <a:t/>
+              <a:t>Чотири способи змазати фінал — усі спостерігалися в реальних капстоунах. Перший: демо, яке працює лише на машині автора. «Чистий клон» — єдиний чесний тест збірки; ментор побачить рівно те, що побачить чистий клон, — жодна локальна змінна, жоден незакомічений файл вас не врятує. Другий: runbook написаний, але не програний. Це література, а не інструмент — прогін дає половину цінності, бо саме на прогоні з'ясовується, що плитка називається інакше і команда вимагає інших прав. Третій: розповідь списком технологій замість списку наслідків. Технології — ваша кухня; наслідки для грошей, користувачів і ризику — спільна мова з тими, хто вирішує про бюджет. Четвертий: «впровадимо все одразу» у своїй команді. Місяць по шару на тиждень б'є квартал грандіозного плану — кожен шар спирається на попередній, і спокуса зробити все одразу закінчується тим, що не зроблено нічого.</a:t>
             </a:r>
             <a:endParaRPr lang="en-US" dirty="0"/>
           </a:p>
@@ -1490,7 +1490,7 @@
           <a:p>
             <a:r>
               <a:rPr lang="en-US" dirty="0"/>
-              <a:t/>
+              <a:t>Домовимось про результат фінального уроку — діями, як завжди. Після сьогоднішнього заняття ви зможете: прогнати свою систему наскрізь із чистого клону — docker compose up --build і повний сценарій без підглядань у нотатки; відпрацювати інцидент за ранбуком — виявити, підтвердити по плитках, дати автоматиці спрацювати і переконатися, що відпустило; зафіксувати таймлайн інциденту у форматі постмортема — механізмами, а не прізвищами; перекласти кожну плитку консолі KPI-мовою — що це число означає для грошей, користувачів і ризику; скласти 30-day rollout для своєї команди — лог, реєстр, evals, гейт, по шару на тиждень; і обрати наступний шар складності за виміряним сигналом із власних метрик, а не за модою. Кожен пункт сьогодні перевіряється руками у фінальній лабі — а перші чотири ще й лягають у ДЗ тижня, яке і є вашим зібраним капстоуном.</a:t>
             </a:r>
             <a:endParaRPr lang="en-US" dirty="0"/>
           </a:p>
@@ -1578,7 +1578,7 @@
           <a:p>
             <a:r>
               <a:rPr lang="en-US" dirty="0"/>
-              <a:t/>
+              <a:t>Останнє ДЗ, і воно ж ваш зібраний капстоун — ДЗ тижня 6: CI-гейт плюс інцидент. Критерії приймання коротко. CI-гейт увімкнений, і в історії Actions видно червоний прогін — регресію — і зелений — фікс. Інцидент-демо з командами відтворення лежить в INCIDENT_RUNBOOK.md, з посиланням із README. README-розділ «30-day rollout» — чотири конкретні кроки перенесення практик у свою команду: це головний transfer-артефакт курсу, і начерк у вас уже є з сьогоднішньої лаби. І система збирається docker compose up --build з чистого клону, всі плитки консолі живі. Повні критерії — у файлі ДЗ тижня. Опційно, без оцінювання: canary-план — розподіл трафіку 90 на 10 між версіями промпта і метрики для promote або rollback; і /metrics із зовнішнім дашбордом поверх advanced-профілю. Це фінальна здача: після неї ваш капстоун — повний production-контур із доказами в CI, ранбуком і планом перенесення в реальну команду.</a:t>
             </a:r>
             <a:endParaRPr lang="en-US" dirty="0"/>
           </a:p>
@@ -1666,7 +1666,7 @@
           <a:p>
             <a:r>
               <a:rPr lang="en-US" dirty="0"/>
-              <a:t/>
+              <a:t>Підсумуємо курс. Точка Б досягнута: той самий екран, той самий mock — різниця між «—» у плитках і живою консоллю лише в контурі керування, який ви написали власноруч. Runbook — це сценарій з чотирьох тактів, і його цінність створюється прогоном, а не написанням. Постмортем розбирає механізми, а не людей: відповідь на «щоб не повторилося» — кейс у датасеті або механізм. Бюджет дають за наслідки з артефактом-доказом, а не за список технологій. І нові шари додаються за виміряним сигналом, а перенесення практик у команду йде по шару на тиждень: лог, реєстр, evals, гейт. Наступний крок — завершити капстоун: ДЗ тижня 6 і є фінальна здача. А далі система у ваших руках: додавайте реальний ключ, підключайте справжніх провайдерів, тягніть практики в робочі проєкти. Контур, який ви збудували, — не навчальний макет, а зменшена копія того, як LLM-системи експлуатують у проді; різниця тільки в масштабі. Механізми переживуть інструменти: рішення — код, кожен виклик лишає слід, якість — число з порогом, незворотне проходить через людину. Дякую за курс — і хай ваші фолбеки ніколи не знадобляться. Але будуть готові.</a:t>
             </a:r>
             <a:endParaRPr lang="en-US" dirty="0"/>
           </a:p>
@@ -1754,7 +1754,7 @@
           <a:p>
             <a:r>
               <a:rPr lang="en-US" dirty="0"/>
-              <a:t/>
+              <a:t>Маршрут фіналу такий. Спершу — де ми опинилися: від трьох рядків коду до контуру, і три вміння, які відрізняють «зробив курсовий» від «володію системою». Далі точка Б — наскрізний сценарій, де кожна ланка відсилає до конкретного уроку: зручна самодіагностика перед фінальним ДЗ. Потім найбільший блок — incident runbook: формат із чотирьох тактів, правило контрольного питання і живий інцидент із таймлайном — ваш перший постмортем із нульовими ставками. Друга половина — про життя після курсу: KPI-мова, за яку дають бюджет; 30-day rollout для вашої команди; опційно — зовнішні дашборди; сигнали, за якими додається наступний шар; що станеться з системою через рік і що свідомо лишилося за дужками. Завершуємо фінальною лабою — прогін, інцидент, KPI-огляд, свій план — і антипатернами фіналу.</a:t>
             </a:r>
             <a:endParaRPr lang="en-US" dirty="0"/>
           </a:p>
@@ -1842,7 +1842,7 @@
           <a:p>
             <a:r>
               <a:rPr lang="en-US" dirty="0"/>
-              <a:t/>
+              <a:t>Домовимось про шість слів. Operating model — спосіб експлуатувати систему: хто що робить, коли і за яким сценарієм; саме це відрізняє зібраний проєкт від системи, якою володіють. Runbook — сценарій дій при відомому симптомі: чотири такти — симптом, підтвердити, дія, переконатися. Постмортем — розбір інциденту після: що сталося, що спрацювало, що змінюємо; про механізми, а не про винних. KPI-мова — переклад інженерних фактів у наслідки для грошей, користувачів і ризику. Rollout-план — порядок, у якому практики переносяться у вашу команду. І dry-run — режим, у якому автоматика проходить повний цикл, але замість дій пише звіт «що я б зробила». Далі кожне побачимо в роботі.</a:t>
             </a:r>
             <a:endParaRPr lang="en-US" dirty="0"/>
           </a:p>
@@ -1930,7 +1930,7 @@
           <a:p>
             <a:r>
               <a:rPr lang="en-US" dirty="0"/>
-              <a:t/>
+              <a:t>Шість тижнів тому у вас було три рядки коду, які викликають модель, — і чотири питання без відповідей: гроші, надійність, якість, видимість. Сьогодні у вас production-контур: routing, cost-облік, кеш, інструменти з HITL, fallback із деградацією — і circuit breaker для тих, хто пішов у опційну доріжку, — мінімальний guardrail на межі з маскуванням PII, повна спостережуваність, eval-гейт у CI. Це і був план — точка Б з першого уроку, до якої ми йшли по шару на урок. Фінальний урок — про три вміння, які відрізняють «зробив курсовий проєкт» від «володію системою». Перше: прогнати все наскрізь — упевнено, відтворювано, з чистого клону, без «зараз, тут треба ще одну змінну». Друге: відпрацювати інцидент за ранбуком — виявити, деградувати, відновити, зафіксувати. Третє: розповісти про систему через наслідки для грошей, користувачів і ризику, а не через список технологій. Чому це не «зайвий» урок: системами не користуються — ними володіють. Різниця проявляється, коли щось ламається і коли треба захистити бюджет. Обидва моменти настануть — готуємось сьогодні.</a:t>
             </a:r>
             <a:endParaRPr lang="en-US" dirty="0"/>
           </a:p>
@@ -2018,7 +2018,7 @@
           <a:p>
             <a:r>
               <a:rPr lang="en-US" dirty="0"/>
-              <a:t/>
+              <a:t>Ось повний шлях, який має проходити ваша система — без зупинок і підглядань у нотатки. Питання приходить у чат, routing обирає модель, кеш або віддає готове, або пропускає далі; відповідь повертається разом із версією промпта, все лягає в лог, а консоль показує долари, p95 і cache-hit. Друга гілка — складніші сценарії: «поверніть гроші» створює заявку в /approvals, approve перетворює її на тікет; __fail_503 запускає fallback, заглушку і відновлення; PR з промптом проходить гейт. Кожна ланка цього ланцюга — конкретний урок курсу: registry — урок 2, routing — 3, вартість — 4, кеш — 5, інструменти — 6, fallback — 7, HITL — 8, консоль — 9, evals — 10, гейт — 11. Це зручна самодіагностика перед фінальним ДЗ: пройдіть сценарій і відмітьте, де спіткнулися, — номер уроку обчислюється автоматично. Ще є час підтягнути. І згадайте картинку з першої лаби: той самий екран, але консоль показує «—», а __fail_503 кладе розмову без плану Б. Точка А і точка Б — буквально два скріншоти одного інтерфейсу. Різниця — не в UI і не в моделі: різниця — це контур керування, який ви написали власноруч. Потримайте обидва скріншоти поруч — це найчесніший підсумок шести тижнів.</a:t>
             </a:r>
             <a:endParaRPr lang="en-US" dirty="0"/>
           </a:p>
@@ -2106,7 +2106,7 @@
           <a:p>
             <a:r>
               <a:rPr lang="en-US" dirty="0"/>
-              <a:t/>
+              <a:t>Артефакт цього блоку — INCIDENT_RUNBOOK.md у корені вашого проєкту; в еталоні тижня він уже лежить як приклад. Головна його якість не в змісті, а у форматі. Runbook — це не опис архітектури і не роздуми про надійність. Це сценарій із чотирьох тактів на кожен симптом. Симптом: що видно? Скарги «бот вибачається», error rate росте. Підтвердити: яка плитка, який лог? На /observability fallback_events росте, у лозі — статуси 503. Дія: що робити? І тут найцікавіше — нічого руками: fallback і деградація вже працюють, треба стежити. Переконатися: як зрозуміти, що відпустило? Нове питання, якого не може бути в кеші, відповідає; fallback перестав рости. Зверніть увагу на третій такт: у добре збудованій системі найчастіша «дія» під час інциденту — переконатися, що автоматика відпрацювала, і не заважати. Руки потрібні там, де автоматики немає: rollback поганого промпта однією командою з уроку 2, вимкнення фічі, комунікація. І принцип, який вартий окремого запам'ятовування: runbook, який жодного разу не проганяли руками, — це література, а не інструмент. Цінність створюється не написанням, а прогоном: саме там з'ясовується, що плитка називається інакше, команда вимагає інших прав, а «очевидний» крок неочевидний о третій ночі.</a:t>
             </a:r>
             <a:endParaRPr lang="en-US" dirty="0"/>
           </a:p>
@@ -2194,7 +2194,7 @@
           <a:p>
             <a:r>
               <a:rPr lang="en-US" dirty="0"/>
-              <a:t/>
+              <a:t>Наш навчальний інцидент повністю відтворюваний — mock падає на замовлення, і це остання суперсила, якою ми користуємось. Дивіться на таймлайн. 10:00 — норма: «Як скинути пароль?» дає нормальну відповідь. 10:02 — інцидент: __fail_503, спроби провайдера падають, користувач бачить ввічливу заглушку, а не 500; на /observability ростуть fallback_events і error rate. 10:05, для опційної доріжки: circuit відкрився, запити не чекають таймаутів, half-open пробує провайдера кожні приблизно п'ять секунд. 10:08 — відновлення: нове питання, якого немає в кеші, дає нормальну відповідь — питання з 10:00 уже в кеші і «зеленіє» навіть під час збою; fallback перестав рости, інцидент закритий. 10:09 — гігієна: скинути кеш, якщо в період збою могли записатися заглушки, — обіцянка з уроку 5, виконуємо. Фіксуйте таймлайн так, як робили б у постмортемі: коли почалося, як виявили, що бачив користувач, коли відпустило. На нашому «інциденті» це виглядає грою — але саме ця гра ставить руки; формат реального постмортема нічим не відрізняється, лише цифри більші і нервів більше. І два питання, які перетворюють хроніку на постмортем. «Що ми зробимо, щоб це не повторилося?» — відповіддю має бути механізм або кейс у датасеті, а не «будемо уважнішими». І «як ми дізналися про інцидент?» — якщо відповідь «зі скарг», у спостережуваності діра: інцидент такого класу має спершу з'являтися на консолі.</a:t>
             </a:r>
             <a:endParaRPr lang="en-US" dirty="0"/>
           </a:p>
@@ -2282,7 +2282,7 @@
           <a:p>
             <a:r>
               <a:rPr lang="en-US" dirty="0"/>
-              <a:t/>
+              <a:t>«Ми використовуємо circuit breaker з half-open probe» — нікому поза командою не цікаво. Це чесна, точна і абсолютно марна фраза для розмови з тими, хто вирішує про бюджет. Перекладаємо кожну плитку консолі бізнес-мовою. Fallback з деградацією — падіння провайдера користувач не помічає. Cache-hit тридцять відсотків — третина запитів безкоштовні й миттєві. Routing mini/strong — дорога модель дістається тільки складним задачам, вартість запиту керована. Eval-гейт у CI — регресія якості фізично не потрапляє в прод. HITL-черга — жодна незворотна дія не виконується без людини. Вартість і бюджет на консолі — витрати видно сьогодні, а не в рахунку через місяць. Сила цих формулювань у тому, що кожне підкріплене артефактом: плиткою консолі, історією CI, чергою approvals. Розповідаючи — показуйте: «падіння не помічає — ось графік інциденту без єдиної 500-ки». Твердження з доказом коштує вдесятеро дорожче за твердження з ентузіазмом. З практики скажу: рішення, які найлегше захищати, — ті, у яких є артефакт-доказ. «Ми зробили HITL-гейт» звучить як витрата; «жодна незворотна дія не виконується без людини, ось черга підтверджень і журнал відхилених» — як керований ризик. Найшвидше «так» отримували другі формулювання — вони перевіряються на екрані за десять секунд. Для «трьох хвилин людині без інженерного бекграунду» структура проста: одне речення проблеми, три-чотири наслідки з таблиці, один живий доказ на екрані. Технічні деталі — тільки у відповідь на питання: хто спитав про circuit breaker, той готовий його почути.</a:t>
             </a:r>
             <a:endParaRPr lang="en-US" dirty="0"/>
           </a:p>
@@ -3594,7 +3594,7 @@
       </p:pic>
       <p:sp>
         <p:nvSpPr>
-          <p:cNvPr id="7" name="Shape 4"/>
+          <p:cNvPr id="8" name="Shape 4"/>
           <p:cNvSpPr/>
           <p:nvPr/>
         </p:nvSpPr>
@@ -3616,7 +3616,7 @@
       </p:sp>
       <p:sp>
         <p:nvSpPr>
-          <p:cNvPr id="8" name="Text 5"/>
+          <p:cNvPr id="9" name="Text 5"/>
           <p:cNvSpPr/>
           <p:nvPr/>
         </p:nvSpPr>
@@ -3655,7 +3655,7 @@
       </p:sp>
       <p:sp>
         <p:nvSpPr>
-          <p:cNvPr id="9" name="Text 6"/>
+          <p:cNvPr id="10" name="Text 6"/>
           <p:cNvSpPr/>
           <p:nvPr/>
         </p:nvSpPr>
@@ -3694,7 +3694,7 @@
       </p:sp>
       <p:sp>
         <p:nvSpPr>
-          <p:cNvPr id="10" name="Shape 7"/>
+          <p:cNvPr id="11" name="Shape 7"/>
           <p:cNvSpPr/>
           <p:nvPr/>
         </p:nvSpPr>
@@ -3721,7 +3721,7 @@
       </p:sp>
       <p:sp>
         <p:nvSpPr>
-          <p:cNvPr id="11" name="Text 8"/>
+          <p:cNvPr id="12" name="Text 8"/>
           <p:cNvSpPr/>
           <p:nvPr/>
         </p:nvSpPr>
@@ -3760,7 +3760,7 @@
       </p:sp>
       <p:sp>
         <p:nvSpPr>
-          <p:cNvPr id="12" name="Text 9"/>
+          <p:cNvPr id="13" name="Text 9"/>
           <p:cNvSpPr/>
           <p:nvPr/>
         </p:nvSpPr>
@@ -3799,7 +3799,7 @@
       </p:sp>
       <p:sp>
         <p:nvSpPr>
-          <p:cNvPr id="13" name="Shape 10"/>
+          <p:cNvPr id="14" name="Shape 10"/>
           <p:cNvSpPr/>
           <p:nvPr/>
         </p:nvSpPr>
@@ -3821,7 +3821,7 @@
       </p:sp>
       <p:sp>
         <p:nvSpPr>
-          <p:cNvPr id="14" name="Text 11"/>
+          <p:cNvPr id="15" name="Text 11"/>
           <p:cNvSpPr/>
           <p:nvPr/>
         </p:nvSpPr>
@@ -3860,7 +3860,7 @@
       </p:sp>
       <p:sp>
         <p:nvSpPr>
-          <p:cNvPr id="15" name="Text 12"/>
+          <p:cNvPr id="16" name="Text 12"/>
           <p:cNvSpPr/>
           <p:nvPr/>
         </p:nvSpPr>
@@ -3899,7 +3899,7 @@
       </p:sp>
       <p:sp>
         <p:nvSpPr>
-          <p:cNvPr id="16" name="Shape 13"/>
+          <p:cNvPr id="17" name="Shape 13"/>
           <p:cNvSpPr/>
           <p:nvPr/>
         </p:nvSpPr>
@@ -3921,7 +3921,7 @@
       </p:sp>
       <p:sp>
         <p:nvSpPr>
-          <p:cNvPr id="17" name="Text 14"/>
+          <p:cNvPr id="18" name="Text 14"/>
           <p:cNvSpPr/>
           <p:nvPr/>
         </p:nvSpPr>
@@ -3960,7 +3960,7 @@
       </p:sp>
       <p:sp>
         <p:nvSpPr>
-          <p:cNvPr id="18" name="Text 15"/>
+          <p:cNvPr id="19" name="Text 15"/>
           <p:cNvSpPr/>
           <p:nvPr/>
         </p:nvSpPr>
@@ -3999,7 +3999,7 @@
       </p:sp>
       <p:sp>
         <p:nvSpPr>
-          <p:cNvPr id="19" name="Shape 16"/>
+          <p:cNvPr id="20" name="Shape 16"/>
           <p:cNvSpPr/>
           <p:nvPr/>
         </p:nvSpPr>
@@ -4021,7 +4021,7 @@
       </p:sp>
       <p:sp>
         <p:nvSpPr>
-          <p:cNvPr id="20" name="Text 17"/>
+          <p:cNvPr id="21" name="Text 17"/>
           <p:cNvSpPr/>
           <p:nvPr/>
         </p:nvSpPr>
@@ -4060,7 +4060,7 @@
       </p:sp>
       <p:sp>
         <p:nvSpPr>
-          <p:cNvPr id="21" name="Text 18"/>
+          <p:cNvPr id="22" name="Text 18"/>
           <p:cNvSpPr/>
           <p:nvPr/>
         </p:nvSpPr>
@@ -4406,7 +4406,7 @@
       </p:pic>
       <p:sp>
         <p:nvSpPr>
-          <p:cNvPr id="9" name="Shape 6"/>
+          <p:cNvPr id="10" name="Shape 6"/>
           <p:cNvSpPr/>
           <p:nvPr/>
         </p:nvSpPr>
@@ -4428,7 +4428,7 @@
       </p:sp>
       <p:sp>
         <p:nvSpPr>
-          <p:cNvPr id="10" name="Text 7"/>
+          <p:cNvPr id="11" name="Text 7"/>
           <p:cNvSpPr/>
           <p:nvPr/>
         </p:nvSpPr>
@@ -4467,7 +4467,7 @@
       </p:sp>
       <p:sp>
         <p:nvSpPr>
-          <p:cNvPr id="11" name="Shape 8"/>
+          <p:cNvPr id="12" name="Shape 8"/>
           <p:cNvSpPr/>
           <p:nvPr/>
         </p:nvSpPr>
@@ -4490,7 +4490,7 @@
       </p:sp>
       <p:sp>
         <p:nvSpPr>
-          <p:cNvPr id="12" name="Shape 9"/>
+          <p:cNvPr id="13" name="Shape 9"/>
           <p:cNvSpPr/>
           <p:nvPr/>
         </p:nvSpPr>
@@ -4510,7 +4510,7 @@
       </p:sp>
       <p:sp>
         <p:nvSpPr>
-          <p:cNvPr id="13" name="Shape 10"/>
+          <p:cNvPr id="14" name="Shape 10"/>
           <p:cNvSpPr/>
           <p:nvPr/>
         </p:nvSpPr>
@@ -4537,7 +4537,7 @@
       </p:sp>
       <p:sp>
         <p:nvSpPr>
-          <p:cNvPr id="14" name="Text 11"/>
+          <p:cNvPr id="15" name="Text 11"/>
           <p:cNvSpPr/>
           <p:nvPr/>
         </p:nvSpPr>
@@ -4576,7 +4576,7 @@
       </p:sp>
       <p:sp>
         <p:nvSpPr>
-          <p:cNvPr id="15" name="Shape 12"/>
+          <p:cNvPr id="16" name="Shape 12"/>
           <p:cNvSpPr/>
           <p:nvPr/>
         </p:nvSpPr>
@@ -4599,7 +4599,7 @@
       </p:sp>
       <p:sp>
         <p:nvSpPr>
-          <p:cNvPr id="16" name="Shape 13"/>
+          <p:cNvPr id="17" name="Shape 13"/>
           <p:cNvSpPr/>
           <p:nvPr/>
         </p:nvSpPr>
@@ -4619,7 +4619,7 @@
       </p:sp>
       <p:sp>
         <p:nvSpPr>
-          <p:cNvPr id="17" name="Shape 14"/>
+          <p:cNvPr id="18" name="Shape 14"/>
           <p:cNvSpPr/>
           <p:nvPr/>
         </p:nvSpPr>
@@ -4641,7 +4641,7 @@
       </p:sp>
       <p:sp>
         <p:nvSpPr>
-          <p:cNvPr id="18" name="Text 15"/>
+          <p:cNvPr id="19" name="Text 15"/>
           <p:cNvSpPr/>
           <p:nvPr/>
         </p:nvSpPr>
@@ -4680,7 +4680,7 @@
       </p:sp>
       <p:sp>
         <p:nvSpPr>
-          <p:cNvPr id="19" name="Shape 16"/>
+          <p:cNvPr id="20" name="Shape 16"/>
           <p:cNvSpPr/>
           <p:nvPr/>
         </p:nvSpPr>
@@ -4707,7 +4707,7 @@
       </p:sp>
       <p:sp>
         <p:nvSpPr>
-          <p:cNvPr id="20" name="Text 17"/>
+          <p:cNvPr id="21" name="Text 17"/>
           <p:cNvSpPr/>
           <p:nvPr/>
         </p:nvSpPr>
@@ -4746,7 +4746,7 @@
       </p:sp>
       <p:sp>
         <p:nvSpPr>
-          <p:cNvPr id="21" name="Text 18"/>
+          <p:cNvPr id="22" name="Text 18"/>
           <p:cNvSpPr/>
           <p:nvPr/>
         </p:nvSpPr>
@@ -4788,7 +4788,7 @@
       </p:sp>
       <p:sp>
         <p:nvSpPr>
-          <p:cNvPr id="22" name="Shape 19"/>
+          <p:cNvPr id="23" name="Shape 19"/>
           <p:cNvSpPr/>
           <p:nvPr/>
         </p:nvSpPr>
@@ -4810,7 +4810,7 @@
       </p:sp>
       <p:sp>
         <p:nvSpPr>
-          <p:cNvPr id="23" name="Text 20"/>
+          <p:cNvPr id="24" name="Text 20"/>
           <p:cNvSpPr/>
           <p:nvPr/>
         </p:nvSpPr>
@@ -4849,7 +4849,7 @@
       </p:sp>
       <p:sp>
         <p:nvSpPr>
-          <p:cNvPr id="24" name="Text 21"/>
+          <p:cNvPr id="25" name="Text 21"/>
           <p:cNvSpPr/>
           <p:nvPr/>
         </p:nvSpPr>
@@ -4891,7 +4891,7 @@
       </p:sp>
       <p:sp>
         <p:nvSpPr>
-          <p:cNvPr id="25" name="Shape 22"/>
+          <p:cNvPr id="26" name="Shape 22"/>
           <p:cNvSpPr/>
           <p:nvPr/>
         </p:nvSpPr>
@@ -4918,7 +4918,7 @@
       </p:sp>
       <p:sp>
         <p:nvSpPr>
-          <p:cNvPr id="26" name="Text 23"/>
+          <p:cNvPr id="27" name="Text 23"/>
           <p:cNvSpPr/>
           <p:nvPr/>
         </p:nvSpPr>
@@ -5124,7 +5124,7 @@
         </p:nvSpPr>
         <p:spPr>
           <a:xfrm>
-            <a:off x="1280160" y="1024128"/>
+            <a:off x="1280160" y="1193140"/>
             <a:ext cx="777240" cy="256032"/>
           </a:xfrm>
           <a:prstGeom prst="roundRect">
@@ -5146,7 +5146,7 @@
         </p:nvSpPr>
         <p:spPr>
           <a:xfrm>
-            <a:off x="1280160" y="1024128"/>
+            <a:off x="1280160" y="1193140"/>
             <a:ext cx="777240" cy="256032"/>
           </a:xfrm>
           <a:prstGeom prst="rect">
@@ -6470,7 +6470,7 @@
       </p:graphicFrame>
       <p:sp>
         <p:nvSpPr>
-          <p:cNvPr id="8" name="Shape 4"/>
+          <p:cNvPr id="9" name="Shape 4"/>
           <p:cNvSpPr/>
           <p:nvPr/>
         </p:nvSpPr>
@@ -6492,7 +6492,7 @@
       </p:sp>
       <p:sp>
         <p:nvSpPr>
-          <p:cNvPr id="9" name="Text 5"/>
+          <p:cNvPr id="10" name="Text 5"/>
           <p:cNvSpPr/>
           <p:nvPr/>
         </p:nvSpPr>
@@ -6531,7 +6531,7 @@
       </p:sp>
       <p:sp>
         <p:nvSpPr>
-          <p:cNvPr id="10" name="Text 6"/>
+          <p:cNvPr id="11" name="Text 6"/>
           <p:cNvSpPr/>
           <p:nvPr/>
         </p:nvSpPr>
@@ -6816,7 +6816,7 @@
       </p:pic>
       <p:sp>
         <p:nvSpPr>
-          <p:cNvPr id="7" name="Shape 4"/>
+          <p:cNvPr id="8" name="Shape 4"/>
           <p:cNvSpPr/>
           <p:nvPr/>
         </p:nvSpPr>
@@ -6838,7 +6838,7 @@
       </p:sp>
       <p:sp>
         <p:nvSpPr>
-          <p:cNvPr id="8" name="Shape 5"/>
+          <p:cNvPr id="9" name="Shape 5"/>
           <p:cNvSpPr/>
           <p:nvPr/>
         </p:nvSpPr>
@@ -6858,7 +6858,7 @@
       </p:sp>
       <p:sp>
         <p:nvSpPr>
-          <p:cNvPr id="9" name="Text 6"/>
+          <p:cNvPr id="10" name="Text 6"/>
           <p:cNvSpPr/>
           <p:nvPr/>
         </p:nvSpPr>
@@ -6897,7 +6897,7 @@
       </p:sp>
       <p:sp>
         <p:nvSpPr>
-          <p:cNvPr id="10" name="Text 7"/>
+          <p:cNvPr id="11" name="Text 7"/>
           <p:cNvSpPr/>
           <p:nvPr/>
         </p:nvSpPr>
@@ -6936,7 +6936,7 @@
       </p:sp>
       <p:sp>
         <p:nvSpPr>
-          <p:cNvPr id="11" name="Text 8"/>
+          <p:cNvPr id="12" name="Text 8"/>
           <p:cNvSpPr/>
           <p:nvPr/>
         </p:nvSpPr>
@@ -6978,7 +6978,7 @@
       </p:sp>
       <p:sp>
         <p:nvSpPr>
-          <p:cNvPr id="12" name="Shape 9"/>
+          <p:cNvPr id="13" name="Shape 9"/>
           <p:cNvSpPr/>
           <p:nvPr/>
         </p:nvSpPr>
@@ -7000,7 +7000,7 @@
       </p:sp>
       <p:sp>
         <p:nvSpPr>
-          <p:cNvPr id="13" name="Shape 10"/>
+          <p:cNvPr id="14" name="Shape 10"/>
           <p:cNvSpPr/>
           <p:nvPr/>
         </p:nvSpPr>
@@ -7020,7 +7020,7 @@
       </p:sp>
       <p:sp>
         <p:nvSpPr>
-          <p:cNvPr id="14" name="Text 11"/>
+          <p:cNvPr id="15" name="Text 11"/>
           <p:cNvSpPr/>
           <p:nvPr/>
         </p:nvSpPr>
@@ -7059,7 +7059,7 @@
       </p:sp>
       <p:sp>
         <p:nvSpPr>
-          <p:cNvPr id="15" name="Text 12"/>
+          <p:cNvPr id="16" name="Text 12"/>
           <p:cNvSpPr/>
           <p:nvPr/>
         </p:nvSpPr>
@@ -7098,7 +7098,7 @@
       </p:sp>
       <p:sp>
         <p:nvSpPr>
-          <p:cNvPr id="16" name="Text 13"/>
+          <p:cNvPr id="17" name="Text 13"/>
           <p:cNvSpPr/>
           <p:nvPr/>
         </p:nvSpPr>
@@ -7140,7 +7140,7 @@
       </p:sp>
       <p:sp>
         <p:nvSpPr>
-          <p:cNvPr id="17" name="Shape 14"/>
+          <p:cNvPr id="18" name="Shape 14"/>
           <p:cNvSpPr/>
           <p:nvPr/>
         </p:nvSpPr>
@@ -7162,7 +7162,7 @@
       </p:sp>
       <p:sp>
         <p:nvSpPr>
-          <p:cNvPr id="18" name="Shape 15"/>
+          <p:cNvPr id="19" name="Shape 15"/>
           <p:cNvSpPr/>
           <p:nvPr/>
         </p:nvSpPr>
@@ -7182,7 +7182,7 @@
       </p:sp>
       <p:sp>
         <p:nvSpPr>
-          <p:cNvPr id="19" name="Text 16"/>
+          <p:cNvPr id="20" name="Text 16"/>
           <p:cNvSpPr/>
           <p:nvPr/>
         </p:nvSpPr>
@@ -7221,7 +7221,7 @@
       </p:sp>
       <p:sp>
         <p:nvSpPr>
-          <p:cNvPr id="20" name="Text 17"/>
+          <p:cNvPr id="21" name="Text 17"/>
           <p:cNvSpPr/>
           <p:nvPr/>
         </p:nvSpPr>
@@ -7260,7 +7260,7 @@
       </p:sp>
       <p:sp>
         <p:nvSpPr>
-          <p:cNvPr id="21" name="Text 18"/>
+          <p:cNvPr id="22" name="Text 18"/>
           <p:cNvSpPr/>
           <p:nvPr/>
         </p:nvSpPr>
@@ -7302,7 +7302,7 @@
       </p:sp>
       <p:sp>
         <p:nvSpPr>
-          <p:cNvPr id="22" name="Shape 19"/>
+          <p:cNvPr id="23" name="Shape 19"/>
           <p:cNvSpPr/>
           <p:nvPr/>
         </p:nvSpPr>
@@ -7324,7 +7324,7 @@
       </p:sp>
       <p:sp>
         <p:nvSpPr>
-          <p:cNvPr id="23" name="Text 20"/>
+          <p:cNvPr id="24" name="Text 20"/>
           <p:cNvSpPr/>
           <p:nvPr/>
         </p:nvSpPr>
@@ -7363,7 +7363,7 @@
       </p:sp>
       <p:sp>
         <p:nvSpPr>
-          <p:cNvPr id="24" name="Text 21"/>
+          <p:cNvPr id="25" name="Text 21"/>
           <p:cNvSpPr/>
           <p:nvPr/>
         </p:nvSpPr>
@@ -7569,7 +7569,7 @@
         </p:nvSpPr>
         <p:spPr>
           <a:xfrm>
-            <a:off x="1280160" y="1024128"/>
+            <a:off x="1280160" y="1193140"/>
             <a:ext cx="777240" cy="256032"/>
           </a:xfrm>
           <a:prstGeom prst="roundRect">
@@ -7591,7 +7591,7 @@
         </p:nvSpPr>
         <p:spPr>
           <a:xfrm>
-            <a:off x="1280160" y="1024128"/>
+            <a:off x="1280160" y="1193140"/>
             <a:ext cx="777240" cy="256032"/>
           </a:xfrm>
           <a:prstGeom prst="rect">
@@ -7648,7 +7648,7 @@
       </p:pic>
       <p:sp>
         <p:nvSpPr>
-          <p:cNvPr id="7" name="Shape 4"/>
+          <p:cNvPr id="8" name="Shape 4"/>
           <p:cNvSpPr/>
           <p:nvPr/>
         </p:nvSpPr>
@@ -7675,7 +7675,7 @@
       </p:sp>
       <p:sp>
         <p:nvSpPr>
-          <p:cNvPr id="8" name="Text 5"/>
+          <p:cNvPr id="9" name="Text 5"/>
           <p:cNvSpPr/>
           <p:nvPr/>
         </p:nvSpPr>
@@ -7714,7 +7714,7 @@
       </p:sp>
       <p:sp>
         <p:nvSpPr>
-          <p:cNvPr id="9" name="Shape 6"/>
+          <p:cNvPr id="10" name="Shape 6"/>
           <p:cNvSpPr/>
           <p:nvPr/>
         </p:nvSpPr>
@@ -7741,7 +7741,7 @@
       </p:sp>
       <p:sp>
         <p:nvSpPr>
-          <p:cNvPr id="10" name="Text 7"/>
+          <p:cNvPr id="11" name="Text 7"/>
           <p:cNvSpPr/>
           <p:nvPr/>
         </p:nvSpPr>
@@ -7780,7 +7780,7 @@
       </p:sp>
       <p:sp>
         <p:nvSpPr>
-          <p:cNvPr id="11" name="Shape 8"/>
+          <p:cNvPr id="12" name="Shape 8"/>
           <p:cNvSpPr/>
           <p:nvPr/>
         </p:nvSpPr>
@@ -7807,7 +7807,7 @@
       </p:sp>
       <p:sp>
         <p:nvSpPr>
-          <p:cNvPr id="12" name="Text 9"/>
+          <p:cNvPr id="13" name="Text 9"/>
           <p:cNvSpPr/>
           <p:nvPr/>
         </p:nvSpPr>
@@ -7846,7 +7846,7 @@
       </p:sp>
       <p:sp>
         <p:nvSpPr>
-          <p:cNvPr id="13" name="Shape 10"/>
+          <p:cNvPr id="14" name="Shape 10"/>
           <p:cNvSpPr/>
           <p:nvPr/>
         </p:nvSpPr>
@@ -7873,7 +7873,7 @@
       </p:sp>
       <p:sp>
         <p:nvSpPr>
-          <p:cNvPr id="14" name="Text 11"/>
+          <p:cNvPr id="15" name="Text 11"/>
           <p:cNvSpPr/>
           <p:nvPr/>
         </p:nvSpPr>
@@ -7912,7 +7912,7 @@
       </p:sp>
       <p:sp>
         <p:nvSpPr>
-          <p:cNvPr id="15" name="Shape 12"/>
+          <p:cNvPr id="16" name="Shape 12"/>
           <p:cNvSpPr/>
           <p:nvPr/>
         </p:nvSpPr>
@@ -7939,7 +7939,7 @@
       </p:sp>
       <p:sp>
         <p:nvSpPr>
-          <p:cNvPr id="16" name="Text 13"/>
+          <p:cNvPr id="17" name="Text 13"/>
           <p:cNvSpPr/>
           <p:nvPr/>
         </p:nvSpPr>
@@ -7978,7 +7978,7 @@
       </p:sp>
       <p:sp>
         <p:nvSpPr>
-          <p:cNvPr id="17" name="Shape 14"/>
+          <p:cNvPr id="18" name="Shape 14"/>
           <p:cNvSpPr/>
           <p:nvPr/>
         </p:nvSpPr>
@@ -8005,7 +8005,7 @@
       </p:sp>
       <p:sp>
         <p:nvSpPr>
-          <p:cNvPr id="18" name="Text 15"/>
+          <p:cNvPr id="19" name="Text 15"/>
           <p:cNvSpPr/>
           <p:nvPr/>
         </p:nvSpPr>
@@ -8044,7 +8044,7 @@
       </p:sp>
       <p:sp>
         <p:nvSpPr>
-          <p:cNvPr id="19" name="Shape 16"/>
+          <p:cNvPr id="20" name="Shape 16"/>
           <p:cNvSpPr/>
           <p:nvPr/>
         </p:nvSpPr>
@@ -8071,7 +8071,7 @@
       </p:sp>
       <p:sp>
         <p:nvSpPr>
-          <p:cNvPr id="20" name="Text 17"/>
+          <p:cNvPr id="21" name="Text 17"/>
           <p:cNvSpPr/>
           <p:nvPr/>
         </p:nvSpPr>
@@ -8110,7 +8110,7 @@
       </p:sp>
       <p:sp>
         <p:nvSpPr>
-          <p:cNvPr id="21" name="Shape 18"/>
+          <p:cNvPr id="22" name="Shape 18"/>
           <p:cNvSpPr/>
           <p:nvPr/>
         </p:nvSpPr>
@@ -8137,7 +8137,7 @@
       </p:sp>
       <p:sp>
         <p:nvSpPr>
-          <p:cNvPr id="22" name="Text 19"/>
+          <p:cNvPr id="23" name="Text 19"/>
           <p:cNvSpPr/>
           <p:nvPr/>
         </p:nvSpPr>
@@ -8176,7 +8176,7 @@
       </p:sp>
       <p:sp>
         <p:nvSpPr>
-          <p:cNvPr id="23" name="Shape 20"/>
+          <p:cNvPr id="24" name="Shape 20"/>
           <p:cNvSpPr/>
           <p:nvPr/>
         </p:nvSpPr>
@@ -8198,7 +8198,7 @@
       </p:sp>
       <p:sp>
         <p:nvSpPr>
-          <p:cNvPr id="24" name="Text 21"/>
+          <p:cNvPr id="25" name="Text 21"/>
           <p:cNvSpPr/>
           <p:nvPr/>
         </p:nvSpPr>
@@ -8444,7 +8444,7 @@
       </p:pic>
       <p:sp>
         <p:nvSpPr>
-          <p:cNvPr id="6" name="Shape 3"/>
+          <p:cNvPr id="7" name="Shape 3"/>
           <p:cNvSpPr/>
           <p:nvPr/>
         </p:nvSpPr>
@@ -8466,7 +8466,7 @@
       </p:sp>
       <p:sp>
         <p:nvSpPr>
-          <p:cNvPr id="7" name="Shape 4"/>
+          <p:cNvPr id="8" name="Shape 4"/>
           <p:cNvSpPr/>
           <p:nvPr/>
         </p:nvSpPr>
@@ -8486,7 +8486,7 @@
       </p:sp>
       <p:sp>
         <p:nvSpPr>
-          <p:cNvPr id="8" name="Text 5"/>
+          <p:cNvPr id="9" name="Text 5"/>
           <p:cNvSpPr/>
           <p:nvPr/>
         </p:nvSpPr>
@@ -8525,7 +8525,7 @@
       </p:sp>
       <p:sp>
         <p:nvSpPr>
-          <p:cNvPr id="9" name="Text 6"/>
+          <p:cNvPr id="10" name="Text 6"/>
           <p:cNvSpPr/>
           <p:nvPr/>
         </p:nvSpPr>
@@ -8564,7 +8564,7 @@
       </p:sp>
       <p:sp>
         <p:nvSpPr>
-          <p:cNvPr id="10" name="Text 7"/>
+          <p:cNvPr id="11" name="Text 7"/>
           <p:cNvSpPr/>
           <p:nvPr/>
         </p:nvSpPr>
@@ -8606,7 +8606,7 @@
       </p:sp>
       <p:sp>
         <p:nvSpPr>
-          <p:cNvPr id="11" name="Shape 8"/>
+          <p:cNvPr id="12" name="Shape 8"/>
           <p:cNvSpPr/>
           <p:nvPr/>
         </p:nvSpPr>
@@ -8628,7 +8628,7 @@
       </p:sp>
       <p:sp>
         <p:nvSpPr>
-          <p:cNvPr id="12" name="Shape 9"/>
+          <p:cNvPr id="13" name="Shape 9"/>
           <p:cNvSpPr/>
           <p:nvPr/>
         </p:nvSpPr>
@@ -8648,7 +8648,7 @@
       </p:sp>
       <p:sp>
         <p:nvSpPr>
-          <p:cNvPr id="13" name="Text 10"/>
+          <p:cNvPr id="14" name="Text 10"/>
           <p:cNvSpPr/>
           <p:nvPr/>
         </p:nvSpPr>
@@ -8687,7 +8687,7 @@
       </p:sp>
       <p:sp>
         <p:nvSpPr>
-          <p:cNvPr id="14" name="Text 11"/>
+          <p:cNvPr id="15" name="Text 11"/>
           <p:cNvSpPr/>
           <p:nvPr/>
         </p:nvSpPr>
@@ -8726,7 +8726,7 @@
       </p:sp>
       <p:sp>
         <p:nvSpPr>
-          <p:cNvPr id="15" name="Text 12"/>
+          <p:cNvPr id="16" name="Text 12"/>
           <p:cNvSpPr/>
           <p:nvPr/>
         </p:nvSpPr>
@@ -8768,7 +8768,7 @@
       </p:sp>
       <p:sp>
         <p:nvSpPr>
-          <p:cNvPr id="16" name="Shape 13"/>
+          <p:cNvPr id="17" name="Shape 13"/>
           <p:cNvSpPr/>
           <p:nvPr/>
         </p:nvSpPr>
@@ -8790,7 +8790,7 @@
       </p:sp>
       <p:sp>
         <p:nvSpPr>
-          <p:cNvPr id="17" name="Shape 14"/>
+          <p:cNvPr id="18" name="Shape 14"/>
           <p:cNvSpPr/>
           <p:nvPr/>
         </p:nvSpPr>
@@ -8810,7 +8810,7 @@
       </p:sp>
       <p:sp>
         <p:nvSpPr>
-          <p:cNvPr id="18" name="Text 15"/>
+          <p:cNvPr id="19" name="Text 15"/>
           <p:cNvSpPr/>
           <p:nvPr/>
         </p:nvSpPr>
@@ -8849,7 +8849,7 @@
       </p:sp>
       <p:sp>
         <p:nvSpPr>
-          <p:cNvPr id="19" name="Text 16"/>
+          <p:cNvPr id="20" name="Text 16"/>
           <p:cNvSpPr/>
           <p:nvPr/>
         </p:nvSpPr>
@@ -8888,7 +8888,7 @@
       </p:sp>
       <p:sp>
         <p:nvSpPr>
-          <p:cNvPr id="20" name="Text 17"/>
+          <p:cNvPr id="21" name="Text 17"/>
           <p:cNvSpPr/>
           <p:nvPr/>
         </p:nvSpPr>
@@ -8930,7 +8930,7 @@
       </p:sp>
       <p:sp>
         <p:nvSpPr>
-          <p:cNvPr id="21" name="Shape 18"/>
+          <p:cNvPr id="22" name="Shape 18"/>
           <p:cNvSpPr/>
           <p:nvPr/>
         </p:nvSpPr>
@@ -8952,7 +8952,7 @@
       </p:sp>
       <p:sp>
         <p:nvSpPr>
-          <p:cNvPr id="22" name="Shape 19"/>
+          <p:cNvPr id="23" name="Shape 19"/>
           <p:cNvSpPr/>
           <p:nvPr/>
         </p:nvSpPr>
@@ -8972,7 +8972,7 @@
       </p:sp>
       <p:sp>
         <p:nvSpPr>
-          <p:cNvPr id="23" name="Text 20"/>
+          <p:cNvPr id="24" name="Text 20"/>
           <p:cNvSpPr/>
           <p:nvPr/>
         </p:nvSpPr>
@@ -9011,7 +9011,7 @@
       </p:sp>
       <p:sp>
         <p:nvSpPr>
-          <p:cNvPr id="24" name="Text 21"/>
+          <p:cNvPr id="25" name="Text 21"/>
           <p:cNvSpPr/>
           <p:nvPr/>
         </p:nvSpPr>
@@ -9050,7 +9050,7 @@
       </p:sp>
       <p:sp>
         <p:nvSpPr>
-          <p:cNvPr id="25" name="Text 22"/>
+          <p:cNvPr id="26" name="Text 22"/>
           <p:cNvSpPr/>
           <p:nvPr/>
         </p:nvSpPr>
@@ -9092,7 +9092,7 @@
       </p:sp>
       <p:sp>
         <p:nvSpPr>
-          <p:cNvPr id="26" name="Shape 23"/>
+          <p:cNvPr id="27" name="Shape 23"/>
           <p:cNvSpPr/>
           <p:nvPr/>
         </p:nvSpPr>
@@ -9114,7 +9114,7 @@
       </p:sp>
       <p:sp>
         <p:nvSpPr>
-          <p:cNvPr id="27" name="Text 24"/>
+          <p:cNvPr id="28" name="Text 24"/>
           <p:cNvSpPr/>
           <p:nvPr/>
         </p:nvSpPr>
@@ -9153,7 +9153,7 @@
       </p:sp>
       <p:sp>
         <p:nvSpPr>
-          <p:cNvPr id="28" name="Text 25"/>
+          <p:cNvPr id="29" name="Text 25"/>
           <p:cNvSpPr/>
           <p:nvPr/>
         </p:nvSpPr>
@@ -9399,7 +9399,7 @@
       </p:pic>
       <p:sp>
         <p:nvSpPr>
-          <p:cNvPr id="6" name="Shape 3"/>
+          <p:cNvPr id="7" name="Shape 3"/>
           <p:cNvSpPr/>
           <p:nvPr/>
         </p:nvSpPr>
@@ -9419,7 +9419,7 @@
       </p:sp>
       <p:sp>
         <p:nvSpPr>
-          <p:cNvPr id="7" name="Text 4"/>
+          <p:cNvPr id="8" name="Text 4"/>
           <p:cNvSpPr/>
           <p:nvPr/>
         </p:nvSpPr>
@@ -9458,7 +9458,7 @@
       </p:sp>
       <p:sp>
         <p:nvSpPr>
-          <p:cNvPr id="8" name="Text 5"/>
+          <p:cNvPr id="9" name="Text 5"/>
           <p:cNvSpPr/>
           <p:nvPr/>
         </p:nvSpPr>
@@ -9511,7 +9511,7 @@
       </p:sp>
       <p:sp>
         <p:nvSpPr>
-          <p:cNvPr id="9" name="Shape 6"/>
+          <p:cNvPr id="10" name="Shape 6"/>
           <p:cNvSpPr/>
           <p:nvPr/>
         </p:nvSpPr>
@@ -9531,7 +9531,7 @@
       </p:sp>
       <p:sp>
         <p:nvSpPr>
-          <p:cNvPr id="10" name="Text 7"/>
+          <p:cNvPr id="11" name="Text 7"/>
           <p:cNvSpPr/>
           <p:nvPr/>
         </p:nvSpPr>
@@ -9570,7 +9570,7 @@
       </p:sp>
       <p:sp>
         <p:nvSpPr>
-          <p:cNvPr id="11" name="Text 8"/>
+          <p:cNvPr id="12" name="Text 8"/>
           <p:cNvSpPr/>
           <p:nvPr/>
         </p:nvSpPr>
@@ -9623,7 +9623,7 @@
       </p:sp>
       <p:sp>
         <p:nvSpPr>
-          <p:cNvPr id="12" name="Shape 9"/>
+          <p:cNvPr id="13" name="Shape 9"/>
           <p:cNvSpPr/>
           <p:nvPr/>
         </p:nvSpPr>
@@ -9643,7 +9643,7 @@
       </p:sp>
       <p:sp>
         <p:nvSpPr>
-          <p:cNvPr id="13" name="Text 10"/>
+          <p:cNvPr id="14" name="Text 10"/>
           <p:cNvSpPr/>
           <p:nvPr/>
         </p:nvSpPr>
@@ -9682,7 +9682,7 @@
       </p:sp>
       <p:sp>
         <p:nvSpPr>
-          <p:cNvPr id="14" name="Text 11"/>
+          <p:cNvPr id="15" name="Text 11"/>
           <p:cNvSpPr/>
           <p:nvPr/>
         </p:nvSpPr>
@@ -9735,7 +9735,7 @@
       </p:sp>
       <p:sp>
         <p:nvSpPr>
-          <p:cNvPr id="15" name="Shape 12"/>
+          <p:cNvPr id="16" name="Shape 12"/>
           <p:cNvSpPr/>
           <p:nvPr/>
         </p:nvSpPr>
@@ -9755,7 +9755,7 @@
       </p:sp>
       <p:sp>
         <p:nvSpPr>
-          <p:cNvPr id="16" name="Text 13"/>
+          <p:cNvPr id="17" name="Text 13"/>
           <p:cNvSpPr/>
           <p:nvPr/>
         </p:nvSpPr>
@@ -9794,7 +9794,7 @@
       </p:sp>
       <p:sp>
         <p:nvSpPr>
-          <p:cNvPr id="17" name="Text 14"/>
+          <p:cNvPr id="18" name="Text 14"/>
           <p:cNvSpPr/>
           <p:nvPr/>
         </p:nvSpPr>
@@ -9847,7 +9847,7 @@
       </p:sp>
       <p:sp>
         <p:nvSpPr>
-          <p:cNvPr id="18" name="Shape 15"/>
+          <p:cNvPr id="19" name="Shape 15"/>
           <p:cNvSpPr/>
           <p:nvPr/>
         </p:nvSpPr>
@@ -9867,7 +9867,7 @@
       </p:sp>
       <p:sp>
         <p:nvSpPr>
-          <p:cNvPr id="19" name="Text 16"/>
+          <p:cNvPr id="20" name="Text 16"/>
           <p:cNvSpPr/>
           <p:nvPr/>
         </p:nvSpPr>
@@ -9906,7 +9906,7 @@
       </p:sp>
       <p:sp>
         <p:nvSpPr>
-          <p:cNvPr id="20" name="Text 17"/>
+          <p:cNvPr id="21" name="Text 17"/>
           <p:cNvSpPr/>
           <p:nvPr/>
         </p:nvSpPr>
@@ -10163,7 +10163,7 @@
       </p:pic>
       <p:sp>
         <p:nvSpPr>
-          <p:cNvPr id="6" name="Shape 3"/>
+          <p:cNvPr id="7" name="Shape 3"/>
           <p:cNvSpPr/>
           <p:nvPr/>
         </p:nvSpPr>
@@ -10185,7 +10185,7 @@
       </p:sp>
       <p:sp>
         <p:nvSpPr>
-          <p:cNvPr id="7" name="Text 4"/>
+          <p:cNvPr id="8" name="Text 4"/>
           <p:cNvSpPr/>
           <p:nvPr/>
         </p:nvSpPr>
@@ -10224,7 +10224,7 @@
       </p:sp>
       <p:sp>
         <p:nvSpPr>
-          <p:cNvPr id="8" name="Text 5"/>
+          <p:cNvPr id="9" name="Text 5"/>
           <p:cNvSpPr/>
           <p:nvPr/>
         </p:nvSpPr>
@@ -10266,7 +10266,7 @@
       </p:sp>
       <p:sp>
         <p:nvSpPr>
-          <p:cNvPr id="9" name="Shape 6"/>
+          <p:cNvPr id="10" name="Shape 6"/>
           <p:cNvSpPr/>
           <p:nvPr/>
         </p:nvSpPr>
@@ -10288,7 +10288,7 @@
       </p:sp>
       <p:sp>
         <p:nvSpPr>
-          <p:cNvPr id="10" name="Text 7"/>
+          <p:cNvPr id="11" name="Text 7"/>
           <p:cNvSpPr/>
           <p:nvPr/>
         </p:nvSpPr>
@@ -10327,7 +10327,7 @@
       </p:sp>
       <p:sp>
         <p:nvSpPr>
-          <p:cNvPr id="11" name="Text 8"/>
+          <p:cNvPr id="12" name="Text 8"/>
           <p:cNvSpPr/>
           <p:nvPr/>
         </p:nvSpPr>
@@ -10369,7 +10369,7 @@
       </p:sp>
       <p:sp>
         <p:nvSpPr>
-          <p:cNvPr id="12" name="Shape 9"/>
+          <p:cNvPr id="13" name="Shape 9"/>
           <p:cNvSpPr/>
           <p:nvPr/>
         </p:nvSpPr>
@@ -10396,7 +10396,7 @@
       </p:sp>
       <p:sp>
         <p:nvSpPr>
-          <p:cNvPr id="13" name="Text 10"/>
+          <p:cNvPr id="14" name="Text 10"/>
           <p:cNvSpPr/>
           <p:nvPr/>
         </p:nvSpPr>
@@ -10435,7 +10435,7 @@
       </p:sp>
       <p:sp>
         <p:nvSpPr>
-          <p:cNvPr id="14" name="Text 11"/>
+          <p:cNvPr id="15" name="Text 11"/>
           <p:cNvSpPr/>
           <p:nvPr/>
         </p:nvSpPr>
@@ -10477,7 +10477,7 @@
       </p:sp>
       <p:sp>
         <p:nvSpPr>
-          <p:cNvPr id="15" name="Shape 12"/>
+          <p:cNvPr id="16" name="Shape 12"/>
           <p:cNvSpPr/>
           <p:nvPr/>
         </p:nvSpPr>
@@ -10504,7 +10504,7 @@
       </p:sp>
       <p:sp>
         <p:nvSpPr>
-          <p:cNvPr id="16" name="Text 13"/>
+          <p:cNvPr id="17" name="Text 13"/>
           <p:cNvSpPr/>
           <p:nvPr/>
         </p:nvSpPr>
@@ -10750,7 +10750,7 @@
       </p:pic>
       <p:sp>
         <p:nvSpPr>
-          <p:cNvPr id="6" name="Shape 3"/>
+          <p:cNvPr id="7" name="Shape 3"/>
           <p:cNvSpPr/>
           <p:nvPr/>
         </p:nvSpPr>
@@ -10777,7 +10777,7 @@
       </p:sp>
       <p:sp>
         <p:nvSpPr>
-          <p:cNvPr id="7" name="Shape 4"/>
+          <p:cNvPr id="8" name="Shape 4"/>
           <p:cNvSpPr/>
           <p:nvPr/>
         </p:nvSpPr>
@@ -10804,14 +10804,54 @@
       </p:sp>
       <p:sp>
         <p:nvSpPr>
-          <p:cNvPr id="8" name="Text 5"/>
-          <p:cNvSpPr/>
-          <p:nvPr/>
-        </p:nvSpPr>
-        <p:spPr>
-          <a:xfrm>
-            <a:off x="978408" y="2157984"/>
-            <a:ext cx="256032" cy="256032"/>
+          <p:cNvPr id="9" name="Shape 5"/>
+          <p:cNvSpPr/>
+          <p:nvPr/>
+        </p:nvSpPr>
+        <p:spPr>
+          <a:xfrm rot="2700000">
+            <a:off x="1041227" y="2297430"/>
+            <a:ext cx="58156" cy="27432"/>
+          </a:xfrm>
+          <a:prstGeom prst="rect">
+            <a:avLst/>
+          </a:prstGeom>
+          <a:solidFill>
+            <a:srgbClr val="5A05F4"/>
+          </a:solidFill>
+          <a:ln/>
+        </p:spPr>
+      </p:sp>
+      <p:sp>
+        <p:nvSpPr>
+          <p:cNvPr id="10" name="Shape 6"/>
+          <p:cNvSpPr/>
+          <p:nvPr/>
+        </p:nvSpPr>
+        <p:spPr>
+          <a:xfrm rot="-3000000">
+            <a:off x="1069025" y="2271370"/>
+            <a:ext cx="121432" cy="27432"/>
+          </a:xfrm>
+          <a:prstGeom prst="rect">
+            <a:avLst/>
+          </a:prstGeom>
+          <a:solidFill>
+            <a:srgbClr val="5A05F4"/>
+          </a:solidFill>
+          <a:ln/>
+        </p:spPr>
+      </p:sp>
+      <p:sp>
+        <p:nvSpPr>
+          <p:cNvPr id="11" name="Text 7"/>
+          <p:cNvSpPr/>
+          <p:nvPr/>
+        </p:nvSpPr>
+        <p:spPr>
+          <a:xfrm>
+            <a:off x="1362456" y="2103120"/>
+            <a:ext cx="4617720" cy="384048"/>
           </a:xfrm>
           <a:prstGeom prst="rect">
             <a:avLst/>
@@ -10823,57 +10863,18 @@
           <a:bodyPr wrap="square" lIns="0" tIns="0" rIns="0" bIns="0" rtlCol="0" anchor="ctr"/>
           <a:lstStyle/>
           <a:p>
-            <a:pPr algn="ctr" indent="0" marL="0">
-              <a:buNone/>
-            </a:pPr>
-            <a:r>
-              <a:rPr lang="en-US" sz="1000" b="1" dirty="0">
-                <a:solidFill>
-                  <a:srgbClr val="5A05F4"/>
+            <a:pPr indent="0" marL="0">
+              <a:buNone/>
+            </a:pPr>
+            <a:r>
+              <a:rPr lang="en-US" sz="1250" dirty="0">
+                <a:solidFill>
+                  <a:srgbClr val="111318"/>
                 </a:solidFill>
                 <a:latin typeface="Montserrat" pitchFamily="34" charset="0"/>
                 <a:ea typeface="Montserrat" pitchFamily="34" charset="-122"/>
                 <a:cs typeface="Montserrat" pitchFamily="34" charset="-120"/>
               </a:rPr>
-              <a:t>✓</a:t>
-            </a:r>
-            <a:endParaRPr lang="en-US" sz="1000" dirty="0"/>
-          </a:p>
-        </p:txBody>
-      </p:sp>
-      <p:sp>
-        <p:nvSpPr>
-          <p:cNvPr id="9" name="Text 6"/>
-          <p:cNvSpPr/>
-          <p:nvPr/>
-        </p:nvSpPr>
-        <p:spPr>
-          <a:xfrm>
-            <a:off x="1362456" y="2103120"/>
-            <a:ext cx="4617720" cy="384048"/>
-          </a:xfrm>
-          <a:prstGeom prst="rect">
-            <a:avLst/>
-          </a:prstGeom>
-          <a:noFill/>
-          <a:ln/>
-        </p:spPr>
-        <p:txBody>
-          <a:bodyPr wrap="square" lIns="0" tIns="0" rIns="0" bIns="0" rtlCol="0" anchor="ctr"/>
-          <a:lstStyle/>
-          <a:p>
-            <a:pPr indent="0" marL="0">
-              <a:buNone/>
-            </a:pPr>
-            <a:r>
-              <a:rPr lang="en-US" sz="1250" dirty="0">
-                <a:solidFill>
-                  <a:srgbClr val="111318"/>
-                </a:solidFill>
-                <a:latin typeface="Montserrat" pitchFamily="34" charset="0"/>
-                <a:ea typeface="Montserrat" pitchFamily="34" charset="-122"/>
-                <a:cs typeface="Montserrat" pitchFamily="34" charset="-120"/>
-              </a:rPr>
               <a:t>система піднімається з чистого клону</a:t>
             </a:r>
             <a:endParaRPr lang="en-US" sz="1250" dirty="0"/>
@@ -10882,7 +10883,7 @@
       </p:sp>
       <p:sp>
         <p:nvSpPr>
-          <p:cNvPr id="10" name="Shape 7"/>
+          <p:cNvPr id="12" name="Shape 8"/>
           <p:cNvSpPr/>
           <p:nvPr/>
         </p:nvSpPr>
@@ -10909,14 +10910,54 @@
       </p:sp>
       <p:sp>
         <p:nvSpPr>
-          <p:cNvPr id="11" name="Text 8"/>
-          <p:cNvSpPr/>
-          <p:nvPr/>
-        </p:nvSpPr>
-        <p:spPr>
-          <a:xfrm>
-            <a:off x="978408" y="2724912"/>
-            <a:ext cx="256032" cy="256032"/>
+          <p:cNvPr id="13" name="Shape 9"/>
+          <p:cNvSpPr/>
+          <p:nvPr/>
+        </p:nvSpPr>
+        <p:spPr>
+          <a:xfrm rot="2700000">
+            <a:off x="1041227" y="2864358"/>
+            <a:ext cx="58156" cy="27432"/>
+          </a:xfrm>
+          <a:prstGeom prst="rect">
+            <a:avLst/>
+          </a:prstGeom>
+          <a:solidFill>
+            <a:srgbClr val="5A05F4"/>
+          </a:solidFill>
+          <a:ln/>
+        </p:spPr>
+      </p:sp>
+      <p:sp>
+        <p:nvSpPr>
+          <p:cNvPr id="14" name="Shape 10"/>
+          <p:cNvSpPr/>
+          <p:nvPr/>
+        </p:nvSpPr>
+        <p:spPr>
+          <a:xfrm rot="-3000000">
+            <a:off x="1069025" y="2838298"/>
+            <a:ext cx="121432" cy="27432"/>
+          </a:xfrm>
+          <a:prstGeom prst="rect">
+            <a:avLst/>
+          </a:prstGeom>
+          <a:solidFill>
+            <a:srgbClr val="5A05F4"/>
+          </a:solidFill>
+          <a:ln/>
+        </p:spPr>
+      </p:sp>
+      <p:sp>
+        <p:nvSpPr>
+          <p:cNvPr id="15" name="Text 11"/>
+          <p:cNvSpPr/>
+          <p:nvPr/>
+        </p:nvSpPr>
+        <p:spPr>
+          <a:xfrm>
+            <a:off x="1362456" y="2670048"/>
+            <a:ext cx="4617720" cy="384048"/>
           </a:xfrm>
           <a:prstGeom prst="rect">
             <a:avLst/>
@@ -10928,57 +10969,18 @@
           <a:bodyPr wrap="square" lIns="0" tIns="0" rIns="0" bIns="0" rtlCol="0" anchor="ctr"/>
           <a:lstStyle/>
           <a:p>
-            <a:pPr algn="ctr" indent="0" marL="0">
-              <a:buNone/>
-            </a:pPr>
-            <a:r>
-              <a:rPr lang="en-US" sz="1000" b="1" dirty="0">
-                <a:solidFill>
-                  <a:srgbClr val="5A05F4"/>
+            <a:pPr indent="0" marL="0">
+              <a:buNone/>
+            </a:pPr>
+            <a:r>
+              <a:rPr lang="en-US" sz="1250" dirty="0">
+                <a:solidFill>
+                  <a:srgbClr val="111318"/>
                 </a:solidFill>
                 <a:latin typeface="Montserrat" pitchFamily="34" charset="0"/>
                 <a:ea typeface="Montserrat" pitchFamily="34" charset="-122"/>
                 <a:cs typeface="Montserrat" pitchFamily="34" charset="-120"/>
               </a:rPr>
-              <a:t>✓</a:t>
-            </a:r>
-            <a:endParaRPr lang="en-US" sz="1000" dirty="0"/>
-          </a:p>
-        </p:txBody>
-      </p:sp>
-      <p:sp>
-        <p:nvSpPr>
-          <p:cNvPr id="12" name="Text 9"/>
-          <p:cNvSpPr/>
-          <p:nvPr/>
-        </p:nvSpPr>
-        <p:spPr>
-          <a:xfrm>
-            <a:off x="1362456" y="2670048"/>
-            <a:ext cx="4617720" cy="384048"/>
-          </a:xfrm>
-          <a:prstGeom prst="rect">
-            <a:avLst/>
-          </a:prstGeom>
-          <a:noFill/>
-          <a:ln/>
-        </p:spPr>
-        <p:txBody>
-          <a:bodyPr wrap="square" lIns="0" tIns="0" rIns="0" bIns="0" rtlCol="0" anchor="ctr"/>
-          <a:lstStyle/>
-          <a:p>
-            <a:pPr indent="0" marL="0">
-              <a:buNone/>
-            </a:pPr>
-            <a:r>
-              <a:rPr lang="en-US" sz="1250" dirty="0">
-                <a:solidFill>
-                  <a:srgbClr val="111318"/>
-                </a:solidFill>
-                <a:latin typeface="Montserrat" pitchFamily="34" charset="0"/>
-                <a:ea typeface="Montserrat" pitchFamily="34" charset="-122"/>
-                <a:cs typeface="Montserrat" pitchFamily="34" charset="-120"/>
-              </a:rPr>
               <a:t>проведу інцидент за рунбуком без імпровізації</a:t>
             </a:r>
             <a:endParaRPr lang="en-US" sz="1250" dirty="0"/>
@@ -10987,7 +10989,7 @@
       </p:sp>
       <p:sp>
         <p:nvSpPr>
-          <p:cNvPr id="13" name="Shape 10"/>
+          <p:cNvPr id="16" name="Shape 12"/>
           <p:cNvSpPr/>
           <p:nvPr/>
         </p:nvSpPr>
@@ -11014,14 +11016,54 @@
       </p:sp>
       <p:sp>
         <p:nvSpPr>
-          <p:cNvPr id="14" name="Text 11"/>
-          <p:cNvSpPr/>
-          <p:nvPr/>
-        </p:nvSpPr>
-        <p:spPr>
-          <a:xfrm>
-            <a:off x="6144768" y="2157984"/>
-            <a:ext cx="256032" cy="256032"/>
+          <p:cNvPr id="17" name="Shape 13"/>
+          <p:cNvSpPr/>
+          <p:nvPr/>
+        </p:nvSpPr>
+        <p:spPr>
+          <a:xfrm rot="2700000">
+            <a:off x="6207587" y="2297430"/>
+            <a:ext cx="58156" cy="27432"/>
+          </a:xfrm>
+          <a:prstGeom prst="rect">
+            <a:avLst/>
+          </a:prstGeom>
+          <a:solidFill>
+            <a:srgbClr val="5A05F4"/>
+          </a:solidFill>
+          <a:ln/>
+        </p:spPr>
+      </p:sp>
+      <p:sp>
+        <p:nvSpPr>
+          <p:cNvPr id="18" name="Shape 14"/>
+          <p:cNvSpPr/>
+          <p:nvPr/>
+        </p:nvSpPr>
+        <p:spPr>
+          <a:xfrm rot="-3000000">
+            <a:off x="6235385" y="2271370"/>
+            <a:ext cx="121432" cy="27432"/>
+          </a:xfrm>
+          <a:prstGeom prst="rect">
+            <a:avLst/>
+          </a:prstGeom>
+          <a:solidFill>
+            <a:srgbClr val="5A05F4"/>
+          </a:solidFill>
+          <a:ln/>
+        </p:spPr>
+      </p:sp>
+      <p:sp>
+        <p:nvSpPr>
+          <p:cNvPr id="19" name="Text 15"/>
+          <p:cNvSpPr/>
+          <p:nvPr/>
+        </p:nvSpPr>
+        <p:spPr>
+          <a:xfrm>
+            <a:off x="6528816" y="2103120"/>
+            <a:ext cx="4617720" cy="384048"/>
           </a:xfrm>
           <a:prstGeom prst="rect">
             <a:avLst/>
@@ -11033,57 +11075,18 @@
           <a:bodyPr wrap="square" lIns="0" tIns="0" rIns="0" bIns="0" rtlCol="0" anchor="ctr"/>
           <a:lstStyle/>
           <a:p>
-            <a:pPr algn="ctr" indent="0" marL="0">
-              <a:buNone/>
-            </a:pPr>
-            <a:r>
-              <a:rPr lang="en-US" sz="1000" b="1" dirty="0">
-                <a:solidFill>
-                  <a:srgbClr val="5A05F4"/>
+            <a:pPr indent="0" marL="0">
+              <a:buNone/>
+            </a:pPr>
+            <a:r>
+              <a:rPr lang="en-US" sz="1250" dirty="0">
+                <a:solidFill>
+                  <a:srgbClr val="111318"/>
                 </a:solidFill>
                 <a:latin typeface="Montserrat" pitchFamily="34" charset="0"/>
                 <a:ea typeface="Montserrat" pitchFamily="34" charset="-122"/>
                 <a:cs typeface="Montserrat" pitchFamily="34" charset="-120"/>
               </a:rPr>
-              <a:t>✓</a:t>
-            </a:r>
-            <a:endParaRPr lang="en-US" sz="1000" dirty="0"/>
-          </a:p>
-        </p:txBody>
-      </p:sp>
-      <p:sp>
-        <p:nvSpPr>
-          <p:cNvPr id="15" name="Text 12"/>
-          <p:cNvSpPr/>
-          <p:nvPr/>
-        </p:nvSpPr>
-        <p:spPr>
-          <a:xfrm>
-            <a:off x="6528816" y="2103120"/>
-            <a:ext cx="4617720" cy="384048"/>
-          </a:xfrm>
-          <a:prstGeom prst="rect">
-            <a:avLst/>
-          </a:prstGeom>
-          <a:noFill/>
-          <a:ln/>
-        </p:spPr>
-        <p:txBody>
-          <a:bodyPr wrap="square" lIns="0" tIns="0" rIns="0" bIns="0" rtlCol="0" anchor="ctr"/>
-          <a:lstStyle/>
-          <a:p>
-            <a:pPr indent="0" marL="0">
-              <a:buNone/>
-            </a:pPr>
-            <a:r>
-              <a:rPr lang="en-US" sz="1250" dirty="0">
-                <a:solidFill>
-                  <a:srgbClr val="111318"/>
-                </a:solidFill>
-                <a:latin typeface="Montserrat" pitchFamily="34" charset="0"/>
-                <a:ea typeface="Montserrat" pitchFamily="34" charset="-122"/>
-                <a:cs typeface="Montserrat" pitchFamily="34" charset="-120"/>
-              </a:rPr>
               <a:t>поясню кожну плитку мовою наслідків</a:t>
             </a:r>
             <a:endParaRPr lang="en-US" sz="1250" dirty="0"/>
@@ -11092,7 +11095,7 @@
       </p:sp>
       <p:sp>
         <p:nvSpPr>
-          <p:cNvPr id="16" name="Shape 13"/>
+          <p:cNvPr id="20" name="Shape 16"/>
           <p:cNvSpPr/>
           <p:nvPr/>
         </p:nvSpPr>
@@ -11119,14 +11122,54 @@
       </p:sp>
       <p:sp>
         <p:nvSpPr>
-          <p:cNvPr id="17" name="Text 14"/>
-          <p:cNvSpPr/>
-          <p:nvPr/>
-        </p:nvSpPr>
-        <p:spPr>
-          <a:xfrm>
-            <a:off x="6144768" y="2724912"/>
-            <a:ext cx="256032" cy="256032"/>
+          <p:cNvPr id="21" name="Shape 17"/>
+          <p:cNvSpPr/>
+          <p:nvPr/>
+        </p:nvSpPr>
+        <p:spPr>
+          <a:xfrm rot="2700000">
+            <a:off x="6207587" y="2864358"/>
+            <a:ext cx="58156" cy="27432"/>
+          </a:xfrm>
+          <a:prstGeom prst="rect">
+            <a:avLst/>
+          </a:prstGeom>
+          <a:solidFill>
+            <a:srgbClr val="5A05F4"/>
+          </a:solidFill>
+          <a:ln/>
+        </p:spPr>
+      </p:sp>
+      <p:sp>
+        <p:nvSpPr>
+          <p:cNvPr id="22" name="Shape 18"/>
+          <p:cNvSpPr/>
+          <p:nvPr/>
+        </p:nvSpPr>
+        <p:spPr>
+          <a:xfrm rot="-3000000">
+            <a:off x="6235385" y="2838298"/>
+            <a:ext cx="121432" cy="27432"/>
+          </a:xfrm>
+          <a:prstGeom prst="rect">
+            <a:avLst/>
+          </a:prstGeom>
+          <a:solidFill>
+            <a:srgbClr val="5A05F4"/>
+          </a:solidFill>
+          <a:ln/>
+        </p:spPr>
+      </p:sp>
+      <p:sp>
+        <p:nvSpPr>
+          <p:cNvPr id="23" name="Text 19"/>
+          <p:cNvSpPr/>
+          <p:nvPr/>
+        </p:nvSpPr>
+        <p:spPr>
+          <a:xfrm>
+            <a:off x="6528816" y="2670048"/>
+            <a:ext cx="4617720" cy="384048"/>
           </a:xfrm>
           <a:prstGeom prst="rect">
             <a:avLst/>
@@ -11138,57 +11181,18 @@
           <a:bodyPr wrap="square" lIns="0" tIns="0" rIns="0" bIns="0" rtlCol="0" anchor="ctr"/>
           <a:lstStyle/>
           <a:p>
-            <a:pPr algn="ctr" indent="0" marL="0">
-              <a:buNone/>
-            </a:pPr>
-            <a:r>
-              <a:rPr lang="en-US" sz="1000" b="1" dirty="0">
-                <a:solidFill>
-                  <a:srgbClr val="5A05F4"/>
+            <a:pPr indent="0" marL="0">
+              <a:buNone/>
+            </a:pPr>
+            <a:r>
+              <a:rPr lang="en-US" sz="1250" dirty="0">
+                <a:solidFill>
+                  <a:srgbClr val="111318"/>
                 </a:solidFill>
                 <a:latin typeface="Montserrat" pitchFamily="34" charset="0"/>
                 <a:ea typeface="Montserrat" pitchFamily="34" charset="-122"/>
                 <a:cs typeface="Montserrat" pitchFamily="34" charset="-120"/>
               </a:rPr>
-              <a:t>✓</a:t>
-            </a:r>
-            <a:endParaRPr lang="en-US" sz="1000" dirty="0"/>
-          </a:p>
-        </p:txBody>
-      </p:sp>
-      <p:sp>
-        <p:nvSpPr>
-          <p:cNvPr id="18" name="Text 15"/>
-          <p:cNvSpPr/>
-          <p:nvPr/>
-        </p:nvSpPr>
-        <p:spPr>
-          <a:xfrm>
-            <a:off x="6528816" y="2670048"/>
-            <a:ext cx="4617720" cy="384048"/>
-          </a:xfrm>
-          <a:prstGeom prst="rect">
-            <a:avLst/>
-          </a:prstGeom>
-          <a:noFill/>
-          <a:ln/>
-        </p:spPr>
-        <p:txBody>
-          <a:bodyPr wrap="square" lIns="0" tIns="0" rIns="0" bIns="0" rtlCol="0" anchor="ctr"/>
-          <a:lstStyle/>
-          <a:p>
-            <a:pPr indent="0" marL="0">
-              <a:buNone/>
-            </a:pPr>
-            <a:r>
-              <a:rPr lang="en-US" sz="1250" dirty="0">
-                <a:solidFill>
-                  <a:srgbClr val="111318"/>
-                </a:solidFill>
-                <a:latin typeface="Montserrat" pitchFamily="34" charset="0"/>
-                <a:ea typeface="Montserrat" pitchFamily="34" charset="-122"/>
-                <a:cs typeface="Montserrat" pitchFamily="34" charset="-120"/>
-              </a:rPr>
               <a:t>мій 30-day план записаний із критеріями «зроблено»</a:t>
             </a:r>
             <a:endParaRPr lang="en-US" sz="1250" dirty="0"/>
@@ -11197,7 +11201,7 @@
       </p:sp>
       <p:sp>
         <p:nvSpPr>
-          <p:cNvPr id="19" name="Text 16"/>
+          <p:cNvPr id="24" name="Text 20"/>
           <p:cNvSpPr/>
           <p:nvPr/>
         </p:nvSpPr>
@@ -11440,7 +11444,7 @@
       </p:pic>
       <p:sp>
         <p:nvSpPr>
-          <p:cNvPr id="6" name="Shape 3"/>
+          <p:cNvPr id="7" name="Shape 3"/>
           <p:cNvSpPr/>
           <p:nvPr/>
         </p:nvSpPr>
@@ -11467,7 +11471,7 @@
       </p:sp>
       <p:sp>
         <p:nvSpPr>
-          <p:cNvPr id="7" name="Shape 4"/>
+          <p:cNvPr id="8" name="Shape 4"/>
           <p:cNvSpPr/>
           <p:nvPr/>
         </p:nvSpPr>
@@ -11487,14 +11491,54 @@
       </p:sp>
       <p:sp>
         <p:nvSpPr>
-          <p:cNvPr id="8" name="Text 5"/>
-          <p:cNvSpPr/>
-          <p:nvPr/>
-        </p:nvSpPr>
-        <p:spPr>
-          <a:xfrm>
-            <a:off x="768096" y="2020824"/>
-            <a:ext cx="384048" cy="384048"/>
+          <p:cNvPr id="9" name="Shape 5"/>
+          <p:cNvSpPr/>
+          <p:nvPr/>
+        </p:nvSpPr>
+        <p:spPr>
+          <a:xfrm rot="2700000">
+            <a:off x="871789" y="2197102"/>
+            <a:ext cx="176662" cy="31492"/>
+          </a:xfrm>
+          <a:prstGeom prst="rect">
+            <a:avLst/>
+          </a:prstGeom>
+          <a:solidFill>
+            <a:srgbClr val="C62A2A"/>
+          </a:solidFill>
+          <a:ln/>
+        </p:spPr>
+      </p:sp>
+      <p:sp>
+        <p:nvSpPr>
+          <p:cNvPr id="10" name="Shape 6"/>
+          <p:cNvSpPr/>
+          <p:nvPr/>
+        </p:nvSpPr>
+        <p:spPr>
+          <a:xfrm rot="-2700000">
+            <a:off x="871789" y="2197102"/>
+            <a:ext cx="176662" cy="31492"/>
+          </a:xfrm>
+          <a:prstGeom prst="rect">
+            <a:avLst/>
+          </a:prstGeom>
+          <a:solidFill>
+            <a:srgbClr val="C62A2A"/>
+          </a:solidFill>
+          <a:ln/>
+        </p:spPr>
+      </p:sp>
+      <p:sp>
+        <p:nvSpPr>
+          <p:cNvPr id="11" name="Text 7"/>
+          <p:cNvSpPr/>
+          <p:nvPr/>
+        </p:nvSpPr>
+        <p:spPr>
+          <a:xfrm>
+            <a:off x="1298448" y="1828800"/>
+            <a:ext cx="10149840" cy="777240"/>
           </a:xfrm>
           <a:prstGeom prst="rect">
             <a:avLst/>
@@ -11506,71 +11550,32 @@
           <a:bodyPr wrap="square" lIns="0" tIns="0" rIns="0" bIns="0" rtlCol="0" anchor="ctr"/>
           <a:lstStyle/>
           <a:p>
-            <a:pPr algn="ctr" indent="0" marL="0">
-              <a:buNone/>
-            </a:pPr>
-            <a:r>
-              <a:rPr lang="en-US" sz="1300" b="1" dirty="0">
-                <a:solidFill>
-                  <a:srgbClr val="C62A2A"/>
+            <a:pPr indent="0" marL="0">
+              <a:buNone/>
+            </a:pPr>
+            <a:r>
+              <a:rPr lang="en-US" sz="1350" b="1" dirty="0">
+                <a:solidFill>
+                  <a:srgbClr val="111318"/>
                 </a:solidFill>
                 <a:latin typeface="Montserrat" pitchFamily="34" charset="0"/>
                 <a:ea typeface="Montserrat" pitchFamily="34" charset="-122"/>
                 <a:cs typeface="Montserrat" pitchFamily="34" charset="-120"/>
               </a:rPr>
-              <a:t>✕</a:t>
-            </a:r>
-            <a:endParaRPr lang="en-US" sz="1300" dirty="0"/>
-          </a:p>
-        </p:txBody>
-      </p:sp>
-      <p:sp>
-        <p:nvSpPr>
-          <p:cNvPr id="9" name="Text 6"/>
-          <p:cNvSpPr/>
-          <p:nvPr/>
-        </p:nvSpPr>
-        <p:spPr>
-          <a:xfrm>
-            <a:off x="1298448" y="1828800"/>
-            <a:ext cx="10149840" cy="777240"/>
-          </a:xfrm>
-          <a:prstGeom prst="rect">
-            <a:avLst/>
-          </a:prstGeom>
-          <a:noFill/>
-          <a:ln/>
-        </p:spPr>
-        <p:txBody>
-          <a:bodyPr wrap="square" lIns="0" tIns="0" rIns="0" bIns="0" rtlCol="0" anchor="ctr"/>
-          <a:lstStyle/>
-          <a:p>
+              <a:t>«Працює на моїй машині»   </a:t>
+            </a:r>
             <a:pPr indent="0" marL="0">
               <a:buNone/>
             </a:pPr>
             <a:r>
-              <a:rPr lang="en-US" sz="1350" b="1" dirty="0">
-                <a:solidFill>
-                  <a:srgbClr val="111318"/>
+              <a:rPr lang="en-US" sz="1200" dirty="0">
+                <a:solidFill>
+                  <a:srgbClr val="555B66"/>
                 </a:solidFill>
                 <a:latin typeface="Montserrat" pitchFamily="34" charset="0"/>
                 <a:ea typeface="Montserrat" pitchFamily="34" charset="-122"/>
                 <a:cs typeface="Montserrat" pitchFamily="34" charset="-120"/>
               </a:rPr>
-              <a:t>«Працює на моїй машині»   </a:t>
-            </a:r>
-            <a:pPr indent="0" marL="0">
-              <a:buNone/>
-            </a:pPr>
-            <a:r>
-              <a:rPr lang="en-US" sz="1200" dirty="0">
-                <a:solidFill>
-                  <a:srgbClr val="555B66"/>
-                </a:solidFill>
-                <a:latin typeface="Montserrat" pitchFamily="34" charset="0"/>
-                <a:ea typeface="Montserrat" pitchFamily="34" charset="-122"/>
-                <a:cs typeface="Montserrat" pitchFamily="34" charset="-120"/>
-              </a:rPr>
               <a:t>система, яку не підняти з чистого клону, не передається нікому</a:t>
             </a:r>
             <a:endParaRPr lang="en-US" sz="1350" dirty="0"/>
@@ -11579,7 +11584,7 @@
       </p:sp>
       <p:sp>
         <p:nvSpPr>
-          <p:cNvPr id="10" name="Shape 7"/>
+          <p:cNvPr id="12" name="Shape 8"/>
           <p:cNvSpPr/>
           <p:nvPr/>
         </p:nvSpPr>
@@ -11606,7 +11611,7 @@
       </p:sp>
       <p:sp>
         <p:nvSpPr>
-          <p:cNvPr id="11" name="Shape 8"/>
+          <p:cNvPr id="13" name="Shape 9"/>
           <p:cNvSpPr/>
           <p:nvPr/>
         </p:nvSpPr>
@@ -11626,14 +11631,54 @@
       </p:sp>
       <p:sp>
         <p:nvSpPr>
-          <p:cNvPr id="12" name="Text 9"/>
-          <p:cNvSpPr/>
-          <p:nvPr/>
-        </p:nvSpPr>
-        <p:spPr>
-          <a:xfrm>
-            <a:off x="768096" y="2935224"/>
-            <a:ext cx="384048" cy="384048"/>
+          <p:cNvPr id="14" name="Shape 10"/>
+          <p:cNvSpPr/>
+          <p:nvPr/>
+        </p:nvSpPr>
+        <p:spPr>
+          <a:xfrm rot="2700000">
+            <a:off x="871789" y="3111502"/>
+            <a:ext cx="176662" cy="31492"/>
+          </a:xfrm>
+          <a:prstGeom prst="rect">
+            <a:avLst/>
+          </a:prstGeom>
+          <a:solidFill>
+            <a:srgbClr val="C62A2A"/>
+          </a:solidFill>
+          <a:ln/>
+        </p:spPr>
+      </p:sp>
+      <p:sp>
+        <p:nvSpPr>
+          <p:cNvPr id="15" name="Shape 11"/>
+          <p:cNvSpPr/>
+          <p:nvPr/>
+        </p:nvSpPr>
+        <p:spPr>
+          <a:xfrm rot="-2700000">
+            <a:off x="871789" y="3111502"/>
+            <a:ext cx="176662" cy="31492"/>
+          </a:xfrm>
+          <a:prstGeom prst="rect">
+            <a:avLst/>
+          </a:prstGeom>
+          <a:solidFill>
+            <a:srgbClr val="C62A2A"/>
+          </a:solidFill>
+          <a:ln/>
+        </p:spPr>
+      </p:sp>
+      <p:sp>
+        <p:nvSpPr>
+          <p:cNvPr id="16" name="Text 12"/>
+          <p:cNvSpPr/>
+          <p:nvPr/>
+        </p:nvSpPr>
+        <p:spPr>
+          <a:xfrm>
+            <a:off x="1298448" y="2743200"/>
+            <a:ext cx="10149840" cy="777240"/>
           </a:xfrm>
           <a:prstGeom prst="rect">
             <a:avLst/>
@@ -11645,71 +11690,32 @@
           <a:bodyPr wrap="square" lIns="0" tIns="0" rIns="0" bIns="0" rtlCol="0" anchor="ctr"/>
           <a:lstStyle/>
           <a:p>
-            <a:pPr algn="ctr" indent="0" marL="0">
-              <a:buNone/>
-            </a:pPr>
-            <a:r>
-              <a:rPr lang="en-US" sz="1300" b="1" dirty="0">
-                <a:solidFill>
-                  <a:srgbClr val="C62A2A"/>
+            <a:pPr indent="0" marL="0">
+              <a:buNone/>
+            </a:pPr>
+            <a:r>
+              <a:rPr lang="en-US" sz="1350" b="1" dirty="0">
+                <a:solidFill>
+                  <a:srgbClr val="111318"/>
                 </a:solidFill>
                 <a:latin typeface="Montserrat" pitchFamily="34" charset="0"/>
                 <a:ea typeface="Montserrat" pitchFamily="34" charset="-122"/>
                 <a:cs typeface="Montserrat" pitchFamily="34" charset="-120"/>
               </a:rPr>
-              <a:t>✕</a:t>
-            </a:r>
-            <a:endParaRPr lang="en-US" sz="1300" dirty="0"/>
-          </a:p>
-        </p:txBody>
-      </p:sp>
-      <p:sp>
-        <p:nvSpPr>
-          <p:cNvPr id="13" name="Text 10"/>
-          <p:cNvSpPr/>
-          <p:nvPr/>
-        </p:nvSpPr>
-        <p:spPr>
-          <a:xfrm>
-            <a:off x="1298448" y="2743200"/>
-            <a:ext cx="10149840" cy="777240"/>
-          </a:xfrm>
-          <a:prstGeom prst="rect">
-            <a:avLst/>
-          </a:prstGeom>
-          <a:noFill/>
-          <a:ln/>
-        </p:spPr>
-        <p:txBody>
-          <a:bodyPr wrap="square" lIns="0" tIns="0" rIns="0" bIns="0" rtlCol="0" anchor="ctr"/>
-          <a:lstStyle/>
-          <a:p>
+              <a:t>Постмортем із винними   </a:t>
+            </a:r>
             <a:pPr indent="0" marL="0">
               <a:buNone/>
             </a:pPr>
             <a:r>
-              <a:rPr lang="en-US" sz="1350" b="1" dirty="0">
-                <a:solidFill>
-                  <a:srgbClr val="111318"/>
+              <a:rPr lang="en-US" sz="1200" dirty="0">
+                <a:solidFill>
+                  <a:srgbClr val="555B66"/>
                 </a:solidFill>
                 <a:latin typeface="Montserrat" pitchFamily="34" charset="0"/>
                 <a:ea typeface="Montserrat" pitchFamily="34" charset="-122"/>
                 <a:cs typeface="Montserrat" pitchFamily="34" charset="-120"/>
               </a:rPr>
-              <a:t>Постмортем із винними   </a:t>
-            </a:r>
-            <a:pPr indent="0" marL="0">
-              <a:buNone/>
-            </a:pPr>
-            <a:r>
-              <a:rPr lang="en-US" sz="1200" dirty="0">
-                <a:solidFill>
-                  <a:srgbClr val="555B66"/>
-                </a:solidFill>
-                <a:latin typeface="Montserrat" pitchFamily="34" charset="0"/>
-                <a:ea typeface="Montserrat" pitchFamily="34" charset="-122"/>
-                <a:cs typeface="Montserrat" pitchFamily="34" charset="-120"/>
-              </a:rPr>
               <a:t>механізми лагодять інциденти; прізвища — ні</a:t>
             </a:r>
             <a:endParaRPr lang="en-US" sz="1350" dirty="0"/>
@@ -11718,7 +11724,7 @@
       </p:sp>
       <p:sp>
         <p:nvSpPr>
-          <p:cNvPr id="14" name="Shape 11"/>
+          <p:cNvPr id="17" name="Shape 13"/>
           <p:cNvSpPr/>
           <p:nvPr/>
         </p:nvSpPr>
@@ -11745,7 +11751,7 @@
       </p:sp>
       <p:sp>
         <p:nvSpPr>
-          <p:cNvPr id="15" name="Shape 12"/>
+          <p:cNvPr id="18" name="Shape 14"/>
           <p:cNvSpPr/>
           <p:nvPr/>
         </p:nvSpPr>
@@ -11765,14 +11771,54 @@
       </p:sp>
       <p:sp>
         <p:nvSpPr>
-          <p:cNvPr id="16" name="Text 13"/>
-          <p:cNvSpPr/>
-          <p:nvPr/>
-        </p:nvSpPr>
-        <p:spPr>
-          <a:xfrm>
-            <a:off x="768096" y="3849624"/>
-            <a:ext cx="384048" cy="384048"/>
+          <p:cNvPr id="19" name="Shape 15"/>
+          <p:cNvSpPr/>
+          <p:nvPr/>
+        </p:nvSpPr>
+        <p:spPr>
+          <a:xfrm rot="2700000">
+            <a:off x="871789" y="4025902"/>
+            <a:ext cx="176662" cy="31492"/>
+          </a:xfrm>
+          <a:prstGeom prst="rect">
+            <a:avLst/>
+          </a:prstGeom>
+          <a:solidFill>
+            <a:srgbClr val="C62A2A"/>
+          </a:solidFill>
+          <a:ln/>
+        </p:spPr>
+      </p:sp>
+      <p:sp>
+        <p:nvSpPr>
+          <p:cNvPr id="20" name="Shape 16"/>
+          <p:cNvSpPr/>
+          <p:nvPr/>
+        </p:nvSpPr>
+        <p:spPr>
+          <a:xfrm rot="-2700000">
+            <a:off x="871789" y="4025902"/>
+            <a:ext cx="176662" cy="31492"/>
+          </a:xfrm>
+          <a:prstGeom prst="rect">
+            <a:avLst/>
+          </a:prstGeom>
+          <a:solidFill>
+            <a:srgbClr val="C62A2A"/>
+          </a:solidFill>
+          <a:ln/>
+        </p:spPr>
+      </p:sp>
+      <p:sp>
+        <p:nvSpPr>
+          <p:cNvPr id="21" name="Text 17"/>
+          <p:cNvSpPr/>
+          <p:nvPr/>
+        </p:nvSpPr>
+        <p:spPr>
+          <a:xfrm>
+            <a:off x="1298448" y="3657600"/>
+            <a:ext cx="10149840" cy="777240"/>
           </a:xfrm>
           <a:prstGeom prst="rect">
             <a:avLst/>
@@ -11784,71 +11830,32 @@
           <a:bodyPr wrap="square" lIns="0" tIns="0" rIns="0" bIns="0" rtlCol="0" anchor="ctr"/>
           <a:lstStyle/>
           <a:p>
-            <a:pPr algn="ctr" indent="0" marL="0">
-              <a:buNone/>
-            </a:pPr>
-            <a:r>
-              <a:rPr lang="en-US" sz="1300" b="1" dirty="0">
-                <a:solidFill>
-                  <a:srgbClr val="C62A2A"/>
+            <a:pPr indent="0" marL="0">
+              <a:buNone/>
+            </a:pPr>
+            <a:r>
+              <a:rPr lang="en-US" sz="1350" b="1" dirty="0">
+                <a:solidFill>
+                  <a:srgbClr val="111318"/>
                 </a:solidFill>
                 <a:latin typeface="Montserrat" pitchFamily="34" charset="0"/>
                 <a:ea typeface="Montserrat" pitchFamily="34" charset="-122"/>
                 <a:cs typeface="Montserrat" pitchFamily="34" charset="-120"/>
               </a:rPr>
-              <a:t>✕</a:t>
-            </a:r>
-            <a:endParaRPr lang="en-US" sz="1300" dirty="0"/>
-          </a:p>
-        </p:txBody>
-      </p:sp>
-      <p:sp>
-        <p:nvSpPr>
-          <p:cNvPr id="17" name="Text 14"/>
-          <p:cNvSpPr/>
-          <p:nvPr/>
-        </p:nvSpPr>
-        <p:spPr>
-          <a:xfrm>
-            <a:off x="1298448" y="3657600"/>
-            <a:ext cx="10149840" cy="777240"/>
-          </a:xfrm>
-          <a:prstGeom prst="rect">
-            <a:avLst/>
-          </a:prstGeom>
-          <a:noFill/>
-          <a:ln/>
-        </p:spPr>
-        <p:txBody>
-          <a:bodyPr wrap="square" lIns="0" tIns="0" rIns="0" bIns="0" rtlCol="0" anchor="ctr"/>
-          <a:lstStyle/>
-          <a:p>
+              <a:t>Демо без артефактів   </a:t>
+            </a:r>
             <a:pPr indent="0" marL="0">
               <a:buNone/>
             </a:pPr>
             <a:r>
-              <a:rPr lang="en-US" sz="1350" b="1" dirty="0">
-                <a:solidFill>
-                  <a:srgbClr val="111318"/>
+              <a:rPr lang="en-US" sz="1200" dirty="0">
+                <a:solidFill>
+                  <a:srgbClr val="555B66"/>
                 </a:solidFill>
                 <a:latin typeface="Montserrat" pitchFamily="34" charset="0"/>
                 <a:ea typeface="Montserrat" pitchFamily="34" charset="-122"/>
                 <a:cs typeface="Montserrat" pitchFamily="34" charset="-120"/>
               </a:rPr>
-              <a:t>Демо без артефактів   </a:t>
-            </a:r>
-            <a:pPr indent="0" marL="0">
-              <a:buNone/>
-            </a:pPr>
-            <a:r>
-              <a:rPr lang="en-US" sz="1200" dirty="0">
-                <a:solidFill>
-                  <a:srgbClr val="555B66"/>
-                </a:solidFill>
-                <a:latin typeface="Montserrat" pitchFamily="34" charset="0"/>
-                <a:ea typeface="Montserrat" pitchFamily="34" charset="-122"/>
-                <a:cs typeface="Montserrat" pitchFamily="34" charset="-120"/>
-              </a:rPr>
               <a:t>твердження без скріншота плитки чи рядка лога — просто слова</a:t>
             </a:r>
             <a:endParaRPr lang="en-US" sz="1350" dirty="0"/>
@@ -11857,7 +11864,7 @@
       </p:sp>
       <p:sp>
         <p:nvSpPr>
-          <p:cNvPr id="18" name="Shape 15"/>
+          <p:cNvPr id="22" name="Shape 18"/>
           <p:cNvSpPr/>
           <p:nvPr/>
         </p:nvSpPr>
@@ -11884,7 +11891,7 @@
       </p:sp>
       <p:sp>
         <p:nvSpPr>
-          <p:cNvPr id="19" name="Shape 16"/>
+          <p:cNvPr id="23" name="Shape 19"/>
           <p:cNvSpPr/>
           <p:nvPr/>
         </p:nvSpPr>
@@ -11904,46 +11911,47 @@
       </p:sp>
       <p:sp>
         <p:nvSpPr>
-          <p:cNvPr id="20" name="Text 17"/>
-          <p:cNvSpPr/>
-          <p:nvPr/>
-        </p:nvSpPr>
-        <p:spPr>
-          <a:xfrm>
-            <a:off x="768096" y="4764024"/>
-            <a:ext cx="384048" cy="384048"/>
-          </a:xfrm>
-          <a:prstGeom prst="rect">
-            <a:avLst/>
-          </a:prstGeom>
-          <a:noFill/>
-          <a:ln/>
-        </p:spPr>
-        <p:txBody>
-          <a:bodyPr wrap="square" lIns="0" tIns="0" rIns="0" bIns="0" rtlCol="0" anchor="ctr"/>
-          <a:lstStyle/>
-          <a:p>
-            <a:pPr algn="ctr" indent="0" marL="0">
-              <a:buNone/>
-            </a:pPr>
-            <a:r>
-              <a:rPr lang="en-US" sz="1300" b="1" dirty="0">
-                <a:solidFill>
-                  <a:srgbClr val="C62A2A"/>
-                </a:solidFill>
-                <a:latin typeface="Montserrat" pitchFamily="34" charset="0"/>
-                <a:ea typeface="Montserrat" pitchFamily="34" charset="-122"/>
-                <a:cs typeface="Montserrat" pitchFamily="34" charset="-120"/>
-              </a:rPr>
-              <a:t>✕</a:t>
-            </a:r>
-            <a:endParaRPr lang="en-US" sz="1300" dirty="0"/>
-          </a:p>
-        </p:txBody>
-      </p:sp>
-      <p:sp>
-        <p:nvSpPr>
-          <p:cNvPr id="21" name="Text 18"/>
+          <p:cNvPr id="24" name="Shape 20"/>
+          <p:cNvSpPr/>
+          <p:nvPr/>
+        </p:nvSpPr>
+        <p:spPr>
+          <a:xfrm rot="2700000">
+            <a:off x="871789" y="4940302"/>
+            <a:ext cx="176662" cy="31492"/>
+          </a:xfrm>
+          <a:prstGeom prst="rect">
+            <a:avLst/>
+          </a:prstGeom>
+          <a:solidFill>
+            <a:srgbClr val="C62A2A"/>
+          </a:solidFill>
+          <a:ln/>
+        </p:spPr>
+      </p:sp>
+      <p:sp>
+        <p:nvSpPr>
+          <p:cNvPr id="25" name="Shape 21"/>
+          <p:cNvSpPr/>
+          <p:nvPr/>
+        </p:nvSpPr>
+        <p:spPr>
+          <a:xfrm rot="-2700000">
+            <a:off x="871789" y="4940302"/>
+            <a:ext cx="176662" cy="31492"/>
+          </a:xfrm>
+          <a:prstGeom prst="rect">
+            <a:avLst/>
+          </a:prstGeom>
+          <a:solidFill>
+            <a:srgbClr val="C62A2A"/>
+          </a:solidFill>
+          <a:ln/>
+        </p:spPr>
+      </p:sp>
+      <p:sp>
+        <p:nvSpPr>
+          <p:cNvPr id="26" name="Text 22"/>
           <p:cNvSpPr/>
           <p:nvPr/>
         </p:nvSpPr>
@@ -12242,7 +12250,7 @@
       </p:pic>
       <p:sp>
         <p:nvSpPr>
-          <p:cNvPr id="7" name="Shape 4"/>
+          <p:cNvPr id="8" name="Shape 4"/>
           <p:cNvSpPr/>
           <p:nvPr/>
         </p:nvSpPr>
@@ -12269,7 +12277,7 @@
       </p:sp>
       <p:sp>
         <p:nvSpPr>
-          <p:cNvPr id="8" name="Shape 5"/>
+          <p:cNvPr id="9" name="Shape 5"/>
           <p:cNvSpPr/>
           <p:nvPr/>
         </p:nvSpPr>
@@ -12289,7 +12297,7 @@
       </p:sp>
       <p:sp>
         <p:nvSpPr>
-          <p:cNvPr id="9" name="Text 6"/>
+          <p:cNvPr id="10" name="Text 6"/>
           <p:cNvSpPr/>
           <p:nvPr/>
         </p:nvSpPr>
@@ -12328,7 +12336,7 @@
       </p:sp>
       <p:sp>
         <p:nvSpPr>
-          <p:cNvPr id="10" name="Text 7"/>
+          <p:cNvPr id="11" name="Text 7"/>
           <p:cNvSpPr/>
           <p:nvPr/>
         </p:nvSpPr>
@@ -12367,7 +12375,7 @@
       </p:sp>
       <p:sp>
         <p:nvSpPr>
-          <p:cNvPr id="11" name="Text 8"/>
+          <p:cNvPr id="12" name="Text 8"/>
           <p:cNvSpPr/>
           <p:nvPr/>
         </p:nvSpPr>
@@ -12409,7 +12417,7 @@
       </p:sp>
       <p:sp>
         <p:nvSpPr>
-          <p:cNvPr id="12" name="Shape 9"/>
+          <p:cNvPr id="13" name="Shape 9"/>
           <p:cNvSpPr/>
           <p:nvPr/>
         </p:nvSpPr>
@@ -12436,7 +12444,7 @@
       </p:sp>
       <p:sp>
         <p:nvSpPr>
-          <p:cNvPr id="13" name="Shape 10"/>
+          <p:cNvPr id="14" name="Shape 10"/>
           <p:cNvSpPr/>
           <p:nvPr/>
         </p:nvSpPr>
@@ -12456,7 +12464,7 @@
       </p:sp>
       <p:sp>
         <p:nvSpPr>
-          <p:cNvPr id="14" name="Text 11"/>
+          <p:cNvPr id="15" name="Text 11"/>
           <p:cNvSpPr/>
           <p:nvPr/>
         </p:nvSpPr>
@@ -12495,7 +12503,7 @@
       </p:sp>
       <p:sp>
         <p:nvSpPr>
-          <p:cNvPr id="15" name="Text 12"/>
+          <p:cNvPr id="16" name="Text 12"/>
           <p:cNvSpPr/>
           <p:nvPr/>
         </p:nvSpPr>
@@ -12534,7 +12542,7 @@
       </p:sp>
       <p:sp>
         <p:nvSpPr>
-          <p:cNvPr id="16" name="Text 13"/>
+          <p:cNvPr id="17" name="Text 13"/>
           <p:cNvSpPr/>
           <p:nvPr/>
         </p:nvSpPr>
@@ -12576,7 +12584,7 @@
       </p:sp>
       <p:sp>
         <p:nvSpPr>
-          <p:cNvPr id="17" name="Shape 14"/>
+          <p:cNvPr id="18" name="Shape 14"/>
           <p:cNvSpPr/>
           <p:nvPr/>
         </p:nvSpPr>
@@ -12603,7 +12611,7 @@
       </p:sp>
       <p:sp>
         <p:nvSpPr>
-          <p:cNvPr id="18" name="Shape 15"/>
+          <p:cNvPr id="19" name="Shape 15"/>
           <p:cNvSpPr/>
           <p:nvPr/>
         </p:nvSpPr>
@@ -12623,7 +12631,7 @@
       </p:sp>
       <p:sp>
         <p:nvSpPr>
-          <p:cNvPr id="19" name="Text 16"/>
+          <p:cNvPr id="20" name="Text 16"/>
           <p:cNvSpPr/>
           <p:nvPr/>
         </p:nvSpPr>
@@ -12662,7 +12670,7 @@
       </p:sp>
       <p:sp>
         <p:nvSpPr>
-          <p:cNvPr id="20" name="Text 17"/>
+          <p:cNvPr id="21" name="Text 17"/>
           <p:cNvSpPr/>
           <p:nvPr/>
         </p:nvSpPr>
@@ -12701,7 +12709,7 @@
       </p:sp>
       <p:sp>
         <p:nvSpPr>
-          <p:cNvPr id="21" name="Text 18"/>
+          <p:cNvPr id="22" name="Text 18"/>
           <p:cNvSpPr/>
           <p:nvPr/>
         </p:nvSpPr>
@@ -12743,7 +12751,7 @@
       </p:sp>
       <p:sp>
         <p:nvSpPr>
-          <p:cNvPr id="22" name="Shape 19"/>
+          <p:cNvPr id="23" name="Shape 19"/>
           <p:cNvSpPr/>
           <p:nvPr/>
         </p:nvSpPr>
@@ -12770,7 +12778,7 @@
       </p:sp>
       <p:sp>
         <p:nvSpPr>
-          <p:cNvPr id="23" name="Shape 20"/>
+          <p:cNvPr id="24" name="Shape 20"/>
           <p:cNvSpPr/>
           <p:nvPr/>
         </p:nvSpPr>
@@ -12790,7 +12798,7 @@
       </p:sp>
       <p:sp>
         <p:nvSpPr>
-          <p:cNvPr id="24" name="Text 21"/>
+          <p:cNvPr id="25" name="Text 21"/>
           <p:cNvSpPr/>
           <p:nvPr/>
         </p:nvSpPr>
@@ -12829,7 +12837,7 @@
       </p:sp>
       <p:sp>
         <p:nvSpPr>
-          <p:cNvPr id="25" name="Text 22"/>
+          <p:cNvPr id="26" name="Text 22"/>
           <p:cNvSpPr/>
           <p:nvPr/>
         </p:nvSpPr>
@@ -12868,7 +12876,7 @@
       </p:sp>
       <p:sp>
         <p:nvSpPr>
-          <p:cNvPr id="26" name="Text 23"/>
+          <p:cNvPr id="27" name="Text 23"/>
           <p:cNvSpPr/>
           <p:nvPr/>
         </p:nvSpPr>
@@ -12910,7 +12918,7 @@
       </p:sp>
       <p:sp>
         <p:nvSpPr>
-          <p:cNvPr id="27" name="Shape 24"/>
+          <p:cNvPr id="28" name="Shape 24"/>
           <p:cNvSpPr/>
           <p:nvPr/>
         </p:nvSpPr>
@@ -12937,7 +12945,7 @@
       </p:sp>
       <p:sp>
         <p:nvSpPr>
-          <p:cNvPr id="28" name="Shape 25"/>
+          <p:cNvPr id="29" name="Shape 25"/>
           <p:cNvSpPr/>
           <p:nvPr/>
         </p:nvSpPr>
@@ -12957,7 +12965,7 @@
       </p:sp>
       <p:sp>
         <p:nvSpPr>
-          <p:cNvPr id="29" name="Text 26"/>
+          <p:cNvPr id="30" name="Text 26"/>
           <p:cNvSpPr/>
           <p:nvPr/>
         </p:nvSpPr>
@@ -12996,7 +13004,7 @@
       </p:sp>
       <p:sp>
         <p:nvSpPr>
-          <p:cNvPr id="30" name="Text 27"/>
+          <p:cNvPr id="31" name="Text 27"/>
           <p:cNvSpPr/>
           <p:nvPr/>
         </p:nvSpPr>
@@ -13035,7 +13043,7 @@
       </p:sp>
       <p:sp>
         <p:nvSpPr>
-          <p:cNvPr id="31" name="Text 28"/>
+          <p:cNvPr id="32" name="Text 28"/>
           <p:cNvSpPr/>
           <p:nvPr/>
         </p:nvSpPr>
@@ -13281,7 +13289,7 @@
       </p:pic>
       <p:sp>
         <p:nvSpPr>
-          <p:cNvPr id="6" name="Shape 3"/>
+          <p:cNvPr id="7" name="Shape 3"/>
           <p:cNvSpPr/>
           <p:nvPr/>
         </p:nvSpPr>
@@ -13308,7 +13316,7 @@
       </p:sp>
       <p:sp>
         <p:nvSpPr>
-          <p:cNvPr id="7" name="Text 4"/>
+          <p:cNvPr id="8" name="Text 4"/>
           <p:cNvSpPr/>
           <p:nvPr/>
         </p:nvSpPr>
@@ -13347,7 +13355,7 @@
       </p:sp>
       <p:sp>
         <p:nvSpPr>
-          <p:cNvPr id="8" name="Text 5"/>
+          <p:cNvPr id="9" name="Text 5"/>
           <p:cNvSpPr/>
           <p:nvPr/>
         </p:nvSpPr>
@@ -13386,7 +13394,7 @@
       </p:sp>
       <p:sp>
         <p:nvSpPr>
-          <p:cNvPr id="9" name="Text 6"/>
+          <p:cNvPr id="10" name="Text 6"/>
           <p:cNvSpPr/>
           <p:nvPr/>
         </p:nvSpPr>
@@ -13425,7 +13433,7 @@
       </p:sp>
       <p:sp>
         <p:nvSpPr>
-          <p:cNvPr id="10" name="Text 7"/>
+          <p:cNvPr id="11" name="Text 7"/>
           <p:cNvSpPr/>
           <p:nvPr/>
         </p:nvSpPr>
@@ -13478,7 +13486,7 @@
       </p:sp>
       <p:sp>
         <p:nvSpPr>
-          <p:cNvPr id="11" name="Text 8"/>
+          <p:cNvPr id="12" name="Text 8"/>
           <p:cNvSpPr/>
           <p:nvPr/>
         </p:nvSpPr>
@@ -13531,7 +13539,7 @@
       </p:sp>
       <p:sp>
         <p:nvSpPr>
-          <p:cNvPr id="12" name="Text 9"/>
+          <p:cNvPr id="13" name="Text 9"/>
           <p:cNvSpPr/>
           <p:nvPr/>
         </p:nvSpPr>
@@ -13584,7 +13592,7 @@
       </p:sp>
       <p:sp>
         <p:nvSpPr>
-          <p:cNvPr id="13" name="Text 10"/>
+          <p:cNvPr id="14" name="Text 10"/>
           <p:cNvSpPr/>
           <p:nvPr/>
         </p:nvSpPr>
@@ -13637,7 +13645,7 @@
       </p:sp>
       <p:sp>
         <p:nvSpPr>
-          <p:cNvPr id="14" name="Shape 11"/>
+          <p:cNvPr id="15" name="Shape 11"/>
           <p:cNvSpPr/>
           <p:nvPr/>
         </p:nvSpPr>
@@ -13659,7 +13667,7 @@
       </p:sp>
       <p:sp>
         <p:nvSpPr>
-          <p:cNvPr id="15" name="Text 12"/>
+          <p:cNvPr id="16" name="Text 12"/>
           <p:cNvSpPr/>
           <p:nvPr/>
         </p:nvSpPr>
@@ -13698,7 +13706,7 @@
       </p:sp>
       <p:sp>
         <p:nvSpPr>
-          <p:cNvPr id="16" name="Text 13"/>
+          <p:cNvPr id="17" name="Text 13"/>
           <p:cNvSpPr/>
           <p:nvPr/>
         </p:nvSpPr>
@@ -14487,7 +14495,7 @@
       </p:pic>
       <p:sp>
         <p:nvSpPr>
-          <p:cNvPr id="6" name="Shape 3"/>
+          <p:cNvPr id="7" name="Shape 3"/>
           <p:cNvSpPr/>
           <p:nvPr/>
         </p:nvSpPr>
@@ -14514,7 +14522,7 @@
       </p:sp>
       <p:sp>
         <p:nvSpPr>
-          <p:cNvPr id="7" name="Shape 4"/>
+          <p:cNvPr id="8" name="Shape 4"/>
           <p:cNvSpPr/>
           <p:nvPr/>
         </p:nvSpPr>
@@ -14534,7 +14542,7 @@
       </p:sp>
       <p:sp>
         <p:nvSpPr>
-          <p:cNvPr id="8" name="Text 5"/>
+          <p:cNvPr id="9" name="Text 5"/>
           <p:cNvSpPr/>
           <p:nvPr/>
         </p:nvSpPr>
@@ -14573,7 +14581,7 @@
       </p:sp>
       <p:sp>
         <p:nvSpPr>
-          <p:cNvPr id="9" name="Text 6"/>
+          <p:cNvPr id="10" name="Text 6"/>
           <p:cNvSpPr/>
           <p:nvPr/>
         </p:nvSpPr>
@@ -14612,7 +14620,7 @@
       </p:sp>
       <p:sp>
         <p:nvSpPr>
-          <p:cNvPr id="10" name="Shape 7"/>
+          <p:cNvPr id="11" name="Shape 7"/>
           <p:cNvSpPr/>
           <p:nvPr/>
         </p:nvSpPr>
@@ -14639,7 +14647,7 @@
       </p:sp>
       <p:sp>
         <p:nvSpPr>
-          <p:cNvPr id="11" name="Shape 8"/>
+          <p:cNvPr id="12" name="Shape 8"/>
           <p:cNvSpPr/>
           <p:nvPr/>
         </p:nvSpPr>
@@ -14659,7 +14667,7 @@
       </p:sp>
       <p:sp>
         <p:nvSpPr>
-          <p:cNvPr id="12" name="Text 9"/>
+          <p:cNvPr id="13" name="Text 9"/>
           <p:cNvSpPr/>
           <p:nvPr/>
         </p:nvSpPr>
@@ -14698,7 +14706,7 @@
       </p:sp>
       <p:sp>
         <p:nvSpPr>
-          <p:cNvPr id="13" name="Text 10"/>
+          <p:cNvPr id="14" name="Text 10"/>
           <p:cNvSpPr/>
           <p:nvPr/>
         </p:nvSpPr>
@@ -14737,7 +14745,7 @@
       </p:sp>
       <p:sp>
         <p:nvSpPr>
-          <p:cNvPr id="14" name="Shape 11"/>
+          <p:cNvPr id="15" name="Shape 11"/>
           <p:cNvSpPr/>
           <p:nvPr/>
         </p:nvSpPr>
@@ -14764,7 +14772,7 @@
       </p:sp>
       <p:sp>
         <p:nvSpPr>
-          <p:cNvPr id="15" name="Shape 12"/>
+          <p:cNvPr id="16" name="Shape 12"/>
           <p:cNvSpPr/>
           <p:nvPr/>
         </p:nvSpPr>
@@ -14784,7 +14792,7 @@
       </p:sp>
       <p:sp>
         <p:nvSpPr>
-          <p:cNvPr id="16" name="Text 13"/>
+          <p:cNvPr id="17" name="Text 13"/>
           <p:cNvSpPr/>
           <p:nvPr/>
         </p:nvSpPr>
@@ -14823,7 +14831,7 @@
       </p:sp>
       <p:sp>
         <p:nvSpPr>
-          <p:cNvPr id="17" name="Text 14"/>
+          <p:cNvPr id="18" name="Text 14"/>
           <p:cNvSpPr/>
           <p:nvPr/>
         </p:nvSpPr>
@@ -14862,7 +14870,7 @@
       </p:sp>
       <p:sp>
         <p:nvSpPr>
-          <p:cNvPr id="18" name="Shape 15"/>
+          <p:cNvPr id="19" name="Shape 15"/>
           <p:cNvSpPr/>
           <p:nvPr/>
         </p:nvSpPr>
@@ -14889,7 +14897,7 @@
       </p:sp>
       <p:sp>
         <p:nvSpPr>
-          <p:cNvPr id="19" name="Shape 16"/>
+          <p:cNvPr id="20" name="Shape 16"/>
           <p:cNvSpPr/>
           <p:nvPr/>
         </p:nvSpPr>
@@ -14909,7 +14917,7 @@
       </p:sp>
       <p:sp>
         <p:nvSpPr>
-          <p:cNvPr id="20" name="Text 17"/>
+          <p:cNvPr id="21" name="Text 17"/>
           <p:cNvSpPr/>
           <p:nvPr/>
         </p:nvSpPr>
@@ -14948,7 +14956,7 @@
       </p:sp>
       <p:sp>
         <p:nvSpPr>
-          <p:cNvPr id="21" name="Text 18"/>
+          <p:cNvPr id="22" name="Text 18"/>
           <p:cNvSpPr/>
           <p:nvPr/>
         </p:nvSpPr>
@@ -14987,7 +14995,7 @@
       </p:sp>
       <p:sp>
         <p:nvSpPr>
-          <p:cNvPr id="22" name="Shape 19"/>
+          <p:cNvPr id="23" name="Shape 19"/>
           <p:cNvSpPr/>
           <p:nvPr/>
         </p:nvSpPr>
@@ -15014,7 +15022,7 @@
       </p:sp>
       <p:sp>
         <p:nvSpPr>
-          <p:cNvPr id="23" name="Shape 20"/>
+          <p:cNvPr id="24" name="Shape 20"/>
           <p:cNvSpPr/>
           <p:nvPr/>
         </p:nvSpPr>
@@ -15034,7 +15042,7 @@
       </p:sp>
       <p:sp>
         <p:nvSpPr>
-          <p:cNvPr id="24" name="Text 21"/>
+          <p:cNvPr id="25" name="Text 21"/>
           <p:cNvSpPr/>
           <p:nvPr/>
         </p:nvSpPr>
@@ -15073,7 +15081,7 @@
       </p:sp>
       <p:sp>
         <p:nvSpPr>
-          <p:cNvPr id="25" name="Text 22"/>
+          <p:cNvPr id="26" name="Text 22"/>
           <p:cNvSpPr/>
           <p:nvPr/>
         </p:nvSpPr>
@@ -15112,7 +15120,7 @@
       </p:sp>
       <p:sp>
         <p:nvSpPr>
-          <p:cNvPr id="26" name="Shape 23"/>
+          <p:cNvPr id="27" name="Shape 23"/>
           <p:cNvSpPr/>
           <p:nvPr/>
         </p:nvSpPr>
@@ -15139,7 +15147,7 @@
       </p:sp>
       <p:sp>
         <p:nvSpPr>
-          <p:cNvPr id="27" name="Shape 24"/>
+          <p:cNvPr id="28" name="Shape 24"/>
           <p:cNvSpPr/>
           <p:nvPr/>
         </p:nvSpPr>
@@ -15159,7 +15167,7 @@
       </p:sp>
       <p:sp>
         <p:nvSpPr>
-          <p:cNvPr id="28" name="Text 25"/>
+          <p:cNvPr id="29" name="Text 25"/>
           <p:cNvSpPr/>
           <p:nvPr/>
         </p:nvSpPr>
@@ -15198,7 +15206,7 @@
       </p:sp>
       <p:sp>
         <p:nvSpPr>
-          <p:cNvPr id="29" name="Text 26"/>
+          <p:cNvPr id="30" name="Text 26"/>
           <p:cNvSpPr/>
           <p:nvPr/>
         </p:nvSpPr>
@@ -15237,7 +15245,7 @@
       </p:sp>
       <p:sp>
         <p:nvSpPr>
-          <p:cNvPr id="30" name="Shape 27"/>
+          <p:cNvPr id="31" name="Shape 27"/>
           <p:cNvSpPr/>
           <p:nvPr/>
         </p:nvSpPr>
@@ -15259,7 +15267,7 @@
       </p:sp>
       <p:sp>
         <p:nvSpPr>
-          <p:cNvPr id="31" name="Shape 28"/>
+          <p:cNvPr id="32" name="Shape 28"/>
           <p:cNvSpPr/>
           <p:nvPr/>
         </p:nvSpPr>
@@ -15279,7 +15287,7 @@
       </p:sp>
       <p:sp>
         <p:nvSpPr>
-          <p:cNvPr id="32" name="Text 29"/>
+          <p:cNvPr id="33" name="Text 29"/>
           <p:cNvSpPr/>
           <p:nvPr/>
         </p:nvSpPr>
@@ -15318,7 +15326,7 @@
       </p:sp>
       <p:sp>
         <p:nvSpPr>
-          <p:cNvPr id="33" name="Text 30"/>
+          <p:cNvPr id="34" name="Text 30"/>
           <p:cNvSpPr/>
           <p:nvPr/>
         </p:nvSpPr>
@@ -15357,7 +15365,7 @@
       </p:sp>
       <p:sp>
         <p:nvSpPr>
-          <p:cNvPr id="34" name="Shape 31"/>
+          <p:cNvPr id="35" name="Shape 31"/>
           <p:cNvSpPr/>
           <p:nvPr/>
         </p:nvSpPr>
@@ -15384,7 +15392,7 @@
       </p:sp>
       <p:sp>
         <p:nvSpPr>
-          <p:cNvPr id="35" name="Shape 32"/>
+          <p:cNvPr id="36" name="Shape 32"/>
           <p:cNvSpPr/>
           <p:nvPr/>
         </p:nvSpPr>
@@ -15404,7 +15412,7 @@
       </p:sp>
       <p:sp>
         <p:nvSpPr>
-          <p:cNvPr id="36" name="Text 33"/>
+          <p:cNvPr id="37" name="Text 33"/>
           <p:cNvSpPr/>
           <p:nvPr/>
         </p:nvSpPr>
@@ -15443,7 +15451,7 @@
       </p:sp>
       <p:sp>
         <p:nvSpPr>
-          <p:cNvPr id="37" name="Text 34"/>
+          <p:cNvPr id="38" name="Text 34"/>
           <p:cNvSpPr/>
           <p:nvPr/>
         </p:nvSpPr>
@@ -15482,7 +15490,7 @@
       </p:sp>
       <p:sp>
         <p:nvSpPr>
-          <p:cNvPr id="38" name="Shape 35"/>
+          <p:cNvPr id="39" name="Shape 35"/>
           <p:cNvSpPr/>
           <p:nvPr/>
         </p:nvSpPr>
@@ -15509,7 +15517,7 @@
       </p:sp>
       <p:sp>
         <p:nvSpPr>
-          <p:cNvPr id="39" name="Shape 36"/>
+          <p:cNvPr id="40" name="Shape 36"/>
           <p:cNvSpPr/>
           <p:nvPr/>
         </p:nvSpPr>
@@ -15529,7 +15537,7 @@
       </p:sp>
       <p:sp>
         <p:nvSpPr>
-          <p:cNvPr id="40" name="Text 37"/>
+          <p:cNvPr id="41" name="Text 37"/>
           <p:cNvSpPr/>
           <p:nvPr/>
         </p:nvSpPr>
@@ -15568,7 +15576,7 @@
       </p:sp>
       <p:sp>
         <p:nvSpPr>
-          <p:cNvPr id="41" name="Text 38"/>
+          <p:cNvPr id="42" name="Text 38"/>
           <p:cNvSpPr/>
           <p:nvPr/>
         </p:nvSpPr>
@@ -15607,7 +15615,7 @@
       </p:sp>
       <p:sp>
         <p:nvSpPr>
-          <p:cNvPr id="42" name="Shape 39"/>
+          <p:cNvPr id="43" name="Shape 39"/>
           <p:cNvSpPr/>
           <p:nvPr/>
         </p:nvSpPr>
@@ -15634,7 +15642,7 @@
       </p:sp>
       <p:sp>
         <p:nvSpPr>
-          <p:cNvPr id="43" name="Shape 40"/>
+          <p:cNvPr id="44" name="Shape 40"/>
           <p:cNvSpPr/>
           <p:nvPr/>
         </p:nvSpPr>
@@ -15654,7 +15662,7 @@
       </p:sp>
       <p:sp>
         <p:nvSpPr>
-          <p:cNvPr id="44" name="Text 41"/>
+          <p:cNvPr id="45" name="Text 41"/>
           <p:cNvSpPr/>
           <p:nvPr/>
         </p:nvSpPr>
@@ -15693,7 +15701,7 @@
       </p:sp>
       <p:sp>
         <p:nvSpPr>
-          <p:cNvPr id="45" name="Text 42"/>
+          <p:cNvPr id="46" name="Text 42"/>
           <p:cNvSpPr/>
           <p:nvPr/>
         </p:nvSpPr>
@@ -15732,7 +15740,7 @@
       </p:sp>
       <p:sp>
         <p:nvSpPr>
-          <p:cNvPr id="46" name="Shape 43"/>
+          <p:cNvPr id="47" name="Shape 43"/>
           <p:cNvSpPr/>
           <p:nvPr/>
         </p:nvSpPr>
@@ -15759,7 +15767,7 @@
       </p:sp>
       <p:sp>
         <p:nvSpPr>
-          <p:cNvPr id="47" name="Shape 44"/>
+          <p:cNvPr id="48" name="Shape 44"/>
           <p:cNvSpPr/>
           <p:nvPr/>
         </p:nvSpPr>
@@ -15779,7 +15787,7 @@
       </p:sp>
       <p:sp>
         <p:nvSpPr>
-          <p:cNvPr id="48" name="Text 45"/>
+          <p:cNvPr id="49" name="Text 45"/>
           <p:cNvSpPr/>
           <p:nvPr/>
         </p:nvSpPr>
@@ -15818,7 +15826,7 @@
       </p:sp>
       <p:sp>
         <p:nvSpPr>
-          <p:cNvPr id="49" name="Text 46"/>
+          <p:cNvPr id="50" name="Text 46"/>
           <p:cNvSpPr/>
           <p:nvPr/>
         </p:nvSpPr>
@@ -15857,7 +15865,7 @@
       </p:sp>
       <p:sp>
         <p:nvSpPr>
-          <p:cNvPr id="50" name="Shape 47"/>
+          <p:cNvPr id="51" name="Shape 47"/>
           <p:cNvSpPr/>
           <p:nvPr/>
         </p:nvSpPr>
@@ -15884,7 +15892,7 @@
       </p:sp>
       <p:sp>
         <p:nvSpPr>
-          <p:cNvPr id="51" name="Shape 48"/>
+          <p:cNvPr id="52" name="Shape 48"/>
           <p:cNvSpPr/>
           <p:nvPr/>
         </p:nvSpPr>
@@ -15904,7 +15912,7 @@
       </p:sp>
       <p:sp>
         <p:nvSpPr>
-          <p:cNvPr id="52" name="Text 49"/>
+          <p:cNvPr id="53" name="Text 49"/>
           <p:cNvSpPr/>
           <p:nvPr/>
         </p:nvSpPr>
@@ -15943,7 +15951,7 @@
       </p:sp>
       <p:sp>
         <p:nvSpPr>
-          <p:cNvPr id="53" name="Text 50"/>
+          <p:cNvPr id="54" name="Text 50"/>
           <p:cNvSpPr/>
           <p:nvPr/>
         </p:nvSpPr>
@@ -15982,7 +15990,7 @@
       </p:sp>
       <p:sp>
         <p:nvSpPr>
-          <p:cNvPr id="54" name="Shape 51"/>
+          <p:cNvPr id="55" name="Shape 51"/>
           <p:cNvSpPr/>
           <p:nvPr/>
         </p:nvSpPr>
@@ -16009,7 +16017,7 @@
       </p:sp>
       <p:sp>
         <p:nvSpPr>
-          <p:cNvPr id="55" name="Text 52"/>
+          <p:cNvPr id="56" name="Text 52"/>
           <p:cNvSpPr/>
           <p:nvPr/>
         </p:nvSpPr>
@@ -16297,7 +16305,7 @@
       </p:pic>
       <p:sp>
         <p:nvSpPr>
-          <p:cNvPr id="7" name="Shape 4"/>
+          <p:cNvPr id="8" name="Shape 4"/>
           <p:cNvSpPr/>
           <p:nvPr/>
         </p:nvSpPr>
@@ -16324,7 +16332,7 @@
       </p:sp>
       <p:sp>
         <p:nvSpPr>
-          <p:cNvPr id="8" name="Text 5"/>
+          <p:cNvPr id="9" name="Text 5"/>
           <p:cNvSpPr/>
           <p:nvPr/>
         </p:nvSpPr>
@@ -16363,7 +16371,7 @@
       </p:sp>
       <p:sp>
         <p:nvSpPr>
-          <p:cNvPr id="9" name="Text 6"/>
+          <p:cNvPr id="10" name="Text 6"/>
           <p:cNvSpPr/>
           <p:nvPr/>
         </p:nvSpPr>
@@ -16405,7 +16413,7 @@
       </p:sp>
       <p:sp>
         <p:nvSpPr>
-          <p:cNvPr id="10" name="Shape 7"/>
+          <p:cNvPr id="11" name="Shape 7"/>
           <p:cNvSpPr/>
           <p:nvPr/>
         </p:nvSpPr>
@@ -16432,7 +16440,7 @@
       </p:sp>
       <p:sp>
         <p:nvSpPr>
-          <p:cNvPr id="11" name="Text 8"/>
+          <p:cNvPr id="12" name="Text 8"/>
           <p:cNvSpPr/>
           <p:nvPr/>
         </p:nvSpPr>
@@ -16471,7 +16479,7 @@
       </p:sp>
       <p:sp>
         <p:nvSpPr>
-          <p:cNvPr id="12" name="Text 9"/>
+          <p:cNvPr id="13" name="Text 9"/>
           <p:cNvSpPr/>
           <p:nvPr/>
         </p:nvSpPr>
@@ -16513,7 +16521,7 @@
       </p:sp>
       <p:sp>
         <p:nvSpPr>
-          <p:cNvPr id="13" name="Shape 10"/>
+          <p:cNvPr id="14" name="Shape 10"/>
           <p:cNvSpPr/>
           <p:nvPr/>
         </p:nvSpPr>
@@ -16540,7 +16548,7 @@
       </p:sp>
       <p:sp>
         <p:nvSpPr>
-          <p:cNvPr id="14" name="Text 11"/>
+          <p:cNvPr id="15" name="Text 11"/>
           <p:cNvSpPr/>
           <p:nvPr/>
         </p:nvSpPr>
@@ -16579,7 +16587,7 @@
       </p:sp>
       <p:sp>
         <p:nvSpPr>
-          <p:cNvPr id="15" name="Text 12"/>
+          <p:cNvPr id="16" name="Text 12"/>
           <p:cNvSpPr/>
           <p:nvPr/>
         </p:nvSpPr>
@@ -16621,7 +16629,7 @@
       </p:sp>
       <p:sp>
         <p:nvSpPr>
-          <p:cNvPr id="16" name="Shape 13"/>
+          <p:cNvPr id="17" name="Shape 13"/>
           <p:cNvSpPr/>
           <p:nvPr/>
         </p:nvSpPr>
@@ -16648,7 +16656,7 @@
       </p:sp>
       <p:sp>
         <p:nvSpPr>
-          <p:cNvPr id="17" name="Text 14"/>
+          <p:cNvPr id="18" name="Text 14"/>
           <p:cNvSpPr/>
           <p:nvPr/>
         </p:nvSpPr>
@@ -16687,7 +16695,7 @@
       </p:sp>
       <p:sp>
         <p:nvSpPr>
-          <p:cNvPr id="18" name="Text 15"/>
+          <p:cNvPr id="19" name="Text 15"/>
           <p:cNvSpPr/>
           <p:nvPr/>
         </p:nvSpPr>
@@ -16729,7 +16737,7 @@
       </p:sp>
       <p:sp>
         <p:nvSpPr>
-          <p:cNvPr id="19" name="Shape 16"/>
+          <p:cNvPr id="20" name="Shape 16"/>
           <p:cNvSpPr/>
           <p:nvPr/>
         </p:nvSpPr>
@@ -16756,7 +16764,7 @@
       </p:sp>
       <p:sp>
         <p:nvSpPr>
-          <p:cNvPr id="20" name="Text 17"/>
+          <p:cNvPr id="21" name="Text 17"/>
           <p:cNvSpPr/>
           <p:nvPr/>
         </p:nvSpPr>
@@ -16795,7 +16803,7 @@
       </p:sp>
       <p:sp>
         <p:nvSpPr>
-          <p:cNvPr id="21" name="Text 18"/>
+          <p:cNvPr id="22" name="Text 18"/>
           <p:cNvSpPr/>
           <p:nvPr/>
         </p:nvSpPr>
@@ -16837,7 +16845,7 @@
       </p:sp>
       <p:sp>
         <p:nvSpPr>
-          <p:cNvPr id="22" name="Shape 19"/>
+          <p:cNvPr id="23" name="Shape 19"/>
           <p:cNvSpPr/>
           <p:nvPr/>
         </p:nvSpPr>
@@ -16864,7 +16872,7 @@
       </p:sp>
       <p:sp>
         <p:nvSpPr>
-          <p:cNvPr id="23" name="Text 20"/>
+          <p:cNvPr id="24" name="Text 20"/>
           <p:cNvSpPr/>
           <p:nvPr/>
         </p:nvSpPr>
@@ -16903,7 +16911,7 @@
       </p:sp>
       <p:sp>
         <p:nvSpPr>
-          <p:cNvPr id="24" name="Text 21"/>
+          <p:cNvPr id="25" name="Text 21"/>
           <p:cNvSpPr/>
           <p:nvPr/>
         </p:nvSpPr>
@@ -16945,7 +16953,7 @@
       </p:sp>
       <p:sp>
         <p:nvSpPr>
-          <p:cNvPr id="25" name="Shape 22"/>
+          <p:cNvPr id="26" name="Shape 22"/>
           <p:cNvSpPr/>
           <p:nvPr/>
         </p:nvSpPr>
@@ -16972,7 +16980,7 @@
       </p:sp>
       <p:sp>
         <p:nvSpPr>
-          <p:cNvPr id="26" name="Text 23"/>
+          <p:cNvPr id="27" name="Text 23"/>
           <p:cNvSpPr/>
           <p:nvPr/>
         </p:nvSpPr>
@@ -17257,7 +17265,7 @@
       </p:pic>
       <p:sp>
         <p:nvSpPr>
-          <p:cNvPr id="7" name="Shape 4"/>
+          <p:cNvPr id="8" name="Shape 4"/>
           <p:cNvSpPr/>
           <p:nvPr/>
         </p:nvSpPr>
@@ -17279,7 +17287,7 @@
       </p:sp>
       <p:sp>
         <p:nvSpPr>
-          <p:cNvPr id="8" name="Text 5"/>
+          <p:cNvPr id="9" name="Text 5"/>
           <p:cNvSpPr/>
           <p:nvPr/>
         </p:nvSpPr>
@@ -17318,7 +17326,7 @@
       </p:sp>
       <p:sp>
         <p:nvSpPr>
-          <p:cNvPr id="9" name="Text 6"/>
+          <p:cNvPr id="10" name="Text 6"/>
           <p:cNvSpPr/>
           <p:nvPr/>
         </p:nvSpPr>
@@ -17360,7 +17368,7 @@
       </p:sp>
       <p:sp>
         <p:nvSpPr>
-          <p:cNvPr id="10" name="Shape 7"/>
+          <p:cNvPr id="11" name="Shape 7"/>
           <p:cNvSpPr/>
           <p:nvPr/>
         </p:nvSpPr>
@@ -17382,7 +17390,7 @@
       </p:sp>
       <p:sp>
         <p:nvSpPr>
-          <p:cNvPr id="11" name="Text 8"/>
+          <p:cNvPr id="12" name="Text 8"/>
           <p:cNvSpPr/>
           <p:nvPr/>
         </p:nvSpPr>
@@ -17421,7 +17429,7 @@
       </p:sp>
       <p:sp>
         <p:nvSpPr>
-          <p:cNvPr id="12" name="Text 9"/>
+          <p:cNvPr id="13" name="Text 9"/>
           <p:cNvSpPr/>
           <p:nvPr/>
         </p:nvSpPr>
@@ -17463,7 +17471,7 @@
       </p:sp>
       <p:sp>
         <p:nvSpPr>
-          <p:cNvPr id="13" name="Shape 10"/>
+          <p:cNvPr id="14" name="Shape 10"/>
           <p:cNvSpPr/>
           <p:nvPr/>
         </p:nvSpPr>
@@ -17485,7 +17493,7 @@
       </p:sp>
       <p:sp>
         <p:nvSpPr>
-          <p:cNvPr id="14" name="Shape 11"/>
+          <p:cNvPr id="15" name="Shape 11"/>
           <p:cNvSpPr/>
           <p:nvPr/>
         </p:nvSpPr>
@@ -17505,7 +17513,7 @@
       </p:sp>
       <p:sp>
         <p:nvSpPr>
-          <p:cNvPr id="15" name="Text 12"/>
+          <p:cNvPr id="16" name="Text 12"/>
           <p:cNvSpPr/>
           <p:nvPr/>
         </p:nvSpPr>
@@ -17544,7 +17552,7 @@
       </p:sp>
       <p:sp>
         <p:nvSpPr>
-          <p:cNvPr id="16" name="Text 13"/>
+          <p:cNvPr id="17" name="Text 13"/>
           <p:cNvSpPr/>
           <p:nvPr/>
         </p:nvSpPr>
@@ -17583,7 +17591,7 @@
       </p:sp>
       <p:sp>
         <p:nvSpPr>
-          <p:cNvPr id="17" name="Text 14"/>
+          <p:cNvPr id="18" name="Text 14"/>
           <p:cNvSpPr/>
           <p:nvPr/>
         </p:nvSpPr>
@@ -17625,7 +17633,7 @@
       </p:sp>
       <p:sp>
         <p:nvSpPr>
-          <p:cNvPr id="18" name="Shape 15"/>
+          <p:cNvPr id="19" name="Shape 15"/>
           <p:cNvSpPr/>
           <p:nvPr/>
         </p:nvSpPr>
@@ -17647,7 +17655,7 @@
       </p:sp>
       <p:sp>
         <p:nvSpPr>
-          <p:cNvPr id="19" name="Shape 16"/>
+          <p:cNvPr id="20" name="Shape 16"/>
           <p:cNvSpPr/>
           <p:nvPr/>
         </p:nvSpPr>
@@ -17667,7 +17675,7 @@
       </p:sp>
       <p:sp>
         <p:nvSpPr>
-          <p:cNvPr id="20" name="Text 17"/>
+          <p:cNvPr id="21" name="Text 17"/>
           <p:cNvSpPr/>
           <p:nvPr/>
         </p:nvSpPr>
@@ -17706,7 +17714,7 @@
       </p:sp>
       <p:sp>
         <p:nvSpPr>
-          <p:cNvPr id="21" name="Text 18"/>
+          <p:cNvPr id="22" name="Text 18"/>
           <p:cNvSpPr/>
           <p:nvPr/>
         </p:nvSpPr>
@@ -17745,7 +17753,7 @@
       </p:sp>
       <p:sp>
         <p:nvSpPr>
-          <p:cNvPr id="22" name="Text 19"/>
+          <p:cNvPr id="23" name="Text 19"/>
           <p:cNvSpPr/>
           <p:nvPr/>
         </p:nvSpPr>
@@ -17787,7 +17795,7 @@
       </p:sp>
       <p:sp>
         <p:nvSpPr>
-          <p:cNvPr id="23" name="Shape 20"/>
+          <p:cNvPr id="24" name="Shape 20"/>
           <p:cNvSpPr/>
           <p:nvPr/>
         </p:nvSpPr>
@@ -17809,7 +17817,7 @@
       </p:sp>
       <p:sp>
         <p:nvSpPr>
-          <p:cNvPr id="24" name="Shape 21"/>
+          <p:cNvPr id="25" name="Shape 21"/>
           <p:cNvSpPr/>
           <p:nvPr/>
         </p:nvSpPr>
@@ -17829,7 +17837,7 @@
       </p:sp>
       <p:sp>
         <p:nvSpPr>
-          <p:cNvPr id="25" name="Text 22"/>
+          <p:cNvPr id="26" name="Text 22"/>
           <p:cNvSpPr/>
           <p:nvPr/>
         </p:nvSpPr>
@@ -17868,7 +17876,7 @@
       </p:sp>
       <p:sp>
         <p:nvSpPr>
-          <p:cNvPr id="26" name="Text 23"/>
+          <p:cNvPr id="27" name="Text 23"/>
           <p:cNvSpPr/>
           <p:nvPr/>
         </p:nvSpPr>
@@ -17907,7 +17915,7 @@
       </p:sp>
       <p:sp>
         <p:nvSpPr>
-          <p:cNvPr id="27" name="Text 24"/>
+          <p:cNvPr id="28" name="Text 24"/>
           <p:cNvSpPr/>
           <p:nvPr/>
         </p:nvSpPr>
@@ -17949,7 +17957,7 @@
       </p:sp>
       <p:sp>
         <p:nvSpPr>
-          <p:cNvPr id="28" name="Shape 25"/>
+          <p:cNvPr id="29" name="Shape 25"/>
           <p:cNvSpPr/>
           <p:nvPr/>
         </p:nvSpPr>
@@ -17976,7 +17984,7 @@
       </p:sp>
       <p:sp>
         <p:nvSpPr>
-          <p:cNvPr id="29" name="Text 26"/>
+          <p:cNvPr id="30" name="Text 26"/>
           <p:cNvSpPr/>
           <p:nvPr/>
         </p:nvSpPr>
@@ -18261,7 +18269,7 @@
       </p:pic>
       <p:sp>
         <p:nvSpPr>
-          <p:cNvPr id="7" name="Shape 4"/>
+          <p:cNvPr id="8" name="Shape 4"/>
           <p:cNvSpPr/>
           <p:nvPr/>
         </p:nvSpPr>
@@ -18288,7 +18296,7 @@
       </p:sp>
       <p:sp>
         <p:nvSpPr>
-          <p:cNvPr id="8" name="Text 5"/>
+          <p:cNvPr id="9" name="Text 5"/>
           <p:cNvSpPr/>
           <p:nvPr/>
         </p:nvSpPr>
@@ -18327,7 +18335,7 @@
       </p:sp>
       <p:sp>
         <p:nvSpPr>
-          <p:cNvPr id="9" name="Shape 6"/>
+          <p:cNvPr id="10" name="Shape 6"/>
           <p:cNvSpPr/>
           <p:nvPr/>
         </p:nvSpPr>
@@ -18350,7 +18358,7 @@
       </p:sp>
       <p:sp>
         <p:nvSpPr>
-          <p:cNvPr id="10" name="Shape 7"/>
+          <p:cNvPr id="11" name="Shape 7"/>
           <p:cNvSpPr/>
           <p:nvPr/>
         </p:nvSpPr>
@@ -18370,7 +18378,7 @@
       </p:sp>
       <p:sp>
         <p:nvSpPr>
-          <p:cNvPr id="11" name="Shape 8"/>
+          <p:cNvPr id="12" name="Shape 8"/>
           <p:cNvSpPr/>
           <p:nvPr/>
         </p:nvSpPr>
@@ -18392,7 +18400,7 @@
       </p:sp>
       <p:sp>
         <p:nvSpPr>
-          <p:cNvPr id="12" name="Text 9"/>
+          <p:cNvPr id="13" name="Text 9"/>
           <p:cNvSpPr/>
           <p:nvPr/>
         </p:nvSpPr>
@@ -18431,7 +18439,7 @@
       </p:sp>
       <p:sp>
         <p:nvSpPr>
-          <p:cNvPr id="13" name="Shape 10"/>
+          <p:cNvPr id="14" name="Shape 10"/>
           <p:cNvSpPr/>
           <p:nvPr/>
         </p:nvSpPr>
@@ -18454,7 +18462,7 @@
       </p:sp>
       <p:sp>
         <p:nvSpPr>
-          <p:cNvPr id="14" name="Shape 11"/>
+          <p:cNvPr id="15" name="Shape 11"/>
           <p:cNvSpPr/>
           <p:nvPr/>
         </p:nvSpPr>
@@ -18474,7 +18482,7 @@
       </p:sp>
       <p:sp>
         <p:nvSpPr>
-          <p:cNvPr id="15" name="Shape 12"/>
+          <p:cNvPr id="16" name="Shape 12"/>
           <p:cNvSpPr/>
           <p:nvPr/>
         </p:nvSpPr>
@@ -18501,7 +18509,7 @@
       </p:sp>
       <p:sp>
         <p:nvSpPr>
-          <p:cNvPr id="16" name="Text 13"/>
+          <p:cNvPr id="17" name="Text 13"/>
           <p:cNvSpPr/>
           <p:nvPr/>
         </p:nvSpPr>
@@ -18540,7 +18548,7 @@
       </p:sp>
       <p:sp>
         <p:nvSpPr>
-          <p:cNvPr id="17" name="Shape 14"/>
+          <p:cNvPr id="18" name="Shape 14"/>
           <p:cNvSpPr/>
           <p:nvPr/>
         </p:nvSpPr>
@@ -18563,7 +18571,7 @@
       </p:sp>
       <p:sp>
         <p:nvSpPr>
-          <p:cNvPr id="18" name="Shape 15"/>
+          <p:cNvPr id="19" name="Shape 15"/>
           <p:cNvSpPr/>
           <p:nvPr/>
         </p:nvSpPr>
@@ -18583,7 +18591,7 @@
       </p:sp>
       <p:sp>
         <p:nvSpPr>
-          <p:cNvPr id="19" name="Shape 16"/>
+          <p:cNvPr id="20" name="Shape 16"/>
           <p:cNvSpPr/>
           <p:nvPr/>
         </p:nvSpPr>
@@ -18610,7 +18618,7 @@
       </p:sp>
       <p:sp>
         <p:nvSpPr>
-          <p:cNvPr id="20" name="Text 17"/>
+          <p:cNvPr id="21" name="Text 17"/>
           <p:cNvSpPr/>
           <p:nvPr/>
         </p:nvSpPr>
@@ -18649,7 +18657,7 @@
       </p:sp>
       <p:sp>
         <p:nvSpPr>
-          <p:cNvPr id="21" name="Shape 18"/>
+          <p:cNvPr id="22" name="Shape 18"/>
           <p:cNvSpPr/>
           <p:nvPr/>
         </p:nvSpPr>
@@ -18672,7 +18680,7 @@
       </p:sp>
       <p:sp>
         <p:nvSpPr>
-          <p:cNvPr id="22" name="Shape 19"/>
+          <p:cNvPr id="23" name="Shape 19"/>
           <p:cNvSpPr/>
           <p:nvPr/>
         </p:nvSpPr>
@@ -18692,7 +18700,7 @@
       </p:sp>
       <p:sp>
         <p:nvSpPr>
-          <p:cNvPr id="23" name="Shape 20"/>
+          <p:cNvPr id="24" name="Shape 20"/>
           <p:cNvSpPr/>
           <p:nvPr/>
         </p:nvSpPr>
@@ -18719,7 +18727,7 @@
       </p:sp>
       <p:sp>
         <p:nvSpPr>
-          <p:cNvPr id="24" name="Text 21"/>
+          <p:cNvPr id="25" name="Text 21"/>
           <p:cNvSpPr/>
           <p:nvPr/>
         </p:nvSpPr>
@@ -18758,7 +18766,7 @@
       </p:sp>
       <p:sp>
         <p:nvSpPr>
-          <p:cNvPr id="25" name="Shape 22"/>
+          <p:cNvPr id="26" name="Shape 22"/>
           <p:cNvSpPr/>
           <p:nvPr/>
         </p:nvSpPr>
@@ -18781,7 +18789,7 @@
       </p:sp>
       <p:sp>
         <p:nvSpPr>
-          <p:cNvPr id="26" name="Shape 23"/>
+          <p:cNvPr id="27" name="Shape 23"/>
           <p:cNvSpPr/>
           <p:nvPr/>
         </p:nvSpPr>
@@ -18801,7 +18809,7 @@
       </p:sp>
       <p:sp>
         <p:nvSpPr>
-          <p:cNvPr id="27" name="Shape 24"/>
+          <p:cNvPr id="28" name="Shape 24"/>
           <p:cNvSpPr/>
           <p:nvPr/>
         </p:nvSpPr>
@@ -18823,7 +18831,7 @@
       </p:sp>
       <p:sp>
         <p:nvSpPr>
-          <p:cNvPr id="28" name="Text 25"/>
+          <p:cNvPr id="29" name="Text 25"/>
           <p:cNvSpPr/>
           <p:nvPr/>
         </p:nvSpPr>
@@ -18862,7 +18870,7 @@
       </p:sp>
       <p:sp>
         <p:nvSpPr>
-          <p:cNvPr id="29" name="Shape 26"/>
+          <p:cNvPr id="30" name="Shape 26"/>
           <p:cNvSpPr/>
           <p:nvPr/>
         </p:nvSpPr>
@@ -18889,7 +18897,7 @@
       </p:sp>
       <p:sp>
         <p:nvSpPr>
-          <p:cNvPr id="30" name="Text 27"/>
+          <p:cNvPr id="31" name="Text 27"/>
           <p:cNvSpPr/>
           <p:nvPr/>
         </p:nvSpPr>
@@ -18928,7 +18936,7 @@
       </p:sp>
       <p:sp>
         <p:nvSpPr>
-          <p:cNvPr id="31" name="Shape 28"/>
+          <p:cNvPr id="32" name="Shape 28"/>
           <p:cNvSpPr/>
           <p:nvPr/>
         </p:nvSpPr>
@@ -18951,7 +18959,7 @@
       </p:sp>
       <p:sp>
         <p:nvSpPr>
-          <p:cNvPr id="32" name="Shape 29"/>
+          <p:cNvPr id="33" name="Shape 29"/>
           <p:cNvSpPr/>
           <p:nvPr/>
         </p:nvSpPr>
@@ -18971,7 +18979,7 @@
       </p:sp>
       <p:sp>
         <p:nvSpPr>
-          <p:cNvPr id="33" name="Shape 30"/>
+          <p:cNvPr id="34" name="Shape 30"/>
           <p:cNvSpPr/>
           <p:nvPr/>
         </p:nvSpPr>
@@ -18993,7 +19001,7 @@
       </p:sp>
       <p:sp>
         <p:nvSpPr>
-          <p:cNvPr id="34" name="Text 31"/>
+          <p:cNvPr id="35" name="Text 31"/>
           <p:cNvSpPr/>
           <p:nvPr/>
         </p:nvSpPr>
@@ -19032,7 +19040,7 @@
       </p:sp>
       <p:sp>
         <p:nvSpPr>
-          <p:cNvPr id="35" name="Shape 32"/>
+          <p:cNvPr id="36" name="Shape 32"/>
           <p:cNvSpPr/>
           <p:nvPr/>
         </p:nvSpPr>
@@ -19055,7 +19063,7 @@
       </p:sp>
       <p:sp>
         <p:nvSpPr>
-          <p:cNvPr id="36" name="Shape 33"/>
+          <p:cNvPr id="37" name="Shape 33"/>
           <p:cNvSpPr/>
           <p:nvPr/>
         </p:nvSpPr>
@@ -19075,7 +19083,7 @@
       </p:sp>
       <p:sp>
         <p:nvSpPr>
-          <p:cNvPr id="37" name="Shape 34"/>
+          <p:cNvPr id="38" name="Shape 34"/>
           <p:cNvSpPr/>
           <p:nvPr/>
         </p:nvSpPr>
@@ -19097,7 +19105,7 @@
       </p:sp>
       <p:sp>
         <p:nvSpPr>
-          <p:cNvPr id="38" name="Text 35"/>
+          <p:cNvPr id="39" name="Text 35"/>
           <p:cNvSpPr/>
           <p:nvPr/>
         </p:nvSpPr>
@@ -19136,7 +19144,7 @@
       </p:sp>
       <p:sp>
         <p:nvSpPr>
-          <p:cNvPr id="39" name="Shape 36"/>
+          <p:cNvPr id="40" name="Shape 36"/>
           <p:cNvSpPr/>
           <p:nvPr/>
         </p:nvSpPr>
@@ -19158,7 +19166,7 @@
       </p:sp>
       <p:sp>
         <p:nvSpPr>
-          <p:cNvPr id="40" name="Text 37"/>
+          <p:cNvPr id="41" name="Text 37"/>
           <p:cNvSpPr/>
           <p:nvPr/>
         </p:nvSpPr>
@@ -19197,7 +19205,7 @@
       </p:sp>
       <p:sp>
         <p:nvSpPr>
-          <p:cNvPr id="41" name="Shape 38"/>
+          <p:cNvPr id="42" name="Shape 38"/>
           <p:cNvSpPr/>
           <p:nvPr/>
         </p:nvSpPr>
@@ -19220,7 +19228,7 @@
       </p:sp>
       <p:sp>
         <p:nvSpPr>
-          <p:cNvPr id="42" name="Shape 39"/>
+          <p:cNvPr id="43" name="Shape 39"/>
           <p:cNvSpPr/>
           <p:nvPr/>
         </p:nvSpPr>
@@ -19240,7 +19248,7 @@
       </p:sp>
       <p:sp>
         <p:nvSpPr>
-          <p:cNvPr id="43" name="Shape 40"/>
+          <p:cNvPr id="44" name="Shape 40"/>
           <p:cNvSpPr/>
           <p:nvPr/>
         </p:nvSpPr>
@@ -19262,7 +19270,7 @@
       </p:sp>
       <p:sp>
         <p:nvSpPr>
-          <p:cNvPr id="44" name="Text 41"/>
+          <p:cNvPr id="45" name="Text 41"/>
           <p:cNvSpPr/>
           <p:nvPr/>
         </p:nvSpPr>
@@ -19301,7 +19309,7 @@
       </p:sp>
       <p:sp>
         <p:nvSpPr>
-          <p:cNvPr id="45" name="Shape 42"/>
+          <p:cNvPr id="46" name="Shape 42"/>
           <p:cNvSpPr/>
           <p:nvPr/>
         </p:nvSpPr>
@@ -19324,7 +19332,7 @@
       </p:sp>
       <p:sp>
         <p:nvSpPr>
-          <p:cNvPr id="46" name="Shape 43"/>
+          <p:cNvPr id="47" name="Shape 43"/>
           <p:cNvSpPr/>
           <p:nvPr/>
         </p:nvSpPr>
@@ -19344,7 +19352,7 @@
       </p:sp>
       <p:sp>
         <p:nvSpPr>
-          <p:cNvPr id="47" name="Shape 44"/>
+          <p:cNvPr id="48" name="Shape 44"/>
           <p:cNvSpPr/>
           <p:nvPr/>
         </p:nvSpPr>
@@ -19366,7 +19374,7 @@
       </p:sp>
       <p:sp>
         <p:nvSpPr>
-          <p:cNvPr id="48" name="Text 45"/>
+          <p:cNvPr id="49" name="Text 45"/>
           <p:cNvSpPr/>
           <p:nvPr/>
         </p:nvSpPr>
@@ -19405,7 +19413,7 @@
       </p:sp>
       <p:sp>
         <p:nvSpPr>
-          <p:cNvPr id="49" name="Shape 46"/>
+          <p:cNvPr id="50" name="Shape 46"/>
           <p:cNvSpPr/>
           <p:nvPr/>
         </p:nvSpPr>
@@ -19420,14 +19428,14 @@
             </a:avLst>
           </a:prstGeom>
           <a:solidFill>
-            <a:srgbClr val="000000"/>
+            <a:srgbClr val="EFEAFE"/>
           </a:solidFill>
           <a:ln/>
         </p:spPr>
       </p:sp>
       <p:sp>
         <p:nvSpPr>
-          <p:cNvPr id="50" name="Text 47"/>
+          <p:cNvPr id="51" name="Text 47"/>
           <p:cNvSpPr/>
           <p:nvPr/>
         </p:nvSpPr>
@@ -19483,7 +19491,7 @@
       </p:sp>
       <p:sp>
         <p:nvSpPr>
-          <p:cNvPr id="51" name="Shape 48"/>
+          <p:cNvPr id="52" name="Shape 48"/>
           <p:cNvSpPr/>
           <p:nvPr/>
         </p:nvSpPr>
@@ -19498,14 +19506,14 @@
             </a:avLst>
           </a:prstGeom>
           <a:solidFill>
-            <a:srgbClr val="000000"/>
+            <a:srgbClr val="EFEAFE"/>
           </a:solidFill>
           <a:ln/>
         </p:spPr>
       </p:sp>
       <p:sp>
         <p:nvSpPr>
-          <p:cNvPr id="52" name="Text 49"/>
+          <p:cNvPr id="53" name="Text 49"/>
           <p:cNvSpPr/>
           <p:nvPr/>
         </p:nvSpPr>
@@ -19561,7 +19569,7 @@
       </p:sp>
       <p:sp>
         <p:nvSpPr>
-          <p:cNvPr id="53" name="Shape 50"/>
+          <p:cNvPr id="54" name="Shape 50"/>
           <p:cNvSpPr/>
           <p:nvPr/>
         </p:nvSpPr>
@@ -19576,14 +19584,14 @@
             </a:avLst>
           </a:prstGeom>
           <a:solidFill>
-            <a:srgbClr val="000000"/>
+            <a:srgbClr val="EFEAFE"/>
           </a:solidFill>
           <a:ln/>
         </p:spPr>
       </p:sp>
       <p:sp>
         <p:nvSpPr>
-          <p:cNvPr id="54" name="Text 51"/>
+          <p:cNvPr id="55" name="Text 51"/>
           <p:cNvSpPr/>
           <p:nvPr/>
         </p:nvSpPr>
@@ -19639,7 +19647,7 @@
       </p:sp>
       <p:sp>
         <p:nvSpPr>
-          <p:cNvPr id="55" name="Shape 52"/>
+          <p:cNvPr id="56" name="Shape 52"/>
           <p:cNvSpPr/>
           <p:nvPr/>
         </p:nvSpPr>
@@ -19654,14 +19662,14 @@
             </a:avLst>
           </a:prstGeom>
           <a:solidFill>
-            <a:srgbClr val="000000"/>
+            <a:srgbClr val="EFEAFE"/>
           </a:solidFill>
           <a:ln/>
         </p:spPr>
       </p:sp>
       <p:sp>
         <p:nvSpPr>
-          <p:cNvPr id="56" name="Text 53"/>
+          <p:cNvPr id="57" name="Text 53"/>
           <p:cNvSpPr/>
           <p:nvPr/>
         </p:nvSpPr>
@@ -19717,7 +19725,7 @@
       </p:sp>
       <p:sp>
         <p:nvSpPr>
-          <p:cNvPr id="57" name="Shape 54"/>
+          <p:cNvPr id="58" name="Shape 54"/>
           <p:cNvSpPr/>
           <p:nvPr/>
         </p:nvSpPr>
@@ -19732,14 +19740,14 @@
             </a:avLst>
           </a:prstGeom>
           <a:solidFill>
-            <a:srgbClr val="000000"/>
+            <a:srgbClr val="EFEAFE"/>
           </a:solidFill>
           <a:ln/>
         </p:spPr>
       </p:sp>
       <p:sp>
         <p:nvSpPr>
-          <p:cNvPr id="58" name="Text 55"/>
+          <p:cNvPr id="59" name="Text 55"/>
           <p:cNvSpPr/>
           <p:nvPr/>
         </p:nvSpPr>
@@ -19795,7 +19803,7 @@
       </p:sp>
       <p:sp>
         <p:nvSpPr>
-          <p:cNvPr id="59" name="Shape 56"/>
+          <p:cNvPr id="60" name="Shape 56"/>
           <p:cNvSpPr/>
           <p:nvPr/>
         </p:nvSpPr>
@@ -19810,14 +19818,14 @@
             </a:avLst>
           </a:prstGeom>
           <a:solidFill>
-            <a:srgbClr val="000000"/>
+            <a:srgbClr val="EFEAFE"/>
           </a:solidFill>
           <a:ln/>
         </p:spPr>
       </p:sp>
       <p:sp>
         <p:nvSpPr>
-          <p:cNvPr id="60" name="Text 57"/>
+          <p:cNvPr id="61" name="Text 57"/>
           <p:cNvSpPr/>
           <p:nvPr/>
         </p:nvSpPr>
@@ -19873,7 +19881,7 @@
       </p:sp>
       <p:sp>
         <p:nvSpPr>
-          <p:cNvPr id="61" name="Shape 58"/>
+          <p:cNvPr id="62" name="Shape 58"/>
           <p:cNvSpPr/>
           <p:nvPr/>
         </p:nvSpPr>
@@ -19888,14 +19896,14 @@
             </a:avLst>
           </a:prstGeom>
           <a:solidFill>
-            <a:srgbClr val="000000"/>
+            <a:srgbClr val="EFEAFE"/>
           </a:solidFill>
           <a:ln/>
         </p:spPr>
       </p:sp>
       <p:sp>
         <p:nvSpPr>
-          <p:cNvPr id="62" name="Text 59"/>
+          <p:cNvPr id="63" name="Text 59"/>
           <p:cNvSpPr/>
           <p:nvPr/>
         </p:nvSpPr>
@@ -19951,7 +19959,7 @@
       </p:sp>
       <p:sp>
         <p:nvSpPr>
-          <p:cNvPr id="63" name="Shape 60"/>
+          <p:cNvPr id="64" name="Shape 60"/>
           <p:cNvSpPr/>
           <p:nvPr/>
         </p:nvSpPr>
@@ -19966,14 +19974,14 @@
             </a:avLst>
           </a:prstGeom>
           <a:solidFill>
-            <a:srgbClr val="000000"/>
+            <a:srgbClr val="EFEAFE"/>
           </a:solidFill>
           <a:ln/>
         </p:spPr>
       </p:sp>
       <p:sp>
         <p:nvSpPr>
-          <p:cNvPr id="64" name="Text 61"/>
+          <p:cNvPr id="65" name="Text 61"/>
           <p:cNvSpPr/>
           <p:nvPr/>
         </p:nvSpPr>
@@ -20029,7 +20037,7 @@
       </p:sp>
       <p:sp>
         <p:nvSpPr>
-          <p:cNvPr id="65" name="Shape 62"/>
+          <p:cNvPr id="66" name="Shape 62"/>
           <p:cNvSpPr/>
           <p:nvPr/>
         </p:nvSpPr>
@@ -20044,14 +20052,14 @@
             </a:avLst>
           </a:prstGeom>
           <a:solidFill>
-            <a:srgbClr val="000000"/>
+            <a:srgbClr val="EFEAFE"/>
           </a:solidFill>
           <a:ln/>
         </p:spPr>
       </p:sp>
       <p:sp>
         <p:nvSpPr>
-          <p:cNvPr id="66" name="Text 63"/>
+          <p:cNvPr id="67" name="Text 63"/>
           <p:cNvSpPr/>
           <p:nvPr/>
         </p:nvSpPr>
@@ -20107,7 +20115,7 @@
       </p:sp>
       <p:sp>
         <p:nvSpPr>
-          <p:cNvPr id="67" name="Shape 64"/>
+          <p:cNvPr id="68" name="Shape 64"/>
           <p:cNvSpPr/>
           <p:nvPr/>
         </p:nvSpPr>
@@ -20134,7 +20142,7 @@
       </p:sp>
       <p:sp>
         <p:nvSpPr>
-          <p:cNvPr id="68" name="Text 65"/>
+          <p:cNvPr id="69" name="Text 65"/>
           <p:cNvSpPr/>
           <p:nvPr/>
         </p:nvSpPr>
@@ -21480,7 +21488,7 @@
       </p:graphicFrame>
       <p:sp>
         <p:nvSpPr>
-          <p:cNvPr id="8" name="Shape 4"/>
+          <p:cNvPr id="9" name="Shape 4"/>
           <p:cNvSpPr/>
           <p:nvPr/>
         </p:nvSpPr>
@@ -21502,7 +21510,7 @@
       </p:sp>
       <p:sp>
         <p:nvSpPr>
-          <p:cNvPr id="9" name="Text 5"/>
+          <p:cNvPr id="10" name="Text 5"/>
           <p:cNvSpPr/>
           <p:nvPr/>
         </p:nvSpPr>
@@ -21536,7 +21544,7 @@
                 <a:ea typeface="Montserrat" pitchFamily="34" charset="-122"/>
                 <a:cs typeface="Montserrat" pitchFamily="34" charset="-120"/>
               </a:rPr>
-              <a:t>Найчастіша «дія» у добре збудованій системі — не робити нічого руками: механізми вже відпрацювали, лишається стежити.</a:t>
+              <a:t>Найчастіша «дія» у добре збудованій системі — не робити нічого руками.</a:t>
             </a:r>
             <a:endParaRPr lang="en-US" sz="1300" dirty="0"/>
           </a:p>
@@ -21544,7 +21552,7 @@
       </p:sp>
       <p:sp>
         <p:nvSpPr>
-          <p:cNvPr id="10" name="Shape 6"/>
+          <p:cNvPr id="11" name="Shape 6"/>
           <p:cNvSpPr/>
           <p:nvPr/>
         </p:nvSpPr>
@@ -21566,7 +21574,7 @@
       </p:sp>
       <p:sp>
         <p:nvSpPr>
-          <p:cNvPr id="11" name="Text 7"/>
+          <p:cNvPr id="12" name="Text 7"/>
           <p:cNvSpPr/>
           <p:nvPr/>
         </p:nvSpPr>
@@ -21600,7 +21608,7 @@
                 <a:ea typeface="Montserrat" pitchFamily="34" charset="-122"/>
                 <a:cs typeface="Montserrat" pitchFamily="34" charset="-120"/>
               </a:rPr>
-              <a:t>Такт «Переконатися» перевіряють новим питанням: старе вже в кеші й «зеленіє» навіть під час збою.</a:t>
+              <a:t>Такт «Переконатися» перевіряють новим питанням: старе вже в кеші.</a:t>
             </a:r>
             <a:endParaRPr lang="en-US" sz="1300" dirty="0"/>
           </a:p>
@@ -21851,7 +21859,7 @@
       </p:pic>
       <p:sp>
         <p:nvSpPr>
-          <p:cNvPr id="7" name="Shape 4"/>
+          <p:cNvPr id="8" name="Shape 4"/>
           <p:cNvSpPr/>
           <p:nvPr/>
         </p:nvSpPr>
@@ -21874,7 +21882,7 @@
       </p:sp>
       <p:sp>
         <p:nvSpPr>
-          <p:cNvPr id="8" name="Shape 5"/>
+          <p:cNvPr id="9" name="Shape 5"/>
           <p:cNvSpPr/>
           <p:nvPr/>
         </p:nvSpPr>
@@ -21894,7 +21902,7 @@
       </p:sp>
       <p:sp>
         <p:nvSpPr>
-          <p:cNvPr id="9" name="Text 6"/>
+          <p:cNvPr id="10" name="Text 6"/>
           <p:cNvSpPr/>
           <p:nvPr/>
         </p:nvSpPr>
@@ -21933,7 +21941,7 @@
       </p:sp>
       <p:sp>
         <p:nvSpPr>
-          <p:cNvPr id="10" name="Text 7"/>
+          <p:cNvPr id="11" name="Text 7"/>
           <p:cNvSpPr/>
           <p:nvPr/>
         </p:nvSpPr>
@@ -21972,7 +21980,7 @@
       </p:sp>
       <p:sp>
         <p:nvSpPr>
-          <p:cNvPr id="11" name="Shape 8"/>
+          <p:cNvPr id="12" name="Shape 8"/>
           <p:cNvSpPr/>
           <p:nvPr/>
         </p:nvSpPr>
@@ -21992,7 +22000,7 @@
       </p:sp>
       <p:sp>
         <p:nvSpPr>
-          <p:cNvPr id="12" name="Text 9"/>
+          <p:cNvPr id="13" name="Text 9"/>
           <p:cNvSpPr/>
           <p:nvPr/>
         </p:nvSpPr>
@@ -22031,7 +22039,7 @@
       </p:sp>
       <p:sp>
         <p:nvSpPr>
-          <p:cNvPr id="13" name="Text 10"/>
+          <p:cNvPr id="14" name="Text 10"/>
           <p:cNvSpPr/>
           <p:nvPr/>
         </p:nvSpPr>
@@ -22070,7 +22078,7 @@
       </p:sp>
       <p:sp>
         <p:nvSpPr>
-          <p:cNvPr id="14" name="Shape 11"/>
+          <p:cNvPr id="15" name="Shape 11"/>
           <p:cNvSpPr/>
           <p:nvPr/>
         </p:nvSpPr>
@@ -22090,7 +22098,7 @@
       </p:sp>
       <p:sp>
         <p:nvSpPr>
-          <p:cNvPr id="15" name="Text 12"/>
+          <p:cNvPr id="16" name="Text 12"/>
           <p:cNvSpPr/>
           <p:nvPr/>
         </p:nvSpPr>
@@ -22129,7 +22137,7 @@
       </p:sp>
       <p:sp>
         <p:nvSpPr>
-          <p:cNvPr id="16" name="Text 13"/>
+          <p:cNvPr id="17" name="Text 13"/>
           <p:cNvSpPr/>
           <p:nvPr/>
         </p:nvSpPr>
@@ -22168,7 +22176,7 @@
       </p:sp>
       <p:sp>
         <p:nvSpPr>
-          <p:cNvPr id="17" name="Shape 14"/>
+          <p:cNvPr id="18" name="Shape 14"/>
           <p:cNvSpPr/>
           <p:nvPr/>
         </p:nvSpPr>
@@ -22188,7 +22196,7 @@
       </p:sp>
       <p:sp>
         <p:nvSpPr>
-          <p:cNvPr id="18" name="Text 15"/>
+          <p:cNvPr id="19" name="Text 15"/>
           <p:cNvSpPr/>
           <p:nvPr/>
         </p:nvSpPr>
@@ -22227,7 +22235,7 @@
       </p:sp>
       <p:sp>
         <p:nvSpPr>
-          <p:cNvPr id="19" name="Text 16"/>
+          <p:cNvPr id="20" name="Text 16"/>
           <p:cNvSpPr/>
           <p:nvPr/>
         </p:nvSpPr>
@@ -22266,7 +22274,7 @@
       </p:sp>
       <p:sp>
         <p:nvSpPr>
-          <p:cNvPr id="20" name="Shape 17"/>
+          <p:cNvPr id="21" name="Shape 17"/>
           <p:cNvSpPr/>
           <p:nvPr/>
         </p:nvSpPr>
@@ -22288,7 +22296,7 @@
       </p:sp>
       <p:sp>
         <p:nvSpPr>
-          <p:cNvPr id="21" name="Text 18"/>
+          <p:cNvPr id="22" name="Text 18"/>
           <p:cNvSpPr/>
           <p:nvPr/>
         </p:nvSpPr>
@@ -22327,7 +22335,7 @@
       </p:sp>
       <p:sp>
         <p:nvSpPr>
-          <p:cNvPr id="22" name="Text 19"/>
+          <p:cNvPr id="23" name="Text 19"/>
           <p:cNvSpPr/>
           <p:nvPr/>
         </p:nvSpPr>
@@ -22369,7 +22377,7 @@
       </p:sp>
       <p:sp>
         <p:nvSpPr>
-          <p:cNvPr id="23" name="Shape 20"/>
+          <p:cNvPr id="24" name="Shape 20"/>
           <p:cNvSpPr/>
           <p:nvPr/>
         </p:nvSpPr>
@@ -22396,7 +22404,7 @@
       </p:sp>
       <p:sp>
         <p:nvSpPr>
-          <p:cNvPr id="24" name="Text 21"/>
+          <p:cNvPr id="25" name="Text 21"/>
           <p:cNvSpPr/>
           <p:nvPr/>
         </p:nvSpPr>
@@ -23677,7 +23685,7 @@
       </p:graphicFrame>
       <p:sp>
         <p:nvSpPr>
-          <p:cNvPr id="8" name="Shape 4"/>
+          <p:cNvPr id="9" name="Shape 4"/>
           <p:cNvSpPr/>
           <p:nvPr/>
         </p:nvSpPr>
@@ -23699,7 +23707,7 @@
       </p:sp>
       <p:sp>
         <p:nvSpPr>
-          <p:cNvPr id="9" name="Text 5"/>
+          <p:cNvPr id="10" name="Text 5"/>
           <p:cNvSpPr/>
           <p:nvPr/>
         </p:nvSpPr>
@@ -23738,7 +23746,7 @@
       </p:sp>
       <p:sp>
         <p:nvSpPr>
-          <p:cNvPr id="10" name="Text 6"/>
+          <p:cNvPr id="11" name="Text 6"/>
           <p:cNvSpPr/>
           <p:nvPr/>
         </p:nvSpPr>

--- a/docs/decks/L12.pptx
+++ b/docs/decks/L12.pptx
@@ -522,7 +522,7 @@
           <a:p>
             <a:r>
               <a:rPr lang="en-US" dirty="0"/>
-              <a:t>Вітаю на дванадцятому, фінальному уроці курсу. Шість тижнів тому у вас було три рядки коду і чотири питання без відповідей — гроші, надійність, якість, видимість. Сьогодні у вас production-контур: routing, cost-облік, кеш, інструменти з HITL, fallback із деградацією, guardrail на межі, повна спостережуваність і eval-гейт у CI. Цей урок не додає жодної нової фічі — і це свідомо. Системами не користуються, ними володіють, і різниця проявляється у два моменти: коли щось ламається — руки знають ранбук чи гуглять? — і коли треба захистити бюджет — є KPI-мова чи тільки терміни? Обидва моменти настануть, тому сьогодні готуємось саме до них. Три вміння на сьогодні: прогнати все наскрізь із чистого клону, відпрацювати інцидент за ранбуком і розповісти про систему через наслідки, а не технології. Починаємо фінал.</a:t>
+              <a:t/>
             </a:r>
             <a:endParaRPr lang="en-US" dirty="0"/>
           </a:p>
@@ -610,7 +610,7 @@
           <a:p>
             <a:r>
               <a:rPr lang="en-US" dirty="0"/>
-              <a:t>Найчастіше питання після курсу: з чого почати у своєму проєкті, де вже є LLM-виклики і немає нічого навколо них? Реалістичний план на місяць. Тиждень перший: unified logging плюс вартість — один лог-рядок на запит, cost із usage. Найшвидший видимий ефект: уже за тиждень ви вперше знаєте, скільки що коштує. Критерій «зроблено»: будь-яке операційне питання про гроші закривається SQL-запитом. Тиждень другий: реєстр промптів — промпти з коду в реєстр, версія в лог; rollback за секунди замість археології. Критерій: відкат займає секунди і лишає слід. Тиждень третій: evals на критичні сценарії — десять-п'ятнадцять кейсів на те, що страшно зламати. Критерій: зламаний промпт робить прогін червоним відтворювано. Тиждень четвертий: гейт у CI — exit code вже є, лишилося повісити на PR і ввімкнути required check. Критерій: червоний прогін блокує merge, і в історії CI є доказ. Помітьте: це той самий порядок, яким ішов курс, — і він не випадковий: без лога нема вартості, без реєстру нема чистого відкату, без evals нема гейта. Спокуса «впровадимо все одразу» закінчується тим, що не впроваджено нічого. З практики: на реальній агентній платформі шари з'являлися рівно в цій послідовності — ніхто не планував її як методику, вона просто єдина, що працює. На заперечення «немає часу» — арифметика: перший тиждень самоокупний. Лог і вартість — один-два дні роботи, після яких з'являється цифра «скільки коштує наша LLM-фіча», а вона майже завжди знаходить економію, що покриває решту плану.</a:t>
+              <a:t/>
             </a:r>
             <a:endParaRPr lang="en-US" dirty="0"/>
           </a:p>
@@ -698,7 +698,7 @@
           <a:p>
             <a:r>
               <a:rPr lang="en-US" dirty="0"/>
-              <a:t>Опційна надбудова фінального тижня — індустріальна вітрина. Ідея: сервіс віддає свої лічильники у стандартному текстовому форматі на GET /metrics, а стек Prometheus плюс Grafana — його ви піднімаєте поруч самі, advanced-профіль compose дає Redis, дашборди в нього свідомо не зашиті — збирає їх за розкладом і малює графіки з історією, алертами і всім звичним арсеналом. Коли це варте зусиль: коли сервісів стає більше одного, коли потрібні алерти з маршрутизацією на чергового, коли тренди хочеться зберігати місяцями. Зверніть увагу: самі дані не змінюються — ті самі лічильники, той самий лог; міняється лише вітрина. Це пряме продовження принципу з уроку 9: налагодьте джерело, а вітрин може бути скільки завгодно. Якщо беретеся — почніть з експорту трьох цифр: requests, fallback, cache-hit — і одного графіка. Повний дашборд виростає ітераціями, а не проєктом на квартал.</a:t>
+              <a:t/>
             </a:r>
             <a:endParaRPr lang="en-US" dirty="0"/>
           </a:p>
@@ -786,7 +786,7 @@
           <a:p>
             <a:r>
               <a:rPr lang="en-US" dirty="0"/>
-              <a:t>Курс дав вісім механізмів і показав приблизно стільки ж опційних. Найчастіше питання після фіналу — що з цього ставити першим у себе. Відповідь «усе» не працює: кожен механізм має ціну в складності, і додавати його варто за сигналом із ваших же метрик. Semantic cache — коли точний кеш дає низький hit ratio, а в лозі багато різних формулювань того самого питання; не ставте його «бо звучить розумно» — він дорожчий і ризикує віддати відповідь на схоже, але інше питання. Circuit breaker — коли збої провайдера тривають хвилинами і кожен запит чекає таймаут; при поодиноких 5xx ретраїв із паузою достатньо. LLM-as-judge — коли rule-based кейси вже не ловлять «формально правильно, а по суті погано»; не починайте з judge — він дорогий, недетермінований і сам потребує перевірки. Модель-класифікатор у роутері — коли словник маркерів розповзся по мовах і правки стали регулярними; на двох класах правила дешевші й прозоріші. Індустріальний стек метрик — коли питання пішли за межі однієї системи. А черга approvals у базі — навпаки: не чекайте сигналу, це робиться відразу, урок 8. Принцип: механізм додається під виміряну проблему. Перевірка проста: якщо не можете назвати метрику, яка після впровадження мусить змінитися, — ви не знаєте, чого хочете від механізму. А коли метрика названа — маєте критерій «спрацювало / ні» і право відкотити складність, яка не окупилася. Єдиний виняток — речі, чия відсутність коштує незворотно: durability черги підтверджень, відсутність секретів у коді, ліміт витрат у кабінеті провайдера. Тут сигналом буде вже наслідок.</a:t>
+              <a:t/>
             </a:r>
             <a:endParaRPr lang="en-US" dirty="0"/>
           </a:p>
@@ -874,7 +874,7 @@
           <a:p>
             <a:r>
               <a:rPr lang="en-US" dirty="0"/>
-              <a:t>Курс закінчується на працюючому контурі, але системи не стоять на місці — і всі три напрямки, куди вона поїде, передбачувані. Перше: модель під вами зміниться. Провайдер оновить снапшот, виведе старий з обігу, змінить прайс або ліміти — це не гіпотеза, це графік. Що робить контур: снапшот запінений з уроку 3, тож зміна не приїде сама; перехід на новий — це PR через eval-гейт з уроку 11, тобто деградацію ви побачите до користувачів. Без цих двох речей оновлення провайдера виглядає як «бот раптом почав дурити», і зв'язок із причиною не встановлюється ніколи. Друге: промптів стане більше — під різні маршрути, мови, типи звернень, разом зі схемами інструментів і кейсами. Правило вже у вас є: усе, що впливає на поведінку, лежить у реєстрі з версіями, а не в коді, і зміна пари «промпт + механізм» їде одним релізом. Системи, де промпти розповзлися по коду і документах, потім збирають назад окремим проєктом — він нікому не подобається. Третє: трафік виросте, і вартість виросте нелінійно — не тому, що запитів більше, а тому, що контексти довшають, а довший контекст оплачується в кожному виклику. Захист: облік по зверненню з уроку 4, бюджет із алертом і кеш із метрикою з уроку 5. Найчастіший сюрприз у рахунку — тихе зростання середньої довжини промпта, якого ніхто не міряв. І принцип передачі: система, яку не можна передати іншій людині, не готова. Мінімальний комплект — рівно те, що ви зробили за курс: README, runbook, реєстр, golden dataset, CI-гейт. Якщо новий інженер за пів дня піднімає систему, ламає її навмисно і бачить червоний гейт — контур переданий. Якщо для цього потрібні ви — передана залежність від вас.</a:t>
+              <a:t/>
             </a:r>
             <a:endParaRPr lang="en-US" dirty="0"/>
           </a:p>
@@ -962,7 +962,7 @@
           <a:p>
             <a:r>
               <a:rPr lang="en-US" dirty="0"/>
-              <a:t>Чесний список того, що ми свідомо лишили за дужками — і що тепер, з контуром у руках, береться як надбудова, а не з нуля. Multi-turn діалог і streaming: історія розмови і її вартість, потік токенів, time-to-first-token. RAG — пошук по базі знань як джерело фактів; окремий капстоун сам по собі. Semantic cache — опційна доріжка уроку 5 є, за межами лишився продакшн-рівень: eviction, метрики схожості, окреме сховище. Canary в коді — план з уроку 11, доведений до механізму. Реальний хмарний деплой, autoscaling, мультитенантність — свідомо поза курсом: у нас локальний runtime і план rollout. Secrets і ротація ключів: у курсі ключ живе тільки в gateway, і для одного контуру цього достатньо; далі — сховище секретів, ротація без рестарту, окремі ключі на середовище і тенанта; сигнал — другий провайдер або другий контур. Quota і rate limiting: курс розбирає 429 від провайдера — наступний крок власні ліміти для клієнтів, будується на тому самому unified log; сигнал — перший зовнішній споживач. Fine-tuning: 80 відсотків операційних проблем вирішуються контуром керування, а не вагами; коли варто — стабільний домен, великий трафік, доведена межа промпта; і тоді fine-tuning стає ще одним версіонованим артефактом у тому самому реєстрі і гейті. Спільна риса всіх пунктів: жоден не вимагає переробляти контур. Лог прийме нові поля, роутер — нові критерії, evals — нові кейси, гейт не зміниться взагалі. Саме це і було метою: не набір фіч, а операційна модель, яка витримує ріст. Порада на перший крок: перш ніж додавати нове, підключіть реальний ключ до того, що є, і поживіть тиждень на живій моделі — зрозумієте, який пункт списку вам насправді потрібен першим.</a:t>
+              <a:t/>
             </a:r>
             <a:endParaRPr lang="en-US" dirty="0"/>
           </a:p>
@@ -1050,7 +1050,7 @@
           <a:p>
             <a:r>
               <a:rPr lang="en-US" dirty="0"/>
-              <a:t>Перш ніж перейти до екрана — що саме ви зараз побачите і навіщо. Послідовність із чотирьох кадрів. Перший: чистий клон репозиторію і docker compose up --build — єдиний чесний тест збірки. Другий: повний наскрізний сценарій з блоку 02 — від питання в чаті до гейта, без зупинок і підглядань. Третій: інцидент за ранбуком — серія __fail_503, консоль показує зростання fallback і error rate, користувач бачить заглушку, потім відновлення; таймлайн фіксується, як у постмортемі. Четвертий: KPI-проходка по плитках консолі — кожне число перекладається бізнес-мовою: гроші, користувачі, ризик. Навіщо це все: довести володіння, а не наявність фіч. Збірка відтворювана, інцидент відпрацьовується руками за сценарієм, кожна плитка пояснюється наслідками — це і є різниця між «зробив курсовий» і «володію системою». [Ведучому: сценарій рунбука (rb1/rb2/rb3) не містить ескалації — на KPI-проходці плитка /cost покаже $0.0000 (уся вартість mock сидить у mock-strong), тому перед кадром KPI зробити один ескалаційний запит: «поверніть гроші, терміново». Docker-образи мають бути в кеші, build прогнати ДО запису — інакше пів-хронометражу підуть на прогрес-бари; монтажні точки — на очікуваннях. Контрольне питання кадру «відновлення» НЕ має бути тим, що вже ставилося: воно в кеші і зеленіє навіть при відкритому breaker'і — брати нове питання або скинути кеш перед кадром. Прогін evals лишає pending-заявку в /approvals — перед кадром черги чистий стан через docker compose down -v. Тримати поруч скріншот «точки А» з уроку 1 — фінальне порівняння двох скріншотів.]</a:t>
+              <a:t/>
             </a:r>
             <a:endParaRPr lang="en-US" dirty="0"/>
           </a:p>
@@ -1138,7 +1138,7 @@
           <a:p>
             <a:r>
               <a:rPr lang="en-US" dirty="0"/>
-              <a:t>Фінальна лабораторна — чотири обов'язкові кроки і один опційний. Крок перший: повний прогін. Чистий клон свого репозиторію, docker compose up --build, наскрізний сценарій з блоку 02. Без підглядань: де спіткнулися — там і доопрацювання. Крок другий: інцидент за ранбуком. Серія __fail_503, на консолі fallback і error rate ростуть, користувач бачить заглушку; потім відновлення і підтвердження нормальної роботи. Зафіксуйте таймлайн, як у постмортемі: коли почалося, як виявили, що бачив користувач, коли відпустило. Крок третій: KPI-огляд. Кожну плитку консолі перекладіть бізнес-мовою — що це число означає для грошей, користувачів, ризику. П'ять хвилин, які варті більше за годину технічних деталей. Крок четвертий: свій 30-day план. Начерк для власної команди: що переносите першим і чому. Це не формальність — це найкорисніший артефакт для вашого наступного робочого тижня, і він же ляже в README-розділ ДЗ. І опційний п'ятий: /metrics — експортувати лічильники у Prometheus-форматі і підняти дашборд поверх advanced-профілю. [Ведучому: контрольне питання відновлення на кроці 2 — нове або зі скинутим кешем; для живої плитки вартості перед KPI-оглядом — один ескалаційний запит.]</a:t>
+              <a:t/>
             </a:r>
             <a:endParaRPr lang="en-US" dirty="0"/>
           </a:p>
@@ -1226,7 +1226,7 @@
           <a:p>
             <a:r>
               <a:rPr lang="en-US" dirty="0"/>
-              <a:t>Зафіксуємо, що ми щойно побачили — і що це доводить. Перше: збірка відтворювана. Система піднялася з чистого клону і пройшла наскрізний сценарій — а «чистий клон» це єдиний чесний тест збірки: ментор побачить рівно те, що побачить чистий клон, і демо працює не лише на машині автора. Друге: інцидент — керована процедура, а не паніка. Автоматика відпрацювала сама — fallback, деградація, відновлення; руки за ранбуком лише підтвердили симптом по плитках, переконалися новим питанням і зафіксували таймлайн. Це і є формат постмортема — сьогодні він відпрацьований там, де ставки нульові. Третє: система пояснюється наслідками. Кожна плитка консолі перекладається на гроші, користувачів і ризик, і кожне твердження підкріплене артефактом на екрані — а твердження з доказом коштує вдесятеро дорожче за твердження з ентузіазмом. Разом ці три картинки — і є те «володіння системою», про яке ми говорили на початку: точка Б досягнута, і ви вмієте нею користуватися, лагодити її і захищати її бюджет.</a:t>
+              <a:t/>
             </a:r>
             <a:endParaRPr lang="en-US" dirty="0"/>
           </a:p>
@@ -1314,7 +1314,7 @@
           <a:p>
             <a:r>
               <a:rPr lang="en-US" dirty="0"/>
-              <a:t>Перш ніж перейти до останнього ДЗ — чесна перевірка обов'язкової доріжки, без оцінок. Чотири пункти. Система піднімається з чистого клону і проходить наскрізний сценарій — не «на моїй машині працює», а саме з чистого клону. Інцидент відпрацьований за ранбуком, з таймлайном — не прочитаний, а програний руками. Можу за три хвилини пояснити систему людині без інженерного бекграунду — одне речення проблеми, три-чотири наслідки, один живий доказ. І є начерк 30-day rollout для своєї команди — що переносите першим і чому. Ці чотири пункти — це не просто чек-лист уроку: це рівно те, що перевіряє фінальне ДЗ, ваш зібраний капстоун. Де завагалися — туди і повертайтеся: блок 02 підкаже номер уроку для повторення. Питання — у канал потоку або на Q&amp;A.</a:t>
+              <a:t/>
             </a:r>
             <a:endParaRPr lang="en-US" dirty="0"/>
           </a:p>
@@ -1402,7 +1402,7 @@
           <a:p>
             <a:r>
               <a:rPr lang="en-US" dirty="0"/>
-              <a:t>Чотири способи змазати фінал — усі спостерігалися в реальних капстоунах. Перший: демо, яке працює лише на машині автора. «Чистий клон» — єдиний чесний тест збірки; ментор побачить рівно те, що побачить чистий клон, — жодна локальна змінна, жоден незакомічений файл вас не врятує. Другий: runbook написаний, але не програний. Це література, а не інструмент — прогін дає половину цінності, бо саме на прогоні з'ясовується, що плитка називається інакше і команда вимагає інших прав. Третій: розповідь списком технологій замість списку наслідків. Технології — ваша кухня; наслідки для грошей, користувачів і ризику — спільна мова з тими, хто вирішує про бюджет. Четвертий: «впровадимо все одразу» у своїй команді. Місяць по шару на тиждень б'є квартал грандіозного плану — кожен шар спирається на попередній, і спокуса зробити все одразу закінчується тим, що не зроблено нічого.</a:t>
+              <a:t/>
             </a:r>
             <a:endParaRPr lang="en-US" dirty="0"/>
           </a:p>
@@ -1490,7 +1490,7 @@
           <a:p>
             <a:r>
               <a:rPr lang="en-US" dirty="0"/>
-              <a:t>Домовимось про результат фінального уроку — діями, як завжди. Після сьогоднішнього заняття ви зможете: прогнати свою систему наскрізь із чистого клону — docker compose up --build і повний сценарій без підглядань у нотатки; відпрацювати інцидент за ранбуком — виявити, підтвердити по плитках, дати автоматиці спрацювати і переконатися, що відпустило; зафіксувати таймлайн інциденту у форматі постмортема — механізмами, а не прізвищами; перекласти кожну плитку консолі KPI-мовою — що це число означає для грошей, користувачів і ризику; скласти 30-day rollout для своєї команди — лог, реєстр, evals, гейт, по шару на тиждень; і обрати наступний шар складності за виміряним сигналом із власних метрик, а не за модою. Кожен пункт сьогодні перевіряється руками у фінальній лабі — а перші чотири ще й лягають у ДЗ тижня, яке і є вашим зібраним капстоуном.</a:t>
+              <a:t/>
             </a:r>
             <a:endParaRPr lang="en-US" dirty="0"/>
           </a:p>
@@ -1578,7 +1578,7 @@
           <a:p>
             <a:r>
               <a:rPr lang="en-US" dirty="0"/>
-              <a:t>Останнє ДЗ, і воно ж ваш зібраний капстоун — ДЗ тижня 6: CI-гейт плюс інцидент. Критерії приймання коротко. CI-гейт увімкнений, і в історії Actions видно червоний прогін — регресію — і зелений — фікс. Інцидент-демо з командами відтворення лежить в INCIDENT_RUNBOOK.md, з посиланням із README. README-розділ «30-day rollout» — чотири конкретні кроки перенесення практик у свою команду: це головний transfer-артефакт курсу, і начерк у вас уже є з сьогоднішньої лаби. І система збирається docker compose up --build з чистого клону, всі плитки консолі живі. Повні критерії — у файлі ДЗ тижня. Опційно, без оцінювання: canary-план — розподіл трафіку 90 на 10 між версіями промпта і метрики для promote або rollback; і /metrics із зовнішнім дашбордом поверх advanced-профілю. Це фінальна здача: після неї ваш капстоун — повний production-контур із доказами в CI, ранбуком і планом перенесення в реальну команду.</a:t>
+              <a:t/>
             </a:r>
             <a:endParaRPr lang="en-US" dirty="0"/>
           </a:p>
@@ -1666,7 +1666,7 @@
           <a:p>
             <a:r>
               <a:rPr lang="en-US" dirty="0"/>
-              <a:t>Підсумуємо курс. Точка Б досягнута: той самий екран, той самий mock — різниця між «—» у плитках і живою консоллю лише в контурі керування, який ви написали власноруч. Runbook — це сценарій з чотирьох тактів, і його цінність створюється прогоном, а не написанням. Постмортем розбирає механізми, а не людей: відповідь на «щоб не повторилося» — кейс у датасеті або механізм. Бюджет дають за наслідки з артефактом-доказом, а не за список технологій. І нові шари додаються за виміряним сигналом, а перенесення практик у команду йде по шару на тиждень: лог, реєстр, evals, гейт. Наступний крок — завершити капстоун: ДЗ тижня 6 і є фінальна здача. А далі система у ваших руках: додавайте реальний ключ, підключайте справжніх провайдерів, тягніть практики в робочі проєкти. Контур, який ви збудували, — не навчальний макет, а зменшена копія того, як LLM-системи експлуатують у проді; різниця тільки в масштабі. Механізми переживуть інструменти: рішення — код, кожен виклик лишає слід, якість — число з порогом, незворотне проходить через людину. Дякую за курс — і хай ваші фолбеки ніколи не знадобляться. Але будуть готові.</a:t>
+              <a:t/>
             </a:r>
             <a:endParaRPr lang="en-US" dirty="0"/>
           </a:p>
@@ -1754,7 +1754,7 @@
           <a:p>
             <a:r>
               <a:rPr lang="en-US" dirty="0"/>
-              <a:t>Маршрут фіналу такий. Спершу — де ми опинилися: від трьох рядків коду до контуру, і три вміння, які відрізняють «зробив курсовий» від «володію системою». Далі точка Б — наскрізний сценарій, де кожна ланка відсилає до конкретного уроку: зручна самодіагностика перед фінальним ДЗ. Потім найбільший блок — incident runbook: формат із чотирьох тактів, правило контрольного питання і живий інцидент із таймлайном — ваш перший постмортем із нульовими ставками. Друга половина — про життя після курсу: KPI-мова, за яку дають бюджет; 30-day rollout для вашої команди; опційно — зовнішні дашборди; сигнали, за якими додається наступний шар; що станеться з системою через рік і що свідомо лишилося за дужками. Завершуємо фінальною лабою — прогін, інцидент, KPI-огляд, свій план — і антипатернами фіналу.</a:t>
+              <a:t/>
             </a:r>
             <a:endParaRPr lang="en-US" dirty="0"/>
           </a:p>
@@ -1842,7 +1842,7 @@
           <a:p>
             <a:r>
               <a:rPr lang="en-US" dirty="0"/>
-              <a:t>Домовимось про шість слів. Operating model — спосіб експлуатувати систему: хто що робить, коли і за яким сценарієм; саме це відрізняє зібраний проєкт від системи, якою володіють. Runbook — сценарій дій при відомому симптомі: чотири такти — симптом, підтвердити, дія, переконатися. Постмортем — розбір інциденту після: що сталося, що спрацювало, що змінюємо; про механізми, а не про винних. KPI-мова — переклад інженерних фактів у наслідки для грошей, користувачів і ризику. Rollout-план — порядок, у якому практики переносяться у вашу команду. І dry-run — режим, у якому автоматика проходить повний цикл, але замість дій пише звіт «що я б зробила». Далі кожне побачимо в роботі.</a:t>
+              <a:t/>
             </a:r>
             <a:endParaRPr lang="en-US" dirty="0"/>
           </a:p>
@@ -1930,7 +1930,7 @@
           <a:p>
             <a:r>
               <a:rPr lang="en-US" dirty="0"/>
-              <a:t>Шість тижнів тому у вас було три рядки коду, які викликають модель, — і чотири питання без відповідей: гроші, надійність, якість, видимість. Сьогодні у вас production-контур: routing, cost-облік, кеш, інструменти з HITL, fallback із деградацією — і circuit breaker для тих, хто пішов у опційну доріжку, — мінімальний guardrail на межі з маскуванням PII, повна спостережуваність, eval-гейт у CI. Це і був план — точка Б з першого уроку, до якої ми йшли по шару на урок. Фінальний урок — про три вміння, які відрізняють «зробив курсовий проєкт» від «володію системою». Перше: прогнати все наскрізь — упевнено, відтворювано, з чистого клону, без «зараз, тут треба ще одну змінну». Друге: відпрацювати інцидент за ранбуком — виявити, деградувати, відновити, зафіксувати. Третє: розповісти про систему через наслідки для грошей, користувачів і ризику, а не через список технологій. Чому це не «зайвий» урок: системами не користуються — ними володіють. Різниця проявляється, коли щось ламається і коли треба захистити бюджет. Обидва моменти настануть — готуємось сьогодні.</a:t>
+              <a:t/>
             </a:r>
             <a:endParaRPr lang="en-US" dirty="0"/>
           </a:p>
@@ -2018,7 +2018,7 @@
           <a:p>
             <a:r>
               <a:rPr lang="en-US" dirty="0"/>
-              <a:t>Ось повний шлях, який має проходити ваша система — без зупинок і підглядань у нотатки. Питання приходить у чат, routing обирає модель, кеш або віддає готове, або пропускає далі; відповідь повертається разом із версією промпта, все лягає в лог, а консоль показує долари, p95 і cache-hit. Друга гілка — складніші сценарії: «поверніть гроші» створює заявку в /approvals, approve перетворює її на тікет; __fail_503 запускає fallback, заглушку і відновлення; PR з промптом проходить гейт. Кожна ланка цього ланцюга — конкретний урок курсу: registry — урок 2, routing — 3, вартість — 4, кеш — 5, інструменти — 6, fallback — 7, HITL — 8, консоль — 9, evals — 10, гейт — 11. Це зручна самодіагностика перед фінальним ДЗ: пройдіть сценарій і відмітьте, де спіткнулися, — номер уроку обчислюється автоматично. Ще є час підтягнути. І згадайте картинку з першої лаби: той самий екран, але консоль показує «—», а __fail_503 кладе розмову без плану Б. Точка А і точка Б — буквально два скріншоти одного інтерфейсу. Різниця — не в UI і не в моделі: різниця — це контур керування, який ви написали власноруч. Потримайте обидва скріншоти поруч — це найчесніший підсумок шести тижнів.</a:t>
+              <a:t/>
             </a:r>
             <a:endParaRPr lang="en-US" dirty="0"/>
           </a:p>
@@ -2106,7 +2106,7 @@
           <a:p>
             <a:r>
               <a:rPr lang="en-US" dirty="0"/>
-              <a:t>Артефакт цього блоку — INCIDENT_RUNBOOK.md у корені вашого проєкту; в еталоні тижня він уже лежить як приклад. Головна його якість не в змісті, а у форматі. Runbook — це не опис архітектури і не роздуми про надійність. Це сценарій із чотирьох тактів на кожен симптом. Симптом: що видно? Скарги «бот вибачається», error rate росте. Підтвердити: яка плитка, який лог? На /observability fallback_events росте, у лозі — статуси 503. Дія: що робити? І тут найцікавіше — нічого руками: fallback і деградація вже працюють, треба стежити. Переконатися: як зрозуміти, що відпустило? Нове питання, якого не може бути в кеші, відповідає; fallback перестав рости. Зверніть увагу на третій такт: у добре збудованій системі найчастіша «дія» під час інциденту — переконатися, що автоматика відпрацювала, і не заважати. Руки потрібні там, де автоматики немає: rollback поганого промпта однією командою з уроку 2, вимкнення фічі, комунікація. І принцип, який вартий окремого запам'ятовування: runbook, який жодного разу не проганяли руками, — це література, а не інструмент. Цінність створюється не написанням, а прогоном: саме там з'ясовується, що плитка називається інакше, команда вимагає інших прав, а «очевидний» крок неочевидний о третій ночі.</a:t>
+              <a:t/>
             </a:r>
             <a:endParaRPr lang="en-US" dirty="0"/>
           </a:p>
@@ -2194,7 +2194,7 @@
           <a:p>
             <a:r>
               <a:rPr lang="en-US" dirty="0"/>
-              <a:t>Наш навчальний інцидент повністю відтворюваний — mock падає на замовлення, і це остання суперсила, якою ми користуємось. Дивіться на таймлайн. 10:00 — норма: «Як скинути пароль?» дає нормальну відповідь. 10:02 — інцидент: __fail_503, спроби провайдера падають, користувач бачить ввічливу заглушку, а не 500; на /observability ростуть fallback_events і error rate. 10:05, для опційної доріжки: circuit відкрився, запити не чекають таймаутів, half-open пробує провайдера кожні приблизно п'ять секунд. 10:08 — відновлення: нове питання, якого немає в кеші, дає нормальну відповідь — питання з 10:00 уже в кеші і «зеленіє» навіть під час збою; fallback перестав рости, інцидент закритий. 10:09 — гігієна: скинути кеш, якщо в період збою могли записатися заглушки, — обіцянка з уроку 5, виконуємо. Фіксуйте таймлайн так, як робили б у постмортемі: коли почалося, як виявили, що бачив користувач, коли відпустило. На нашому «інциденті» це виглядає грою — але саме ця гра ставить руки; формат реального постмортема нічим не відрізняється, лише цифри більші і нервів більше. І два питання, які перетворюють хроніку на постмортем. «Що ми зробимо, щоб це не повторилося?» — відповіддю має бути механізм або кейс у датасеті, а не «будемо уважнішими». І «як ми дізналися про інцидент?» — якщо відповідь «зі скарг», у спостережуваності діра: інцидент такого класу має спершу з'являтися на консолі.</a:t>
+              <a:t/>
             </a:r>
             <a:endParaRPr lang="en-US" dirty="0"/>
           </a:p>
@@ -2282,7 +2282,7 @@
           <a:p>
             <a:r>
               <a:rPr lang="en-US" dirty="0"/>
-              <a:t>«Ми використовуємо circuit breaker з half-open probe» — нікому поза командою не цікаво. Це чесна, точна і абсолютно марна фраза для розмови з тими, хто вирішує про бюджет. Перекладаємо кожну плитку консолі бізнес-мовою. Fallback з деградацією — падіння провайдера користувач не помічає. Cache-hit тридцять відсотків — третина запитів безкоштовні й миттєві. Routing mini/strong — дорога модель дістається тільки складним задачам, вартість запиту керована. Eval-гейт у CI — регресія якості фізично не потрапляє в прод. HITL-черга — жодна незворотна дія не виконується без людини. Вартість і бюджет на консолі — витрати видно сьогодні, а не в рахунку через місяць. Сила цих формулювань у тому, що кожне підкріплене артефактом: плиткою консолі, історією CI, чергою approvals. Розповідаючи — показуйте: «падіння не помічає — ось графік інциденту без єдиної 500-ки». Твердження з доказом коштує вдесятеро дорожче за твердження з ентузіазмом. З практики скажу: рішення, які найлегше захищати, — ті, у яких є артефакт-доказ. «Ми зробили HITL-гейт» звучить як витрата; «жодна незворотна дія не виконується без людини, ось черга підтверджень і журнал відхилених» — як керований ризик. Найшвидше «так» отримували другі формулювання — вони перевіряються на екрані за десять секунд. Для «трьох хвилин людині без інженерного бекграунду» структура проста: одне речення проблеми, три-чотири наслідки з таблиці, один живий доказ на екрані. Технічні деталі — тільки у відповідь на питання: хто спитав про circuit breaker, той готовий його почути.</a:t>
+              <a:t/>
             </a:r>
             <a:endParaRPr lang="en-US" dirty="0"/>
           </a:p>
@@ -3594,7 +3594,7 @@
       </p:pic>
       <p:sp>
         <p:nvSpPr>
-          <p:cNvPr id="8" name="Shape 4"/>
+          <p:cNvPr id="7" name="Shape 4"/>
           <p:cNvSpPr/>
           <p:nvPr/>
         </p:nvSpPr>
@@ -3616,7 +3616,7 @@
       </p:sp>
       <p:sp>
         <p:nvSpPr>
-          <p:cNvPr id="9" name="Text 5"/>
+          <p:cNvPr id="8" name="Text 5"/>
           <p:cNvSpPr/>
           <p:nvPr/>
         </p:nvSpPr>
@@ -3655,7 +3655,7 @@
       </p:sp>
       <p:sp>
         <p:nvSpPr>
-          <p:cNvPr id="10" name="Text 6"/>
+          <p:cNvPr id="9" name="Text 6"/>
           <p:cNvSpPr/>
           <p:nvPr/>
         </p:nvSpPr>
@@ -3694,7 +3694,7 @@
       </p:sp>
       <p:sp>
         <p:nvSpPr>
-          <p:cNvPr id="11" name="Shape 7"/>
+          <p:cNvPr id="10" name="Shape 7"/>
           <p:cNvSpPr/>
           <p:nvPr/>
         </p:nvSpPr>
@@ -3721,7 +3721,7 @@
       </p:sp>
       <p:sp>
         <p:nvSpPr>
-          <p:cNvPr id="12" name="Text 8"/>
+          <p:cNvPr id="11" name="Text 8"/>
           <p:cNvSpPr/>
           <p:nvPr/>
         </p:nvSpPr>
@@ -3760,7 +3760,7 @@
       </p:sp>
       <p:sp>
         <p:nvSpPr>
-          <p:cNvPr id="13" name="Text 9"/>
+          <p:cNvPr id="12" name="Text 9"/>
           <p:cNvSpPr/>
           <p:nvPr/>
         </p:nvSpPr>
@@ -3799,7 +3799,7 @@
       </p:sp>
       <p:sp>
         <p:nvSpPr>
-          <p:cNvPr id="14" name="Shape 10"/>
+          <p:cNvPr id="13" name="Shape 10"/>
           <p:cNvSpPr/>
           <p:nvPr/>
         </p:nvSpPr>
@@ -3821,7 +3821,7 @@
       </p:sp>
       <p:sp>
         <p:nvSpPr>
-          <p:cNvPr id="15" name="Text 11"/>
+          <p:cNvPr id="14" name="Text 11"/>
           <p:cNvSpPr/>
           <p:nvPr/>
         </p:nvSpPr>
@@ -3860,7 +3860,7 @@
       </p:sp>
       <p:sp>
         <p:nvSpPr>
-          <p:cNvPr id="16" name="Text 12"/>
+          <p:cNvPr id="15" name="Text 12"/>
           <p:cNvSpPr/>
           <p:nvPr/>
         </p:nvSpPr>
@@ -3899,7 +3899,7 @@
       </p:sp>
       <p:sp>
         <p:nvSpPr>
-          <p:cNvPr id="17" name="Shape 13"/>
+          <p:cNvPr id="16" name="Shape 13"/>
           <p:cNvSpPr/>
           <p:nvPr/>
         </p:nvSpPr>
@@ -3921,7 +3921,7 @@
       </p:sp>
       <p:sp>
         <p:nvSpPr>
-          <p:cNvPr id="18" name="Text 14"/>
+          <p:cNvPr id="17" name="Text 14"/>
           <p:cNvSpPr/>
           <p:nvPr/>
         </p:nvSpPr>
@@ -3960,7 +3960,7 @@
       </p:sp>
       <p:sp>
         <p:nvSpPr>
-          <p:cNvPr id="19" name="Text 15"/>
+          <p:cNvPr id="18" name="Text 15"/>
           <p:cNvSpPr/>
           <p:nvPr/>
         </p:nvSpPr>
@@ -3999,7 +3999,7 @@
       </p:sp>
       <p:sp>
         <p:nvSpPr>
-          <p:cNvPr id="20" name="Shape 16"/>
+          <p:cNvPr id="19" name="Shape 16"/>
           <p:cNvSpPr/>
           <p:nvPr/>
         </p:nvSpPr>
@@ -4021,7 +4021,7 @@
       </p:sp>
       <p:sp>
         <p:nvSpPr>
-          <p:cNvPr id="21" name="Text 17"/>
+          <p:cNvPr id="20" name="Text 17"/>
           <p:cNvSpPr/>
           <p:nvPr/>
         </p:nvSpPr>
@@ -4060,7 +4060,7 @@
       </p:sp>
       <p:sp>
         <p:nvSpPr>
-          <p:cNvPr id="22" name="Text 18"/>
+          <p:cNvPr id="21" name="Text 18"/>
           <p:cNvSpPr/>
           <p:nvPr/>
         </p:nvSpPr>
@@ -4406,7 +4406,7 @@
       </p:pic>
       <p:sp>
         <p:nvSpPr>
-          <p:cNvPr id="10" name="Shape 6"/>
+          <p:cNvPr id="9" name="Shape 6"/>
           <p:cNvSpPr/>
           <p:nvPr/>
         </p:nvSpPr>
@@ -4428,7 +4428,7 @@
       </p:sp>
       <p:sp>
         <p:nvSpPr>
-          <p:cNvPr id="11" name="Text 7"/>
+          <p:cNvPr id="10" name="Text 7"/>
           <p:cNvSpPr/>
           <p:nvPr/>
         </p:nvSpPr>
@@ -4467,7 +4467,7 @@
       </p:sp>
       <p:sp>
         <p:nvSpPr>
-          <p:cNvPr id="12" name="Shape 8"/>
+          <p:cNvPr id="11" name="Shape 8"/>
           <p:cNvSpPr/>
           <p:nvPr/>
         </p:nvSpPr>
@@ -4490,7 +4490,7 @@
       </p:sp>
       <p:sp>
         <p:nvSpPr>
-          <p:cNvPr id="13" name="Shape 9"/>
+          <p:cNvPr id="12" name="Shape 9"/>
           <p:cNvSpPr/>
           <p:nvPr/>
         </p:nvSpPr>
@@ -4510,7 +4510,7 @@
       </p:sp>
       <p:sp>
         <p:nvSpPr>
-          <p:cNvPr id="14" name="Shape 10"/>
+          <p:cNvPr id="13" name="Shape 10"/>
           <p:cNvSpPr/>
           <p:nvPr/>
         </p:nvSpPr>
@@ -4537,7 +4537,7 @@
       </p:sp>
       <p:sp>
         <p:nvSpPr>
-          <p:cNvPr id="15" name="Text 11"/>
+          <p:cNvPr id="14" name="Text 11"/>
           <p:cNvSpPr/>
           <p:nvPr/>
         </p:nvSpPr>
@@ -4576,7 +4576,7 @@
       </p:sp>
       <p:sp>
         <p:nvSpPr>
-          <p:cNvPr id="16" name="Shape 12"/>
+          <p:cNvPr id="15" name="Shape 12"/>
           <p:cNvSpPr/>
           <p:nvPr/>
         </p:nvSpPr>
@@ -4599,7 +4599,7 @@
       </p:sp>
       <p:sp>
         <p:nvSpPr>
-          <p:cNvPr id="17" name="Shape 13"/>
+          <p:cNvPr id="16" name="Shape 13"/>
           <p:cNvSpPr/>
           <p:nvPr/>
         </p:nvSpPr>
@@ -4619,7 +4619,7 @@
       </p:sp>
       <p:sp>
         <p:nvSpPr>
-          <p:cNvPr id="18" name="Shape 14"/>
+          <p:cNvPr id="17" name="Shape 14"/>
           <p:cNvSpPr/>
           <p:nvPr/>
         </p:nvSpPr>
@@ -4641,7 +4641,7 @@
       </p:sp>
       <p:sp>
         <p:nvSpPr>
-          <p:cNvPr id="19" name="Text 15"/>
+          <p:cNvPr id="18" name="Text 15"/>
           <p:cNvSpPr/>
           <p:nvPr/>
         </p:nvSpPr>
@@ -4680,7 +4680,7 @@
       </p:sp>
       <p:sp>
         <p:nvSpPr>
-          <p:cNvPr id="20" name="Shape 16"/>
+          <p:cNvPr id="19" name="Shape 16"/>
           <p:cNvSpPr/>
           <p:nvPr/>
         </p:nvSpPr>
@@ -4707,7 +4707,7 @@
       </p:sp>
       <p:sp>
         <p:nvSpPr>
-          <p:cNvPr id="21" name="Text 17"/>
+          <p:cNvPr id="20" name="Text 17"/>
           <p:cNvSpPr/>
           <p:nvPr/>
         </p:nvSpPr>
@@ -4746,7 +4746,7 @@
       </p:sp>
       <p:sp>
         <p:nvSpPr>
-          <p:cNvPr id="22" name="Text 18"/>
+          <p:cNvPr id="21" name="Text 18"/>
           <p:cNvSpPr/>
           <p:nvPr/>
         </p:nvSpPr>
@@ -4788,7 +4788,7 @@
       </p:sp>
       <p:sp>
         <p:nvSpPr>
-          <p:cNvPr id="23" name="Shape 19"/>
+          <p:cNvPr id="22" name="Shape 19"/>
           <p:cNvSpPr/>
           <p:nvPr/>
         </p:nvSpPr>
@@ -4810,7 +4810,7 @@
       </p:sp>
       <p:sp>
         <p:nvSpPr>
-          <p:cNvPr id="24" name="Text 20"/>
+          <p:cNvPr id="23" name="Text 20"/>
           <p:cNvSpPr/>
           <p:nvPr/>
         </p:nvSpPr>
@@ -4849,7 +4849,7 @@
       </p:sp>
       <p:sp>
         <p:nvSpPr>
-          <p:cNvPr id="25" name="Text 21"/>
+          <p:cNvPr id="24" name="Text 21"/>
           <p:cNvSpPr/>
           <p:nvPr/>
         </p:nvSpPr>
@@ -4891,7 +4891,7 @@
       </p:sp>
       <p:sp>
         <p:nvSpPr>
-          <p:cNvPr id="26" name="Shape 22"/>
+          <p:cNvPr id="25" name="Shape 22"/>
           <p:cNvSpPr/>
           <p:nvPr/>
         </p:nvSpPr>
@@ -4918,7 +4918,7 @@
       </p:sp>
       <p:sp>
         <p:nvSpPr>
-          <p:cNvPr id="27" name="Text 23"/>
+          <p:cNvPr id="26" name="Text 23"/>
           <p:cNvSpPr/>
           <p:nvPr/>
         </p:nvSpPr>
@@ -6470,7 +6470,7 @@
       </p:graphicFrame>
       <p:sp>
         <p:nvSpPr>
-          <p:cNvPr id="9" name="Shape 4"/>
+          <p:cNvPr id="8" name="Shape 4"/>
           <p:cNvSpPr/>
           <p:nvPr/>
         </p:nvSpPr>
@@ -6492,7 +6492,7 @@
       </p:sp>
       <p:sp>
         <p:nvSpPr>
-          <p:cNvPr id="10" name="Text 5"/>
+          <p:cNvPr id="9" name="Text 5"/>
           <p:cNvSpPr/>
           <p:nvPr/>
         </p:nvSpPr>
@@ -6531,7 +6531,7 @@
       </p:sp>
       <p:sp>
         <p:nvSpPr>
-          <p:cNvPr id="11" name="Text 6"/>
+          <p:cNvPr id="10" name="Text 6"/>
           <p:cNvSpPr/>
           <p:nvPr/>
         </p:nvSpPr>
@@ -6816,7 +6816,7 @@
       </p:pic>
       <p:sp>
         <p:nvSpPr>
-          <p:cNvPr id="8" name="Shape 4"/>
+          <p:cNvPr id="7" name="Shape 4"/>
           <p:cNvSpPr/>
           <p:nvPr/>
         </p:nvSpPr>
@@ -6838,7 +6838,7 @@
       </p:sp>
       <p:sp>
         <p:nvSpPr>
-          <p:cNvPr id="9" name="Shape 5"/>
+          <p:cNvPr id="8" name="Shape 5"/>
           <p:cNvSpPr/>
           <p:nvPr/>
         </p:nvSpPr>
@@ -6858,7 +6858,7 @@
       </p:sp>
       <p:sp>
         <p:nvSpPr>
-          <p:cNvPr id="10" name="Text 6"/>
+          <p:cNvPr id="9" name="Text 6"/>
           <p:cNvSpPr/>
           <p:nvPr/>
         </p:nvSpPr>
@@ -6897,7 +6897,7 @@
       </p:sp>
       <p:sp>
         <p:nvSpPr>
-          <p:cNvPr id="11" name="Text 7"/>
+          <p:cNvPr id="10" name="Text 7"/>
           <p:cNvSpPr/>
           <p:nvPr/>
         </p:nvSpPr>
@@ -6936,7 +6936,7 @@
       </p:sp>
       <p:sp>
         <p:nvSpPr>
-          <p:cNvPr id="12" name="Text 8"/>
+          <p:cNvPr id="11" name="Text 8"/>
           <p:cNvSpPr/>
           <p:nvPr/>
         </p:nvSpPr>
@@ -6978,7 +6978,7 @@
       </p:sp>
       <p:sp>
         <p:nvSpPr>
-          <p:cNvPr id="13" name="Shape 9"/>
+          <p:cNvPr id="12" name="Shape 9"/>
           <p:cNvSpPr/>
           <p:nvPr/>
         </p:nvSpPr>
@@ -7000,7 +7000,7 @@
       </p:sp>
       <p:sp>
         <p:nvSpPr>
-          <p:cNvPr id="14" name="Shape 10"/>
+          <p:cNvPr id="13" name="Shape 10"/>
           <p:cNvSpPr/>
           <p:nvPr/>
         </p:nvSpPr>
@@ -7020,7 +7020,7 @@
       </p:sp>
       <p:sp>
         <p:nvSpPr>
-          <p:cNvPr id="15" name="Text 11"/>
+          <p:cNvPr id="14" name="Text 11"/>
           <p:cNvSpPr/>
           <p:nvPr/>
         </p:nvSpPr>
@@ -7059,7 +7059,7 @@
       </p:sp>
       <p:sp>
         <p:nvSpPr>
-          <p:cNvPr id="16" name="Text 12"/>
+          <p:cNvPr id="15" name="Text 12"/>
           <p:cNvSpPr/>
           <p:nvPr/>
         </p:nvSpPr>
@@ -7098,7 +7098,7 @@
       </p:sp>
       <p:sp>
         <p:nvSpPr>
-          <p:cNvPr id="17" name="Text 13"/>
+          <p:cNvPr id="16" name="Text 13"/>
           <p:cNvSpPr/>
           <p:nvPr/>
         </p:nvSpPr>
@@ -7140,7 +7140,7 @@
       </p:sp>
       <p:sp>
         <p:nvSpPr>
-          <p:cNvPr id="18" name="Shape 14"/>
+          <p:cNvPr id="17" name="Shape 14"/>
           <p:cNvSpPr/>
           <p:nvPr/>
         </p:nvSpPr>
@@ -7162,7 +7162,7 @@
       </p:sp>
       <p:sp>
         <p:nvSpPr>
-          <p:cNvPr id="19" name="Shape 15"/>
+          <p:cNvPr id="18" name="Shape 15"/>
           <p:cNvSpPr/>
           <p:nvPr/>
         </p:nvSpPr>
@@ -7182,7 +7182,7 @@
       </p:sp>
       <p:sp>
         <p:nvSpPr>
-          <p:cNvPr id="20" name="Text 16"/>
+          <p:cNvPr id="19" name="Text 16"/>
           <p:cNvSpPr/>
           <p:nvPr/>
         </p:nvSpPr>
@@ -7221,7 +7221,7 @@
       </p:sp>
       <p:sp>
         <p:nvSpPr>
-          <p:cNvPr id="21" name="Text 17"/>
+          <p:cNvPr id="20" name="Text 17"/>
           <p:cNvSpPr/>
           <p:nvPr/>
         </p:nvSpPr>
@@ -7260,7 +7260,7 @@
       </p:sp>
       <p:sp>
         <p:nvSpPr>
-          <p:cNvPr id="22" name="Text 18"/>
+          <p:cNvPr id="21" name="Text 18"/>
           <p:cNvSpPr/>
           <p:nvPr/>
         </p:nvSpPr>
@@ -7302,7 +7302,7 @@
       </p:sp>
       <p:sp>
         <p:nvSpPr>
-          <p:cNvPr id="23" name="Shape 19"/>
+          <p:cNvPr id="22" name="Shape 19"/>
           <p:cNvSpPr/>
           <p:nvPr/>
         </p:nvSpPr>
@@ -7324,7 +7324,7 @@
       </p:sp>
       <p:sp>
         <p:nvSpPr>
-          <p:cNvPr id="24" name="Text 20"/>
+          <p:cNvPr id="23" name="Text 20"/>
           <p:cNvSpPr/>
           <p:nvPr/>
         </p:nvSpPr>
@@ -7363,7 +7363,7 @@
       </p:sp>
       <p:sp>
         <p:nvSpPr>
-          <p:cNvPr id="25" name="Text 21"/>
+          <p:cNvPr id="24" name="Text 21"/>
           <p:cNvSpPr/>
           <p:nvPr/>
         </p:nvSpPr>
@@ -7648,7 +7648,7 @@
       </p:pic>
       <p:sp>
         <p:nvSpPr>
-          <p:cNvPr id="8" name="Shape 4"/>
+          <p:cNvPr id="7" name="Shape 4"/>
           <p:cNvSpPr/>
           <p:nvPr/>
         </p:nvSpPr>
@@ -7675,7 +7675,7 @@
       </p:sp>
       <p:sp>
         <p:nvSpPr>
-          <p:cNvPr id="9" name="Text 5"/>
+          <p:cNvPr id="8" name="Text 5"/>
           <p:cNvSpPr/>
           <p:nvPr/>
         </p:nvSpPr>
@@ -7714,7 +7714,7 @@
       </p:sp>
       <p:sp>
         <p:nvSpPr>
-          <p:cNvPr id="10" name="Shape 6"/>
+          <p:cNvPr id="9" name="Shape 6"/>
           <p:cNvSpPr/>
           <p:nvPr/>
         </p:nvSpPr>
@@ -7741,7 +7741,7 @@
       </p:sp>
       <p:sp>
         <p:nvSpPr>
-          <p:cNvPr id="11" name="Text 7"/>
+          <p:cNvPr id="10" name="Text 7"/>
           <p:cNvSpPr/>
           <p:nvPr/>
         </p:nvSpPr>
@@ -7780,7 +7780,7 @@
       </p:sp>
       <p:sp>
         <p:nvSpPr>
-          <p:cNvPr id="12" name="Shape 8"/>
+          <p:cNvPr id="11" name="Shape 8"/>
           <p:cNvSpPr/>
           <p:nvPr/>
         </p:nvSpPr>
@@ -7807,7 +7807,7 @@
       </p:sp>
       <p:sp>
         <p:nvSpPr>
-          <p:cNvPr id="13" name="Text 9"/>
+          <p:cNvPr id="12" name="Text 9"/>
           <p:cNvSpPr/>
           <p:nvPr/>
         </p:nvSpPr>
@@ -7846,7 +7846,7 @@
       </p:sp>
       <p:sp>
         <p:nvSpPr>
-          <p:cNvPr id="14" name="Shape 10"/>
+          <p:cNvPr id="13" name="Shape 10"/>
           <p:cNvSpPr/>
           <p:nvPr/>
         </p:nvSpPr>
@@ -7873,7 +7873,7 @@
       </p:sp>
       <p:sp>
         <p:nvSpPr>
-          <p:cNvPr id="15" name="Text 11"/>
+          <p:cNvPr id="14" name="Text 11"/>
           <p:cNvSpPr/>
           <p:nvPr/>
         </p:nvSpPr>
@@ -7912,7 +7912,7 @@
       </p:sp>
       <p:sp>
         <p:nvSpPr>
-          <p:cNvPr id="16" name="Shape 12"/>
+          <p:cNvPr id="15" name="Shape 12"/>
           <p:cNvSpPr/>
           <p:nvPr/>
         </p:nvSpPr>
@@ -7939,7 +7939,7 @@
       </p:sp>
       <p:sp>
         <p:nvSpPr>
-          <p:cNvPr id="17" name="Text 13"/>
+          <p:cNvPr id="16" name="Text 13"/>
           <p:cNvSpPr/>
           <p:nvPr/>
         </p:nvSpPr>
@@ -7978,7 +7978,7 @@
       </p:sp>
       <p:sp>
         <p:nvSpPr>
-          <p:cNvPr id="18" name="Shape 14"/>
+          <p:cNvPr id="17" name="Shape 14"/>
           <p:cNvSpPr/>
           <p:nvPr/>
         </p:nvSpPr>
@@ -8005,7 +8005,7 @@
       </p:sp>
       <p:sp>
         <p:nvSpPr>
-          <p:cNvPr id="19" name="Text 15"/>
+          <p:cNvPr id="18" name="Text 15"/>
           <p:cNvSpPr/>
           <p:nvPr/>
         </p:nvSpPr>
@@ -8044,7 +8044,7 @@
       </p:sp>
       <p:sp>
         <p:nvSpPr>
-          <p:cNvPr id="20" name="Shape 16"/>
+          <p:cNvPr id="19" name="Shape 16"/>
           <p:cNvSpPr/>
           <p:nvPr/>
         </p:nvSpPr>
@@ -8071,7 +8071,7 @@
       </p:sp>
       <p:sp>
         <p:nvSpPr>
-          <p:cNvPr id="21" name="Text 17"/>
+          <p:cNvPr id="20" name="Text 17"/>
           <p:cNvSpPr/>
           <p:nvPr/>
         </p:nvSpPr>
@@ -8110,7 +8110,7 @@
       </p:sp>
       <p:sp>
         <p:nvSpPr>
-          <p:cNvPr id="22" name="Shape 18"/>
+          <p:cNvPr id="21" name="Shape 18"/>
           <p:cNvSpPr/>
           <p:nvPr/>
         </p:nvSpPr>
@@ -8137,7 +8137,7 @@
       </p:sp>
       <p:sp>
         <p:nvSpPr>
-          <p:cNvPr id="23" name="Text 19"/>
+          <p:cNvPr id="22" name="Text 19"/>
           <p:cNvSpPr/>
           <p:nvPr/>
         </p:nvSpPr>
@@ -8176,7 +8176,7 @@
       </p:sp>
       <p:sp>
         <p:nvSpPr>
-          <p:cNvPr id="24" name="Shape 20"/>
+          <p:cNvPr id="23" name="Shape 20"/>
           <p:cNvSpPr/>
           <p:nvPr/>
         </p:nvSpPr>
@@ -8198,7 +8198,7 @@
       </p:sp>
       <p:sp>
         <p:nvSpPr>
-          <p:cNvPr id="25" name="Text 21"/>
+          <p:cNvPr id="24" name="Text 21"/>
           <p:cNvSpPr/>
           <p:nvPr/>
         </p:nvSpPr>
@@ -8444,7 +8444,7 @@
       </p:pic>
       <p:sp>
         <p:nvSpPr>
-          <p:cNvPr id="7" name="Shape 3"/>
+          <p:cNvPr id="6" name="Shape 3"/>
           <p:cNvSpPr/>
           <p:nvPr/>
         </p:nvSpPr>
@@ -8466,7 +8466,7 @@
       </p:sp>
       <p:sp>
         <p:nvSpPr>
-          <p:cNvPr id="8" name="Shape 4"/>
+          <p:cNvPr id="7" name="Shape 4"/>
           <p:cNvSpPr/>
           <p:nvPr/>
         </p:nvSpPr>
@@ -8486,7 +8486,7 @@
       </p:sp>
       <p:sp>
         <p:nvSpPr>
-          <p:cNvPr id="9" name="Text 5"/>
+          <p:cNvPr id="8" name="Text 5"/>
           <p:cNvSpPr/>
           <p:nvPr/>
         </p:nvSpPr>
@@ -8525,7 +8525,7 @@
       </p:sp>
       <p:sp>
         <p:nvSpPr>
-          <p:cNvPr id="10" name="Text 6"/>
+          <p:cNvPr id="9" name="Text 6"/>
           <p:cNvSpPr/>
           <p:nvPr/>
         </p:nvSpPr>
@@ -8564,7 +8564,7 @@
       </p:sp>
       <p:sp>
         <p:nvSpPr>
-          <p:cNvPr id="11" name="Text 7"/>
+          <p:cNvPr id="10" name="Text 7"/>
           <p:cNvSpPr/>
           <p:nvPr/>
         </p:nvSpPr>
@@ -8606,7 +8606,7 @@
       </p:sp>
       <p:sp>
         <p:nvSpPr>
-          <p:cNvPr id="12" name="Shape 8"/>
+          <p:cNvPr id="11" name="Shape 8"/>
           <p:cNvSpPr/>
           <p:nvPr/>
         </p:nvSpPr>
@@ -8628,7 +8628,7 @@
       </p:sp>
       <p:sp>
         <p:nvSpPr>
-          <p:cNvPr id="13" name="Shape 9"/>
+          <p:cNvPr id="12" name="Shape 9"/>
           <p:cNvSpPr/>
           <p:nvPr/>
         </p:nvSpPr>
@@ -8648,7 +8648,7 @@
       </p:sp>
       <p:sp>
         <p:nvSpPr>
-          <p:cNvPr id="14" name="Text 10"/>
+          <p:cNvPr id="13" name="Text 10"/>
           <p:cNvSpPr/>
           <p:nvPr/>
         </p:nvSpPr>
@@ -8687,7 +8687,7 @@
       </p:sp>
       <p:sp>
         <p:nvSpPr>
-          <p:cNvPr id="15" name="Text 11"/>
+          <p:cNvPr id="14" name="Text 11"/>
           <p:cNvSpPr/>
           <p:nvPr/>
         </p:nvSpPr>
@@ -8726,7 +8726,7 @@
       </p:sp>
       <p:sp>
         <p:nvSpPr>
-          <p:cNvPr id="16" name="Text 12"/>
+          <p:cNvPr id="15" name="Text 12"/>
           <p:cNvSpPr/>
           <p:nvPr/>
         </p:nvSpPr>
@@ -8768,7 +8768,7 @@
       </p:sp>
       <p:sp>
         <p:nvSpPr>
-          <p:cNvPr id="17" name="Shape 13"/>
+          <p:cNvPr id="16" name="Shape 13"/>
           <p:cNvSpPr/>
           <p:nvPr/>
         </p:nvSpPr>
@@ -8790,7 +8790,7 @@
       </p:sp>
       <p:sp>
         <p:nvSpPr>
-          <p:cNvPr id="18" name="Shape 14"/>
+          <p:cNvPr id="17" name="Shape 14"/>
           <p:cNvSpPr/>
           <p:nvPr/>
         </p:nvSpPr>
@@ -8810,7 +8810,7 @@
       </p:sp>
       <p:sp>
         <p:nvSpPr>
-          <p:cNvPr id="19" name="Text 15"/>
+          <p:cNvPr id="18" name="Text 15"/>
           <p:cNvSpPr/>
           <p:nvPr/>
         </p:nvSpPr>
@@ -8849,7 +8849,7 @@
       </p:sp>
       <p:sp>
         <p:nvSpPr>
-          <p:cNvPr id="20" name="Text 16"/>
+          <p:cNvPr id="19" name="Text 16"/>
           <p:cNvSpPr/>
           <p:nvPr/>
         </p:nvSpPr>
@@ -8888,7 +8888,7 @@
       </p:sp>
       <p:sp>
         <p:nvSpPr>
-          <p:cNvPr id="21" name="Text 17"/>
+          <p:cNvPr id="20" name="Text 17"/>
           <p:cNvSpPr/>
           <p:nvPr/>
         </p:nvSpPr>
@@ -8930,7 +8930,7 @@
       </p:sp>
       <p:sp>
         <p:nvSpPr>
-          <p:cNvPr id="22" name="Shape 18"/>
+          <p:cNvPr id="21" name="Shape 18"/>
           <p:cNvSpPr/>
           <p:nvPr/>
         </p:nvSpPr>
@@ -8952,7 +8952,7 @@
       </p:sp>
       <p:sp>
         <p:nvSpPr>
-          <p:cNvPr id="23" name="Shape 19"/>
+          <p:cNvPr id="22" name="Shape 19"/>
           <p:cNvSpPr/>
           <p:nvPr/>
         </p:nvSpPr>
@@ -8972,7 +8972,7 @@
       </p:sp>
       <p:sp>
         <p:nvSpPr>
-          <p:cNvPr id="24" name="Text 20"/>
+          <p:cNvPr id="23" name="Text 20"/>
           <p:cNvSpPr/>
           <p:nvPr/>
         </p:nvSpPr>
@@ -9011,7 +9011,7 @@
       </p:sp>
       <p:sp>
         <p:nvSpPr>
-          <p:cNvPr id="25" name="Text 21"/>
+          <p:cNvPr id="24" name="Text 21"/>
           <p:cNvSpPr/>
           <p:nvPr/>
         </p:nvSpPr>
@@ -9050,7 +9050,7 @@
       </p:sp>
       <p:sp>
         <p:nvSpPr>
-          <p:cNvPr id="26" name="Text 22"/>
+          <p:cNvPr id="25" name="Text 22"/>
           <p:cNvSpPr/>
           <p:nvPr/>
         </p:nvSpPr>
@@ -9092,7 +9092,7 @@
       </p:sp>
       <p:sp>
         <p:nvSpPr>
-          <p:cNvPr id="27" name="Shape 23"/>
+          <p:cNvPr id="26" name="Shape 23"/>
           <p:cNvSpPr/>
           <p:nvPr/>
         </p:nvSpPr>
@@ -9114,7 +9114,7 @@
       </p:sp>
       <p:sp>
         <p:nvSpPr>
-          <p:cNvPr id="28" name="Text 24"/>
+          <p:cNvPr id="27" name="Text 24"/>
           <p:cNvSpPr/>
           <p:nvPr/>
         </p:nvSpPr>
@@ -9153,7 +9153,7 @@
       </p:sp>
       <p:sp>
         <p:nvSpPr>
-          <p:cNvPr id="29" name="Text 25"/>
+          <p:cNvPr id="28" name="Text 25"/>
           <p:cNvSpPr/>
           <p:nvPr/>
         </p:nvSpPr>
@@ -9399,7 +9399,7 @@
       </p:pic>
       <p:sp>
         <p:nvSpPr>
-          <p:cNvPr id="7" name="Shape 3"/>
+          <p:cNvPr id="6" name="Shape 3"/>
           <p:cNvSpPr/>
           <p:nvPr/>
         </p:nvSpPr>
@@ -9419,7 +9419,7 @@
       </p:sp>
       <p:sp>
         <p:nvSpPr>
-          <p:cNvPr id="8" name="Text 4"/>
+          <p:cNvPr id="7" name="Text 4"/>
           <p:cNvSpPr/>
           <p:nvPr/>
         </p:nvSpPr>
@@ -9458,7 +9458,7 @@
       </p:sp>
       <p:sp>
         <p:nvSpPr>
-          <p:cNvPr id="9" name="Text 5"/>
+          <p:cNvPr id="8" name="Text 5"/>
           <p:cNvSpPr/>
           <p:nvPr/>
         </p:nvSpPr>
@@ -9511,7 +9511,7 @@
       </p:sp>
       <p:sp>
         <p:nvSpPr>
-          <p:cNvPr id="10" name="Shape 6"/>
+          <p:cNvPr id="9" name="Shape 6"/>
           <p:cNvSpPr/>
           <p:nvPr/>
         </p:nvSpPr>
@@ -9531,7 +9531,7 @@
       </p:sp>
       <p:sp>
         <p:nvSpPr>
-          <p:cNvPr id="11" name="Text 7"/>
+          <p:cNvPr id="10" name="Text 7"/>
           <p:cNvSpPr/>
           <p:nvPr/>
         </p:nvSpPr>
@@ -9570,7 +9570,7 @@
       </p:sp>
       <p:sp>
         <p:nvSpPr>
-          <p:cNvPr id="12" name="Text 8"/>
+          <p:cNvPr id="11" name="Text 8"/>
           <p:cNvSpPr/>
           <p:nvPr/>
         </p:nvSpPr>
@@ -9623,7 +9623,7 @@
       </p:sp>
       <p:sp>
         <p:nvSpPr>
-          <p:cNvPr id="13" name="Shape 9"/>
+          <p:cNvPr id="12" name="Shape 9"/>
           <p:cNvSpPr/>
           <p:nvPr/>
         </p:nvSpPr>
@@ -9643,7 +9643,7 @@
       </p:sp>
       <p:sp>
         <p:nvSpPr>
-          <p:cNvPr id="14" name="Text 10"/>
+          <p:cNvPr id="13" name="Text 10"/>
           <p:cNvSpPr/>
           <p:nvPr/>
         </p:nvSpPr>
@@ -9682,7 +9682,7 @@
       </p:sp>
       <p:sp>
         <p:nvSpPr>
-          <p:cNvPr id="15" name="Text 11"/>
+          <p:cNvPr id="14" name="Text 11"/>
           <p:cNvSpPr/>
           <p:nvPr/>
         </p:nvSpPr>
@@ -9735,7 +9735,7 @@
       </p:sp>
       <p:sp>
         <p:nvSpPr>
-          <p:cNvPr id="16" name="Shape 12"/>
+          <p:cNvPr id="15" name="Shape 12"/>
           <p:cNvSpPr/>
           <p:nvPr/>
         </p:nvSpPr>
@@ -9755,7 +9755,7 @@
       </p:sp>
       <p:sp>
         <p:nvSpPr>
-          <p:cNvPr id="17" name="Text 13"/>
+          <p:cNvPr id="16" name="Text 13"/>
           <p:cNvSpPr/>
           <p:nvPr/>
         </p:nvSpPr>
@@ -9794,7 +9794,7 @@
       </p:sp>
       <p:sp>
         <p:nvSpPr>
-          <p:cNvPr id="18" name="Text 14"/>
+          <p:cNvPr id="17" name="Text 14"/>
           <p:cNvSpPr/>
           <p:nvPr/>
         </p:nvSpPr>
@@ -9847,7 +9847,7 @@
       </p:sp>
       <p:sp>
         <p:nvSpPr>
-          <p:cNvPr id="19" name="Shape 15"/>
+          <p:cNvPr id="18" name="Shape 15"/>
           <p:cNvSpPr/>
           <p:nvPr/>
         </p:nvSpPr>
@@ -9867,7 +9867,7 @@
       </p:sp>
       <p:sp>
         <p:nvSpPr>
-          <p:cNvPr id="20" name="Text 16"/>
+          <p:cNvPr id="19" name="Text 16"/>
           <p:cNvSpPr/>
           <p:nvPr/>
         </p:nvSpPr>
@@ -9906,7 +9906,7 @@
       </p:sp>
       <p:sp>
         <p:nvSpPr>
-          <p:cNvPr id="21" name="Text 17"/>
+          <p:cNvPr id="20" name="Text 17"/>
           <p:cNvSpPr/>
           <p:nvPr/>
         </p:nvSpPr>
@@ -10163,7 +10163,7 @@
       </p:pic>
       <p:sp>
         <p:nvSpPr>
-          <p:cNvPr id="7" name="Shape 3"/>
+          <p:cNvPr id="6" name="Shape 3"/>
           <p:cNvSpPr/>
           <p:nvPr/>
         </p:nvSpPr>
@@ -10185,7 +10185,7 @@
       </p:sp>
       <p:sp>
         <p:nvSpPr>
-          <p:cNvPr id="8" name="Text 4"/>
+          <p:cNvPr id="7" name="Text 4"/>
           <p:cNvSpPr/>
           <p:nvPr/>
         </p:nvSpPr>
@@ -10224,7 +10224,7 @@
       </p:sp>
       <p:sp>
         <p:nvSpPr>
-          <p:cNvPr id="9" name="Text 5"/>
+          <p:cNvPr id="8" name="Text 5"/>
           <p:cNvSpPr/>
           <p:nvPr/>
         </p:nvSpPr>
@@ -10266,7 +10266,7 @@
       </p:sp>
       <p:sp>
         <p:nvSpPr>
-          <p:cNvPr id="10" name="Shape 6"/>
+          <p:cNvPr id="9" name="Shape 6"/>
           <p:cNvSpPr/>
           <p:nvPr/>
         </p:nvSpPr>
@@ -10288,7 +10288,7 @@
       </p:sp>
       <p:sp>
         <p:nvSpPr>
-          <p:cNvPr id="11" name="Text 7"/>
+          <p:cNvPr id="10" name="Text 7"/>
           <p:cNvSpPr/>
           <p:nvPr/>
         </p:nvSpPr>
@@ -10327,7 +10327,7 @@
       </p:sp>
       <p:sp>
         <p:nvSpPr>
-          <p:cNvPr id="12" name="Text 8"/>
+          <p:cNvPr id="11" name="Text 8"/>
           <p:cNvSpPr/>
           <p:nvPr/>
         </p:nvSpPr>
@@ -10369,7 +10369,7 @@
       </p:sp>
       <p:sp>
         <p:nvSpPr>
-          <p:cNvPr id="13" name="Shape 9"/>
+          <p:cNvPr id="12" name="Shape 9"/>
           <p:cNvSpPr/>
           <p:nvPr/>
         </p:nvSpPr>
@@ -10396,7 +10396,7 @@
       </p:sp>
       <p:sp>
         <p:nvSpPr>
-          <p:cNvPr id="14" name="Text 10"/>
+          <p:cNvPr id="13" name="Text 10"/>
           <p:cNvSpPr/>
           <p:nvPr/>
         </p:nvSpPr>
@@ -10435,7 +10435,7 @@
       </p:sp>
       <p:sp>
         <p:nvSpPr>
-          <p:cNvPr id="15" name="Text 11"/>
+          <p:cNvPr id="14" name="Text 11"/>
           <p:cNvSpPr/>
           <p:nvPr/>
         </p:nvSpPr>
@@ -10477,7 +10477,7 @@
       </p:sp>
       <p:sp>
         <p:nvSpPr>
-          <p:cNvPr id="16" name="Shape 12"/>
+          <p:cNvPr id="15" name="Shape 12"/>
           <p:cNvSpPr/>
           <p:nvPr/>
         </p:nvSpPr>
@@ -10504,7 +10504,7 @@
       </p:sp>
       <p:sp>
         <p:nvSpPr>
-          <p:cNvPr id="17" name="Text 13"/>
+          <p:cNvPr id="16" name="Text 13"/>
           <p:cNvSpPr/>
           <p:nvPr/>
         </p:nvSpPr>
@@ -10750,7 +10750,7 @@
       </p:pic>
       <p:sp>
         <p:nvSpPr>
-          <p:cNvPr id="7" name="Shape 3"/>
+          <p:cNvPr id="6" name="Shape 3"/>
           <p:cNvSpPr/>
           <p:nvPr/>
         </p:nvSpPr>
@@ -10777,7 +10777,7 @@
       </p:sp>
       <p:sp>
         <p:nvSpPr>
-          <p:cNvPr id="8" name="Shape 4"/>
+          <p:cNvPr id="7" name="Shape 4"/>
           <p:cNvSpPr/>
           <p:nvPr/>
         </p:nvSpPr>
@@ -10804,7 +10804,7 @@
       </p:sp>
       <p:sp>
         <p:nvSpPr>
-          <p:cNvPr id="9" name="Shape 5"/>
+          <p:cNvPr id="8" name="Shape 5"/>
           <p:cNvSpPr/>
           <p:nvPr/>
         </p:nvSpPr>
@@ -10824,7 +10824,7 @@
       </p:sp>
       <p:sp>
         <p:nvSpPr>
-          <p:cNvPr id="10" name="Shape 6"/>
+          <p:cNvPr id="9" name="Shape 6"/>
           <p:cNvSpPr/>
           <p:nvPr/>
         </p:nvSpPr>
@@ -10844,7 +10844,7 @@
       </p:sp>
       <p:sp>
         <p:nvSpPr>
-          <p:cNvPr id="11" name="Text 7"/>
+          <p:cNvPr id="10" name="Text 7"/>
           <p:cNvSpPr/>
           <p:nvPr/>
         </p:nvSpPr>
@@ -10883,7 +10883,7 @@
       </p:sp>
       <p:sp>
         <p:nvSpPr>
-          <p:cNvPr id="12" name="Shape 8"/>
+          <p:cNvPr id="11" name="Shape 8"/>
           <p:cNvSpPr/>
           <p:nvPr/>
         </p:nvSpPr>
@@ -10910,7 +10910,7 @@
       </p:sp>
       <p:sp>
         <p:nvSpPr>
-          <p:cNvPr id="13" name="Shape 9"/>
+          <p:cNvPr id="12" name="Shape 9"/>
           <p:cNvSpPr/>
           <p:nvPr/>
         </p:nvSpPr>
@@ -10930,7 +10930,7 @@
       </p:sp>
       <p:sp>
         <p:nvSpPr>
-          <p:cNvPr id="14" name="Shape 10"/>
+          <p:cNvPr id="13" name="Shape 10"/>
           <p:cNvSpPr/>
           <p:nvPr/>
         </p:nvSpPr>
@@ -10950,7 +10950,7 @@
       </p:sp>
       <p:sp>
         <p:nvSpPr>
-          <p:cNvPr id="15" name="Text 11"/>
+          <p:cNvPr id="14" name="Text 11"/>
           <p:cNvSpPr/>
           <p:nvPr/>
         </p:nvSpPr>
@@ -10989,7 +10989,7 @@
       </p:sp>
       <p:sp>
         <p:nvSpPr>
-          <p:cNvPr id="16" name="Shape 12"/>
+          <p:cNvPr id="15" name="Shape 12"/>
           <p:cNvSpPr/>
           <p:nvPr/>
         </p:nvSpPr>
@@ -11016,7 +11016,7 @@
       </p:sp>
       <p:sp>
         <p:nvSpPr>
-          <p:cNvPr id="17" name="Shape 13"/>
+          <p:cNvPr id="16" name="Shape 13"/>
           <p:cNvSpPr/>
           <p:nvPr/>
         </p:nvSpPr>
@@ -11036,7 +11036,7 @@
       </p:sp>
       <p:sp>
         <p:nvSpPr>
-          <p:cNvPr id="18" name="Shape 14"/>
+          <p:cNvPr id="17" name="Shape 14"/>
           <p:cNvSpPr/>
           <p:nvPr/>
         </p:nvSpPr>
@@ -11056,7 +11056,7 @@
       </p:sp>
       <p:sp>
         <p:nvSpPr>
-          <p:cNvPr id="19" name="Text 15"/>
+          <p:cNvPr id="18" name="Text 15"/>
           <p:cNvSpPr/>
           <p:nvPr/>
         </p:nvSpPr>
@@ -11095,7 +11095,7 @@
       </p:sp>
       <p:sp>
         <p:nvSpPr>
-          <p:cNvPr id="20" name="Shape 16"/>
+          <p:cNvPr id="19" name="Shape 16"/>
           <p:cNvSpPr/>
           <p:nvPr/>
         </p:nvSpPr>
@@ -11122,7 +11122,7 @@
       </p:sp>
       <p:sp>
         <p:nvSpPr>
-          <p:cNvPr id="21" name="Shape 17"/>
+          <p:cNvPr id="20" name="Shape 17"/>
           <p:cNvSpPr/>
           <p:nvPr/>
         </p:nvSpPr>
@@ -11142,7 +11142,7 @@
       </p:sp>
       <p:sp>
         <p:nvSpPr>
-          <p:cNvPr id="22" name="Shape 18"/>
+          <p:cNvPr id="21" name="Shape 18"/>
           <p:cNvSpPr/>
           <p:nvPr/>
         </p:nvSpPr>
@@ -11162,7 +11162,7 @@
       </p:sp>
       <p:sp>
         <p:nvSpPr>
-          <p:cNvPr id="23" name="Text 19"/>
+          <p:cNvPr id="22" name="Text 19"/>
           <p:cNvSpPr/>
           <p:nvPr/>
         </p:nvSpPr>
@@ -11201,7 +11201,7 @@
       </p:sp>
       <p:sp>
         <p:nvSpPr>
-          <p:cNvPr id="24" name="Text 20"/>
+          <p:cNvPr id="23" name="Text 20"/>
           <p:cNvSpPr/>
           <p:nvPr/>
         </p:nvSpPr>
@@ -11444,7 +11444,7 @@
       </p:pic>
       <p:sp>
         <p:nvSpPr>
-          <p:cNvPr id="7" name="Shape 3"/>
+          <p:cNvPr id="6" name="Shape 3"/>
           <p:cNvSpPr/>
           <p:nvPr/>
         </p:nvSpPr>
@@ -11471,7 +11471,7 @@
       </p:sp>
       <p:sp>
         <p:nvSpPr>
-          <p:cNvPr id="8" name="Shape 4"/>
+          <p:cNvPr id="7" name="Shape 4"/>
           <p:cNvSpPr/>
           <p:nvPr/>
         </p:nvSpPr>
@@ -11491,7 +11491,7 @@
       </p:sp>
       <p:sp>
         <p:nvSpPr>
-          <p:cNvPr id="9" name="Shape 5"/>
+          <p:cNvPr id="8" name="Shape 5"/>
           <p:cNvSpPr/>
           <p:nvPr/>
         </p:nvSpPr>
@@ -11511,7 +11511,7 @@
       </p:sp>
       <p:sp>
         <p:nvSpPr>
-          <p:cNvPr id="10" name="Shape 6"/>
+          <p:cNvPr id="9" name="Shape 6"/>
           <p:cNvSpPr/>
           <p:nvPr/>
         </p:nvSpPr>
@@ -11531,7 +11531,7 @@
       </p:sp>
       <p:sp>
         <p:nvSpPr>
-          <p:cNvPr id="11" name="Text 7"/>
+          <p:cNvPr id="10" name="Text 7"/>
           <p:cNvSpPr/>
           <p:nvPr/>
         </p:nvSpPr>
@@ -11584,7 +11584,7 @@
       </p:sp>
       <p:sp>
         <p:nvSpPr>
-          <p:cNvPr id="12" name="Shape 8"/>
+          <p:cNvPr id="11" name="Shape 8"/>
           <p:cNvSpPr/>
           <p:nvPr/>
         </p:nvSpPr>
@@ -11611,7 +11611,7 @@
       </p:sp>
       <p:sp>
         <p:nvSpPr>
-          <p:cNvPr id="13" name="Shape 9"/>
+          <p:cNvPr id="12" name="Shape 9"/>
           <p:cNvSpPr/>
           <p:nvPr/>
         </p:nvSpPr>
@@ -11631,7 +11631,7 @@
       </p:sp>
       <p:sp>
         <p:nvSpPr>
-          <p:cNvPr id="14" name="Shape 10"/>
+          <p:cNvPr id="13" name="Shape 10"/>
           <p:cNvSpPr/>
           <p:nvPr/>
         </p:nvSpPr>
@@ -11651,7 +11651,7 @@
       </p:sp>
       <p:sp>
         <p:nvSpPr>
-          <p:cNvPr id="15" name="Shape 11"/>
+          <p:cNvPr id="14" name="Shape 11"/>
           <p:cNvSpPr/>
           <p:nvPr/>
         </p:nvSpPr>
@@ -11671,7 +11671,7 @@
       </p:sp>
       <p:sp>
         <p:nvSpPr>
-          <p:cNvPr id="16" name="Text 12"/>
+          <p:cNvPr id="15" name="Text 12"/>
           <p:cNvSpPr/>
           <p:nvPr/>
         </p:nvSpPr>
@@ -11724,7 +11724,7 @@
       </p:sp>
       <p:sp>
         <p:nvSpPr>
-          <p:cNvPr id="17" name="Shape 13"/>
+          <p:cNvPr id="16" name="Shape 13"/>
           <p:cNvSpPr/>
           <p:nvPr/>
         </p:nvSpPr>
@@ -11751,7 +11751,7 @@
       </p:sp>
       <p:sp>
         <p:nvSpPr>
-          <p:cNvPr id="18" name="Shape 14"/>
+          <p:cNvPr id="17" name="Shape 14"/>
           <p:cNvSpPr/>
           <p:nvPr/>
         </p:nvSpPr>
@@ -11771,7 +11771,7 @@
       </p:sp>
       <p:sp>
         <p:nvSpPr>
-          <p:cNvPr id="19" name="Shape 15"/>
+          <p:cNvPr id="18" name="Shape 15"/>
           <p:cNvSpPr/>
           <p:nvPr/>
         </p:nvSpPr>
@@ -11791,7 +11791,7 @@
       </p:sp>
       <p:sp>
         <p:nvSpPr>
-          <p:cNvPr id="20" name="Shape 16"/>
+          <p:cNvPr id="19" name="Shape 16"/>
           <p:cNvSpPr/>
           <p:nvPr/>
         </p:nvSpPr>
@@ -11811,7 +11811,7 @@
       </p:sp>
       <p:sp>
         <p:nvSpPr>
-          <p:cNvPr id="21" name="Text 17"/>
+          <p:cNvPr id="20" name="Text 17"/>
           <p:cNvSpPr/>
           <p:nvPr/>
         </p:nvSpPr>
@@ -11864,7 +11864,7 @@
       </p:sp>
       <p:sp>
         <p:nvSpPr>
-          <p:cNvPr id="22" name="Shape 18"/>
+          <p:cNvPr id="21" name="Shape 18"/>
           <p:cNvSpPr/>
           <p:nvPr/>
         </p:nvSpPr>
@@ -11891,7 +11891,7 @@
       </p:sp>
       <p:sp>
         <p:nvSpPr>
-          <p:cNvPr id="23" name="Shape 19"/>
+          <p:cNvPr id="22" name="Shape 19"/>
           <p:cNvSpPr/>
           <p:nvPr/>
         </p:nvSpPr>
@@ -11911,7 +11911,7 @@
       </p:sp>
       <p:sp>
         <p:nvSpPr>
-          <p:cNvPr id="24" name="Shape 20"/>
+          <p:cNvPr id="23" name="Shape 20"/>
           <p:cNvSpPr/>
           <p:nvPr/>
         </p:nvSpPr>
@@ -11931,7 +11931,7 @@
       </p:sp>
       <p:sp>
         <p:nvSpPr>
-          <p:cNvPr id="25" name="Shape 21"/>
+          <p:cNvPr id="24" name="Shape 21"/>
           <p:cNvSpPr/>
           <p:nvPr/>
         </p:nvSpPr>
@@ -11951,7 +11951,7 @@
       </p:sp>
       <p:sp>
         <p:nvSpPr>
-          <p:cNvPr id="26" name="Text 22"/>
+          <p:cNvPr id="25" name="Text 22"/>
           <p:cNvSpPr/>
           <p:nvPr/>
         </p:nvSpPr>
@@ -12250,7 +12250,7 @@
       </p:pic>
       <p:sp>
         <p:nvSpPr>
-          <p:cNvPr id="8" name="Shape 4"/>
+          <p:cNvPr id="7" name="Shape 4"/>
           <p:cNvSpPr/>
           <p:nvPr/>
         </p:nvSpPr>
@@ -12277,7 +12277,7 @@
       </p:sp>
       <p:sp>
         <p:nvSpPr>
-          <p:cNvPr id="9" name="Shape 5"/>
+          <p:cNvPr id="8" name="Shape 5"/>
           <p:cNvSpPr/>
           <p:nvPr/>
         </p:nvSpPr>
@@ -12297,7 +12297,7 @@
       </p:sp>
       <p:sp>
         <p:nvSpPr>
-          <p:cNvPr id="10" name="Text 6"/>
+          <p:cNvPr id="9" name="Text 6"/>
           <p:cNvSpPr/>
           <p:nvPr/>
         </p:nvSpPr>
@@ -12336,7 +12336,7 @@
       </p:sp>
       <p:sp>
         <p:nvSpPr>
-          <p:cNvPr id="11" name="Text 7"/>
+          <p:cNvPr id="10" name="Text 7"/>
           <p:cNvSpPr/>
           <p:nvPr/>
         </p:nvSpPr>
@@ -12375,7 +12375,7 @@
       </p:sp>
       <p:sp>
         <p:nvSpPr>
-          <p:cNvPr id="12" name="Text 8"/>
+          <p:cNvPr id="11" name="Text 8"/>
           <p:cNvSpPr/>
           <p:nvPr/>
         </p:nvSpPr>
@@ -12417,7 +12417,7 @@
       </p:sp>
       <p:sp>
         <p:nvSpPr>
-          <p:cNvPr id="13" name="Shape 9"/>
+          <p:cNvPr id="12" name="Shape 9"/>
           <p:cNvSpPr/>
           <p:nvPr/>
         </p:nvSpPr>
@@ -12444,7 +12444,7 @@
       </p:sp>
       <p:sp>
         <p:nvSpPr>
-          <p:cNvPr id="14" name="Shape 10"/>
+          <p:cNvPr id="13" name="Shape 10"/>
           <p:cNvSpPr/>
           <p:nvPr/>
         </p:nvSpPr>
@@ -12464,7 +12464,7 @@
       </p:sp>
       <p:sp>
         <p:nvSpPr>
-          <p:cNvPr id="15" name="Text 11"/>
+          <p:cNvPr id="14" name="Text 11"/>
           <p:cNvSpPr/>
           <p:nvPr/>
         </p:nvSpPr>
@@ -12503,7 +12503,7 @@
       </p:sp>
       <p:sp>
         <p:nvSpPr>
-          <p:cNvPr id="16" name="Text 12"/>
+          <p:cNvPr id="15" name="Text 12"/>
           <p:cNvSpPr/>
           <p:nvPr/>
         </p:nvSpPr>
@@ -12542,7 +12542,7 @@
       </p:sp>
       <p:sp>
         <p:nvSpPr>
-          <p:cNvPr id="17" name="Text 13"/>
+          <p:cNvPr id="16" name="Text 13"/>
           <p:cNvSpPr/>
           <p:nvPr/>
         </p:nvSpPr>
@@ -12584,7 +12584,7 @@
       </p:sp>
       <p:sp>
         <p:nvSpPr>
-          <p:cNvPr id="18" name="Shape 14"/>
+          <p:cNvPr id="17" name="Shape 14"/>
           <p:cNvSpPr/>
           <p:nvPr/>
         </p:nvSpPr>
@@ -12611,7 +12611,7 @@
       </p:sp>
       <p:sp>
         <p:nvSpPr>
-          <p:cNvPr id="19" name="Shape 15"/>
+          <p:cNvPr id="18" name="Shape 15"/>
           <p:cNvSpPr/>
           <p:nvPr/>
         </p:nvSpPr>
@@ -12631,7 +12631,7 @@
       </p:sp>
       <p:sp>
         <p:nvSpPr>
-          <p:cNvPr id="20" name="Text 16"/>
+          <p:cNvPr id="19" name="Text 16"/>
           <p:cNvSpPr/>
           <p:nvPr/>
         </p:nvSpPr>
@@ -12670,7 +12670,7 @@
       </p:sp>
       <p:sp>
         <p:nvSpPr>
-          <p:cNvPr id="21" name="Text 17"/>
+          <p:cNvPr id="20" name="Text 17"/>
           <p:cNvSpPr/>
           <p:nvPr/>
         </p:nvSpPr>
@@ -12709,7 +12709,7 @@
       </p:sp>
       <p:sp>
         <p:nvSpPr>
-          <p:cNvPr id="22" name="Text 18"/>
+          <p:cNvPr id="21" name="Text 18"/>
           <p:cNvSpPr/>
           <p:nvPr/>
         </p:nvSpPr>
@@ -12751,7 +12751,7 @@
       </p:sp>
       <p:sp>
         <p:nvSpPr>
-          <p:cNvPr id="23" name="Shape 19"/>
+          <p:cNvPr id="22" name="Shape 19"/>
           <p:cNvSpPr/>
           <p:nvPr/>
         </p:nvSpPr>
@@ -12778,7 +12778,7 @@
       </p:sp>
       <p:sp>
         <p:nvSpPr>
-          <p:cNvPr id="24" name="Shape 20"/>
+          <p:cNvPr id="23" name="Shape 20"/>
           <p:cNvSpPr/>
           <p:nvPr/>
         </p:nvSpPr>
@@ -12798,7 +12798,7 @@
       </p:sp>
       <p:sp>
         <p:nvSpPr>
-          <p:cNvPr id="25" name="Text 21"/>
+          <p:cNvPr id="24" name="Text 21"/>
           <p:cNvSpPr/>
           <p:nvPr/>
         </p:nvSpPr>
@@ -12837,7 +12837,7 @@
       </p:sp>
       <p:sp>
         <p:nvSpPr>
-          <p:cNvPr id="26" name="Text 22"/>
+          <p:cNvPr id="25" name="Text 22"/>
           <p:cNvSpPr/>
           <p:nvPr/>
         </p:nvSpPr>
@@ -12876,7 +12876,7 @@
       </p:sp>
       <p:sp>
         <p:nvSpPr>
-          <p:cNvPr id="27" name="Text 23"/>
+          <p:cNvPr id="26" name="Text 23"/>
           <p:cNvSpPr/>
           <p:nvPr/>
         </p:nvSpPr>
@@ -12918,7 +12918,7 @@
       </p:sp>
       <p:sp>
         <p:nvSpPr>
-          <p:cNvPr id="28" name="Shape 24"/>
+          <p:cNvPr id="27" name="Shape 24"/>
           <p:cNvSpPr/>
           <p:nvPr/>
         </p:nvSpPr>
@@ -12945,7 +12945,7 @@
       </p:sp>
       <p:sp>
         <p:nvSpPr>
-          <p:cNvPr id="29" name="Shape 25"/>
+          <p:cNvPr id="28" name="Shape 25"/>
           <p:cNvSpPr/>
           <p:nvPr/>
         </p:nvSpPr>
@@ -12965,7 +12965,7 @@
       </p:sp>
       <p:sp>
         <p:nvSpPr>
-          <p:cNvPr id="30" name="Text 26"/>
+          <p:cNvPr id="29" name="Text 26"/>
           <p:cNvSpPr/>
           <p:nvPr/>
         </p:nvSpPr>
@@ -13004,7 +13004,7 @@
       </p:sp>
       <p:sp>
         <p:nvSpPr>
-          <p:cNvPr id="31" name="Text 27"/>
+          <p:cNvPr id="30" name="Text 27"/>
           <p:cNvSpPr/>
           <p:nvPr/>
         </p:nvSpPr>
@@ -13043,7 +13043,7 @@
       </p:sp>
       <p:sp>
         <p:nvSpPr>
-          <p:cNvPr id="32" name="Text 28"/>
+          <p:cNvPr id="31" name="Text 28"/>
           <p:cNvSpPr/>
           <p:nvPr/>
         </p:nvSpPr>
@@ -13289,7 +13289,7 @@
       </p:pic>
       <p:sp>
         <p:nvSpPr>
-          <p:cNvPr id="7" name="Shape 3"/>
+          <p:cNvPr id="6" name="Shape 3"/>
           <p:cNvSpPr/>
           <p:nvPr/>
         </p:nvSpPr>
@@ -13316,7 +13316,7 @@
       </p:sp>
       <p:sp>
         <p:nvSpPr>
-          <p:cNvPr id="8" name="Text 4"/>
+          <p:cNvPr id="7" name="Text 4"/>
           <p:cNvSpPr/>
           <p:nvPr/>
         </p:nvSpPr>
@@ -13355,7 +13355,7 @@
       </p:sp>
       <p:sp>
         <p:nvSpPr>
-          <p:cNvPr id="9" name="Text 5"/>
+          <p:cNvPr id="8" name="Text 5"/>
           <p:cNvSpPr/>
           <p:nvPr/>
         </p:nvSpPr>
@@ -13394,7 +13394,7 @@
       </p:sp>
       <p:sp>
         <p:nvSpPr>
-          <p:cNvPr id="10" name="Text 6"/>
+          <p:cNvPr id="9" name="Text 6"/>
           <p:cNvSpPr/>
           <p:nvPr/>
         </p:nvSpPr>
@@ -13433,7 +13433,7 @@
       </p:sp>
       <p:sp>
         <p:nvSpPr>
-          <p:cNvPr id="11" name="Text 7"/>
+          <p:cNvPr id="10" name="Text 7"/>
           <p:cNvSpPr/>
           <p:nvPr/>
         </p:nvSpPr>
@@ -13486,7 +13486,7 @@
       </p:sp>
       <p:sp>
         <p:nvSpPr>
-          <p:cNvPr id="12" name="Text 8"/>
+          <p:cNvPr id="11" name="Text 8"/>
           <p:cNvSpPr/>
           <p:nvPr/>
         </p:nvSpPr>
@@ -13539,7 +13539,7 @@
       </p:sp>
       <p:sp>
         <p:nvSpPr>
-          <p:cNvPr id="13" name="Text 9"/>
+          <p:cNvPr id="12" name="Text 9"/>
           <p:cNvSpPr/>
           <p:nvPr/>
         </p:nvSpPr>
@@ -13592,7 +13592,7 @@
       </p:sp>
       <p:sp>
         <p:nvSpPr>
-          <p:cNvPr id="14" name="Text 10"/>
+          <p:cNvPr id="13" name="Text 10"/>
           <p:cNvSpPr/>
           <p:nvPr/>
         </p:nvSpPr>
@@ -13645,7 +13645,7 @@
       </p:sp>
       <p:sp>
         <p:nvSpPr>
-          <p:cNvPr id="15" name="Shape 11"/>
+          <p:cNvPr id="14" name="Shape 11"/>
           <p:cNvSpPr/>
           <p:nvPr/>
         </p:nvSpPr>
@@ -13667,7 +13667,7 @@
       </p:sp>
       <p:sp>
         <p:nvSpPr>
-          <p:cNvPr id="16" name="Text 12"/>
+          <p:cNvPr id="15" name="Text 12"/>
           <p:cNvSpPr/>
           <p:nvPr/>
         </p:nvSpPr>
@@ -13706,7 +13706,7 @@
       </p:sp>
       <p:sp>
         <p:nvSpPr>
-          <p:cNvPr id="17" name="Text 13"/>
+          <p:cNvPr id="16" name="Text 13"/>
           <p:cNvSpPr/>
           <p:nvPr/>
         </p:nvSpPr>
@@ -14495,7 +14495,7 @@
       </p:pic>
       <p:sp>
         <p:nvSpPr>
-          <p:cNvPr id="7" name="Shape 3"/>
+          <p:cNvPr id="6" name="Shape 3"/>
           <p:cNvSpPr/>
           <p:nvPr/>
         </p:nvSpPr>
@@ -14522,7 +14522,7 @@
       </p:sp>
       <p:sp>
         <p:nvSpPr>
-          <p:cNvPr id="8" name="Shape 4"/>
+          <p:cNvPr id="7" name="Shape 4"/>
           <p:cNvSpPr/>
           <p:nvPr/>
         </p:nvSpPr>
@@ -14542,7 +14542,7 @@
       </p:sp>
       <p:sp>
         <p:nvSpPr>
-          <p:cNvPr id="9" name="Text 5"/>
+          <p:cNvPr id="8" name="Text 5"/>
           <p:cNvSpPr/>
           <p:nvPr/>
         </p:nvSpPr>
@@ -14581,7 +14581,7 @@
       </p:sp>
       <p:sp>
         <p:nvSpPr>
-          <p:cNvPr id="10" name="Text 6"/>
+          <p:cNvPr id="9" name="Text 6"/>
           <p:cNvSpPr/>
           <p:nvPr/>
         </p:nvSpPr>
@@ -14620,7 +14620,7 @@
       </p:sp>
       <p:sp>
         <p:nvSpPr>
-          <p:cNvPr id="11" name="Shape 7"/>
+          <p:cNvPr id="10" name="Shape 7"/>
           <p:cNvSpPr/>
           <p:nvPr/>
         </p:nvSpPr>
@@ -14647,7 +14647,7 @@
       </p:sp>
       <p:sp>
         <p:nvSpPr>
-          <p:cNvPr id="12" name="Shape 8"/>
+          <p:cNvPr id="11" name="Shape 8"/>
           <p:cNvSpPr/>
           <p:nvPr/>
         </p:nvSpPr>
@@ -14667,7 +14667,7 @@
       </p:sp>
       <p:sp>
         <p:nvSpPr>
-          <p:cNvPr id="13" name="Text 9"/>
+          <p:cNvPr id="12" name="Text 9"/>
           <p:cNvSpPr/>
           <p:nvPr/>
         </p:nvSpPr>
@@ -14706,7 +14706,7 @@
       </p:sp>
       <p:sp>
         <p:nvSpPr>
-          <p:cNvPr id="14" name="Text 10"/>
+          <p:cNvPr id="13" name="Text 10"/>
           <p:cNvSpPr/>
           <p:nvPr/>
         </p:nvSpPr>
@@ -14745,7 +14745,7 @@
       </p:sp>
       <p:sp>
         <p:nvSpPr>
-          <p:cNvPr id="15" name="Shape 11"/>
+          <p:cNvPr id="14" name="Shape 11"/>
           <p:cNvSpPr/>
           <p:nvPr/>
         </p:nvSpPr>
@@ -14772,7 +14772,7 @@
       </p:sp>
       <p:sp>
         <p:nvSpPr>
-          <p:cNvPr id="16" name="Shape 12"/>
+          <p:cNvPr id="15" name="Shape 12"/>
           <p:cNvSpPr/>
           <p:nvPr/>
         </p:nvSpPr>
@@ -14792,7 +14792,7 @@
       </p:sp>
       <p:sp>
         <p:nvSpPr>
-          <p:cNvPr id="17" name="Text 13"/>
+          <p:cNvPr id="16" name="Text 13"/>
           <p:cNvSpPr/>
           <p:nvPr/>
         </p:nvSpPr>
@@ -14831,7 +14831,7 @@
       </p:sp>
       <p:sp>
         <p:nvSpPr>
-          <p:cNvPr id="18" name="Text 14"/>
+          <p:cNvPr id="17" name="Text 14"/>
           <p:cNvSpPr/>
           <p:nvPr/>
         </p:nvSpPr>
@@ -14870,7 +14870,7 @@
       </p:sp>
       <p:sp>
         <p:nvSpPr>
-          <p:cNvPr id="19" name="Shape 15"/>
+          <p:cNvPr id="18" name="Shape 15"/>
           <p:cNvSpPr/>
           <p:nvPr/>
         </p:nvSpPr>
@@ -14897,7 +14897,7 @@
       </p:sp>
       <p:sp>
         <p:nvSpPr>
-          <p:cNvPr id="20" name="Shape 16"/>
+          <p:cNvPr id="19" name="Shape 16"/>
           <p:cNvSpPr/>
           <p:nvPr/>
         </p:nvSpPr>
@@ -14917,7 +14917,7 @@
       </p:sp>
       <p:sp>
         <p:nvSpPr>
-          <p:cNvPr id="21" name="Text 17"/>
+          <p:cNvPr id="20" name="Text 17"/>
           <p:cNvSpPr/>
           <p:nvPr/>
         </p:nvSpPr>
@@ -14956,7 +14956,7 @@
       </p:sp>
       <p:sp>
         <p:nvSpPr>
-          <p:cNvPr id="22" name="Text 18"/>
+          <p:cNvPr id="21" name="Text 18"/>
           <p:cNvSpPr/>
           <p:nvPr/>
         </p:nvSpPr>
@@ -14995,7 +14995,7 @@
       </p:sp>
       <p:sp>
         <p:nvSpPr>
-          <p:cNvPr id="23" name="Shape 19"/>
+          <p:cNvPr id="22" name="Shape 19"/>
           <p:cNvSpPr/>
           <p:nvPr/>
         </p:nvSpPr>
@@ -15022,7 +15022,7 @@
       </p:sp>
       <p:sp>
         <p:nvSpPr>
-          <p:cNvPr id="24" name="Shape 20"/>
+          <p:cNvPr id="23" name="Shape 20"/>
           <p:cNvSpPr/>
           <p:nvPr/>
         </p:nvSpPr>
@@ -15042,7 +15042,7 @@
       </p:sp>
       <p:sp>
         <p:nvSpPr>
-          <p:cNvPr id="25" name="Text 21"/>
+          <p:cNvPr id="24" name="Text 21"/>
           <p:cNvSpPr/>
           <p:nvPr/>
         </p:nvSpPr>
@@ -15081,7 +15081,7 @@
       </p:sp>
       <p:sp>
         <p:nvSpPr>
-          <p:cNvPr id="26" name="Text 22"/>
+          <p:cNvPr id="25" name="Text 22"/>
           <p:cNvSpPr/>
           <p:nvPr/>
         </p:nvSpPr>
@@ -15120,7 +15120,7 @@
       </p:sp>
       <p:sp>
         <p:nvSpPr>
-          <p:cNvPr id="27" name="Shape 23"/>
+          <p:cNvPr id="26" name="Shape 23"/>
           <p:cNvSpPr/>
           <p:nvPr/>
         </p:nvSpPr>
@@ -15147,7 +15147,7 @@
       </p:sp>
       <p:sp>
         <p:nvSpPr>
-          <p:cNvPr id="28" name="Shape 24"/>
+          <p:cNvPr id="27" name="Shape 24"/>
           <p:cNvSpPr/>
           <p:nvPr/>
         </p:nvSpPr>
@@ -15167,7 +15167,7 @@
       </p:sp>
       <p:sp>
         <p:nvSpPr>
-          <p:cNvPr id="29" name="Text 25"/>
+          <p:cNvPr id="28" name="Text 25"/>
           <p:cNvSpPr/>
           <p:nvPr/>
         </p:nvSpPr>
@@ -15206,7 +15206,7 @@
       </p:sp>
       <p:sp>
         <p:nvSpPr>
-          <p:cNvPr id="30" name="Text 26"/>
+          <p:cNvPr id="29" name="Text 26"/>
           <p:cNvSpPr/>
           <p:nvPr/>
         </p:nvSpPr>
@@ -15245,7 +15245,7 @@
       </p:sp>
       <p:sp>
         <p:nvSpPr>
-          <p:cNvPr id="31" name="Shape 27"/>
+          <p:cNvPr id="30" name="Shape 27"/>
           <p:cNvSpPr/>
           <p:nvPr/>
         </p:nvSpPr>
@@ -15267,7 +15267,7 @@
       </p:sp>
       <p:sp>
         <p:nvSpPr>
-          <p:cNvPr id="32" name="Shape 28"/>
+          <p:cNvPr id="31" name="Shape 28"/>
           <p:cNvSpPr/>
           <p:nvPr/>
         </p:nvSpPr>
@@ -15287,7 +15287,7 @@
       </p:sp>
       <p:sp>
         <p:nvSpPr>
-          <p:cNvPr id="33" name="Text 29"/>
+          <p:cNvPr id="32" name="Text 29"/>
           <p:cNvSpPr/>
           <p:nvPr/>
         </p:nvSpPr>
@@ -15326,7 +15326,7 @@
       </p:sp>
       <p:sp>
         <p:nvSpPr>
-          <p:cNvPr id="34" name="Text 30"/>
+          <p:cNvPr id="33" name="Text 30"/>
           <p:cNvSpPr/>
           <p:nvPr/>
         </p:nvSpPr>
@@ -15365,7 +15365,7 @@
       </p:sp>
       <p:sp>
         <p:nvSpPr>
-          <p:cNvPr id="35" name="Shape 31"/>
+          <p:cNvPr id="34" name="Shape 31"/>
           <p:cNvSpPr/>
           <p:nvPr/>
         </p:nvSpPr>
@@ -15392,7 +15392,7 @@
       </p:sp>
       <p:sp>
         <p:nvSpPr>
-          <p:cNvPr id="36" name="Shape 32"/>
+          <p:cNvPr id="35" name="Shape 32"/>
           <p:cNvSpPr/>
           <p:nvPr/>
         </p:nvSpPr>
@@ -15412,7 +15412,7 @@
       </p:sp>
       <p:sp>
         <p:nvSpPr>
-          <p:cNvPr id="37" name="Text 33"/>
+          <p:cNvPr id="36" name="Text 33"/>
           <p:cNvSpPr/>
           <p:nvPr/>
         </p:nvSpPr>
@@ -15451,7 +15451,7 @@
       </p:sp>
       <p:sp>
         <p:nvSpPr>
-          <p:cNvPr id="38" name="Text 34"/>
+          <p:cNvPr id="37" name="Text 34"/>
           <p:cNvSpPr/>
           <p:nvPr/>
         </p:nvSpPr>
@@ -15490,7 +15490,7 @@
       </p:sp>
       <p:sp>
         <p:nvSpPr>
-          <p:cNvPr id="39" name="Shape 35"/>
+          <p:cNvPr id="38" name="Shape 35"/>
           <p:cNvSpPr/>
           <p:nvPr/>
         </p:nvSpPr>
@@ -15517,7 +15517,7 @@
       </p:sp>
       <p:sp>
         <p:nvSpPr>
-          <p:cNvPr id="40" name="Shape 36"/>
+          <p:cNvPr id="39" name="Shape 36"/>
           <p:cNvSpPr/>
           <p:nvPr/>
         </p:nvSpPr>
@@ -15537,7 +15537,7 @@
       </p:sp>
       <p:sp>
         <p:nvSpPr>
-          <p:cNvPr id="41" name="Text 37"/>
+          <p:cNvPr id="40" name="Text 37"/>
           <p:cNvSpPr/>
           <p:nvPr/>
         </p:nvSpPr>
@@ -15576,7 +15576,7 @@
       </p:sp>
       <p:sp>
         <p:nvSpPr>
-          <p:cNvPr id="42" name="Text 38"/>
+          <p:cNvPr id="41" name="Text 38"/>
           <p:cNvSpPr/>
           <p:nvPr/>
         </p:nvSpPr>
@@ -15615,7 +15615,7 @@
       </p:sp>
       <p:sp>
         <p:nvSpPr>
-          <p:cNvPr id="43" name="Shape 39"/>
+          <p:cNvPr id="42" name="Shape 39"/>
           <p:cNvSpPr/>
           <p:nvPr/>
         </p:nvSpPr>
@@ -15642,7 +15642,7 @@
       </p:sp>
       <p:sp>
         <p:nvSpPr>
-          <p:cNvPr id="44" name="Shape 40"/>
+          <p:cNvPr id="43" name="Shape 40"/>
           <p:cNvSpPr/>
           <p:nvPr/>
         </p:nvSpPr>
@@ -15662,7 +15662,7 @@
       </p:sp>
       <p:sp>
         <p:nvSpPr>
-          <p:cNvPr id="45" name="Text 41"/>
+          <p:cNvPr id="44" name="Text 41"/>
           <p:cNvSpPr/>
           <p:nvPr/>
         </p:nvSpPr>
@@ -15701,7 +15701,7 @@
       </p:sp>
       <p:sp>
         <p:nvSpPr>
-          <p:cNvPr id="46" name="Text 42"/>
+          <p:cNvPr id="45" name="Text 42"/>
           <p:cNvSpPr/>
           <p:nvPr/>
         </p:nvSpPr>
@@ -15740,7 +15740,7 @@
       </p:sp>
       <p:sp>
         <p:nvSpPr>
-          <p:cNvPr id="47" name="Shape 43"/>
+          <p:cNvPr id="46" name="Shape 43"/>
           <p:cNvSpPr/>
           <p:nvPr/>
         </p:nvSpPr>
@@ -15767,7 +15767,7 @@
       </p:sp>
       <p:sp>
         <p:nvSpPr>
-          <p:cNvPr id="48" name="Shape 44"/>
+          <p:cNvPr id="47" name="Shape 44"/>
           <p:cNvSpPr/>
           <p:nvPr/>
         </p:nvSpPr>
@@ -15787,7 +15787,7 @@
       </p:sp>
       <p:sp>
         <p:nvSpPr>
-          <p:cNvPr id="49" name="Text 45"/>
+          <p:cNvPr id="48" name="Text 45"/>
           <p:cNvSpPr/>
           <p:nvPr/>
         </p:nvSpPr>
@@ -15826,7 +15826,7 @@
       </p:sp>
       <p:sp>
         <p:nvSpPr>
-          <p:cNvPr id="50" name="Text 46"/>
+          <p:cNvPr id="49" name="Text 46"/>
           <p:cNvSpPr/>
           <p:nvPr/>
         </p:nvSpPr>
@@ -15865,7 +15865,7 @@
       </p:sp>
       <p:sp>
         <p:nvSpPr>
-          <p:cNvPr id="51" name="Shape 47"/>
+          <p:cNvPr id="50" name="Shape 47"/>
           <p:cNvSpPr/>
           <p:nvPr/>
         </p:nvSpPr>
@@ -15892,7 +15892,7 @@
       </p:sp>
       <p:sp>
         <p:nvSpPr>
-          <p:cNvPr id="52" name="Shape 48"/>
+          <p:cNvPr id="51" name="Shape 48"/>
           <p:cNvSpPr/>
           <p:nvPr/>
         </p:nvSpPr>
@@ -15912,7 +15912,7 @@
       </p:sp>
       <p:sp>
         <p:nvSpPr>
-          <p:cNvPr id="53" name="Text 49"/>
+          <p:cNvPr id="52" name="Text 49"/>
           <p:cNvSpPr/>
           <p:nvPr/>
         </p:nvSpPr>
@@ -15951,7 +15951,7 @@
       </p:sp>
       <p:sp>
         <p:nvSpPr>
-          <p:cNvPr id="54" name="Text 50"/>
+          <p:cNvPr id="53" name="Text 50"/>
           <p:cNvSpPr/>
           <p:nvPr/>
         </p:nvSpPr>
@@ -15990,7 +15990,7 @@
       </p:sp>
       <p:sp>
         <p:nvSpPr>
-          <p:cNvPr id="55" name="Shape 51"/>
+          <p:cNvPr id="54" name="Shape 51"/>
           <p:cNvSpPr/>
           <p:nvPr/>
         </p:nvSpPr>
@@ -16017,7 +16017,7 @@
       </p:sp>
       <p:sp>
         <p:nvSpPr>
-          <p:cNvPr id="56" name="Text 52"/>
+          <p:cNvPr id="55" name="Text 52"/>
           <p:cNvSpPr/>
           <p:nvPr/>
         </p:nvSpPr>
@@ -16305,7 +16305,7 @@
       </p:pic>
       <p:sp>
         <p:nvSpPr>
-          <p:cNvPr id="8" name="Shape 4"/>
+          <p:cNvPr id="7" name="Shape 4"/>
           <p:cNvSpPr/>
           <p:nvPr/>
         </p:nvSpPr>
@@ -16332,7 +16332,7 @@
       </p:sp>
       <p:sp>
         <p:nvSpPr>
-          <p:cNvPr id="9" name="Text 5"/>
+          <p:cNvPr id="8" name="Text 5"/>
           <p:cNvSpPr/>
           <p:nvPr/>
         </p:nvSpPr>
@@ -16371,7 +16371,7 @@
       </p:sp>
       <p:sp>
         <p:nvSpPr>
-          <p:cNvPr id="10" name="Text 6"/>
+          <p:cNvPr id="9" name="Text 6"/>
           <p:cNvSpPr/>
           <p:nvPr/>
         </p:nvSpPr>
@@ -16413,7 +16413,7 @@
       </p:sp>
       <p:sp>
         <p:nvSpPr>
-          <p:cNvPr id="11" name="Shape 7"/>
+          <p:cNvPr id="10" name="Shape 7"/>
           <p:cNvSpPr/>
           <p:nvPr/>
         </p:nvSpPr>
@@ -16440,7 +16440,7 @@
       </p:sp>
       <p:sp>
         <p:nvSpPr>
-          <p:cNvPr id="12" name="Text 8"/>
+          <p:cNvPr id="11" name="Text 8"/>
           <p:cNvSpPr/>
           <p:nvPr/>
         </p:nvSpPr>
@@ -16479,7 +16479,7 @@
       </p:sp>
       <p:sp>
         <p:nvSpPr>
-          <p:cNvPr id="13" name="Text 9"/>
+          <p:cNvPr id="12" name="Text 9"/>
           <p:cNvSpPr/>
           <p:nvPr/>
         </p:nvSpPr>
@@ -16521,7 +16521,7 @@
       </p:sp>
       <p:sp>
         <p:nvSpPr>
-          <p:cNvPr id="14" name="Shape 10"/>
+          <p:cNvPr id="13" name="Shape 10"/>
           <p:cNvSpPr/>
           <p:nvPr/>
         </p:nvSpPr>
@@ -16548,7 +16548,7 @@
       </p:sp>
       <p:sp>
         <p:nvSpPr>
-          <p:cNvPr id="15" name="Text 11"/>
+          <p:cNvPr id="14" name="Text 11"/>
           <p:cNvSpPr/>
           <p:nvPr/>
         </p:nvSpPr>
@@ -16587,7 +16587,7 @@
       </p:sp>
       <p:sp>
         <p:nvSpPr>
-          <p:cNvPr id="16" name="Text 12"/>
+          <p:cNvPr id="15" name="Text 12"/>
           <p:cNvSpPr/>
           <p:nvPr/>
         </p:nvSpPr>
@@ -16629,7 +16629,7 @@
       </p:sp>
       <p:sp>
         <p:nvSpPr>
-          <p:cNvPr id="17" name="Shape 13"/>
+          <p:cNvPr id="16" name="Shape 13"/>
           <p:cNvSpPr/>
           <p:nvPr/>
         </p:nvSpPr>
@@ -16656,7 +16656,7 @@
       </p:sp>
       <p:sp>
         <p:nvSpPr>
-          <p:cNvPr id="18" name="Text 14"/>
+          <p:cNvPr id="17" name="Text 14"/>
           <p:cNvSpPr/>
           <p:nvPr/>
         </p:nvSpPr>
@@ -16695,7 +16695,7 @@
       </p:sp>
       <p:sp>
         <p:nvSpPr>
-          <p:cNvPr id="19" name="Text 15"/>
+          <p:cNvPr id="18" name="Text 15"/>
           <p:cNvSpPr/>
           <p:nvPr/>
         </p:nvSpPr>
@@ -16737,7 +16737,7 @@
       </p:sp>
       <p:sp>
         <p:nvSpPr>
-          <p:cNvPr id="20" name="Shape 16"/>
+          <p:cNvPr id="19" name="Shape 16"/>
           <p:cNvSpPr/>
           <p:nvPr/>
         </p:nvSpPr>
@@ -16764,7 +16764,7 @@
       </p:sp>
       <p:sp>
         <p:nvSpPr>
-          <p:cNvPr id="21" name="Text 17"/>
+          <p:cNvPr id="20" name="Text 17"/>
           <p:cNvSpPr/>
           <p:nvPr/>
         </p:nvSpPr>
@@ -16803,7 +16803,7 @@
       </p:sp>
       <p:sp>
         <p:nvSpPr>
-          <p:cNvPr id="22" name="Text 18"/>
+          <p:cNvPr id="21" name="Text 18"/>
           <p:cNvSpPr/>
           <p:nvPr/>
         </p:nvSpPr>
@@ -16845,7 +16845,7 @@
       </p:sp>
       <p:sp>
         <p:nvSpPr>
-          <p:cNvPr id="23" name="Shape 19"/>
+          <p:cNvPr id="22" name="Shape 19"/>
           <p:cNvSpPr/>
           <p:nvPr/>
         </p:nvSpPr>
@@ -16872,7 +16872,7 @@
       </p:sp>
       <p:sp>
         <p:nvSpPr>
-          <p:cNvPr id="24" name="Text 20"/>
+          <p:cNvPr id="23" name="Text 20"/>
           <p:cNvSpPr/>
           <p:nvPr/>
         </p:nvSpPr>
@@ -16911,7 +16911,7 @@
       </p:sp>
       <p:sp>
         <p:nvSpPr>
-          <p:cNvPr id="25" name="Text 21"/>
+          <p:cNvPr id="24" name="Text 21"/>
           <p:cNvSpPr/>
           <p:nvPr/>
         </p:nvSpPr>
@@ -16953,7 +16953,7 @@
       </p:sp>
       <p:sp>
         <p:nvSpPr>
-          <p:cNvPr id="26" name="Shape 22"/>
+          <p:cNvPr id="25" name="Shape 22"/>
           <p:cNvSpPr/>
           <p:nvPr/>
         </p:nvSpPr>
@@ -16980,7 +16980,7 @@
       </p:sp>
       <p:sp>
         <p:nvSpPr>
-          <p:cNvPr id="27" name="Text 23"/>
+          <p:cNvPr id="26" name="Text 23"/>
           <p:cNvSpPr/>
           <p:nvPr/>
         </p:nvSpPr>
@@ -17265,7 +17265,7 @@
       </p:pic>
       <p:sp>
         <p:nvSpPr>
-          <p:cNvPr id="8" name="Shape 4"/>
+          <p:cNvPr id="7" name="Shape 4"/>
           <p:cNvSpPr/>
           <p:nvPr/>
         </p:nvSpPr>
@@ -17287,7 +17287,7 @@
       </p:sp>
       <p:sp>
         <p:nvSpPr>
-          <p:cNvPr id="9" name="Text 5"/>
+          <p:cNvPr id="8" name="Text 5"/>
           <p:cNvSpPr/>
           <p:nvPr/>
         </p:nvSpPr>
@@ -17326,7 +17326,7 @@
       </p:sp>
       <p:sp>
         <p:nvSpPr>
-          <p:cNvPr id="10" name="Text 6"/>
+          <p:cNvPr id="9" name="Text 6"/>
           <p:cNvSpPr/>
           <p:nvPr/>
         </p:nvSpPr>
@@ -17368,7 +17368,7 @@
       </p:sp>
       <p:sp>
         <p:nvSpPr>
-          <p:cNvPr id="11" name="Shape 7"/>
+          <p:cNvPr id="10" name="Shape 7"/>
           <p:cNvSpPr/>
           <p:nvPr/>
         </p:nvSpPr>
@@ -17390,7 +17390,7 @@
       </p:sp>
       <p:sp>
         <p:nvSpPr>
-          <p:cNvPr id="12" name="Text 8"/>
+          <p:cNvPr id="11" name="Text 8"/>
           <p:cNvSpPr/>
           <p:nvPr/>
         </p:nvSpPr>
@@ -17429,7 +17429,7 @@
       </p:sp>
       <p:sp>
         <p:nvSpPr>
-          <p:cNvPr id="13" name="Text 9"/>
+          <p:cNvPr id="12" name="Text 9"/>
           <p:cNvSpPr/>
           <p:nvPr/>
         </p:nvSpPr>
@@ -17471,7 +17471,7 @@
       </p:sp>
       <p:sp>
         <p:nvSpPr>
-          <p:cNvPr id="14" name="Shape 10"/>
+          <p:cNvPr id="13" name="Shape 10"/>
           <p:cNvSpPr/>
           <p:nvPr/>
         </p:nvSpPr>
@@ -17493,7 +17493,7 @@
       </p:sp>
       <p:sp>
         <p:nvSpPr>
-          <p:cNvPr id="15" name="Shape 11"/>
+          <p:cNvPr id="14" name="Shape 11"/>
           <p:cNvSpPr/>
           <p:nvPr/>
         </p:nvSpPr>
@@ -17513,7 +17513,7 @@
       </p:sp>
       <p:sp>
         <p:nvSpPr>
-          <p:cNvPr id="16" name="Text 12"/>
+          <p:cNvPr id="15" name="Text 12"/>
           <p:cNvSpPr/>
           <p:nvPr/>
         </p:nvSpPr>
@@ -17552,7 +17552,7 @@
       </p:sp>
       <p:sp>
         <p:nvSpPr>
-          <p:cNvPr id="17" name="Text 13"/>
+          <p:cNvPr id="16" name="Text 13"/>
           <p:cNvSpPr/>
           <p:nvPr/>
         </p:nvSpPr>
@@ -17591,7 +17591,7 @@
       </p:sp>
       <p:sp>
         <p:nvSpPr>
-          <p:cNvPr id="18" name="Text 14"/>
+          <p:cNvPr id="17" name="Text 14"/>
           <p:cNvSpPr/>
           <p:nvPr/>
         </p:nvSpPr>
@@ -17633,7 +17633,7 @@
       </p:sp>
       <p:sp>
         <p:nvSpPr>
-          <p:cNvPr id="19" name="Shape 15"/>
+          <p:cNvPr id="18" name="Shape 15"/>
           <p:cNvSpPr/>
           <p:nvPr/>
         </p:nvSpPr>
@@ -17655,7 +17655,7 @@
       </p:sp>
       <p:sp>
         <p:nvSpPr>
-          <p:cNvPr id="20" name="Shape 16"/>
+          <p:cNvPr id="19" name="Shape 16"/>
           <p:cNvSpPr/>
           <p:nvPr/>
         </p:nvSpPr>
@@ -17675,7 +17675,7 @@
       </p:sp>
       <p:sp>
         <p:nvSpPr>
-          <p:cNvPr id="21" name="Text 17"/>
+          <p:cNvPr id="20" name="Text 17"/>
           <p:cNvSpPr/>
           <p:nvPr/>
         </p:nvSpPr>
@@ -17714,7 +17714,7 @@
       </p:sp>
       <p:sp>
         <p:nvSpPr>
-          <p:cNvPr id="22" name="Text 18"/>
+          <p:cNvPr id="21" name="Text 18"/>
           <p:cNvSpPr/>
           <p:nvPr/>
         </p:nvSpPr>
@@ -17753,7 +17753,7 @@
       </p:sp>
       <p:sp>
         <p:nvSpPr>
-          <p:cNvPr id="23" name="Text 19"/>
+          <p:cNvPr id="22" name="Text 19"/>
           <p:cNvSpPr/>
           <p:nvPr/>
         </p:nvSpPr>
@@ -17795,7 +17795,7 @@
       </p:sp>
       <p:sp>
         <p:nvSpPr>
-          <p:cNvPr id="24" name="Shape 20"/>
+          <p:cNvPr id="23" name="Shape 20"/>
           <p:cNvSpPr/>
           <p:nvPr/>
         </p:nvSpPr>
@@ -17817,7 +17817,7 @@
       </p:sp>
       <p:sp>
         <p:nvSpPr>
-          <p:cNvPr id="25" name="Shape 21"/>
+          <p:cNvPr id="24" name="Shape 21"/>
           <p:cNvSpPr/>
           <p:nvPr/>
         </p:nvSpPr>
@@ -17837,7 +17837,7 @@
       </p:sp>
       <p:sp>
         <p:nvSpPr>
-          <p:cNvPr id="26" name="Text 22"/>
+          <p:cNvPr id="25" name="Text 22"/>
           <p:cNvSpPr/>
           <p:nvPr/>
         </p:nvSpPr>
@@ -17876,7 +17876,7 @@
       </p:sp>
       <p:sp>
         <p:nvSpPr>
-          <p:cNvPr id="27" name="Text 23"/>
+          <p:cNvPr id="26" name="Text 23"/>
           <p:cNvSpPr/>
           <p:nvPr/>
         </p:nvSpPr>
@@ -17915,7 +17915,7 @@
       </p:sp>
       <p:sp>
         <p:nvSpPr>
-          <p:cNvPr id="28" name="Text 24"/>
+          <p:cNvPr id="27" name="Text 24"/>
           <p:cNvSpPr/>
           <p:nvPr/>
         </p:nvSpPr>
@@ -17957,7 +17957,7 @@
       </p:sp>
       <p:sp>
         <p:nvSpPr>
-          <p:cNvPr id="29" name="Shape 25"/>
+          <p:cNvPr id="28" name="Shape 25"/>
           <p:cNvSpPr/>
           <p:nvPr/>
         </p:nvSpPr>
@@ -17984,7 +17984,7 @@
       </p:sp>
       <p:sp>
         <p:nvSpPr>
-          <p:cNvPr id="30" name="Text 26"/>
+          <p:cNvPr id="29" name="Text 26"/>
           <p:cNvSpPr/>
           <p:nvPr/>
         </p:nvSpPr>
@@ -18269,7 +18269,7 @@
       </p:pic>
       <p:sp>
         <p:nvSpPr>
-          <p:cNvPr id="8" name="Shape 4"/>
+          <p:cNvPr id="7" name="Shape 4"/>
           <p:cNvSpPr/>
           <p:nvPr/>
         </p:nvSpPr>
@@ -18296,7 +18296,7 @@
       </p:sp>
       <p:sp>
         <p:nvSpPr>
-          <p:cNvPr id="9" name="Text 5"/>
+          <p:cNvPr id="8" name="Text 5"/>
           <p:cNvSpPr/>
           <p:nvPr/>
         </p:nvSpPr>
@@ -18335,7 +18335,7 @@
       </p:sp>
       <p:sp>
         <p:nvSpPr>
-          <p:cNvPr id="10" name="Shape 6"/>
+          <p:cNvPr id="9" name="Shape 6"/>
           <p:cNvSpPr/>
           <p:nvPr/>
         </p:nvSpPr>
@@ -18358,7 +18358,7 @@
       </p:sp>
       <p:sp>
         <p:nvSpPr>
-          <p:cNvPr id="11" name="Shape 7"/>
+          <p:cNvPr id="10" name="Shape 7"/>
           <p:cNvSpPr/>
           <p:nvPr/>
         </p:nvSpPr>
@@ -18378,7 +18378,7 @@
       </p:sp>
       <p:sp>
         <p:nvSpPr>
-          <p:cNvPr id="12" name="Shape 8"/>
+          <p:cNvPr id="11" name="Shape 8"/>
           <p:cNvSpPr/>
           <p:nvPr/>
         </p:nvSpPr>
@@ -18400,7 +18400,7 @@
       </p:sp>
       <p:sp>
         <p:nvSpPr>
-          <p:cNvPr id="13" name="Text 9"/>
+          <p:cNvPr id="12" name="Text 9"/>
           <p:cNvSpPr/>
           <p:nvPr/>
         </p:nvSpPr>
@@ -18439,7 +18439,7 @@
       </p:sp>
       <p:sp>
         <p:nvSpPr>
-          <p:cNvPr id="14" name="Shape 10"/>
+          <p:cNvPr id="13" name="Shape 10"/>
           <p:cNvSpPr/>
           <p:nvPr/>
         </p:nvSpPr>
@@ -18462,7 +18462,7 @@
       </p:sp>
       <p:sp>
         <p:nvSpPr>
-          <p:cNvPr id="15" name="Shape 11"/>
+          <p:cNvPr id="14" name="Shape 11"/>
           <p:cNvSpPr/>
           <p:nvPr/>
         </p:nvSpPr>
@@ -18482,7 +18482,7 @@
       </p:sp>
       <p:sp>
         <p:nvSpPr>
-          <p:cNvPr id="16" name="Shape 12"/>
+          <p:cNvPr id="15" name="Shape 12"/>
           <p:cNvSpPr/>
           <p:nvPr/>
         </p:nvSpPr>
@@ -18509,7 +18509,7 @@
       </p:sp>
       <p:sp>
         <p:nvSpPr>
-          <p:cNvPr id="17" name="Text 13"/>
+          <p:cNvPr id="16" name="Text 13"/>
           <p:cNvSpPr/>
           <p:nvPr/>
         </p:nvSpPr>
@@ -18548,7 +18548,7 @@
       </p:sp>
       <p:sp>
         <p:nvSpPr>
-          <p:cNvPr id="18" name="Shape 14"/>
+          <p:cNvPr id="17" name="Shape 14"/>
           <p:cNvSpPr/>
           <p:nvPr/>
         </p:nvSpPr>
@@ -18571,7 +18571,7 @@
       </p:sp>
       <p:sp>
         <p:nvSpPr>
-          <p:cNvPr id="19" name="Shape 15"/>
+          <p:cNvPr id="18" name="Shape 15"/>
           <p:cNvSpPr/>
           <p:nvPr/>
         </p:nvSpPr>
@@ -18591,7 +18591,7 @@
       </p:sp>
       <p:sp>
         <p:nvSpPr>
-          <p:cNvPr id="20" name="Shape 16"/>
+          <p:cNvPr id="19" name="Shape 16"/>
           <p:cNvSpPr/>
           <p:nvPr/>
         </p:nvSpPr>
@@ -18618,7 +18618,7 @@
       </p:sp>
       <p:sp>
         <p:nvSpPr>
-          <p:cNvPr id="21" name="Text 17"/>
+          <p:cNvPr id="20" name="Text 17"/>
           <p:cNvSpPr/>
           <p:nvPr/>
         </p:nvSpPr>
@@ -18657,7 +18657,7 @@
       </p:sp>
       <p:sp>
         <p:nvSpPr>
-          <p:cNvPr id="22" name="Shape 18"/>
+          <p:cNvPr id="21" name="Shape 18"/>
           <p:cNvSpPr/>
           <p:nvPr/>
         </p:nvSpPr>
@@ -18680,7 +18680,7 @@
       </p:sp>
       <p:sp>
         <p:nvSpPr>
-          <p:cNvPr id="23" name="Shape 19"/>
+          <p:cNvPr id="22" name="Shape 19"/>
           <p:cNvSpPr/>
           <p:nvPr/>
         </p:nvSpPr>
@@ -18700,7 +18700,7 @@
       </p:sp>
       <p:sp>
         <p:nvSpPr>
-          <p:cNvPr id="24" name="Shape 20"/>
+          <p:cNvPr id="23" name="Shape 20"/>
           <p:cNvSpPr/>
           <p:nvPr/>
         </p:nvSpPr>
@@ -18727,7 +18727,7 @@
       </p:sp>
       <p:sp>
         <p:nvSpPr>
-          <p:cNvPr id="25" name="Text 21"/>
+          <p:cNvPr id="24" name="Text 21"/>
           <p:cNvSpPr/>
           <p:nvPr/>
         </p:nvSpPr>
@@ -18766,7 +18766,7 @@
       </p:sp>
       <p:sp>
         <p:nvSpPr>
-          <p:cNvPr id="26" name="Shape 22"/>
+          <p:cNvPr id="25" name="Shape 22"/>
           <p:cNvSpPr/>
           <p:nvPr/>
         </p:nvSpPr>
@@ -18789,7 +18789,7 @@
       </p:sp>
       <p:sp>
         <p:nvSpPr>
-          <p:cNvPr id="27" name="Shape 23"/>
+          <p:cNvPr id="26" name="Shape 23"/>
           <p:cNvSpPr/>
           <p:nvPr/>
         </p:nvSpPr>
@@ -18809,7 +18809,7 @@
       </p:sp>
       <p:sp>
         <p:nvSpPr>
-          <p:cNvPr id="28" name="Shape 24"/>
+          <p:cNvPr id="27" name="Shape 24"/>
           <p:cNvSpPr/>
           <p:nvPr/>
         </p:nvSpPr>
@@ -18831,7 +18831,7 @@
       </p:sp>
       <p:sp>
         <p:nvSpPr>
-          <p:cNvPr id="29" name="Text 25"/>
+          <p:cNvPr id="28" name="Text 25"/>
           <p:cNvSpPr/>
           <p:nvPr/>
         </p:nvSpPr>
@@ -18870,7 +18870,7 @@
       </p:sp>
       <p:sp>
         <p:nvSpPr>
-          <p:cNvPr id="30" name="Shape 26"/>
+          <p:cNvPr id="29" name="Shape 26"/>
           <p:cNvSpPr/>
           <p:nvPr/>
         </p:nvSpPr>
@@ -18897,7 +18897,7 @@
       </p:sp>
       <p:sp>
         <p:nvSpPr>
-          <p:cNvPr id="31" name="Text 27"/>
+          <p:cNvPr id="30" name="Text 27"/>
           <p:cNvSpPr/>
           <p:nvPr/>
         </p:nvSpPr>
@@ -18936,7 +18936,7 @@
       </p:sp>
       <p:sp>
         <p:nvSpPr>
-          <p:cNvPr id="32" name="Shape 28"/>
+          <p:cNvPr id="31" name="Shape 28"/>
           <p:cNvSpPr/>
           <p:nvPr/>
         </p:nvSpPr>
@@ -18959,7 +18959,7 @@
       </p:sp>
       <p:sp>
         <p:nvSpPr>
-          <p:cNvPr id="33" name="Shape 29"/>
+          <p:cNvPr id="32" name="Shape 29"/>
           <p:cNvSpPr/>
           <p:nvPr/>
         </p:nvSpPr>
@@ -18979,7 +18979,7 @@
       </p:sp>
       <p:sp>
         <p:nvSpPr>
-          <p:cNvPr id="34" name="Shape 30"/>
+          <p:cNvPr id="33" name="Shape 30"/>
           <p:cNvSpPr/>
           <p:nvPr/>
         </p:nvSpPr>
@@ -19001,7 +19001,7 @@
       </p:sp>
       <p:sp>
         <p:nvSpPr>
-          <p:cNvPr id="35" name="Text 31"/>
+          <p:cNvPr id="34" name="Text 31"/>
           <p:cNvSpPr/>
           <p:nvPr/>
         </p:nvSpPr>
@@ -19040,7 +19040,7 @@
       </p:sp>
       <p:sp>
         <p:nvSpPr>
-          <p:cNvPr id="36" name="Shape 32"/>
+          <p:cNvPr id="35" name="Shape 32"/>
           <p:cNvSpPr/>
           <p:nvPr/>
         </p:nvSpPr>
@@ -19063,7 +19063,7 @@
       </p:sp>
       <p:sp>
         <p:nvSpPr>
-          <p:cNvPr id="37" name="Shape 33"/>
+          <p:cNvPr id="36" name="Shape 33"/>
           <p:cNvSpPr/>
           <p:nvPr/>
         </p:nvSpPr>
@@ -19083,7 +19083,7 @@
       </p:sp>
       <p:sp>
         <p:nvSpPr>
-          <p:cNvPr id="38" name="Shape 34"/>
+          <p:cNvPr id="37" name="Shape 34"/>
           <p:cNvSpPr/>
           <p:nvPr/>
         </p:nvSpPr>
@@ -19105,7 +19105,7 @@
       </p:sp>
       <p:sp>
         <p:nvSpPr>
-          <p:cNvPr id="39" name="Text 35"/>
+          <p:cNvPr id="38" name="Text 35"/>
           <p:cNvSpPr/>
           <p:nvPr/>
         </p:nvSpPr>
@@ -19144,7 +19144,7 @@
       </p:sp>
       <p:sp>
         <p:nvSpPr>
-          <p:cNvPr id="40" name="Shape 36"/>
+          <p:cNvPr id="39" name="Shape 36"/>
           <p:cNvSpPr/>
           <p:nvPr/>
         </p:nvSpPr>
@@ -19166,7 +19166,7 @@
       </p:sp>
       <p:sp>
         <p:nvSpPr>
-          <p:cNvPr id="41" name="Text 37"/>
+          <p:cNvPr id="40" name="Text 37"/>
           <p:cNvSpPr/>
           <p:nvPr/>
         </p:nvSpPr>
@@ -19205,7 +19205,7 @@
       </p:sp>
       <p:sp>
         <p:nvSpPr>
-          <p:cNvPr id="42" name="Shape 38"/>
+          <p:cNvPr id="41" name="Shape 38"/>
           <p:cNvSpPr/>
           <p:nvPr/>
         </p:nvSpPr>
@@ -19228,7 +19228,7 @@
       </p:sp>
       <p:sp>
         <p:nvSpPr>
-          <p:cNvPr id="43" name="Shape 39"/>
+          <p:cNvPr id="42" name="Shape 39"/>
           <p:cNvSpPr/>
           <p:nvPr/>
         </p:nvSpPr>
@@ -19248,7 +19248,7 @@
       </p:sp>
       <p:sp>
         <p:nvSpPr>
-          <p:cNvPr id="44" name="Shape 40"/>
+          <p:cNvPr id="43" name="Shape 40"/>
           <p:cNvSpPr/>
           <p:nvPr/>
         </p:nvSpPr>
@@ -19270,7 +19270,7 @@
       </p:sp>
       <p:sp>
         <p:nvSpPr>
-          <p:cNvPr id="45" name="Text 41"/>
+          <p:cNvPr id="44" name="Text 41"/>
           <p:cNvSpPr/>
           <p:nvPr/>
         </p:nvSpPr>
@@ -19309,7 +19309,7 @@
       </p:sp>
       <p:sp>
         <p:nvSpPr>
-          <p:cNvPr id="46" name="Shape 42"/>
+          <p:cNvPr id="45" name="Shape 42"/>
           <p:cNvSpPr/>
           <p:nvPr/>
         </p:nvSpPr>
@@ -19332,7 +19332,7 @@
       </p:sp>
       <p:sp>
         <p:nvSpPr>
-          <p:cNvPr id="47" name="Shape 43"/>
+          <p:cNvPr id="46" name="Shape 43"/>
           <p:cNvSpPr/>
           <p:nvPr/>
         </p:nvSpPr>
@@ -19352,7 +19352,7 @@
       </p:sp>
       <p:sp>
         <p:nvSpPr>
-          <p:cNvPr id="48" name="Shape 44"/>
+          <p:cNvPr id="47" name="Shape 44"/>
           <p:cNvSpPr/>
           <p:nvPr/>
         </p:nvSpPr>
@@ -19374,7 +19374,7 @@
       </p:sp>
       <p:sp>
         <p:nvSpPr>
-          <p:cNvPr id="49" name="Text 45"/>
+          <p:cNvPr id="48" name="Text 45"/>
           <p:cNvSpPr/>
           <p:nvPr/>
         </p:nvSpPr>
@@ -19413,7 +19413,7 @@
       </p:sp>
       <p:sp>
         <p:nvSpPr>
-          <p:cNvPr id="50" name="Shape 46"/>
+          <p:cNvPr id="49" name="Shape 46"/>
           <p:cNvSpPr/>
           <p:nvPr/>
         </p:nvSpPr>
@@ -19435,7 +19435,7 @@
       </p:sp>
       <p:sp>
         <p:nvSpPr>
-          <p:cNvPr id="51" name="Text 47"/>
+          <p:cNvPr id="50" name="Text 47"/>
           <p:cNvSpPr/>
           <p:nvPr/>
         </p:nvSpPr>
@@ -19491,7 +19491,7 @@
       </p:sp>
       <p:sp>
         <p:nvSpPr>
-          <p:cNvPr id="52" name="Shape 48"/>
+          <p:cNvPr id="51" name="Shape 48"/>
           <p:cNvSpPr/>
           <p:nvPr/>
         </p:nvSpPr>
@@ -19513,7 +19513,7 @@
       </p:sp>
       <p:sp>
         <p:nvSpPr>
-          <p:cNvPr id="53" name="Text 49"/>
+          <p:cNvPr id="52" name="Text 49"/>
           <p:cNvSpPr/>
           <p:nvPr/>
         </p:nvSpPr>
@@ -19569,7 +19569,7 @@
       </p:sp>
       <p:sp>
         <p:nvSpPr>
-          <p:cNvPr id="54" name="Shape 50"/>
+          <p:cNvPr id="53" name="Shape 50"/>
           <p:cNvSpPr/>
           <p:nvPr/>
         </p:nvSpPr>
@@ -19591,7 +19591,7 @@
       </p:sp>
       <p:sp>
         <p:nvSpPr>
-          <p:cNvPr id="55" name="Text 51"/>
+          <p:cNvPr id="54" name="Text 51"/>
           <p:cNvSpPr/>
           <p:nvPr/>
         </p:nvSpPr>
@@ -19647,7 +19647,7 @@
       </p:sp>
       <p:sp>
         <p:nvSpPr>
-          <p:cNvPr id="56" name="Shape 52"/>
+          <p:cNvPr id="55" name="Shape 52"/>
           <p:cNvSpPr/>
           <p:nvPr/>
         </p:nvSpPr>
@@ -19669,7 +19669,7 @@
       </p:sp>
       <p:sp>
         <p:nvSpPr>
-          <p:cNvPr id="57" name="Text 53"/>
+          <p:cNvPr id="56" name="Text 53"/>
           <p:cNvSpPr/>
           <p:nvPr/>
         </p:nvSpPr>
@@ -19725,7 +19725,7 @@
       </p:sp>
       <p:sp>
         <p:nvSpPr>
-          <p:cNvPr id="58" name="Shape 54"/>
+          <p:cNvPr id="57" name="Shape 54"/>
           <p:cNvSpPr/>
           <p:nvPr/>
         </p:nvSpPr>
@@ -19747,7 +19747,7 @@
       </p:sp>
       <p:sp>
         <p:nvSpPr>
-          <p:cNvPr id="59" name="Text 55"/>
+          <p:cNvPr id="58" name="Text 55"/>
           <p:cNvSpPr/>
           <p:nvPr/>
         </p:nvSpPr>
@@ -19803,7 +19803,7 @@
       </p:sp>
       <p:sp>
         <p:nvSpPr>
-          <p:cNvPr id="60" name="Shape 56"/>
+          <p:cNvPr id="59" name="Shape 56"/>
           <p:cNvSpPr/>
           <p:nvPr/>
         </p:nvSpPr>
@@ -19825,7 +19825,7 @@
       </p:sp>
       <p:sp>
         <p:nvSpPr>
-          <p:cNvPr id="61" name="Text 57"/>
+          <p:cNvPr id="60" name="Text 57"/>
           <p:cNvSpPr/>
           <p:nvPr/>
         </p:nvSpPr>
@@ -19881,7 +19881,7 @@
       </p:sp>
       <p:sp>
         <p:nvSpPr>
-          <p:cNvPr id="62" name="Shape 58"/>
+          <p:cNvPr id="61" name="Shape 58"/>
           <p:cNvSpPr/>
           <p:nvPr/>
         </p:nvSpPr>
@@ -19903,7 +19903,7 @@
       </p:sp>
       <p:sp>
         <p:nvSpPr>
-          <p:cNvPr id="63" name="Text 59"/>
+          <p:cNvPr id="62" name="Text 59"/>
           <p:cNvSpPr/>
           <p:nvPr/>
         </p:nvSpPr>
@@ -19959,7 +19959,7 @@
       </p:sp>
       <p:sp>
         <p:nvSpPr>
-          <p:cNvPr id="64" name="Shape 60"/>
+          <p:cNvPr id="63" name="Shape 60"/>
           <p:cNvSpPr/>
           <p:nvPr/>
         </p:nvSpPr>
@@ -19981,7 +19981,7 @@
       </p:sp>
       <p:sp>
         <p:nvSpPr>
-          <p:cNvPr id="65" name="Text 61"/>
+          <p:cNvPr id="64" name="Text 61"/>
           <p:cNvSpPr/>
           <p:nvPr/>
         </p:nvSpPr>
@@ -20037,7 +20037,7 @@
       </p:sp>
       <p:sp>
         <p:nvSpPr>
-          <p:cNvPr id="66" name="Shape 62"/>
+          <p:cNvPr id="65" name="Shape 62"/>
           <p:cNvSpPr/>
           <p:nvPr/>
         </p:nvSpPr>
@@ -20059,7 +20059,7 @@
       </p:sp>
       <p:sp>
         <p:nvSpPr>
-          <p:cNvPr id="67" name="Text 63"/>
+          <p:cNvPr id="66" name="Text 63"/>
           <p:cNvSpPr/>
           <p:nvPr/>
         </p:nvSpPr>
@@ -20115,7 +20115,7 @@
       </p:sp>
       <p:sp>
         <p:nvSpPr>
-          <p:cNvPr id="68" name="Shape 64"/>
+          <p:cNvPr id="67" name="Shape 64"/>
           <p:cNvSpPr/>
           <p:nvPr/>
         </p:nvSpPr>
@@ -20142,7 +20142,7 @@
       </p:sp>
       <p:sp>
         <p:nvSpPr>
-          <p:cNvPr id="69" name="Text 65"/>
+          <p:cNvPr id="68" name="Text 65"/>
           <p:cNvSpPr/>
           <p:nvPr/>
         </p:nvSpPr>
@@ -21488,7 +21488,7 @@
       </p:graphicFrame>
       <p:sp>
         <p:nvSpPr>
-          <p:cNvPr id="9" name="Shape 4"/>
+          <p:cNvPr id="8" name="Shape 4"/>
           <p:cNvSpPr/>
           <p:nvPr/>
         </p:nvSpPr>
@@ -21510,7 +21510,7 @@
       </p:sp>
       <p:sp>
         <p:nvSpPr>
-          <p:cNvPr id="10" name="Text 5"/>
+          <p:cNvPr id="9" name="Text 5"/>
           <p:cNvSpPr/>
           <p:nvPr/>
         </p:nvSpPr>
@@ -21552,7 +21552,7 @@
       </p:sp>
       <p:sp>
         <p:nvSpPr>
-          <p:cNvPr id="11" name="Shape 6"/>
+          <p:cNvPr id="10" name="Shape 6"/>
           <p:cNvSpPr/>
           <p:nvPr/>
         </p:nvSpPr>
@@ -21574,7 +21574,7 @@
       </p:sp>
       <p:sp>
         <p:nvSpPr>
-          <p:cNvPr id="12" name="Text 7"/>
+          <p:cNvPr id="11" name="Text 7"/>
           <p:cNvSpPr/>
           <p:nvPr/>
         </p:nvSpPr>
@@ -21859,7 +21859,7 @@
       </p:pic>
       <p:sp>
         <p:nvSpPr>
-          <p:cNvPr id="8" name="Shape 4"/>
+          <p:cNvPr id="7" name="Shape 4"/>
           <p:cNvSpPr/>
           <p:nvPr/>
         </p:nvSpPr>
@@ -21882,7 +21882,7 @@
       </p:sp>
       <p:sp>
         <p:nvSpPr>
-          <p:cNvPr id="9" name="Shape 5"/>
+          <p:cNvPr id="8" name="Shape 5"/>
           <p:cNvSpPr/>
           <p:nvPr/>
         </p:nvSpPr>
@@ -21902,7 +21902,7 @@
       </p:sp>
       <p:sp>
         <p:nvSpPr>
-          <p:cNvPr id="10" name="Text 6"/>
+          <p:cNvPr id="9" name="Text 6"/>
           <p:cNvSpPr/>
           <p:nvPr/>
         </p:nvSpPr>
@@ -21941,7 +21941,7 @@
       </p:sp>
       <p:sp>
         <p:nvSpPr>
-          <p:cNvPr id="11" name="Text 7"/>
+          <p:cNvPr id="10" name="Text 7"/>
           <p:cNvSpPr/>
           <p:nvPr/>
         </p:nvSpPr>
@@ -21980,7 +21980,7 @@
       </p:sp>
       <p:sp>
         <p:nvSpPr>
-          <p:cNvPr id="12" name="Shape 8"/>
+          <p:cNvPr id="11" name="Shape 8"/>
           <p:cNvSpPr/>
           <p:nvPr/>
         </p:nvSpPr>
@@ -22000,7 +22000,7 @@
       </p:sp>
       <p:sp>
         <p:nvSpPr>
-          <p:cNvPr id="13" name="Text 9"/>
+          <p:cNvPr id="12" name="Text 9"/>
           <p:cNvSpPr/>
           <p:nvPr/>
         </p:nvSpPr>
@@ -22039,7 +22039,7 @@
       </p:sp>
       <p:sp>
         <p:nvSpPr>
-          <p:cNvPr id="14" name="Text 10"/>
+          <p:cNvPr id="13" name="Text 10"/>
           <p:cNvSpPr/>
           <p:nvPr/>
         </p:nvSpPr>
@@ -22078,7 +22078,7 @@
       </p:sp>
       <p:sp>
         <p:nvSpPr>
-          <p:cNvPr id="15" name="Shape 11"/>
+          <p:cNvPr id="14" name="Shape 11"/>
           <p:cNvSpPr/>
           <p:nvPr/>
         </p:nvSpPr>
@@ -22098,7 +22098,7 @@
       </p:sp>
       <p:sp>
         <p:nvSpPr>
-          <p:cNvPr id="16" name="Text 12"/>
+          <p:cNvPr id="15" name="Text 12"/>
           <p:cNvSpPr/>
           <p:nvPr/>
         </p:nvSpPr>
@@ -22137,7 +22137,7 @@
       </p:sp>
       <p:sp>
         <p:nvSpPr>
-          <p:cNvPr id="17" name="Text 13"/>
+          <p:cNvPr id="16" name="Text 13"/>
           <p:cNvSpPr/>
           <p:nvPr/>
         </p:nvSpPr>
@@ -22176,7 +22176,7 @@
       </p:sp>
       <p:sp>
         <p:nvSpPr>
-          <p:cNvPr id="18" name="Shape 14"/>
+          <p:cNvPr id="17" name="Shape 14"/>
           <p:cNvSpPr/>
           <p:nvPr/>
         </p:nvSpPr>
@@ -22196,7 +22196,7 @@
       </p:sp>
       <p:sp>
         <p:nvSpPr>
-          <p:cNvPr id="19" name="Text 15"/>
+          <p:cNvPr id="18" name="Text 15"/>
           <p:cNvSpPr/>
           <p:nvPr/>
         </p:nvSpPr>
@@ -22235,7 +22235,7 @@
       </p:sp>
       <p:sp>
         <p:nvSpPr>
-          <p:cNvPr id="20" name="Text 16"/>
+          <p:cNvPr id="19" name="Text 16"/>
           <p:cNvSpPr/>
           <p:nvPr/>
         </p:nvSpPr>
@@ -22274,7 +22274,7 @@
       </p:sp>
       <p:sp>
         <p:nvSpPr>
-          <p:cNvPr id="21" name="Shape 17"/>
+          <p:cNvPr id="20" name="Shape 17"/>
           <p:cNvSpPr/>
           <p:nvPr/>
         </p:nvSpPr>
@@ -22296,7 +22296,7 @@
       </p:sp>
       <p:sp>
         <p:nvSpPr>
-          <p:cNvPr id="22" name="Text 18"/>
+          <p:cNvPr id="21" name="Text 18"/>
           <p:cNvSpPr/>
           <p:nvPr/>
         </p:nvSpPr>
@@ -22335,7 +22335,7 @@
       </p:sp>
       <p:sp>
         <p:nvSpPr>
-          <p:cNvPr id="23" name="Text 19"/>
+          <p:cNvPr id="22" name="Text 19"/>
           <p:cNvSpPr/>
           <p:nvPr/>
         </p:nvSpPr>
@@ -22377,7 +22377,7 @@
       </p:sp>
       <p:sp>
         <p:nvSpPr>
-          <p:cNvPr id="24" name="Shape 20"/>
+          <p:cNvPr id="23" name="Shape 20"/>
           <p:cNvSpPr/>
           <p:nvPr/>
         </p:nvSpPr>
@@ -22404,7 +22404,7 @@
       </p:sp>
       <p:sp>
         <p:nvSpPr>
-          <p:cNvPr id="25" name="Text 21"/>
+          <p:cNvPr id="24" name="Text 21"/>
           <p:cNvSpPr/>
           <p:nvPr/>
         </p:nvSpPr>
@@ -23685,7 +23685,7 @@
       </p:graphicFrame>
       <p:sp>
         <p:nvSpPr>
-          <p:cNvPr id="9" name="Shape 4"/>
+          <p:cNvPr id="8" name="Shape 4"/>
           <p:cNvSpPr/>
           <p:nvPr/>
         </p:nvSpPr>
@@ -23707,7 +23707,7 @@
       </p:sp>
       <p:sp>
         <p:nvSpPr>
-          <p:cNvPr id="10" name="Text 5"/>
+          <p:cNvPr id="9" name="Text 5"/>
           <p:cNvSpPr/>
           <p:nvPr/>
         </p:nvSpPr>
@@ -23746,7 +23746,7 @@
       </p:sp>
       <p:sp>
         <p:nvSpPr>
-          <p:cNvPr id="11" name="Text 6"/>
+          <p:cNvPr id="10" name="Text 6"/>
           <p:cNvSpPr/>
           <p:nvPr/>
         </p:nvSpPr>

--- a/docs/decks/L12.pptx
+++ b/docs/decks/L12.pptx
@@ -3601,11 +3601,11 @@
         <p:spPr>
           <a:xfrm>
             <a:off x="566928" y="1783080"/>
-            <a:ext cx="11064240" cy="749808"/>
+            <a:ext cx="11064240" cy="566928"/>
           </a:xfrm>
           <a:prstGeom prst="roundRect">
             <a:avLst>
-              <a:gd name="adj" fmla="val 12195"/>
+              <a:gd name="adj" fmla="val 16129"/>
             </a:avLst>
           </a:prstGeom>
           <a:solidFill>
@@ -3623,7 +3623,7 @@
         <p:spPr>
           <a:xfrm>
             <a:off x="786384" y="1783080"/>
-            <a:ext cx="3761842" cy="749808"/>
+            <a:ext cx="3761842" cy="566928"/>
           </a:xfrm>
           <a:prstGeom prst="rect">
             <a:avLst/>
@@ -3662,7 +3662,7 @@
         <p:spPr>
           <a:xfrm>
             <a:off x="4548226" y="1783080"/>
-            <a:ext cx="6640373" cy="749808"/>
+            <a:ext cx="6640373" cy="566928"/>
           </a:xfrm>
           <a:prstGeom prst="rect">
             <a:avLst/>
@@ -3700,12 +3700,12 @@
         </p:nvSpPr>
         <p:spPr>
           <a:xfrm>
-            <a:off x="566928" y="2660904"/>
-            <a:ext cx="11064240" cy="749808"/>
+            <a:off x="566928" y="2478024"/>
+            <a:ext cx="11064240" cy="566928"/>
           </a:xfrm>
           <a:prstGeom prst="roundRect">
             <a:avLst>
-              <a:gd name="adj" fmla="val 12195"/>
+              <a:gd name="adj" fmla="val 16129"/>
             </a:avLst>
           </a:prstGeom>
           <a:solidFill>
@@ -3727,8 +3727,8 @@
         </p:nvSpPr>
         <p:spPr>
           <a:xfrm>
-            <a:off x="786384" y="2660904"/>
-            <a:ext cx="3761842" cy="749808"/>
+            <a:off x="786384" y="2478024"/>
+            <a:ext cx="3761842" cy="566928"/>
           </a:xfrm>
           <a:prstGeom prst="rect">
             <a:avLst/>
@@ -3766,8 +3766,8 @@
         </p:nvSpPr>
         <p:spPr>
           <a:xfrm>
-            <a:off x="4548226" y="2660904"/>
-            <a:ext cx="6640373" cy="749808"/>
+            <a:off x="4548226" y="2478024"/>
+            <a:ext cx="6640373" cy="566928"/>
           </a:xfrm>
           <a:prstGeom prst="rect">
             <a:avLst/>
@@ -3805,12 +3805,12 @@
         </p:nvSpPr>
         <p:spPr>
           <a:xfrm>
-            <a:off x="566928" y="3538728"/>
-            <a:ext cx="11064240" cy="749808"/>
+            <a:off x="566928" y="3172968"/>
+            <a:ext cx="11064240" cy="566928"/>
           </a:xfrm>
           <a:prstGeom prst="roundRect">
             <a:avLst>
-              <a:gd name="adj" fmla="val 12195"/>
+              <a:gd name="adj" fmla="val 16129"/>
             </a:avLst>
           </a:prstGeom>
           <a:solidFill>
@@ -3827,8 +3827,8 @@
         </p:nvSpPr>
         <p:spPr>
           <a:xfrm>
-            <a:off x="786384" y="3538728"/>
-            <a:ext cx="3761842" cy="749808"/>
+            <a:off x="786384" y="3172968"/>
+            <a:ext cx="3761842" cy="566928"/>
           </a:xfrm>
           <a:prstGeom prst="rect">
             <a:avLst/>
@@ -3866,8 +3866,8 @@
         </p:nvSpPr>
         <p:spPr>
           <a:xfrm>
-            <a:off x="4548226" y="3538728"/>
-            <a:ext cx="6640373" cy="749808"/>
+            <a:off x="4548226" y="3172968"/>
+            <a:ext cx="6640373" cy="566928"/>
           </a:xfrm>
           <a:prstGeom prst="rect">
             <a:avLst/>
@@ -3905,12 +3905,12 @@
         </p:nvSpPr>
         <p:spPr>
           <a:xfrm>
-            <a:off x="566928" y="4416552"/>
-            <a:ext cx="11064240" cy="749808"/>
+            <a:off x="566928" y="3867912"/>
+            <a:ext cx="11064240" cy="566928"/>
           </a:xfrm>
           <a:prstGeom prst="roundRect">
             <a:avLst>
-              <a:gd name="adj" fmla="val 12195"/>
+              <a:gd name="adj" fmla="val 16129"/>
             </a:avLst>
           </a:prstGeom>
           <a:solidFill>
@@ -3927,8 +3927,8 @@
         </p:nvSpPr>
         <p:spPr>
           <a:xfrm>
-            <a:off x="786384" y="4416552"/>
-            <a:ext cx="3761842" cy="749808"/>
+            <a:off x="786384" y="3867912"/>
+            <a:ext cx="3761842" cy="566928"/>
           </a:xfrm>
           <a:prstGeom prst="rect">
             <a:avLst/>
@@ -3966,8 +3966,8 @@
         </p:nvSpPr>
         <p:spPr>
           <a:xfrm>
-            <a:off x="4548226" y="4416552"/>
-            <a:ext cx="6640373" cy="749808"/>
+            <a:off x="4548226" y="3867912"/>
+            <a:ext cx="6640373" cy="566928"/>
           </a:xfrm>
           <a:prstGeom prst="rect">
             <a:avLst/>
@@ -4005,12 +4005,329 @@
         </p:nvSpPr>
         <p:spPr>
           <a:xfrm>
-            <a:off x="566928" y="5413248"/>
-            <a:ext cx="11064240" cy="868680"/>
+            <a:off x="566928" y="4590288"/>
+            <a:ext cx="2423160" cy="457200"/>
           </a:xfrm>
           <a:prstGeom prst="roundRect">
             <a:avLst>
-              <a:gd name="adj" fmla="val 12632"/>
+              <a:gd name="adj" fmla="val 20000"/>
+            </a:avLst>
+          </a:prstGeom>
+          <a:solidFill>
+            <a:srgbClr val="EFEAFE"/>
+          </a:solidFill>
+          <a:ln/>
+        </p:spPr>
+      </p:sp>
+      <p:sp>
+        <p:nvSpPr>
+          <p:cNvPr id="20" name="Text 17"/>
+          <p:cNvSpPr/>
+          <p:nvPr/>
+        </p:nvSpPr>
+        <p:spPr>
+          <a:xfrm>
+            <a:off x="621792" y="4590288"/>
+            <a:ext cx="2313432" cy="457200"/>
+          </a:xfrm>
+          <a:prstGeom prst="rect">
+            <a:avLst/>
+          </a:prstGeom>
+          <a:noFill/>
+          <a:ln/>
+        </p:spPr>
+        <p:txBody>
+          <a:bodyPr wrap="square" lIns="0" tIns="0" rIns="0" bIns="0" rtlCol="0" anchor="ctr"/>
+          <a:lstStyle/>
+          <a:p>
+            <a:pPr algn="ctr" indent="0" marL="0">
+              <a:buNone/>
+            </a:pPr>
+            <a:r>
+              <a:rPr lang="en-US" sz="1050" b="1" dirty="0">
+                <a:solidFill>
+                  <a:srgbClr val="5A05F4"/>
+                </a:solidFill>
+                <a:latin typeface="Courier New" pitchFamily="34" charset="0"/>
+                <a:ea typeface="Courier New" pitchFamily="34" charset="-122"/>
+                <a:cs typeface="Courier New" pitchFamily="34" charset="-120"/>
+              </a:rPr>
+              <a:t>Т1 · лог</a:t>
+            </a:r>
+            <a:endParaRPr lang="en-US" sz="1050" dirty="0"/>
+          </a:p>
+        </p:txBody>
+      </p:sp>
+      <p:sp>
+        <p:nvSpPr>
+          <p:cNvPr id="21" name="Shape 18"/>
+          <p:cNvSpPr/>
+          <p:nvPr/>
+        </p:nvSpPr>
+        <p:spPr>
+          <a:xfrm>
+            <a:off x="3081528" y="4818888"/>
+            <a:ext cx="164592" cy="0"/>
+          </a:xfrm>
+          <a:prstGeom prst="line">
+            <a:avLst/>
+          </a:prstGeom>
+          <a:noFill/>
+          <a:ln w="15875">
+            <a:solidFill>
+              <a:srgbClr val="C9B8FB"/>
+            </a:solidFill>
+            <a:prstDash val="solid"/>
+          </a:ln>
+        </p:spPr>
+      </p:sp>
+      <p:sp>
+        <p:nvSpPr>
+          <p:cNvPr id="22" name="Shape 19"/>
+          <p:cNvSpPr/>
+          <p:nvPr/>
+        </p:nvSpPr>
+        <p:spPr>
+          <a:xfrm rot="5400000">
+            <a:off x="3209544" y="4750308"/>
+            <a:ext cx="146304" cy="137160"/>
+          </a:xfrm>
+          <a:prstGeom prst="triangle">
+            <a:avLst/>
+          </a:prstGeom>
+          <a:solidFill>
+            <a:srgbClr val="C9B8FB"/>
+          </a:solidFill>
+          <a:ln/>
+        </p:spPr>
+      </p:sp>
+      <p:sp>
+        <p:nvSpPr>
+          <p:cNvPr id="23" name="Shape 20"/>
+          <p:cNvSpPr/>
+          <p:nvPr/>
+        </p:nvSpPr>
+        <p:spPr>
+          <a:xfrm>
+            <a:off x="3447288" y="4590288"/>
+            <a:ext cx="2423160" cy="457200"/>
+          </a:xfrm>
+          <a:prstGeom prst="roundRect">
+            <a:avLst>
+              <a:gd name="adj" fmla="val 20000"/>
+            </a:avLst>
+          </a:prstGeom>
+          <a:solidFill>
+            <a:srgbClr val="FFFFFF"/>
+          </a:solidFill>
+          <a:ln w="12700">
+            <a:solidFill>
+              <a:srgbClr val="E6E7EC"/>
+            </a:solidFill>
+            <a:prstDash val="solid"/>
+          </a:ln>
+        </p:spPr>
+      </p:sp>
+      <p:sp>
+        <p:nvSpPr>
+          <p:cNvPr id="24" name="Text 21"/>
+          <p:cNvSpPr/>
+          <p:nvPr/>
+        </p:nvSpPr>
+        <p:spPr>
+          <a:xfrm>
+            <a:off x="3502152" y="4590288"/>
+            <a:ext cx="2313432" cy="457200"/>
+          </a:xfrm>
+          <a:prstGeom prst="rect">
+            <a:avLst/>
+          </a:prstGeom>
+          <a:noFill/>
+          <a:ln/>
+        </p:spPr>
+        <p:txBody>
+          <a:bodyPr wrap="square" lIns="0" tIns="0" rIns="0" bIns="0" rtlCol="0" anchor="ctr"/>
+          <a:lstStyle/>
+          <a:p>
+            <a:pPr algn="ctr" indent="0" marL="0">
+              <a:buNone/>
+            </a:pPr>
+            <a:r>
+              <a:rPr lang="en-US" sz="1050" dirty="0">
+                <a:solidFill>
+                  <a:srgbClr val="111318"/>
+                </a:solidFill>
+                <a:latin typeface="Courier New" pitchFamily="34" charset="0"/>
+                <a:ea typeface="Courier New" pitchFamily="34" charset="-122"/>
+                <a:cs typeface="Courier New" pitchFamily="34" charset="-120"/>
+              </a:rPr>
+              <a:t>Т2 · реєстр</a:t>
+            </a:r>
+            <a:endParaRPr lang="en-US" sz="1050" dirty="0"/>
+          </a:p>
+        </p:txBody>
+      </p:sp>
+      <p:sp>
+        <p:nvSpPr>
+          <p:cNvPr id="25" name="Shape 22"/>
+          <p:cNvSpPr/>
+          <p:nvPr/>
+        </p:nvSpPr>
+        <p:spPr>
+          <a:xfrm>
+            <a:off x="5961888" y="4818888"/>
+            <a:ext cx="164592" cy="0"/>
+          </a:xfrm>
+          <a:prstGeom prst="line">
+            <a:avLst/>
+          </a:prstGeom>
+          <a:noFill/>
+          <a:ln w="15875">
+            <a:solidFill>
+              <a:srgbClr val="C9B8FB"/>
+            </a:solidFill>
+            <a:prstDash val="solid"/>
+          </a:ln>
+        </p:spPr>
+      </p:sp>
+      <p:sp>
+        <p:nvSpPr>
+          <p:cNvPr id="26" name="Shape 23"/>
+          <p:cNvSpPr/>
+          <p:nvPr/>
+        </p:nvSpPr>
+        <p:spPr>
+          <a:xfrm rot="5400000">
+            <a:off x="6089904" y="4750308"/>
+            <a:ext cx="146304" cy="137160"/>
+          </a:xfrm>
+          <a:prstGeom prst="triangle">
+            <a:avLst/>
+          </a:prstGeom>
+          <a:solidFill>
+            <a:srgbClr val="C9B8FB"/>
+          </a:solidFill>
+          <a:ln/>
+        </p:spPr>
+      </p:sp>
+      <p:sp>
+        <p:nvSpPr>
+          <p:cNvPr id="27" name="Shape 24"/>
+          <p:cNvSpPr/>
+          <p:nvPr/>
+        </p:nvSpPr>
+        <p:spPr>
+          <a:xfrm>
+            <a:off x="6327648" y="4590288"/>
+            <a:ext cx="2423160" cy="457200"/>
+          </a:xfrm>
+          <a:prstGeom prst="roundRect">
+            <a:avLst>
+              <a:gd name="adj" fmla="val 20000"/>
+            </a:avLst>
+          </a:prstGeom>
+          <a:solidFill>
+            <a:srgbClr val="EFEAFE"/>
+          </a:solidFill>
+          <a:ln/>
+        </p:spPr>
+      </p:sp>
+      <p:sp>
+        <p:nvSpPr>
+          <p:cNvPr id="28" name="Text 25"/>
+          <p:cNvSpPr/>
+          <p:nvPr/>
+        </p:nvSpPr>
+        <p:spPr>
+          <a:xfrm>
+            <a:off x="6382512" y="4590288"/>
+            <a:ext cx="2313432" cy="457200"/>
+          </a:xfrm>
+          <a:prstGeom prst="rect">
+            <a:avLst/>
+          </a:prstGeom>
+          <a:noFill/>
+          <a:ln/>
+        </p:spPr>
+        <p:txBody>
+          <a:bodyPr wrap="square" lIns="0" tIns="0" rIns="0" bIns="0" rtlCol="0" anchor="ctr"/>
+          <a:lstStyle/>
+          <a:p>
+            <a:pPr algn="ctr" indent="0" marL="0">
+              <a:buNone/>
+            </a:pPr>
+            <a:r>
+              <a:rPr lang="en-US" sz="1050" b="1" dirty="0">
+                <a:solidFill>
+                  <a:srgbClr val="5A05F4"/>
+                </a:solidFill>
+                <a:latin typeface="Courier New" pitchFamily="34" charset="0"/>
+                <a:ea typeface="Courier New" pitchFamily="34" charset="-122"/>
+                <a:cs typeface="Courier New" pitchFamily="34" charset="-120"/>
+              </a:rPr>
+              <a:t>Т3 · evals</a:t>
+            </a:r>
+            <a:endParaRPr lang="en-US" sz="1050" dirty="0"/>
+          </a:p>
+        </p:txBody>
+      </p:sp>
+      <p:sp>
+        <p:nvSpPr>
+          <p:cNvPr id="29" name="Shape 26"/>
+          <p:cNvSpPr/>
+          <p:nvPr/>
+        </p:nvSpPr>
+        <p:spPr>
+          <a:xfrm>
+            <a:off x="8842248" y="4818888"/>
+            <a:ext cx="164592" cy="0"/>
+          </a:xfrm>
+          <a:prstGeom prst="line">
+            <a:avLst/>
+          </a:prstGeom>
+          <a:noFill/>
+          <a:ln w="15875">
+            <a:solidFill>
+              <a:srgbClr val="C9B8FB"/>
+            </a:solidFill>
+            <a:prstDash val="solid"/>
+          </a:ln>
+        </p:spPr>
+      </p:sp>
+      <p:sp>
+        <p:nvSpPr>
+          <p:cNvPr id="30" name="Shape 27"/>
+          <p:cNvSpPr/>
+          <p:nvPr/>
+        </p:nvSpPr>
+        <p:spPr>
+          <a:xfrm rot="5400000">
+            <a:off x="8970264" y="4750308"/>
+            <a:ext cx="146304" cy="137160"/>
+          </a:xfrm>
+          <a:prstGeom prst="triangle">
+            <a:avLst/>
+          </a:prstGeom>
+          <a:solidFill>
+            <a:srgbClr val="C9B8FB"/>
+          </a:solidFill>
+          <a:ln/>
+        </p:spPr>
+      </p:sp>
+      <p:sp>
+        <p:nvSpPr>
+          <p:cNvPr id="31" name="Shape 28"/>
+          <p:cNvSpPr/>
+          <p:nvPr/>
+        </p:nvSpPr>
+        <p:spPr>
+          <a:xfrm>
+            <a:off x="9208008" y="4590288"/>
+            <a:ext cx="2423160" cy="457200"/>
+          </a:xfrm>
+          <a:prstGeom prst="roundRect">
+            <a:avLst>
+              <a:gd name="adj" fmla="val 20000"/>
             </a:avLst>
           </a:prstGeom>
           <a:solidFill>
@@ -4021,14 +4338,14 @@
       </p:sp>
       <p:sp>
         <p:nvSpPr>
-          <p:cNvPr id="20" name="Text 17"/>
-          <p:cNvSpPr/>
-          <p:nvPr/>
-        </p:nvSpPr>
-        <p:spPr>
-          <a:xfrm>
-            <a:off x="786384" y="5541264"/>
-            <a:ext cx="10625328" cy="219456"/>
+          <p:cNvPr id="32" name="Text 29"/>
+          <p:cNvSpPr/>
+          <p:nvPr/>
+        </p:nvSpPr>
+        <p:spPr>
+          <a:xfrm>
+            <a:off x="9262872" y="4590288"/>
+            <a:ext cx="2313432" cy="457200"/>
           </a:xfrm>
           <a:prstGeom prst="rect">
             <a:avLst/>
@@ -4040,11 +4357,11 @@
           <a:bodyPr wrap="square" lIns="0" tIns="0" rIns="0" bIns="0" rtlCol="0" anchor="ctr"/>
           <a:lstStyle/>
           <a:p>
-            <a:pPr indent="0" marL="0">
-              <a:buNone/>
-            </a:pPr>
-            <a:r>
-              <a:rPr lang="en-US" sz="950" b="1" spc="150" kern="0" dirty="0">
+            <a:pPr algn="ctr" indent="0" marL="0">
+              <a:buNone/>
+            </a:pPr>
+            <a:r>
+              <a:rPr lang="en-US" sz="1050" b="1" dirty="0">
                 <a:solidFill>
                   <a:srgbClr val="1B8A5A"/>
                 </a:solidFill>
@@ -4052,6 +4369,67 @@
                 <a:ea typeface="Courier New" pitchFamily="34" charset="-122"/>
                 <a:cs typeface="Courier New" pitchFamily="34" charset="-120"/>
               </a:rPr>
+              <a:t>Т4 · гейт</a:t>
+            </a:r>
+            <a:endParaRPr lang="en-US" sz="1050" dirty="0"/>
+          </a:p>
+        </p:txBody>
+      </p:sp>
+      <p:sp>
+        <p:nvSpPr>
+          <p:cNvPr id="33" name="Shape 30"/>
+          <p:cNvSpPr/>
+          <p:nvPr/>
+        </p:nvSpPr>
+        <p:spPr>
+          <a:xfrm>
+            <a:off x="566928" y="5376672"/>
+            <a:ext cx="11064240" cy="749808"/>
+          </a:xfrm>
+          <a:prstGeom prst="roundRect">
+            <a:avLst>
+              <a:gd name="adj" fmla="val 14634"/>
+            </a:avLst>
+          </a:prstGeom>
+          <a:solidFill>
+            <a:srgbClr val="E9F4EF"/>
+          </a:solidFill>
+          <a:ln/>
+        </p:spPr>
+      </p:sp>
+      <p:sp>
+        <p:nvSpPr>
+          <p:cNvPr id="34" name="Text 31"/>
+          <p:cNvSpPr/>
+          <p:nvPr/>
+        </p:nvSpPr>
+        <p:spPr>
+          <a:xfrm>
+            <a:off x="786384" y="5504688"/>
+            <a:ext cx="10625328" cy="219456"/>
+          </a:xfrm>
+          <a:prstGeom prst="rect">
+            <a:avLst/>
+          </a:prstGeom>
+          <a:noFill/>
+          <a:ln/>
+        </p:spPr>
+        <p:txBody>
+          <a:bodyPr wrap="square" lIns="0" tIns="0" rIns="0" bIns="0" rtlCol="0" anchor="ctr"/>
+          <a:lstStyle/>
+          <a:p>
+            <a:pPr indent="0" marL="0">
+              <a:buNone/>
+            </a:pPr>
+            <a:r>
+              <a:rPr lang="en-US" sz="950" b="1" spc="150" kern="0" dirty="0">
+                <a:solidFill>
+                  <a:srgbClr val="1B8A5A"/>
+                </a:solidFill>
+                <a:latin typeface="Courier New" pitchFamily="34" charset="0"/>
+                <a:ea typeface="Courier New" pitchFamily="34" charset="-122"/>
+                <a:cs typeface="Courier New" pitchFamily="34" charset="-120"/>
+              </a:rPr>
               <a:t>ЧОМУ САМЕ ЦЕЙ ПОРЯДОК</a:t>
             </a:r>
             <a:endParaRPr lang="en-US" sz="950" dirty="0"/>
@@ -4060,14 +4438,14 @@
       </p:sp>
       <p:sp>
         <p:nvSpPr>
-          <p:cNvPr id="21" name="Text 18"/>
-          <p:cNvSpPr/>
-          <p:nvPr/>
-        </p:nvSpPr>
-        <p:spPr>
-          <a:xfrm>
-            <a:off x="786384" y="5797296"/>
-            <a:ext cx="10625328" cy="356616"/>
+          <p:cNvPr id="35" name="Text 32"/>
+          <p:cNvSpPr/>
+          <p:nvPr/>
+        </p:nvSpPr>
+        <p:spPr>
+          <a:xfrm>
+            <a:off x="786384" y="5760720"/>
+            <a:ext cx="10625328" cy="237744"/>
           </a:xfrm>
           <a:prstGeom prst="rect">
             <a:avLst/>

--- a/docs/decks/L12.pptx
+++ b/docs/decks/L12.pptx
@@ -2358,7 +2358,7 @@
         </p:nvSpPr>
         <p:spPr>
           <a:xfrm>
-            <a:off x="11368735" y="6437376"/>
+            <a:off x="11368735" y="6327648"/>
             <a:ext cx="365760" cy="274320"/>
           </a:xfrm>
           <a:prstGeom prst="rect">
@@ -2394,6 +2394,62 @@
           </a:p>
         </p:txBody>
       </p:sp>
+    </p:spTree>
+  </p:cSld>
+  <p:clrMapOvr>
+    <a:masterClrMapping/>
+  </p:clrMapOvr>
+</p:sldLayout>
+</file>
+
+<file path=ppt/slideLayouts/slideLayout2.xml><?xml version="1.0" encoding="utf-8"?>
+<p:sldLayout xmlns:a="http://schemas.openxmlformats.org/drawingml/2006/main" xmlns:r="http://schemas.openxmlformats.org/officeDocument/2006/relationships" xmlns:p="http://schemas.openxmlformats.org/presentationml/2006/main" preserve="1">
+  <p:cSld name="NEO">
+    <p:bg>
+      <p:bgPr>
+        <a:solidFill>
+          <a:srgbClr val="000000"/>
+        </a:solidFill>
+      </p:bgPr>
+    </p:bg>
+    <p:spTree>
+      <p:nvGrpSpPr>
+        <p:cNvPr id="1" name=""/>
+        <p:cNvGrpSpPr/>
+        <p:nvPr/>
+      </p:nvGrpSpPr>
+      <p:grpSpPr>
+        <a:xfrm>
+          <a:off x="0" y="0"/>
+          <a:ext cx="0" cy="0"/>
+          <a:chOff x="0" y="0"/>
+          <a:chExt cx="0" cy="0"/>
+        </a:xfrm>
+      </p:grpSpPr>
+      <p:pic>
+        <p:nvPicPr>
+          <p:cNvPr id="2" name="Image 0" descr="preencoded.png">    </p:cNvPr>
+          <p:cNvPicPr>
+            <a:picLocks noChangeAspect="1"/>
+          </p:cNvPicPr>
+          <p:nvPr/>
+        </p:nvPicPr>
+        <p:blipFill>
+          <a:blip r:embed="rId1"/>
+          <a:stretch>
+            <a:fillRect/>
+          </a:stretch>
+        </p:blipFill>
+        <p:spPr>
+          <a:xfrm>
+            <a:off x="0" y="0"/>
+            <a:ext cx="12191695" cy="6858000"/>
+          </a:xfrm>
+          <a:prstGeom prst="rect">
+            <a:avLst/>
+          </a:prstGeom>
+        </p:spPr>
+      </p:pic>
     </p:spTree>
   </p:cSld>
   <p:clrMapOvr>
@@ -2431,7 +2487,7 @@
         </p:nvSpPr>
         <p:spPr>
           <a:xfrm>
-            <a:off x="11368735" y="6437376"/>
+            <a:off x="11368735" y="6327648"/>
             <a:ext cx="365760" cy="274320"/>
           </a:xfrm>
           <a:prstGeom prst="rect">
@@ -2472,6 +2528,7 @@
   <p:clrMap bg1="lt1" tx1="dk1" bg2="lt2" tx2="dk2" accent1="accent1" accent2="accent2" accent3="accent3" accent4="accent4" accent5="accent5" accent6="accent6" hlink="hlink" folHlink="folHlink"/>
   <p:sldLayoutIdLst>
     <p:sldLayoutId id="2147483649" r:id="rId1"/>
+    <p:sldLayoutId id="2147483650" r:id="rId2"/>
   </p:sldLayoutIdLst>
   <p:hf sldNum="0" hdr="0" ftr="0" dt="0"/>
   <p:txStyles>
@@ -2730,13 +2787,6 @@
 <file path=ppt/slides/slide1.xml><?xml version="1.0" encoding="utf-8"?>
 <p:sld xmlns:a="http://schemas.openxmlformats.org/drawingml/2006/main" xmlns:r="http://schemas.openxmlformats.org/officeDocument/2006/relationships" xmlns:p="http://schemas.openxmlformats.org/presentationml/2006/main">
   <p:cSld name="Slide 1">
-    <p:bg>
-      <p:bgPr>
-        <a:solidFill>
-          <a:srgbClr val="1B0942"/>
-        </a:solidFill>
-      </p:bgPr>
-    </p:bg>
     <p:spTree>
       <p:nvGrpSpPr>
         <p:cNvPr id="1" name=""/>
@@ -3408,13 +3458,6 @@
 <file path=ppt/slides/slide10.xml><?xml version="1.0" encoding="utf-8"?>
 <p:sld xmlns:a="http://schemas.openxmlformats.org/drawingml/2006/main" xmlns:r="http://schemas.openxmlformats.org/officeDocument/2006/relationships" xmlns:p="http://schemas.openxmlformats.org/presentationml/2006/main">
   <p:cSld name="Slide 10">
-    <p:bg>
-      <p:bgPr>
-        <a:solidFill>
-          <a:srgbClr val="FFFFFF"/>
-        </a:solidFill>
-      </p:bgPr>
-    </p:bg>
     <p:spTree>
       <p:nvGrpSpPr>
         <p:cNvPr id="1" name=""/>
@@ -3431,7 +3474,29 @@
       </p:grpSpPr>
       <p:sp>
         <p:nvSpPr>
-          <p:cNvPr id="2" name="Text 0"/>
+          <p:cNvPr id="2" name="Shape 0"/>
+          <p:cNvSpPr/>
+          <p:nvPr/>
+        </p:nvSpPr>
+        <p:spPr>
+          <a:xfrm>
+            <a:off x="231343" y="194767"/>
+            <a:ext cx="11716207" cy="6473952"/>
+          </a:xfrm>
+          <a:prstGeom prst="roundRect">
+            <a:avLst>
+              <a:gd name="adj" fmla="val 3107"/>
+            </a:avLst>
+          </a:prstGeom>
+          <a:solidFill>
+            <a:srgbClr val="FFFFFF"/>
+          </a:solidFill>
+          <a:ln/>
+        </p:spPr>
+      </p:sp>
+      <p:sp>
+        <p:nvSpPr>
+          <p:cNvPr id="3" name="Text 1"/>
           <p:cNvSpPr/>
           <p:nvPr/>
         </p:nvSpPr>
@@ -3470,7 +3535,7 @@
       </p:sp>
       <p:sp>
         <p:nvSpPr>
-          <p:cNvPr id="3" name="Text 1"/>
+          <p:cNvPr id="4" name="Text 2"/>
           <p:cNvSpPr/>
           <p:nvPr/>
         </p:nvSpPr>
@@ -3509,7 +3574,7 @@
       </p:sp>
       <p:sp>
         <p:nvSpPr>
-          <p:cNvPr id="4" name="Shape 2"/>
+          <p:cNvPr id="5" name="Shape 3"/>
           <p:cNvSpPr/>
           <p:nvPr/>
         </p:nvSpPr>
@@ -3531,7 +3596,7 @@
       </p:sp>
       <p:sp>
         <p:nvSpPr>
-          <p:cNvPr id="5" name="Text 3"/>
+          <p:cNvPr id="6" name="Text 4"/>
           <p:cNvSpPr/>
           <p:nvPr/>
         </p:nvSpPr>
@@ -3570,7 +3635,7 @@
       </p:sp>
       <p:pic>
         <p:nvPicPr>
-          <p:cNvPr id="6" name="Image 0" descr="preencoded.png">    </p:cNvPr>
+          <p:cNvPr id="7" name="Image 0" descr="preencoded.png">    </p:cNvPr>
           <p:cNvPicPr>
             <a:picLocks noChangeAspect="1"/>
           </p:cNvPicPr>
@@ -3584,7 +3649,7 @@
         </p:blipFill>
         <p:spPr>
           <a:xfrm>
-            <a:off x="566928" y="6254496"/>
+            <a:off x="566928" y="6126480"/>
             <a:ext cx="1481328" cy="457200"/>
           </a:xfrm>
           <a:prstGeom prst="rect">
@@ -3594,7 +3659,7 @@
       </p:pic>
       <p:sp>
         <p:nvSpPr>
-          <p:cNvPr id="7" name="Shape 4"/>
+          <p:cNvPr id="8" name="Shape 5"/>
           <p:cNvSpPr/>
           <p:nvPr/>
         </p:nvSpPr>
@@ -3616,7 +3681,7 @@
       </p:sp>
       <p:sp>
         <p:nvSpPr>
-          <p:cNvPr id="8" name="Text 5"/>
+          <p:cNvPr id="9" name="Text 6"/>
           <p:cNvSpPr/>
           <p:nvPr/>
         </p:nvSpPr>
@@ -3655,7 +3720,7 @@
       </p:sp>
       <p:sp>
         <p:nvSpPr>
-          <p:cNvPr id="9" name="Text 6"/>
+          <p:cNvPr id="10" name="Text 7"/>
           <p:cNvSpPr/>
           <p:nvPr/>
         </p:nvSpPr>
@@ -3694,7 +3759,7 @@
       </p:sp>
       <p:sp>
         <p:nvSpPr>
-          <p:cNvPr id="10" name="Shape 7"/>
+          <p:cNvPr id="11" name="Shape 8"/>
           <p:cNvSpPr/>
           <p:nvPr/>
         </p:nvSpPr>
@@ -3721,7 +3786,7 @@
       </p:sp>
       <p:sp>
         <p:nvSpPr>
-          <p:cNvPr id="11" name="Text 8"/>
+          <p:cNvPr id="12" name="Text 9"/>
           <p:cNvSpPr/>
           <p:nvPr/>
         </p:nvSpPr>
@@ -3760,7 +3825,7 @@
       </p:sp>
       <p:sp>
         <p:nvSpPr>
-          <p:cNvPr id="12" name="Text 9"/>
+          <p:cNvPr id="13" name="Text 10"/>
           <p:cNvSpPr/>
           <p:nvPr/>
         </p:nvSpPr>
@@ -3799,7 +3864,7 @@
       </p:sp>
       <p:sp>
         <p:nvSpPr>
-          <p:cNvPr id="13" name="Shape 10"/>
+          <p:cNvPr id="14" name="Shape 11"/>
           <p:cNvSpPr/>
           <p:nvPr/>
         </p:nvSpPr>
@@ -3821,7 +3886,7 @@
       </p:sp>
       <p:sp>
         <p:nvSpPr>
-          <p:cNvPr id="14" name="Text 11"/>
+          <p:cNvPr id="15" name="Text 12"/>
           <p:cNvSpPr/>
           <p:nvPr/>
         </p:nvSpPr>
@@ -3860,7 +3925,7 @@
       </p:sp>
       <p:sp>
         <p:nvSpPr>
-          <p:cNvPr id="15" name="Text 12"/>
+          <p:cNvPr id="16" name="Text 13"/>
           <p:cNvSpPr/>
           <p:nvPr/>
         </p:nvSpPr>
@@ -3899,7 +3964,7 @@
       </p:sp>
       <p:sp>
         <p:nvSpPr>
-          <p:cNvPr id="16" name="Shape 13"/>
+          <p:cNvPr id="17" name="Shape 14"/>
           <p:cNvSpPr/>
           <p:nvPr/>
         </p:nvSpPr>
@@ -3921,7 +3986,7 @@
       </p:sp>
       <p:sp>
         <p:nvSpPr>
-          <p:cNvPr id="17" name="Text 14"/>
+          <p:cNvPr id="18" name="Text 15"/>
           <p:cNvSpPr/>
           <p:nvPr/>
         </p:nvSpPr>
@@ -3960,7 +4025,7 @@
       </p:sp>
       <p:sp>
         <p:nvSpPr>
-          <p:cNvPr id="18" name="Text 15"/>
+          <p:cNvPr id="19" name="Text 16"/>
           <p:cNvSpPr/>
           <p:nvPr/>
         </p:nvSpPr>
@@ -3999,7 +4064,7 @@
       </p:sp>
       <p:sp>
         <p:nvSpPr>
-          <p:cNvPr id="19" name="Shape 16"/>
+          <p:cNvPr id="20" name="Shape 17"/>
           <p:cNvSpPr/>
           <p:nvPr/>
         </p:nvSpPr>
@@ -4021,7 +4086,7 @@
       </p:sp>
       <p:sp>
         <p:nvSpPr>
-          <p:cNvPr id="20" name="Text 17"/>
+          <p:cNvPr id="21" name="Text 18"/>
           <p:cNvSpPr/>
           <p:nvPr/>
         </p:nvSpPr>
@@ -4060,7 +4125,7 @@
       </p:sp>
       <p:sp>
         <p:nvSpPr>
-          <p:cNvPr id="21" name="Shape 18"/>
+          <p:cNvPr id="22" name="Shape 19"/>
           <p:cNvSpPr/>
           <p:nvPr/>
         </p:nvSpPr>
@@ -4083,7 +4148,7 @@
       </p:sp>
       <p:sp>
         <p:nvSpPr>
-          <p:cNvPr id="22" name="Shape 19"/>
+          <p:cNvPr id="23" name="Shape 20"/>
           <p:cNvSpPr/>
           <p:nvPr/>
         </p:nvSpPr>
@@ -4103,7 +4168,7 @@
       </p:sp>
       <p:sp>
         <p:nvSpPr>
-          <p:cNvPr id="23" name="Shape 20"/>
+          <p:cNvPr id="24" name="Shape 21"/>
           <p:cNvSpPr/>
           <p:nvPr/>
         </p:nvSpPr>
@@ -4130,7 +4195,7 @@
       </p:sp>
       <p:sp>
         <p:nvSpPr>
-          <p:cNvPr id="24" name="Text 21"/>
+          <p:cNvPr id="25" name="Text 22"/>
           <p:cNvSpPr/>
           <p:nvPr/>
         </p:nvSpPr>
@@ -4169,7 +4234,7 @@
       </p:sp>
       <p:sp>
         <p:nvSpPr>
-          <p:cNvPr id="25" name="Shape 22"/>
+          <p:cNvPr id="26" name="Shape 23"/>
           <p:cNvSpPr/>
           <p:nvPr/>
         </p:nvSpPr>
@@ -4192,7 +4257,7 @@
       </p:sp>
       <p:sp>
         <p:nvSpPr>
-          <p:cNvPr id="26" name="Shape 23"/>
+          <p:cNvPr id="27" name="Shape 24"/>
           <p:cNvSpPr/>
           <p:nvPr/>
         </p:nvSpPr>
@@ -4212,7 +4277,7 @@
       </p:sp>
       <p:sp>
         <p:nvSpPr>
-          <p:cNvPr id="27" name="Shape 24"/>
+          <p:cNvPr id="28" name="Shape 25"/>
           <p:cNvSpPr/>
           <p:nvPr/>
         </p:nvSpPr>
@@ -4234,7 +4299,7 @@
       </p:sp>
       <p:sp>
         <p:nvSpPr>
-          <p:cNvPr id="28" name="Text 25"/>
+          <p:cNvPr id="29" name="Text 26"/>
           <p:cNvSpPr/>
           <p:nvPr/>
         </p:nvSpPr>
@@ -4273,7 +4338,7 @@
       </p:sp>
       <p:sp>
         <p:nvSpPr>
-          <p:cNvPr id="29" name="Shape 26"/>
+          <p:cNvPr id="30" name="Shape 27"/>
           <p:cNvSpPr/>
           <p:nvPr/>
         </p:nvSpPr>
@@ -4296,7 +4361,7 @@
       </p:sp>
       <p:sp>
         <p:nvSpPr>
-          <p:cNvPr id="30" name="Shape 27"/>
+          <p:cNvPr id="31" name="Shape 28"/>
           <p:cNvSpPr/>
           <p:nvPr/>
         </p:nvSpPr>
@@ -4316,7 +4381,7 @@
       </p:sp>
       <p:sp>
         <p:nvSpPr>
-          <p:cNvPr id="31" name="Shape 28"/>
+          <p:cNvPr id="32" name="Shape 29"/>
           <p:cNvSpPr/>
           <p:nvPr/>
         </p:nvSpPr>
@@ -4338,7 +4403,7 @@
       </p:sp>
       <p:sp>
         <p:nvSpPr>
-          <p:cNvPr id="32" name="Text 29"/>
+          <p:cNvPr id="33" name="Text 30"/>
           <p:cNvSpPr/>
           <p:nvPr/>
         </p:nvSpPr>
@@ -4377,7 +4442,7 @@
       </p:sp>
       <p:sp>
         <p:nvSpPr>
-          <p:cNvPr id="33" name="Shape 30"/>
+          <p:cNvPr id="34" name="Shape 31"/>
           <p:cNvSpPr/>
           <p:nvPr/>
         </p:nvSpPr>
@@ -4399,7 +4464,7 @@
       </p:sp>
       <p:sp>
         <p:nvSpPr>
-          <p:cNvPr id="34" name="Text 31"/>
+          <p:cNvPr id="35" name="Text 32"/>
           <p:cNvSpPr/>
           <p:nvPr/>
         </p:nvSpPr>
@@ -4438,7 +4503,7 @@
       </p:sp>
       <p:sp>
         <p:nvSpPr>
-          <p:cNvPr id="35" name="Text 32"/>
+          <p:cNvPr id="36" name="Text 33"/>
           <p:cNvSpPr/>
           <p:nvPr/>
         </p:nvSpPr>
@@ -4490,7 +4555,7 @@
         </p:nvSpPr>
         <p:spPr>
           <a:xfrm>
-            <a:off x="11368735" y="6437376"/>
+            <a:off x="11368735" y="6327648"/>
             <a:ext cx="365760" cy="274320"/>
           </a:xfrm>
           <a:prstGeom prst="rect">
@@ -4537,13 +4602,6 @@
 <file path=ppt/slides/slide11.xml><?xml version="1.0" encoding="utf-8"?>
 <p:sld xmlns:a="http://schemas.openxmlformats.org/drawingml/2006/main" xmlns:r="http://schemas.openxmlformats.org/officeDocument/2006/relationships" xmlns:p="http://schemas.openxmlformats.org/presentationml/2006/main">
   <p:cSld name="Slide 11">
-    <p:bg>
-      <p:bgPr>
-        <a:solidFill>
-          <a:srgbClr val="FFFFFF"/>
-        </a:solidFill>
-      </p:bgPr>
-    </p:bg>
     <p:spTree>
       <p:nvGrpSpPr>
         <p:cNvPr id="1" name=""/>
@@ -4560,7 +4618,29 @@
       </p:grpSpPr>
       <p:sp>
         <p:nvSpPr>
-          <p:cNvPr id="2" name="Text 0"/>
+          <p:cNvPr id="2" name="Shape 0"/>
+          <p:cNvSpPr/>
+          <p:nvPr/>
+        </p:nvSpPr>
+        <p:spPr>
+          <a:xfrm>
+            <a:off x="231343" y="194767"/>
+            <a:ext cx="11716207" cy="6473952"/>
+          </a:xfrm>
+          <a:prstGeom prst="roundRect">
+            <a:avLst>
+              <a:gd name="adj" fmla="val 3107"/>
+            </a:avLst>
+          </a:prstGeom>
+          <a:solidFill>
+            <a:srgbClr val="FFFFFF"/>
+          </a:solidFill>
+          <a:ln/>
+        </p:spPr>
+      </p:sp>
+      <p:sp>
+        <p:nvSpPr>
+          <p:cNvPr id="3" name="Text 1"/>
           <p:cNvSpPr/>
           <p:nvPr/>
         </p:nvSpPr>
@@ -4599,7 +4679,7 @@
       </p:sp>
       <p:sp>
         <p:nvSpPr>
-          <p:cNvPr id="3" name="Text 1"/>
+          <p:cNvPr id="4" name="Text 2"/>
           <p:cNvSpPr/>
           <p:nvPr/>
         </p:nvSpPr>
@@ -4638,7 +4718,7 @@
       </p:sp>
       <p:sp>
         <p:nvSpPr>
-          <p:cNvPr id="4" name="Shape 2"/>
+          <p:cNvPr id="5" name="Shape 3"/>
           <p:cNvSpPr/>
           <p:nvPr/>
         </p:nvSpPr>
@@ -4660,7 +4740,7 @@
       </p:sp>
       <p:sp>
         <p:nvSpPr>
-          <p:cNvPr id="5" name="Text 3"/>
+          <p:cNvPr id="6" name="Text 4"/>
           <p:cNvSpPr/>
           <p:nvPr/>
         </p:nvSpPr>
@@ -4699,7 +4779,7 @@
       </p:sp>
       <p:sp>
         <p:nvSpPr>
-          <p:cNvPr id="6" name="Shape 4"/>
+          <p:cNvPr id="7" name="Shape 5"/>
           <p:cNvSpPr/>
           <p:nvPr/>
         </p:nvSpPr>
@@ -4721,7 +4801,7 @@
       </p:sp>
       <p:sp>
         <p:nvSpPr>
-          <p:cNvPr id="7" name="Text 5"/>
+          <p:cNvPr id="8" name="Text 6"/>
           <p:cNvSpPr/>
           <p:nvPr/>
         </p:nvSpPr>
@@ -4760,7 +4840,7 @@
       </p:sp>
       <p:pic>
         <p:nvPicPr>
-          <p:cNvPr id="8" name="Image 0" descr="preencoded.png">    </p:cNvPr>
+          <p:cNvPr id="9" name="Image 0" descr="preencoded.png">    </p:cNvPr>
           <p:cNvPicPr>
             <a:picLocks noChangeAspect="1"/>
           </p:cNvPicPr>
@@ -4774,7 +4854,7 @@
         </p:blipFill>
         <p:spPr>
           <a:xfrm>
-            <a:off x="566928" y="6254496"/>
+            <a:off x="566928" y="6126480"/>
             <a:ext cx="1481328" cy="457200"/>
           </a:xfrm>
           <a:prstGeom prst="rect">
@@ -4784,7 +4864,7 @@
       </p:pic>
       <p:sp>
         <p:nvSpPr>
-          <p:cNvPr id="9" name="Shape 6"/>
+          <p:cNvPr id="10" name="Shape 7"/>
           <p:cNvSpPr/>
           <p:nvPr/>
         </p:nvSpPr>
@@ -4806,7 +4886,7 @@
       </p:sp>
       <p:sp>
         <p:nvSpPr>
-          <p:cNvPr id="10" name="Text 7"/>
+          <p:cNvPr id="11" name="Text 8"/>
           <p:cNvSpPr/>
           <p:nvPr/>
         </p:nvSpPr>
@@ -4845,7 +4925,7 @@
       </p:sp>
       <p:sp>
         <p:nvSpPr>
-          <p:cNvPr id="11" name="Shape 8"/>
+          <p:cNvPr id="12" name="Shape 9"/>
           <p:cNvSpPr/>
           <p:nvPr/>
         </p:nvSpPr>
@@ -4868,7 +4948,7 @@
       </p:sp>
       <p:sp>
         <p:nvSpPr>
-          <p:cNvPr id="12" name="Shape 9"/>
+          <p:cNvPr id="13" name="Shape 10"/>
           <p:cNvSpPr/>
           <p:nvPr/>
         </p:nvSpPr>
@@ -4888,7 +4968,7 @@
       </p:sp>
       <p:sp>
         <p:nvSpPr>
-          <p:cNvPr id="13" name="Shape 10"/>
+          <p:cNvPr id="14" name="Shape 11"/>
           <p:cNvSpPr/>
           <p:nvPr/>
         </p:nvSpPr>
@@ -4915,7 +4995,7 @@
       </p:sp>
       <p:sp>
         <p:nvSpPr>
-          <p:cNvPr id="14" name="Text 11"/>
+          <p:cNvPr id="15" name="Text 12"/>
           <p:cNvSpPr/>
           <p:nvPr/>
         </p:nvSpPr>
@@ -4954,7 +5034,7 @@
       </p:sp>
       <p:sp>
         <p:nvSpPr>
-          <p:cNvPr id="15" name="Shape 12"/>
+          <p:cNvPr id="16" name="Shape 13"/>
           <p:cNvSpPr/>
           <p:nvPr/>
         </p:nvSpPr>
@@ -4977,7 +5057,7 @@
       </p:sp>
       <p:sp>
         <p:nvSpPr>
-          <p:cNvPr id="16" name="Shape 13"/>
+          <p:cNvPr id="17" name="Shape 14"/>
           <p:cNvSpPr/>
           <p:nvPr/>
         </p:nvSpPr>
@@ -4997,7 +5077,7 @@
       </p:sp>
       <p:sp>
         <p:nvSpPr>
-          <p:cNvPr id="17" name="Shape 14"/>
+          <p:cNvPr id="18" name="Shape 15"/>
           <p:cNvSpPr/>
           <p:nvPr/>
         </p:nvSpPr>
@@ -5019,7 +5099,7 @@
       </p:sp>
       <p:sp>
         <p:nvSpPr>
-          <p:cNvPr id="18" name="Text 15"/>
+          <p:cNvPr id="19" name="Text 16"/>
           <p:cNvSpPr/>
           <p:nvPr/>
         </p:nvSpPr>
@@ -5058,7 +5138,7 @@
       </p:sp>
       <p:sp>
         <p:nvSpPr>
-          <p:cNvPr id="19" name="Shape 16"/>
+          <p:cNvPr id="20" name="Shape 17"/>
           <p:cNvSpPr/>
           <p:nvPr/>
         </p:nvSpPr>
@@ -5085,7 +5165,7 @@
       </p:sp>
       <p:sp>
         <p:nvSpPr>
-          <p:cNvPr id="20" name="Text 17"/>
+          <p:cNvPr id="21" name="Text 18"/>
           <p:cNvSpPr/>
           <p:nvPr/>
         </p:nvSpPr>
@@ -5124,7 +5204,7 @@
       </p:sp>
       <p:sp>
         <p:nvSpPr>
-          <p:cNvPr id="21" name="Text 18"/>
+          <p:cNvPr id="22" name="Text 19"/>
           <p:cNvSpPr/>
           <p:nvPr/>
         </p:nvSpPr>
@@ -5166,7 +5246,7 @@
       </p:sp>
       <p:sp>
         <p:nvSpPr>
-          <p:cNvPr id="22" name="Shape 19"/>
+          <p:cNvPr id="23" name="Shape 20"/>
           <p:cNvSpPr/>
           <p:nvPr/>
         </p:nvSpPr>
@@ -5188,7 +5268,7 @@
       </p:sp>
       <p:sp>
         <p:nvSpPr>
-          <p:cNvPr id="23" name="Text 20"/>
+          <p:cNvPr id="24" name="Text 21"/>
           <p:cNvSpPr/>
           <p:nvPr/>
         </p:nvSpPr>
@@ -5227,7 +5307,7 @@
       </p:sp>
       <p:sp>
         <p:nvSpPr>
-          <p:cNvPr id="24" name="Text 21"/>
+          <p:cNvPr id="25" name="Text 22"/>
           <p:cNvSpPr/>
           <p:nvPr/>
         </p:nvSpPr>
@@ -5269,7 +5349,7 @@
       </p:sp>
       <p:sp>
         <p:nvSpPr>
-          <p:cNvPr id="25" name="Shape 22"/>
+          <p:cNvPr id="26" name="Shape 23"/>
           <p:cNvSpPr/>
           <p:nvPr/>
         </p:nvSpPr>
@@ -5296,7 +5376,7 @@
       </p:sp>
       <p:sp>
         <p:nvSpPr>
-          <p:cNvPr id="26" name="Text 23"/>
+          <p:cNvPr id="27" name="Text 24"/>
           <p:cNvSpPr/>
           <p:nvPr/>
         </p:nvSpPr>
@@ -5348,7 +5428,7 @@
         </p:nvSpPr>
         <p:spPr>
           <a:xfrm>
-            <a:off x="11368735" y="6437376"/>
+            <a:off x="11368735" y="6327648"/>
             <a:ext cx="365760" cy="274320"/>
           </a:xfrm>
           <a:prstGeom prst="rect">
@@ -5395,13 +5475,6 @@
 <file path=ppt/slides/slide12.xml><?xml version="1.0" encoding="utf-8"?>
 <p:sld xmlns:a="http://schemas.openxmlformats.org/drawingml/2006/main" xmlns:r="http://schemas.openxmlformats.org/officeDocument/2006/relationships" xmlns:p="http://schemas.openxmlformats.org/presentationml/2006/main">
   <p:cSld name="Slide 12">
-    <p:bg>
-      <p:bgPr>
-        <a:solidFill>
-          <a:srgbClr val="FFFFFF"/>
-        </a:solidFill>
-      </p:bgPr>
-    </p:bg>
     <p:spTree>
       <p:nvGrpSpPr>
         <p:cNvPr id="1" name=""/>
@@ -5418,7 +5491,29 @@
       </p:grpSpPr>
       <p:sp>
         <p:nvSpPr>
-          <p:cNvPr id="2" name="Text 0"/>
+          <p:cNvPr id="2" name="Shape 0"/>
+          <p:cNvSpPr/>
+          <p:nvPr/>
+        </p:nvSpPr>
+        <p:spPr>
+          <a:xfrm>
+            <a:off x="231343" y="194767"/>
+            <a:ext cx="11716207" cy="6473952"/>
+          </a:xfrm>
+          <a:prstGeom prst="roundRect">
+            <a:avLst>
+              <a:gd name="adj" fmla="val 3107"/>
+            </a:avLst>
+          </a:prstGeom>
+          <a:solidFill>
+            <a:srgbClr val="FFFFFF"/>
+          </a:solidFill>
+          <a:ln/>
+        </p:spPr>
+      </p:sp>
+      <p:sp>
+        <p:nvSpPr>
+          <p:cNvPr id="3" name="Text 1"/>
           <p:cNvSpPr/>
           <p:nvPr/>
         </p:nvSpPr>
@@ -5457,7 +5552,7 @@
       </p:sp>
       <p:sp>
         <p:nvSpPr>
-          <p:cNvPr id="3" name="Text 1"/>
+          <p:cNvPr id="4" name="Text 2"/>
           <p:cNvSpPr/>
           <p:nvPr/>
         </p:nvSpPr>
@@ -5496,7 +5591,7 @@
       </p:sp>
       <p:sp>
         <p:nvSpPr>
-          <p:cNvPr id="4" name="Shape 2"/>
+          <p:cNvPr id="5" name="Shape 3"/>
           <p:cNvSpPr/>
           <p:nvPr/>
         </p:nvSpPr>
@@ -5518,7 +5613,7 @@
       </p:sp>
       <p:sp>
         <p:nvSpPr>
-          <p:cNvPr id="5" name="Text 3"/>
+          <p:cNvPr id="6" name="Text 4"/>
           <p:cNvSpPr/>
           <p:nvPr/>
         </p:nvSpPr>
@@ -5557,7 +5652,7 @@
       </p:sp>
       <p:pic>
         <p:nvPicPr>
-          <p:cNvPr id="6" name="Image 0" descr="preencoded.png">    </p:cNvPr>
+          <p:cNvPr id="7" name="Image 0" descr="preencoded.png">    </p:cNvPr>
           <p:cNvPicPr>
             <a:picLocks noChangeAspect="1"/>
           </p:cNvPicPr>
@@ -5571,7 +5666,7 @@
         </p:blipFill>
         <p:spPr>
           <a:xfrm>
-            <a:off x="566928" y="6254496"/>
+            <a:off x="566928" y="6126480"/>
             <a:ext cx="1481328" cy="457200"/>
           </a:xfrm>
           <a:prstGeom prst="rect">
@@ -6848,7 +6943,7 @@
       </p:graphicFrame>
       <p:sp>
         <p:nvSpPr>
-          <p:cNvPr id="8" name="Shape 4"/>
+          <p:cNvPr id="9" name="Shape 5"/>
           <p:cNvSpPr/>
           <p:nvPr/>
         </p:nvSpPr>
@@ -6870,7 +6965,7 @@
       </p:sp>
       <p:sp>
         <p:nvSpPr>
-          <p:cNvPr id="9" name="Text 5"/>
+          <p:cNvPr id="10" name="Text 6"/>
           <p:cNvSpPr/>
           <p:nvPr/>
         </p:nvSpPr>
@@ -6909,7 +7004,7 @@
       </p:sp>
       <p:sp>
         <p:nvSpPr>
-          <p:cNvPr id="10" name="Text 6"/>
+          <p:cNvPr id="11" name="Text 7"/>
           <p:cNvSpPr/>
           <p:nvPr/>
         </p:nvSpPr>
@@ -6961,7 +7056,7 @@
         </p:nvSpPr>
         <p:spPr>
           <a:xfrm>
-            <a:off x="11368735" y="6437376"/>
+            <a:off x="11368735" y="6327648"/>
             <a:ext cx="365760" cy="274320"/>
           </a:xfrm>
           <a:prstGeom prst="rect">
@@ -7008,13 +7103,6 @@
 <file path=ppt/slides/slide13.xml><?xml version="1.0" encoding="utf-8"?>
 <p:sld xmlns:a="http://schemas.openxmlformats.org/drawingml/2006/main" xmlns:r="http://schemas.openxmlformats.org/officeDocument/2006/relationships" xmlns:p="http://schemas.openxmlformats.org/presentationml/2006/main">
   <p:cSld name="Slide 13">
-    <p:bg>
-      <p:bgPr>
-        <a:solidFill>
-          <a:srgbClr val="FFFFFF"/>
-        </a:solidFill>
-      </p:bgPr>
-    </p:bg>
     <p:spTree>
       <p:nvGrpSpPr>
         <p:cNvPr id="1" name=""/>
@@ -7031,7 +7119,29 @@
       </p:grpSpPr>
       <p:sp>
         <p:nvSpPr>
-          <p:cNvPr id="2" name="Text 0"/>
+          <p:cNvPr id="2" name="Shape 0"/>
+          <p:cNvSpPr/>
+          <p:nvPr/>
+        </p:nvSpPr>
+        <p:spPr>
+          <a:xfrm>
+            <a:off x="231343" y="194767"/>
+            <a:ext cx="11716207" cy="6473952"/>
+          </a:xfrm>
+          <a:prstGeom prst="roundRect">
+            <a:avLst>
+              <a:gd name="adj" fmla="val 3107"/>
+            </a:avLst>
+          </a:prstGeom>
+          <a:solidFill>
+            <a:srgbClr val="FFFFFF"/>
+          </a:solidFill>
+          <a:ln/>
+        </p:spPr>
+      </p:sp>
+      <p:sp>
+        <p:nvSpPr>
+          <p:cNvPr id="3" name="Text 1"/>
           <p:cNvSpPr/>
           <p:nvPr/>
         </p:nvSpPr>
@@ -7070,7 +7180,7 @@
       </p:sp>
       <p:sp>
         <p:nvSpPr>
-          <p:cNvPr id="3" name="Text 1"/>
+          <p:cNvPr id="4" name="Text 2"/>
           <p:cNvSpPr/>
           <p:nvPr/>
         </p:nvSpPr>
@@ -7109,7 +7219,7 @@
       </p:sp>
       <p:sp>
         <p:nvSpPr>
-          <p:cNvPr id="4" name="Shape 2"/>
+          <p:cNvPr id="5" name="Shape 3"/>
           <p:cNvSpPr/>
           <p:nvPr/>
         </p:nvSpPr>
@@ -7131,7 +7241,7 @@
       </p:sp>
       <p:sp>
         <p:nvSpPr>
-          <p:cNvPr id="5" name="Text 3"/>
+          <p:cNvPr id="6" name="Text 4"/>
           <p:cNvSpPr/>
           <p:nvPr/>
         </p:nvSpPr>
@@ -7170,7 +7280,7 @@
       </p:sp>
       <p:pic>
         <p:nvPicPr>
-          <p:cNvPr id="6" name="Image 0" descr="preencoded.png">    </p:cNvPr>
+          <p:cNvPr id="7" name="Image 0" descr="preencoded.png">    </p:cNvPr>
           <p:cNvPicPr>
             <a:picLocks noChangeAspect="1"/>
           </p:cNvPicPr>
@@ -7184,7 +7294,7 @@
         </p:blipFill>
         <p:spPr>
           <a:xfrm>
-            <a:off x="566928" y="6254496"/>
+            <a:off x="566928" y="6126480"/>
             <a:ext cx="1481328" cy="457200"/>
           </a:xfrm>
           <a:prstGeom prst="rect">
@@ -7194,7 +7304,7 @@
       </p:pic>
       <p:sp>
         <p:nvSpPr>
-          <p:cNvPr id="7" name="Shape 4"/>
+          <p:cNvPr id="8" name="Shape 5"/>
           <p:cNvSpPr/>
           <p:nvPr/>
         </p:nvSpPr>
@@ -7216,7 +7326,7 @@
       </p:sp>
       <p:sp>
         <p:nvSpPr>
-          <p:cNvPr id="8" name="Shape 5"/>
+          <p:cNvPr id="9" name="Shape 6"/>
           <p:cNvSpPr/>
           <p:nvPr/>
         </p:nvSpPr>
@@ -7236,7 +7346,7 @@
       </p:sp>
       <p:sp>
         <p:nvSpPr>
-          <p:cNvPr id="9" name="Text 6"/>
+          <p:cNvPr id="10" name="Text 7"/>
           <p:cNvSpPr/>
           <p:nvPr/>
         </p:nvSpPr>
@@ -7275,7 +7385,7 @@
       </p:sp>
       <p:sp>
         <p:nvSpPr>
-          <p:cNvPr id="10" name="Text 7"/>
+          <p:cNvPr id="11" name="Text 8"/>
           <p:cNvSpPr/>
           <p:nvPr/>
         </p:nvSpPr>
@@ -7314,7 +7424,7 @@
       </p:sp>
       <p:sp>
         <p:nvSpPr>
-          <p:cNvPr id="11" name="Text 8"/>
+          <p:cNvPr id="12" name="Text 9"/>
           <p:cNvSpPr/>
           <p:nvPr/>
         </p:nvSpPr>
@@ -7356,7 +7466,7 @@
       </p:sp>
       <p:sp>
         <p:nvSpPr>
-          <p:cNvPr id="12" name="Shape 9"/>
+          <p:cNvPr id="13" name="Shape 10"/>
           <p:cNvSpPr/>
           <p:nvPr/>
         </p:nvSpPr>
@@ -7378,7 +7488,7 @@
       </p:sp>
       <p:sp>
         <p:nvSpPr>
-          <p:cNvPr id="13" name="Shape 10"/>
+          <p:cNvPr id="14" name="Shape 11"/>
           <p:cNvSpPr/>
           <p:nvPr/>
         </p:nvSpPr>
@@ -7398,7 +7508,7 @@
       </p:sp>
       <p:sp>
         <p:nvSpPr>
-          <p:cNvPr id="14" name="Text 11"/>
+          <p:cNvPr id="15" name="Text 12"/>
           <p:cNvSpPr/>
           <p:nvPr/>
         </p:nvSpPr>
@@ -7437,7 +7547,7 @@
       </p:sp>
       <p:sp>
         <p:nvSpPr>
-          <p:cNvPr id="15" name="Text 12"/>
+          <p:cNvPr id="16" name="Text 13"/>
           <p:cNvSpPr/>
           <p:nvPr/>
         </p:nvSpPr>
@@ -7476,7 +7586,7 @@
       </p:sp>
       <p:sp>
         <p:nvSpPr>
-          <p:cNvPr id="16" name="Text 13"/>
+          <p:cNvPr id="17" name="Text 14"/>
           <p:cNvSpPr/>
           <p:nvPr/>
         </p:nvSpPr>
@@ -7518,7 +7628,7 @@
       </p:sp>
       <p:sp>
         <p:nvSpPr>
-          <p:cNvPr id="17" name="Shape 14"/>
+          <p:cNvPr id="18" name="Shape 15"/>
           <p:cNvSpPr/>
           <p:nvPr/>
         </p:nvSpPr>
@@ -7540,7 +7650,7 @@
       </p:sp>
       <p:sp>
         <p:nvSpPr>
-          <p:cNvPr id="18" name="Shape 15"/>
+          <p:cNvPr id="19" name="Shape 16"/>
           <p:cNvSpPr/>
           <p:nvPr/>
         </p:nvSpPr>
@@ -7560,7 +7670,7 @@
       </p:sp>
       <p:sp>
         <p:nvSpPr>
-          <p:cNvPr id="19" name="Text 16"/>
+          <p:cNvPr id="20" name="Text 17"/>
           <p:cNvSpPr/>
           <p:nvPr/>
         </p:nvSpPr>
@@ -7599,7 +7709,7 @@
       </p:sp>
       <p:sp>
         <p:nvSpPr>
-          <p:cNvPr id="20" name="Text 17"/>
+          <p:cNvPr id="21" name="Text 18"/>
           <p:cNvSpPr/>
           <p:nvPr/>
         </p:nvSpPr>
@@ -7638,7 +7748,7 @@
       </p:sp>
       <p:sp>
         <p:nvSpPr>
-          <p:cNvPr id="21" name="Text 18"/>
+          <p:cNvPr id="22" name="Text 19"/>
           <p:cNvSpPr/>
           <p:nvPr/>
         </p:nvSpPr>
@@ -7680,7 +7790,7 @@
       </p:sp>
       <p:sp>
         <p:nvSpPr>
-          <p:cNvPr id="22" name="Shape 19"/>
+          <p:cNvPr id="23" name="Shape 20"/>
           <p:cNvSpPr/>
           <p:nvPr/>
         </p:nvSpPr>
@@ -7702,7 +7812,7 @@
       </p:sp>
       <p:sp>
         <p:nvSpPr>
-          <p:cNvPr id="23" name="Text 20"/>
+          <p:cNvPr id="24" name="Text 21"/>
           <p:cNvSpPr/>
           <p:nvPr/>
         </p:nvSpPr>
@@ -7741,7 +7851,7 @@
       </p:sp>
       <p:sp>
         <p:nvSpPr>
-          <p:cNvPr id="24" name="Text 21"/>
+          <p:cNvPr id="25" name="Text 22"/>
           <p:cNvSpPr/>
           <p:nvPr/>
         </p:nvSpPr>
@@ -7793,7 +7903,7 @@
         </p:nvSpPr>
         <p:spPr>
           <a:xfrm>
-            <a:off x="11368735" y="6437376"/>
+            <a:off x="11368735" y="6327648"/>
             <a:ext cx="365760" cy="274320"/>
           </a:xfrm>
           <a:prstGeom prst="rect">
@@ -7840,13 +7950,6 @@
 <file path=ppt/slides/slide14.xml><?xml version="1.0" encoding="utf-8"?>
 <p:sld xmlns:a="http://schemas.openxmlformats.org/drawingml/2006/main" xmlns:r="http://schemas.openxmlformats.org/officeDocument/2006/relationships" xmlns:p="http://schemas.openxmlformats.org/presentationml/2006/main">
   <p:cSld name="Slide 14">
-    <p:bg>
-      <p:bgPr>
-        <a:solidFill>
-          <a:srgbClr val="FFFFFF"/>
-        </a:solidFill>
-      </p:bgPr>
-    </p:bg>
     <p:spTree>
       <p:nvGrpSpPr>
         <p:cNvPr id="1" name=""/>
@@ -7863,7 +7966,29 @@
       </p:grpSpPr>
       <p:sp>
         <p:nvSpPr>
-          <p:cNvPr id="2" name="Text 0"/>
+          <p:cNvPr id="2" name="Shape 0"/>
+          <p:cNvSpPr/>
+          <p:nvPr/>
+        </p:nvSpPr>
+        <p:spPr>
+          <a:xfrm>
+            <a:off x="231343" y="194767"/>
+            <a:ext cx="11716207" cy="6473952"/>
+          </a:xfrm>
+          <a:prstGeom prst="roundRect">
+            <a:avLst>
+              <a:gd name="adj" fmla="val 3107"/>
+            </a:avLst>
+          </a:prstGeom>
+          <a:solidFill>
+            <a:srgbClr val="FFFFFF"/>
+          </a:solidFill>
+          <a:ln/>
+        </p:spPr>
+      </p:sp>
+      <p:sp>
+        <p:nvSpPr>
+          <p:cNvPr id="3" name="Text 1"/>
           <p:cNvSpPr/>
           <p:nvPr/>
         </p:nvSpPr>
@@ -7902,7 +8027,7 @@
       </p:sp>
       <p:sp>
         <p:nvSpPr>
-          <p:cNvPr id="3" name="Text 1"/>
+          <p:cNvPr id="4" name="Text 2"/>
           <p:cNvSpPr/>
           <p:nvPr/>
         </p:nvSpPr>
@@ -7941,7 +8066,7 @@
       </p:sp>
       <p:sp>
         <p:nvSpPr>
-          <p:cNvPr id="4" name="Shape 2"/>
+          <p:cNvPr id="5" name="Shape 3"/>
           <p:cNvSpPr/>
           <p:nvPr/>
         </p:nvSpPr>
@@ -7963,7 +8088,7 @@
       </p:sp>
       <p:sp>
         <p:nvSpPr>
-          <p:cNvPr id="5" name="Text 3"/>
+          <p:cNvPr id="6" name="Text 4"/>
           <p:cNvSpPr/>
           <p:nvPr/>
         </p:nvSpPr>
@@ -8002,7 +8127,7 @@
       </p:sp>
       <p:pic>
         <p:nvPicPr>
-          <p:cNvPr id="6" name="Image 0" descr="preencoded.png">    </p:cNvPr>
+          <p:cNvPr id="7" name="Image 0" descr="preencoded.png">    </p:cNvPr>
           <p:cNvPicPr>
             <a:picLocks noChangeAspect="1"/>
           </p:cNvPicPr>
@@ -8016,7 +8141,7 @@
         </p:blipFill>
         <p:spPr>
           <a:xfrm>
-            <a:off x="566928" y="6254496"/>
+            <a:off x="566928" y="6126480"/>
             <a:ext cx="1481328" cy="457200"/>
           </a:xfrm>
           <a:prstGeom prst="rect">
@@ -8026,7 +8151,7 @@
       </p:pic>
       <p:sp>
         <p:nvSpPr>
-          <p:cNvPr id="7" name="Shape 4"/>
+          <p:cNvPr id="8" name="Shape 5"/>
           <p:cNvSpPr/>
           <p:nvPr/>
         </p:nvSpPr>
@@ -8053,7 +8178,7 @@
       </p:sp>
       <p:sp>
         <p:nvSpPr>
-          <p:cNvPr id="8" name="Text 5"/>
+          <p:cNvPr id="9" name="Text 6"/>
           <p:cNvSpPr/>
           <p:nvPr/>
         </p:nvSpPr>
@@ -8092,7 +8217,7 @@
       </p:sp>
       <p:sp>
         <p:nvSpPr>
-          <p:cNvPr id="9" name="Shape 6"/>
+          <p:cNvPr id="10" name="Shape 7"/>
           <p:cNvSpPr/>
           <p:nvPr/>
         </p:nvSpPr>
@@ -8119,7 +8244,7 @@
       </p:sp>
       <p:sp>
         <p:nvSpPr>
-          <p:cNvPr id="10" name="Text 7"/>
+          <p:cNvPr id="11" name="Text 8"/>
           <p:cNvSpPr/>
           <p:nvPr/>
         </p:nvSpPr>
@@ -8158,7 +8283,7 @@
       </p:sp>
       <p:sp>
         <p:nvSpPr>
-          <p:cNvPr id="11" name="Shape 8"/>
+          <p:cNvPr id="12" name="Shape 9"/>
           <p:cNvSpPr/>
           <p:nvPr/>
         </p:nvSpPr>
@@ -8185,7 +8310,7 @@
       </p:sp>
       <p:sp>
         <p:nvSpPr>
-          <p:cNvPr id="12" name="Text 9"/>
+          <p:cNvPr id="13" name="Text 10"/>
           <p:cNvSpPr/>
           <p:nvPr/>
         </p:nvSpPr>
@@ -8224,7 +8349,7 @@
       </p:sp>
       <p:sp>
         <p:nvSpPr>
-          <p:cNvPr id="13" name="Shape 10"/>
+          <p:cNvPr id="14" name="Shape 11"/>
           <p:cNvSpPr/>
           <p:nvPr/>
         </p:nvSpPr>
@@ -8251,7 +8376,7 @@
       </p:sp>
       <p:sp>
         <p:nvSpPr>
-          <p:cNvPr id="14" name="Text 11"/>
+          <p:cNvPr id="15" name="Text 12"/>
           <p:cNvSpPr/>
           <p:nvPr/>
         </p:nvSpPr>
@@ -8290,7 +8415,7 @@
       </p:sp>
       <p:sp>
         <p:nvSpPr>
-          <p:cNvPr id="15" name="Shape 12"/>
+          <p:cNvPr id="16" name="Shape 13"/>
           <p:cNvSpPr/>
           <p:nvPr/>
         </p:nvSpPr>
@@ -8317,7 +8442,7 @@
       </p:sp>
       <p:sp>
         <p:nvSpPr>
-          <p:cNvPr id="16" name="Text 13"/>
+          <p:cNvPr id="17" name="Text 14"/>
           <p:cNvSpPr/>
           <p:nvPr/>
         </p:nvSpPr>
@@ -8356,7 +8481,7 @@
       </p:sp>
       <p:sp>
         <p:nvSpPr>
-          <p:cNvPr id="17" name="Shape 14"/>
+          <p:cNvPr id="18" name="Shape 15"/>
           <p:cNvSpPr/>
           <p:nvPr/>
         </p:nvSpPr>
@@ -8383,7 +8508,7 @@
       </p:sp>
       <p:sp>
         <p:nvSpPr>
-          <p:cNvPr id="18" name="Text 15"/>
+          <p:cNvPr id="19" name="Text 16"/>
           <p:cNvSpPr/>
           <p:nvPr/>
         </p:nvSpPr>
@@ -8422,7 +8547,7 @@
       </p:sp>
       <p:sp>
         <p:nvSpPr>
-          <p:cNvPr id="19" name="Shape 16"/>
+          <p:cNvPr id="20" name="Shape 17"/>
           <p:cNvSpPr/>
           <p:nvPr/>
         </p:nvSpPr>
@@ -8449,7 +8574,7 @@
       </p:sp>
       <p:sp>
         <p:nvSpPr>
-          <p:cNvPr id="20" name="Text 17"/>
+          <p:cNvPr id="21" name="Text 18"/>
           <p:cNvSpPr/>
           <p:nvPr/>
         </p:nvSpPr>
@@ -8488,7 +8613,7 @@
       </p:sp>
       <p:sp>
         <p:nvSpPr>
-          <p:cNvPr id="21" name="Shape 18"/>
+          <p:cNvPr id="22" name="Shape 19"/>
           <p:cNvSpPr/>
           <p:nvPr/>
         </p:nvSpPr>
@@ -8515,7 +8640,7 @@
       </p:sp>
       <p:sp>
         <p:nvSpPr>
-          <p:cNvPr id="22" name="Text 19"/>
+          <p:cNvPr id="23" name="Text 20"/>
           <p:cNvSpPr/>
           <p:nvPr/>
         </p:nvSpPr>
@@ -8554,7 +8679,7 @@
       </p:sp>
       <p:sp>
         <p:nvSpPr>
-          <p:cNvPr id="23" name="Shape 20"/>
+          <p:cNvPr id="24" name="Shape 21"/>
           <p:cNvSpPr/>
           <p:nvPr/>
         </p:nvSpPr>
@@ -8576,7 +8701,7 @@
       </p:sp>
       <p:sp>
         <p:nvSpPr>
-          <p:cNvPr id="24" name="Text 21"/>
+          <p:cNvPr id="25" name="Text 22"/>
           <p:cNvSpPr/>
           <p:nvPr/>
         </p:nvSpPr>
@@ -8628,7 +8753,7 @@
         </p:nvSpPr>
         <p:spPr>
           <a:xfrm>
-            <a:off x="11368735" y="6437376"/>
+            <a:off x="11368735" y="6327648"/>
             <a:ext cx="365760" cy="274320"/>
           </a:xfrm>
           <a:prstGeom prst="rect">
@@ -8675,13 +8800,6 @@
 <file path=ppt/slides/slide15.xml><?xml version="1.0" encoding="utf-8"?>
 <p:sld xmlns:a="http://schemas.openxmlformats.org/drawingml/2006/main" xmlns:r="http://schemas.openxmlformats.org/officeDocument/2006/relationships" xmlns:p="http://schemas.openxmlformats.org/presentationml/2006/main">
   <p:cSld name="Slide 15">
-    <p:bg>
-      <p:bgPr>
-        <a:solidFill>
-          <a:srgbClr val="FFFFFF"/>
-        </a:solidFill>
-      </p:bgPr>
-    </p:bg>
     <p:spTree>
       <p:nvGrpSpPr>
         <p:cNvPr id="1" name=""/>
@@ -8698,7 +8816,29 @@
       </p:grpSpPr>
       <p:sp>
         <p:nvSpPr>
-          <p:cNvPr id="2" name="Text 0"/>
+          <p:cNvPr id="2" name="Shape 0"/>
+          <p:cNvSpPr/>
+          <p:nvPr/>
+        </p:nvSpPr>
+        <p:spPr>
+          <a:xfrm>
+            <a:off x="231343" y="194767"/>
+            <a:ext cx="11716207" cy="6473952"/>
+          </a:xfrm>
+          <a:prstGeom prst="roundRect">
+            <a:avLst>
+              <a:gd name="adj" fmla="val 3107"/>
+            </a:avLst>
+          </a:prstGeom>
+          <a:solidFill>
+            <a:srgbClr val="FFFFFF"/>
+          </a:solidFill>
+          <a:ln/>
+        </p:spPr>
+      </p:sp>
+      <p:sp>
+        <p:nvSpPr>
+          <p:cNvPr id="3" name="Text 1"/>
           <p:cNvSpPr/>
           <p:nvPr/>
         </p:nvSpPr>
@@ -8737,7 +8877,7 @@
       </p:sp>
       <p:sp>
         <p:nvSpPr>
-          <p:cNvPr id="3" name="Shape 1"/>
+          <p:cNvPr id="4" name="Shape 2"/>
           <p:cNvSpPr/>
           <p:nvPr/>
         </p:nvSpPr>
@@ -8759,7 +8899,7 @@
       </p:sp>
       <p:sp>
         <p:nvSpPr>
-          <p:cNvPr id="4" name="Text 2"/>
+          <p:cNvPr id="5" name="Text 3"/>
           <p:cNvSpPr/>
           <p:nvPr/>
         </p:nvSpPr>
@@ -8798,7 +8938,7 @@
       </p:sp>
       <p:pic>
         <p:nvPicPr>
-          <p:cNvPr id="5" name="Image 0" descr="preencoded.png">    </p:cNvPr>
+          <p:cNvPr id="6" name="Image 0" descr="preencoded.png">    </p:cNvPr>
           <p:cNvPicPr>
             <a:picLocks noChangeAspect="1"/>
           </p:cNvPicPr>
@@ -8812,7 +8952,7 @@
         </p:blipFill>
         <p:spPr>
           <a:xfrm>
-            <a:off x="566928" y="6254496"/>
+            <a:off x="566928" y="6126480"/>
             <a:ext cx="1481328" cy="457200"/>
           </a:xfrm>
           <a:prstGeom prst="rect">
@@ -8822,7 +8962,7 @@
       </p:pic>
       <p:sp>
         <p:nvSpPr>
-          <p:cNvPr id="6" name="Shape 3"/>
+          <p:cNvPr id="7" name="Shape 4"/>
           <p:cNvSpPr/>
           <p:nvPr/>
         </p:nvSpPr>
@@ -8844,7 +8984,7 @@
       </p:sp>
       <p:sp>
         <p:nvSpPr>
-          <p:cNvPr id="7" name="Shape 4"/>
+          <p:cNvPr id="8" name="Shape 5"/>
           <p:cNvSpPr/>
           <p:nvPr/>
         </p:nvSpPr>
@@ -8864,7 +9004,7 @@
       </p:sp>
       <p:sp>
         <p:nvSpPr>
-          <p:cNvPr id="8" name="Text 5"/>
+          <p:cNvPr id="9" name="Text 6"/>
           <p:cNvSpPr/>
           <p:nvPr/>
         </p:nvSpPr>
@@ -8903,7 +9043,7 @@
       </p:sp>
       <p:sp>
         <p:nvSpPr>
-          <p:cNvPr id="9" name="Text 6"/>
+          <p:cNvPr id="10" name="Text 7"/>
           <p:cNvSpPr/>
           <p:nvPr/>
         </p:nvSpPr>
@@ -8942,7 +9082,7 @@
       </p:sp>
       <p:sp>
         <p:nvSpPr>
-          <p:cNvPr id="10" name="Text 7"/>
+          <p:cNvPr id="11" name="Text 8"/>
           <p:cNvSpPr/>
           <p:nvPr/>
         </p:nvSpPr>
@@ -8984,7 +9124,7 @@
       </p:sp>
       <p:sp>
         <p:nvSpPr>
-          <p:cNvPr id="11" name="Shape 8"/>
+          <p:cNvPr id="12" name="Shape 9"/>
           <p:cNvSpPr/>
           <p:nvPr/>
         </p:nvSpPr>
@@ -9006,7 +9146,7 @@
       </p:sp>
       <p:sp>
         <p:nvSpPr>
-          <p:cNvPr id="12" name="Shape 9"/>
+          <p:cNvPr id="13" name="Shape 10"/>
           <p:cNvSpPr/>
           <p:nvPr/>
         </p:nvSpPr>
@@ -9026,7 +9166,7 @@
       </p:sp>
       <p:sp>
         <p:nvSpPr>
-          <p:cNvPr id="13" name="Text 10"/>
+          <p:cNvPr id="14" name="Text 11"/>
           <p:cNvSpPr/>
           <p:nvPr/>
         </p:nvSpPr>
@@ -9065,7 +9205,7 @@
       </p:sp>
       <p:sp>
         <p:nvSpPr>
-          <p:cNvPr id="14" name="Text 11"/>
+          <p:cNvPr id="15" name="Text 12"/>
           <p:cNvSpPr/>
           <p:nvPr/>
         </p:nvSpPr>
@@ -9104,7 +9244,7 @@
       </p:sp>
       <p:sp>
         <p:nvSpPr>
-          <p:cNvPr id="15" name="Text 12"/>
+          <p:cNvPr id="16" name="Text 13"/>
           <p:cNvSpPr/>
           <p:nvPr/>
         </p:nvSpPr>
@@ -9146,7 +9286,7 @@
       </p:sp>
       <p:sp>
         <p:nvSpPr>
-          <p:cNvPr id="16" name="Shape 13"/>
+          <p:cNvPr id="17" name="Shape 14"/>
           <p:cNvSpPr/>
           <p:nvPr/>
         </p:nvSpPr>
@@ -9168,7 +9308,7 @@
       </p:sp>
       <p:sp>
         <p:nvSpPr>
-          <p:cNvPr id="17" name="Shape 14"/>
+          <p:cNvPr id="18" name="Shape 15"/>
           <p:cNvSpPr/>
           <p:nvPr/>
         </p:nvSpPr>
@@ -9188,7 +9328,7 @@
       </p:sp>
       <p:sp>
         <p:nvSpPr>
-          <p:cNvPr id="18" name="Text 15"/>
+          <p:cNvPr id="19" name="Text 16"/>
           <p:cNvSpPr/>
           <p:nvPr/>
         </p:nvSpPr>
@@ -9227,7 +9367,7 @@
       </p:sp>
       <p:sp>
         <p:nvSpPr>
-          <p:cNvPr id="19" name="Text 16"/>
+          <p:cNvPr id="20" name="Text 17"/>
           <p:cNvSpPr/>
           <p:nvPr/>
         </p:nvSpPr>
@@ -9266,7 +9406,7 @@
       </p:sp>
       <p:sp>
         <p:nvSpPr>
-          <p:cNvPr id="20" name="Text 17"/>
+          <p:cNvPr id="21" name="Text 18"/>
           <p:cNvSpPr/>
           <p:nvPr/>
         </p:nvSpPr>
@@ -9308,7 +9448,7 @@
       </p:sp>
       <p:sp>
         <p:nvSpPr>
-          <p:cNvPr id="21" name="Shape 18"/>
+          <p:cNvPr id="22" name="Shape 19"/>
           <p:cNvSpPr/>
           <p:nvPr/>
         </p:nvSpPr>
@@ -9330,7 +9470,7 @@
       </p:sp>
       <p:sp>
         <p:nvSpPr>
-          <p:cNvPr id="22" name="Shape 19"/>
+          <p:cNvPr id="23" name="Shape 20"/>
           <p:cNvSpPr/>
           <p:nvPr/>
         </p:nvSpPr>
@@ -9350,7 +9490,7 @@
       </p:sp>
       <p:sp>
         <p:nvSpPr>
-          <p:cNvPr id="23" name="Text 20"/>
+          <p:cNvPr id="24" name="Text 21"/>
           <p:cNvSpPr/>
           <p:nvPr/>
         </p:nvSpPr>
@@ -9389,7 +9529,7 @@
       </p:sp>
       <p:sp>
         <p:nvSpPr>
-          <p:cNvPr id="24" name="Text 21"/>
+          <p:cNvPr id="25" name="Text 22"/>
           <p:cNvSpPr/>
           <p:nvPr/>
         </p:nvSpPr>
@@ -9428,7 +9568,7 @@
       </p:sp>
       <p:sp>
         <p:nvSpPr>
-          <p:cNvPr id="25" name="Text 22"/>
+          <p:cNvPr id="26" name="Text 23"/>
           <p:cNvSpPr/>
           <p:nvPr/>
         </p:nvSpPr>
@@ -9470,7 +9610,7 @@
       </p:sp>
       <p:sp>
         <p:nvSpPr>
-          <p:cNvPr id="26" name="Shape 23"/>
+          <p:cNvPr id="27" name="Shape 24"/>
           <p:cNvSpPr/>
           <p:nvPr/>
         </p:nvSpPr>
@@ -9492,7 +9632,7 @@
       </p:sp>
       <p:sp>
         <p:nvSpPr>
-          <p:cNvPr id="27" name="Text 24"/>
+          <p:cNvPr id="28" name="Text 25"/>
           <p:cNvSpPr/>
           <p:nvPr/>
         </p:nvSpPr>
@@ -9531,7 +9671,7 @@
       </p:sp>
       <p:sp>
         <p:nvSpPr>
-          <p:cNvPr id="28" name="Text 25"/>
+          <p:cNvPr id="29" name="Text 26"/>
           <p:cNvSpPr/>
           <p:nvPr/>
         </p:nvSpPr>
@@ -9583,7 +9723,7 @@
         </p:nvSpPr>
         <p:spPr>
           <a:xfrm>
-            <a:off x="11368735" y="6437376"/>
+            <a:off x="11368735" y="6327648"/>
             <a:ext cx="365760" cy="274320"/>
           </a:xfrm>
           <a:prstGeom prst="rect">
@@ -9630,13 +9770,6 @@
 <file path=ppt/slides/slide16.xml><?xml version="1.0" encoding="utf-8"?>
 <p:sld xmlns:a="http://schemas.openxmlformats.org/drawingml/2006/main" xmlns:r="http://schemas.openxmlformats.org/officeDocument/2006/relationships" xmlns:p="http://schemas.openxmlformats.org/presentationml/2006/main">
   <p:cSld name="Slide 16">
-    <p:bg>
-      <p:bgPr>
-        <a:solidFill>
-          <a:srgbClr val="FFFFFF"/>
-        </a:solidFill>
-      </p:bgPr>
-    </p:bg>
     <p:spTree>
       <p:nvGrpSpPr>
         <p:cNvPr id="1" name=""/>
@@ -9653,7 +9786,29 @@
       </p:grpSpPr>
       <p:sp>
         <p:nvSpPr>
-          <p:cNvPr id="2" name="Text 0"/>
+          <p:cNvPr id="2" name="Shape 0"/>
+          <p:cNvSpPr/>
+          <p:nvPr/>
+        </p:nvSpPr>
+        <p:spPr>
+          <a:xfrm>
+            <a:off x="231343" y="194767"/>
+            <a:ext cx="11716207" cy="6473952"/>
+          </a:xfrm>
+          <a:prstGeom prst="roundRect">
+            <a:avLst>
+              <a:gd name="adj" fmla="val 3107"/>
+            </a:avLst>
+          </a:prstGeom>
+          <a:solidFill>
+            <a:srgbClr val="FFFFFF"/>
+          </a:solidFill>
+          <a:ln/>
+        </p:spPr>
+      </p:sp>
+      <p:sp>
+        <p:nvSpPr>
+          <p:cNvPr id="3" name="Text 1"/>
           <p:cNvSpPr/>
           <p:nvPr/>
         </p:nvSpPr>
@@ -9692,7 +9847,7 @@
       </p:sp>
       <p:sp>
         <p:nvSpPr>
-          <p:cNvPr id="3" name="Shape 1"/>
+          <p:cNvPr id="4" name="Shape 2"/>
           <p:cNvSpPr/>
           <p:nvPr/>
         </p:nvSpPr>
@@ -9714,7 +9869,7 @@
       </p:sp>
       <p:sp>
         <p:nvSpPr>
-          <p:cNvPr id="4" name="Text 2"/>
+          <p:cNvPr id="5" name="Text 3"/>
           <p:cNvSpPr/>
           <p:nvPr/>
         </p:nvSpPr>
@@ -9753,7 +9908,7 @@
       </p:sp>
       <p:pic>
         <p:nvPicPr>
-          <p:cNvPr id="5" name="Image 0" descr="preencoded.png">    </p:cNvPr>
+          <p:cNvPr id="6" name="Image 0" descr="preencoded.png">    </p:cNvPr>
           <p:cNvPicPr>
             <a:picLocks noChangeAspect="1"/>
           </p:cNvPicPr>
@@ -9767,7 +9922,7 @@
         </p:blipFill>
         <p:spPr>
           <a:xfrm>
-            <a:off x="566928" y="6254496"/>
+            <a:off x="566928" y="6126480"/>
             <a:ext cx="1481328" cy="457200"/>
           </a:xfrm>
           <a:prstGeom prst="rect">
@@ -9777,7 +9932,7 @@
       </p:pic>
       <p:sp>
         <p:nvSpPr>
-          <p:cNvPr id="6" name="Shape 3"/>
+          <p:cNvPr id="7" name="Shape 4"/>
           <p:cNvSpPr/>
           <p:nvPr/>
         </p:nvSpPr>
@@ -9797,7 +9952,7 @@
       </p:sp>
       <p:sp>
         <p:nvSpPr>
-          <p:cNvPr id="7" name="Text 4"/>
+          <p:cNvPr id="8" name="Text 5"/>
           <p:cNvSpPr/>
           <p:nvPr/>
         </p:nvSpPr>
@@ -9836,7 +9991,7 @@
       </p:sp>
       <p:sp>
         <p:nvSpPr>
-          <p:cNvPr id="8" name="Text 5"/>
+          <p:cNvPr id="9" name="Text 6"/>
           <p:cNvSpPr/>
           <p:nvPr/>
         </p:nvSpPr>
@@ -9889,7 +10044,7 @@
       </p:sp>
       <p:sp>
         <p:nvSpPr>
-          <p:cNvPr id="9" name="Shape 6"/>
+          <p:cNvPr id="10" name="Shape 7"/>
           <p:cNvSpPr/>
           <p:nvPr/>
         </p:nvSpPr>
@@ -9909,7 +10064,7 @@
       </p:sp>
       <p:sp>
         <p:nvSpPr>
-          <p:cNvPr id="10" name="Text 7"/>
+          <p:cNvPr id="11" name="Text 8"/>
           <p:cNvSpPr/>
           <p:nvPr/>
         </p:nvSpPr>
@@ -9948,7 +10103,7 @@
       </p:sp>
       <p:sp>
         <p:nvSpPr>
-          <p:cNvPr id="11" name="Text 8"/>
+          <p:cNvPr id="12" name="Text 9"/>
           <p:cNvSpPr/>
           <p:nvPr/>
         </p:nvSpPr>
@@ -10001,7 +10156,7 @@
       </p:sp>
       <p:sp>
         <p:nvSpPr>
-          <p:cNvPr id="12" name="Shape 9"/>
+          <p:cNvPr id="13" name="Shape 10"/>
           <p:cNvSpPr/>
           <p:nvPr/>
         </p:nvSpPr>
@@ -10021,7 +10176,7 @@
       </p:sp>
       <p:sp>
         <p:nvSpPr>
-          <p:cNvPr id="13" name="Text 10"/>
+          <p:cNvPr id="14" name="Text 11"/>
           <p:cNvSpPr/>
           <p:nvPr/>
         </p:nvSpPr>
@@ -10060,7 +10215,7 @@
       </p:sp>
       <p:sp>
         <p:nvSpPr>
-          <p:cNvPr id="14" name="Text 11"/>
+          <p:cNvPr id="15" name="Text 12"/>
           <p:cNvSpPr/>
           <p:nvPr/>
         </p:nvSpPr>
@@ -10113,7 +10268,7 @@
       </p:sp>
       <p:sp>
         <p:nvSpPr>
-          <p:cNvPr id="15" name="Shape 12"/>
+          <p:cNvPr id="16" name="Shape 13"/>
           <p:cNvSpPr/>
           <p:nvPr/>
         </p:nvSpPr>
@@ -10133,7 +10288,7 @@
       </p:sp>
       <p:sp>
         <p:nvSpPr>
-          <p:cNvPr id="16" name="Text 13"/>
+          <p:cNvPr id="17" name="Text 14"/>
           <p:cNvSpPr/>
           <p:nvPr/>
         </p:nvSpPr>
@@ -10172,7 +10327,7 @@
       </p:sp>
       <p:sp>
         <p:nvSpPr>
-          <p:cNvPr id="17" name="Text 14"/>
+          <p:cNvPr id="18" name="Text 15"/>
           <p:cNvSpPr/>
           <p:nvPr/>
         </p:nvSpPr>
@@ -10225,7 +10380,7 @@
       </p:sp>
       <p:sp>
         <p:nvSpPr>
-          <p:cNvPr id="18" name="Shape 15"/>
+          <p:cNvPr id="19" name="Shape 16"/>
           <p:cNvSpPr/>
           <p:nvPr/>
         </p:nvSpPr>
@@ -10245,7 +10400,7 @@
       </p:sp>
       <p:sp>
         <p:nvSpPr>
-          <p:cNvPr id="19" name="Text 16"/>
+          <p:cNvPr id="20" name="Text 17"/>
           <p:cNvSpPr/>
           <p:nvPr/>
         </p:nvSpPr>
@@ -10284,7 +10439,7 @@
       </p:sp>
       <p:sp>
         <p:nvSpPr>
-          <p:cNvPr id="20" name="Text 17"/>
+          <p:cNvPr id="21" name="Text 18"/>
           <p:cNvSpPr/>
           <p:nvPr/>
         </p:nvSpPr>
@@ -10347,7 +10502,7 @@
         </p:nvSpPr>
         <p:spPr>
           <a:xfrm>
-            <a:off x="11368735" y="6437376"/>
+            <a:off x="11368735" y="6327648"/>
             <a:ext cx="365760" cy="274320"/>
           </a:xfrm>
           <a:prstGeom prst="rect">
@@ -10394,13 +10549,6 @@
 <file path=ppt/slides/slide17.xml><?xml version="1.0" encoding="utf-8"?>
 <p:sld xmlns:a="http://schemas.openxmlformats.org/drawingml/2006/main" xmlns:r="http://schemas.openxmlformats.org/officeDocument/2006/relationships" xmlns:p="http://schemas.openxmlformats.org/presentationml/2006/main">
   <p:cSld name="Slide 17">
-    <p:bg>
-      <p:bgPr>
-        <a:solidFill>
-          <a:srgbClr val="FFFFFF"/>
-        </a:solidFill>
-      </p:bgPr>
-    </p:bg>
     <p:spTree>
       <p:nvGrpSpPr>
         <p:cNvPr id="1" name=""/>
@@ -10417,7 +10565,29 @@
       </p:grpSpPr>
       <p:sp>
         <p:nvSpPr>
-          <p:cNvPr id="2" name="Text 0"/>
+          <p:cNvPr id="2" name="Shape 0"/>
+          <p:cNvSpPr/>
+          <p:nvPr/>
+        </p:nvSpPr>
+        <p:spPr>
+          <a:xfrm>
+            <a:off x="231343" y="194767"/>
+            <a:ext cx="11716207" cy="6473952"/>
+          </a:xfrm>
+          <a:prstGeom prst="roundRect">
+            <a:avLst>
+              <a:gd name="adj" fmla="val 3107"/>
+            </a:avLst>
+          </a:prstGeom>
+          <a:solidFill>
+            <a:srgbClr val="FFFFFF"/>
+          </a:solidFill>
+          <a:ln/>
+        </p:spPr>
+      </p:sp>
+      <p:sp>
+        <p:nvSpPr>
+          <p:cNvPr id="3" name="Text 1"/>
           <p:cNvSpPr/>
           <p:nvPr/>
         </p:nvSpPr>
@@ -10456,7 +10626,7 @@
       </p:sp>
       <p:sp>
         <p:nvSpPr>
-          <p:cNvPr id="3" name="Shape 1"/>
+          <p:cNvPr id="4" name="Shape 2"/>
           <p:cNvSpPr/>
           <p:nvPr/>
         </p:nvSpPr>
@@ -10478,7 +10648,7 @@
       </p:sp>
       <p:sp>
         <p:nvSpPr>
-          <p:cNvPr id="4" name="Text 2"/>
+          <p:cNvPr id="5" name="Text 3"/>
           <p:cNvSpPr/>
           <p:nvPr/>
         </p:nvSpPr>
@@ -10517,7 +10687,7 @@
       </p:sp>
       <p:pic>
         <p:nvPicPr>
-          <p:cNvPr id="5" name="Image 0" descr="preencoded.png">    </p:cNvPr>
+          <p:cNvPr id="6" name="Image 0" descr="preencoded.png">    </p:cNvPr>
           <p:cNvPicPr>
             <a:picLocks noChangeAspect="1"/>
           </p:cNvPicPr>
@@ -10531,7 +10701,7 @@
         </p:blipFill>
         <p:spPr>
           <a:xfrm>
-            <a:off x="566928" y="6254496"/>
+            <a:off x="566928" y="6126480"/>
             <a:ext cx="1481328" cy="457200"/>
           </a:xfrm>
           <a:prstGeom prst="rect">
@@ -10541,7 +10711,7 @@
       </p:pic>
       <p:sp>
         <p:nvSpPr>
-          <p:cNvPr id="6" name="Shape 3"/>
+          <p:cNvPr id="7" name="Shape 4"/>
           <p:cNvSpPr/>
           <p:nvPr/>
         </p:nvSpPr>
@@ -10563,7 +10733,7 @@
       </p:sp>
       <p:sp>
         <p:nvSpPr>
-          <p:cNvPr id="7" name="Text 4"/>
+          <p:cNvPr id="8" name="Text 5"/>
           <p:cNvSpPr/>
           <p:nvPr/>
         </p:nvSpPr>
@@ -10602,7 +10772,7 @@
       </p:sp>
       <p:sp>
         <p:nvSpPr>
-          <p:cNvPr id="8" name="Text 5"/>
+          <p:cNvPr id="9" name="Text 6"/>
           <p:cNvSpPr/>
           <p:nvPr/>
         </p:nvSpPr>
@@ -10644,7 +10814,7 @@
       </p:sp>
       <p:sp>
         <p:nvSpPr>
-          <p:cNvPr id="9" name="Shape 6"/>
+          <p:cNvPr id="10" name="Shape 7"/>
           <p:cNvSpPr/>
           <p:nvPr/>
         </p:nvSpPr>
@@ -10666,7 +10836,7 @@
       </p:sp>
       <p:sp>
         <p:nvSpPr>
-          <p:cNvPr id="10" name="Text 7"/>
+          <p:cNvPr id="11" name="Text 8"/>
           <p:cNvSpPr/>
           <p:nvPr/>
         </p:nvSpPr>
@@ -10705,7 +10875,7 @@
       </p:sp>
       <p:sp>
         <p:nvSpPr>
-          <p:cNvPr id="11" name="Text 8"/>
+          <p:cNvPr id="12" name="Text 9"/>
           <p:cNvSpPr/>
           <p:nvPr/>
         </p:nvSpPr>
@@ -10747,7 +10917,7 @@
       </p:sp>
       <p:sp>
         <p:nvSpPr>
-          <p:cNvPr id="12" name="Shape 9"/>
+          <p:cNvPr id="13" name="Shape 10"/>
           <p:cNvSpPr/>
           <p:nvPr/>
         </p:nvSpPr>
@@ -10774,7 +10944,7 @@
       </p:sp>
       <p:sp>
         <p:nvSpPr>
-          <p:cNvPr id="13" name="Text 10"/>
+          <p:cNvPr id="14" name="Text 11"/>
           <p:cNvSpPr/>
           <p:nvPr/>
         </p:nvSpPr>
@@ -10813,7 +10983,7 @@
       </p:sp>
       <p:sp>
         <p:nvSpPr>
-          <p:cNvPr id="14" name="Text 11"/>
+          <p:cNvPr id="15" name="Text 12"/>
           <p:cNvSpPr/>
           <p:nvPr/>
         </p:nvSpPr>
@@ -10855,7 +11025,7 @@
       </p:sp>
       <p:sp>
         <p:nvSpPr>
-          <p:cNvPr id="15" name="Shape 12"/>
+          <p:cNvPr id="16" name="Shape 13"/>
           <p:cNvSpPr/>
           <p:nvPr/>
         </p:nvSpPr>
@@ -10882,7 +11052,7 @@
       </p:sp>
       <p:sp>
         <p:nvSpPr>
-          <p:cNvPr id="16" name="Text 13"/>
+          <p:cNvPr id="17" name="Text 14"/>
           <p:cNvSpPr/>
           <p:nvPr/>
         </p:nvSpPr>
@@ -10934,7 +11104,7 @@
         </p:nvSpPr>
         <p:spPr>
           <a:xfrm>
-            <a:off x="11368735" y="6437376"/>
+            <a:off x="11368735" y="6327648"/>
             <a:ext cx="365760" cy="274320"/>
           </a:xfrm>
           <a:prstGeom prst="rect">
@@ -10981,13 +11151,6 @@
 <file path=ppt/slides/slide18.xml><?xml version="1.0" encoding="utf-8"?>
 <p:sld xmlns:a="http://schemas.openxmlformats.org/drawingml/2006/main" xmlns:r="http://schemas.openxmlformats.org/officeDocument/2006/relationships" xmlns:p="http://schemas.openxmlformats.org/presentationml/2006/main">
   <p:cSld name="Slide 18">
-    <p:bg>
-      <p:bgPr>
-        <a:solidFill>
-          <a:srgbClr val="FFFFFF"/>
-        </a:solidFill>
-      </p:bgPr>
-    </p:bg>
     <p:spTree>
       <p:nvGrpSpPr>
         <p:cNvPr id="1" name=""/>
@@ -11004,7 +11167,29 @@
       </p:grpSpPr>
       <p:sp>
         <p:nvSpPr>
-          <p:cNvPr id="2" name="Text 0"/>
+          <p:cNvPr id="2" name="Shape 0"/>
+          <p:cNvSpPr/>
+          <p:nvPr/>
+        </p:nvSpPr>
+        <p:spPr>
+          <a:xfrm>
+            <a:off x="231343" y="194767"/>
+            <a:ext cx="11716207" cy="6473952"/>
+          </a:xfrm>
+          <a:prstGeom prst="roundRect">
+            <a:avLst>
+              <a:gd name="adj" fmla="val 3107"/>
+            </a:avLst>
+          </a:prstGeom>
+          <a:solidFill>
+            <a:srgbClr val="FFFFFF"/>
+          </a:solidFill>
+          <a:ln/>
+        </p:spPr>
+      </p:sp>
+      <p:sp>
+        <p:nvSpPr>
+          <p:cNvPr id="3" name="Text 1"/>
           <p:cNvSpPr/>
           <p:nvPr/>
         </p:nvSpPr>
@@ -11043,7 +11228,7 @@
       </p:sp>
       <p:sp>
         <p:nvSpPr>
-          <p:cNvPr id="3" name="Shape 1"/>
+          <p:cNvPr id="4" name="Shape 2"/>
           <p:cNvSpPr/>
           <p:nvPr/>
         </p:nvSpPr>
@@ -11065,7 +11250,7 @@
       </p:sp>
       <p:sp>
         <p:nvSpPr>
-          <p:cNvPr id="4" name="Text 2"/>
+          <p:cNvPr id="5" name="Text 3"/>
           <p:cNvSpPr/>
           <p:nvPr/>
         </p:nvSpPr>
@@ -11104,7 +11289,7 @@
       </p:sp>
       <p:pic>
         <p:nvPicPr>
-          <p:cNvPr id="5" name="Image 0" descr="preencoded.png">    </p:cNvPr>
+          <p:cNvPr id="6" name="Image 0" descr="preencoded.png">    </p:cNvPr>
           <p:cNvPicPr>
             <a:picLocks noChangeAspect="1"/>
           </p:cNvPicPr>
@@ -11118,7 +11303,7 @@
         </p:blipFill>
         <p:spPr>
           <a:xfrm>
-            <a:off x="566928" y="6254496"/>
+            <a:off x="566928" y="6126480"/>
             <a:ext cx="1481328" cy="457200"/>
           </a:xfrm>
           <a:prstGeom prst="rect">
@@ -11128,7 +11313,7 @@
       </p:pic>
       <p:sp>
         <p:nvSpPr>
-          <p:cNvPr id="6" name="Shape 3"/>
+          <p:cNvPr id="7" name="Shape 4"/>
           <p:cNvSpPr/>
           <p:nvPr/>
         </p:nvSpPr>
@@ -11155,7 +11340,7 @@
       </p:sp>
       <p:sp>
         <p:nvSpPr>
-          <p:cNvPr id="7" name="Shape 4"/>
+          <p:cNvPr id="8" name="Shape 5"/>
           <p:cNvSpPr/>
           <p:nvPr/>
         </p:nvSpPr>
@@ -11182,7 +11367,7 @@
       </p:sp>
       <p:sp>
         <p:nvSpPr>
-          <p:cNvPr id="8" name="Shape 5"/>
+          <p:cNvPr id="9" name="Shape 6"/>
           <p:cNvSpPr/>
           <p:nvPr/>
         </p:nvSpPr>
@@ -11202,7 +11387,7 @@
       </p:sp>
       <p:sp>
         <p:nvSpPr>
-          <p:cNvPr id="9" name="Shape 6"/>
+          <p:cNvPr id="10" name="Shape 7"/>
           <p:cNvSpPr/>
           <p:nvPr/>
         </p:nvSpPr>
@@ -11222,7 +11407,7 @@
       </p:sp>
       <p:sp>
         <p:nvSpPr>
-          <p:cNvPr id="10" name="Text 7"/>
+          <p:cNvPr id="11" name="Text 8"/>
           <p:cNvSpPr/>
           <p:nvPr/>
         </p:nvSpPr>
@@ -11261,7 +11446,7 @@
       </p:sp>
       <p:sp>
         <p:nvSpPr>
-          <p:cNvPr id="11" name="Shape 8"/>
+          <p:cNvPr id="12" name="Shape 9"/>
           <p:cNvSpPr/>
           <p:nvPr/>
         </p:nvSpPr>
@@ -11288,7 +11473,7 @@
       </p:sp>
       <p:sp>
         <p:nvSpPr>
-          <p:cNvPr id="12" name="Shape 9"/>
+          <p:cNvPr id="13" name="Shape 10"/>
           <p:cNvSpPr/>
           <p:nvPr/>
         </p:nvSpPr>
@@ -11308,7 +11493,7 @@
       </p:sp>
       <p:sp>
         <p:nvSpPr>
-          <p:cNvPr id="13" name="Shape 10"/>
+          <p:cNvPr id="14" name="Shape 11"/>
           <p:cNvSpPr/>
           <p:nvPr/>
         </p:nvSpPr>
@@ -11328,7 +11513,7 @@
       </p:sp>
       <p:sp>
         <p:nvSpPr>
-          <p:cNvPr id="14" name="Text 11"/>
+          <p:cNvPr id="15" name="Text 12"/>
           <p:cNvSpPr/>
           <p:nvPr/>
         </p:nvSpPr>
@@ -11367,7 +11552,7 @@
       </p:sp>
       <p:sp>
         <p:nvSpPr>
-          <p:cNvPr id="15" name="Shape 12"/>
+          <p:cNvPr id="16" name="Shape 13"/>
           <p:cNvSpPr/>
           <p:nvPr/>
         </p:nvSpPr>
@@ -11394,7 +11579,7 @@
       </p:sp>
       <p:sp>
         <p:nvSpPr>
-          <p:cNvPr id="16" name="Shape 13"/>
+          <p:cNvPr id="17" name="Shape 14"/>
           <p:cNvSpPr/>
           <p:nvPr/>
         </p:nvSpPr>
@@ -11414,7 +11599,7 @@
       </p:sp>
       <p:sp>
         <p:nvSpPr>
-          <p:cNvPr id="17" name="Shape 14"/>
+          <p:cNvPr id="18" name="Shape 15"/>
           <p:cNvSpPr/>
           <p:nvPr/>
         </p:nvSpPr>
@@ -11434,7 +11619,7 @@
       </p:sp>
       <p:sp>
         <p:nvSpPr>
-          <p:cNvPr id="18" name="Text 15"/>
+          <p:cNvPr id="19" name="Text 16"/>
           <p:cNvSpPr/>
           <p:nvPr/>
         </p:nvSpPr>
@@ -11473,7 +11658,7 @@
       </p:sp>
       <p:sp>
         <p:nvSpPr>
-          <p:cNvPr id="19" name="Shape 16"/>
+          <p:cNvPr id="20" name="Shape 17"/>
           <p:cNvSpPr/>
           <p:nvPr/>
         </p:nvSpPr>
@@ -11500,7 +11685,7 @@
       </p:sp>
       <p:sp>
         <p:nvSpPr>
-          <p:cNvPr id="20" name="Shape 17"/>
+          <p:cNvPr id="21" name="Shape 18"/>
           <p:cNvSpPr/>
           <p:nvPr/>
         </p:nvSpPr>
@@ -11520,7 +11705,7 @@
       </p:sp>
       <p:sp>
         <p:nvSpPr>
-          <p:cNvPr id="21" name="Shape 18"/>
+          <p:cNvPr id="22" name="Shape 19"/>
           <p:cNvSpPr/>
           <p:nvPr/>
         </p:nvSpPr>
@@ -11540,7 +11725,7 @@
       </p:sp>
       <p:sp>
         <p:nvSpPr>
-          <p:cNvPr id="22" name="Text 19"/>
+          <p:cNvPr id="23" name="Text 20"/>
           <p:cNvSpPr/>
           <p:nvPr/>
         </p:nvSpPr>
@@ -11579,7 +11764,7 @@
       </p:sp>
       <p:sp>
         <p:nvSpPr>
-          <p:cNvPr id="23" name="Text 20"/>
+          <p:cNvPr id="24" name="Text 21"/>
           <p:cNvSpPr/>
           <p:nvPr/>
         </p:nvSpPr>
@@ -11628,7 +11813,7 @@
         </p:nvSpPr>
         <p:spPr>
           <a:xfrm>
-            <a:off x="11368735" y="6437376"/>
+            <a:off x="11368735" y="6327648"/>
             <a:ext cx="365760" cy="274320"/>
           </a:xfrm>
           <a:prstGeom prst="rect">
@@ -11675,13 +11860,6 @@
 <file path=ppt/slides/slide19.xml><?xml version="1.0" encoding="utf-8"?>
 <p:sld xmlns:a="http://schemas.openxmlformats.org/drawingml/2006/main" xmlns:r="http://schemas.openxmlformats.org/officeDocument/2006/relationships" xmlns:p="http://schemas.openxmlformats.org/presentationml/2006/main">
   <p:cSld name="Slide 19">
-    <p:bg>
-      <p:bgPr>
-        <a:solidFill>
-          <a:srgbClr val="FFFFFF"/>
-        </a:solidFill>
-      </p:bgPr>
-    </p:bg>
     <p:spTree>
       <p:nvGrpSpPr>
         <p:cNvPr id="1" name=""/>
@@ -11698,7 +11876,29 @@
       </p:grpSpPr>
       <p:sp>
         <p:nvSpPr>
-          <p:cNvPr id="2" name="Text 0"/>
+          <p:cNvPr id="2" name="Shape 0"/>
+          <p:cNvSpPr/>
+          <p:nvPr/>
+        </p:nvSpPr>
+        <p:spPr>
+          <a:xfrm>
+            <a:off x="231343" y="194767"/>
+            <a:ext cx="11716207" cy="6473952"/>
+          </a:xfrm>
+          <a:prstGeom prst="roundRect">
+            <a:avLst>
+              <a:gd name="adj" fmla="val 3107"/>
+            </a:avLst>
+          </a:prstGeom>
+          <a:solidFill>
+            <a:srgbClr val="FFFFFF"/>
+          </a:solidFill>
+          <a:ln/>
+        </p:spPr>
+      </p:sp>
+      <p:sp>
+        <p:nvSpPr>
+          <p:cNvPr id="3" name="Text 1"/>
           <p:cNvSpPr/>
           <p:nvPr/>
         </p:nvSpPr>
@@ -11737,7 +11937,7 @@
       </p:sp>
       <p:sp>
         <p:nvSpPr>
-          <p:cNvPr id="3" name="Shape 1"/>
+          <p:cNvPr id="4" name="Shape 2"/>
           <p:cNvSpPr/>
           <p:nvPr/>
         </p:nvSpPr>
@@ -11759,7 +11959,7 @@
       </p:sp>
       <p:sp>
         <p:nvSpPr>
-          <p:cNvPr id="4" name="Text 2"/>
+          <p:cNvPr id="5" name="Text 3"/>
           <p:cNvSpPr/>
           <p:nvPr/>
         </p:nvSpPr>
@@ -11798,7 +11998,7 @@
       </p:sp>
       <p:pic>
         <p:nvPicPr>
-          <p:cNvPr id="5" name="Image 0" descr="preencoded.png">    </p:cNvPr>
+          <p:cNvPr id="6" name="Image 0" descr="preencoded.png">    </p:cNvPr>
           <p:cNvPicPr>
             <a:picLocks noChangeAspect="1"/>
           </p:cNvPicPr>
@@ -11812,7 +12012,7 @@
         </p:blipFill>
         <p:spPr>
           <a:xfrm>
-            <a:off x="566928" y="6254496"/>
+            <a:off x="566928" y="6126480"/>
             <a:ext cx="1481328" cy="457200"/>
           </a:xfrm>
           <a:prstGeom prst="rect">
@@ -11822,7 +12022,7 @@
       </p:pic>
       <p:sp>
         <p:nvSpPr>
-          <p:cNvPr id="6" name="Shape 3"/>
+          <p:cNvPr id="7" name="Shape 4"/>
           <p:cNvSpPr/>
           <p:nvPr/>
         </p:nvSpPr>
@@ -11849,7 +12049,7 @@
       </p:sp>
       <p:sp>
         <p:nvSpPr>
-          <p:cNvPr id="7" name="Shape 4"/>
+          <p:cNvPr id="8" name="Shape 5"/>
           <p:cNvSpPr/>
           <p:nvPr/>
         </p:nvSpPr>
@@ -11869,7 +12069,7 @@
       </p:sp>
       <p:sp>
         <p:nvSpPr>
-          <p:cNvPr id="8" name="Shape 5"/>
+          <p:cNvPr id="9" name="Shape 6"/>
           <p:cNvSpPr/>
           <p:nvPr/>
         </p:nvSpPr>
@@ -11889,7 +12089,7 @@
       </p:sp>
       <p:sp>
         <p:nvSpPr>
-          <p:cNvPr id="9" name="Shape 6"/>
+          <p:cNvPr id="10" name="Shape 7"/>
           <p:cNvSpPr/>
           <p:nvPr/>
         </p:nvSpPr>
@@ -11909,7 +12109,7 @@
       </p:sp>
       <p:sp>
         <p:nvSpPr>
-          <p:cNvPr id="10" name="Text 7"/>
+          <p:cNvPr id="11" name="Text 8"/>
           <p:cNvSpPr/>
           <p:nvPr/>
         </p:nvSpPr>
@@ -11962,7 +12162,7 @@
       </p:sp>
       <p:sp>
         <p:nvSpPr>
-          <p:cNvPr id="11" name="Shape 8"/>
+          <p:cNvPr id="12" name="Shape 9"/>
           <p:cNvSpPr/>
           <p:nvPr/>
         </p:nvSpPr>
@@ -11989,7 +12189,7 @@
       </p:sp>
       <p:sp>
         <p:nvSpPr>
-          <p:cNvPr id="12" name="Shape 9"/>
+          <p:cNvPr id="13" name="Shape 10"/>
           <p:cNvSpPr/>
           <p:nvPr/>
         </p:nvSpPr>
@@ -12009,7 +12209,7 @@
       </p:sp>
       <p:sp>
         <p:nvSpPr>
-          <p:cNvPr id="13" name="Shape 10"/>
+          <p:cNvPr id="14" name="Shape 11"/>
           <p:cNvSpPr/>
           <p:nvPr/>
         </p:nvSpPr>
@@ -12029,7 +12229,7 @@
       </p:sp>
       <p:sp>
         <p:nvSpPr>
-          <p:cNvPr id="14" name="Shape 11"/>
+          <p:cNvPr id="15" name="Shape 12"/>
           <p:cNvSpPr/>
           <p:nvPr/>
         </p:nvSpPr>
@@ -12049,7 +12249,7 @@
       </p:sp>
       <p:sp>
         <p:nvSpPr>
-          <p:cNvPr id="15" name="Text 12"/>
+          <p:cNvPr id="16" name="Text 13"/>
           <p:cNvSpPr/>
           <p:nvPr/>
         </p:nvSpPr>
@@ -12102,7 +12302,7 @@
       </p:sp>
       <p:sp>
         <p:nvSpPr>
-          <p:cNvPr id="16" name="Shape 13"/>
+          <p:cNvPr id="17" name="Shape 14"/>
           <p:cNvSpPr/>
           <p:nvPr/>
         </p:nvSpPr>
@@ -12129,7 +12329,7 @@
       </p:sp>
       <p:sp>
         <p:nvSpPr>
-          <p:cNvPr id="17" name="Shape 14"/>
+          <p:cNvPr id="18" name="Shape 15"/>
           <p:cNvSpPr/>
           <p:nvPr/>
         </p:nvSpPr>
@@ -12149,7 +12349,7 @@
       </p:sp>
       <p:sp>
         <p:nvSpPr>
-          <p:cNvPr id="18" name="Shape 15"/>
+          <p:cNvPr id="19" name="Shape 16"/>
           <p:cNvSpPr/>
           <p:nvPr/>
         </p:nvSpPr>
@@ -12169,7 +12369,7 @@
       </p:sp>
       <p:sp>
         <p:nvSpPr>
-          <p:cNvPr id="19" name="Shape 16"/>
+          <p:cNvPr id="20" name="Shape 17"/>
           <p:cNvSpPr/>
           <p:nvPr/>
         </p:nvSpPr>
@@ -12189,7 +12389,7 @@
       </p:sp>
       <p:sp>
         <p:nvSpPr>
-          <p:cNvPr id="20" name="Text 17"/>
+          <p:cNvPr id="21" name="Text 18"/>
           <p:cNvSpPr/>
           <p:nvPr/>
         </p:nvSpPr>
@@ -12242,7 +12442,7 @@
       </p:sp>
       <p:sp>
         <p:nvSpPr>
-          <p:cNvPr id="21" name="Shape 18"/>
+          <p:cNvPr id="22" name="Shape 19"/>
           <p:cNvSpPr/>
           <p:nvPr/>
         </p:nvSpPr>
@@ -12269,7 +12469,7 @@
       </p:sp>
       <p:sp>
         <p:nvSpPr>
-          <p:cNvPr id="22" name="Shape 19"/>
+          <p:cNvPr id="23" name="Shape 20"/>
           <p:cNvSpPr/>
           <p:nvPr/>
         </p:nvSpPr>
@@ -12289,7 +12489,7 @@
       </p:sp>
       <p:sp>
         <p:nvSpPr>
-          <p:cNvPr id="23" name="Shape 20"/>
+          <p:cNvPr id="24" name="Shape 21"/>
           <p:cNvSpPr/>
           <p:nvPr/>
         </p:nvSpPr>
@@ -12309,7 +12509,7 @@
       </p:sp>
       <p:sp>
         <p:nvSpPr>
-          <p:cNvPr id="24" name="Shape 21"/>
+          <p:cNvPr id="25" name="Shape 22"/>
           <p:cNvSpPr/>
           <p:nvPr/>
         </p:nvSpPr>
@@ -12329,7 +12529,7 @@
       </p:sp>
       <p:sp>
         <p:nvSpPr>
-          <p:cNvPr id="25" name="Text 22"/>
+          <p:cNvPr id="26" name="Text 23"/>
           <p:cNvSpPr/>
           <p:nvPr/>
         </p:nvSpPr>
@@ -12392,7 +12592,7 @@
         </p:nvSpPr>
         <p:spPr>
           <a:xfrm>
-            <a:off x="11368735" y="6437376"/>
+            <a:off x="11368735" y="6327648"/>
             <a:ext cx="365760" cy="274320"/>
           </a:xfrm>
           <a:prstGeom prst="rect">
@@ -12439,13 +12639,6 @@
 <file path=ppt/slides/slide2.xml><?xml version="1.0" encoding="utf-8"?>
 <p:sld xmlns:a="http://schemas.openxmlformats.org/drawingml/2006/main" xmlns:r="http://schemas.openxmlformats.org/officeDocument/2006/relationships" xmlns:p="http://schemas.openxmlformats.org/presentationml/2006/main">
   <p:cSld name="Slide 2">
-    <p:bg>
-      <p:bgPr>
-        <a:solidFill>
-          <a:srgbClr val="FFFFFF"/>
-        </a:solidFill>
-      </p:bgPr>
-    </p:bg>
     <p:spTree>
       <p:nvGrpSpPr>
         <p:cNvPr id="1" name=""/>
@@ -12462,7 +12655,29 @@
       </p:grpSpPr>
       <p:sp>
         <p:nvSpPr>
-          <p:cNvPr id="2" name="Text 0"/>
+          <p:cNvPr id="2" name="Shape 0"/>
+          <p:cNvSpPr/>
+          <p:nvPr/>
+        </p:nvSpPr>
+        <p:spPr>
+          <a:xfrm>
+            <a:off x="231343" y="194767"/>
+            <a:ext cx="11716207" cy="6473952"/>
+          </a:xfrm>
+          <a:prstGeom prst="roundRect">
+            <a:avLst>
+              <a:gd name="adj" fmla="val 3107"/>
+            </a:avLst>
+          </a:prstGeom>
+          <a:solidFill>
+            <a:srgbClr val="FFFFFF"/>
+          </a:solidFill>
+          <a:ln/>
+        </p:spPr>
+      </p:sp>
+      <p:sp>
+        <p:nvSpPr>
+          <p:cNvPr id="3" name="Text 1"/>
           <p:cNvSpPr/>
           <p:nvPr/>
         </p:nvSpPr>
@@ -12501,7 +12716,7 @@
       </p:sp>
       <p:sp>
         <p:nvSpPr>
-          <p:cNvPr id="3" name="Text 1"/>
+          <p:cNvPr id="4" name="Text 2"/>
           <p:cNvSpPr/>
           <p:nvPr/>
         </p:nvSpPr>
@@ -12543,7 +12758,7 @@
       </p:sp>
       <p:sp>
         <p:nvSpPr>
-          <p:cNvPr id="4" name="Shape 2"/>
+          <p:cNvPr id="5" name="Shape 3"/>
           <p:cNvSpPr/>
           <p:nvPr/>
         </p:nvSpPr>
@@ -12565,7 +12780,7 @@
       </p:sp>
       <p:sp>
         <p:nvSpPr>
-          <p:cNvPr id="5" name="Text 3"/>
+          <p:cNvPr id="6" name="Text 4"/>
           <p:cNvSpPr/>
           <p:nvPr/>
         </p:nvSpPr>
@@ -12604,7 +12819,7 @@
       </p:sp>
       <p:pic>
         <p:nvPicPr>
-          <p:cNvPr id="6" name="Image 0" descr="preencoded.png">    </p:cNvPr>
+          <p:cNvPr id="7" name="Image 0" descr="preencoded.png">    </p:cNvPr>
           <p:cNvPicPr>
             <a:picLocks noChangeAspect="1"/>
           </p:cNvPicPr>
@@ -12618,7 +12833,7 @@
         </p:blipFill>
         <p:spPr>
           <a:xfrm>
-            <a:off x="566928" y="6254496"/>
+            <a:off x="566928" y="6126480"/>
             <a:ext cx="1481328" cy="457200"/>
           </a:xfrm>
           <a:prstGeom prst="rect">
@@ -12628,7 +12843,7 @@
       </p:pic>
       <p:sp>
         <p:nvSpPr>
-          <p:cNvPr id="7" name="Shape 4"/>
+          <p:cNvPr id="8" name="Shape 5"/>
           <p:cNvSpPr/>
           <p:nvPr/>
         </p:nvSpPr>
@@ -12655,7 +12870,7 @@
       </p:sp>
       <p:sp>
         <p:nvSpPr>
-          <p:cNvPr id="8" name="Shape 5"/>
+          <p:cNvPr id="9" name="Shape 6"/>
           <p:cNvSpPr/>
           <p:nvPr/>
         </p:nvSpPr>
@@ -12675,7 +12890,7 @@
       </p:sp>
       <p:sp>
         <p:nvSpPr>
-          <p:cNvPr id="9" name="Text 6"/>
+          <p:cNvPr id="10" name="Text 7"/>
           <p:cNvSpPr/>
           <p:nvPr/>
         </p:nvSpPr>
@@ -12714,7 +12929,7 @@
       </p:sp>
       <p:sp>
         <p:nvSpPr>
-          <p:cNvPr id="10" name="Text 7"/>
+          <p:cNvPr id="11" name="Text 8"/>
           <p:cNvSpPr/>
           <p:nvPr/>
         </p:nvSpPr>
@@ -12753,7 +12968,7 @@
       </p:sp>
       <p:sp>
         <p:nvSpPr>
-          <p:cNvPr id="11" name="Text 8"/>
+          <p:cNvPr id="12" name="Text 9"/>
           <p:cNvSpPr/>
           <p:nvPr/>
         </p:nvSpPr>
@@ -12795,7 +13010,7 @@
       </p:sp>
       <p:sp>
         <p:nvSpPr>
-          <p:cNvPr id="12" name="Shape 9"/>
+          <p:cNvPr id="13" name="Shape 10"/>
           <p:cNvSpPr/>
           <p:nvPr/>
         </p:nvSpPr>
@@ -12822,7 +13037,7 @@
       </p:sp>
       <p:sp>
         <p:nvSpPr>
-          <p:cNvPr id="13" name="Shape 10"/>
+          <p:cNvPr id="14" name="Shape 11"/>
           <p:cNvSpPr/>
           <p:nvPr/>
         </p:nvSpPr>
@@ -12842,7 +13057,7 @@
       </p:sp>
       <p:sp>
         <p:nvSpPr>
-          <p:cNvPr id="14" name="Text 11"/>
+          <p:cNvPr id="15" name="Text 12"/>
           <p:cNvSpPr/>
           <p:nvPr/>
         </p:nvSpPr>
@@ -12881,7 +13096,7 @@
       </p:sp>
       <p:sp>
         <p:nvSpPr>
-          <p:cNvPr id="15" name="Text 12"/>
+          <p:cNvPr id="16" name="Text 13"/>
           <p:cNvSpPr/>
           <p:nvPr/>
         </p:nvSpPr>
@@ -12920,7 +13135,7 @@
       </p:sp>
       <p:sp>
         <p:nvSpPr>
-          <p:cNvPr id="16" name="Text 13"/>
+          <p:cNvPr id="17" name="Text 14"/>
           <p:cNvSpPr/>
           <p:nvPr/>
         </p:nvSpPr>
@@ -12962,7 +13177,7 @@
       </p:sp>
       <p:sp>
         <p:nvSpPr>
-          <p:cNvPr id="17" name="Shape 14"/>
+          <p:cNvPr id="18" name="Shape 15"/>
           <p:cNvSpPr/>
           <p:nvPr/>
         </p:nvSpPr>
@@ -12989,7 +13204,7 @@
       </p:sp>
       <p:sp>
         <p:nvSpPr>
-          <p:cNvPr id="18" name="Shape 15"/>
+          <p:cNvPr id="19" name="Shape 16"/>
           <p:cNvSpPr/>
           <p:nvPr/>
         </p:nvSpPr>
@@ -13009,7 +13224,7 @@
       </p:sp>
       <p:sp>
         <p:nvSpPr>
-          <p:cNvPr id="19" name="Text 16"/>
+          <p:cNvPr id="20" name="Text 17"/>
           <p:cNvSpPr/>
           <p:nvPr/>
         </p:nvSpPr>
@@ -13048,7 +13263,7 @@
       </p:sp>
       <p:sp>
         <p:nvSpPr>
-          <p:cNvPr id="20" name="Text 17"/>
+          <p:cNvPr id="21" name="Text 18"/>
           <p:cNvSpPr/>
           <p:nvPr/>
         </p:nvSpPr>
@@ -13087,7 +13302,7 @@
       </p:sp>
       <p:sp>
         <p:nvSpPr>
-          <p:cNvPr id="21" name="Text 18"/>
+          <p:cNvPr id="22" name="Text 19"/>
           <p:cNvSpPr/>
           <p:nvPr/>
         </p:nvSpPr>
@@ -13129,7 +13344,7 @@
       </p:sp>
       <p:sp>
         <p:nvSpPr>
-          <p:cNvPr id="22" name="Shape 19"/>
+          <p:cNvPr id="23" name="Shape 20"/>
           <p:cNvSpPr/>
           <p:nvPr/>
         </p:nvSpPr>
@@ -13156,7 +13371,7 @@
       </p:sp>
       <p:sp>
         <p:nvSpPr>
-          <p:cNvPr id="23" name="Shape 20"/>
+          <p:cNvPr id="24" name="Shape 21"/>
           <p:cNvSpPr/>
           <p:nvPr/>
         </p:nvSpPr>
@@ -13176,7 +13391,7 @@
       </p:sp>
       <p:sp>
         <p:nvSpPr>
-          <p:cNvPr id="24" name="Text 21"/>
+          <p:cNvPr id="25" name="Text 22"/>
           <p:cNvSpPr/>
           <p:nvPr/>
         </p:nvSpPr>
@@ -13215,7 +13430,7 @@
       </p:sp>
       <p:sp>
         <p:nvSpPr>
-          <p:cNvPr id="25" name="Text 22"/>
+          <p:cNvPr id="26" name="Text 23"/>
           <p:cNvSpPr/>
           <p:nvPr/>
         </p:nvSpPr>
@@ -13254,7 +13469,7 @@
       </p:sp>
       <p:sp>
         <p:nvSpPr>
-          <p:cNvPr id="26" name="Text 23"/>
+          <p:cNvPr id="27" name="Text 24"/>
           <p:cNvSpPr/>
           <p:nvPr/>
         </p:nvSpPr>
@@ -13296,7 +13511,7 @@
       </p:sp>
       <p:sp>
         <p:nvSpPr>
-          <p:cNvPr id="27" name="Shape 24"/>
+          <p:cNvPr id="28" name="Shape 25"/>
           <p:cNvSpPr/>
           <p:nvPr/>
         </p:nvSpPr>
@@ -13323,7 +13538,7 @@
       </p:sp>
       <p:sp>
         <p:nvSpPr>
-          <p:cNvPr id="28" name="Shape 25"/>
+          <p:cNvPr id="29" name="Shape 26"/>
           <p:cNvSpPr/>
           <p:nvPr/>
         </p:nvSpPr>
@@ -13343,7 +13558,7 @@
       </p:sp>
       <p:sp>
         <p:nvSpPr>
-          <p:cNvPr id="29" name="Text 26"/>
+          <p:cNvPr id="30" name="Text 27"/>
           <p:cNvSpPr/>
           <p:nvPr/>
         </p:nvSpPr>
@@ -13382,7 +13597,7 @@
       </p:sp>
       <p:sp>
         <p:nvSpPr>
-          <p:cNvPr id="30" name="Text 27"/>
+          <p:cNvPr id="31" name="Text 28"/>
           <p:cNvSpPr/>
           <p:nvPr/>
         </p:nvSpPr>
@@ -13421,7 +13636,7 @@
       </p:sp>
       <p:sp>
         <p:nvSpPr>
-          <p:cNvPr id="31" name="Text 28"/>
+          <p:cNvPr id="32" name="Text 29"/>
           <p:cNvSpPr/>
           <p:nvPr/>
         </p:nvSpPr>
@@ -13473,7 +13688,7 @@
         </p:nvSpPr>
         <p:spPr>
           <a:xfrm>
-            <a:off x="11368735" y="6437376"/>
+            <a:off x="11368735" y="6327648"/>
             <a:ext cx="365760" cy="274320"/>
           </a:xfrm>
           <a:prstGeom prst="rect">
@@ -13520,13 +13735,6 @@
 <file path=ppt/slides/slide20.xml><?xml version="1.0" encoding="utf-8"?>
 <p:sld xmlns:a="http://schemas.openxmlformats.org/drawingml/2006/main" xmlns:r="http://schemas.openxmlformats.org/officeDocument/2006/relationships" xmlns:p="http://schemas.openxmlformats.org/presentationml/2006/main">
   <p:cSld name="Slide 20">
-    <p:bg>
-      <p:bgPr>
-        <a:solidFill>
-          <a:srgbClr val="FFFFFF"/>
-        </a:solidFill>
-      </p:bgPr>
-    </p:bg>
     <p:spTree>
       <p:nvGrpSpPr>
         <p:cNvPr id="1" name=""/>
@@ -13543,7 +13751,29 @@
       </p:grpSpPr>
       <p:sp>
         <p:nvSpPr>
-          <p:cNvPr id="2" name="Text 0"/>
+          <p:cNvPr id="2" name="Shape 0"/>
+          <p:cNvSpPr/>
+          <p:nvPr/>
+        </p:nvSpPr>
+        <p:spPr>
+          <a:xfrm>
+            <a:off x="231343" y="194767"/>
+            <a:ext cx="11716207" cy="6473952"/>
+          </a:xfrm>
+          <a:prstGeom prst="roundRect">
+            <a:avLst>
+              <a:gd name="adj" fmla="val 3107"/>
+            </a:avLst>
+          </a:prstGeom>
+          <a:solidFill>
+            <a:srgbClr val="FFFFFF"/>
+          </a:solidFill>
+          <a:ln/>
+        </p:spPr>
+      </p:sp>
+      <p:sp>
+        <p:nvSpPr>
+          <p:cNvPr id="3" name="Text 1"/>
           <p:cNvSpPr/>
           <p:nvPr/>
         </p:nvSpPr>
@@ -13582,7 +13812,7 @@
       </p:sp>
       <p:sp>
         <p:nvSpPr>
-          <p:cNvPr id="3" name="Shape 1"/>
+          <p:cNvPr id="4" name="Shape 2"/>
           <p:cNvSpPr/>
           <p:nvPr/>
         </p:nvSpPr>
@@ -13604,7 +13834,7 @@
       </p:sp>
       <p:sp>
         <p:nvSpPr>
-          <p:cNvPr id="4" name="Text 2"/>
+          <p:cNvPr id="5" name="Text 3"/>
           <p:cNvSpPr/>
           <p:nvPr/>
         </p:nvSpPr>
@@ -13643,7 +13873,7 @@
       </p:sp>
       <p:pic>
         <p:nvPicPr>
-          <p:cNvPr id="5" name="Image 0" descr="preencoded.png">    </p:cNvPr>
+          <p:cNvPr id="6" name="Image 0" descr="preencoded.png">    </p:cNvPr>
           <p:cNvPicPr>
             <a:picLocks noChangeAspect="1"/>
           </p:cNvPicPr>
@@ -13657,7 +13887,7 @@
         </p:blipFill>
         <p:spPr>
           <a:xfrm>
-            <a:off x="566928" y="6254496"/>
+            <a:off x="566928" y="6126480"/>
             <a:ext cx="1481328" cy="457200"/>
           </a:xfrm>
           <a:prstGeom prst="rect">
@@ -13667,7 +13897,7 @@
       </p:pic>
       <p:sp>
         <p:nvSpPr>
-          <p:cNvPr id="6" name="Shape 3"/>
+          <p:cNvPr id="7" name="Shape 4"/>
           <p:cNvSpPr/>
           <p:nvPr/>
         </p:nvSpPr>
@@ -13694,7 +13924,7 @@
       </p:sp>
       <p:sp>
         <p:nvSpPr>
-          <p:cNvPr id="7" name="Text 4"/>
+          <p:cNvPr id="8" name="Text 5"/>
           <p:cNvSpPr/>
           <p:nvPr/>
         </p:nvSpPr>
@@ -13733,7 +13963,7 @@
       </p:sp>
       <p:sp>
         <p:nvSpPr>
-          <p:cNvPr id="8" name="Text 5"/>
+          <p:cNvPr id="9" name="Text 6"/>
           <p:cNvSpPr/>
           <p:nvPr/>
         </p:nvSpPr>
@@ -13772,7 +14002,7 @@
       </p:sp>
       <p:sp>
         <p:nvSpPr>
-          <p:cNvPr id="9" name="Text 6"/>
+          <p:cNvPr id="10" name="Text 7"/>
           <p:cNvSpPr/>
           <p:nvPr/>
         </p:nvSpPr>
@@ -13811,7 +14041,7 @@
       </p:sp>
       <p:sp>
         <p:nvSpPr>
-          <p:cNvPr id="10" name="Text 7"/>
+          <p:cNvPr id="11" name="Text 8"/>
           <p:cNvSpPr/>
           <p:nvPr/>
         </p:nvSpPr>
@@ -13864,7 +14094,7 @@
       </p:sp>
       <p:sp>
         <p:nvSpPr>
-          <p:cNvPr id="11" name="Text 8"/>
+          <p:cNvPr id="12" name="Text 9"/>
           <p:cNvSpPr/>
           <p:nvPr/>
         </p:nvSpPr>
@@ -13917,7 +14147,7 @@
       </p:sp>
       <p:sp>
         <p:nvSpPr>
-          <p:cNvPr id="12" name="Text 9"/>
+          <p:cNvPr id="13" name="Text 10"/>
           <p:cNvSpPr/>
           <p:nvPr/>
         </p:nvSpPr>
@@ -13970,7 +14200,7 @@
       </p:sp>
       <p:sp>
         <p:nvSpPr>
-          <p:cNvPr id="13" name="Text 10"/>
+          <p:cNvPr id="14" name="Text 11"/>
           <p:cNvSpPr/>
           <p:nvPr/>
         </p:nvSpPr>
@@ -14023,7 +14253,7 @@
       </p:sp>
       <p:sp>
         <p:nvSpPr>
-          <p:cNvPr id="14" name="Shape 11"/>
+          <p:cNvPr id="15" name="Shape 12"/>
           <p:cNvSpPr/>
           <p:nvPr/>
         </p:nvSpPr>
@@ -14045,7 +14275,7 @@
       </p:sp>
       <p:sp>
         <p:nvSpPr>
-          <p:cNvPr id="15" name="Text 12"/>
+          <p:cNvPr id="16" name="Text 13"/>
           <p:cNvSpPr/>
           <p:nvPr/>
         </p:nvSpPr>
@@ -14084,7 +14314,7 @@
       </p:sp>
       <p:sp>
         <p:nvSpPr>
-          <p:cNvPr id="16" name="Text 13"/>
+          <p:cNvPr id="17" name="Text 14"/>
           <p:cNvSpPr/>
           <p:nvPr/>
         </p:nvSpPr>
@@ -14156,7 +14386,7 @@
         </p:nvSpPr>
         <p:spPr>
           <a:xfrm>
-            <a:off x="11368735" y="6437376"/>
+            <a:off x="11368735" y="6327648"/>
             <a:ext cx="365760" cy="274320"/>
           </a:xfrm>
           <a:prstGeom prst="rect">
@@ -14203,13 +14433,6 @@
 <file path=ppt/slides/slide21.xml><?xml version="1.0" encoding="utf-8"?>
 <p:sld xmlns:a="http://schemas.openxmlformats.org/drawingml/2006/main" xmlns:r="http://schemas.openxmlformats.org/officeDocument/2006/relationships" xmlns:p="http://schemas.openxmlformats.org/presentationml/2006/main">
   <p:cSld name="Slide 21">
-    <p:bg>
-      <p:bgPr>
-        <a:solidFill>
-          <a:srgbClr val="1B0942"/>
-        </a:solidFill>
-      </p:bgPr>
-    </p:bg>
     <p:spTree>
       <p:nvGrpSpPr>
         <p:cNvPr id="1" name=""/>
@@ -14726,13 +14949,6 @@
 <file path=ppt/slides/slide3.xml><?xml version="1.0" encoding="utf-8"?>
 <p:sld xmlns:a="http://schemas.openxmlformats.org/drawingml/2006/main" xmlns:r="http://schemas.openxmlformats.org/officeDocument/2006/relationships" xmlns:p="http://schemas.openxmlformats.org/presentationml/2006/main">
   <p:cSld name="Slide 3">
-    <p:bg>
-      <p:bgPr>
-        <a:solidFill>
-          <a:srgbClr val="FFFFFF"/>
-        </a:solidFill>
-      </p:bgPr>
-    </p:bg>
     <p:spTree>
       <p:nvGrpSpPr>
         <p:cNvPr id="1" name=""/>
@@ -14749,7 +14965,29 @@
       </p:grpSpPr>
       <p:sp>
         <p:nvSpPr>
-          <p:cNvPr id="2" name="Text 0"/>
+          <p:cNvPr id="2" name="Shape 0"/>
+          <p:cNvSpPr/>
+          <p:nvPr/>
+        </p:nvSpPr>
+        <p:spPr>
+          <a:xfrm>
+            <a:off x="231343" y="194767"/>
+            <a:ext cx="11716207" cy="6473952"/>
+          </a:xfrm>
+          <a:prstGeom prst="roundRect">
+            <a:avLst>
+              <a:gd name="adj" fmla="val 3107"/>
+            </a:avLst>
+          </a:prstGeom>
+          <a:solidFill>
+            <a:srgbClr val="FFFFFF"/>
+          </a:solidFill>
+          <a:ln/>
+        </p:spPr>
+      </p:sp>
+      <p:sp>
+        <p:nvSpPr>
+          <p:cNvPr id="3" name="Text 1"/>
           <p:cNvSpPr/>
           <p:nvPr/>
         </p:nvSpPr>
@@ -14788,7 +15026,7 @@
       </p:sp>
       <p:sp>
         <p:nvSpPr>
-          <p:cNvPr id="3" name="Shape 1"/>
+          <p:cNvPr id="4" name="Shape 2"/>
           <p:cNvSpPr/>
           <p:nvPr/>
         </p:nvSpPr>
@@ -14810,7 +15048,7 @@
       </p:sp>
       <p:sp>
         <p:nvSpPr>
-          <p:cNvPr id="4" name="Text 2"/>
+          <p:cNvPr id="5" name="Text 3"/>
           <p:cNvSpPr/>
           <p:nvPr/>
         </p:nvSpPr>
@@ -14849,7 +15087,7 @@
       </p:sp>
       <p:pic>
         <p:nvPicPr>
-          <p:cNvPr id="5" name="Image 0" descr="preencoded.png">    </p:cNvPr>
+          <p:cNvPr id="6" name="Image 0" descr="preencoded.png">    </p:cNvPr>
           <p:cNvPicPr>
             <a:picLocks noChangeAspect="1"/>
           </p:cNvPicPr>
@@ -14863,7 +15101,7 @@
         </p:blipFill>
         <p:spPr>
           <a:xfrm>
-            <a:off x="566928" y="6254496"/>
+            <a:off x="566928" y="6126480"/>
             <a:ext cx="1481328" cy="457200"/>
           </a:xfrm>
           <a:prstGeom prst="rect">
@@ -14873,7 +15111,7 @@
       </p:pic>
       <p:sp>
         <p:nvSpPr>
-          <p:cNvPr id="6" name="Shape 3"/>
+          <p:cNvPr id="7" name="Shape 4"/>
           <p:cNvSpPr/>
           <p:nvPr/>
         </p:nvSpPr>
@@ -14900,7 +15138,7 @@
       </p:sp>
       <p:sp>
         <p:nvSpPr>
-          <p:cNvPr id="7" name="Shape 4"/>
+          <p:cNvPr id="8" name="Shape 5"/>
           <p:cNvSpPr/>
           <p:nvPr/>
         </p:nvSpPr>
@@ -14920,7 +15158,7 @@
       </p:sp>
       <p:sp>
         <p:nvSpPr>
-          <p:cNvPr id="8" name="Text 5"/>
+          <p:cNvPr id="9" name="Text 6"/>
           <p:cNvSpPr/>
           <p:nvPr/>
         </p:nvSpPr>
@@ -14959,7 +15197,7 @@
       </p:sp>
       <p:sp>
         <p:nvSpPr>
-          <p:cNvPr id="9" name="Text 6"/>
+          <p:cNvPr id="10" name="Text 7"/>
           <p:cNvSpPr/>
           <p:nvPr/>
         </p:nvSpPr>
@@ -14998,7 +15236,7 @@
       </p:sp>
       <p:sp>
         <p:nvSpPr>
-          <p:cNvPr id="10" name="Shape 7"/>
+          <p:cNvPr id="11" name="Shape 8"/>
           <p:cNvSpPr/>
           <p:nvPr/>
         </p:nvSpPr>
@@ -15025,7 +15263,7 @@
       </p:sp>
       <p:sp>
         <p:nvSpPr>
-          <p:cNvPr id="11" name="Shape 8"/>
+          <p:cNvPr id="12" name="Shape 9"/>
           <p:cNvSpPr/>
           <p:nvPr/>
         </p:nvSpPr>
@@ -15045,7 +15283,7 @@
       </p:sp>
       <p:sp>
         <p:nvSpPr>
-          <p:cNvPr id="12" name="Text 9"/>
+          <p:cNvPr id="13" name="Text 10"/>
           <p:cNvSpPr/>
           <p:nvPr/>
         </p:nvSpPr>
@@ -15084,7 +15322,7 @@
       </p:sp>
       <p:sp>
         <p:nvSpPr>
-          <p:cNvPr id="13" name="Text 10"/>
+          <p:cNvPr id="14" name="Text 11"/>
           <p:cNvSpPr/>
           <p:nvPr/>
         </p:nvSpPr>
@@ -15123,7 +15361,7 @@
       </p:sp>
       <p:sp>
         <p:nvSpPr>
-          <p:cNvPr id="14" name="Shape 11"/>
+          <p:cNvPr id="15" name="Shape 12"/>
           <p:cNvSpPr/>
           <p:nvPr/>
         </p:nvSpPr>
@@ -15150,7 +15388,7 @@
       </p:sp>
       <p:sp>
         <p:nvSpPr>
-          <p:cNvPr id="15" name="Shape 12"/>
+          <p:cNvPr id="16" name="Shape 13"/>
           <p:cNvSpPr/>
           <p:nvPr/>
         </p:nvSpPr>
@@ -15170,7 +15408,7 @@
       </p:sp>
       <p:sp>
         <p:nvSpPr>
-          <p:cNvPr id="16" name="Text 13"/>
+          <p:cNvPr id="17" name="Text 14"/>
           <p:cNvSpPr/>
           <p:nvPr/>
         </p:nvSpPr>
@@ -15209,7 +15447,7 @@
       </p:sp>
       <p:sp>
         <p:nvSpPr>
-          <p:cNvPr id="17" name="Text 14"/>
+          <p:cNvPr id="18" name="Text 15"/>
           <p:cNvSpPr/>
           <p:nvPr/>
         </p:nvSpPr>
@@ -15248,7 +15486,7 @@
       </p:sp>
       <p:sp>
         <p:nvSpPr>
-          <p:cNvPr id="18" name="Shape 15"/>
+          <p:cNvPr id="19" name="Shape 16"/>
           <p:cNvSpPr/>
           <p:nvPr/>
         </p:nvSpPr>
@@ -15275,7 +15513,7 @@
       </p:sp>
       <p:sp>
         <p:nvSpPr>
-          <p:cNvPr id="19" name="Shape 16"/>
+          <p:cNvPr id="20" name="Shape 17"/>
           <p:cNvSpPr/>
           <p:nvPr/>
         </p:nvSpPr>
@@ -15295,7 +15533,7 @@
       </p:sp>
       <p:sp>
         <p:nvSpPr>
-          <p:cNvPr id="20" name="Text 17"/>
+          <p:cNvPr id="21" name="Text 18"/>
           <p:cNvSpPr/>
           <p:nvPr/>
         </p:nvSpPr>
@@ -15334,7 +15572,7 @@
       </p:sp>
       <p:sp>
         <p:nvSpPr>
-          <p:cNvPr id="21" name="Text 18"/>
+          <p:cNvPr id="22" name="Text 19"/>
           <p:cNvSpPr/>
           <p:nvPr/>
         </p:nvSpPr>
@@ -15373,7 +15611,7 @@
       </p:sp>
       <p:sp>
         <p:nvSpPr>
-          <p:cNvPr id="22" name="Shape 19"/>
+          <p:cNvPr id="23" name="Shape 20"/>
           <p:cNvSpPr/>
           <p:nvPr/>
         </p:nvSpPr>
@@ -15400,7 +15638,7 @@
       </p:sp>
       <p:sp>
         <p:nvSpPr>
-          <p:cNvPr id="23" name="Shape 20"/>
+          <p:cNvPr id="24" name="Shape 21"/>
           <p:cNvSpPr/>
           <p:nvPr/>
         </p:nvSpPr>
@@ -15420,7 +15658,7 @@
       </p:sp>
       <p:sp>
         <p:nvSpPr>
-          <p:cNvPr id="24" name="Text 21"/>
+          <p:cNvPr id="25" name="Text 22"/>
           <p:cNvSpPr/>
           <p:nvPr/>
         </p:nvSpPr>
@@ -15459,7 +15697,7 @@
       </p:sp>
       <p:sp>
         <p:nvSpPr>
-          <p:cNvPr id="25" name="Text 22"/>
+          <p:cNvPr id="26" name="Text 23"/>
           <p:cNvSpPr/>
           <p:nvPr/>
         </p:nvSpPr>
@@ -15498,7 +15736,7 @@
       </p:sp>
       <p:sp>
         <p:nvSpPr>
-          <p:cNvPr id="26" name="Shape 23"/>
+          <p:cNvPr id="27" name="Shape 24"/>
           <p:cNvSpPr/>
           <p:nvPr/>
         </p:nvSpPr>
@@ -15525,7 +15763,7 @@
       </p:sp>
       <p:sp>
         <p:nvSpPr>
-          <p:cNvPr id="27" name="Shape 24"/>
+          <p:cNvPr id="28" name="Shape 25"/>
           <p:cNvSpPr/>
           <p:nvPr/>
         </p:nvSpPr>
@@ -15545,7 +15783,7 @@
       </p:sp>
       <p:sp>
         <p:nvSpPr>
-          <p:cNvPr id="28" name="Text 25"/>
+          <p:cNvPr id="29" name="Text 26"/>
           <p:cNvSpPr/>
           <p:nvPr/>
         </p:nvSpPr>
@@ -15584,7 +15822,7 @@
       </p:sp>
       <p:sp>
         <p:nvSpPr>
-          <p:cNvPr id="29" name="Text 26"/>
+          <p:cNvPr id="30" name="Text 27"/>
           <p:cNvSpPr/>
           <p:nvPr/>
         </p:nvSpPr>
@@ -15623,7 +15861,7 @@
       </p:sp>
       <p:sp>
         <p:nvSpPr>
-          <p:cNvPr id="30" name="Shape 27"/>
+          <p:cNvPr id="31" name="Shape 28"/>
           <p:cNvSpPr/>
           <p:nvPr/>
         </p:nvSpPr>
@@ -15645,7 +15883,7 @@
       </p:sp>
       <p:sp>
         <p:nvSpPr>
-          <p:cNvPr id="31" name="Shape 28"/>
+          <p:cNvPr id="32" name="Shape 29"/>
           <p:cNvSpPr/>
           <p:nvPr/>
         </p:nvSpPr>
@@ -15665,7 +15903,7 @@
       </p:sp>
       <p:sp>
         <p:nvSpPr>
-          <p:cNvPr id="32" name="Text 29"/>
+          <p:cNvPr id="33" name="Text 30"/>
           <p:cNvSpPr/>
           <p:nvPr/>
         </p:nvSpPr>
@@ -15704,7 +15942,7 @@
       </p:sp>
       <p:sp>
         <p:nvSpPr>
-          <p:cNvPr id="33" name="Text 30"/>
+          <p:cNvPr id="34" name="Text 31"/>
           <p:cNvSpPr/>
           <p:nvPr/>
         </p:nvSpPr>
@@ -15743,7 +15981,7 @@
       </p:sp>
       <p:sp>
         <p:nvSpPr>
-          <p:cNvPr id="34" name="Shape 31"/>
+          <p:cNvPr id="35" name="Shape 32"/>
           <p:cNvSpPr/>
           <p:nvPr/>
         </p:nvSpPr>
@@ -15770,7 +16008,7 @@
       </p:sp>
       <p:sp>
         <p:nvSpPr>
-          <p:cNvPr id="35" name="Shape 32"/>
+          <p:cNvPr id="36" name="Shape 33"/>
           <p:cNvSpPr/>
           <p:nvPr/>
         </p:nvSpPr>
@@ -15790,7 +16028,7 @@
       </p:sp>
       <p:sp>
         <p:nvSpPr>
-          <p:cNvPr id="36" name="Text 33"/>
+          <p:cNvPr id="37" name="Text 34"/>
           <p:cNvSpPr/>
           <p:nvPr/>
         </p:nvSpPr>
@@ -15829,7 +16067,7 @@
       </p:sp>
       <p:sp>
         <p:nvSpPr>
-          <p:cNvPr id="37" name="Text 34"/>
+          <p:cNvPr id="38" name="Text 35"/>
           <p:cNvSpPr/>
           <p:nvPr/>
         </p:nvSpPr>
@@ -15868,7 +16106,7 @@
       </p:sp>
       <p:sp>
         <p:nvSpPr>
-          <p:cNvPr id="38" name="Shape 35"/>
+          <p:cNvPr id="39" name="Shape 36"/>
           <p:cNvSpPr/>
           <p:nvPr/>
         </p:nvSpPr>
@@ -15895,7 +16133,7 @@
       </p:sp>
       <p:sp>
         <p:nvSpPr>
-          <p:cNvPr id="39" name="Shape 36"/>
+          <p:cNvPr id="40" name="Shape 37"/>
           <p:cNvSpPr/>
           <p:nvPr/>
         </p:nvSpPr>
@@ -15915,7 +16153,7 @@
       </p:sp>
       <p:sp>
         <p:nvSpPr>
-          <p:cNvPr id="40" name="Text 37"/>
+          <p:cNvPr id="41" name="Text 38"/>
           <p:cNvSpPr/>
           <p:nvPr/>
         </p:nvSpPr>
@@ -15954,7 +16192,7 @@
       </p:sp>
       <p:sp>
         <p:nvSpPr>
-          <p:cNvPr id="41" name="Text 38"/>
+          <p:cNvPr id="42" name="Text 39"/>
           <p:cNvSpPr/>
           <p:nvPr/>
         </p:nvSpPr>
@@ -15993,7 +16231,7 @@
       </p:sp>
       <p:sp>
         <p:nvSpPr>
-          <p:cNvPr id="42" name="Shape 39"/>
+          <p:cNvPr id="43" name="Shape 40"/>
           <p:cNvSpPr/>
           <p:nvPr/>
         </p:nvSpPr>
@@ -16020,7 +16258,7 @@
       </p:sp>
       <p:sp>
         <p:nvSpPr>
-          <p:cNvPr id="43" name="Shape 40"/>
+          <p:cNvPr id="44" name="Shape 41"/>
           <p:cNvSpPr/>
           <p:nvPr/>
         </p:nvSpPr>
@@ -16040,7 +16278,7 @@
       </p:sp>
       <p:sp>
         <p:nvSpPr>
-          <p:cNvPr id="44" name="Text 41"/>
+          <p:cNvPr id="45" name="Text 42"/>
           <p:cNvSpPr/>
           <p:nvPr/>
         </p:nvSpPr>
@@ -16079,7 +16317,7 @@
       </p:sp>
       <p:sp>
         <p:nvSpPr>
-          <p:cNvPr id="45" name="Text 42"/>
+          <p:cNvPr id="46" name="Text 43"/>
           <p:cNvSpPr/>
           <p:nvPr/>
         </p:nvSpPr>
@@ -16118,7 +16356,7 @@
       </p:sp>
       <p:sp>
         <p:nvSpPr>
-          <p:cNvPr id="46" name="Shape 43"/>
+          <p:cNvPr id="47" name="Shape 44"/>
           <p:cNvSpPr/>
           <p:nvPr/>
         </p:nvSpPr>
@@ -16145,7 +16383,7 @@
       </p:sp>
       <p:sp>
         <p:nvSpPr>
-          <p:cNvPr id="47" name="Shape 44"/>
+          <p:cNvPr id="48" name="Shape 45"/>
           <p:cNvSpPr/>
           <p:nvPr/>
         </p:nvSpPr>
@@ -16165,7 +16403,7 @@
       </p:sp>
       <p:sp>
         <p:nvSpPr>
-          <p:cNvPr id="48" name="Text 45"/>
+          <p:cNvPr id="49" name="Text 46"/>
           <p:cNvSpPr/>
           <p:nvPr/>
         </p:nvSpPr>
@@ -16204,7 +16442,7 @@
       </p:sp>
       <p:sp>
         <p:nvSpPr>
-          <p:cNvPr id="49" name="Text 46"/>
+          <p:cNvPr id="50" name="Text 47"/>
           <p:cNvSpPr/>
           <p:nvPr/>
         </p:nvSpPr>
@@ -16243,7 +16481,7 @@
       </p:sp>
       <p:sp>
         <p:nvSpPr>
-          <p:cNvPr id="50" name="Shape 47"/>
+          <p:cNvPr id="51" name="Shape 48"/>
           <p:cNvSpPr/>
           <p:nvPr/>
         </p:nvSpPr>
@@ -16270,7 +16508,7 @@
       </p:sp>
       <p:sp>
         <p:nvSpPr>
-          <p:cNvPr id="51" name="Shape 48"/>
+          <p:cNvPr id="52" name="Shape 49"/>
           <p:cNvSpPr/>
           <p:nvPr/>
         </p:nvSpPr>
@@ -16290,7 +16528,7 @@
       </p:sp>
       <p:sp>
         <p:nvSpPr>
-          <p:cNvPr id="52" name="Text 49"/>
+          <p:cNvPr id="53" name="Text 50"/>
           <p:cNvSpPr/>
           <p:nvPr/>
         </p:nvSpPr>
@@ -16329,7 +16567,7 @@
       </p:sp>
       <p:sp>
         <p:nvSpPr>
-          <p:cNvPr id="53" name="Text 50"/>
+          <p:cNvPr id="54" name="Text 51"/>
           <p:cNvSpPr/>
           <p:nvPr/>
         </p:nvSpPr>
@@ -16368,7 +16606,7 @@
       </p:sp>
       <p:sp>
         <p:nvSpPr>
-          <p:cNvPr id="54" name="Shape 51"/>
+          <p:cNvPr id="55" name="Shape 52"/>
           <p:cNvSpPr/>
           <p:nvPr/>
         </p:nvSpPr>
@@ -16395,7 +16633,7 @@
       </p:sp>
       <p:sp>
         <p:nvSpPr>
-          <p:cNvPr id="55" name="Text 52"/>
+          <p:cNvPr id="56" name="Text 53"/>
           <p:cNvSpPr/>
           <p:nvPr/>
         </p:nvSpPr>
@@ -16447,7 +16685,7 @@
         </p:nvSpPr>
         <p:spPr>
           <a:xfrm>
-            <a:off x="11368735" y="6437376"/>
+            <a:off x="11368735" y="6327648"/>
             <a:ext cx="365760" cy="274320"/>
           </a:xfrm>
           <a:prstGeom prst="rect">
@@ -16494,13 +16732,6 @@
 <file path=ppt/slides/slide4.xml><?xml version="1.0" encoding="utf-8"?>
 <p:sld xmlns:a="http://schemas.openxmlformats.org/drawingml/2006/main" xmlns:r="http://schemas.openxmlformats.org/officeDocument/2006/relationships" xmlns:p="http://schemas.openxmlformats.org/presentationml/2006/main">
   <p:cSld name="Slide 4">
-    <p:bg>
-      <p:bgPr>
-        <a:solidFill>
-          <a:srgbClr val="FFFFFF"/>
-        </a:solidFill>
-      </p:bgPr>
-    </p:bg>
     <p:spTree>
       <p:nvGrpSpPr>
         <p:cNvPr id="1" name=""/>
@@ -16517,7 +16748,29 @@
       </p:grpSpPr>
       <p:sp>
         <p:nvSpPr>
-          <p:cNvPr id="2" name="Text 0"/>
+          <p:cNvPr id="2" name="Shape 0"/>
+          <p:cNvSpPr/>
+          <p:nvPr/>
+        </p:nvSpPr>
+        <p:spPr>
+          <a:xfrm>
+            <a:off x="231343" y="194767"/>
+            <a:ext cx="11716207" cy="6473952"/>
+          </a:xfrm>
+          <a:prstGeom prst="roundRect">
+            <a:avLst>
+              <a:gd name="adj" fmla="val 3107"/>
+            </a:avLst>
+          </a:prstGeom>
+          <a:solidFill>
+            <a:srgbClr val="FFFFFF"/>
+          </a:solidFill>
+          <a:ln/>
+        </p:spPr>
+      </p:sp>
+      <p:sp>
+        <p:nvSpPr>
+          <p:cNvPr id="3" name="Text 1"/>
           <p:cNvSpPr/>
           <p:nvPr/>
         </p:nvSpPr>
@@ -16556,7 +16809,7 @@
       </p:sp>
       <p:sp>
         <p:nvSpPr>
-          <p:cNvPr id="3" name="Text 1"/>
+          <p:cNvPr id="4" name="Text 2"/>
           <p:cNvSpPr/>
           <p:nvPr/>
         </p:nvSpPr>
@@ -16598,7 +16851,7 @@
       </p:sp>
       <p:sp>
         <p:nvSpPr>
-          <p:cNvPr id="4" name="Shape 2"/>
+          <p:cNvPr id="5" name="Shape 3"/>
           <p:cNvSpPr/>
           <p:nvPr/>
         </p:nvSpPr>
@@ -16620,7 +16873,7 @@
       </p:sp>
       <p:sp>
         <p:nvSpPr>
-          <p:cNvPr id="5" name="Text 3"/>
+          <p:cNvPr id="6" name="Text 4"/>
           <p:cNvSpPr/>
           <p:nvPr/>
         </p:nvSpPr>
@@ -16659,7 +16912,7 @@
       </p:sp>
       <p:pic>
         <p:nvPicPr>
-          <p:cNvPr id="6" name="Image 0" descr="preencoded.png">    </p:cNvPr>
+          <p:cNvPr id="7" name="Image 0" descr="preencoded.png">    </p:cNvPr>
           <p:cNvPicPr>
             <a:picLocks noChangeAspect="1"/>
           </p:cNvPicPr>
@@ -16673,7 +16926,7 @@
         </p:blipFill>
         <p:spPr>
           <a:xfrm>
-            <a:off x="566928" y="6254496"/>
+            <a:off x="566928" y="6126480"/>
             <a:ext cx="1481328" cy="457200"/>
           </a:xfrm>
           <a:prstGeom prst="rect">
@@ -16683,7 +16936,7 @@
       </p:pic>
       <p:sp>
         <p:nvSpPr>
-          <p:cNvPr id="7" name="Shape 4"/>
+          <p:cNvPr id="8" name="Shape 5"/>
           <p:cNvSpPr/>
           <p:nvPr/>
         </p:nvSpPr>
@@ -16710,7 +16963,7 @@
       </p:sp>
       <p:sp>
         <p:nvSpPr>
-          <p:cNvPr id="8" name="Text 5"/>
+          <p:cNvPr id="9" name="Text 6"/>
           <p:cNvSpPr/>
           <p:nvPr/>
         </p:nvSpPr>
@@ -16749,7 +17002,7 @@
       </p:sp>
       <p:sp>
         <p:nvSpPr>
-          <p:cNvPr id="9" name="Text 6"/>
+          <p:cNvPr id="10" name="Text 7"/>
           <p:cNvSpPr/>
           <p:nvPr/>
         </p:nvSpPr>
@@ -16791,7 +17044,7 @@
       </p:sp>
       <p:sp>
         <p:nvSpPr>
-          <p:cNvPr id="10" name="Shape 7"/>
+          <p:cNvPr id="11" name="Shape 8"/>
           <p:cNvSpPr/>
           <p:nvPr/>
         </p:nvSpPr>
@@ -16818,7 +17071,7 @@
       </p:sp>
       <p:sp>
         <p:nvSpPr>
-          <p:cNvPr id="11" name="Text 8"/>
+          <p:cNvPr id="12" name="Text 9"/>
           <p:cNvSpPr/>
           <p:nvPr/>
         </p:nvSpPr>
@@ -16857,7 +17110,7 @@
       </p:sp>
       <p:sp>
         <p:nvSpPr>
-          <p:cNvPr id="12" name="Text 9"/>
+          <p:cNvPr id="13" name="Text 10"/>
           <p:cNvSpPr/>
           <p:nvPr/>
         </p:nvSpPr>
@@ -16899,7 +17152,7 @@
       </p:sp>
       <p:sp>
         <p:nvSpPr>
-          <p:cNvPr id="13" name="Shape 10"/>
+          <p:cNvPr id="14" name="Shape 11"/>
           <p:cNvSpPr/>
           <p:nvPr/>
         </p:nvSpPr>
@@ -16926,7 +17179,7 @@
       </p:sp>
       <p:sp>
         <p:nvSpPr>
-          <p:cNvPr id="14" name="Text 11"/>
+          <p:cNvPr id="15" name="Text 12"/>
           <p:cNvSpPr/>
           <p:nvPr/>
         </p:nvSpPr>
@@ -16965,7 +17218,7 @@
       </p:sp>
       <p:sp>
         <p:nvSpPr>
-          <p:cNvPr id="15" name="Text 12"/>
+          <p:cNvPr id="16" name="Text 13"/>
           <p:cNvSpPr/>
           <p:nvPr/>
         </p:nvSpPr>
@@ -17007,7 +17260,7 @@
       </p:sp>
       <p:sp>
         <p:nvSpPr>
-          <p:cNvPr id="16" name="Shape 13"/>
+          <p:cNvPr id="17" name="Shape 14"/>
           <p:cNvSpPr/>
           <p:nvPr/>
         </p:nvSpPr>
@@ -17034,7 +17287,7 @@
       </p:sp>
       <p:sp>
         <p:nvSpPr>
-          <p:cNvPr id="17" name="Text 14"/>
+          <p:cNvPr id="18" name="Text 15"/>
           <p:cNvSpPr/>
           <p:nvPr/>
         </p:nvSpPr>
@@ -17073,7 +17326,7 @@
       </p:sp>
       <p:sp>
         <p:nvSpPr>
-          <p:cNvPr id="18" name="Text 15"/>
+          <p:cNvPr id="19" name="Text 16"/>
           <p:cNvSpPr/>
           <p:nvPr/>
         </p:nvSpPr>
@@ -17115,7 +17368,7 @@
       </p:sp>
       <p:sp>
         <p:nvSpPr>
-          <p:cNvPr id="19" name="Shape 16"/>
+          <p:cNvPr id="20" name="Shape 17"/>
           <p:cNvSpPr/>
           <p:nvPr/>
         </p:nvSpPr>
@@ -17142,7 +17395,7 @@
       </p:sp>
       <p:sp>
         <p:nvSpPr>
-          <p:cNvPr id="20" name="Text 17"/>
+          <p:cNvPr id="21" name="Text 18"/>
           <p:cNvSpPr/>
           <p:nvPr/>
         </p:nvSpPr>
@@ -17181,7 +17434,7 @@
       </p:sp>
       <p:sp>
         <p:nvSpPr>
-          <p:cNvPr id="21" name="Text 18"/>
+          <p:cNvPr id="22" name="Text 19"/>
           <p:cNvSpPr/>
           <p:nvPr/>
         </p:nvSpPr>
@@ -17223,7 +17476,7 @@
       </p:sp>
       <p:sp>
         <p:nvSpPr>
-          <p:cNvPr id="22" name="Shape 19"/>
+          <p:cNvPr id="23" name="Shape 20"/>
           <p:cNvSpPr/>
           <p:nvPr/>
         </p:nvSpPr>
@@ -17250,7 +17503,7 @@
       </p:sp>
       <p:sp>
         <p:nvSpPr>
-          <p:cNvPr id="23" name="Text 20"/>
+          <p:cNvPr id="24" name="Text 21"/>
           <p:cNvSpPr/>
           <p:nvPr/>
         </p:nvSpPr>
@@ -17289,7 +17542,7 @@
       </p:sp>
       <p:sp>
         <p:nvSpPr>
-          <p:cNvPr id="24" name="Text 21"/>
+          <p:cNvPr id="25" name="Text 22"/>
           <p:cNvSpPr/>
           <p:nvPr/>
         </p:nvSpPr>
@@ -17331,7 +17584,7 @@
       </p:sp>
       <p:sp>
         <p:nvSpPr>
-          <p:cNvPr id="25" name="Shape 22"/>
+          <p:cNvPr id="26" name="Shape 23"/>
           <p:cNvSpPr/>
           <p:nvPr/>
         </p:nvSpPr>
@@ -17358,7 +17611,7 @@
       </p:sp>
       <p:sp>
         <p:nvSpPr>
-          <p:cNvPr id="26" name="Text 23"/>
+          <p:cNvPr id="27" name="Text 24"/>
           <p:cNvSpPr/>
           <p:nvPr/>
         </p:nvSpPr>
@@ -17410,7 +17663,7 @@
         </p:nvSpPr>
         <p:spPr>
           <a:xfrm>
-            <a:off x="11368735" y="6437376"/>
+            <a:off x="11368735" y="6327648"/>
             <a:ext cx="365760" cy="274320"/>
           </a:xfrm>
           <a:prstGeom prst="rect">
@@ -17457,13 +17710,6 @@
 <file path=ppt/slides/slide5.xml><?xml version="1.0" encoding="utf-8"?>
 <p:sld xmlns:a="http://schemas.openxmlformats.org/drawingml/2006/main" xmlns:r="http://schemas.openxmlformats.org/officeDocument/2006/relationships" xmlns:p="http://schemas.openxmlformats.org/presentationml/2006/main">
   <p:cSld name="Slide 5">
-    <p:bg>
-      <p:bgPr>
-        <a:solidFill>
-          <a:srgbClr val="FFFFFF"/>
-        </a:solidFill>
-      </p:bgPr>
-    </p:bg>
     <p:spTree>
       <p:nvGrpSpPr>
         <p:cNvPr id="1" name=""/>
@@ -17480,7 +17726,29 @@
       </p:grpSpPr>
       <p:sp>
         <p:nvSpPr>
-          <p:cNvPr id="2" name="Text 0"/>
+          <p:cNvPr id="2" name="Shape 0"/>
+          <p:cNvSpPr/>
+          <p:nvPr/>
+        </p:nvSpPr>
+        <p:spPr>
+          <a:xfrm>
+            <a:off x="231343" y="194767"/>
+            <a:ext cx="11716207" cy="6473952"/>
+          </a:xfrm>
+          <a:prstGeom prst="roundRect">
+            <a:avLst>
+              <a:gd name="adj" fmla="val 3107"/>
+            </a:avLst>
+          </a:prstGeom>
+          <a:solidFill>
+            <a:srgbClr val="FFFFFF"/>
+          </a:solidFill>
+          <a:ln/>
+        </p:spPr>
+      </p:sp>
+      <p:sp>
+        <p:nvSpPr>
+          <p:cNvPr id="3" name="Text 1"/>
           <p:cNvSpPr/>
           <p:nvPr/>
         </p:nvSpPr>
@@ -17519,7 +17787,7 @@
       </p:sp>
       <p:sp>
         <p:nvSpPr>
-          <p:cNvPr id="3" name="Text 1"/>
+          <p:cNvPr id="4" name="Text 2"/>
           <p:cNvSpPr/>
           <p:nvPr/>
         </p:nvSpPr>
@@ -17558,7 +17826,7 @@
       </p:sp>
       <p:sp>
         <p:nvSpPr>
-          <p:cNvPr id="4" name="Shape 2"/>
+          <p:cNvPr id="5" name="Shape 3"/>
           <p:cNvSpPr/>
           <p:nvPr/>
         </p:nvSpPr>
@@ -17580,7 +17848,7 @@
       </p:sp>
       <p:sp>
         <p:nvSpPr>
-          <p:cNvPr id="5" name="Text 3"/>
+          <p:cNvPr id="6" name="Text 4"/>
           <p:cNvSpPr/>
           <p:nvPr/>
         </p:nvSpPr>
@@ -17619,7 +17887,7 @@
       </p:sp>
       <p:pic>
         <p:nvPicPr>
-          <p:cNvPr id="6" name="Image 0" descr="preencoded.png">    </p:cNvPr>
+          <p:cNvPr id="7" name="Image 0" descr="preencoded.png">    </p:cNvPr>
           <p:cNvPicPr>
             <a:picLocks noChangeAspect="1"/>
           </p:cNvPicPr>
@@ -17633,7 +17901,7 @@
         </p:blipFill>
         <p:spPr>
           <a:xfrm>
-            <a:off x="566928" y="6254496"/>
+            <a:off x="566928" y="6126480"/>
             <a:ext cx="1481328" cy="457200"/>
           </a:xfrm>
           <a:prstGeom prst="rect">
@@ -17643,7 +17911,7 @@
       </p:pic>
       <p:sp>
         <p:nvSpPr>
-          <p:cNvPr id="7" name="Shape 4"/>
+          <p:cNvPr id="8" name="Shape 5"/>
           <p:cNvSpPr/>
           <p:nvPr/>
         </p:nvSpPr>
@@ -17665,7 +17933,7 @@
       </p:sp>
       <p:sp>
         <p:nvSpPr>
-          <p:cNvPr id="8" name="Text 5"/>
+          <p:cNvPr id="9" name="Text 6"/>
           <p:cNvSpPr/>
           <p:nvPr/>
         </p:nvSpPr>
@@ -17704,7 +17972,7 @@
       </p:sp>
       <p:sp>
         <p:nvSpPr>
-          <p:cNvPr id="9" name="Text 6"/>
+          <p:cNvPr id="10" name="Text 7"/>
           <p:cNvSpPr/>
           <p:nvPr/>
         </p:nvSpPr>
@@ -17746,7 +18014,7 @@
       </p:sp>
       <p:sp>
         <p:nvSpPr>
-          <p:cNvPr id="10" name="Shape 7"/>
+          <p:cNvPr id="11" name="Shape 8"/>
           <p:cNvSpPr/>
           <p:nvPr/>
         </p:nvSpPr>
@@ -17768,7 +18036,7 @@
       </p:sp>
       <p:sp>
         <p:nvSpPr>
-          <p:cNvPr id="11" name="Text 8"/>
+          <p:cNvPr id="12" name="Text 9"/>
           <p:cNvSpPr/>
           <p:nvPr/>
         </p:nvSpPr>
@@ -17807,7 +18075,7 @@
       </p:sp>
       <p:sp>
         <p:nvSpPr>
-          <p:cNvPr id="12" name="Text 9"/>
+          <p:cNvPr id="13" name="Text 10"/>
           <p:cNvSpPr/>
           <p:nvPr/>
         </p:nvSpPr>
@@ -17849,7 +18117,7 @@
       </p:sp>
       <p:sp>
         <p:nvSpPr>
-          <p:cNvPr id="13" name="Shape 10"/>
+          <p:cNvPr id="14" name="Shape 11"/>
           <p:cNvSpPr/>
           <p:nvPr/>
         </p:nvSpPr>
@@ -17871,7 +18139,7 @@
       </p:sp>
       <p:sp>
         <p:nvSpPr>
-          <p:cNvPr id="14" name="Shape 11"/>
+          <p:cNvPr id="15" name="Shape 12"/>
           <p:cNvSpPr/>
           <p:nvPr/>
         </p:nvSpPr>
@@ -17891,7 +18159,7 @@
       </p:sp>
       <p:sp>
         <p:nvSpPr>
-          <p:cNvPr id="15" name="Text 12"/>
+          <p:cNvPr id="16" name="Text 13"/>
           <p:cNvSpPr/>
           <p:nvPr/>
         </p:nvSpPr>
@@ -17930,7 +18198,7 @@
       </p:sp>
       <p:sp>
         <p:nvSpPr>
-          <p:cNvPr id="16" name="Text 13"/>
+          <p:cNvPr id="17" name="Text 14"/>
           <p:cNvSpPr/>
           <p:nvPr/>
         </p:nvSpPr>
@@ -17969,7 +18237,7 @@
       </p:sp>
       <p:sp>
         <p:nvSpPr>
-          <p:cNvPr id="17" name="Text 14"/>
+          <p:cNvPr id="18" name="Text 15"/>
           <p:cNvSpPr/>
           <p:nvPr/>
         </p:nvSpPr>
@@ -18011,7 +18279,7 @@
       </p:sp>
       <p:sp>
         <p:nvSpPr>
-          <p:cNvPr id="18" name="Shape 15"/>
+          <p:cNvPr id="19" name="Shape 16"/>
           <p:cNvSpPr/>
           <p:nvPr/>
         </p:nvSpPr>
@@ -18033,7 +18301,7 @@
       </p:sp>
       <p:sp>
         <p:nvSpPr>
-          <p:cNvPr id="19" name="Shape 16"/>
+          <p:cNvPr id="20" name="Shape 17"/>
           <p:cNvSpPr/>
           <p:nvPr/>
         </p:nvSpPr>
@@ -18053,7 +18321,7 @@
       </p:sp>
       <p:sp>
         <p:nvSpPr>
-          <p:cNvPr id="20" name="Text 17"/>
+          <p:cNvPr id="21" name="Text 18"/>
           <p:cNvSpPr/>
           <p:nvPr/>
         </p:nvSpPr>
@@ -18092,7 +18360,7 @@
       </p:sp>
       <p:sp>
         <p:nvSpPr>
-          <p:cNvPr id="21" name="Text 18"/>
+          <p:cNvPr id="22" name="Text 19"/>
           <p:cNvSpPr/>
           <p:nvPr/>
         </p:nvSpPr>
@@ -18131,7 +18399,7 @@
       </p:sp>
       <p:sp>
         <p:nvSpPr>
-          <p:cNvPr id="22" name="Text 19"/>
+          <p:cNvPr id="23" name="Text 20"/>
           <p:cNvSpPr/>
           <p:nvPr/>
         </p:nvSpPr>
@@ -18173,7 +18441,7 @@
       </p:sp>
       <p:sp>
         <p:nvSpPr>
-          <p:cNvPr id="23" name="Shape 20"/>
+          <p:cNvPr id="24" name="Shape 21"/>
           <p:cNvSpPr/>
           <p:nvPr/>
         </p:nvSpPr>
@@ -18195,7 +18463,7 @@
       </p:sp>
       <p:sp>
         <p:nvSpPr>
-          <p:cNvPr id="24" name="Shape 21"/>
+          <p:cNvPr id="25" name="Shape 22"/>
           <p:cNvSpPr/>
           <p:nvPr/>
         </p:nvSpPr>
@@ -18215,7 +18483,7 @@
       </p:sp>
       <p:sp>
         <p:nvSpPr>
-          <p:cNvPr id="25" name="Text 22"/>
+          <p:cNvPr id="26" name="Text 23"/>
           <p:cNvSpPr/>
           <p:nvPr/>
         </p:nvSpPr>
@@ -18254,7 +18522,7 @@
       </p:sp>
       <p:sp>
         <p:nvSpPr>
-          <p:cNvPr id="26" name="Text 23"/>
+          <p:cNvPr id="27" name="Text 24"/>
           <p:cNvSpPr/>
           <p:nvPr/>
         </p:nvSpPr>
@@ -18293,7 +18561,7 @@
       </p:sp>
       <p:sp>
         <p:nvSpPr>
-          <p:cNvPr id="27" name="Text 24"/>
+          <p:cNvPr id="28" name="Text 25"/>
           <p:cNvSpPr/>
           <p:nvPr/>
         </p:nvSpPr>
@@ -18335,7 +18603,7 @@
       </p:sp>
       <p:sp>
         <p:nvSpPr>
-          <p:cNvPr id="28" name="Shape 25"/>
+          <p:cNvPr id="29" name="Shape 26"/>
           <p:cNvSpPr/>
           <p:nvPr/>
         </p:nvSpPr>
@@ -18362,7 +18630,7 @@
       </p:sp>
       <p:sp>
         <p:nvSpPr>
-          <p:cNvPr id="29" name="Text 26"/>
+          <p:cNvPr id="30" name="Text 27"/>
           <p:cNvSpPr/>
           <p:nvPr/>
         </p:nvSpPr>
@@ -18414,7 +18682,7 @@
         </p:nvSpPr>
         <p:spPr>
           <a:xfrm>
-            <a:off x="11368735" y="6437376"/>
+            <a:off x="11368735" y="6327648"/>
             <a:ext cx="365760" cy="274320"/>
           </a:xfrm>
           <a:prstGeom prst="rect">
@@ -18461,13 +18729,6 @@
 <file path=ppt/slides/slide6.xml><?xml version="1.0" encoding="utf-8"?>
 <p:sld xmlns:a="http://schemas.openxmlformats.org/drawingml/2006/main" xmlns:r="http://schemas.openxmlformats.org/officeDocument/2006/relationships" xmlns:p="http://schemas.openxmlformats.org/presentationml/2006/main">
   <p:cSld name="Slide 6">
-    <p:bg>
-      <p:bgPr>
-        <a:solidFill>
-          <a:srgbClr val="FFFFFF"/>
-        </a:solidFill>
-      </p:bgPr>
-    </p:bg>
     <p:spTree>
       <p:nvGrpSpPr>
         <p:cNvPr id="1" name=""/>
@@ -18484,7 +18745,29 @@
       </p:grpSpPr>
       <p:sp>
         <p:nvSpPr>
-          <p:cNvPr id="2" name="Text 0"/>
+          <p:cNvPr id="2" name="Shape 0"/>
+          <p:cNvSpPr/>
+          <p:nvPr/>
+        </p:nvSpPr>
+        <p:spPr>
+          <a:xfrm>
+            <a:off x="231343" y="194767"/>
+            <a:ext cx="11716207" cy="6473952"/>
+          </a:xfrm>
+          <a:prstGeom prst="roundRect">
+            <a:avLst>
+              <a:gd name="adj" fmla="val 3107"/>
+            </a:avLst>
+          </a:prstGeom>
+          <a:solidFill>
+            <a:srgbClr val="FFFFFF"/>
+          </a:solidFill>
+          <a:ln/>
+        </p:spPr>
+      </p:sp>
+      <p:sp>
+        <p:nvSpPr>
+          <p:cNvPr id="3" name="Text 1"/>
           <p:cNvSpPr/>
           <p:nvPr/>
         </p:nvSpPr>
@@ -18523,7 +18806,7 @@
       </p:sp>
       <p:sp>
         <p:nvSpPr>
-          <p:cNvPr id="3" name="Text 1"/>
+          <p:cNvPr id="4" name="Text 2"/>
           <p:cNvSpPr/>
           <p:nvPr/>
         </p:nvSpPr>
@@ -18562,7 +18845,7 @@
       </p:sp>
       <p:sp>
         <p:nvSpPr>
-          <p:cNvPr id="4" name="Shape 2"/>
+          <p:cNvPr id="5" name="Shape 3"/>
           <p:cNvSpPr/>
           <p:nvPr/>
         </p:nvSpPr>
@@ -18584,7 +18867,7 @@
       </p:sp>
       <p:sp>
         <p:nvSpPr>
-          <p:cNvPr id="5" name="Text 3"/>
+          <p:cNvPr id="6" name="Text 4"/>
           <p:cNvSpPr/>
           <p:nvPr/>
         </p:nvSpPr>
@@ -18623,7 +18906,7 @@
       </p:sp>
       <p:pic>
         <p:nvPicPr>
-          <p:cNvPr id="6" name="Image 0" descr="preencoded.png">    </p:cNvPr>
+          <p:cNvPr id="7" name="Image 0" descr="preencoded.png">    </p:cNvPr>
           <p:cNvPicPr>
             <a:picLocks noChangeAspect="1"/>
           </p:cNvPicPr>
@@ -18637,7 +18920,7 @@
         </p:blipFill>
         <p:spPr>
           <a:xfrm>
-            <a:off x="566928" y="6254496"/>
+            <a:off x="566928" y="6126480"/>
             <a:ext cx="1481328" cy="457200"/>
           </a:xfrm>
           <a:prstGeom prst="rect">
@@ -18647,7 +18930,7 @@
       </p:pic>
       <p:sp>
         <p:nvSpPr>
-          <p:cNvPr id="7" name="Shape 4"/>
+          <p:cNvPr id="8" name="Shape 5"/>
           <p:cNvSpPr/>
           <p:nvPr/>
         </p:nvSpPr>
@@ -18674,7 +18957,7 @@
       </p:sp>
       <p:sp>
         <p:nvSpPr>
-          <p:cNvPr id="8" name="Text 5"/>
+          <p:cNvPr id="9" name="Text 6"/>
           <p:cNvSpPr/>
           <p:nvPr/>
         </p:nvSpPr>
@@ -18713,7 +18996,7 @@
       </p:sp>
       <p:sp>
         <p:nvSpPr>
-          <p:cNvPr id="9" name="Shape 6"/>
+          <p:cNvPr id="10" name="Shape 7"/>
           <p:cNvSpPr/>
           <p:nvPr/>
         </p:nvSpPr>
@@ -18736,7 +19019,7 @@
       </p:sp>
       <p:sp>
         <p:nvSpPr>
-          <p:cNvPr id="10" name="Shape 7"/>
+          <p:cNvPr id="11" name="Shape 8"/>
           <p:cNvSpPr/>
           <p:nvPr/>
         </p:nvSpPr>
@@ -18756,7 +19039,7 @@
       </p:sp>
       <p:sp>
         <p:nvSpPr>
-          <p:cNvPr id="11" name="Shape 8"/>
+          <p:cNvPr id="12" name="Shape 9"/>
           <p:cNvSpPr/>
           <p:nvPr/>
         </p:nvSpPr>
@@ -18778,7 +19061,7 @@
       </p:sp>
       <p:sp>
         <p:nvSpPr>
-          <p:cNvPr id="12" name="Text 9"/>
+          <p:cNvPr id="13" name="Text 10"/>
           <p:cNvSpPr/>
           <p:nvPr/>
         </p:nvSpPr>
@@ -18817,7 +19100,7 @@
       </p:sp>
       <p:sp>
         <p:nvSpPr>
-          <p:cNvPr id="13" name="Shape 10"/>
+          <p:cNvPr id="14" name="Shape 11"/>
           <p:cNvSpPr/>
           <p:nvPr/>
         </p:nvSpPr>
@@ -18840,7 +19123,7 @@
       </p:sp>
       <p:sp>
         <p:nvSpPr>
-          <p:cNvPr id="14" name="Shape 11"/>
+          <p:cNvPr id="15" name="Shape 12"/>
           <p:cNvSpPr/>
           <p:nvPr/>
         </p:nvSpPr>
@@ -18860,7 +19143,7 @@
       </p:sp>
       <p:sp>
         <p:nvSpPr>
-          <p:cNvPr id="15" name="Shape 12"/>
+          <p:cNvPr id="16" name="Shape 13"/>
           <p:cNvSpPr/>
           <p:nvPr/>
         </p:nvSpPr>
@@ -18887,7 +19170,7 @@
       </p:sp>
       <p:sp>
         <p:nvSpPr>
-          <p:cNvPr id="16" name="Text 13"/>
+          <p:cNvPr id="17" name="Text 14"/>
           <p:cNvSpPr/>
           <p:nvPr/>
         </p:nvSpPr>
@@ -18926,7 +19209,7 @@
       </p:sp>
       <p:sp>
         <p:nvSpPr>
-          <p:cNvPr id="17" name="Shape 14"/>
+          <p:cNvPr id="18" name="Shape 15"/>
           <p:cNvSpPr/>
           <p:nvPr/>
         </p:nvSpPr>
@@ -18949,7 +19232,7 @@
       </p:sp>
       <p:sp>
         <p:nvSpPr>
-          <p:cNvPr id="18" name="Shape 15"/>
+          <p:cNvPr id="19" name="Shape 16"/>
           <p:cNvSpPr/>
           <p:nvPr/>
         </p:nvSpPr>
@@ -18969,7 +19252,7 @@
       </p:sp>
       <p:sp>
         <p:nvSpPr>
-          <p:cNvPr id="19" name="Shape 16"/>
+          <p:cNvPr id="20" name="Shape 17"/>
           <p:cNvSpPr/>
           <p:nvPr/>
         </p:nvSpPr>
@@ -18996,7 +19279,7 @@
       </p:sp>
       <p:sp>
         <p:nvSpPr>
-          <p:cNvPr id="20" name="Text 17"/>
+          <p:cNvPr id="21" name="Text 18"/>
           <p:cNvSpPr/>
           <p:nvPr/>
         </p:nvSpPr>
@@ -19035,7 +19318,7 @@
       </p:sp>
       <p:sp>
         <p:nvSpPr>
-          <p:cNvPr id="21" name="Shape 18"/>
+          <p:cNvPr id="22" name="Shape 19"/>
           <p:cNvSpPr/>
           <p:nvPr/>
         </p:nvSpPr>
@@ -19058,7 +19341,7 @@
       </p:sp>
       <p:sp>
         <p:nvSpPr>
-          <p:cNvPr id="22" name="Shape 19"/>
+          <p:cNvPr id="23" name="Shape 20"/>
           <p:cNvSpPr/>
           <p:nvPr/>
         </p:nvSpPr>
@@ -19078,7 +19361,7 @@
       </p:sp>
       <p:sp>
         <p:nvSpPr>
-          <p:cNvPr id="23" name="Shape 20"/>
+          <p:cNvPr id="24" name="Shape 21"/>
           <p:cNvSpPr/>
           <p:nvPr/>
         </p:nvSpPr>
@@ -19105,7 +19388,7 @@
       </p:sp>
       <p:sp>
         <p:nvSpPr>
-          <p:cNvPr id="24" name="Text 21"/>
+          <p:cNvPr id="25" name="Text 22"/>
           <p:cNvSpPr/>
           <p:nvPr/>
         </p:nvSpPr>
@@ -19144,7 +19427,7 @@
       </p:sp>
       <p:sp>
         <p:nvSpPr>
-          <p:cNvPr id="25" name="Shape 22"/>
+          <p:cNvPr id="26" name="Shape 23"/>
           <p:cNvSpPr/>
           <p:nvPr/>
         </p:nvSpPr>
@@ -19167,7 +19450,7 @@
       </p:sp>
       <p:sp>
         <p:nvSpPr>
-          <p:cNvPr id="26" name="Shape 23"/>
+          <p:cNvPr id="27" name="Shape 24"/>
           <p:cNvSpPr/>
           <p:nvPr/>
         </p:nvSpPr>
@@ -19187,7 +19470,7 @@
       </p:sp>
       <p:sp>
         <p:nvSpPr>
-          <p:cNvPr id="27" name="Shape 24"/>
+          <p:cNvPr id="28" name="Shape 25"/>
           <p:cNvSpPr/>
           <p:nvPr/>
         </p:nvSpPr>
@@ -19209,7 +19492,7 @@
       </p:sp>
       <p:sp>
         <p:nvSpPr>
-          <p:cNvPr id="28" name="Text 25"/>
+          <p:cNvPr id="29" name="Text 26"/>
           <p:cNvSpPr/>
           <p:nvPr/>
         </p:nvSpPr>
@@ -19248,7 +19531,7 @@
       </p:sp>
       <p:sp>
         <p:nvSpPr>
-          <p:cNvPr id="29" name="Shape 26"/>
+          <p:cNvPr id="30" name="Shape 27"/>
           <p:cNvSpPr/>
           <p:nvPr/>
         </p:nvSpPr>
@@ -19275,7 +19558,7 @@
       </p:sp>
       <p:sp>
         <p:nvSpPr>
-          <p:cNvPr id="30" name="Text 27"/>
+          <p:cNvPr id="31" name="Text 28"/>
           <p:cNvSpPr/>
           <p:nvPr/>
         </p:nvSpPr>
@@ -19314,7 +19597,7 @@
       </p:sp>
       <p:sp>
         <p:nvSpPr>
-          <p:cNvPr id="31" name="Shape 28"/>
+          <p:cNvPr id="32" name="Shape 29"/>
           <p:cNvSpPr/>
           <p:nvPr/>
         </p:nvSpPr>
@@ -19337,7 +19620,7 @@
       </p:sp>
       <p:sp>
         <p:nvSpPr>
-          <p:cNvPr id="32" name="Shape 29"/>
+          <p:cNvPr id="33" name="Shape 30"/>
           <p:cNvSpPr/>
           <p:nvPr/>
         </p:nvSpPr>
@@ -19357,7 +19640,7 @@
       </p:sp>
       <p:sp>
         <p:nvSpPr>
-          <p:cNvPr id="33" name="Shape 30"/>
+          <p:cNvPr id="34" name="Shape 31"/>
           <p:cNvSpPr/>
           <p:nvPr/>
         </p:nvSpPr>
@@ -19379,7 +19662,7 @@
       </p:sp>
       <p:sp>
         <p:nvSpPr>
-          <p:cNvPr id="34" name="Text 31"/>
+          <p:cNvPr id="35" name="Text 32"/>
           <p:cNvSpPr/>
           <p:nvPr/>
         </p:nvSpPr>
@@ -19418,7 +19701,7 @@
       </p:sp>
       <p:sp>
         <p:nvSpPr>
-          <p:cNvPr id="35" name="Shape 32"/>
+          <p:cNvPr id="36" name="Shape 33"/>
           <p:cNvSpPr/>
           <p:nvPr/>
         </p:nvSpPr>
@@ -19441,7 +19724,7 @@
       </p:sp>
       <p:sp>
         <p:nvSpPr>
-          <p:cNvPr id="36" name="Shape 33"/>
+          <p:cNvPr id="37" name="Shape 34"/>
           <p:cNvSpPr/>
           <p:nvPr/>
         </p:nvSpPr>
@@ -19461,7 +19744,7 @@
       </p:sp>
       <p:sp>
         <p:nvSpPr>
-          <p:cNvPr id="37" name="Shape 34"/>
+          <p:cNvPr id="38" name="Shape 35"/>
           <p:cNvSpPr/>
           <p:nvPr/>
         </p:nvSpPr>
@@ -19483,7 +19766,7 @@
       </p:sp>
       <p:sp>
         <p:nvSpPr>
-          <p:cNvPr id="38" name="Text 35"/>
+          <p:cNvPr id="39" name="Text 36"/>
           <p:cNvSpPr/>
           <p:nvPr/>
         </p:nvSpPr>
@@ -19522,7 +19805,7 @@
       </p:sp>
       <p:sp>
         <p:nvSpPr>
-          <p:cNvPr id="39" name="Shape 36"/>
+          <p:cNvPr id="40" name="Shape 37"/>
           <p:cNvSpPr/>
           <p:nvPr/>
         </p:nvSpPr>
@@ -19544,7 +19827,7 @@
       </p:sp>
       <p:sp>
         <p:nvSpPr>
-          <p:cNvPr id="40" name="Text 37"/>
+          <p:cNvPr id="41" name="Text 38"/>
           <p:cNvSpPr/>
           <p:nvPr/>
         </p:nvSpPr>
@@ -19583,7 +19866,7 @@
       </p:sp>
       <p:sp>
         <p:nvSpPr>
-          <p:cNvPr id="41" name="Shape 38"/>
+          <p:cNvPr id="42" name="Shape 39"/>
           <p:cNvSpPr/>
           <p:nvPr/>
         </p:nvSpPr>
@@ -19606,7 +19889,7 @@
       </p:sp>
       <p:sp>
         <p:nvSpPr>
-          <p:cNvPr id="42" name="Shape 39"/>
+          <p:cNvPr id="43" name="Shape 40"/>
           <p:cNvSpPr/>
           <p:nvPr/>
         </p:nvSpPr>
@@ -19626,7 +19909,7 @@
       </p:sp>
       <p:sp>
         <p:nvSpPr>
-          <p:cNvPr id="43" name="Shape 40"/>
+          <p:cNvPr id="44" name="Shape 41"/>
           <p:cNvSpPr/>
           <p:nvPr/>
         </p:nvSpPr>
@@ -19648,7 +19931,7 @@
       </p:sp>
       <p:sp>
         <p:nvSpPr>
-          <p:cNvPr id="44" name="Text 41"/>
+          <p:cNvPr id="45" name="Text 42"/>
           <p:cNvSpPr/>
           <p:nvPr/>
         </p:nvSpPr>
@@ -19687,7 +19970,7 @@
       </p:sp>
       <p:sp>
         <p:nvSpPr>
-          <p:cNvPr id="45" name="Shape 42"/>
+          <p:cNvPr id="46" name="Shape 43"/>
           <p:cNvSpPr/>
           <p:nvPr/>
         </p:nvSpPr>
@@ -19710,7 +19993,7 @@
       </p:sp>
       <p:sp>
         <p:nvSpPr>
-          <p:cNvPr id="46" name="Shape 43"/>
+          <p:cNvPr id="47" name="Shape 44"/>
           <p:cNvSpPr/>
           <p:nvPr/>
         </p:nvSpPr>
@@ -19730,7 +20013,7 @@
       </p:sp>
       <p:sp>
         <p:nvSpPr>
-          <p:cNvPr id="47" name="Shape 44"/>
+          <p:cNvPr id="48" name="Shape 45"/>
           <p:cNvSpPr/>
           <p:nvPr/>
         </p:nvSpPr>
@@ -19752,7 +20035,7 @@
       </p:sp>
       <p:sp>
         <p:nvSpPr>
-          <p:cNvPr id="48" name="Text 45"/>
+          <p:cNvPr id="49" name="Text 46"/>
           <p:cNvSpPr/>
           <p:nvPr/>
         </p:nvSpPr>
@@ -19791,7 +20074,7 @@
       </p:sp>
       <p:sp>
         <p:nvSpPr>
-          <p:cNvPr id="49" name="Shape 46"/>
+          <p:cNvPr id="50" name="Shape 47"/>
           <p:cNvSpPr/>
           <p:nvPr/>
         </p:nvSpPr>
@@ -19813,7 +20096,7 @@
       </p:sp>
       <p:sp>
         <p:nvSpPr>
-          <p:cNvPr id="50" name="Text 47"/>
+          <p:cNvPr id="51" name="Text 48"/>
           <p:cNvSpPr/>
           <p:nvPr/>
         </p:nvSpPr>
@@ -19869,7 +20152,7 @@
       </p:sp>
       <p:sp>
         <p:nvSpPr>
-          <p:cNvPr id="51" name="Shape 48"/>
+          <p:cNvPr id="52" name="Shape 49"/>
           <p:cNvSpPr/>
           <p:nvPr/>
         </p:nvSpPr>
@@ -19891,7 +20174,7 @@
       </p:sp>
       <p:sp>
         <p:nvSpPr>
-          <p:cNvPr id="52" name="Text 49"/>
+          <p:cNvPr id="53" name="Text 50"/>
           <p:cNvSpPr/>
           <p:nvPr/>
         </p:nvSpPr>
@@ -19947,7 +20230,7 @@
       </p:sp>
       <p:sp>
         <p:nvSpPr>
-          <p:cNvPr id="53" name="Shape 50"/>
+          <p:cNvPr id="54" name="Shape 51"/>
           <p:cNvSpPr/>
           <p:nvPr/>
         </p:nvSpPr>
@@ -19969,7 +20252,7 @@
       </p:sp>
       <p:sp>
         <p:nvSpPr>
-          <p:cNvPr id="54" name="Text 51"/>
+          <p:cNvPr id="55" name="Text 52"/>
           <p:cNvSpPr/>
           <p:nvPr/>
         </p:nvSpPr>
@@ -20025,7 +20308,7 @@
       </p:sp>
       <p:sp>
         <p:nvSpPr>
-          <p:cNvPr id="55" name="Shape 52"/>
+          <p:cNvPr id="56" name="Shape 53"/>
           <p:cNvSpPr/>
           <p:nvPr/>
         </p:nvSpPr>
@@ -20047,7 +20330,7 @@
       </p:sp>
       <p:sp>
         <p:nvSpPr>
-          <p:cNvPr id="56" name="Text 53"/>
+          <p:cNvPr id="57" name="Text 54"/>
           <p:cNvSpPr/>
           <p:nvPr/>
         </p:nvSpPr>
@@ -20103,7 +20386,7 @@
       </p:sp>
       <p:sp>
         <p:nvSpPr>
-          <p:cNvPr id="57" name="Shape 54"/>
+          <p:cNvPr id="58" name="Shape 55"/>
           <p:cNvSpPr/>
           <p:nvPr/>
         </p:nvSpPr>
@@ -20125,7 +20408,7 @@
       </p:sp>
       <p:sp>
         <p:nvSpPr>
-          <p:cNvPr id="58" name="Text 55"/>
+          <p:cNvPr id="59" name="Text 56"/>
           <p:cNvSpPr/>
           <p:nvPr/>
         </p:nvSpPr>
@@ -20181,7 +20464,7 @@
       </p:sp>
       <p:sp>
         <p:nvSpPr>
-          <p:cNvPr id="59" name="Shape 56"/>
+          <p:cNvPr id="60" name="Shape 57"/>
           <p:cNvSpPr/>
           <p:nvPr/>
         </p:nvSpPr>
@@ -20203,7 +20486,7 @@
       </p:sp>
       <p:sp>
         <p:nvSpPr>
-          <p:cNvPr id="60" name="Text 57"/>
+          <p:cNvPr id="61" name="Text 58"/>
           <p:cNvSpPr/>
           <p:nvPr/>
         </p:nvSpPr>
@@ -20259,7 +20542,7 @@
       </p:sp>
       <p:sp>
         <p:nvSpPr>
-          <p:cNvPr id="61" name="Shape 58"/>
+          <p:cNvPr id="62" name="Shape 59"/>
           <p:cNvSpPr/>
           <p:nvPr/>
         </p:nvSpPr>
@@ -20281,7 +20564,7 @@
       </p:sp>
       <p:sp>
         <p:nvSpPr>
-          <p:cNvPr id="62" name="Text 59"/>
+          <p:cNvPr id="63" name="Text 60"/>
           <p:cNvSpPr/>
           <p:nvPr/>
         </p:nvSpPr>
@@ -20337,7 +20620,7 @@
       </p:sp>
       <p:sp>
         <p:nvSpPr>
-          <p:cNvPr id="63" name="Shape 60"/>
+          <p:cNvPr id="64" name="Shape 61"/>
           <p:cNvSpPr/>
           <p:nvPr/>
         </p:nvSpPr>
@@ -20359,7 +20642,7 @@
       </p:sp>
       <p:sp>
         <p:nvSpPr>
-          <p:cNvPr id="64" name="Text 61"/>
+          <p:cNvPr id="65" name="Text 62"/>
           <p:cNvSpPr/>
           <p:nvPr/>
         </p:nvSpPr>
@@ -20415,7 +20698,7 @@
       </p:sp>
       <p:sp>
         <p:nvSpPr>
-          <p:cNvPr id="65" name="Shape 62"/>
+          <p:cNvPr id="66" name="Shape 63"/>
           <p:cNvSpPr/>
           <p:nvPr/>
         </p:nvSpPr>
@@ -20437,7 +20720,7 @@
       </p:sp>
       <p:sp>
         <p:nvSpPr>
-          <p:cNvPr id="66" name="Text 63"/>
+          <p:cNvPr id="67" name="Text 64"/>
           <p:cNvSpPr/>
           <p:nvPr/>
         </p:nvSpPr>
@@ -20493,7 +20776,7 @@
       </p:sp>
       <p:sp>
         <p:nvSpPr>
-          <p:cNvPr id="67" name="Shape 64"/>
+          <p:cNvPr id="68" name="Shape 65"/>
           <p:cNvSpPr/>
           <p:nvPr/>
         </p:nvSpPr>
@@ -20520,7 +20803,7 @@
       </p:sp>
       <p:sp>
         <p:nvSpPr>
-          <p:cNvPr id="68" name="Text 65"/>
+          <p:cNvPr id="69" name="Text 66"/>
           <p:cNvSpPr/>
           <p:nvPr/>
         </p:nvSpPr>
@@ -20572,7 +20855,7 @@
         </p:nvSpPr>
         <p:spPr>
           <a:xfrm>
-            <a:off x="11368735" y="6437376"/>
+            <a:off x="11368735" y="6327648"/>
             <a:ext cx="365760" cy="274320"/>
           </a:xfrm>
           <a:prstGeom prst="rect">
@@ -20619,13 +20902,6 @@
 <file path=ppt/slides/slide7.xml><?xml version="1.0" encoding="utf-8"?>
 <p:sld xmlns:a="http://schemas.openxmlformats.org/drawingml/2006/main" xmlns:r="http://schemas.openxmlformats.org/officeDocument/2006/relationships" xmlns:p="http://schemas.openxmlformats.org/presentationml/2006/main">
   <p:cSld name="Slide 7">
-    <p:bg>
-      <p:bgPr>
-        <a:solidFill>
-          <a:srgbClr val="FFFFFF"/>
-        </a:solidFill>
-      </p:bgPr>
-    </p:bg>
     <p:spTree>
       <p:nvGrpSpPr>
         <p:cNvPr id="1" name=""/>
@@ -20642,7 +20918,29 @@
       </p:grpSpPr>
       <p:sp>
         <p:nvSpPr>
-          <p:cNvPr id="2" name="Text 0"/>
+          <p:cNvPr id="2" name="Shape 0"/>
+          <p:cNvSpPr/>
+          <p:nvPr/>
+        </p:nvSpPr>
+        <p:spPr>
+          <a:xfrm>
+            <a:off x="231343" y="194767"/>
+            <a:ext cx="11716207" cy="6473952"/>
+          </a:xfrm>
+          <a:prstGeom prst="roundRect">
+            <a:avLst>
+              <a:gd name="adj" fmla="val 3107"/>
+            </a:avLst>
+          </a:prstGeom>
+          <a:solidFill>
+            <a:srgbClr val="FFFFFF"/>
+          </a:solidFill>
+          <a:ln/>
+        </p:spPr>
+      </p:sp>
+      <p:sp>
+        <p:nvSpPr>
+          <p:cNvPr id="3" name="Text 1"/>
           <p:cNvSpPr/>
           <p:nvPr/>
         </p:nvSpPr>
@@ -20681,7 +20979,7 @@
       </p:sp>
       <p:sp>
         <p:nvSpPr>
-          <p:cNvPr id="3" name="Text 1"/>
+          <p:cNvPr id="4" name="Text 2"/>
           <p:cNvSpPr/>
           <p:nvPr/>
         </p:nvSpPr>
@@ -20720,7 +21018,7 @@
       </p:sp>
       <p:sp>
         <p:nvSpPr>
-          <p:cNvPr id="4" name="Shape 2"/>
+          <p:cNvPr id="5" name="Shape 3"/>
           <p:cNvSpPr/>
           <p:nvPr/>
         </p:nvSpPr>
@@ -20742,7 +21040,7 @@
       </p:sp>
       <p:sp>
         <p:nvSpPr>
-          <p:cNvPr id="5" name="Text 3"/>
+          <p:cNvPr id="6" name="Text 4"/>
           <p:cNvSpPr/>
           <p:nvPr/>
         </p:nvSpPr>
@@ -20781,7 +21079,7 @@
       </p:sp>
       <p:pic>
         <p:nvPicPr>
-          <p:cNvPr id="6" name="Image 0" descr="preencoded.png">    </p:cNvPr>
+          <p:cNvPr id="7" name="Image 0" descr="preencoded.png">    </p:cNvPr>
           <p:cNvPicPr>
             <a:picLocks noChangeAspect="1"/>
           </p:cNvPicPr>
@@ -20795,7 +21093,7 @@
         </p:blipFill>
         <p:spPr>
           <a:xfrm>
-            <a:off x="566928" y="6254496"/>
+            <a:off x="566928" y="6126480"/>
             <a:ext cx="1481328" cy="457200"/>
           </a:xfrm>
           <a:prstGeom prst="rect">
@@ -21866,7 +22164,7 @@
       </p:graphicFrame>
       <p:sp>
         <p:nvSpPr>
-          <p:cNvPr id="8" name="Shape 4"/>
+          <p:cNvPr id="9" name="Shape 5"/>
           <p:cNvSpPr/>
           <p:nvPr/>
         </p:nvSpPr>
@@ -21888,7 +22186,7 @@
       </p:sp>
       <p:sp>
         <p:nvSpPr>
-          <p:cNvPr id="9" name="Text 5"/>
+          <p:cNvPr id="10" name="Text 6"/>
           <p:cNvSpPr/>
           <p:nvPr/>
         </p:nvSpPr>
@@ -21930,7 +22228,7 @@
       </p:sp>
       <p:sp>
         <p:nvSpPr>
-          <p:cNvPr id="10" name="Shape 6"/>
+          <p:cNvPr id="11" name="Shape 7"/>
           <p:cNvSpPr/>
           <p:nvPr/>
         </p:nvSpPr>
@@ -21952,7 +22250,7 @@
       </p:sp>
       <p:sp>
         <p:nvSpPr>
-          <p:cNvPr id="11" name="Text 7"/>
+          <p:cNvPr id="12" name="Text 8"/>
           <p:cNvSpPr/>
           <p:nvPr/>
         </p:nvSpPr>
@@ -22004,7 +22302,7 @@
         </p:nvSpPr>
         <p:spPr>
           <a:xfrm>
-            <a:off x="11368735" y="6437376"/>
+            <a:off x="11368735" y="6327648"/>
             <a:ext cx="365760" cy="274320"/>
           </a:xfrm>
           <a:prstGeom prst="rect">
@@ -22051,13 +22349,6 @@
 <file path=ppt/slides/slide8.xml><?xml version="1.0" encoding="utf-8"?>
 <p:sld xmlns:a="http://schemas.openxmlformats.org/drawingml/2006/main" xmlns:r="http://schemas.openxmlformats.org/officeDocument/2006/relationships" xmlns:p="http://schemas.openxmlformats.org/presentationml/2006/main">
   <p:cSld name="Slide 8">
-    <p:bg>
-      <p:bgPr>
-        <a:solidFill>
-          <a:srgbClr val="FFFFFF"/>
-        </a:solidFill>
-      </p:bgPr>
-    </p:bg>
     <p:spTree>
       <p:nvGrpSpPr>
         <p:cNvPr id="1" name=""/>
@@ -22074,7 +22365,29 @@
       </p:grpSpPr>
       <p:sp>
         <p:nvSpPr>
-          <p:cNvPr id="2" name="Text 0"/>
+          <p:cNvPr id="2" name="Shape 0"/>
+          <p:cNvSpPr/>
+          <p:nvPr/>
+        </p:nvSpPr>
+        <p:spPr>
+          <a:xfrm>
+            <a:off x="231343" y="194767"/>
+            <a:ext cx="11716207" cy="6473952"/>
+          </a:xfrm>
+          <a:prstGeom prst="roundRect">
+            <a:avLst>
+              <a:gd name="adj" fmla="val 3107"/>
+            </a:avLst>
+          </a:prstGeom>
+          <a:solidFill>
+            <a:srgbClr val="FFFFFF"/>
+          </a:solidFill>
+          <a:ln/>
+        </p:spPr>
+      </p:sp>
+      <p:sp>
+        <p:nvSpPr>
+          <p:cNvPr id="3" name="Text 1"/>
           <p:cNvSpPr/>
           <p:nvPr/>
         </p:nvSpPr>
@@ -22113,7 +22426,7 @@
       </p:sp>
       <p:sp>
         <p:nvSpPr>
-          <p:cNvPr id="3" name="Text 1"/>
+          <p:cNvPr id="4" name="Text 2"/>
           <p:cNvSpPr/>
           <p:nvPr/>
         </p:nvSpPr>
@@ -22152,7 +22465,7 @@
       </p:sp>
       <p:sp>
         <p:nvSpPr>
-          <p:cNvPr id="4" name="Shape 2"/>
+          <p:cNvPr id="5" name="Shape 3"/>
           <p:cNvSpPr/>
           <p:nvPr/>
         </p:nvSpPr>
@@ -22174,7 +22487,7 @@
       </p:sp>
       <p:sp>
         <p:nvSpPr>
-          <p:cNvPr id="5" name="Text 3"/>
+          <p:cNvPr id="6" name="Text 4"/>
           <p:cNvSpPr/>
           <p:nvPr/>
         </p:nvSpPr>
@@ -22213,7 +22526,7 @@
       </p:sp>
       <p:pic>
         <p:nvPicPr>
-          <p:cNvPr id="6" name="Image 0" descr="preencoded.png">    </p:cNvPr>
+          <p:cNvPr id="7" name="Image 0" descr="preencoded.png">    </p:cNvPr>
           <p:cNvPicPr>
             <a:picLocks noChangeAspect="1"/>
           </p:cNvPicPr>
@@ -22227,7 +22540,7 @@
         </p:blipFill>
         <p:spPr>
           <a:xfrm>
-            <a:off x="566928" y="6254496"/>
+            <a:off x="566928" y="6126480"/>
             <a:ext cx="1481328" cy="457200"/>
           </a:xfrm>
           <a:prstGeom prst="rect">
@@ -22237,7 +22550,7 @@
       </p:pic>
       <p:sp>
         <p:nvSpPr>
-          <p:cNvPr id="7" name="Shape 4"/>
+          <p:cNvPr id="8" name="Shape 5"/>
           <p:cNvSpPr/>
           <p:nvPr/>
         </p:nvSpPr>
@@ -22260,7 +22573,7 @@
       </p:sp>
       <p:sp>
         <p:nvSpPr>
-          <p:cNvPr id="8" name="Shape 5"/>
+          <p:cNvPr id="9" name="Shape 6"/>
           <p:cNvSpPr/>
           <p:nvPr/>
         </p:nvSpPr>
@@ -22280,7 +22593,7 @@
       </p:sp>
       <p:sp>
         <p:nvSpPr>
-          <p:cNvPr id="9" name="Text 6"/>
+          <p:cNvPr id="10" name="Text 7"/>
           <p:cNvSpPr/>
           <p:nvPr/>
         </p:nvSpPr>
@@ -22319,7 +22632,7 @@
       </p:sp>
       <p:sp>
         <p:nvSpPr>
-          <p:cNvPr id="10" name="Text 7"/>
+          <p:cNvPr id="11" name="Text 8"/>
           <p:cNvSpPr/>
           <p:nvPr/>
         </p:nvSpPr>
@@ -22358,7 +22671,7 @@
       </p:sp>
       <p:sp>
         <p:nvSpPr>
-          <p:cNvPr id="11" name="Shape 8"/>
+          <p:cNvPr id="12" name="Shape 9"/>
           <p:cNvSpPr/>
           <p:nvPr/>
         </p:nvSpPr>
@@ -22378,7 +22691,7 @@
       </p:sp>
       <p:sp>
         <p:nvSpPr>
-          <p:cNvPr id="12" name="Text 9"/>
+          <p:cNvPr id="13" name="Text 10"/>
           <p:cNvSpPr/>
           <p:nvPr/>
         </p:nvSpPr>
@@ -22417,7 +22730,7 @@
       </p:sp>
       <p:sp>
         <p:nvSpPr>
-          <p:cNvPr id="13" name="Text 10"/>
+          <p:cNvPr id="14" name="Text 11"/>
           <p:cNvSpPr/>
           <p:nvPr/>
         </p:nvSpPr>
@@ -22456,7 +22769,7 @@
       </p:sp>
       <p:sp>
         <p:nvSpPr>
-          <p:cNvPr id="14" name="Shape 11"/>
+          <p:cNvPr id="15" name="Shape 12"/>
           <p:cNvSpPr/>
           <p:nvPr/>
         </p:nvSpPr>
@@ -22476,7 +22789,7 @@
       </p:sp>
       <p:sp>
         <p:nvSpPr>
-          <p:cNvPr id="15" name="Text 12"/>
+          <p:cNvPr id="16" name="Text 13"/>
           <p:cNvSpPr/>
           <p:nvPr/>
         </p:nvSpPr>
@@ -22515,7 +22828,7 @@
       </p:sp>
       <p:sp>
         <p:nvSpPr>
-          <p:cNvPr id="16" name="Text 13"/>
+          <p:cNvPr id="17" name="Text 14"/>
           <p:cNvSpPr/>
           <p:nvPr/>
         </p:nvSpPr>
@@ -22554,7 +22867,7 @@
       </p:sp>
       <p:sp>
         <p:nvSpPr>
-          <p:cNvPr id="17" name="Shape 14"/>
+          <p:cNvPr id="18" name="Shape 15"/>
           <p:cNvSpPr/>
           <p:nvPr/>
         </p:nvSpPr>
@@ -22574,7 +22887,7 @@
       </p:sp>
       <p:sp>
         <p:nvSpPr>
-          <p:cNvPr id="18" name="Text 15"/>
+          <p:cNvPr id="19" name="Text 16"/>
           <p:cNvSpPr/>
           <p:nvPr/>
         </p:nvSpPr>
@@ -22613,7 +22926,7 @@
       </p:sp>
       <p:sp>
         <p:nvSpPr>
-          <p:cNvPr id="19" name="Text 16"/>
+          <p:cNvPr id="20" name="Text 17"/>
           <p:cNvSpPr/>
           <p:nvPr/>
         </p:nvSpPr>
@@ -22652,7 +22965,7 @@
       </p:sp>
       <p:sp>
         <p:nvSpPr>
-          <p:cNvPr id="20" name="Shape 17"/>
+          <p:cNvPr id="21" name="Shape 18"/>
           <p:cNvSpPr/>
           <p:nvPr/>
         </p:nvSpPr>
@@ -22674,7 +22987,7 @@
       </p:sp>
       <p:sp>
         <p:nvSpPr>
-          <p:cNvPr id="21" name="Text 18"/>
+          <p:cNvPr id="22" name="Text 19"/>
           <p:cNvSpPr/>
           <p:nvPr/>
         </p:nvSpPr>
@@ -22713,7 +23026,7 @@
       </p:sp>
       <p:sp>
         <p:nvSpPr>
-          <p:cNvPr id="22" name="Text 19"/>
+          <p:cNvPr id="23" name="Text 20"/>
           <p:cNvSpPr/>
           <p:nvPr/>
         </p:nvSpPr>
@@ -22755,7 +23068,7 @@
       </p:sp>
       <p:sp>
         <p:nvSpPr>
-          <p:cNvPr id="23" name="Shape 20"/>
+          <p:cNvPr id="24" name="Shape 21"/>
           <p:cNvSpPr/>
           <p:nvPr/>
         </p:nvSpPr>
@@ -22782,7 +23095,7 @@
       </p:sp>
       <p:sp>
         <p:nvSpPr>
-          <p:cNvPr id="24" name="Text 21"/>
+          <p:cNvPr id="25" name="Text 22"/>
           <p:cNvSpPr/>
           <p:nvPr/>
         </p:nvSpPr>
@@ -22834,7 +23147,7 @@
         </p:nvSpPr>
         <p:spPr>
           <a:xfrm>
-            <a:off x="11368735" y="6437376"/>
+            <a:off x="11368735" y="6327648"/>
             <a:ext cx="365760" cy="274320"/>
           </a:xfrm>
           <a:prstGeom prst="rect">
@@ -22881,13 +23194,6 @@
 <file path=ppt/slides/slide9.xml><?xml version="1.0" encoding="utf-8"?>
 <p:sld xmlns:a="http://schemas.openxmlformats.org/drawingml/2006/main" xmlns:r="http://schemas.openxmlformats.org/officeDocument/2006/relationships" xmlns:p="http://schemas.openxmlformats.org/presentationml/2006/main">
   <p:cSld name="Slide 9">
-    <p:bg>
-      <p:bgPr>
-        <a:solidFill>
-          <a:srgbClr val="FFFFFF"/>
-        </a:solidFill>
-      </p:bgPr>
-    </p:bg>
     <p:spTree>
       <p:nvGrpSpPr>
         <p:cNvPr id="1" name=""/>
@@ -22904,7 +23210,29 @@
       </p:grpSpPr>
       <p:sp>
         <p:nvSpPr>
-          <p:cNvPr id="2" name="Text 0"/>
+          <p:cNvPr id="2" name="Shape 0"/>
+          <p:cNvSpPr/>
+          <p:nvPr/>
+        </p:nvSpPr>
+        <p:spPr>
+          <a:xfrm>
+            <a:off x="231343" y="194767"/>
+            <a:ext cx="11716207" cy="6473952"/>
+          </a:xfrm>
+          <a:prstGeom prst="roundRect">
+            <a:avLst>
+              <a:gd name="adj" fmla="val 3107"/>
+            </a:avLst>
+          </a:prstGeom>
+          <a:solidFill>
+            <a:srgbClr val="FFFFFF"/>
+          </a:solidFill>
+          <a:ln/>
+        </p:spPr>
+      </p:sp>
+      <p:sp>
+        <p:nvSpPr>
+          <p:cNvPr id="3" name="Text 1"/>
           <p:cNvSpPr/>
           <p:nvPr/>
         </p:nvSpPr>
@@ -22943,7 +23271,7 @@
       </p:sp>
       <p:sp>
         <p:nvSpPr>
-          <p:cNvPr id="3" name="Text 1"/>
+          <p:cNvPr id="4" name="Text 2"/>
           <p:cNvSpPr/>
           <p:nvPr/>
         </p:nvSpPr>
@@ -22982,7 +23310,7 @@
       </p:sp>
       <p:sp>
         <p:nvSpPr>
-          <p:cNvPr id="4" name="Shape 2"/>
+          <p:cNvPr id="5" name="Shape 3"/>
           <p:cNvSpPr/>
           <p:nvPr/>
         </p:nvSpPr>
@@ -23004,7 +23332,7 @@
       </p:sp>
       <p:sp>
         <p:nvSpPr>
-          <p:cNvPr id="5" name="Text 3"/>
+          <p:cNvPr id="6" name="Text 4"/>
           <p:cNvSpPr/>
           <p:nvPr/>
         </p:nvSpPr>
@@ -23043,7 +23371,7 @@
       </p:sp>
       <p:pic>
         <p:nvPicPr>
-          <p:cNvPr id="6" name="Image 0" descr="preencoded.png">    </p:cNvPr>
+          <p:cNvPr id="7" name="Image 0" descr="preencoded.png">    </p:cNvPr>
           <p:cNvPicPr>
             <a:picLocks noChangeAspect="1"/>
           </p:cNvPicPr>
@@ -23057,7 +23385,7 @@
         </p:blipFill>
         <p:spPr>
           <a:xfrm>
-            <a:off x="566928" y="6254496"/>
+            <a:off x="566928" y="6126480"/>
             <a:ext cx="1481328" cy="457200"/>
           </a:xfrm>
           <a:prstGeom prst="rect">
@@ -24063,7 +24391,7 @@
       </p:graphicFrame>
       <p:sp>
         <p:nvSpPr>
-          <p:cNvPr id="8" name="Shape 4"/>
+          <p:cNvPr id="9" name="Shape 5"/>
           <p:cNvSpPr/>
           <p:nvPr/>
         </p:nvSpPr>
@@ -24085,7 +24413,7 @@
       </p:sp>
       <p:sp>
         <p:nvSpPr>
-          <p:cNvPr id="9" name="Text 5"/>
+          <p:cNvPr id="10" name="Text 6"/>
           <p:cNvSpPr/>
           <p:nvPr/>
         </p:nvSpPr>
@@ -24124,7 +24452,7 @@
       </p:sp>
       <p:sp>
         <p:nvSpPr>
-          <p:cNvPr id="10" name="Text 6"/>
+          <p:cNvPr id="11" name="Text 7"/>
           <p:cNvSpPr/>
           <p:nvPr/>
         </p:nvSpPr>
@@ -24176,7 +24504,7 @@
         </p:nvSpPr>
         <p:spPr>
           <a:xfrm>
-            <a:off x="11368735" y="6437376"/>
+            <a:off x="11368735" y="6327648"/>
             <a:ext cx="365760" cy="274320"/>
           </a:xfrm>
           <a:prstGeom prst="rect">

--- a/docs/decks/L12.pptx
+++ b/docs/decks/L12.pptx
@@ -2358,7 +2358,7 @@
         </p:nvSpPr>
         <p:spPr>
           <a:xfrm>
-            <a:off x="11368735" y="6327648"/>
+            <a:off x="11368735" y="6437376"/>
             <a:ext cx="365760" cy="274320"/>
           </a:xfrm>
           <a:prstGeom prst="rect">
@@ -2487,7 +2487,7 @@
         </p:nvSpPr>
         <p:spPr>
           <a:xfrm>
-            <a:off x="11368735" y="6327648"/>
+            <a:off x="11368735" y="6437376"/>
             <a:ext cx="365760" cy="274320"/>
           </a:xfrm>
           <a:prstGeom prst="rect">
@@ -3627,7 +3627,7 @@
         </p:blipFill>
         <p:spPr>
           <a:xfrm>
-            <a:off x="566928" y="6126480"/>
+            <a:off x="566928" y="6254496"/>
             <a:ext cx="1481328" cy="457200"/>
           </a:xfrm>
           <a:prstGeom prst="rect">
@@ -4533,7 +4533,7 @@
         </p:nvSpPr>
         <p:spPr>
           <a:xfrm>
-            <a:off x="11368735" y="6327648"/>
+            <a:off x="11368735" y="6437376"/>
             <a:ext cx="365760" cy="274320"/>
           </a:xfrm>
           <a:prstGeom prst="rect">
@@ -4810,7 +4810,7 @@
         </p:blipFill>
         <p:spPr>
           <a:xfrm>
-            <a:off x="566928" y="6126480"/>
+            <a:off x="566928" y="6254496"/>
             <a:ext cx="1481328" cy="457200"/>
           </a:xfrm>
           <a:prstGeom prst="rect">
@@ -5384,7 +5384,7 @@
         </p:nvSpPr>
         <p:spPr>
           <a:xfrm>
-            <a:off x="11368735" y="6327648"/>
+            <a:off x="11368735" y="6437376"/>
             <a:ext cx="365760" cy="274320"/>
           </a:xfrm>
           <a:prstGeom prst="rect">
@@ -5600,7 +5600,7 @@
         </p:blipFill>
         <p:spPr>
           <a:xfrm>
-            <a:off x="566928" y="6126480"/>
+            <a:off x="566928" y="6254496"/>
             <a:ext cx="1481328" cy="457200"/>
           </a:xfrm>
           <a:prstGeom prst="rect">
@@ -6990,7 +6990,7 @@
         </p:nvSpPr>
         <p:spPr>
           <a:xfrm>
-            <a:off x="11368735" y="6327648"/>
+            <a:off x="11368735" y="6437376"/>
             <a:ext cx="365760" cy="274320"/>
           </a:xfrm>
           <a:prstGeom prst="rect">
@@ -7206,7 +7206,7 @@
         </p:blipFill>
         <p:spPr>
           <a:xfrm>
-            <a:off x="566928" y="6126480"/>
+            <a:off x="566928" y="6254496"/>
             <a:ext cx="1481328" cy="457200"/>
           </a:xfrm>
           <a:prstGeom prst="rect">
@@ -7815,7 +7815,7 @@
         </p:nvSpPr>
         <p:spPr>
           <a:xfrm>
-            <a:off x="11368735" y="6327648"/>
+            <a:off x="11368735" y="6437376"/>
             <a:ext cx="365760" cy="274320"/>
           </a:xfrm>
           <a:prstGeom prst="rect">
@@ -8031,7 +8031,7 @@
         </p:blipFill>
         <p:spPr>
           <a:xfrm>
-            <a:off x="566928" y="6126480"/>
+            <a:off x="566928" y="6254496"/>
             <a:ext cx="1481328" cy="457200"/>
           </a:xfrm>
           <a:prstGeom prst="rect">
@@ -8643,7 +8643,7 @@
         </p:nvSpPr>
         <p:spPr>
           <a:xfrm>
-            <a:off x="11368735" y="6327648"/>
+            <a:off x="11368735" y="6437376"/>
             <a:ext cx="365760" cy="274320"/>
           </a:xfrm>
           <a:prstGeom prst="rect">
@@ -8820,7 +8820,7 @@
         </p:blipFill>
         <p:spPr>
           <a:xfrm>
-            <a:off x="566928" y="6126480"/>
+            <a:off x="566928" y="6254496"/>
             <a:ext cx="1481328" cy="457200"/>
           </a:xfrm>
           <a:prstGeom prst="rect">
@@ -9591,7 +9591,7 @@
         </p:nvSpPr>
         <p:spPr>
           <a:xfrm>
-            <a:off x="11368735" y="6327648"/>
+            <a:off x="11368735" y="6437376"/>
             <a:ext cx="365760" cy="274320"/>
           </a:xfrm>
           <a:prstGeom prst="rect">
@@ -9768,7 +9768,7 @@
         </p:blipFill>
         <p:spPr>
           <a:xfrm>
-            <a:off x="566928" y="6126480"/>
+            <a:off x="566928" y="6254496"/>
             <a:ext cx="1481328" cy="457200"/>
           </a:xfrm>
           <a:prstGeom prst="rect">
@@ -10348,7 +10348,7 @@
         </p:nvSpPr>
         <p:spPr>
           <a:xfrm>
-            <a:off x="11368735" y="6327648"/>
+            <a:off x="11368735" y="6437376"/>
             <a:ext cx="365760" cy="274320"/>
           </a:xfrm>
           <a:prstGeom prst="rect">
@@ -10525,7 +10525,7 @@
         </p:blipFill>
         <p:spPr>
           <a:xfrm>
-            <a:off x="566928" y="6126480"/>
+            <a:off x="566928" y="6254496"/>
             <a:ext cx="1481328" cy="457200"/>
           </a:xfrm>
           <a:prstGeom prst="rect">
@@ -10928,7 +10928,7 @@
         </p:nvSpPr>
         <p:spPr>
           <a:xfrm>
-            <a:off x="11368735" y="6327648"/>
+            <a:off x="11368735" y="6437376"/>
             <a:ext cx="365760" cy="274320"/>
           </a:xfrm>
           <a:prstGeom prst="rect">
@@ -11105,7 +11105,7 @@
         </p:blipFill>
         <p:spPr>
           <a:xfrm>
-            <a:off x="566928" y="6126480"/>
+            <a:off x="566928" y="6254496"/>
             <a:ext cx="1481328" cy="457200"/>
           </a:xfrm>
           <a:prstGeom prst="rect">
@@ -11615,7 +11615,7 @@
         </p:nvSpPr>
         <p:spPr>
           <a:xfrm>
-            <a:off x="11368735" y="6327648"/>
+            <a:off x="11368735" y="6437376"/>
             <a:ext cx="365760" cy="274320"/>
           </a:xfrm>
           <a:prstGeom prst="rect">
@@ -11792,7 +11792,7 @@
         </p:blipFill>
         <p:spPr>
           <a:xfrm>
-            <a:off x="566928" y="6126480"/>
+            <a:off x="566928" y="6254496"/>
             <a:ext cx="1481328" cy="457200"/>
           </a:xfrm>
           <a:prstGeom prst="rect">
@@ -12372,7 +12372,7 @@
         </p:nvSpPr>
         <p:spPr>
           <a:xfrm>
-            <a:off x="11368735" y="6327648"/>
+            <a:off x="11368735" y="6437376"/>
             <a:ext cx="365760" cy="274320"/>
           </a:xfrm>
           <a:prstGeom prst="rect">
@@ -12591,7 +12591,7 @@
         </p:blipFill>
         <p:spPr>
           <a:xfrm>
-            <a:off x="566928" y="6126480"/>
+            <a:off x="566928" y="6254496"/>
             <a:ext cx="1481328" cy="457200"/>
           </a:xfrm>
           <a:prstGeom prst="rect">
@@ -13446,7 +13446,7 @@
         </p:nvSpPr>
         <p:spPr>
           <a:xfrm>
-            <a:off x="11368735" y="6327648"/>
+            <a:off x="11368735" y="6437376"/>
             <a:ext cx="365760" cy="274320"/>
           </a:xfrm>
           <a:prstGeom prst="rect">
@@ -13623,7 +13623,7 @@
         </p:blipFill>
         <p:spPr>
           <a:xfrm>
-            <a:off x="566928" y="6126480"/>
+            <a:off x="566928" y="6254496"/>
             <a:ext cx="1481328" cy="457200"/>
           </a:xfrm>
           <a:prstGeom prst="rect">
@@ -14122,7 +14122,7 @@
         </p:nvSpPr>
         <p:spPr>
           <a:xfrm>
-            <a:off x="11368735" y="6327648"/>
+            <a:off x="11368735" y="6437376"/>
             <a:ext cx="365760" cy="274320"/>
           </a:xfrm>
           <a:prstGeom prst="rect">
@@ -14820,7 +14820,7 @@
         </p:blipFill>
         <p:spPr>
           <a:xfrm>
-            <a:off x="566928" y="6126480"/>
+            <a:off x="566928" y="6254496"/>
             <a:ext cx="1481328" cy="457200"/>
           </a:xfrm>
           <a:prstGeom prst="rect">
@@ -16404,7 +16404,7 @@
         </p:nvSpPr>
         <p:spPr>
           <a:xfrm>
-            <a:off x="11368735" y="6327648"/>
+            <a:off x="11368735" y="6437376"/>
             <a:ext cx="365760" cy="274320"/>
           </a:xfrm>
           <a:prstGeom prst="rect">
@@ -16623,7 +16623,7 @@
         </p:blipFill>
         <p:spPr>
           <a:xfrm>
-            <a:off x="566928" y="6126480"/>
+            <a:off x="566928" y="6254496"/>
             <a:ext cx="1481328" cy="457200"/>
           </a:xfrm>
           <a:prstGeom prst="rect">
@@ -17360,7 +17360,7 @@
         </p:nvSpPr>
         <p:spPr>
           <a:xfrm>
-            <a:off x="11368735" y="6327648"/>
+            <a:off x="11368735" y="6437376"/>
             <a:ext cx="365760" cy="274320"/>
           </a:xfrm>
           <a:prstGeom prst="rect">
@@ -17576,7 +17576,7 @@
         </p:blipFill>
         <p:spPr>
           <a:xfrm>
-            <a:off x="566928" y="6126480"/>
+            <a:off x="566928" y="6254496"/>
             <a:ext cx="1481328" cy="457200"/>
           </a:xfrm>
           <a:prstGeom prst="rect">
@@ -18357,7 +18357,7 @@
         </p:nvSpPr>
         <p:spPr>
           <a:xfrm>
-            <a:off x="11368735" y="6327648"/>
+            <a:off x="11368735" y="6437376"/>
             <a:ext cx="365760" cy="274320"/>
           </a:xfrm>
           <a:prstGeom prst="rect">
@@ -18573,7 +18573,7 @@
         </p:blipFill>
         <p:spPr>
           <a:xfrm>
-            <a:off x="566928" y="6126480"/>
+            <a:off x="566928" y="6254496"/>
             <a:ext cx="1481328" cy="457200"/>
           </a:xfrm>
           <a:prstGeom prst="rect">
@@ -20508,7 +20508,7 @@
         </p:nvSpPr>
         <p:spPr>
           <a:xfrm>
-            <a:off x="11368735" y="6327648"/>
+            <a:off x="11368735" y="6437376"/>
             <a:ext cx="365760" cy="274320"/>
           </a:xfrm>
           <a:prstGeom prst="rect">
@@ -20724,7 +20724,7 @@
         </p:blipFill>
         <p:spPr>
           <a:xfrm>
-            <a:off x="566928" y="6126480"/>
+            <a:off x="566928" y="6254496"/>
             <a:ext cx="1481328" cy="457200"/>
           </a:xfrm>
           <a:prstGeom prst="rect">
@@ -21933,7 +21933,7 @@
         </p:nvSpPr>
         <p:spPr>
           <a:xfrm>
-            <a:off x="11368735" y="6327648"/>
+            <a:off x="11368735" y="6437376"/>
             <a:ext cx="365760" cy="274320"/>
           </a:xfrm>
           <a:prstGeom prst="rect">
@@ -22149,7 +22149,7 @@
         </p:blipFill>
         <p:spPr>
           <a:xfrm>
-            <a:off x="566928" y="6126480"/>
+            <a:off x="566928" y="6254496"/>
             <a:ext cx="1481328" cy="457200"/>
           </a:xfrm>
           <a:prstGeom prst="rect">
@@ -22756,7 +22756,7 @@
         </p:nvSpPr>
         <p:spPr>
           <a:xfrm>
-            <a:off x="11368735" y="6327648"/>
+            <a:off x="11368735" y="6437376"/>
             <a:ext cx="365760" cy="274320"/>
           </a:xfrm>
           <a:prstGeom prst="rect">
@@ -22972,7 +22972,7 @@
         </p:blipFill>
         <p:spPr>
           <a:xfrm>
-            <a:off x="566928" y="6126480"/>
+            <a:off x="566928" y="6254496"/>
             <a:ext cx="1481328" cy="457200"/>
           </a:xfrm>
           <a:prstGeom prst="rect">
@@ -24091,7 +24091,7 @@
         </p:nvSpPr>
         <p:spPr>
           <a:xfrm>
-            <a:off x="11368735" y="6327648"/>
+            <a:off x="11368735" y="6437376"/>
             <a:ext cx="365760" cy="274320"/>
           </a:xfrm>
           <a:prstGeom prst="rect">

--- a/docs/decks/L12.pptx
+++ b/docs/decks/L12.pptx
@@ -2985,17 +2985,17 @@
               <a:buNone/>
             </a:pPr>
             <a:r>
-              <a:rPr lang="en-US" sz="4000" b="1" dirty="0">
+              <a:rPr lang="en-US" sz="3600" dirty="0">
                 <a:solidFill>
                   <a:srgbClr val="FFFFFF"/>
                 </a:solidFill>
-                <a:latin typeface="Montserrat" pitchFamily="34" charset="0"/>
-                <a:ea typeface="Montserrat" pitchFamily="34" charset="-122"/>
-                <a:cs typeface="Montserrat" pitchFamily="34" charset="-120"/>
+                <a:latin typeface="Unbounded" pitchFamily="34" charset="0"/>
+                <a:ea typeface="Unbounded" pitchFamily="34" charset="-122"/>
+                <a:cs typeface="Unbounded" pitchFamily="34" charset="-120"/>
               </a:rPr>
               <a:t>Фінал: LLMOps</a:t>
             </a:r>
-            <a:endParaRPr lang="en-US" sz="4000" dirty="0"/>
+            <a:endParaRPr lang="en-US" sz="3600" dirty="0"/>
           </a:p>
           <a:p>
             <a:pPr indent="0" marL="0">
@@ -3005,17 +3005,17 @@
               <a:buNone/>
             </a:pPr>
             <a:r>
-              <a:rPr lang="en-US" sz="4000" b="1" dirty="0">
+              <a:rPr lang="en-US" sz="3600" dirty="0">
                 <a:solidFill>
                   <a:srgbClr val="FFFFFF"/>
                 </a:solidFill>
-                <a:latin typeface="Montserrat" pitchFamily="34" charset="0"/>
-                <a:ea typeface="Montserrat" pitchFamily="34" charset="-122"/>
-                <a:cs typeface="Montserrat" pitchFamily="34" charset="-120"/>
+                <a:latin typeface="Unbounded" pitchFamily="34" charset="0"/>
+                <a:ea typeface="Unbounded" pitchFamily="34" charset="-122"/>
+                <a:cs typeface="Unbounded" pitchFamily="34" charset="-120"/>
               </a:rPr>
               <a:t>operating model</a:t>
             </a:r>
-            <a:endParaRPr lang="en-US" sz="4000" dirty="0"/>
+            <a:endParaRPr lang="en-US" sz="3600" dirty="0"/>
           </a:p>
         </p:txBody>
       </p:sp>
@@ -3536,13 +3536,13 @@
               <a:buNone/>
             </a:pPr>
             <a:r>
-              <a:rPr lang="en-US" sz="2400" b="1" dirty="0">
+              <a:rPr lang="en-US" sz="2400" dirty="0">
                 <a:solidFill>
                   <a:srgbClr val="FFFFFF"/>
                 </a:solidFill>
-                <a:latin typeface="Montserrat" pitchFamily="34" charset="0"/>
-                <a:ea typeface="Montserrat" pitchFamily="34" charset="-122"/>
-                <a:cs typeface="Montserrat" pitchFamily="34" charset="-120"/>
+                <a:latin typeface="Unbounded" pitchFamily="34" charset="0"/>
+                <a:ea typeface="Unbounded" pitchFamily="34" charset="-122"/>
+                <a:cs typeface="Unbounded" pitchFamily="34" charset="-120"/>
               </a:rPr>
               <a:t>30-day rollout для своєї команди</a:t>
             </a:r>
@@ -3558,7 +3558,7 @@
         </p:nvSpPr>
         <p:spPr>
           <a:xfrm>
-            <a:off x="1280160" y="1024128"/>
+            <a:off x="1280160" y="1218895"/>
             <a:ext cx="777240" cy="256032"/>
           </a:xfrm>
           <a:prstGeom prst="roundRect">
@@ -3580,7 +3580,7 @@
         </p:nvSpPr>
         <p:spPr>
           <a:xfrm>
-            <a:off x="1280160" y="1024128"/>
+            <a:off x="1280160" y="1218895"/>
             <a:ext cx="777240" cy="256032"/>
           </a:xfrm>
           <a:prstGeom prst="rect">
@@ -4658,13 +4658,13 @@
               <a:buNone/>
             </a:pPr>
             <a:r>
-              <a:rPr lang="en-US" sz="2400" b="1" dirty="0">
+              <a:rPr lang="en-US" sz="2400" dirty="0">
                 <a:solidFill>
                   <a:srgbClr val="FFFFFF"/>
                 </a:solidFill>
-                <a:latin typeface="Montserrat" pitchFamily="34" charset="0"/>
-                <a:ea typeface="Montserrat" pitchFamily="34" charset="-122"/>
-                <a:cs typeface="Montserrat" pitchFamily="34" charset="-120"/>
+                <a:latin typeface="Unbounded" pitchFamily="34" charset="0"/>
+                <a:ea typeface="Unbounded" pitchFamily="34" charset="-122"/>
+                <a:cs typeface="Unbounded" pitchFamily="34" charset="-120"/>
               </a:rPr>
               <a:t>/metrics і зовнішні дашборди</a:t>
             </a:r>
@@ -5509,13 +5509,13 @@
               <a:buNone/>
             </a:pPr>
             <a:r>
-              <a:rPr lang="en-US" sz="2400" b="1" dirty="0">
+              <a:rPr lang="en-US" sz="2400" dirty="0">
                 <a:solidFill>
                   <a:srgbClr val="FFFFFF"/>
                 </a:solidFill>
-                <a:latin typeface="Montserrat" pitchFamily="34" charset="0"/>
-                <a:ea typeface="Montserrat" pitchFamily="34" charset="-122"/>
-                <a:cs typeface="Montserrat" pitchFamily="34" charset="-120"/>
+                <a:latin typeface="Unbounded" pitchFamily="34" charset="0"/>
+                <a:ea typeface="Unbounded" pitchFamily="34" charset="-122"/>
+                <a:cs typeface="Unbounded" pitchFamily="34" charset="-120"/>
               </a:rPr>
               <a:t>Наступний шар — за сигналом, а не за модою</a:t>
             </a:r>
@@ -5531,7 +5531,7 @@
         </p:nvSpPr>
         <p:spPr>
           <a:xfrm>
-            <a:off x="1280160" y="1193140"/>
+            <a:off x="1280160" y="1218895"/>
             <a:ext cx="777240" cy="256032"/>
           </a:xfrm>
           <a:prstGeom prst="roundRect">
@@ -5553,7 +5553,7 @@
         </p:nvSpPr>
         <p:spPr>
           <a:xfrm>
-            <a:off x="1280160" y="1193140"/>
+            <a:off x="1280160" y="1218895"/>
             <a:ext cx="777240" cy="256032"/>
           </a:xfrm>
           <a:prstGeom prst="rect">
@@ -7115,13 +7115,13 @@
               <a:buNone/>
             </a:pPr>
             <a:r>
-              <a:rPr lang="en-US" sz="2400" b="1" dirty="0">
+              <a:rPr lang="en-US" sz="2400" dirty="0">
                 <a:solidFill>
                   <a:srgbClr val="FFFFFF"/>
                 </a:solidFill>
-                <a:latin typeface="Montserrat" pitchFamily="34" charset="0"/>
-                <a:ea typeface="Montserrat" pitchFamily="34" charset="-122"/>
-                <a:cs typeface="Montserrat" pitchFamily="34" charset="-120"/>
+                <a:latin typeface="Unbounded" pitchFamily="34" charset="0"/>
+                <a:ea typeface="Unbounded" pitchFamily="34" charset="-122"/>
+                <a:cs typeface="Unbounded" pitchFamily="34" charset="-120"/>
               </a:rPr>
               <a:t>Куди поїде система через рік</a:t>
             </a:r>
@@ -7940,13 +7940,13 @@
               <a:buNone/>
             </a:pPr>
             <a:r>
-              <a:rPr lang="en-US" sz="2400" b="1" dirty="0">
+              <a:rPr lang="en-US" sz="2400" dirty="0">
                 <a:solidFill>
                   <a:srgbClr val="FFFFFF"/>
                 </a:solidFill>
-                <a:latin typeface="Montserrat" pitchFamily="34" charset="0"/>
-                <a:ea typeface="Montserrat" pitchFamily="34" charset="-122"/>
-                <a:cs typeface="Montserrat" pitchFamily="34" charset="-120"/>
+                <a:latin typeface="Unbounded" pitchFamily="34" charset="0"/>
+                <a:ea typeface="Unbounded" pitchFamily="34" charset="-122"/>
+                <a:cs typeface="Unbounded" pitchFamily="34" charset="-120"/>
               </a:rPr>
               <a:t>За межами курсу — надбудови, які не ламають контур</a:t>
             </a:r>
@@ -7962,7 +7962,7 @@
         </p:nvSpPr>
         <p:spPr>
           <a:xfrm>
-            <a:off x="1280160" y="1193140"/>
+            <a:off x="1280160" y="1218895"/>
             <a:ext cx="777240" cy="256032"/>
           </a:xfrm>
           <a:prstGeom prst="roundRect">
@@ -7984,7 +7984,7 @@
         </p:nvSpPr>
         <p:spPr>
           <a:xfrm>
-            <a:off x="1280160" y="1193140"/>
+            <a:off x="1280160" y="1218895"/>
             <a:ext cx="777240" cy="256032"/>
           </a:xfrm>
           <a:prstGeom prst="rect">
@@ -8729,13 +8729,13 @@
               <a:buNone/>
             </a:pPr>
             <a:r>
-              <a:rPr lang="en-US" sz="2400" b="1" dirty="0">
+              <a:rPr lang="en-US" sz="2400" dirty="0">
                 <a:solidFill>
                   <a:srgbClr val="FFFFFF"/>
                 </a:solidFill>
-                <a:latin typeface="Montserrat" pitchFamily="34" charset="0"/>
-                <a:ea typeface="Montserrat" pitchFamily="34" charset="-122"/>
-                <a:cs typeface="Montserrat" pitchFamily="34" charset="-120"/>
+                <a:latin typeface="Unbounded" pitchFamily="34" charset="0"/>
+                <a:ea typeface="Unbounded" pitchFamily="34" charset="-122"/>
+                <a:cs typeface="Unbounded" pitchFamily="34" charset="-120"/>
               </a:rPr>
               <a:t>Зараз ви побачите — і навіщо</a:t>
             </a:r>
@@ -9677,13 +9677,13 @@
               <a:buNone/>
             </a:pPr>
             <a:r>
-              <a:rPr lang="en-US" sz="2400" b="1" dirty="0">
+              <a:rPr lang="en-US" sz="2400" dirty="0">
                 <a:solidFill>
                   <a:srgbClr val="FFFFFF"/>
                 </a:solidFill>
-                <a:latin typeface="Montserrat" pitchFamily="34" charset="0"/>
-                <a:ea typeface="Montserrat" pitchFamily="34" charset="-122"/>
-                <a:cs typeface="Montserrat" pitchFamily="34" charset="-120"/>
+                <a:latin typeface="Unbounded" pitchFamily="34" charset="0"/>
+                <a:ea typeface="Unbounded" pitchFamily="34" charset="-122"/>
+                <a:cs typeface="Unbounded" pitchFamily="34" charset="-120"/>
               </a:rPr>
               <a:t>Лабораторна: чотири кроки + опційний</a:t>
             </a:r>
@@ -9699,7 +9699,7 @@
         </p:nvSpPr>
         <p:spPr>
           <a:xfrm>
-            <a:off x="566928" y="1024128"/>
+            <a:off x="566928" y="1218895"/>
             <a:ext cx="950976" cy="256032"/>
           </a:xfrm>
           <a:prstGeom prst="roundRect">
@@ -9721,7 +9721,7 @@
         </p:nvSpPr>
         <p:spPr>
           <a:xfrm>
-            <a:off x="566928" y="1024128"/>
+            <a:off x="566928" y="1218895"/>
             <a:ext cx="950976" cy="256032"/>
           </a:xfrm>
           <a:prstGeom prst="rect">
@@ -10434,13 +10434,13 @@
               <a:buNone/>
             </a:pPr>
             <a:r>
-              <a:rPr lang="en-US" sz="2400" b="1" dirty="0">
+              <a:rPr lang="en-US" sz="2400" dirty="0">
                 <a:solidFill>
                   <a:srgbClr val="FFFFFF"/>
                 </a:solidFill>
-                <a:latin typeface="Montserrat" pitchFamily="34" charset="0"/>
-                <a:ea typeface="Montserrat" pitchFamily="34" charset="-122"/>
-                <a:cs typeface="Montserrat" pitchFamily="34" charset="-120"/>
+                <a:latin typeface="Unbounded" pitchFamily="34" charset="0"/>
+                <a:ea typeface="Unbounded" pitchFamily="34" charset="-122"/>
+                <a:cs typeface="Unbounded" pitchFamily="34" charset="-120"/>
               </a:rPr>
               <a:t>Що це довело</a:t>
             </a:r>
@@ -11014,13 +11014,13 @@
               <a:buNone/>
             </a:pPr>
             <a:r>
-              <a:rPr lang="en-US" sz="2400" b="1" dirty="0">
+              <a:rPr lang="en-US" sz="2400" dirty="0">
                 <a:solidFill>
                   <a:srgbClr val="FFFFFF"/>
                 </a:solidFill>
-                <a:latin typeface="Montserrat" pitchFamily="34" charset="0"/>
-                <a:ea typeface="Montserrat" pitchFamily="34" charset="-122"/>
-                <a:cs typeface="Montserrat" pitchFamily="34" charset="-120"/>
+                <a:latin typeface="Unbounded" pitchFamily="34" charset="0"/>
+                <a:ea typeface="Unbounded" pitchFamily="34" charset="-122"/>
+                <a:cs typeface="Unbounded" pitchFamily="34" charset="-120"/>
               </a:rPr>
               <a:t>Перевір себе</a:t>
             </a:r>
@@ -11701,13 +11701,13 @@
               <a:buNone/>
             </a:pPr>
             <a:r>
-              <a:rPr lang="en-US" sz="2400" b="1" dirty="0">
+              <a:rPr lang="en-US" sz="2400" dirty="0">
                 <a:solidFill>
                   <a:srgbClr val="FFFFFF"/>
                 </a:solidFill>
-                <a:latin typeface="Montserrat" pitchFamily="34" charset="0"/>
-                <a:ea typeface="Montserrat" pitchFamily="34" charset="-122"/>
-                <a:cs typeface="Montserrat" pitchFamily="34" charset="-120"/>
+                <a:latin typeface="Unbounded" pitchFamily="34" charset="0"/>
+                <a:ea typeface="Unbounded" pitchFamily="34" charset="-122"/>
+                <a:cs typeface="Unbounded" pitchFamily="34" charset="-120"/>
               </a:rPr>
               <a:t>Антипатерни фіналу</a:t>
             </a:r>
@@ -12458,13 +12458,13 @@
               <a:buNone/>
             </a:pPr>
             <a:r>
-              <a:rPr lang="en-US" sz="2400" b="1" dirty="0">
+              <a:rPr lang="en-US" sz="2400" dirty="0">
                 <a:solidFill>
                   <a:srgbClr val="FFFFFF"/>
                 </a:solidFill>
-                <a:latin typeface="Montserrat" pitchFamily="34" charset="0"/>
-                <a:ea typeface="Montserrat" pitchFamily="34" charset="-122"/>
-                <a:cs typeface="Montserrat" pitchFamily="34" charset="-120"/>
+                <a:latin typeface="Unbounded" pitchFamily="34" charset="0"/>
+                <a:ea typeface="Unbounded" pitchFamily="34" charset="-122"/>
+                <a:cs typeface="Unbounded" pitchFamily="34" charset="-120"/>
               </a:rPr>
               <a:t>Що ви зможете після уроку</a:t>
             </a:r>
@@ -13532,13 +13532,13 @@
               <a:buNone/>
             </a:pPr>
             <a:r>
-              <a:rPr lang="en-US" sz="2400" b="1" dirty="0">
+              <a:rPr lang="en-US" sz="2400" dirty="0">
                 <a:solidFill>
                   <a:srgbClr val="FFFFFF"/>
                 </a:solidFill>
-                <a:latin typeface="Montserrat" pitchFamily="34" charset="0"/>
-                <a:ea typeface="Montserrat" pitchFamily="34" charset="-122"/>
-                <a:cs typeface="Montserrat" pitchFamily="34" charset="-120"/>
+                <a:latin typeface="Unbounded" pitchFamily="34" charset="0"/>
+                <a:ea typeface="Unbounded" pitchFamily="34" charset="-122"/>
+                <a:cs typeface="Unbounded" pitchFamily="34" charset="-120"/>
               </a:rPr>
               <a:t>Домашнє завдання</a:t>
             </a:r>
@@ -14729,13 +14729,13 @@
               <a:buNone/>
             </a:pPr>
             <a:r>
-              <a:rPr lang="en-US" sz="2400" b="1" dirty="0">
+              <a:rPr lang="en-US" sz="2400" dirty="0">
                 <a:solidFill>
                   <a:srgbClr val="FFFFFF"/>
                 </a:solidFill>
-                <a:latin typeface="Montserrat" pitchFamily="34" charset="0"/>
-                <a:ea typeface="Montserrat" pitchFamily="34" charset="-122"/>
-                <a:cs typeface="Montserrat" pitchFamily="34" charset="-120"/>
+                <a:latin typeface="Unbounded" pitchFamily="34" charset="0"/>
+                <a:ea typeface="Unbounded" pitchFamily="34" charset="-122"/>
+                <a:cs typeface="Unbounded" pitchFamily="34" charset="-120"/>
               </a:rPr>
               <a:t>Маршрут на сьогодні</a:t>
             </a:r>
@@ -16490,13 +16490,13 @@
               <a:buNone/>
             </a:pPr>
             <a:r>
-              <a:rPr lang="en-US" sz="2400" b="1" dirty="0">
+              <a:rPr lang="en-US" sz="2400" dirty="0">
                 <a:solidFill>
                   <a:srgbClr val="FFFFFF"/>
                 </a:solidFill>
-                <a:latin typeface="Montserrat" pitchFamily="34" charset="0"/>
-                <a:ea typeface="Montserrat" pitchFamily="34" charset="-122"/>
-                <a:cs typeface="Montserrat" pitchFamily="34" charset="-120"/>
+                <a:latin typeface="Unbounded" pitchFamily="34" charset="0"/>
+                <a:ea typeface="Unbounded" pitchFamily="34" charset="-122"/>
+                <a:cs typeface="Unbounded" pitchFamily="34" charset="-120"/>
               </a:rPr>
               <a:t>Терміни, якими користуватимемось</a:t>
             </a:r>
@@ -16512,7 +16512,7 @@
         </p:nvSpPr>
         <p:spPr>
           <a:xfrm>
-            <a:off x="566928" y="1005840"/>
+            <a:off x="566928" y="1200607"/>
             <a:ext cx="6839712" cy="256032"/>
           </a:xfrm>
           <a:prstGeom prst="rect">
@@ -16554,7 +16554,7 @@
         </p:nvSpPr>
         <p:spPr>
           <a:xfrm>
-            <a:off x="566928" y="1271016"/>
+            <a:off x="566928" y="1465783"/>
             <a:ext cx="777240" cy="256032"/>
           </a:xfrm>
           <a:prstGeom prst="roundRect">
@@ -16576,7 +16576,7 @@
         </p:nvSpPr>
         <p:spPr>
           <a:xfrm>
-            <a:off x="566928" y="1271016"/>
+            <a:off x="566928" y="1465783"/>
             <a:ext cx="777240" cy="256032"/>
           </a:xfrm>
           <a:prstGeom prst="rect">
@@ -17485,13 +17485,13 @@
               <a:buNone/>
             </a:pPr>
             <a:r>
-              <a:rPr lang="en-US" sz="2400" b="1" dirty="0">
+              <a:rPr lang="en-US" sz="2400" dirty="0">
                 <a:solidFill>
                   <a:srgbClr val="FFFFFF"/>
                 </a:solidFill>
-                <a:latin typeface="Montserrat" pitchFamily="34" charset="0"/>
-                <a:ea typeface="Montserrat" pitchFamily="34" charset="-122"/>
-                <a:cs typeface="Montserrat" pitchFamily="34" charset="-120"/>
+                <a:latin typeface="Unbounded" pitchFamily="34" charset="0"/>
+                <a:ea typeface="Unbounded" pitchFamily="34" charset="-122"/>
+                <a:cs typeface="Unbounded" pitchFamily="34" charset="-120"/>
               </a:rPr>
               <a:t>Від трьох рядків до контуру</a:t>
             </a:r>
@@ -18482,13 +18482,13 @@
               <a:buNone/>
             </a:pPr>
             <a:r>
-              <a:rPr lang="en-US" sz="2400" b="1" dirty="0">
+              <a:rPr lang="en-US" sz="2400" dirty="0">
                 <a:solidFill>
                   <a:srgbClr val="FFFFFF"/>
                 </a:solidFill>
-                <a:latin typeface="Montserrat" pitchFamily="34" charset="0"/>
-                <a:ea typeface="Montserrat" pitchFamily="34" charset="-122"/>
-                <a:cs typeface="Montserrat" pitchFamily="34" charset="-120"/>
+                <a:latin typeface="Unbounded" pitchFamily="34" charset="0"/>
+                <a:ea typeface="Unbounded" pitchFamily="34" charset="-122"/>
+                <a:cs typeface="Unbounded" pitchFamily="34" charset="-120"/>
               </a:rPr>
               <a:t>Точка Б: один сценарій наскрізь</a:t>
             </a:r>
@@ -20633,13 +20633,13 @@
               <a:buNone/>
             </a:pPr>
             <a:r>
-              <a:rPr lang="en-US" sz="2400" b="1" dirty="0">
+              <a:rPr lang="en-US" sz="2400" dirty="0">
                 <a:solidFill>
                   <a:srgbClr val="FFFFFF"/>
                 </a:solidFill>
-                <a:latin typeface="Montserrat" pitchFamily="34" charset="0"/>
-                <a:ea typeface="Montserrat" pitchFamily="34" charset="-122"/>
-                <a:cs typeface="Montserrat" pitchFamily="34" charset="-120"/>
+                <a:latin typeface="Unbounded" pitchFamily="34" charset="0"/>
+                <a:ea typeface="Unbounded" pitchFamily="34" charset="-122"/>
+                <a:cs typeface="Unbounded" pitchFamily="34" charset="-120"/>
               </a:rPr>
               <a:t>Runbook — сценарій, а не есе</a:t>
             </a:r>
@@ -22058,13 +22058,13 @@
               <a:buNone/>
             </a:pPr>
             <a:r>
-              <a:rPr lang="en-US" sz="2400" b="1" dirty="0">
+              <a:rPr lang="en-US" sz="2400" dirty="0">
                 <a:solidFill>
                   <a:srgbClr val="FFFFFF"/>
                 </a:solidFill>
-                <a:latin typeface="Montserrat" pitchFamily="34" charset="0"/>
-                <a:ea typeface="Montserrat" pitchFamily="34" charset="-122"/>
-                <a:cs typeface="Montserrat" pitchFamily="34" charset="-120"/>
+                <a:latin typeface="Unbounded" pitchFamily="34" charset="0"/>
+                <a:ea typeface="Unbounded" pitchFamily="34" charset="-122"/>
+                <a:cs typeface="Unbounded" pitchFamily="34" charset="-120"/>
               </a:rPr>
               <a:t>Інцидент наживо: таймлайн</a:t>
             </a:r>
@@ -22881,13 +22881,13 @@
               <a:buNone/>
             </a:pPr>
             <a:r>
-              <a:rPr lang="en-US" sz="2400" b="1" dirty="0">
+              <a:rPr lang="en-US" sz="2400" dirty="0">
                 <a:solidFill>
                   <a:srgbClr val="FFFFFF"/>
                 </a:solidFill>
-                <a:latin typeface="Montserrat" pitchFamily="34" charset="0"/>
-                <a:ea typeface="Montserrat" pitchFamily="34" charset="-122"/>
-                <a:cs typeface="Montserrat" pitchFamily="34" charset="-120"/>
+                <a:latin typeface="Unbounded" pitchFamily="34" charset="0"/>
+                <a:ea typeface="Unbounded" pitchFamily="34" charset="-122"/>
+                <a:cs typeface="Unbounded" pitchFamily="34" charset="-120"/>
               </a:rPr>
               <a:t>KPI-мова: за що дають бюджет</a:t>
             </a:r>

--- a/docs/decks/L12.pptx
+++ b/docs/decks/L12.pptx
@@ -2376,7 +2376,7 @@
             <a:lvl1pPr>
               <a:defRPr sz="850">
                 <a:solidFill>
-                  <a:srgbClr val="8A82A0"/>
+                  <a:srgbClr val="9A94AA"/>
                 </a:solidFill>
                 <a:latin typeface="Courier New"/>
                 <a:ea typeface="Courier New"/>
@@ -2458,6 +2458,62 @@
 </p:sldLayout>
 </file>
 
+<file path=ppt/slideLayouts/slideLayout3.xml><?xml version="1.0" encoding="utf-8"?>
+<p:sldLayout xmlns:a="http://schemas.openxmlformats.org/drawingml/2006/main" xmlns:r="http://schemas.openxmlformats.org/officeDocument/2006/relationships" xmlns:p="http://schemas.openxmlformats.org/presentationml/2006/main" preserve="1">
+  <p:cSld name="NEO_COVER">
+    <p:bg>
+      <p:bgPr>
+        <a:solidFill>
+          <a:srgbClr val="000000"/>
+        </a:solidFill>
+      </p:bgPr>
+    </p:bg>
+    <p:spTree>
+      <p:nvGrpSpPr>
+        <p:cNvPr id="1" name=""/>
+        <p:cNvGrpSpPr/>
+        <p:nvPr/>
+      </p:nvGrpSpPr>
+      <p:grpSpPr>
+        <a:xfrm>
+          <a:off x="0" y="0"/>
+          <a:ext cx="0" cy="0"/>
+          <a:chOff x="0" y="0"/>
+          <a:chExt cx="0" cy="0"/>
+        </a:xfrm>
+      </p:grpSpPr>
+      <p:pic>
+        <p:nvPicPr>
+          <p:cNvPr id="2" name="Image 0" descr="preencoded.png">    </p:cNvPr>
+          <p:cNvPicPr>
+            <a:picLocks noChangeAspect="1"/>
+          </p:cNvPicPr>
+          <p:nvPr/>
+        </p:nvPicPr>
+        <p:blipFill>
+          <a:blip r:embed="rId1"/>
+          <a:stretch>
+            <a:fillRect/>
+          </a:stretch>
+        </p:blipFill>
+        <p:spPr>
+          <a:xfrm>
+            <a:off x="0" y="0"/>
+            <a:ext cx="12191695" cy="6858000"/>
+          </a:xfrm>
+          <a:prstGeom prst="rect">
+            <a:avLst/>
+          </a:prstGeom>
+        </p:spPr>
+      </p:pic>
+    </p:spTree>
+  </p:cSld>
+  <p:clrMapOvr>
+    <a:masterClrMapping/>
+  </p:clrMapOvr>
+</p:sldLayout>
+</file>
+
 <file path=ppt/slideMasters/slideMaster1.xml><?xml version="1.0" encoding="utf-8"?>
 <p:sldMaster xmlns:a="http://schemas.openxmlformats.org/drawingml/2006/main" xmlns:r="http://schemas.openxmlformats.org/officeDocument/2006/relationships" xmlns:p="http://schemas.openxmlformats.org/presentationml/2006/main">
   <p:cSld>
@@ -2505,7 +2561,7 @@
             <a:lvl1pPr>
               <a:defRPr sz="850">
                 <a:solidFill>
-                  <a:srgbClr val="8A82A0"/>
+                  <a:srgbClr val="9A94AA"/>
                 </a:solidFill>
                 <a:latin typeface="Courier New"/>
                 <a:ea typeface="Courier New"/>
@@ -2529,6 +2585,7 @@
   <p:sldLayoutIdLst>
     <p:sldLayoutId id="2147483649" r:id="rId1"/>
     <p:sldLayoutId id="2147483650" r:id="rId2"/>
+    <p:sldLayoutId id="2147483651" r:id="rId3"/>
   </p:sldLayoutIdLst>
   <p:hf sldNum="0" hdr="0" ftr="0" dt="0"/>
   <p:txStyles>
@@ -2858,7 +2915,7 @@
           </a:prstGeom>
           <a:ln w="12700">
             <a:solidFill>
-              <a:srgbClr val="9B7BE8">
+              <a:srgbClr val="8F72E6">
                 <a:alpha val="24000"/>
               </a:srgbClr>
             </a:solidFill>
@@ -2884,7 +2941,7 @@
           </a:prstGeom>
           <a:ln w="12700">
             <a:solidFill>
-              <a:srgbClr val="9B7BE8">
+              <a:srgbClr val="8F72E6">
                 <a:alpha val="42000"/>
               </a:srgbClr>
             </a:solidFill>
@@ -2910,7 +2967,7 @@
           </a:prstGeom>
           <a:ln w="12700">
             <a:solidFill>
-              <a:srgbClr val="9B7BE8">
+              <a:srgbClr val="8F72E6">
                 <a:alpha val="66000"/>
               </a:srgbClr>
             </a:solidFill>
@@ -2945,7 +3002,7 @@
             <a:r>
               <a:rPr lang="en-US" sz="1200" b="1" spc="300" kern="0" dirty="0">
                 <a:solidFill>
-                  <a:srgbClr val="C9B8FB"/>
+                  <a:srgbClr val="C4B3F5"/>
                 </a:solidFill>
                 <a:latin typeface="Courier New" pitchFamily="34" charset="0"/>
                 <a:ea typeface="Courier New" pitchFamily="34" charset="-122"/>
@@ -3049,7 +3106,7 @@
             <a:r>
               <a:rPr lang="en-US" sz="1500" dirty="0">
                 <a:solidFill>
-                  <a:srgbClr val="C9B8FB"/>
+                  <a:srgbClr val="C4B3F5"/>
                 </a:solidFill>
                 <a:latin typeface="Montserrat" pitchFamily="34" charset="0"/>
                 <a:ea typeface="Montserrat" pitchFamily="34" charset="-122"/>
@@ -3079,7 +3136,7 @@
           </a:prstGeom>
           <a:ln w="12700">
             <a:solidFill>
-              <a:srgbClr val="9B7BE8">
+              <a:srgbClr val="8F72E6">
                 <a:alpha val="60000"/>
               </a:srgbClr>
             </a:solidFill>
@@ -3114,7 +3171,7 @@
             <a:r>
               <a:rPr lang="en-US" sz="900" dirty="0">
                 <a:solidFill>
-                  <a:srgbClr val="C9B8FB"/>
+                  <a:srgbClr val="C4B3F5"/>
                 </a:solidFill>
                 <a:latin typeface="Courier New" pitchFamily="34" charset="0"/>
                 <a:ea typeface="Courier New" pitchFamily="34" charset="-122"/>
@@ -3144,7 +3201,7 @@
           </a:prstGeom>
           <a:ln w="12700">
             <a:solidFill>
-              <a:srgbClr val="9B7BE8">
+              <a:srgbClr val="8F72E6">
                 <a:alpha val="60000"/>
               </a:srgbClr>
             </a:solidFill>
@@ -3179,7 +3236,7 @@
             <a:r>
               <a:rPr lang="en-US" sz="900" dirty="0">
                 <a:solidFill>
-                  <a:srgbClr val="C9B8FB"/>
+                  <a:srgbClr val="C4B3F5"/>
                 </a:solidFill>
                 <a:latin typeface="Courier New" pitchFamily="34" charset="0"/>
                 <a:ea typeface="Courier New" pitchFamily="34" charset="-122"/>
@@ -3209,7 +3266,7 @@
           </a:prstGeom>
           <a:ln w="12700">
             <a:solidFill>
-              <a:srgbClr val="9B7BE8">
+              <a:srgbClr val="8F72E6">
                 <a:alpha val="60000"/>
               </a:srgbClr>
             </a:solidFill>
@@ -3244,7 +3301,7 @@
             <a:r>
               <a:rPr lang="en-US" sz="900" dirty="0">
                 <a:solidFill>
-                  <a:srgbClr val="C9B8FB"/>
+                  <a:srgbClr val="C4B3F5"/>
                 </a:solidFill>
                 <a:latin typeface="Courier New" pitchFamily="34" charset="0"/>
                 <a:ea typeface="Courier New" pitchFamily="34" charset="-122"/>
@@ -3274,7 +3331,7 @@
           </a:prstGeom>
           <a:ln w="12700">
             <a:solidFill>
-              <a:srgbClr val="9B7BE8">
+              <a:srgbClr val="8F72E6">
                 <a:alpha val="60000"/>
               </a:srgbClr>
             </a:solidFill>
@@ -3309,7 +3366,7 @@
             <a:r>
               <a:rPr lang="en-US" sz="900" dirty="0">
                 <a:solidFill>
-                  <a:srgbClr val="C9B8FB"/>
+                  <a:srgbClr val="C4B3F5"/>
                 </a:solidFill>
                 <a:latin typeface="Courier New" pitchFamily="34" charset="0"/>
                 <a:ea typeface="Courier New" pitchFamily="34" charset="-122"/>
@@ -3339,7 +3396,7 @@
           </a:prstGeom>
           <a:ln w="12700">
             <a:solidFill>
-              <a:srgbClr val="9B7BE8">
+              <a:srgbClr val="8F72E6">
                 <a:alpha val="60000"/>
               </a:srgbClr>
             </a:solidFill>
@@ -3374,7 +3431,7 @@
             <a:r>
               <a:rPr lang="en-US" sz="900" dirty="0">
                 <a:solidFill>
-                  <a:srgbClr val="C9B8FB"/>
+                  <a:srgbClr val="C4B3F5"/>
                 </a:solidFill>
                 <a:latin typeface="Courier New" pitchFamily="34" charset="0"/>
                 <a:ea typeface="Courier New" pitchFamily="34" charset="-122"/>
@@ -3499,7 +3556,7 @@
             <a:r>
               <a:rPr lang="en-US" sz="2600" b="1" dirty="0">
                 <a:solidFill>
-                  <a:srgbClr val="C9A6FF"/>
+                  <a:srgbClr val="A98BFF"/>
                 </a:solidFill>
                 <a:latin typeface="Courier New" pitchFamily="34" charset="0"/>
                 <a:ea typeface="Courier New" pitchFamily="34" charset="-122"/>
@@ -3567,9 +3624,14 @@
             </a:avLst>
           </a:prstGeom>
           <a:solidFill>
-            <a:srgbClr val="C9A6FF"/>
+            <a:srgbClr val="1A0B3D"/>
           </a:solidFill>
-          <a:ln/>
+          <a:ln w="12700">
+            <a:solidFill>
+              <a:srgbClr val="5A05F4"/>
+            </a:solidFill>
+            <a:prstDash val="solid"/>
+          </a:ln>
         </p:spPr>
       </p:sp>
       <p:sp>
@@ -3599,7 +3661,7 @@
             <a:r>
               <a:rPr lang="en-US" sz="900" b="1" spc="100" kern="0" dirty="0">
                 <a:solidFill>
-                  <a:srgbClr val="1C1140"/>
+                  <a:srgbClr val="A98BFF"/>
                 </a:solidFill>
                 <a:latin typeface="Courier New" pitchFamily="34" charset="0"/>
                 <a:ea typeface="Courier New" pitchFamily="34" charset="-122"/>
@@ -3652,9 +3714,14 @@
             </a:avLst>
           </a:prstGeom>
           <a:solidFill>
-            <a:srgbClr val="1C1140"/>
+            <a:srgbClr val="1A0B3D"/>
           </a:solidFill>
-          <a:ln/>
+          <a:ln w="12700">
+            <a:solidFill>
+              <a:srgbClr val="5A05F4"/>
+            </a:solidFill>
+            <a:prstDash val="solid"/>
+          </a:ln>
         </p:spPr>
       </p:sp>
       <p:sp>
@@ -3684,7 +3751,7 @@
             <a:r>
               <a:rPr lang="en-US" sz="1350" b="1" dirty="0">
                 <a:solidFill>
-                  <a:srgbClr val="C9A6FF"/>
+                  <a:srgbClr val="A98BFF"/>
                 </a:solidFill>
                 <a:latin typeface="Montserrat" pitchFamily="34" charset="0"/>
                 <a:ea typeface="Montserrat" pitchFamily="34" charset="-122"/>
@@ -3723,7 +3790,7 @@
             <a:r>
               <a:rPr lang="en-US" sz="1150" dirty="0">
                 <a:solidFill>
-                  <a:srgbClr val="FFFFFF"/>
+                  <a:srgbClr val="C9C4D6"/>
                 </a:solidFill>
                 <a:latin typeface="Montserrat" pitchFamily="34" charset="0"/>
                 <a:ea typeface="Montserrat" pitchFamily="34" charset="-122"/>
@@ -3752,11 +3819,11 @@
             </a:avLst>
           </a:prstGeom>
           <a:solidFill>
-            <a:srgbClr val="17141F"/>
+            <a:srgbClr val="000000"/>
           </a:solidFill>
           <a:ln w="12700">
             <a:solidFill>
-              <a:srgbClr val="2E2A3A"/>
+              <a:srgbClr val="5E4F85"/>
             </a:solidFill>
             <a:prstDash val="solid"/>
           </a:ln>
@@ -3828,7 +3895,7 @@
             <a:r>
               <a:rPr lang="en-US" sz="1150" dirty="0">
                 <a:solidFill>
-                  <a:srgbClr val="AFA9BE"/>
+                  <a:srgbClr val="C9C4D6"/>
                 </a:solidFill>
                 <a:latin typeface="Montserrat" pitchFamily="34" charset="0"/>
                 <a:ea typeface="Montserrat" pitchFamily="34" charset="-122"/>
@@ -3857,9 +3924,14 @@
             </a:avLst>
           </a:prstGeom>
           <a:solidFill>
-            <a:srgbClr val="1C1140"/>
+            <a:srgbClr val="1A0B3D"/>
           </a:solidFill>
-          <a:ln/>
+          <a:ln w="12700">
+            <a:solidFill>
+              <a:srgbClr val="5A05F4"/>
+            </a:solidFill>
+            <a:prstDash val="solid"/>
+          </a:ln>
         </p:spPr>
       </p:sp>
       <p:sp>
@@ -3889,7 +3961,7 @@
             <a:r>
               <a:rPr lang="en-US" sz="1350" b="1" dirty="0">
                 <a:solidFill>
-                  <a:srgbClr val="C9A6FF"/>
+                  <a:srgbClr val="A98BFF"/>
                 </a:solidFill>
                 <a:latin typeface="Montserrat" pitchFamily="34" charset="0"/>
                 <a:ea typeface="Montserrat" pitchFamily="34" charset="-122"/>
@@ -3928,7 +4000,7 @@
             <a:r>
               <a:rPr lang="en-US" sz="1150" dirty="0">
                 <a:solidFill>
-                  <a:srgbClr val="FFFFFF"/>
+                  <a:srgbClr val="C9C4D6"/>
                 </a:solidFill>
                 <a:latin typeface="Montserrat" pitchFamily="34" charset="0"/>
                 <a:ea typeface="Montserrat" pitchFamily="34" charset="-122"/>
@@ -3957,9 +4029,14 @@
             </a:avLst>
           </a:prstGeom>
           <a:solidFill>
-            <a:srgbClr val="102A20"/>
+            <a:srgbClr val="06180F"/>
           </a:solidFill>
-          <a:ln/>
+          <a:ln w="12700">
+            <a:solidFill>
+              <a:srgbClr val="3FCF8E"/>
+            </a:solidFill>
+            <a:prstDash val="solid"/>
+          </a:ln>
         </p:spPr>
       </p:sp>
       <p:sp>
@@ -3989,7 +4066,7 @@
             <a:r>
               <a:rPr lang="en-US" sz="1350" b="1" dirty="0">
                 <a:solidFill>
-                  <a:srgbClr val="5FD6A0"/>
+                  <a:srgbClr val="3FCF8E"/>
                 </a:solidFill>
                 <a:latin typeface="Montserrat" pitchFamily="34" charset="0"/>
                 <a:ea typeface="Montserrat" pitchFamily="34" charset="-122"/>
@@ -4028,7 +4105,7 @@
             <a:r>
               <a:rPr lang="en-US" sz="1150" dirty="0">
                 <a:solidFill>
-                  <a:srgbClr val="FFFFFF"/>
+                  <a:srgbClr val="C9C4D6"/>
                 </a:solidFill>
                 <a:latin typeface="Montserrat" pitchFamily="34" charset="0"/>
                 <a:ea typeface="Montserrat" pitchFamily="34" charset="-122"/>
@@ -4057,9 +4134,14 @@
             </a:avLst>
           </a:prstGeom>
           <a:solidFill>
-            <a:srgbClr val="1C1140"/>
+            <a:srgbClr val="1A0B3D"/>
           </a:solidFill>
-          <a:ln/>
+          <a:ln w="12700">
+            <a:solidFill>
+              <a:srgbClr val="5A05F4"/>
+            </a:solidFill>
+            <a:prstDash val="solid"/>
+          </a:ln>
         </p:spPr>
       </p:sp>
       <p:sp>
@@ -4089,7 +4171,7 @@
             <a:r>
               <a:rPr lang="en-US" sz="1050" b="1" dirty="0">
                 <a:solidFill>
-                  <a:srgbClr val="C9A6FF"/>
+                  <a:srgbClr val="A98BFF"/>
                 </a:solidFill>
                 <a:latin typeface="Courier New" pitchFamily="34" charset="0"/>
                 <a:ea typeface="Courier New" pitchFamily="34" charset="-122"/>
@@ -4118,7 +4200,7 @@
           <a:noFill/>
           <a:ln w="15875">
             <a:solidFill>
-              <a:srgbClr val="9B7BE8"/>
+              <a:srgbClr val="8F72E6"/>
             </a:solidFill>
             <a:prstDash val="solid"/>
           </a:ln>
@@ -4139,7 +4221,7 @@
             <a:avLst/>
           </a:prstGeom>
           <a:solidFill>
-            <a:srgbClr val="9B7BE8"/>
+            <a:srgbClr val="8F72E6"/>
           </a:solidFill>
           <a:ln/>
         </p:spPr>
@@ -4161,11 +4243,11 @@
             </a:avLst>
           </a:prstGeom>
           <a:solidFill>
-            <a:srgbClr val="17141F"/>
+            <a:srgbClr val="000000"/>
           </a:solidFill>
           <a:ln w="12700">
             <a:solidFill>
-              <a:srgbClr val="2E2A3A"/>
+              <a:srgbClr val="5E4F85"/>
             </a:solidFill>
             <a:prstDash val="solid"/>
           </a:ln>
@@ -4227,7 +4309,7 @@
           <a:noFill/>
           <a:ln w="15875">
             <a:solidFill>
-              <a:srgbClr val="9B7BE8"/>
+              <a:srgbClr val="8F72E6"/>
             </a:solidFill>
             <a:prstDash val="solid"/>
           </a:ln>
@@ -4248,7 +4330,7 @@
             <a:avLst/>
           </a:prstGeom>
           <a:solidFill>
-            <a:srgbClr val="9B7BE8"/>
+            <a:srgbClr val="8F72E6"/>
           </a:solidFill>
           <a:ln/>
         </p:spPr>
@@ -4270,9 +4352,14 @@
             </a:avLst>
           </a:prstGeom>
           <a:solidFill>
-            <a:srgbClr val="1C1140"/>
+            <a:srgbClr val="1A0B3D"/>
           </a:solidFill>
-          <a:ln/>
+          <a:ln w="12700">
+            <a:solidFill>
+              <a:srgbClr val="5A05F4"/>
+            </a:solidFill>
+            <a:prstDash val="solid"/>
+          </a:ln>
         </p:spPr>
       </p:sp>
       <p:sp>
@@ -4302,7 +4389,7 @@
             <a:r>
               <a:rPr lang="en-US" sz="1050" b="1" dirty="0">
                 <a:solidFill>
-                  <a:srgbClr val="C9A6FF"/>
+                  <a:srgbClr val="A98BFF"/>
                 </a:solidFill>
                 <a:latin typeface="Courier New" pitchFamily="34" charset="0"/>
                 <a:ea typeface="Courier New" pitchFamily="34" charset="-122"/>
@@ -4331,7 +4418,7 @@
           <a:noFill/>
           <a:ln w="15875">
             <a:solidFill>
-              <a:srgbClr val="9B7BE8"/>
+              <a:srgbClr val="8F72E6"/>
             </a:solidFill>
             <a:prstDash val="solid"/>
           </a:ln>
@@ -4352,7 +4439,7 @@
             <a:avLst/>
           </a:prstGeom>
           <a:solidFill>
-            <a:srgbClr val="9B7BE8"/>
+            <a:srgbClr val="8F72E6"/>
           </a:solidFill>
           <a:ln/>
         </p:spPr>
@@ -4374,9 +4461,14 @@
             </a:avLst>
           </a:prstGeom>
           <a:solidFill>
-            <a:srgbClr val="102A20"/>
+            <a:srgbClr val="06180F"/>
           </a:solidFill>
-          <a:ln/>
+          <a:ln w="12700">
+            <a:solidFill>
+              <a:srgbClr val="3FCF8E"/>
+            </a:solidFill>
+            <a:prstDash val="solid"/>
+          </a:ln>
         </p:spPr>
       </p:sp>
       <p:sp>
@@ -4406,7 +4498,7 @@
             <a:r>
               <a:rPr lang="en-US" sz="1050" b="1" dirty="0">
                 <a:solidFill>
-                  <a:srgbClr val="5FD6A0"/>
+                  <a:srgbClr val="3FCF8E"/>
                 </a:solidFill>
                 <a:latin typeface="Courier New" pitchFamily="34" charset="0"/>
                 <a:ea typeface="Courier New" pitchFamily="34" charset="-122"/>
@@ -4435,9 +4527,14 @@
             </a:avLst>
           </a:prstGeom>
           <a:solidFill>
-            <a:srgbClr val="102A20"/>
+            <a:srgbClr val="06180F"/>
           </a:solidFill>
-          <a:ln/>
+          <a:ln w="12700">
+            <a:solidFill>
+              <a:srgbClr val="3FCF8E"/>
+            </a:solidFill>
+            <a:prstDash val="solid"/>
+          </a:ln>
         </p:spPr>
       </p:sp>
       <p:sp>
@@ -4467,7 +4564,7 @@
             <a:r>
               <a:rPr lang="en-US" sz="950" b="1" spc="150" kern="0" dirty="0">
                 <a:solidFill>
-                  <a:srgbClr val="5FD6A0"/>
+                  <a:srgbClr val="3FCF8E"/>
                 </a:solidFill>
                 <a:latin typeface="Courier New" pitchFamily="34" charset="0"/>
                 <a:ea typeface="Courier New" pitchFamily="34" charset="-122"/>
@@ -4551,7 +4648,7 @@
             <a:lvl1pPr>
               <a:defRPr sz="850">
                 <a:solidFill>
-                  <a:srgbClr val="8A82A0"/>
+                  <a:srgbClr val="9A94AA"/>
                 </a:solidFill>
                 <a:latin typeface="Courier New"/>
                 <a:ea typeface="Courier New"/>
@@ -4621,7 +4718,7 @@
             <a:r>
               <a:rPr lang="en-US" sz="2600" b="1" dirty="0">
                 <a:solidFill>
-                  <a:srgbClr val="C9A6FF"/>
+                  <a:srgbClr val="A98BFF"/>
                 </a:solidFill>
                 <a:latin typeface="Courier New" pitchFamily="34" charset="0"/>
                 <a:ea typeface="Courier New" pitchFamily="34" charset="-122"/>
@@ -4689,9 +4786,14 @@
             </a:avLst>
           </a:prstGeom>
           <a:solidFill>
-            <a:srgbClr val="C9A6FF"/>
+            <a:srgbClr val="1A0B3D"/>
           </a:solidFill>
-          <a:ln/>
+          <a:ln w="12700">
+            <a:solidFill>
+              <a:srgbClr val="5A05F4"/>
+            </a:solidFill>
+            <a:prstDash val="solid"/>
+          </a:ln>
         </p:spPr>
       </p:sp>
       <p:sp>
@@ -4721,7 +4823,7 @@
             <a:r>
               <a:rPr lang="en-US" sz="900" b="1" spc="100" kern="0" dirty="0">
                 <a:solidFill>
-                  <a:srgbClr val="1C1140"/>
+                  <a:srgbClr val="A98BFF"/>
                 </a:solidFill>
                 <a:latin typeface="Courier New" pitchFamily="34" charset="0"/>
                 <a:ea typeface="Courier New" pitchFamily="34" charset="-122"/>
@@ -4750,9 +4852,14 @@
             </a:avLst>
           </a:prstGeom>
           <a:solidFill>
-            <a:srgbClr val="2A2010"/>
+            <a:srgbClr val="000000"/>
           </a:solidFill>
-          <a:ln/>
+          <a:ln w="12700">
+            <a:solidFill>
+              <a:srgbClr val="5E4F85"/>
+            </a:solidFill>
+            <a:prstDash val="solid"/>
+          </a:ln>
         </p:spPr>
       </p:sp>
       <p:sp>
@@ -4782,7 +4889,7 @@
             <a:r>
               <a:rPr lang="en-US" sz="900" b="1" spc="100" kern="0" dirty="0">
                 <a:solidFill>
-                  <a:srgbClr val="E8A857"/>
+                  <a:srgbClr val="C9C4D6"/>
                 </a:solidFill>
                 <a:latin typeface="Courier New" pitchFamily="34" charset="0"/>
                 <a:ea typeface="Courier New" pitchFamily="34" charset="-122"/>
@@ -4835,9 +4942,14 @@
             </a:avLst>
           </a:prstGeom>
           <a:solidFill>
-            <a:srgbClr val="1C1140"/>
+            <a:srgbClr val="1A0B3D"/>
           </a:solidFill>
-          <a:ln/>
+          <a:ln w="12700">
+            <a:solidFill>
+              <a:srgbClr val="5A05F4"/>
+            </a:solidFill>
+            <a:prstDash val="solid"/>
+          </a:ln>
         </p:spPr>
       </p:sp>
       <p:sp>
@@ -4867,7 +4979,7 @@
             <a:r>
               <a:rPr lang="en-US" sz="1150" b="1" dirty="0">
                 <a:solidFill>
-                  <a:srgbClr val="C9A6FF"/>
+                  <a:srgbClr val="A98BFF"/>
                 </a:solidFill>
                 <a:latin typeface="Courier New" pitchFamily="34" charset="0"/>
                 <a:ea typeface="Courier New" pitchFamily="34" charset="-122"/>
@@ -4896,7 +5008,7 @@
           <a:noFill/>
           <a:ln w="15875">
             <a:solidFill>
-              <a:srgbClr val="9B7BE8"/>
+              <a:srgbClr val="8F72E6"/>
             </a:solidFill>
             <a:prstDash val="solid"/>
           </a:ln>
@@ -4917,7 +5029,7 @@
             <a:avLst/>
           </a:prstGeom>
           <a:solidFill>
-            <a:srgbClr val="9B7BE8"/>
+            <a:srgbClr val="8F72E6"/>
           </a:solidFill>
           <a:ln/>
         </p:spPr>
@@ -4939,11 +5051,11 @@
             </a:avLst>
           </a:prstGeom>
           <a:solidFill>
-            <a:srgbClr val="17141F"/>
+            <a:srgbClr val="000000"/>
           </a:solidFill>
           <a:ln w="12700">
             <a:solidFill>
-              <a:srgbClr val="2E2A3A"/>
+              <a:srgbClr val="5E4F85"/>
             </a:solidFill>
             <a:prstDash val="solid"/>
           </a:ln>
@@ -5005,7 +5117,7 @@
           <a:noFill/>
           <a:ln w="15875">
             <a:solidFill>
-              <a:srgbClr val="9B7BE8"/>
+              <a:srgbClr val="8F72E6"/>
             </a:solidFill>
             <a:prstDash val="solid"/>
           </a:ln>
@@ -5026,7 +5138,7 @@
             <a:avLst/>
           </a:prstGeom>
           <a:solidFill>
-            <a:srgbClr val="9B7BE8"/>
+            <a:srgbClr val="8F72E6"/>
           </a:solidFill>
           <a:ln/>
         </p:spPr>
@@ -5048,9 +5160,14 @@
             </a:avLst>
           </a:prstGeom>
           <a:solidFill>
-            <a:srgbClr val="2A2010"/>
+            <a:srgbClr val="0B1A38"/>
           </a:solidFill>
-          <a:ln/>
+          <a:ln w="12700">
+            <a:solidFill>
+              <a:srgbClr val="6BA0F8"/>
+            </a:solidFill>
+            <a:prstDash val="solid"/>
+          </a:ln>
         </p:spPr>
       </p:sp>
       <p:sp>
@@ -5080,7 +5197,7 @@
             <a:r>
               <a:rPr lang="en-US" sz="1150" b="1" dirty="0">
                 <a:solidFill>
-                  <a:srgbClr val="E8A857"/>
+                  <a:srgbClr val="6BA0F8"/>
                 </a:solidFill>
                 <a:latin typeface="Courier New" pitchFamily="34" charset="0"/>
                 <a:ea typeface="Courier New" pitchFamily="34" charset="-122"/>
@@ -5109,11 +5226,11 @@
             </a:avLst>
           </a:prstGeom>
           <a:solidFill>
-            <a:srgbClr val="17141F"/>
+            <a:srgbClr val="000000"/>
           </a:solidFill>
           <a:ln w="12700">
             <a:solidFill>
-              <a:srgbClr val="2E2A3A"/>
+              <a:srgbClr val="5E4F85"/>
             </a:solidFill>
             <a:prstDash val="solid"/>
           </a:ln>
@@ -5188,7 +5305,7 @@
             <a:r>
               <a:rPr lang="en-US" sz="1200" dirty="0">
                 <a:solidFill>
-                  <a:srgbClr val="AFA9BE"/>
+                  <a:srgbClr val="C9C4D6"/>
                 </a:solidFill>
                 <a:latin typeface="Montserrat" pitchFamily="34" charset="0"/>
                 <a:ea typeface="Montserrat" pitchFamily="34" charset="-122"/>
@@ -5217,9 +5334,14 @@
             </a:avLst>
           </a:prstGeom>
           <a:solidFill>
-            <a:srgbClr val="2A2010"/>
+            <a:srgbClr val="0B1A38"/>
           </a:solidFill>
-          <a:ln/>
+          <a:ln w="12700">
+            <a:solidFill>
+              <a:srgbClr val="6BA0F8"/>
+            </a:solidFill>
+            <a:prstDash val="solid"/>
+          </a:ln>
         </p:spPr>
       </p:sp>
       <p:sp>
@@ -5249,7 +5371,7 @@
             <a:r>
               <a:rPr lang="en-US" sz="1450" b="1" dirty="0">
                 <a:solidFill>
-                  <a:srgbClr val="E8A857"/>
+                  <a:srgbClr val="6BA0F8"/>
                 </a:solidFill>
                 <a:latin typeface="Montserrat" pitchFamily="34" charset="0"/>
                 <a:ea typeface="Montserrat" pitchFamily="34" charset="-122"/>
@@ -5291,7 +5413,7 @@
             <a:r>
               <a:rPr lang="en-US" sz="1200" dirty="0">
                 <a:solidFill>
-                  <a:srgbClr val="FFFFFF"/>
+                  <a:srgbClr val="C9C4D6"/>
                 </a:solidFill>
                 <a:latin typeface="Montserrat" pitchFamily="34" charset="0"/>
                 <a:ea typeface="Montserrat" pitchFamily="34" charset="-122"/>
@@ -5320,11 +5442,11 @@
             </a:avLst>
           </a:prstGeom>
           <a:solidFill>
-            <a:srgbClr val="17141F"/>
+            <a:srgbClr val="000000"/>
           </a:solidFill>
           <a:ln w="12700">
             <a:solidFill>
-              <a:srgbClr val="2E2A3A"/>
+              <a:srgbClr val="5E4F85"/>
             </a:solidFill>
             <a:prstDash val="solid"/>
           </a:ln>
@@ -5402,7 +5524,7 @@
             <a:lvl1pPr>
               <a:defRPr sz="850">
                 <a:solidFill>
-                  <a:srgbClr val="8A82A0"/>
+                  <a:srgbClr val="9A94AA"/>
                 </a:solidFill>
                 <a:latin typeface="Courier New"/>
                 <a:ea typeface="Courier New"/>
@@ -5472,7 +5594,7 @@
             <a:r>
               <a:rPr lang="en-US" sz="2600" b="1" dirty="0">
                 <a:solidFill>
-                  <a:srgbClr val="C9A6FF"/>
+                  <a:srgbClr val="A98BFF"/>
                 </a:solidFill>
                 <a:latin typeface="Courier New" pitchFamily="34" charset="0"/>
                 <a:ea typeface="Courier New" pitchFamily="34" charset="-122"/>
@@ -5540,9 +5662,14 @@
             </a:avLst>
           </a:prstGeom>
           <a:solidFill>
-            <a:srgbClr val="C9A6FF"/>
+            <a:srgbClr val="1A0B3D"/>
           </a:solidFill>
-          <a:ln/>
+          <a:ln w="12700">
+            <a:solidFill>
+              <a:srgbClr val="5A05F4"/>
+            </a:solidFill>
+            <a:prstDash val="solid"/>
+          </a:ln>
         </p:spPr>
       </p:sp>
       <p:sp>
@@ -5572,7 +5699,7 @@
             <a:r>
               <a:rPr lang="en-US" sz="900" b="1" spc="100" kern="0" dirty="0">
                 <a:solidFill>
-                  <a:srgbClr val="1C1140"/>
+                  <a:srgbClr val="A98BFF"/>
                 </a:solidFill>
                 <a:latin typeface="Courier New" pitchFamily="34" charset="0"/>
                 <a:ea typeface="Courier New" pitchFamily="34" charset="-122"/>
@@ -5647,7 +5774,7 @@
                       <a:r>
                         <a:rPr lang="en-US" sz="900" b="1" spc="100" kern="0" dirty="0">
                           <a:solidFill>
-                            <a:srgbClr val="AFA9BE"/>
+                            <a:srgbClr val="C9C4D6"/>
                           </a:solidFill>
                           <a:latin typeface="Courier New" pitchFamily="34" charset="0"/>
                           <a:ea typeface="Courier New" pitchFamily="34" charset="-122"/>
@@ -5665,7 +5792,7 @@
                   <a:tcPr marL="73152" marR="73152" marT="73152" marB="73152" anchor="ctr">
                     <a:lnL w="6350" cap="flat" cmpd="sng" algn="ctr">
                       <a:solidFill>
-                        <a:srgbClr val="2E2A3A"/>
+                        <a:srgbClr val="5E4F85"/>
                       </a:solidFill>
                       <a:prstDash val="solid"/>
                       <a:round/>
@@ -5674,7 +5801,7 @@
                     </a:lnL>
                     <a:lnR w="6350" cap="flat" cmpd="sng" algn="ctr">
                       <a:solidFill>
-                        <a:srgbClr val="2E2A3A"/>
+                        <a:srgbClr val="5E4F85"/>
                       </a:solidFill>
                       <a:prstDash val="solid"/>
                       <a:round/>
@@ -5683,7 +5810,7 @@
                     </a:lnR>
                     <a:lnT w="6350" cap="flat" cmpd="sng" algn="ctr">
                       <a:solidFill>
-                        <a:srgbClr val="2E2A3A"/>
+                        <a:srgbClr val="5E4F85"/>
                       </a:solidFill>
                       <a:prstDash val="solid"/>
                       <a:round/>
@@ -5692,7 +5819,7 @@
                     </a:lnT>
                     <a:lnB w="6350" cap="flat" cmpd="sng" algn="ctr">
                       <a:solidFill>
-                        <a:srgbClr val="2E2A3A"/>
+                        <a:srgbClr val="5E4F85"/>
                       </a:solidFill>
                       <a:prstDash val="solid"/>
                       <a:round/>
@@ -5700,7 +5827,7 @@
                       <a:tailEnd type="none" w="med" len="med"/>
                     </a:lnB>
                     <a:solidFill>
-                      <a:srgbClr val="1F1B2A"/>
+                      <a:srgbClr val="1A0B3D"/>
                     </a:solidFill>
                   </a:tcPr>
                 </a:tc>
@@ -5715,7 +5842,7 @@
                       <a:r>
                         <a:rPr lang="en-US" sz="900" b="1" spc="100" kern="0" dirty="0">
                           <a:solidFill>
-                            <a:srgbClr val="AFA9BE"/>
+                            <a:srgbClr val="C9C4D6"/>
                           </a:solidFill>
                           <a:latin typeface="Courier New" pitchFamily="34" charset="0"/>
                           <a:ea typeface="Courier New" pitchFamily="34" charset="-122"/>
@@ -5733,7 +5860,7 @@
                   <a:tcPr marL="73152" marR="73152" marT="73152" marB="73152" anchor="ctr">
                     <a:lnL w="6350" cap="flat" cmpd="sng" algn="ctr">
                       <a:solidFill>
-                        <a:srgbClr val="2E2A3A"/>
+                        <a:srgbClr val="5E4F85"/>
                       </a:solidFill>
                       <a:prstDash val="solid"/>
                       <a:round/>
@@ -5742,7 +5869,7 @@
                     </a:lnL>
                     <a:lnR w="6350" cap="flat" cmpd="sng" algn="ctr">
                       <a:solidFill>
-                        <a:srgbClr val="2E2A3A"/>
+                        <a:srgbClr val="5E4F85"/>
                       </a:solidFill>
                       <a:prstDash val="solid"/>
                       <a:round/>
@@ -5751,7 +5878,7 @@
                     </a:lnR>
                     <a:lnT w="6350" cap="flat" cmpd="sng" algn="ctr">
                       <a:solidFill>
-                        <a:srgbClr val="2E2A3A"/>
+                        <a:srgbClr val="5E4F85"/>
                       </a:solidFill>
                       <a:prstDash val="solid"/>
                       <a:round/>
@@ -5760,7 +5887,7 @@
                     </a:lnT>
                     <a:lnB w="6350" cap="flat" cmpd="sng" algn="ctr">
                       <a:solidFill>
-                        <a:srgbClr val="2E2A3A"/>
+                        <a:srgbClr val="5E4F85"/>
                       </a:solidFill>
                       <a:prstDash val="solid"/>
                       <a:round/>
@@ -5768,7 +5895,7 @@
                       <a:tailEnd type="none" w="med" len="med"/>
                     </a:lnB>
                     <a:solidFill>
-                      <a:srgbClr val="1F1B2A"/>
+                      <a:srgbClr val="1A0B3D"/>
                     </a:solidFill>
                   </a:tcPr>
                 </a:tc>
@@ -5783,7 +5910,7 @@
                       <a:r>
                         <a:rPr lang="en-US" sz="900" b="1" spc="100" kern="0" dirty="0">
                           <a:solidFill>
-                            <a:srgbClr val="AFA9BE"/>
+                            <a:srgbClr val="C9C4D6"/>
                           </a:solidFill>
                           <a:latin typeface="Courier New" pitchFamily="34" charset="0"/>
                           <a:ea typeface="Courier New" pitchFamily="34" charset="-122"/>
@@ -5801,7 +5928,7 @@
                   <a:tcPr marL="73152" marR="73152" marT="73152" marB="73152" anchor="ctr">
                     <a:lnL w="6350" cap="flat" cmpd="sng" algn="ctr">
                       <a:solidFill>
-                        <a:srgbClr val="2E2A3A"/>
+                        <a:srgbClr val="5E4F85"/>
                       </a:solidFill>
                       <a:prstDash val="solid"/>
                       <a:round/>
@@ -5810,7 +5937,7 @@
                     </a:lnL>
                     <a:lnR w="6350" cap="flat" cmpd="sng" algn="ctr">
                       <a:solidFill>
-                        <a:srgbClr val="2E2A3A"/>
+                        <a:srgbClr val="5E4F85"/>
                       </a:solidFill>
                       <a:prstDash val="solid"/>
                       <a:round/>
@@ -5819,7 +5946,7 @@
                     </a:lnR>
                     <a:lnT w="6350" cap="flat" cmpd="sng" algn="ctr">
                       <a:solidFill>
-                        <a:srgbClr val="2E2A3A"/>
+                        <a:srgbClr val="5E4F85"/>
                       </a:solidFill>
                       <a:prstDash val="solid"/>
                       <a:round/>
@@ -5828,7 +5955,7 @@
                     </a:lnT>
                     <a:lnB w="6350" cap="flat" cmpd="sng" algn="ctr">
                       <a:solidFill>
-                        <a:srgbClr val="2E2A3A"/>
+                        <a:srgbClr val="5E4F85"/>
                       </a:solidFill>
                       <a:prstDash val="solid"/>
                       <a:round/>
@@ -5836,7 +5963,7 @@
                       <a:tailEnd type="none" w="med" len="med"/>
                     </a:lnB>
                     <a:solidFill>
-                      <a:srgbClr val="1F1B2A"/>
+                      <a:srgbClr val="1A0B3D"/>
                     </a:solidFill>
                   </a:tcPr>
                 </a:tc>
@@ -5871,7 +5998,7 @@
                   <a:tcPr marL="73152" marR="73152" marT="73152" marB="73152" anchor="ctr">
                     <a:lnL w="6350" cap="flat" cmpd="sng" algn="ctr">
                       <a:solidFill>
-                        <a:srgbClr val="2E2A3A"/>
+                        <a:srgbClr val="5E4F85"/>
                       </a:solidFill>
                       <a:prstDash val="solid"/>
                       <a:round/>
@@ -5880,7 +6007,7 @@
                     </a:lnL>
                     <a:lnR w="6350" cap="flat" cmpd="sng" algn="ctr">
                       <a:solidFill>
-                        <a:srgbClr val="2E2A3A"/>
+                        <a:srgbClr val="5E4F85"/>
                       </a:solidFill>
                       <a:prstDash val="solid"/>
                       <a:round/>
@@ -5889,7 +6016,7 @@
                     </a:lnR>
                     <a:lnT w="6350" cap="flat" cmpd="sng" algn="ctr">
                       <a:solidFill>
-                        <a:srgbClr val="2E2A3A"/>
+                        <a:srgbClr val="5E4F85"/>
                       </a:solidFill>
                       <a:prstDash val="solid"/>
                       <a:round/>
@@ -5898,7 +6025,7 @@
                     </a:lnT>
                     <a:lnB w="6350" cap="flat" cmpd="sng" algn="ctr">
                       <a:solidFill>
-                        <a:srgbClr val="2E2A3A"/>
+                        <a:srgbClr val="5E4F85"/>
                       </a:solidFill>
                       <a:prstDash val="solid"/>
                       <a:round/>
@@ -5906,7 +6033,7 @@
                       <a:tailEnd type="none" w="med" len="med"/>
                     </a:lnB>
                     <a:solidFill>
-                      <a:srgbClr val="17141F"/>
+                      <a:srgbClr val="000000"/>
                     </a:solidFill>
                   </a:tcPr>
                 </a:tc>
@@ -5939,7 +6066,7 @@
                   <a:tcPr marL="73152" marR="73152" marT="73152" marB="73152" anchor="ctr">
                     <a:lnL w="6350" cap="flat" cmpd="sng" algn="ctr">
                       <a:solidFill>
-                        <a:srgbClr val="2E2A3A"/>
+                        <a:srgbClr val="5E4F85"/>
                       </a:solidFill>
                       <a:prstDash val="solid"/>
                       <a:round/>
@@ -5948,7 +6075,7 @@
                     </a:lnL>
                     <a:lnR w="6350" cap="flat" cmpd="sng" algn="ctr">
                       <a:solidFill>
-                        <a:srgbClr val="2E2A3A"/>
+                        <a:srgbClr val="5E4F85"/>
                       </a:solidFill>
                       <a:prstDash val="solid"/>
                       <a:round/>
@@ -5957,7 +6084,7 @@
                     </a:lnR>
                     <a:lnT w="6350" cap="flat" cmpd="sng" algn="ctr">
                       <a:solidFill>
-                        <a:srgbClr val="2E2A3A"/>
+                        <a:srgbClr val="5E4F85"/>
                       </a:solidFill>
                       <a:prstDash val="solid"/>
                       <a:round/>
@@ -5966,7 +6093,7 @@
                     </a:lnT>
                     <a:lnB w="6350" cap="flat" cmpd="sng" algn="ctr">
                       <a:solidFill>
-                        <a:srgbClr val="2E2A3A"/>
+                        <a:srgbClr val="5E4F85"/>
                       </a:solidFill>
                       <a:prstDash val="solid"/>
                       <a:round/>
@@ -5974,7 +6101,7 @@
                       <a:tailEnd type="none" w="med" len="med"/>
                     </a:lnB>
                     <a:solidFill>
-                      <a:srgbClr val="17141F"/>
+                      <a:srgbClr val="000000"/>
                     </a:solidFill>
                   </a:tcPr>
                 </a:tc>
@@ -6007,7 +6134,7 @@
                   <a:tcPr marL="73152" marR="73152" marT="73152" marB="73152" anchor="ctr">
                     <a:lnL w="6350" cap="flat" cmpd="sng" algn="ctr">
                       <a:solidFill>
-                        <a:srgbClr val="2E2A3A"/>
+                        <a:srgbClr val="5E4F85"/>
                       </a:solidFill>
                       <a:prstDash val="solid"/>
                       <a:round/>
@@ -6016,7 +6143,7 @@
                     </a:lnL>
                     <a:lnR w="6350" cap="flat" cmpd="sng" algn="ctr">
                       <a:solidFill>
-                        <a:srgbClr val="2E2A3A"/>
+                        <a:srgbClr val="5E4F85"/>
                       </a:solidFill>
                       <a:prstDash val="solid"/>
                       <a:round/>
@@ -6025,7 +6152,7 @@
                     </a:lnR>
                     <a:lnT w="6350" cap="flat" cmpd="sng" algn="ctr">
                       <a:solidFill>
-                        <a:srgbClr val="2E2A3A"/>
+                        <a:srgbClr val="5E4F85"/>
                       </a:solidFill>
                       <a:prstDash val="solid"/>
                       <a:round/>
@@ -6034,7 +6161,7 @@
                     </a:lnT>
                     <a:lnB w="6350" cap="flat" cmpd="sng" algn="ctr">
                       <a:solidFill>
-                        <a:srgbClr val="2E2A3A"/>
+                        <a:srgbClr val="5E4F85"/>
                       </a:solidFill>
                       <a:prstDash val="solid"/>
                       <a:round/>
@@ -6042,7 +6169,7 @@
                       <a:tailEnd type="none" w="med" len="med"/>
                     </a:lnB>
                     <a:solidFill>
-                      <a:srgbClr val="17141F"/>
+                      <a:srgbClr val="000000"/>
                     </a:solidFill>
                   </a:tcPr>
                 </a:tc>
@@ -6077,7 +6204,7 @@
                   <a:tcPr marL="73152" marR="73152" marT="73152" marB="73152" anchor="ctr">
                     <a:lnL w="6350" cap="flat" cmpd="sng" algn="ctr">
                       <a:solidFill>
-                        <a:srgbClr val="2E2A3A"/>
+                        <a:srgbClr val="5E4F85"/>
                       </a:solidFill>
                       <a:prstDash val="solid"/>
                       <a:round/>
@@ -6086,7 +6213,7 @@
                     </a:lnL>
                     <a:lnR w="6350" cap="flat" cmpd="sng" algn="ctr">
                       <a:solidFill>
-                        <a:srgbClr val="2E2A3A"/>
+                        <a:srgbClr val="5E4F85"/>
                       </a:solidFill>
                       <a:prstDash val="solid"/>
                       <a:round/>
@@ -6095,7 +6222,7 @@
                     </a:lnR>
                     <a:lnT w="6350" cap="flat" cmpd="sng" algn="ctr">
                       <a:solidFill>
-                        <a:srgbClr val="2E2A3A"/>
+                        <a:srgbClr val="5E4F85"/>
                       </a:solidFill>
                       <a:prstDash val="solid"/>
                       <a:round/>
@@ -6104,7 +6231,7 @@
                     </a:lnT>
                     <a:lnB w="6350" cap="flat" cmpd="sng" algn="ctr">
                       <a:solidFill>
-                        <a:srgbClr val="2E2A3A"/>
+                        <a:srgbClr val="5E4F85"/>
                       </a:solidFill>
                       <a:prstDash val="solid"/>
                       <a:round/>
@@ -6112,7 +6239,7 @@
                       <a:tailEnd type="none" w="med" len="med"/>
                     </a:lnB>
                     <a:solidFill>
-                      <a:srgbClr val="17141F"/>
+                      <a:srgbClr val="000000"/>
                     </a:solidFill>
                   </a:tcPr>
                 </a:tc>
@@ -6145,7 +6272,7 @@
                   <a:tcPr marL="73152" marR="73152" marT="73152" marB="73152" anchor="ctr">
                     <a:lnL w="6350" cap="flat" cmpd="sng" algn="ctr">
                       <a:solidFill>
-                        <a:srgbClr val="2E2A3A"/>
+                        <a:srgbClr val="5E4F85"/>
                       </a:solidFill>
                       <a:prstDash val="solid"/>
                       <a:round/>
@@ -6154,7 +6281,7 @@
                     </a:lnL>
                     <a:lnR w="6350" cap="flat" cmpd="sng" algn="ctr">
                       <a:solidFill>
-                        <a:srgbClr val="2E2A3A"/>
+                        <a:srgbClr val="5E4F85"/>
                       </a:solidFill>
                       <a:prstDash val="solid"/>
                       <a:round/>
@@ -6163,7 +6290,7 @@
                     </a:lnR>
                     <a:lnT w="6350" cap="flat" cmpd="sng" algn="ctr">
                       <a:solidFill>
-                        <a:srgbClr val="2E2A3A"/>
+                        <a:srgbClr val="5E4F85"/>
                       </a:solidFill>
                       <a:prstDash val="solid"/>
                       <a:round/>
@@ -6172,7 +6299,7 @@
                     </a:lnT>
                     <a:lnB w="6350" cap="flat" cmpd="sng" algn="ctr">
                       <a:solidFill>
-                        <a:srgbClr val="2E2A3A"/>
+                        <a:srgbClr val="5E4F85"/>
                       </a:solidFill>
                       <a:prstDash val="solid"/>
                       <a:round/>
@@ -6180,7 +6307,7 @@
                       <a:tailEnd type="none" w="med" len="med"/>
                     </a:lnB>
                     <a:solidFill>
-                      <a:srgbClr val="17141F"/>
+                      <a:srgbClr val="000000"/>
                     </a:solidFill>
                   </a:tcPr>
                 </a:tc>
@@ -6213,7 +6340,7 @@
                   <a:tcPr marL="73152" marR="73152" marT="73152" marB="73152" anchor="ctr">
                     <a:lnL w="6350" cap="flat" cmpd="sng" algn="ctr">
                       <a:solidFill>
-                        <a:srgbClr val="2E2A3A"/>
+                        <a:srgbClr val="5E4F85"/>
                       </a:solidFill>
                       <a:prstDash val="solid"/>
                       <a:round/>
@@ -6222,7 +6349,7 @@
                     </a:lnL>
                     <a:lnR w="6350" cap="flat" cmpd="sng" algn="ctr">
                       <a:solidFill>
-                        <a:srgbClr val="2E2A3A"/>
+                        <a:srgbClr val="5E4F85"/>
                       </a:solidFill>
                       <a:prstDash val="solid"/>
                       <a:round/>
@@ -6231,7 +6358,7 @@
                     </a:lnR>
                     <a:lnT w="6350" cap="flat" cmpd="sng" algn="ctr">
                       <a:solidFill>
-                        <a:srgbClr val="2E2A3A"/>
+                        <a:srgbClr val="5E4F85"/>
                       </a:solidFill>
                       <a:prstDash val="solid"/>
                       <a:round/>
@@ -6240,7 +6367,7 @@
                     </a:lnT>
                     <a:lnB w="6350" cap="flat" cmpd="sng" algn="ctr">
                       <a:solidFill>
-                        <a:srgbClr val="2E2A3A"/>
+                        <a:srgbClr val="5E4F85"/>
                       </a:solidFill>
                       <a:prstDash val="solid"/>
                       <a:round/>
@@ -6248,7 +6375,7 @@
                       <a:tailEnd type="none" w="med" len="med"/>
                     </a:lnB>
                     <a:solidFill>
-                      <a:srgbClr val="17141F"/>
+                      <a:srgbClr val="000000"/>
                     </a:solidFill>
                   </a:tcPr>
                 </a:tc>
@@ -6283,7 +6410,7 @@
                   <a:tcPr marL="73152" marR="73152" marT="73152" marB="73152" anchor="ctr">
                     <a:lnL w="6350" cap="flat" cmpd="sng" algn="ctr">
                       <a:solidFill>
-                        <a:srgbClr val="2E2A3A"/>
+                        <a:srgbClr val="5E4F85"/>
                       </a:solidFill>
                       <a:prstDash val="solid"/>
                       <a:round/>
@@ -6292,7 +6419,7 @@
                     </a:lnL>
                     <a:lnR w="6350" cap="flat" cmpd="sng" algn="ctr">
                       <a:solidFill>
-                        <a:srgbClr val="2E2A3A"/>
+                        <a:srgbClr val="5E4F85"/>
                       </a:solidFill>
                       <a:prstDash val="solid"/>
                       <a:round/>
@@ -6301,7 +6428,7 @@
                     </a:lnR>
                     <a:lnT w="6350" cap="flat" cmpd="sng" algn="ctr">
                       <a:solidFill>
-                        <a:srgbClr val="2E2A3A"/>
+                        <a:srgbClr val="5E4F85"/>
                       </a:solidFill>
                       <a:prstDash val="solid"/>
                       <a:round/>
@@ -6310,7 +6437,7 @@
                     </a:lnT>
                     <a:lnB w="6350" cap="flat" cmpd="sng" algn="ctr">
                       <a:solidFill>
-                        <a:srgbClr val="2E2A3A"/>
+                        <a:srgbClr val="5E4F85"/>
                       </a:solidFill>
                       <a:prstDash val="solid"/>
                       <a:round/>
@@ -6318,7 +6445,7 @@
                       <a:tailEnd type="none" w="med" len="med"/>
                     </a:lnB>
                     <a:solidFill>
-                      <a:srgbClr val="17141F"/>
+                      <a:srgbClr val="000000"/>
                     </a:solidFill>
                   </a:tcPr>
                 </a:tc>
@@ -6351,7 +6478,7 @@
                   <a:tcPr marL="73152" marR="73152" marT="73152" marB="73152" anchor="ctr">
                     <a:lnL w="6350" cap="flat" cmpd="sng" algn="ctr">
                       <a:solidFill>
-                        <a:srgbClr val="2E2A3A"/>
+                        <a:srgbClr val="5E4F85"/>
                       </a:solidFill>
                       <a:prstDash val="solid"/>
                       <a:round/>
@@ -6360,7 +6487,7 @@
                     </a:lnL>
                     <a:lnR w="6350" cap="flat" cmpd="sng" algn="ctr">
                       <a:solidFill>
-                        <a:srgbClr val="2E2A3A"/>
+                        <a:srgbClr val="5E4F85"/>
                       </a:solidFill>
                       <a:prstDash val="solid"/>
                       <a:round/>
@@ -6369,7 +6496,7 @@
                     </a:lnR>
                     <a:lnT w="6350" cap="flat" cmpd="sng" algn="ctr">
                       <a:solidFill>
-                        <a:srgbClr val="2E2A3A"/>
+                        <a:srgbClr val="5E4F85"/>
                       </a:solidFill>
                       <a:prstDash val="solid"/>
                       <a:round/>
@@ -6378,7 +6505,7 @@
                     </a:lnT>
                     <a:lnB w="6350" cap="flat" cmpd="sng" algn="ctr">
                       <a:solidFill>
-                        <a:srgbClr val="2E2A3A"/>
+                        <a:srgbClr val="5E4F85"/>
                       </a:solidFill>
                       <a:prstDash val="solid"/>
                       <a:round/>
@@ -6386,7 +6513,7 @@
                       <a:tailEnd type="none" w="med" len="med"/>
                     </a:lnB>
                     <a:solidFill>
-                      <a:srgbClr val="17141F"/>
+                      <a:srgbClr val="000000"/>
                     </a:solidFill>
                   </a:tcPr>
                 </a:tc>
@@ -6419,7 +6546,7 @@
                   <a:tcPr marL="73152" marR="73152" marT="73152" marB="73152" anchor="ctr">
                     <a:lnL w="6350" cap="flat" cmpd="sng" algn="ctr">
                       <a:solidFill>
-                        <a:srgbClr val="2E2A3A"/>
+                        <a:srgbClr val="5E4F85"/>
                       </a:solidFill>
                       <a:prstDash val="solid"/>
                       <a:round/>
@@ -6428,7 +6555,7 @@
                     </a:lnL>
                     <a:lnR w="6350" cap="flat" cmpd="sng" algn="ctr">
                       <a:solidFill>
-                        <a:srgbClr val="2E2A3A"/>
+                        <a:srgbClr val="5E4F85"/>
                       </a:solidFill>
                       <a:prstDash val="solid"/>
                       <a:round/>
@@ -6437,7 +6564,7 @@
                     </a:lnR>
                     <a:lnT w="6350" cap="flat" cmpd="sng" algn="ctr">
                       <a:solidFill>
-                        <a:srgbClr val="2E2A3A"/>
+                        <a:srgbClr val="5E4F85"/>
                       </a:solidFill>
                       <a:prstDash val="solid"/>
                       <a:round/>
@@ -6446,7 +6573,7 @@
                     </a:lnT>
                     <a:lnB w="6350" cap="flat" cmpd="sng" algn="ctr">
                       <a:solidFill>
-                        <a:srgbClr val="2E2A3A"/>
+                        <a:srgbClr val="5E4F85"/>
                       </a:solidFill>
                       <a:prstDash val="solid"/>
                       <a:round/>
@@ -6454,7 +6581,7 @@
                       <a:tailEnd type="none" w="med" len="med"/>
                     </a:lnB>
                     <a:solidFill>
-                      <a:srgbClr val="17141F"/>
+                      <a:srgbClr val="000000"/>
                     </a:solidFill>
                   </a:tcPr>
                 </a:tc>
@@ -6489,7 +6616,7 @@
                   <a:tcPr marL="73152" marR="73152" marT="73152" marB="73152" anchor="ctr">
                     <a:lnL w="6350" cap="flat" cmpd="sng" algn="ctr">
                       <a:solidFill>
-                        <a:srgbClr val="2E2A3A"/>
+                        <a:srgbClr val="5E4F85"/>
                       </a:solidFill>
                       <a:prstDash val="solid"/>
                       <a:round/>
@@ -6498,7 +6625,7 @@
                     </a:lnL>
                     <a:lnR w="6350" cap="flat" cmpd="sng" algn="ctr">
                       <a:solidFill>
-                        <a:srgbClr val="2E2A3A"/>
+                        <a:srgbClr val="5E4F85"/>
                       </a:solidFill>
                       <a:prstDash val="solid"/>
                       <a:round/>
@@ -6507,7 +6634,7 @@
                     </a:lnR>
                     <a:lnT w="6350" cap="flat" cmpd="sng" algn="ctr">
                       <a:solidFill>
-                        <a:srgbClr val="2E2A3A"/>
+                        <a:srgbClr val="5E4F85"/>
                       </a:solidFill>
                       <a:prstDash val="solid"/>
                       <a:round/>
@@ -6516,7 +6643,7 @@
                     </a:lnT>
                     <a:lnB w="6350" cap="flat" cmpd="sng" algn="ctr">
                       <a:solidFill>
-                        <a:srgbClr val="2E2A3A"/>
+                        <a:srgbClr val="5E4F85"/>
                       </a:solidFill>
                       <a:prstDash val="solid"/>
                       <a:round/>
@@ -6524,7 +6651,7 @@
                       <a:tailEnd type="none" w="med" len="med"/>
                     </a:lnB>
                     <a:solidFill>
-                      <a:srgbClr val="17141F"/>
+                      <a:srgbClr val="000000"/>
                     </a:solidFill>
                   </a:tcPr>
                 </a:tc>
@@ -6557,7 +6684,7 @@
                   <a:tcPr marL="73152" marR="73152" marT="73152" marB="73152" anchor="ctr">
                     <a:lnL w="6350" cap="flat" cmpd="sng" algn="ctr">
                       <a:solidFill>
-                        <a:srgbClr val="2E2A3A"/>
+                        <a:srgbClr val="5E4F85"/>
                       </a:solidFill>
                       <a:prstDash val="solid"/>
                       <a:round/>
@@ -6566,7 +6693,7 @@
                     </a:lnL>
                     <a:lnR w="6350" cap="flat" cmpd="sng" algn="ctr">
                       <a:solidFill>
-                        <a:srgbClr val="2E2A3A"/>
+                        <a:srgbClr val="5E4F85"/>
                       </a:solidFill>
                       <a:prstDash val="solid"/>
                       <a:round/>
@@ -6575,7 +6702,7 @@
                     </a:lnR>
                     <a:lnT w="6350" cap="flat" cmpd="sng" algn="ctr">
                       <a:solidFill>
-                        <a:srgbClr val="2E2A3A"/>
+                        <a:srgbClr val="5E4F85"/>
                       </a:solidFill>
                       <a:prstDash val="solid"/>
                       <a:round/>
@@ -6584,7 +6711,7 @@
                     </a:lnT>
                     <a:lnB w="6350" cap="flat" cmpd="sng" algn="ctr">
                       <a:solidFill>
-                        <a:srgbClr val="2E2A3A"/>
+                        <a:srgbClr val="5E4F85"/>
                       </a:solidFill>
                       <a:prstDash val="solid"/>
                       <a:round/>
@@ -6592,7 +6719,7 @@
                       <a:tailEnd type="none" w="med" len="med"/>
                     </a:lnB>
                     <a:solidFill>
-                      <a:srgbClr val="17141F"/>
+                      <a:srgbClr val="000000"/>
                     </a:solidFill>
                   </a:tcPr>
                 </a:tc>
@@ -6625,7 +6752,7 @@
                   <a:tcPr marL="73152" marR="73152" marT="73152" marB="73152" anchor="ctr">
                     <a:lnL w="6350" cap="flat" cmpd="sng" algn="ctr">
                       <a:solidFill>
-                        <a:srgbClr val="2E2A3A"/>
+                        <a:srgbClr val="5E4F85"/>
                       </a:solidFill>
                       <a:prstDash val="solid"/>
                       <a:round/>
@@ -6634,7 +6761,7 @@
                     </a:lnL>
                     <a:lnR w="6350" cap="flat" cmpd="sng" algn="ctr">
                       <a:solidFill>
-                        <a:srgbClr val="2E2A3A"/>
+                        <a:srgbClr val="5E4F85"/>
                       </a:solidFill>
                       <a:prstDash val="solid"/>
                       <a:round/>
@@ -6643,7 +6770,7 @@
                     </a:lnR>
                     <a:lnT w="6350" cap="flat" cmpd="sng" algn="ctr">
                       <a:solidFill>
-                        <a:srgbClr val="2E2A3A"/>
+                        <a:srgbClr val="5E4F85"/>
                       </a:solidFill>
                       <a:prstDash val="solid"/>
                       <a:round/>
@@ -6652,7 +6779,7 @@
                     </a:lnT>
                     <a:lnB w="6350" cap="flat" cmpd="sng" algn="ctr">
                       <a:solidFill>
-                        <a:srgbClr val="2E2A3A"/>
+                        <a:srgbClr val="5E4F85"/>
                       </a:solidFill>
                       <a:prstDash val="solid"/>
                       <a:round/>
@@ -6660,7 +6787,7 @@
                       <a:tailEnd type="none" w="med" len="med"/>
                     </a:lnB>
                     <a:solidFill>
-                      <a:srgbClr val="17141F"/>
+                      <a:srgbClr val="000000"/>
                     </a:solidFill>
                   </a:tcPr>
                 </a:tc>
@@ -6677,7 +6804,7 @@
                       <a:r>
                         <a:rPr lang="en-US" sz="1100" b="1" dirty="0">
                           <a:solidFill>
-                            <a:srgbClr val="5FD6A0"/>
+                            <a:srgbClr val="3FCF8E"/>
                           </a:solidFill>
                           <a:latin typeface="Montserrat" pitchFamily="34" charset="0"/>
                           <a:ea typeface="Montserrat" pitchFamily="34" charset="-122"/>
@@ -6695,7 +6822,7 @@
                   <a:tcPr marL="73152" marR="73152" marT="73152" marB="73152" anchor="ctr">
                     <a:lnL w="6350" cap="flat" cmpd="sng" algn="ctr">
                       <a:solidFill>
-                        <a:srgbClr val="2E2A3A"/>
+                        <a:srgbClr val="5E4F85"/>
                       </a:solidFill>
                       <a:prstDash val="solid"/>
                       <a:round/>
@@ -6704,7 +6831,7 @@
                     </a:lnL>
                     <a:lnR w="6350" cap="flat" cmpd="sng" algn="ctr">
                       <a:solidFill>
-                        <a:srgbClr val="2E2A3A"/>
+                        <a:srgbClr val="5E4F85"/>
                       </a:solidFill>
                       <a:prstDash val="solid"/>
                       <a:round/>
@@ -6713,7 +6840,7 @@
                     </a:lnR>
                     <a:lnT w="6350" cap="flat" cmpd="sng" algn="ctr">
                       <a:solidFill>
-                        <a:srgbClr val="2E2A3A"/>
+                        <a:srgbClr val="5E4F85"/>
                       </a:solidFill>
                       <a:prstDash val="solid"/>
                       <a:round/>
@@ -6722,7 +6849,7 @@
                     </a:lnT>
                     <a:lnB w="6350" cap="flat" cmpd="sng" algn="ctr">
                       <a:solidFill>
-                        <a:srgbClr val="2E2A3A"/>
+                        <a:srgbClr val="5E4F85"/>
                       </a:solidFill>
                       <a:prstDash val="solid"/>
                       <a:round/>
@@ -6730,7 +6857,7 @@
                       <a:tailEnd type="none" w="med" len="med"/>
                     </a:lnB>
                     <a:solidFill>
-                      <a:srgbClr val="102A20"/>
+                      <a:srgbClr val="06180F"/>
                     </a:solidFill>
                   </a:tcPr>
                 </a:tc>
@@ -6763,7 +6890,7 @@
                   <a:tcPr marL="73152" marR="73152" marT="73152" marB="73152" anchor="ctr">
                     <a:lnL w="6350" cap="flat" cmpd="sng" algn="ctr">
                       <a:solidFill>
-                        <a:srgbClr val="2E2A3A"/>
+                        <a:srgbClr val="5E4F85"/>
                       </a:solidFill>
                       <a:prstDash val="solid"/>
                       <a:round/>
@@ -6772,7 +6899,7 @@
                     </a:lnL>
                     <a:lnR w="6350" cap="flat" cmpd="sng" algn="ctr">
                       <a:solidFill>
-                        <a:srgbClr val="2E2A3A"/>
+                        <a:srgbClr val="5E4F85"/>
                       </a:solidFill>
                       <a:prstDash val="solid"/>
                       <a:round/>
@@ -6781,7 +6908,7 @@
                     </a:lnR>
                     <a:lnT w="6350" cap="flat" cmpd="sng" algn="ctr">
                       <a:solidFill>
-                        <a:srgbClr val="2E2A3A"/>
+                        <a:srgbClr val="5E4F85"/>
                       </a:solidFill>
                       <a:prstDash val="solid"/>
                       <a:round/>
@@ -6790,7 +6917,7 @@
                     </a:lnT>
                     <a:lnB w="6350" cap="flat" cmpd="sng" algn="ctr">
                       <a:solidFill>
-                        <a:srgbClr val="2E2A3A"/>
+                        <a:srgbClr val="5E4F85"/>
                       </a:solidFill>
                       <a:prstDash val="solid"/>
                       <a:round/>
@@ -6798,7 +6925,7 @@
                       <a:tailEnd type="none" w="med" len="med"/>
                     </a:lnB>
                     <a:solidFill>
-                      <a:srgbClr val="102A20"/>
+                      <a:srgbClr val="06180F"/>
                     </a:solidFill>
                   </a:tcPr>
                 </a:tc>
@@ -6831,7 +6958,7 @@
                   <a:tcPr marL="73152" marR="73152" marT="73152" marB="73152" anchor="ctr">
                     <a:lnL w="6350" cap="flat" cmpd="sng" algn="ctr">
                       <a:solidFill>
-                        <a:srgbClr val="2E2A3A"/>
+                        <a:srgbClr val="5E4F85"/>
                       </a:solidFill>
                       <a:prstDash val="solid"/>
                       <a:round/>
@@ -6840,7 +6967,7 @@
                     </a:lnL>
                     <a:lnR w="6350" cap="flat" cmpd="sng" algn="ctr">
                       <a:solidFill>
-                        <a:srgbClr val="2E2A3A"/>
+                        <a:srgbClr val="5E4F85"/>
                       </a:solidFill>
                       <a:prstDash val="solid"/>
                       <a:round/>
@@ -6849,7 +6976,7 @@
                     </a:lnR>
                     <a:lnT w="6350" cap="flat" cmpd="sng" algn="ctr">
                       <a:solidFill>
-                        <a:srgbClr val="2E2A3A"/>
+                        <a:srgbClr val="5E4F85"/>
                       </a:solidFill>
                       <a:prstDash val="solid"/>
                       <a:round/>
@@ -6858,7 +6985,7 @@
                     </a:lnT>
                     <a:lnB w="6350" cap="flat" cmpd="sng" algn="ctr">
                       <a:solidFill>
-                        <a:srgbClr val="2E2A3A"/>
+                        <a:srgbClr val="5E4F85"/>
                       </a:solidFill>
                       <a:prstDash val="solid"/>
                       <a:round/>
@@ -6866,7 +6993,7 @@
                       <a:tailEnd type="none" w="med" len="med"/>
                     </a:lnB>
                     <a:solidFill>
-                      <a:srgbClr val="102A20"/>
+                      <a:srgbClr val="06180F"/>
                     </a:solidFill>
                   </a:tcPr>
                 </a:tc>
@@ -6892,9 +7019,14 @@
             </a:avLst>
           </a:prstGeom>
           <a:solidFill>
-            <a:srgbClr val="102A20"/>
+            <a:srgbClr val="06180F"/>
           </a:solidFill>
-          <a:ln/>
+          <a:ln w="12700">
+            <a:solidFill>
+              <a:srgbClr val="3FCF8E"/>
+            </a:solidFill>
+            <a:prstDash val="solid"/>
+          </a:ln>
         </p:spPr>
       </p:sp>
       <p:sp>
@@ -6924,7 +7056,7 @@
             <a:r>
               <a:rPr lang="en-US" sz="950" b="1" spc="150" kern="0" dirty="0">
                 <a:solidFill>
-                  <a:srgbClr val="5FD6A0"/>
+                  <a:srgbClr val="3FCF8E"/>
                 </a:solidFill>
                 <a:latin typeface="Courier New" pitchFamily="34" charset="0"/>
                 <a:ea typeface="Courier New" pitchFamily="34" charset="-122"/>
@@ -7008,7 +7140,7 @@
             <a:lvl1pPr>
               <a:defRPr sz="850">
                 <a:solidFill>
-                  <a:srgbClr val="8A82A0"/>
+                  <a:srgbClr val="9A94AA"/>
                 </a:solidFill>
                 <a:latin typeface="Courier New"/>
                 <a:ea typeface="Courier New"/>
@@ -7078,7 +7210,7 @@
             <a:r>
               <a:rPr lang="en-US" sz="2600" b="1" dirty="0">
                 <a:solidFill>
-                  <a:srgbClr val="C9A6FF"/>
+                  <a:srgbClr val="A98BFF"/>
                 </a:solidFill>
                 <a:latin typeface="Courier New" pitchFamily="34" charset="0"/>
                 <a:ea typeface="Courier New" pitchFamily="34" charset="-122"/>
@@ -7146,9 +7278,14 @@
             </a:avLst>
           </a:prstGeom>
           <a:solidFill>
-            <a:srgbClr val="C9A6FF"/>
+            <a:srgbClr val="1A0B3D"/>
           </a:solidFill>
-          <a:ln/>
+          <a:ln w="12700">
+            <a:solidFill>
+              <a:srgbClr val="5A05F4"/>
+            </a:solidFill>
+            <a:prstDash val="solid"/>
+          </a:ln>
         </p:spPr>
       </p:sp>
       <p:sp>
@@ -7178,7 +7315,7 @@
             <a:r>
               <a:rPr lang="en-US" sz="900" b="1" spc="100" kern="0" dirty="0">
                 <a:solidFill>
-                  <a:srgbClr val="1C1140"/>
+                  <a:srgbClr val="A98BFF"/>
                 </a:solidFill>
                 <a:latin typeface="Courier New" pitchFamily="34" charset="0"/>
                 <a:ea typeface="Courier New" pitchFamily="34" charset="-122"/>
@@ -7231,9 +7368,14 @@
             </a:avLst>
           </a:prstGeom>
           <a:solidFill>
-            <a:srgbClr val="1C1140"/>
+            <a:srgbClr val="1A0B3D"/>
           </a:solidFill>
-          <a:ln/>
+          <a:ln w="12700">
+            <a:solidFill>
+              <a:srgbClr val="5A05F4"/>
+            </a:solidFill>
+            <a:prstDash val="solid"/>
+          </a:ln>
         </p:spPr>
       </p:sp>
       <p:sp>
@@ -7251,7 +7393,7 @@
             <a:avLst/>
           </a:prstGeom>
           <a:solidFill>
-            <a:srgbClr val="C9A6FF"/>
+            <a:srgbClr val="5A05F4"/>
           </a:solidFill>
           <a:ln/>
         </p:spPr>
@@ -7283,7 +7425,7 @@
             <a:r>
               <a:rPr lang="en-US" sz="1200" b="1" dirty="0">
                 <a:solidFill>
-                  <a:srgbClr val="1C1140"/>
+                  <a:srgbClr val="FFFFFF"/>
                 </a:solidFill>
                 <a:latin typeface="Courier New" pitchFamily="34" charset="0"/>
                 <a:ea typeface="Courier New" pitchFamily="34" charset="-122"/>
@@ -7322,7 +7464,7 @@
             <a:r>
               <a:rPr lang="en-US" sz="1450" b="1" dirty="0">
                 <a:solidFill>
-                  <a:srgbClr val="C9A6FF"/>
+                  <a:srgbClr val="A98BFF"/>
                 </a:solidFill>
                 <a:latin typeface="Montserrat" pitchFamily="34" charset="0"/>
                 <a:ea typeface="Montserrat" pitchFamily="34" charset="-122"/>
@@ -7364,7 +7506,7 @@
             <a:r>
               <a:rPr lang="en-US" sz="1200" dirty="0">
                 <a:solidFill>
-                  <a:srgbClr val="FFFFFF"/>
+                  <a:srgbClr val="C9C4D6"/>
                 </a:solidFill>
                 <a:latin typeface="Montserrat" pitchFamily="34" charset="0"/>
                 <a:ea typeface="Montserrat" pitchFamily="34" charset="-122"/>
@@ -7393,9 +7535,14 @@
             </a:avLst>
           </a:prstGeom>
           <a:solidFill>
-            <a:srgbClr val="1C1140"/>
+            <a:srgbClr val="1A0B3D"/>
           </a:solidFill>
-          <a:ln/>
+          <a:ln w="12700">
+            <a:solidFill>
+              <a:srgbClr val="5A05F4"/>
+            </a:solidFill>
+            <a:prstDash val="solid"/>
+          </a:ln>
         </p:spPr>
       </p:sp>
       <p:sp>
@@ -7413,7 +7560,7 @@
             <a:avLst/>
           </a:prstGeom>
           <a:solidFill>
-            <a:srgbClr val="C9A6FF"/>
+            <a:srgbClr val="5A05F4"/>
           </a:solidFill>
           <a:ln/>
         </p:spPr>
@@ -7445,7 +7592,7 @@
             <a:r>
               <a:rPr lang="en-US" sz="1200" b="1" dirty="0">
                 <a:solidFill>
-                  <a:srgbClr val="1C1140"/>
+                  <a:srgbClr val="FFFFFF"/>
                 </a:solidFill>
                 <a:latin typeface="Courier New" pitchFamily="34" charset="0"/>
                 <a:ea typeface="Courier New" pitchFamily="34" charset="-122"/>
@@ -7484,7 +7631,7 @@
             <a:r>
               <a:rPr lang="en-US" sz="1450" b="1" dirty="0">
                 <a:solidFill>
-                  <a:srgbClr val="C9A6FF"/>
+                  <a:srgbClr val="A98BFF"/>
                 </a:solidFill>
                 <a:latin typeface="Montserrat" pitchFamily="34" charset="0"/>
                 <a:ea typeface="Montserrat" pitchFamily="34" charset="-122"/>
@@ -7526,7 +7673,7 @@
             <a:r>
               <a:rPr lang="en-US" sz="1200" dirty="0">
                 <a:solidFill>
-                  <a:srgbClr val="FFFFFF"/>
+                  <a:srgbClr val="C9C4D6"/>
                 </a:solidFill>
                 <a:latin typeface="Montserrat" pitchFamily="34" charset="0"/>
                 <a:ea typeface="Montserrat" pitchFamily="34" charset="-122"/>
@@ -7555,9 +7702,14 @@
             </a:avLst>
           </a:prstGeom>
           <a:solidFill>
-            <a:srgbClr val="1C1140"/>
+            <a:srgbClr val="1A0B3D"/>
           </a:solidFill>
-          <a:ln/>
+          <a:ln w="12700">
+            <a:solidFill>
+              <a:srgbClr val="5A05F4"/>
+            </a:solidFill>
+            <a:prstDash val="solid"/>
+          </a:ln>
         </p:spPr>
       </p:sp>
       <p:sp>
@@ -7575,7 +7727,7 @@
             <a:avLst/>
           </a:prstGeom>
           <a:solidFill>
-            <a:srgbClr val="C9A6FF"/>
+            <a:srgbClr val="5A05F4"/>
           </a:solidFill>
           <a:ln/>
         </p:spPr>
@@ -7607,7 +7759,7 @@
             <a:r>
               <a:rPr lang="en-US" sz="1200" b="1" dirty="0">
                 <a:solidFill>
-                  <a:srgbClr val="1C1140"/>
+                  <a:srgbClr val="FFFFFF"/>
                 </a:solidFill>
                 <a:latin typeface="Courier New" pitchFamily="34" charset="0"/>
                 <a:ea typeface="Courier New" pitchFamily="34" charset="-122"/>
@@ -7646,7 +7798,7 @@
             <a:r>
               <a:rPr lang="en-US" sz="1450" b="1" dirty="0">
                 <a:solidFill>
-                  <a:srgbClr val="C9A6FF"/>
+                  <a:srgbClr val="A98BFF"/>
                 </a:solidFill>
                 <a:latin typeface="Montserrat" pitchFamily="34" charset="0"/>
                 <a:ea typeface="Montserrat" pitchFamily="34" charset="-122"/>
@@ -7688,7 +7840,7 @@
             <a:r>
               <a:rPr lang="en-US" sz="1200" dirty="0">
                 <a:solidFill>
-                  <a:srgbClr val="FFFFFF"/>
+                  <a:srgbClr val="C9C4D6"/>
                 </a:solidFill>
                 <a:latin typeface="Montserrat" pitchFamily="34" charset="0"/>
                 <a:ea typeface="Montserrat" pitchFamily="34" charset="-122"/>
@@ -7717,9 +7869,14 @@
             </a:avLst>
           </a:prstGeom>
           <a:solidFill>
-            <a:srgbClr val="102A20"/>
+            <a:srgbClr val="06180F"/>
           </a:solidFill>
-          <a:ln/>
+          <a:ln w="12700">
+            <a:solidFill>
+              <a:srgbClr val="3FCF8E"/>
+            </a:solidFill>
+            <a:prstDash val="solid"/>
+          </a:ln>
         </p:spPr>
       </p:sp>
       <p:sp>
@@ -7749,7 +7906,7 @@
             <a:r>
               <a:rPr lang="en-US" sz="950" b="1" spc="150" kern="0" dirty="0">
                 <a:solidFill>
-                  <a:srgbClr val="5FD6A0"/>
+                  <a:srgbClr val="3FCF8E"/>
                 </a:solidFill>
                 <a:latin typeface="Courier New" pitchFamily="34" charset="0"/>
                 <a:ea typeface="Courier New" pitchFamily="34" charset="-122"/>
@@ -7833,7 +7990,7 @@
             <a:lvl1pPr>
               <a:defRPr sz="850">
                 <a:solidFill>
-                  <a:srgbClr val="8A82A0"/>
+                  <a:srgbClr val="9A94AA"/>
                 </a:solidFill>
                 <a:latin typeface="Courier New"/>
                 <a:ea typeface="Courier New"/>
@@ -7903,7 +8060,7 @@
             <a:r>
               <a:rPr lang="en-US" sz="2600" b="1" dirty="0">
                 <a:solidFill>
-                  <a:srgbClr val="C9A6FF"/>
+                  <a:srgbClr val="A98BFF"/>
                 </a:solidFill>
                 <a:latin typeface="Courier New" pitchFamily="34" charset="0"/>
                 <a:ea typeface="Courier New" pitchFamily="34" charset="-122"/>
@@ -7971,9 +8128,14 @@
             </a:avLst>
           </a:prstGeom>
           <a:solidFill>
-            <a:srgbClr val="C9A6FF"/>
+            <a:srgbClr val="1A0B3D"/>
           </a:solidFill>
-          <a:ln/>
+          <a:ln w="12700">
+            <a:solidFill>
+              <a:srgbClr val="5A05F4"/>
+            </a:solidFill>
+            <a:prstDash val="solid"/>
+          </a:ln>
         </p:spPr>
       </p:sp>
       <p:sp>
@@ -8003,7 +8165,7 @@
             <a:r>
               <a:rPr lang="en-US" sz="900" b="1" spc="100" kern="0" dirty="0">
                 <a:solidFill>
-                  <a:srgbClr val="1C1140"/>
+                  <a:srgbClr val="A98BFF"/>
                 </a:solidFill>
                 <a:latin typeface="Courier New" pitchFamily="34" charset="0"/>
                 <a:ea typeface="Courier New" pitchFamily="34" charset="-122"/>
@@ -8056,11 +8218,11 @@
             </a:avLst>
           </a:prstGeom>
           <a:solidFill>
-            <a:srgbClr val="17141F"/>
+            <a:srgbClr val="000000"/>
           </a:solidFill>
           <a:ln w="12700">
             <a:solidFill>
-              <a:srgbClr val="2E2A3A"/>
+              <a:srgbClr val="5E4F85"/>
             </a:solidFill>
             <a:prstDash val="solid"/>
           </a:ln>
@@ -8122,11 +8284,11 @@
             </a:avLst>
           </a:prstGeom>
           <a:solidFill>
-            <a:srgbClr val="17141F"/>
+            <a:srgbClr val="000000"/>
           </a:solidFill>
           <a:ln w="12700">
             <a:solidFill>
-              <a:srgbClr val="2E2A3A"/>
+              <a:srgbClr val="5E4F85"/>
             </a:solidFill>
             <a:prstDash val="solid"/>
           </a:ln>
@@ -8188,11 +8350,11 @@
             </a:avLst>
           </a:prstGeom>
           <a:solidFill>
-            <a:srgbClr val="17141F"/>
+            <a:srgbClr val="000000"/>
           </a:solidFill>
           <a:ln w="12700">
             <a:solidFill>
-              <a:srgbClr val="2E2A3A"/>
+              <a:srgbClr val="5E4F85"/>
             </a:solidFill>
             <a:prstDash val="solid"/>
           </a:ln>
@@ -8254,11 +8416,11 @@
             </a:avLst>
           </a:prstGeom>
           <a:solidFill>
-            <a:srgbClr val="17141F"/>
+            <a:srgbClr val="000000"/>
           </a:solidFill>
           <a:ln w="12700">
             <a:solidFill>
-              <a:srgbClr val="2E2A3A"/>
+              <a:srgbClr val="5E4F85"/>
             </a:solidFill>
             <a:prstDash val="solid"/>
           </a:ln>
@@ -8320,11 +8482,11 @@
             </a:avLst>
           </a:prstGeom>
           <a:solidFill>
-            <a:srgbClr val="17141F"/>
+            <a:srgbClr val="000000"/>
           </a:solidFill>
           <a:ln w="12700">
             <a:solidFill>
-              <a:srgbClr val="2E2A3A"/>
+              <a:srgbClr val="5E4F85"/>
             </a:solidFill>
             <a:prstDash val="solid"/>
           </a:ln>
@@ -8386,11 +8548,11 @@
             </a:avLst>
           </a:prstGeom>
           <a:solidFill>
-            <a:srgbClr val="17141F"/>
+            <a:srgbClr val="000000"/>
           </a:solidFill>
           <a:ln w="12700">
             <a:solidFill>
-              <a:srgbClr val="2E2A3A"/>
+              <a:srgbClr val="5E4F85"/>
             </a:solidFill>
             <a:prstDash val="solid"/>
           </a:ln>
@@ -8452,11 +8614,11 @@
             </a:avLst>
           </a:prstGeom>
           <a:solidFill>
-            <a:srgbClr val="17141F"/>
+            <a:srgbClr val="000000"/>
           </a:solidFill>
           <a:ln w="12700">
             <a:solidFill>
-              <a:srgbClr val="2E2A3A"/>
+              <a:srgbClr val="5E4F85"/>
             </a:solidFill>
             <a:prstDash val="solid"/>
           </a:ln>
@@ -8518,11 +8680,11 @@
             </a:avLst>
           </a:prstGeom>
           <a:solidFill>
-            <a:srgbClr val="17141F"/>
+            <a:srgbClr val="000000"/>
           </a:solidFill>
           <a:ln w="12700">
             <a:solidFill>
-              <a:srgbClr val="2E2A3A"/>
+              <a:srgbClr val="5E4F85"/>
             </a:solidFill>
             <a:prstDash val="solid"/>
           </a:ln>
@@ -8661,7 +8823,7 @@
             <a:lvl1pPr>
               <a:defRPr sz="850">
                 <a:solidFill>
-                  <a:srgbClr val="8A82A0"/>
+                  <a:srgbClr val="9A94AA"/>
                 </a:solidFill>
                 <a:latin typeface="Courier New"/>
                 <a:ea typeface="Courier New"/>
@@ -8760,7 +8922,7 @@
             </a:avLst>
           </a:prstGeom>
           <a:solidFill>
-            <a:srgbClr val="5FD6A0"/>
+            <a:srgbClr val="5A05F4"/>
           </a:solidFill>
           <a:ln/>
         </p:spPr>
@@ -8792,7 +8954,7 @@
             <a:r>
               <a:rPr lang="en-US" sz="900" b="1" spc="100" kern="0" dirty="0">
                 <a:solidFill>
-                  <a:srgbClr val="102A20"/>
+                  <a:srgbClr val="FFFFFF"/>
                 </a:solidFill>
                 <a:latin typeface="Courier New" pitchFamily="34" charset="0"/>
                 <a:ea typeface="Courier New" pitchFamily="34" charset="-122"/>
@@ -8845,9 +9007,14 @@
             </a:avLst>
           </a:prstGeom>
           <a:solidFill>
-            <a:srgbClr val="102A20"/>
+            <a:srgbClr val="06180F"/>
           </a:solidFill>
-          <a:ln/>
+          <a:ln w="12700">
+            <a:solidFill>
+              <a:srgbClr val="3FCF8E"/>
+            </a:solidFill>
+            <a:prstDash val="solid"/>
+          </a:ln>
         </p:spPr>
       </p:sp>
       <p:sp>
@@ -8865,7 +9032,7 @@
             <a:avLst/>
           </a:prstGeom>
           <a:solidFill>
-            <a:srgbClr val="5FD6A0"/>
+            <a:srgbClr val="5A05F4"/>
           </a:solidFill>
           <a:ln/>
         </p:spPr>
@@ -8897,7 +9064,7 @@
             <a:r>
               <a:rPr lang="en-US" sz="1200" b="1" dirty="0">
                 <a:solidFill>
-                  <a:srgbClr val="102A20"/>
+                  <a:srgbClr val="FFFFFF"/>
                 </a:solidFill>
                 <a:latin typeface="Courier New" pitchFamily="34" charset="0"/>
                 <a:ea typeface="Courier New" pitchFamily="34" charset="-122"/>
@@ -8936,7 +9103,7 @@
             <a:r>
               <a:rPr lang="en-US" sz="1450" b="1" dirty="0">
                 <a:solidFill>
-                  <a:srgbClr val="5FD6A0"/>
+                  <a:srgbClr val="3FCF8E"/>
                 </a:solidFill>
                 <a:latin typeface="Montserrat" pitchFamily="34" charset="0"/>
                 <a:ea typeface="Montserrat" pitchFamily="34" charset="-122"/>
@@ -8978,7 +9145,7 @@
             <a:r>
               <a:rPr lang="en-US" sz="1200" dirty="0">
                 <a:solidFill>
-                  <a:srgbClr val="FFFFFF"/>
+                  <a:srgbClr val="C9C4D6"/>
                 </a:solidFill>
                 <a:latin typeface="Montserrat" pitchFamily="34" charset="0"/>
                 <a:ea typeface="Montserrat" pitchFamily="34" charset="-122"/>
@@ -9007,9 +9174,14 @@
             </a:avLst>
           </a:prstGeom>
           <a:solidFill>
-            <a:srgbClr val="102A20"/>
+            <a:srgbClr val="06180F"/>
           </a:solidFill>
-          <a:ln/>
+          <a:ln w="12700">
+            <a:solidFill>
+              <a:srgbClr val="3FCF8E"/>
+            </a:solidFill>
+            <a:prstDash val="solid"/>
+          </a:ln>
         </p:spPr>
       </p:sp>
       <p:sp>
@@ -9027,7 +9199,7 @@
             <a:avLst/>
           </a:prstGeom>
           <a:solidFill>
-            <a:srgbClr val="5FD6A0"/>
+            <a:srgbClr val="5A05F4"/>
           </a:solidFill>
           <a:ln/>
         </p:spPr>
@@ -9059,7 +9231,7 @@
             <a:r>
               <a:rPr lang="en-US" sz="1200" b="1" dirty="0">
                 <a:solidFill>
-                  <a:srgbClr val="102A20"/>
+                  <a:srgbClr val="FFFFFF"/>
                 </a:solidFill>
                 <a:latin typeface="Courier New" pitchFamily="34" charset="0"/>
                 <a:ea typeface="Courier New" pitchFamily="34" charset="-122"/>
@@ -9098,7 +9270,7 @@
             <a:r>
               <a:rPr lang="en-US" sz="1450" b="1" dirty="0">
                 <a:solidFill>
-                  <a:srgbClr val="5FD6A0"/>
+                  <a:srgbClr val="3FCF8E"/>
                 </a:solidFill>
                 <a:latin typeface="Montserrat" pitchFamily="34" charset="0"/>
                 <a:ea typeface="Montserrat" pitchFamily="34" charset="-122"/>
@@ -9140,7 +9312,7 @@
             <a:r>
               <a:rPr lang="en-US" sz="1200" dirty="0">
                 <a:solidFill>
-                  <a:srgbClr val="FFFFFF"/>
+                  <a:srgbClr val="C9C4D6"/>
                 </a:solidFill>
                 <a:latin typeface="Montserrat" pitchFamily="34" charset="0"/>
                 <a:ea typeface="Montserrat" pitchFamily="34" charset="-122"/>
@@ -9169,9 +9341,14 @@
             </a:avLst>
           </a:prstGeom>
           <a:solidFill>
-            <a:srgbClr val="2E1418"/>
+            <a:srgbClr val="1A0808"/>
           </a:solidFill>
-          <a:ln/>
+          <a:ln w="12700">
+            <a:solidFill>
+              <a:srgbClr val="FF6B6B"/>
+            </a:solidFill>
+            <a:prstDash val="solid"/>
+          </a:ln>
         </p:spPr>
       </p:sp>
       <p:sp>
@@ -9189,7 +9366,7 @@
             <a:avLst/>
           </a:prstGeom>
           <a:solidFill>
-            <a:srgbClr val="FF7B7B"/>
+            <a:srgbClr val="5A05F4"/>
           </a:solidFill>
           <a:ln/>
         </p:spPr>
@@ -9221,7 +9398,7 @@
             <a:r>
               <a:rPr lang="en-US" sz="1200" b="1" dirty="0">
                 <a:solidFill>
-                  <a:srgbClr val="2E1418"/>
+                  <a:srgbClr val="FFFFFF"/>
                 </a:solidFill>
                 <a:latin typeface="Courier New" pitchFamily="34" charset="0"/>
                 <a:ea typeface="Courier New" pitchFamily="34" charset="-122"/>
@@ -9260,7 +9437,7 @@
             <a:r>
               <a:rPr lang="en-US" sz="1450" b="1" dirty="0">
                 <a:solidFill>
-                  <a:srgbClr val="FF7B7B"/>
+                  <a:srgbClr val="FF6B6B"/>
                 </a:solidFill>
                 <a:latin typeface="Montserrat" pitchFamily="34" charset="0"/>
                 <a:ea typeface="Montserrat" pitchFamily="34" charset="-122"/>
@@ -9302,7 +9479,7 @@
             <a:r>
               <a:rPr lang="en-US" sz="1200" dirty="0">
                 <a:solidFill>
-                  <a:srgbClr val="FFFFFF"/>
+                  <a:srgbClr val="C9C4D6"/>
                 </a:solidFill>
                 <a:latin typeface="Montserrat" pitchFamily="34" charset="0"/>
                 <a:ea typeface="Montserrat" pitchFamily="34" charset="-122"/>
@@ -9331,9 +9508,14 @@
             </a:avLst>
           </a:prstGeom>
           <a:solidFill>
-            <a:srgbClr val="102A20"/>
+            <a:srgbClr val="06180F"/>
           </a:solidFill>
-          <a:ln/>
+          <a:ln w="12700">
+            <a:solidFill>
+              <a:srgbClr val="3FCF8E"/>
+            </a:solidFill>
+            <a:prstDash val="solid"/>
+          </a:ln>
         </p:spPr>
       </p:sp>
       <p:sp>
@@ -9351,7 +9533,7 @@
             <a:avLst/>
           </a:prstGeom>
           <a:solidFill>
-            <a:srgbClr val="5FD6A0"/>
+            <a:srgbClr val="5A05F4"/>
           </a:solidFill>
           <a:ln/>
         </p:spPr>
@@ -9383,7 +9565,7 @@
             <a:r>
               <a:rPr lang="en-US" sz="1200" b="1" dirty="0">
                 <a:solidFill>
-                  <a:srgbClr val="102A20"/>
+                  <a:srgbClr val="FFFFFF"/>
                 </a:solidFill>
                 <a:latin typeface="Courier New" pitchFamily="34" charset="0"/>
                 <a:ea typeface="Courier New" pitchFamily="34" charset="-122"/>
@@ -9422,7 +9604,7 @@
             <a:r>
               <a:rPr lang="en-US" sz="1450" b="1" dirty="0">
                 <a:solidFill>
-                  <a:srgbClr val="5FD6A0"/>
+                  <a:srgbClr val="3FCF8E"/>
                 </a:solidFill>
                 <a:latin typeface="Montserrat" pitchFamily="34" charset="0"/>
                 <a:ea typeface="Montserrat" pitchFamily="34" charset="-122"/>
@@ -9464,7 +9646,7 @@
             <a:r>
               <a:rPr lang="en-US" sz="1200" dirty="0">
                 <a:solidFill>
-                  <a:srgbClr val="FFFFFF"/>
+                  <a:srgbClr val="C9C4D6"/>
                 </a:solidFill>
                 <a:latin typeface="Montserrat" pitchFamily="34" charset="0"/>
                 <a:ea typeface="Montserrat" pitchFamily="34" charset="-122"/>
@@ -9609,7 +9791,7 @@
             <a:lvl1pPr>
               <a:defRPr sz="850">
                 <a:solidFill>
-                  <a:srgbClr val="8A82A0"/>
+                  <a:srgbClr val="9A94AA"/>
                 </a:solidFill>
                 <a:latin typeface="Courier New"/>
                 <a:ea typeface="Courier New"/>
@@ -9708,7 +9890,7 @@
             </a:avLst>
           </a:prstGeom>
           <a:solidFill>
-            <a:srgbClr val="5FD6A0"/>
+            <a:srgbClr val="5A05F4"/>
           </a:solidFill>
           <a:ln/>
         </p:spPr>
@@ -9740,7 +9922,7 @@
             <a:r>
               <a:rPr lang="en-US" sz="900" b="1" spc="100" kern="0" dirty="0">
                 <a:solidFill>
-                  <a:srgbClr val="102A20"/>
+                  <a:srgbClr val="FFFFFF"/>
                 </a:solidFill>
                 <a:latin typeface="Courier New" pitchFamily="34" charset="0"/>
                 <a:ea typeface="Courier New" pitchFamily="34" charset="-122"/>
@@ -9791,7 +9973,7 @@
             <a:avLst/>
           </a:prstGeom>
           <a:solidFill>
-            <a:srgbClr val="C9A6FF"/>
+            <a:srgbClr val="A98BFF"/>
           </a:solidFill>
           <a:ln/>
         </p:spPr>
@@ -9823,7 +10005,7 @@
             <a:r>
               <a:rPr lang="en-US" sz="1300" b="1" dirty="0">
                 <a:solidFill>
-                  <a:srgbClr val="1C1140"/>
+                  <a:srgbClr val="1A0B3D"/>
                 </a:solidFill>
                 <a:latin typeface="Courier New" pitchFamily="34" charset="0"/>
                 <a:ea typeface="Courier New" pitchFamily="34" charset="-122"/>
@@ -9876,7 +10058,7 @@
             <a:r>
               <a:rPr lang="en-US" sz="1200" dirty="0">
                 <a:solidFill>
-                  <a:srgbClr val="AFA9BE"/>
+                  <a:srgbClr val="C9C4D6"/>
                 </a:solidFill>
                 <a:latin typeface="Montserrat" pitchFamily="34" charset="0"/>
                 <a:ea typeface="Montserrat" pitchFamily="34" charset="-122"/>
@@ -9903,7 +10085,7 @@
             <a:avLst/>
           </a:prstGeom>
           <a:solidFill>
-            <a:srgbClr val="C9A6FF"/>
+            <a:srgbClr val="A98BFF"/>
           </a:solidFill>
           <a:ln/>
         </p:spPr>
@@ -9935,7 +10117,7 @@
             <a:r>
               <a:rPr lang="en-US" sz="1300" b="1" dirty="0">
                 <a:solidFill>
-                  <a:srgbClr val="1C1140"/>
+                  <a:srgbClr val="1A0B3D"/>
                 </a:solidFill>
                 <a:latin typeface="Courier New" pitchFamily="34" charset="0"/>
                 <a:ea typeface="Courier New" pitchFamily="34" charset="-122"/>
@@ -9988,7 +10170,7 @@
             <a:r>
               <a:rPr lang="en-US" sz="1200" dirty="0">
                 <a:solidFill>
-                  <a:srgbClr val="AFA9BE"/>
+                  <a:srgbClr val="C9C4D6"/>
                 </a:solidFill>
                 <a:latin typeface="Montserrat" pitchFamily="34" charset="0"/>
                 <a:ea typeface="Montserrat" pitchFamily="34" charset="-122"/>
@@ -10015,7 +10197,7 @@
             <a:avLst/>
           </a:prstGeom>
           <a:solidFill>
-            <a:srgbClr val="C9A6FF"/>
+            <a:srgbClr val="A98BFF"/>
           </a:solidFill>
           <a:ln/>
         </p:spPr>
@@ -10047,7 +10229,7 @@
             <a:r>
               <a:rPr lang="en-US" sz="1300" b="1" dirty="0">
                 <a:solidFill>
-                  <a:srgbClr val="1C1140"/>
+                  <a:srgbClr val="1A0B3D"/>
                 </a:solidFill>
                 <a:latin typeface="Courier New" pitchFamily="34" charset="0"/>
                 <a:ea typeface="Courier New" pitchFamily="34" charset="-122"/>
@@ -10100,7 +10282,7 @@
             <a:r>
               <a:rPr lang="en-US" sz="1200" dirty="0">
                 <a:solidFill>
-                  <a:srgbClr val="AFA9BE"/>
+                  <a:srgbClr val="C9C4D6"/>
                 </a:solidFill>
                 <a:latin typeface="Montserrat" pitchFamily="34" charset="0"/>
                 <a:ea typeface="Montserrat" pitchFamily="34" charset="-122"/>
@@ -10127,7 +10309,7 @@
             <a:avLst/>
           </a:prstGeom>
           <a:solidFill>
-            <a:srgbClr val="C9A6FF"/>
+            <a:srgbClr val="A98BFF"/>
           </a:solidFill>
           <a:ln/>
         </p:spPr>
@@ -10159,7 +10341,7 @@
             <a:r>
               <a:rPr lang="en-US" sz="1300" b="1" dirty="0">
                 <a:solidFill>
-                  <a:srgbClr val="1C1140"/>
+                  <a:srgbClr val="1A0B3D"/>
                 </a:solidFill>
                 <a:latin typeface="Courier New" pitchFamily="34" charset="0"/>
                 <a:ea typeface="Courier New" pitchFamily="34" charset="-122"/>
@@ -10212,7 +10394,7 @@
             <a:r>
               <a:rPr lang="en-US" sz="1200" dirty="0">
                 <a:solidFill>
-                  <a:srgbClr val="AFA9BE"/>
+                  <a:srgbClr val="C9C4D6"/>
                 </a:solidFill>
                 <a:latin typeface="Montserrat" pitchFamily="34" charset="0"/>
                 <a:ea typeface="Montserrat" pitchFamily="34" charset="-122"/>
@@ -10239,7 +10421,7 @@
             <a:avLst/>
           </a:prstGeom>
           <a:solidFill>
-            <a:srgbClr val="E8A857"/>
+            <a:srgbClr val="6BA0F8"/>
           </a:solidFill>
           <a:ln/>
         </p:spPr>
@@ -10271,7 +10453,7 @@
             <a:r>
               <a:rPr lang="en-US" sz="1300" b="1" dirty="0">
                 <a:solidFill>
-                  <a:srgbClr val="2A2010"/>
+                  <a:srgbClr val="0B1A38"/>
                 </a:solidFill>
                 <a:latin typeface="Courier New" pitchFamily="34" charset="0"/>
                 <a:ea typeface="Courier New" pitchFamily="34" charset="-122"/>
@@ -10310,7 +10492,7 @@
             <a:r>
               <a:rPr lang="en-US" sz="1400" b="1" dirty="0">
                 <a:solidFill>
-                  <a:srgbClr val="E8A857"/>
+                  <a:srgbClr val="6BA0F8"/>
                 </a:solidFill>
                 <a:latin typeface="Montserrat" pitchFamily="34" charset="0"/>
                 <a:ea typeface="Montserrat" pitchFamily="34" charset="-122"/>
@@ -10324,7 +10506,7 @@
             <a:r>
               <a:rPr lang="en-US" sz="1200" dirty="0">
                 <a:solidFill>
-                  <a:srgbClr val="AFA9BE"/>
+                  <a:srgbClr val="C9C4D6"/>
                 </a:solidFill>
                 <a:latin typeface="Montserrat" pitchFamily="34" charset="0"/>
                 <a:ea typeface="Montserrat" pitchFamily="34" charset="-122"/>
@@ -10366,7 +10548,7 @@
             <a:lvl1pPr>
               <a:defRPr sz="850">
                 <a:solidFill>
-                  <a:srgbClr val="8A82A0"/>
+                  <a:srgbClr val="9A94AA"/>
                 </a:solidFill>
                 <a:latin typeface="Courier New"/>
                 <a:ea typeface="Courier New"/>
@@ -10465,9 +10647,14 @@
             </a:avLst>
           </a:prstGeom>
           <a:solidFill>
-            <a:srgbClr val="E8A857"/>
+            <a:srgbClr val="0B1A38"/>
           </a:solidFill>
-          <a:ln/>
+          <a:ln w="12700">
+            <a:solidFill>
+              <a:srgbClr val="6BA0F8"/>
+            </a:solidFill>
+            <a:prstDash val="solid"/>
+          </a:ln>
         </p:spPr>
       </p:sp>
       <p:sp>
@@ -10497,7 +10684,7 @@
             <a:r>
               <a:rPr lang="en-US" sz="900" b="1" spc="100" kern="0" dirty="0">
                 <a:solidFill>
-                  <a:srgbClr val="2A2010"/>
+                  <a:srgbClr val="6BA0F8"/>
                 </a:solidFill>
                 <a:latin typeface="Courier New" pitchFamily="34" charset="0"/>
                 <a:ea typeface="Courier New" pitchFamily="34" charset="-122"/>
@@ -10550,9 +10737,14 @@
             </a:avLst>
           </a:prstGeom>
           <a:solidFill>
-            <a:srgbClr val="102A20"/>
+            <a:srgbClr val="06180F"/>
           </a:solidFill>
-          <a:ln/>
+          <a:ln w="12700">
+            <a:solidFill>
+              <a:srgbClr val="3FCF8E"/>
+            </a:solidFill>
+            <a:prstDash val="solid"/>
+          </a:ln>
         </p:spPr>
       </p:sp>
       <p:sp>
@@ -10582,7 +10774,7 @@
             <a:r>
               <a:rPr lang="en-US" sz="1450" b="1" dirty="0">
                 <a:solidFill>
-                  <a:srgbClr val="5FD6A0"/>
+                  <a:srgbClr val="3FCF8E"/>
                 </a:solidFill>
                 <a:latin typeface="Montserrat" pitchFamily="34" charset="0"/>
                 <a:ea typeface="Montserrat" pitchFamily="34" charset="-122"/>
@@ -10624,7 +10816,7 @@
             <a:r>
               <a:rPr lang="en-US" sz="1200" dirty="0">
                 <a:solidFill>
-                  <a:srgbClr val="FFFFFF"/>
+                  <a:srgbClr val="C9C4D6"/>
                 </a:solidFill>
                 <a:latin typeface="Montserrat" pitchFamily="34" charset="0"/>
                 <a:ea typeface="Montserrat" pitchFamily="34" charset="-122"/>
@@ -10653,9 +10845,14 @@
             </a:avLst>
           </a:prstGeom>
           <a:solidFill>
-            <a:srgbClr val="1C1140"/>
+            <a:srgbClr val="1A0B3D"/>
           </a:solidFill>
-          <a:ln/>
+          <a:ln w="12700">
+            <a:solidFill>
+              <a:srgbClr val="5A05F4"/>
+            </a:solidFill>
+            <a:prstDash val="solid"/>
+          </a:ln>
         </p:spPr>
       </p:sp>
       <p:sp>
@@ -10685,7 +10882,7 @@
             <a:r>
               <a:rPr lang="en-US" sz="1450" b="1" dirty="0">
                 <a:solidFill>
-                  <a:srgbClr val="C9A6FF"/>
+                  <a:srgbClr val="A98BFF"/>
                 </a:solidFill>
                 <a:latin typeface="Montserrat" pitchFamily="34" charset="0"/>
                 <a:ea typeface="Montserrat" pitchFamily="34" charset="-122"/>
@@ -10727,7 +10924,7 @@
             <a:r>
               <a:rPr lang="en-US" sz="1200" dirty="0">
                 <a:solidFill>
-                  <a:srgbClr val="FFFFFF"/>
+                  <a:srgbClr val="C9C4D6"/>
                 </a:solidFill>
                 <a:latin typeface="Montserrat" pitchFamily="34" charset="0"/>
                 <a:ea typeface="Montserrat" pitchFamily="34" charset="-122"/>
@@ -10756,11 +10953,11 @@
             </a:avLst>
           </a:prstGeom>
           <a:solidFill>
-            <a:srgbClr val="17141F"/>
+            <a:srgbClr val="000000"/>
           </a:solidFill>
           <a:ln w="12700">
             <a:solidFill>
-              <a:srgbClr val="2E2A3A"/>
+              <a:srgbClr val="5E4F85"/>
             </a:solidFill>
             <a:prstDash val="solid"/>
           </a:ln>
@@ -10835,7 +11032,7 @@
             <a:r>
               <a:rPr lang="en-US" sz="1200" dirty="0">
                 <a:solidFill>
-                  <a:srgbClr val="AFA9BE"/>
+                  <a:srgbClr val="C9C4D6"/>
                 </a:solidFill>
                 <a:latin typeface="Montserrat" pitchFamily="34" charset="0"/>
                 <a:ea typeface="Montserrat" pitchFamily="34" charset="-122"/>
@@ -10864,11 +11061,11 @@
             </a:avLst>
           </a:prstGeom>
           <a:solidFill>
-            <a:srgbClr val="17141F"/>
+            <a:srgbClr val="000000"/>
           </a:solidFill>
           <a:ln w="12700">
             <a:solidFill>
-              <a:srgbClr val="2E2A3A"/>
+              <a:srgbClr val="5E4F85"/>
             </a:solidFill>
             <a:prstDash val="solid"/>
           </a:ln>
@@ -10946,7 +11143,7 @@
             <a:lvl1pPr>
               <a:defRPr sz="850">
                 <a:solidFill>
-                  <a:srgbClr val="8A82A0"/>
+                  <a:srgbClr val="9A94AA"/>
                 </a:solidFill>
                 <a:latin typeface="Courier New"/>
                 <a:ea typeface="Courier New"/>
@@ -11045,9 +11242,14 @@
             </a:avLst>
           </a:prstGeom>
           <a:solidFill>
-            <a:srgbClr val="E8A857"/>
+            <a:srgbClr val="0B1A38"/>
           </a:solidFill>
-          <a:ln/>
+          <a:ln w="12700">
+            <a:solidFill>
+              <a:srgbClr val="6BA0F8"/>
+            </a:solidFill>
+            <a:prstDash val="solid"/>
+          </a:ln>
         </p:spPr>
       </p:sp>
       <p:sp>
@@ -11077,7 +11279,7 @@
             <a:r>
               <a:rPr lang="en-US" sz="900" b="1" spc="100" kern="0" dirty="0">
                 <a:solidFill>
-                  <a:srgbClr val="2A2010"/>
+                  <a:srgbClr val="6BA0F8"/>
                 </a:solidFill>
                 <a:latin typeface="Courier New" pitchFamily="34" charset="0"/>
                 <a:ea typeface="Courier New" pitchFamily="34" charset="-122"/>
@@ -11130,11 +11332,11 @@
             </a:avLst>
           </a:prstGeom>
           <a:solidFill>
-            <a:srgbClr val="17141F"/>
+            <a:srgbClr val="000000"/>
           </a:solidFill>
           <a:ln w="12700">
             <a:solidFill>
-              <a:srgbClr val="2E2A3A"/>
+              <a:srgbClr val="5E4F85"/>
             </a:solidFill>
             <a:prstDash val="solid"/>
           </a:ln>
@@ -11157,11 +11359,11 @@
             </a:avLst>
           </a:prstGeom>
           <a:solidFill>
-            <a:srgbClr val="1C1140"/>
+            <a:srgbClr val="1A0B3D"/>
           </a:solidFill>
           <a:ln w="12700">
             <a:solidFill>
-              <a:srgbClr val="C9A6FF"/>
+              <a:srgbClr val="A98BFF"/>
             </a:solidFill>
             <a:prstDash val="solid"/>
           </a:ln>
@@ -11182,7 +11384,7 @@
             <a:avLst/>
           </a:prstGeom>
           <a:solidFill>
-            <a:srgbClr val="C9A6FF"/>
+            <a:srgbClr val="A98BFF"/>
           </a:solidFill>
           <a:ln/>
         </p:spPr>
@@ -11202,7 +11404,7 @@
             <a:avLst/>
           </a:prstGeom>
           <a:solidFill>
-            <a:srgbClr val="C9A6FF"/>
+            <a:srgbClr val="A98BFF"/>
           </a:solidFill>
           <a:ln/>
         </p:spPr>
@@ -11263,11 +11465,11 @@
             </a:avLst>
           </a:prstGeom>
           <a:solidFill>
-            <a:srgbClr val="1C1140"/>
+            <a:srgbClr val="1A0B3D"/>
           </a:solidFill>
           <a:ln w="12700">
             <a:solidFill>
-              <a:srgbClr val="C9A6FF"/>
+              <a:srgbClr val="A98BFF"/>
             </a:solidFill>
             <a:prstDash val="solid"/>
           </a:ln>
@@ -11288,7 +11490,7 @@
             <a:avLst/>
           </a:prstGeom>
           <a:solidFill>
-            <a:srgbClr val="C9A6FF"/>
+            <a:srgbClr val="A98BFF"/>
           </a:solidFill>
           <a:ln/>
         </p:spPr>
@@ -11308,7 +11510,7 @@
             <a:avLst/>
           </a:prstGeom>
           <a:solidFill>
-            <a:srgbClr val="C9A6FF"/>
+            <a:srgbClr val="A98BFF"/>
           </a:solidFill>
           <a:ln/>
         </p:spPr>
@@ -11369,11 +11571,11 @@
             </a:avLst>
           </a:prstGeom>
           <a:solidFill>
-            <a:srgbClr val="1C1140"/>
+            <a:srgbClr val="1A0B3D"/>
           </a:solidFill>
           <a:ln w="12700">
             <a:solidFill>
-              <a:srgbClr val="C9A6FF"/>
+              <a:srgbClr val="A98BFF"/>
             </a:solidFill>
             <a:prstDash val="solid"/>
           </a:ln>
@@ -11394,7 +11596,7 @@
             <a:avLst/>
           </a:prstGeom>
           <a:solidFill>
-            <a:srgbClr val="C9A6FF"/>
+            <a:srgbClr val="A98BFF"/>
           </a:solidFill>
           <a:ln/>
         </p:spPr>
@@ -11414,7 +11616,7 @@
             <a:avLst/>
           </a:prstGeom>
           <a:solidFill>
-            <a:srgbClr val="C9A6FF"/>
+            <a:srgbClr val="A98BFF"/>
           </a:solidFill>
           <a:ln/>
         </p:spPr>
@@ -11475,11 +11677,11 @@
             </a:avLst>
           </a:prstGeom>
           <a:solidFill>
-            <a:srgbClr val="1C1140"/>
+            <a:srgbClr val="1A0B3D"/>
           </a:solidFill>
           <a:ln w="12700">
             <a:solidFill>
-              <a:srgbClr val="C9A6FF"/>
+              <a:srgbClr val="A98BFF"/>
             </a:solidFill>
             <a:prstDash val="solid"/>
           </a:ln>
@@ -11500,7 +11702,7 @@
             <a:avLst/>
           </a:prstGeom>
           <a:solidFill>
-            <a:srgbClr val="C9A6FF"/>
+            <a:srgbClr val="A98BFF"/>
           </a:solidFill>
           <a:ln/>
         </p:spPr>
@@ -11520,7 +11722,7 @@
             <a:avLst/>
           </a:prstGeom>
           <a:solidFill>
-            <a:srgbClr val="C9A6FF"/>
+            <a:srgbClr val="A98BFF"/>
           </a:solidFill>
           <a:ln/>
         </p:spPr>
@@ -11591,7 +11793,7 @@
             <a:r>
               <a:rPr lang="en-US" sz="1200" i="1" dirty="0">
                 <a:solidFill>
-                  <a:srgbClr val="8A82A0"/>
+                  <a:srgbClr val="9A94AA"/>
                 </a:solidFill>
                 <a:latin typeface="Montserrat" pitchFamily="34" charset="0"/>
                 <a:ea typeface="Montserrat" pitchFamily="34" charset="-122"/>
@@ -11633,7 +11835,7 @@
             <a:lvl1pPr>
               <a:defRPr sz="850">
                 <a:solidFill>
-                  <a:srgbClr val="8A82A0"/>
+                  <a:srgbClr val="9A94AA"/>
                 </a:solidFill>
                 <a:latin typeface="Courier New"/>
                 <a:ea typeface="Courier New"/>
@@ -11732,9 +11934,14 @@
             </a:avLst>
           </a:prstGeom>
           <a:solidFill>
-            <a:srgbClr val="E8A857"/>
+            <a:srgbClr val="0B1A38"/>
           </a:solidFill>
-          <a:ln/>
+          <a:ln w="12700">
+            <a:solidFill>
+              <a:srgbClr val="6BA0F8"/>
+            </a:solidFill>
+            <a:prstDash val="solid"/>
+          </a:ln>
         </p:spPr>
       </p:sp>
       <p:sp>
@@ -11764,7 +11971,7 @@
             <a:r>
               <a:rPr lang="en-US" sz="900" b="1" spc="100" kern="0" dirty="0">
                 <a:solidFill>
-                  <a:srgbClr val="2A2010"/>
+                  <a:srgbClr val="6BA0F8"/>
                 </a:solidFill>
                 <a:latin typeface="Courier New" pitchFamily="34" charset="0"/>
                 <a:ea typeface="Courier New" pitchFamily="34" charset="-122"/>
@@ -11817,11 +12024,11 @@
             </a:avLst>
           </a:prstGeom>
           <a:solidFill>
-            <a:srgbClr val="17141F"/>
+            <a:srgbClr val="000000"/>
           </a:solidFill>
           <a:ln w="12700">
             <a:solidFill>
-              <a:srgbClr val="2E2A3A"/>
+              <a:srgbClr val="5E4F85"/>
             </a:solidFill>
             <a:prstDash val="solid"/>
           </a:ln>
@@ -11842,7 +12049,7 @@
             <a:avLst/>
           </a:prstGeom>
           <a:solidFill>
-            <a:srgbClr val="2E1418"/>
+            <a:srgbClr val="1A0808"/>
           </a:solidFill>
           <a:ln/>
         </p:spPr>
@@ -11862,7 +12069,7 @@
             <a:avLst/>
           </a:prstGeom>
           <a:solidFill>
-            <a:srgbClr val="FF7B7B"/>
+            <a:srgbClr val="FF6B6B"/>
           </a:solidFill>
           <a:ln/>
         </p:spPr>
@@ -11882,7 +12089,7 @@
             <a:avLst/>
           </a:prstGeom>
           <a:solidFill>
-            <a:srgbClr val="FF7B7B"/>
+            <a:srgbClr val="FF6B6B"/>
           </a:solidFill>
           <a:ln/>
         </p:spPr>
@@ -11928,7 +12135,7 @@
             <a:r>
               <a:rPr lang="en-US" sz="1200" dirty="0">
                 <a:solidFill>
-                  <a:srgbClr val="AFA9BE"/>
+                  <a:srgbClr val="C9C4D6"/>
                 </a:solidFill>
                 <a:latin typeface="Montserrat" pitchFamily="34" charset="0"/>
                 <a:ea typeface="Montserrat" pitchFamily="34" charset="-122"/>
@@ -11957,11 +12164,11 @@
             </a:avLst>
           </a:prstGeom>
           <a:solidFill>
-            <a:srgbClr val="17141F"/>
+            <a:srgbClr val="000000"/>
           </a:solidFill>
           <a:ln w="12700">
             <a:solidFill>
-              <a:srgbClr val="2E2A3A"/>
+              <a:srgbClr val="5E4F85"/>
             </a:solidFill>
             <a:prstDash val="solid"/>
           </a:ln>
@@ -11982,7 +12189,7 @@
             <a:avLst/>
           </a:prstGeom>
           <a:solidFill>
-            <a:srgbClr val="2E1418"/>
+            <a:srgbClr val="1A0808"/>
           </a:solidFill>
           <a:ln/>
         </p:spPr>
@@ -12002,7 +12209,7 @@
             <a:avLst/>
           </a:prstGeom>
           <a:solidFill>
-            <a:srgbClr val="FF7B7B"/>
+            <a:srgbClr val="FF6B6B"/>
           </a:solidFill>
           <a:ln/>
         </p:spPr>
@@ -12022,7 +12229,7 @@
             <a:avLst/>
           </a:prstGeom>
           <a:solidFill>
-            <a:srgbClr val="FF7B7B"/>
+            <a:srgbClr val="FF6B6B"/>
           </a:solidFill>
           <a:ln/>
         </p:spPr>
@@ -12068,7 +12275,7 @@
             <a:r>
               <a:rPr lang="en-US" sz="1200" dirty="0">
                 <a:solidFill>
-                  <a:srgbClr val="AFA9BE"/>
+                  <a:srgbClr val="C9C4D6"/>
                 </a:solidFill>
                 <a:latin typeface="Montserrat" pitchFamily="34" charset="0"/>
                 <a:ea typeface="Montserrat" pitchFamily="34" charset="-122"/>
@@ -12097,11 +12304,11 @@
             </a:avLst>
           </a:prstGeom>
           <a:solidFill>
-            <a:srgbClr val="17141F"/>
+            <a:srgbClr val="000000"/>
           </a:solidFill>
           <a:ln w="12700">
             <a:solidFill>
-              <a:srgbClr val="2E2A3A"/>
+              <a:srgbClr val="5E4F85"/>
             </a:solidFill>
             <a:prstDash val="solid"/>
           </a:ln>
@@ -12122,7 +12329,7 @@
             <a:avLst/>
           </a:prstGeom>
           <a:solidFill>
-            <a:srgbClr val="2E1418"/>
+            <a:srgbClr val="1A0808"/>
           </a:solidFill>
           <a:ln/>
         </p:spPr>
@@ -12142,7 +12349,7 @@
             <a:avLst/>
           </a:prstGeom>
           <a:solidFill>
-            <a:srgbClr val="FF7B7B"/>
+            <a:srgbClr val="FF6B6B"/>
           </a:solidFill>
           <a:ln/>
         </p:spPr>
@@ -12162,7 +12369,7 @@
             <a:avLst/>
           </a:prstGeom>
           <a:solidFill>
-            <a:srgbClr val="FF7B7B"/>
+            <a:srgbClr val="FF6B6B"/>
           </a:solidFill>
           <a:ln/>
         </p:spPr>
@@ -12208,7 +12415,7 @@
             <a:r>
               <a:rPr lang="en-US" sz="1200" dirty="0">
                 <a:solidFill>
-                  <a:srgbClr val="AFA9BE"/>
+                  <a:srgbClr val="C9C4D6"/>
                 </a:solidFill>
                 <a:latin typeface="Montserrat" pitchFamily="34" charset="0"/>
                 <a:ea typeface="Montserrat" pitchFamily="34" charset="-122"/>
@@ -12237,11 +12444,11 @@
             </a:avLst>
           </a:prstGeom>
           <a:solidFill>
-            <a:srgbClr val="17141F"/>
+            <a:srgbClr val="000000"/>
           </a:solidFill>
           <a:ln w="12700">
             <a:solidFill>
-              <a:srgbClr val="2E2A3A"/>
+              <a:srgbClr val="5E4F85"/>
             </a:solidFill>
             <a:prstDash val="solid"/>
           </a:ln>
@@ -12262,7 +12469,7 @@
             <a:avLst/>
           </a:prstGeom>
           <a:solidFill>
-            <a:srgbClr val="2E1418"/>
+            <a:srgbClr val="1A0808"/>
           </a:solidFill>
           <a:ln/>
         </p:spPr>
@@ -12282,7 +12489,7 @@
             <a:avLst/>
           </a:prstGeom>
           <a:solidFill>
-            <a:srgbClr val="FF7B7B"/>
+            <a:srgbClr val="FF6B6B"/>
           </a:solidFill>
           <a:ln/>
         </p:spPr>
@@ -12302,7 +12509,7 @@
             <a:avLst/>
           </a:prstGeom>
           <a:solidFill>
-            <a:srgbClr val="FF7B7B"/>
+            <a:srgbClr val="FF6B6B"/>
           </a:solidFill>
           <a:ln/>
         </p:spPr>
@@ -12348,7 +12555,7 @@
             <a:r>
               <a:rPr lang="en-US" sz="1200" dirty="0">
                 <a:solidFill>
-                  <a:srgbClr val="AFA9BE"/>
+                  <a:srgbClr val="C9C4D6"/>
                 </a:solidFill>
                 <a:latin typeface="Montserrat" pitchFamily="34" charset="0"/>
                 <a:ea typeface="Montserrat" pitchFamily="34" charset="-122"/>
@@ -12390,7 +12597,7 @@
             <a:lvl1pPr>
               <a:defRPr sz="850">
                 <a:solidFill>
-                  <a:srgbClr val="8A82A0"/>
+                  <a:srgbClr val="9A94AA"/>
                 </a:solidFill>
                 <a:latin typeface="Courier New"/>
                 <a:ea typeface="Courier New"/>
@@ -12502,7 +12709,7 @@
             <a:r>
               <a:rPr lang="en-US" sz="1300" dirty="0">
                 <a:solidFill>
-                  <a:srgbClr val="AFA9BE"/>
+                  <a:srgbClr val="C9C4D6"/>
                 </a:solidFill>
                 <a:latin typeface="Montserrat" pitchFamily="34" charset="0"/>
                 <a:ea typeface="Montserrat" pitchFamily="34" charset="-122"/>
@@ -12531,9 +12738,14 @@
             </a:avLst>
           </a:prstGeom>
           <a:solidFill>
-            <a:srgbClr val="C9A6FF"/>
+            <a:srgbClr val="1A0B3D"/>
           </a:solidFill>
-          <a:ln/>
+          <a:ln w="12700">
+            <a:solidFill>
+              <a:srgbClr val="5A05F4"/>
+            </a:solidFill>
+            <a:prstDash val="solid"/>
+          </a:ln>
         </p:spPr>
       </p:sp>
       <p:sp>
@@ -12563,7 +12775,7 @@
             <a:r>
               <a:rPr lang="en-US" sz="900" b="1" spc="100" kern="0" dirty="0">
                 <a:solidFill>
-                  <a:srgbClr val="1C1140"/>
+                  <a:srgbClr val="A98BFF"/>
                 </a:solidFill>
                 <a:latin typeface="Courier New" pitchFamily="34" charset="0"/>
                 <a:ea typeface="Courier New" pitchFamily="34" charset="-122"/>
@@ -12616,11 +12828,11 @@
             </a:avLst>
           </a:prstGeom>
           <a:solidFill>
-            <a:srgbClr val="17141F"/>
+            <a:srgbClr val="000000"/>
           </a:solidFill>
           <a:ln w="12700">
             <a:solidFill>
-              <a:srgbClr val="2E2A3A"/>
+              <a:srgbClr val="5E4F85"/>
             </a:solidFill>
             <a:prstDash val="solid"/>
           </a:ln>
@@ -12754,7 +12966,7 @@
             <a:r>
               <a:rPr lang="en-US" sz="1200" dirty="0">
                 <a:solidFill>
-                  <a:srgbClr val="AFA9BE"/>
+                  <a:srgbClr val="C9C4D6"/>
                 </a:solidFill>
                 <a:latin typeface="Montserrat" pitchFamily="34" charset="0"/>
                 <a:ea typeface="Montserrat" pitchFamily="34" charset="-122"/>
@@ -12783,11 +12995,11 @@
             </a:avLst>
           </a:prstGeom>
           <a:solidFill>
-            <a:srgbClr val="17141F"/>
+            <a:srgbClr val="000000"/>
           </a:solidFill>
           <a:ln w="12700">
             <a:solidFill>
-              <a:srgbClr val="2E2A3A"/>
+              <a:srgbClr val="5E4F85"/>
             </a:solidFill>
             <a:prstDash val="solid"/>
           </a:ln>
@@ -12921,7 +13133,7 @@
             <a:r>
               <a:rPr lang="en-US" sz="1200" dirty="0">
                 <a:solidFill>
-                  <a:srgbClr val="AFA9BE"/>
+                  <a:srgbClr val="C9C4D6"/>
                 </a:solidFill>
                 <a:latin typeface="Montserrat" pitchFamily="34" charset="0"/>
                 <a:ea typeface="Montserrat" pitchFamily="34" charset="-122"/>
@@ -12950,11 +13162,11 @@
             </a:avLst>
           </a:prstGeom>
           <a:solidFill>
-            <a:srgbClr val="17141F"/>
+            <a:srgbClr val="000000"/>
           </a:solidFill>
           <a:ln w="12700">
             <a:solidFill>
-              <a:srgbClr val="2E2A3A"/>
+              <a:srgbClr val="5E4F85"/>
             </a:solidFill>
             <a:prstDash val="solid"/>
           </a:ln>
@@ -13088,7 +13300,7 @@
             <a:r>
               <a:rPr lang="en-US" sz="1200" dirty="0">
                 <a:solidFill>
-                  <a:srgbClr val="AFA9BE"/>
+                  <a:srgbClr val="C9C4D6"/>
                 </a:solidFill>
                 <a:latin typeface="Montserrat" pitchFamily="34" charset="0"/>
                 <a:ea typeface="Montserrat" pitchFamily="34" charset="-122"/>
@@ -13117,11 +13329,11 @@
             </a:avLst>
           </a:prstGeom>
           <a:solidFill>
-            <a:srgbClr val="17141F"/>
+            <a:srgbClr val="000000"/>
           </a:solidFill>
           <a:ln w="12700">
             <a:solidFill>
-              <a:srgbClr val="2E2A3A"/>
+              <a:srgbClr val="5E4F85"/>
             </a:solidFill>
             <a:prstDash val="solid"/>
           </a:ln>
@@ -13255,7 +13467,7 @@
             <a:r>
               <a:rPr lang="en-US" sz="1200" dirty="0">
                 <a:solidFill>
-                  <a:srgbClr val="AFA9BE"/>
+                  <a:srgbClr val="C9C4D6"/>
                 </a:solidFill>
                 <a:latin typeface="Montserrat" pitchFamily="34" charset="0"/>
                 <a:ea typeface="Montserrat" pitchFamily="34" charset="-122"/>
@@ -13284,11 +13496,11 @@
             </a:avLst>
           </a:prstGeom>
           <a:solidFill>
-            <a:srgbClr val="17141F"/>
+            <a:srgbClr val="000000"/>
           </a:solidFill>
           <a:ln w="12700">
             <a:solidFill>
-              <a:srgbClr val="2E2A3A"/>
+              <a:srgbClr val="5E4F85"/>
             </a:solidFill>
             <a:prstDash val="solid"/>
           </a:ln>
@@ -13422,7 +13634,7 @@
             <a:r>
               <a:rPr lang="en-US" sz="1200" dirty="0">
                 <a:solidFill>
-                  <a:srgbClr val="AFA9BE"/>
+                  <a:srgbClr val="C9C4D6"/>
                 </a:solidFill>
                 <a:latin typeface="Montserrat" pitchFamily="34" charset="0"/>
                 <a:ea typeface="Montserrat" pitchFamily="34" charset="-122"/>
@@ -13464,7 +13676,7 @@
             <a:lvl1pPr>
               <a:defRPr sz="850">
                 <a:solidFill>
-                  <a:srgbClr val="8A82A0"/>
+                  <a:srgbClr val="9A94AA"/>
                 </a:solidFill>
                 <a:latin typeface="Courier New"/>
                 <a:ea typeface="Courier New"/>
@@ -13563,7 +13775,7 @@
             </a:avLst>
           </a:prstGeom>
           <a:solidFill>
-            <a:srgbClr val="5FD6A0"/>
+            <a:srgbClr val="5A05F4"/>
           </a:solidFill>
           <a:ln/>
         </p:spPr>
@@ -13595,7 +13807,7 @@
             <a:r>
               <a:rPr lang="en-US" sz="900" b="1" spc="100" kern="0" dirty="0">
                 <a:solidFill>
-                  <a:srgbClr val="102A20"/>
+                  <a:srgbClr val="FFFFFF"/>
                 </a:solidFill>
                 <a:latin typeface="Courier New" pitchFamily="34" charset="0"/>
                 <a:ea typeface="Courier New" pitchFamily="34" charset="-122"/>
@@ -13648,11 +13860,11 @@
             </a:avLst>
           </a:prstGeom>
           <a:solidFill>
-            <a:srgbClr val="17141F"/>
+            <a:srgbClr val="000000"/>
           </a:solidFill>
           <a:ln w="19050">
             <a:solidFill>
-              <a:srgbClr val="C9A6FF"/>
+              <a:srgbClr val="A98BFF"/>
             </a:solidFill>
             <a:prstDash val="solid"/>
           </a:ln>
@@ -13685,7 +13897,7 @@
             <a:r>
               <a:rPr lang="en-US" sz="1550" b="1" dirty="0">
                 <a:solidFill>
-                  <a:srgbClr val="C9A6FF"/>
+                  <a:srgbClr val="A98BFF"/>
                 </a:solidFill>
                 <a:latin typeface="Montserrat" pitchFamily="34" charset="0"/>
                 <a:ea typeface="Montserrat" pitchFamily="34" charset="-122"/>
@@ -13763,7 +13975,7 @@
             <a:r>
               <a:rPr lang="en-US" sz="950" b="1" spc="100" kern="0" dirty="0">
                 <a:solidFill>
-                  <a:srgbClr val="8A82A0"/>
+                  <a:srgbClr val="9A94AA"/>
                 </a:solidFill>
                 <a:latin typeface="Courier New" pitchFamily="34" charset="0"/>
                 <a:ea typeface="Courier New" pitchFamily="34" charset="-122"/>
@@ -13802,7 +14014,7 @@
             <a:r>
               <a:rPr lang="en-US" sz="1250" b="1" dirty="0">
                 <a:solidFill>
-                  <a:srgbClr val="C9A6FF"/>
+                  <a:srgbClr val="A98BFF"/>
                 </a:solidFill>
                 <a:latin typeface="Montserrat" pitchFamily="34" charset="0"/>
                 <a:ea typeface="Montserrat" pitchFamily="34" charset="-122"/>
@@ -13855,7 +14067,7 @@
             <a:r>
               <a:rPr lang="en-US" sz="1250" b="1" dirty="0">
                 <a:solidFill>
-                  <a:srgbClr val="C9A6FF"/>
+                  <a:srgbClr val="A98BFF"/>
                 </a:solidFill>
                 <a:latin typeface="Montserrat" pitchFamily="34" charset="0"/>
                 <a:ea typeface="Montserrat" pitchFamily="34" charset="-122"/>
@@ -13908,7 +14120,7 @@
             <a:r>
               <a:rPr lang="en-US" sz="1250" b="1" dirty="0">
                 <a:solidFill>
-                  <a:srgbClr val="C9A6FF"/>
+                  <a:srgbClr val="A98BFF"/>
                 </a:solidFill>
                 <a:latin typeface="Montserrat" pitchFamily="34" charset="0"/>
                 <a:ea typeface="Montserrat" pitchFamily="34" charset="-122"/>
@@ -13961,7 +14173,7 @@
             <a:r>
               <a:rPr lang="en-US" sz="1250" b="1" dirty="0">
                 <a:solidFill>
-                  <a:srgbClr val="C9A6FF"/>
+                  <a:srgbClr val="A98BFF"/>
                 </a:solidFill>
                 <a:latin typeface="Montserrat" pitchFamily="34" charset="0"/>
                 <a:ea typeface="Montserrat" pitchFamily="34" charset="-122"/>
@@ -14004,9 +14216,14 @@
             </a:avLst>
           </a:prstGeom>
           <a:solidFill>
-            <a:srgbClr val="2A2010"/>
+            <a:srgbClr val="0B1A38"/>
           </a:solidFill>
-          <a:ln/>
+          <a:ln w="12700">
+            <a:solidFill>
+              <a:srgbClr val="6BA0F8"/>
+            </a:solidFill>
+            <a:prstDash val="solid"/>
+          </a:ln>
         </p:spPr>
       </p:sp>
       <p:sp>
@@ -14036,7 +14253,7 @@
             <a:r>
               <a:rPr lang="en-US" sz="1450" b="1" dirty="0">
                 <a:solidFill>
-                  <a:srgbClr val="E8A857"/>
+                  <a:srgbClr val="6BA0F8"/>
                 </a:solidFill>
                 <a:latin typeface="Montserrat" pitchFamily="34" charset="0"/>
                 <a:ea typeface="Montserrat" pitchFamily="34" charset="-122"/>
@@ -14078,7 +14295,7 @@
             <a:r>
               <a:rPr lang="en-US" sz="1200" dirty="0">
                 <a:solidFill>
-                  <a:srgbClr val="FFFFFF"/>
+                  <a:srgbClr val="C9C4D6"/>
                 </a:solidFill>
                 <a:latin typeface="Montserrat" pitchFamily="34" charset="0"/>
                 <a:ea typeface="Montserrat" pitchFamily="34" charset="-122"/>
@@ -14098,7 +14315,7 @@
             <a:r>
               <a:rPr lang="en-US" sz="1200" dirty="0">
                 <a:solidFill>
-                  <a:srgbClr val="FFFFFF"/>
+                  <a:srgbClr val="C9C4D6"/>
                 </a:solidFill>
                 <a:latin typeface="Montserrat" pitchFamily="34" charset="0"/>
                 <a:ea typeface="Montserrat" pitchFamily="34" charset="-122"/>
@@ -14140,7 +14357,7 @@
             <a:lvl1pPr>
               <a:defRPr sz="850">
                 <a:solidFill>
-                  <a:srgbClr val="8A82A0"/>
+                  <a:srgbClr val="9A94AA"/>
                 </a:solidFill>
                 <a:latin typeface="Courier New"/>
                 <a:ea typeface="Courier New"/>
@@ -14249,7 +14466,7 @@
             <a:r>
               <a:rPr lang="en-US" sz="1100" b="1" spc="300" kern="0" dirty="0">
                 <a:solidFill>
-                  <a:srgbClr val="C9B8FB"/>
+                  <a:srgbClr val="C4B3F5"/>
                 </a:solidFill>
                 <a:latin typeface="Courier New" pitchFamily="34" charset="0"/>
                 <a:ea typeface="Courier New" pitchFamily="34" charset="-122"/>
@@ -14588,11 +14805,11 @@
             </a:avLst>
           </a:prstGeom>
           <a:solidFill>
-            <a:srgbClr val="17141F"/>
+            <a:srgbClr val="000000"/>
           </a:solidFill>
           <a:ln w="12700">
             <a:solidFill>
-              <a:srgbClr val="2E2A3A"/>
+              <a:srgbClr val="5E4F85"/>
             </a:solidFill>
             <a:prstDash val="solid"/>
           </a:ln>
@@ -14625,7 +14842,7 @@
             <a:r>
               <a:rPr lang="en-US" sz="1500" b="1" dirty="0">
                 <a:solidFill>
-                  <a:srgbClr val="C9A6FF"/>
+                  <a:srgbClr val="A98BFF"/>
                 </a:solidFill>
                 <a:latin typeface="Montserrat" pitchFamily="34" charset="0"/>
                 <a:ea typeface="Montserrat" pitchFamily="34" charset="-122"/>
@@ -14760,9 +14977,14 @@
             </a:avLst>
           </a:prstGeom>
           <a:solidFill>
-            <a:srgbClr val="C9A6FF"/>
+            <a:srgbClr val="1A0B3D"/>
           </a:solidFill>
-          <a:ln/>
+          <a:ln w="12700">
+            <a:solidFill>
+              <a:srgbClr val="5A05F4"/>
+            </a:solidFill>
+            <a:prstDash val="solid"/>
+          </a:ln>
         </p:spPr>
       </p:sp>
       <p:sp>
@@ -14792,7 +15014,7 @@
             <a:r>
               <a:rPr lang="en-US" sz="900" b="1" spc="100" kern="0" dirty="0">
                 <a:solidFill>
-                  <a:srgbClr val="1C1140"/>
+                  <a:srgbClr val="A98BFF"/>
                 </a:solidFill>
                 <a:latin typeface="Courier New" pitchFamily="34" charset="0"/>
                 <a:ea typeface="Courier New" pitchFamily="34" charset="-122"/>
@@ -14845,11 +15067,11 @@
             </a:avLst>
           </a:prstGeom>
           <a:solidFill>
-            <a:srgbClr val="17141F"/>
+            <a:srgbClr val="000000"/>
           </a:solidFill>
           <a:ln w="12700">
             <a:solidFill>
-              <a:srgbClr val="2E2A3A"/>
+              <a:srgbClr val="5E4F85"/>
             </a:solidFill>
             <a:prstDash val="solid"/>
           </a:ln>
@@ -14970,11 +15192,11 @@
             </a:avLst>
           </a:prstGeom>
           <a:solidFill>
-            <a:srgbClr val="17141F"/>
+            <a:srgbClr val="000000"/>
           </a:solidFill>
           <a:ln w="12700">
             <a:solidFill>
-              <a:srgbClr val="2E2A3A"/>
+              <a:srgbClr val="5E4F85"/>
             </a:solidFill>
             <a:prstDash val="solid"/>
           </a:ln>
@@ -15095,11 +15317,11 @@
             </a:avLst>
           </a:prstGeom>
           <a:solidFill>
-            <a:srgbClr val="17141F"/>
+            <a:srgbClr val="000000"/>
           </a:solidFill>
           <a:ln w="12700">
             <a:solidFill>
-              <a:srgbClr val="2E2A3A"/>
+              <a:srgbClr val="5E4F85"/>
             </a:solidFill>
             <a:prstDash val="solid"/>
           </a:ln>
@@ -15220,11 +15442,11 @@
             </a:avLst>
           </a:prstGeom>
           <a:solidFill>
-            <a:srgbClr val="17141F"/>
+            <a:srgbClr val="000000"/>
           </a:solidFill>
           <a:ln w="12700">
             <a:solidFill>
-              <a:srgbClr val="2E2A3A"/>
+              <a:srgbClr val="5E4F85"/>
             </a:solidFill>
             <a:prstDash val="solid"/>
           </a:ln>
@@ -15345,11 +15567,11 @@
             </a:avLst>
           </a:prstGeom>
           <a:solidFill>
-            <a:srgbClr val="17141F"/>
+            <a:srgbClr val="000000"/>
           </a:solidFill>
           <a:ln w="12700">
             <a:solidFill>
-              <a:srgbClr val="2E2A3A"/>
+              <a:srgbClr val="5E4F85"/>
             </a:solidFill>
             <a:prstDash val="solid"/>
           </a:ln>
@@ -15470,11 +15692,11 @@
             </a:avLst>
           </a:prstGeom>
           <a:solidFill>
-            <a:srgbClr val="17141F"/>
+            <a:srgbClr val="000000"/>
           </a:solidFill>
           <a:ln w="12700">
             <a:solidFill>
-              <a:srgbClr val="2E2A3A"/>
+              <a:srgbClr val="5E4F85"/>
             </a:solidFill>
             <a:prstDash val="solid"/>
           </a:ln>
@@ -15595,9 +15817,14 @@
             </a:avLst>
           </a:prstGeom>
           <a:solidFill>
-            <a:srgbClr val="2A2010"/>
+            <a:srgbClr val="0B1A38"/>
           </a:solidFill>
-          <a:ln/>
+          <a:ln w="12700">
+            <a:solidFill>
+              <a:srgbClr val="6BA0F8"/>
+            </a:solidFill>
+            <a:prstDash val="solid"/>
+          </a:ln>
         </p:spPr>
       </p:sp>
       <p:sp>
@@ -15615,7 +15842,7 @@
             <a:avLst/>
           </a:prstGeom>
           <a:solidFill>
-            <a:srgbClr val="E8A857"/>
+            <a:srgbClr val="5A05F4"/>
           </a:solidFill>
           <a:ln/>
         </p:spPr>
@@ -15647,7 +15874,7 @@
             <a:r>
               <a:rPr lang="en-US" sz="1200" b="1" dirty="0">
                 <a:solidFill>
-                  <a:srgbClr val="2A2010"/>
+                  <a:srgbClr val="FFFFFF"/>
                 </a:solidFill>
                 <a:latin typeface="Courier New" pitchFamily="34" charset="0"/>
                 <a:ea typeface="Courier New" pitchFamily="34" charset="-122"/>
@@ -15686,7 +15913,7 @@
             <a:r>
               <a:rPr lang="en-US" sz="1450" b="1" dirty="0">
                 <a:solidFill>
-                  <a:srgbClr val="E8A857"/>
+                  <a:srgbClr val="6BA0F8"/>
                 </a:solidFill>
                 <a:latin typeface="Montserrat" pitchFamily="34" charset="0"/>
                 <a:ea typeface="Montserrat" pitchFamily="34" charset="-122"/>
@@ -15715,11 +15942,11 @@
             </a:avLst>
           </a:prstGeom>
           <a:solidFill>
-            <a:srgbClr val="17141F"/>
+            <a:srgbClr val="000000"/>
           </a:solidFill>
           <a:ln w="12700">
             <a:solidFill>
-              <a:srgbClr val="2E2A3A"/>
+              <a:srgbClr val="5E4F85"/>
             </a:solidFill>
             <a:prstDash val="solid"/>
           </a:ln>
@@ -15840,11 +16067,11 @@
             </a:avLst>
           </a:prstGeom>
           <a:solidFill>
-            <a:srgbClr val="17141F"/>
+            <a:srgbClr val="000000"/>
           </a:solidFill>
           <a:ln w="12700">
             <a:solidFill>
-              <a:srgbClr val="2E2A3A"/>
+              <a:srgbClr val="5E4F85"/>
             </a:solidFill>
             <a:prstDash val="solid"/>
           </a:ln>
@@ -15965,11 +16192,11 @@
             </a:avLst>
           </a:prstGeom>
           <a:solidFill>
-            <a:srgbClr val="17141F"/>
+            <a:srgbClr val="000000"/>
           </a:solidFill>
           <a:ln w="12700">
             <a:solidFill>
-              <a:srgbClr val="2E2A3A"/>
+              <a:srgbClr val="5E4F85"/>
             </a:solidFill>
             <a:prstDash val="solid"/>
           </a:ln>
@@ -16090,11 +16317,11 @@
             </a:avLst>
           </a:prstGeom>
           <a:solidFill>
-            <a:srgbClr val="17141F"/>
+            <a:srgbClr val="000000"/>
           </a:solidFill>
           <a:ln w="12700">
             <a:solidFill>
-              <a:srgbClr val="2E2A3A"/>
+              <a:srgbClr val="5E4F85"/>
             </a:solidFill>
             <a:prstDash val="solid"/>
           </a:ln>
@@ -16215,11 +16442,11 @@
             </a:avLst>
           </a:prstGeom>
           <a:solidFill>
-            <a:srgbClr val="17141F"/>
+            <a:srgbClr val="000000"/>
           </a:solidFill>
           <a:ln w="12700">
             <a:solidFill>
-              <a:srgbClr val="2E2A3A"/>
+              <a:srgbClr val="5E4F85"/>
             </a:solidFill>
             <a:prstDash val="solid"/>
           </a:ln>
@@ -16340,11 +16567,11 @@
             </a:avLst>
           </a:prstGeom>
           <a:solidFill>
-            <a:srgbClr val="17141F"/>
+            <a:srgbClr val="000000"/>
           </a:solidFill>
           <a:ln w="12700">
             <a:solidFill>
-              <a:srgbClr val="2E2A3A"/>
+              <a:srgbClr val="5E4F85"/>
             </a:solidFill>
             <a:prstDash val="solid"/>
           </a:ln>
@@ -16422,7 +16649,7 @@
             <a:lvl1pPr>
               <a:defRPr sz="850">
                 <a:solidFill>
-                  <a:srgbClr val="8A82A0"/>
+                  <a:srgbClr val="9A94AA"/>
                 </a:solidFill>
                 <a:latin typeface="Courier New"/>
                 <a:ea typeface="Courier New"/>
@@ -16534,7 +16761,7 @@
             <a:r>
               <a:rPr lang="en-US" sz="1300" dirty="0">
                 <a:solidFill>
-                  <a:srgbClr val="AFA9BE"/>
+                  <a:srgbClr val="C9C4D6"/>
                 </a:solidFill>
                 <a:latin typeface="Montserrat" pitchFamily="34" charset="0"/>
                 <a:ea typeface="Montserrat" pitchFamily="34" charset="-122"/>
@@ -16563,9 +16790,14 @@
             </a:avLst>
           </a:prstGeom>
           <a:solidFill>
-            <a:srgbClr val="C9A6FF"/>
+            <a:srgbClr val="1A0B3D"/>
           </a:solidFill>
-          <a:ln/>
+          <a:ln w="12700">
+            <a:solidFill>
+              <a:srgbClr val="5A05F4"/>
+            </a:solidFill>
+            <a:prstDash val="solid"/>
+          </a:ln>
         </p:spPr>
       </p:sp>
       <p:sp>
@@ -16595,7 +16827,7 @@
             <a:r>
               <a:rPr lang="en-US" sz="900" b="1" spc="100" kern="0" dirty="0">
                 <a:solidFill>
-                  <a:srgbClr val="1C1140"/>
+                  <a:srgbClr val="A98BFF"/>
                 </a:solidFill>
                 <a:latin typeface="Courier New" pitchFamily="34" charset="0"/>
                 <a:ea typeface="Courier New" pitchFamily="34" charset="-122"/>
@@ -16648,11 +16880,11 @@
             </a:avLst>
           </a:prstGeom>
           <a:solidFill>
-            <a:srgbClr val="17141F"/>
+            <a:srgbClr val="000000"/>
           </a:solidFill>
           <a:ln w="12700">
             <a:solidFill>
-              <a:srgbClr val="2E2A3A"/>
+              <a:srgbClr val="5E4F85"/>
             </a:solidFill>
             <a:prstDash val="solid"/>
           </a:ln>
@@ -16685,7 +16917,7 @@
             <a:r>
               <a:rPr lang="en-US" sz="1250" b="1" dirty="0">
                 <a:solidFill>
-                  <a:srgbClr val="C9A6FF"/>
+                  <a:srgbClr val="A98BFF"/>
                 </a:solidFill>
                 <a:latin typeface="Courier New" pitchFamily="34" charset="0"/>
                 <a:ea typeface="Courier New" pitchFamily="34" charset="-122"/>
@@ -16727,7 +16959,7 @@
             <a:r>
               <a:rPr lang="en-US" sz="1150" dirty="0">
                 <a:solidFill>
-                  <a:srgbClr val="AFA9BE"/>
+                  <a:srgbClr val="C9C4D6"/>
                 </a:solidFill>
                 <a:latin typeface="Montserrat" pitchFamily="34" charset="0"/>
                 <a:ea typeface="Montserrat" pitchFamily="34" charset="-122"/>
@@ -16756,11 +16988,11 @@
             </a:avLst>
           </a:prstGeom>
           <a:solidFill>
-            <a:srgbClr val="17141F"/>
+            <a:srgbClr val="000000"/>
           </a:solidFill>
           <a:ln w="12700">
             <a:solidFill>
-              <a:srgbClr val="2E2A3A"/>
+              <a:srgbClr val="5E4F85"/>
             </a:solidFill>
             <a:prstDash val="solid"/>
           </a:ln>
@@ -16793,7 +17025,7 @@
             <a:r>
               <a:rPr lang="en-US" sz="1250" b="1" dirty="0">
                 <a:solidFill>
-                  <a:srgbClr val="C9A6FF"/>
+                  <a:srgbClr val="A98BFF"/>
                 </a:solidFill>
                 <a:latin typeface="Courier New" pitchFamily="34" charset="0"/>
                 <a:ea typeface="Courier New" pitchFamily="34" charset="-122"/>
@@ -16835,7 +17067,7 @@
             <a:r>
               <a:rPr lang="en-US" sz="1150" dirty="0">
                 <a:solidFill>
-                  <a:srgbClr val="AFA9BE"/>
+                  <a:srgbClr val="C9C4D6"/>
                 </a:solidFill>
                 <a:latin typeface="Montserrat" pitchFamily="34" charset="0"/>
                 <a:ea typeface="Montserrat" pitchFamily="34" charset="-122"/>
@@ -16864,11 +17096,11 @@
             </a:avLst>
           </a:prstGeom>
           <a:solidFill>
-            <a:srgbClr val="17141F"/>
+            <a:srgbClr val="000000"/>
           </a:solidFill>
           <a:ln w="12700">
             <a:solidFill>
-              <a:srgbClr val="2E2A3A"/>
+              <a:srgbClr val="5E4F85"/>
             </a:solidFill>
             <a:prstDash val="solid"/>
           </a:ln>
@@ -16901,7 +17133,7 @@
             <a:r>
               <a:rPr lang="en-US" sz="1250" b="1" dirty="0">
                 <a:solidFill>
-                  <a:srgbClr val="C9A6FF"/>
+                  <a:srgbClr val="A98BFF"/>
                 </a:solidFill>
                 <a:latin typeface="Courier New" pitchFamily="34" charset="0"/>
                 <a:ea typeface="Courier New" pitchFamily="34" charset="-122"/>
@@ -16943,7 +17175,7 @@
             <a:r>
               <a:rPr lang="en-US" sz="1150" dirty="0">
                 <a:solidFill>
-                  <a:srgbClr val="AFA9BE"/>
+                  <a:srgbClr val="C9C4D6"/>
                 </a:solidFill>
                 <a:latin typeface="Montserrat" pitchFamily="34" charset="0"/>
                 <a:ea typeface="Montserrat" pitchFamily="34" charset="-122"/>
@@ -16972,11 +17204,11 @@
             </a:avLst>
           </a:prstGeom>
           <a:solidFill>
-            <a:srgbClr val="17141F"/>
+            <a:srgbClr val="000000"/>
           </a:solidFill>
           <a:ln w="12700">
             <a:solidFill>
-              <a:srgbClr val="2E2A3A"/>
+              <a:srgbClr val="5E4F85"/>
             </a:solidFill>
             <a:prstDash val="solid"/>
           </a:ln>
@@ -17009,7 +17241,7 @@
             <a:r>
               <a:rPr lang="en-US" sz="1250" b="1" dirty="0">
                 <a:solidFill>
-                  <a:srgbClr val="C9A6FF"/>
+                  <a:srgbClr val="A98BFF"/>
                 </a:solidFill>
                 <a:latin typeface="Courier New" pitchFamily="34" charset="0"/>
                 <a:ea typeface="Courier New" pitchFamily="34" charset="-122"/>
@@ -17051,7 +17283,7 @@
             <a:r>
               <a:rPr lang="en-US" sz="1150" dirty="0">
                 <a:solidFill>
-                  <a:srgbClr val="AFA9BE"/>
+                  <a:srgbClr val="C9C4D6"/>
                 </a:solidFill>
                 <a:latin typeface="Montserrat" pitchFamily="34" charset="0"/>
                 <a:ea typeface="Montserrat" pitchFamily="34" charset="-122"/>
@@ -17080,11 +17312,11 @@
             </a:avLst>
           </a:prstGeom>
           <a:solidFill>
-            <a:srgbClr val="17141F"/>
+            <a:srgbClr val="000000"/>
           </a:solidFill>
           <a:ln w="12700">
             <a:solidFill>
-              <a:srgbClr val="2E2A3A"/>
+              <a:srgbClr val="5E4F85"/>
             </a:solidFill>
             <a:prstDash val="solid"/>
           </a:ln>
@@ -17117,7 +17349,7 @@
             <a:r>
               <a:rPr lang="en-US" sz="1250" b="1" dirty="0">
                 <a:solidFill>
-                  <a:srgbClr val="C9A6FF"/>
+                  <a:srgbClr val="A98BFF"/>
                 </a:solidFill>
                 <a:latin typeface="Courier New" pitchFamily="34" charset="0"/>
                 <a:ea typeface="Courier New" pitchFamily="34" charset="-122"/>
@@ -17159,7 +17391,7 @@
             <a:r>
               <a:rPr lang="en-US" sz="1150" dirty="0">
                 <a:solidFill>
-                  <a:srgbClr val="AFA9BE"/>
+                  <a:srgbClr val="C9C4D6"/>
                 </a:solidFill>
                 <a:latin typeface="Montserrat" pitchFamily="34" charset="0"/>
                 <a:ea typeface="Montserrat" pitchFamily="34" charset="-122"/>
@@ -17188,11 +17420,11 @@
             </a:avLst>
           </a:prstGeom>
           <a:solidFill>
-            <a:srgbClr val="17141F"/>
+            <a:srgbClr val="000000"/>
           </a:solidFill>
           <a:ln w="12700">
             <a:solidFill>
-              <a:srgbClr val="2E2A3A"/>
+              <a:srgbClr val="5E4F85"/>
             </a:solidFill>
             <a:prstDash val="solid"/>
           </a:ln>
@@ -17225,7 +17457,7 @@
             <a:r>
               <a:rPr lang="en-US" sz="1250" b="1" dirty="0">
                 <a:solidFill>
-                  <a:srgbClr val="C9A6FF"/>
+                  <a:srgbClr val="A98BFF"/>
                 </a:solidFill>
                 <a:latin typeface="Courier New" pitchFamily="34" charset="0"/>
                 <a:ea typeface="Courier New" pitchFamily="34" charset="-122"/>
@@ -17267,7 +17499,7 @@
             <a:r>
               <a:rPr lang="en-US" sz="1150" dirty="0">
                 <a:solidFill>
-                  <a:srgbClr val="AFA9BE"/>
+                  <a:srgbClr val="C9C4D6"/>
                 </a:solidFill>
                 <a:latin typeface="Montserrat" pitchFamily="34" charset="0"/>
                 <a:ea typeface="Montserrat" pitchFamily="34" charset="-122"/>
@@ -17296,11 +17528,11 @@
             </a:avLst>
           </a:prstGeom>
           <a:solidFill>
-            <a:srgbClr val="17141F"/>
+            <a:srgbClr val="000000"/>
           </a:solidFill>
           <a:ln w="12700">
             <a:solidFill>
-              <a:srgbClr val="2E2A3A"/>
+              <a:srgbClr val="5E4F85"/>
             </a:solidFill>
             <a:prstDash val="solid"/>
           </a:ln>
@@ -17378,7 +17610,7 @@
             <a:lvl1pPr>
               <a:defRPr sz="850">
                 <a:solidFill>
-                  <a:srgbClr val="8A82A0"/>
+                  <a:srgbClr val="9A94AA"/>
                 </a:solidFill>
                 <a:latin typeface="Courier New"/>
                 <a:ea typeface="Courier New"/>
@@ -17448,7 +17680,7 @@
             <a:r>
               <a:rPr lang="en-US" sz="2600" b="1" dirty="0">
                 <a:solidFill>
-                  <a:srgbClr val="C9A6FF"/>
+                  <a:srgbClr val="A98BFF"/>
                 </a:solidFill>
                 <a:latin typeface="Courier New" pitchFamily="34" charset="0"/>
                 <a:ea typeface="Courier New" pitchFamily="34" charset="-122"/>
@@ -17516,9 +17748,14 @@
             </a:avLst>
           </a:prstGeom>
           <a:solidFill>
-            <a:srgbClr val="C9A6FF"/>
+            <a:srgbClr val="1A0B3D"/>
           </a:solidFill>
-          <a:ln/>
+          <a:ln w="12700">
+            <a:solidFill>
+              <a:srgbClr val="5A05F4"/>
+            </a:solidFill>
+            <a:prstDash val="solid"/>
+          </a:ln>
         </p:spPr>
       </p:sp>
       <p:sp>
@@ -17548,7 +17785,7 @@
             <a:r>
               <a:rPr lang="en-US" sz="900" b="1" spc="100" kern="0" dirty="0">
                 <a:solidFill>
-                  <a:srgbClr val="1C1140"/>
+                  <a:srgbClr val="A98BFF"/>
                 </a:solidFill>
                 <a:latin typeface="Courier New" pitchFamily="34" charset="0"/>
                 <a:ea typeface="Courier New" pitchFamily="34" charset="-122"/>
@@ -17601,9 +17838,14 @@
             </a:avLst>
           </a:prstGeom>
           <a:solidFill>
-            <a:srgbClr val="2E1418"/>
+            <a:srgbClr val="1A0808"/>
           </a:solidFill>
-          <a:ln/>
+          <a:ln w="12700">
+            <a:solidFill>
+              <a:srgbClr val="FF6B6B"/>
+            </a:solidFill>
+            <a:prstDash val="solid"/>
+          </a:ln>
         </p:spPr>
       </p:sp>
       <p:sp>
@@ -17633,7 +17875,7 @@
             <a:r>
               <a:rPr lang="en-US" sz="1450" b="1" dirty="0">
                 <a:solidFill>
-                  <a:srgbClr val="FF7B7B"/>
+                  <a:srgbClr val="FF6B6B"/>
                 </a:solidFill>
                 <a:latin typeface="Montserrat" pitchFamily="34" charset="0"/>
                 <a:ea typeface="Montserrat" pitchFamily="34" charset="-122"/>
@@ -17675,7 +17917,7 @@
             <a:r>
               <a:rPr lang="en-US" sz="1200" dirty="0">
                 <a:solidFill>
-                  <a:srgbClr val="FFFFFF"/>
+                  <a:srgbClr val="C9C4D6"/>
                 </a:solidFill>
                 <a:latin typeface="Montserrat" pitchFamily="34" charset="0"/>
                 <a:ea typeface="Montserrat" pitchFamily="34" charset="-122"/>
@@ -17704,9 +17946,14 @@
             </a:avLst>
           </a:prstGeom>
           <a:solidFill>
-            <a:srgbClr val="102A20"/>
+            <a:srgbClr val="06180F"/>
           </a:solidFill>
-          <a:ln/>
+          <a:ln w="12700">
+            <a:solidFill>
+              <a:srgbClr val="3FCF8E"/>
+            </a:solidFill>
+            <a:prstDash val="solid"/>
+          </a:ln>
         </p:spPr>
       </p:sp>
       <p:sp>
@@ -17736,7 +17983,7 @@
             <a:r>
               <a:rPr lang="en-US" sz="1450" b="1" dirty="0">
                 <a:solidFill>
-                  <a:srgbClr val="5FD6A0"/>
+                  <a:srgbClr val="3FCF8E"/>
                 </a:solidFill>
                 <a:latin typeface="Montserrat" pitchFamily="34" charset="0"/>
                 <a:ea typeface="Montserrat" pitchFamily="34" charset="-122"/>
@@ -17778,7 +18025,7 @@
             <a:r>
               <a:rPr lang="en-US" sz="1200" dirty="0">
                 <a:solidFill>
-                  <a:srgbClr val="FFFFFF"/>
+                  <a:srgbClr val="C9C4D6"/>
                 </a:solidFill>
                 <a:latin typeface="Montserrat" pitchFamily="34" charset="0"/>
                 <a:ea typeface="Montserrat" pitchFamily="34" charset="-122"/>
@@ -17807,9 +18054,14 @@
             </a:avLst>
           </a:prstGeom>
           <a:solidFill>
-            <a:srgbClr val="1C1140"/>
+            <a:srgbClr val="1A0B3D"/>
           </a:solidFill>
-          <a:ln/>
+          <a:ln w="12700">
+            <a:solidFill>
+              <a:srgbClr val="5A05F4"/>
+            </a:solidFill>
+            <a:prstDash val="solid"/>
+          </a:ln>
         </p:spPr>
       </p:sp>
       <p:sp>
@@ -17827,7 +18079,7 @@
             <a:avLst/>
           </a:prstGeom>
           <a:solidFill>
-            <a:srgbClr val="C9A6FF"/>
+            <a:srgbClr val="5A05F4"/>
           </a:solidFill>
           <a:ln/>
         </p:spPr>
@@ -17859,7 +18111,7 @@
             <a:r>
               <a:rPr lang="en-US" sz="1200" b="1" dirty="0">
                 <a:solidFill>
-                  <a:srgbClr val="1C1140"/>
+                  <a:srgbClr val="FFFFFF"/>
                 </a:solidFill>
                 <a:latin typeface="Courier New" pitchFamily="34" charset="0"/>
                 <a:ea typeface="Courier New" pitchFamily="34" charset="-122"/>
@@ -17898,7 +18150,7 @@
             <a:r>
               <a:rPr lang="en-US" sz="1450" b="1" dirty="0">
                 <a:solidFill>
-                  <a:srgbClr val="C9A6FF"/>
+                  <a:srgbClr val="A98BFF"/>
                 </a:solidFill>
                 <a:latin typeface="Montserrat" pitchFamily="34" charset="0"/>
                 <a:ea typeface="Montserrat" pitchFamily="34" charset="-122"/>
@@ -17940,7 +18192,7 @@
             <a:r>
               <a:rPr lang="en-US" sz="1200" dirty="0">
                 <a:solidFill>
-                  <a:srgbClr val="FFFFFF"/>
+                  <a:srgbClr val="C9C4D6"/>
                 </a:solidFill>
                 <a:latin typeface="Montserrat" pitchFamily="34" charset="0"/>
                 <a:ea typeface="Montserrat" pitchFamily="34" charset="-122"/>
@@ -17969,9 +18221,14 @@
             </a:avLst>
           </a:prstGeom>
           <a:solidFill>
-            <a:srgbClr val="1C1140"/>
+            <a:srgbClr val="1A0B3D"/>
           </a:solidFill>
-          <a:ln/>
+          <a:ln w="12700">
+            <a:solidFill>
+              <a:srgbClr val="5A05F4"/>
+            </a:solidFill>
+            <a:prstDash val="solid"/>
+          </a:ln>
         </p:spPr>
       </p:sp>
       <p:sp>
@@ -17989,7 +18246,7 @@
             <a:avLst/>
           </a:prstGeom>
           <a:solidFill>
-            <a:srgbClr val="C9A6FF"/>
+            <a:srgbClr val="5A05F4"/>
           </a:solidFill>
           <a:ln/>
         </p:spPr>
@@ -18021,7 +18278,7 @@
             <a:r>
               <a:rPr lang="en-US" sz="1200" b="1" dirty="0">
                 <a:solidFill>
-                  <a:srgbClr val="1C1140"/>
+                  <a:srgbClr val="FFFFFF"/>
                 </a:solidFill>
                 <a:latin typeface="Courier New" pitchFamily="34" charset="0"/>
                 <a:ea typeface="Courier New" pitchFamily="34" charset="-122"/>
@@ -18060,7 +18317,7 @@
             <a:r>
               <a:rPr lang="en-US" sz="1450" b="1" dirty="0">
                 <a:solidFill>
-                  <a:srgbClr val="C9A6FF"/>
+                  <a:srgbClr val="A98BFF"/>
                 </a:solidFill>
                 <a:latin typeface="Montserrat" pitchFamily="34" charset="0"/>
                 <a:ea typeface="Montserrat" pitchFamily="34" charset="-122"/>
@@ -18102,7 +18359,7 @@
             <a:r>
               <a:rPr lang="en-US" sz="1200" dirty="0">
                 <a:solidFill>
-                  <a:srgbClr val="FFFFFF"/>
+                  <a:srgbClr val="C9C4D6"/>
                 </a:solidFill>
                 <a:latin typeface="Montserrat" pitchFamily="34" charset="0"/>
                 <a:ea typeface="Montserrat" pitchFamily="34" charset="-122"/>
@@ -18131,9 +18388,14 @@
             </a:avLst>
           </a:prstGeom>
           <a:solidFill>
-            <a:srgbClr val="1C1140"/>
+            <a:srgbClr val="1A0B3D"/>
           </a:solidFill>
-          <a:ln/>
+          <a:ln w="12700">
+            <a:solidFill>
+              <a:srgbClr val="5A05F4"/>
+            </a:solidFill>
+            <a:prstDash val="solid"/>
+          </a:ln>
         </p:spPr>
       </p:sp>
       <p:sp>
@@ -18151,7 +18413,7 @@
             <a:avLst/>
           </a:prstGeom>
           <a:solidFill>
-            <a:srgbClr val="C9A6FF"/>
+            <a:srgbClr val="5A05F4"/>
           </a:solidFill>
           <a:ln/>
         </p:spPr>
@@ -18183,7 +18445,7 @@
             <a:r>
               <a:rPr lang="en-US" sz="1200" b="1" dirty="0">
                 <a:solidFill>
-                  <a:srgbClr val="1C1140"/>
+                  <a:srgbClr val="FFFFFF"/>
                 </a:solidFill>
                 <a:latin typeface="Courier New" pitchFamily="34" charset="0"/>
                 <a:ea typeface="Courier New" pitchFamily="34" charset="-122"/>
@@ -18222,7 +18484,7 @@
             <a:r>
               <a:rPr lang="en-US" sz="1450" b="1" dirty="0">
                 <a:solidFill>
-                  <a:srgbClr val="C9A6FF"/>
+                  <a:srgbClr val="A98BFF"/>
                 </a:solidFill>
                 <a:latin typeface="Montserrat" pitchFamily="34" charset="0"/>
                 <a:ea typeface="Montserrat" pitchFamily="34" charset="-122"/>
@@ -18264,7 +18526,7 @@
             <a:r>
               <a:rPr lang="en-US" sz="1200" dirty="0">
                 <a:solidFill>
-                  <a:srgbClr val="FFFFFF"/>
+                  <a:srgbClr val="C9C4D6"/>
                 </a:solidFill>
                 <a:latin typeface="Montserrat" pitchFamily="34" charset="0"/>
                 <a:ea typeface="Montserrat" pitchFamily="34" charset="-122"/>
@@ -18293,11 +18555,11 @@
             </a:avLst>
           </a:prstGeom>
           <a:solidFill>
-            <a:srgbClr val="17141F"/>
+            <a:srgbClr val="000000"/>
           </a:solidFill>
           <a:ln w="12700">
             <a:solidFill>
-              <a:srgbClr val="2E2A3A"/>
+              <a:srgbClr val="5E4F85"/>
             </a:solidFill>
             <a:prstDash val="solid"/>
           </a:ln>
@@ -18375,7 +18637,7 @@
             <a:lvl1pPr>
               <a:defRPr sz="850">
                 <a:solidFill>
-                  <a:srgbClr val="8A82A0"/>
+                  <a:srgbClr val="9A94AA"/>
                 </a:solidFill>
                 <a:latin typeface="Courier New"/>
                 <a:ea typeface="Courier New"/>
@@ -18445,7 +18707,7 @@
             <a:r>
               <a:rPr lang="en-US" sz="2600" b="1" dirty="0">
                 <a:solidFill>
-                  <a:srgbClr val="C9A6FF"/>
+                  <a:srgbClr val="A98BFF"/>
                 </a:solidFill>
                 <a:latin typeface="Courier New" pitchFamily="34" charset="0"/>
                 <a:ea typeface="Courier New" pitchFamily="34" charset="-122"/>
@@ -18513,9 +18775,14 @@
             </a:avLst>
           </a:prstGeom>
           <a:solidFill>
-            <a:srgbClr val="C9A6FF"/>
+            <a:srgbClr val="1A0B3D"/>
           </a:solidFill>
-          <a:ln/>
+          <a:ln w="12700">
+            <a:solidFill>
+              <a:srgbClr val="5A05F4"/>
+            </a:solidFill>
+            <a:prstDash val="solid"/>
+          </a:ln>
         </p:spPr>
       </p:sp>
       <p:sp>
@@ -18545,7 +18812,7 @@
             <a:r>
               <a:rPr lang="en-US" sz="900" b="1" spc="100" kern="0" dirty="0">
                 <a:solidFill>
-                  <a:srgbClr val="1C1140"/>
+                  <a:srgbClr val="A98BFF"/>
                 </a:solidFill>
                 <a:latin typeface="Courier New" pitchFamily="34" charset="0"/>
                 <a:ea typeface="Courier New" pitchFamily="34" charset="-122"/>
@@ -18598,11 +18865,11 @@
             </a:avLst>
           </a:prstGeom>
           <a:solidFill>
-            <a:srgbClr val="17141F"/>
+            <a:srgbClr val="000000"/>
           </a:solidFill>
           <a:ln w="12700">
             <a:solidFill>
-              <a:srgbClr val="2E2A3A"/>
+              <a:srgbClr val="5E4F85"/>
             </a:solidFill>
             <a:prstDash val="solid"/>
           </a:ln>
@@ -18664,7 +18931,7 @@
           <a:noFill/>
           <a:ln w="15875">
             <a:solidFill>
-              <a:srgbClr val="9B7BE8"/>
+              <a:srgbClr val="8F72E6"/>
             </a:solidFill>
             <a:prstDash val="solid"/>
           </a:ln>
@@ -18685,7 +18952,7 @@
             <a:avLst/>
           </a:prstGeom>
           <a:solidFill>
-            <a:srgbClr val="9B7BE8"/>
+            <a:srgbClr val="8F72E6"/>
           </a:solidFill>
           <a:ln/>
         </p:spPr>
@@ -18707,9 +18974,14 @@
             </a:avLst>
           </a:prstGeom>
           <a:solidFill>
-            <a:srgbClr val="1C1140"/>
+            <a:srgbClr val="1A0B3D"/>
           </a:solidFill>
-          <a:ln/>
+          <a:ln w="12700">
+            <a:solidFill>
+              <a:srgbClr val="5A05F4"/>
+            </a:solidFill>
+            <a:prstDash val="solid"/>
+          </a:ln>
         </p:spPr>
       </p:sp>
       <p:sp>
@@ -18739,7 +19011,7 @@
             <a:r>
               <a:rPr lang="en-US" sz="1000" b="1" dirty="0">
                 <a:solidFill>
-                  <a:srgbClr val="C9A6FF"/>
+                  <a:srgbClr val="A98BFF"/>
                 </a:solidFill>
                 <a:latin typeface="Courier New" pitchFamily="34" charset="0"/>
                 <a:ea typeface="Courier New" pitchFamily="34" charset="-122"/>
@@ -18768,7 +19040,7 @@
           <a:noFill/>
           <a:ln w="15875">
             <a:solidFill>
-              <a:srgbClr val="9B7BE8"/>
+              <a:srgbClr val="8F72E6"/>
             </a:solidFill>
             <a:prstDash val="solid"/>
           </a:ln>
@@ -18789,7 +19061,7 @@
             <a:avLst/>
           </a:prstGeom>
           <a:solidFill>
-            <a:srgbClr val="9B7BE8"/>
+            <a:srgbClr val="8F72E6"/>
           </a:solidFill>
           <a:ln/>
         </p:spPr>
@@ -18811,11 +19083,11 @@
             </a:avLst>
           </a:prstGeom>
           <a:solidFill>
-            <a:srgbClr val="17141F"/>
+            <a:srgbClr val="000000"/>
           </a:solidFill>
           <a:ln w="12700">
             <a:solidFill>
-              <a:srgbClr val="2E2A3A"/>
+              <a:srgbClr val="5E4F85"/>
             </a:solidFill>
             <a:prstDash val="solid"/>
           </a:ln>
@@ -18877,7 +19149,7 @@
           <a:noFill/>
           <a:ln w="15875">
             <a:solidFill>
-              <a:srgbClr val="9B7BE8"/>
+              <a:srgbClr val="8F72E6"/>
             </a:solidFill>
             <a:prstDash val="solid"/>
           </a:ln>
@@ -18898,7 +19170,7 @@
             <a:avLst/>
           </a:prstGeom>
           <a:solidFill>
-            <a:srgbClr val="9B7BE8"/>
+            <a:srgbClr val="8F72E6"/>
           </a:solidFill>
           <a:ln/>
         </p:spPr>
@@ -18920,11 +19192,11 @@
             </a:avLst>
           </a:prstGeom>
           <a:solidFill>
-            <a:srgbClr val="17141F"/>
+            <a:srgbClr val="000000"/>
           </a:solidFill>
           <a:ln w="12700">
             <a:solidFill>
-              <a:srgbClr val="2E2A3A"/>
+              <a:srgbClr val="5E4F85"/>
             </a:solidFill>
             <a:prstDash val="solid"/>
           </a:ln>
@@ -18986,7 +19258,7 @@
           <a:noFill/>
           <a:ln w="15875">
             <a:solidFill>
-              <a:srgbClr val="9B7BE8"/>
+              <a:srgbClr val="8F72E6"/>
             </a:solidFill>
             <a:prstDash val="solid"/>
           </a:ln>
@@ -19007,7 +19279,7 @@
             <a:avLst/>
           </a:prstGeom>
           <a:solidFill>
-            <a:srgbClr val="9B7BE8"/>
+            <a:srgbClr val="8F72E6"/>
           </a:solidFill>
           <a:ln/>
         </p:spPr>
@@ -19029,11 +19301,11 @@
             </a:avLst>
           </a:prstGeom>
           <a:solidFill>
-            <a:srgbClr val="17141F"/>
+            <a:srgbClr val="000000"/>
           </a:solidFill>
           <a:ln w="12700">
             <a:solidFill>
-              <a:srgbClr val="2E2A3A"/>
+              <a:srgbClr val="5E4F85"/>
             </a:solidFill>
             <a:prstDash val="solid"/>
           </a:ln>
@@ -19095,7 +19367,7 @@
           <a:noFill/>
           <a:ln w="15875">
             <a:solidFill>
-              <a:srgbClr val="9B7BE8"/>
+              <a:srgbClr val="8F72E6"/>
             </a:solidFill>
             <a:prstDash val="solid"/>
           </a:ln>
@@ -19116,7 +19388,7 @@
             <a:avLst/>
           </a:prstGeom>
           <a:solidFill>
-            <a:srgbClr val="9B7BE8"/>
+            <a:srgbClr val="8F72E6"/>
           </a:solidFill>
           <a:ln/>
         </p:spPr>
@@ -19138,9 +19410,14 @@
             </a:avLst>
           </a:prstGeom>
           <a:solidFill>
-            <a:srgbClr val="102A20"/>
+            <a:srgbClr val="06180F"/>
           </a:solidFill>
-          <a:ln/>
+          <a:ln w="12700">
+            <a:solidFill>
+              <a:srgbClr val="3FCF8E"/>
+            </a:solidFill>
+            <a:prstDash val="solid"/>
+          </a:ln>
         </p:spPr>
       </p:sp>
       <p:sp>
@@ -19170,7 +19447,7 @@
             <a:r>
               <a:rPr lang="en-US" sz="1000" b="1" dirty="0">
                 <a:solidFill>
-                  <a:srgbClr val="5FD6A0"/>
+                  <a:srgbClr val="3FCF8E"/>
                 </a:solidFill>
                 <a:latin typeface="Courier New" pitchFamily="34" charset="0"/>
                 <a:ea typeface="Courier New" pitchFamily="34" charset="-122"/>
@@ -19199,11 +19476,11 @@
             </a:avLst>
           </a:prstGeom>
           <a:solidFill>
-            <a:srgbClr val="17141F"/>
+            <a:srgbClr val="000000"/>
           </a:solidFill>
           <a:ln w="12700">
             <a:solidFill>
-              <a:srgbClr val="2E2A3A"/>
+              <a:srgbClr val="5E4F85"/>
             </a:solidFill>
             <a:prstDash val="solid"/>
           </a:ln>
@@ -19265,7 +19542,7 @@
           <a:noFill/>
           <a:ln w="15875">
             <a:solidFill>
-              <a:srgbClr val="9B7BE8"/>
+              <a:srgbClr val="8F72E6"/>
             </a:solidFill>
             <a:prstDash val="solid"/>
           </a:ln>
@@ -19286,7 +19563,7 @@
             <a:avLst/>
           </a:prstGeom>
           <a:solidFill>
-            <a:srgbClr val="9B7BE8"/>
+            <a:srgbClr val="8F72E6"/>
           </a:solidFill>
           <a:ln/>
         </p:spPr>
@@ -19308,9 +19585,14 @@
             </a:avLst>
           </a:prstGeom>
           <a:solidFill>
-            <a:srgbClr val="2A2010"/>
+            <a:srgbClr val="0B1A38"/>
           </a:solidFill>
-          <a:ln/>
+          <a:ln w="12700">
+            <a:solidFill>
+              <a:srgbClr val="6BA0F8"/>
+            </a:solidFill>
+            <a:prstDash val="solid"/>
+          </a:ln>
         </p:spPr>
       </p:sp>
       <p:sp>
@@ -19340,7 +19622,7 @@
             <a:r>
               <a:rPr lang="en-US" sz="1000" b="1" dirty="0">
                 <a:solidFill>
-                  <a:srgbClr val="E8A857"/>
+                  <a:srgbClr val="6BA0F8"/>
                 </a:solidFill>
                 <a:latin typeface="Courier New" pitchFamily="34" charset="0"/>
                 <a:ea typeface="Courier New" pitchFamily="34" charset="-122"/>
@@ -19369,7 +19651,7 @@
           <a:noFill/>
           <a:ln w="15875">
             <a:solidFill>
-              <a:srgbClr val="9B7BE8"/>
+              <a:srgbClr val="8F72E6"/>
             </a:solidFill>
             <a:prstDash val="solid"/>
           </a:ln>
@@ -19390,7 +19672,7 @@
             <a:avLst/>
           </a:prstGeom>
           <a:solidFill>
-            <a:srgbClr val="9B7BE8"/>
+            <a:srgbClr val="8F72E6"/>
           </a:solidFill>
           <a:ln/>
         </p:spPr>
@@ -19412,9 +19694,14 @@
             </a:avLst>
           </a:prstGeom>
           <a:solidFill>
-            <a:srgbClr val="102A20"/>
+            <a:srgbClr val="06180F"/>
           </a:solidFill>
-          <a:ln/>
+          <a:ln w="12700">
+            <a:solidFill>
+              <a:srgbClr val="3FCF8E"/>
+            </a:solidFill>
+            <a:prstDash val="solid"/>
+          </a:ln>
         </p:spPr>
       </p:sp>
       <p:sp>
@@ -19444,7 +19731,7 @@
             <a:r>
               <a:rPr lang="en-US" sz="1000" b="1" dirty="0">
                 <a:solidFill>
-                  <a:srgbClr val="5FD6A0"/>
+                  <a:srgbClr val="3FCF8E"/>
                 </a:solidFill>
                 <a:latin typeface="Courier New" pitchFamily="34" charset="0"/>
                 <a:ea typeface="Courier New" pitchFamily="34" charset="-122"/>
@@ -19473,9 +19760,14 @@
             </a:avLst>
           </a:prstGeom>
           <a:solidFill>
-            <a:srgbClr val="2E1418"/>
+            <a:srgbClr val="1A0808"/>
           </a:solidFill>
-          <a:ln/>
+          <a:ln w="12700">
+            <a:solidFill>
+              <a:srgbClr val="FF6B6B"/>
+            </a:solidFill>
+            <a:prstDash val="solid"/>
+          </a:ln>
         </p:spPr>
       </p:sp>
       <p:sp>
@@ -19505,7 +19797,7 @@
             <a:r>
               <a:rPr lang="en-US" sz="1000" b="1" dirty="0">
                 <a:solidFill>
-                  <a:srgbClr val="FF7B7B"/>
+                  <a:srgbClr val="FF6B6B"/>
                 </a:solidFill>
                 <a:latin typeface="Courier New" pitchFamily="34" charset="0"/>
                 <a:ea typeface="Courier New" pitchFamily="34" charset="-122"/>
@@ -19534,7 +19826,7 @@
           <a:noFill/>
           <a:ln w="15875">
             <a:solidFill>
-              <a:srgbClr val="9B7BE8"/>
+              <a:srgbClr val="8F72E6"/>
             </a:solidFill>
             <a:prstDash val="solid"/>
           </a:ln>
@@ -19555,7 +19847,7 @@
             <a:avLst/>
           </a:prstGeom>
           <a:solidFill>
-            <a:srgbClr val="9B7BE8"/>
+            <a:srgbClr val="8F72E6"/>
           </a:solidFill>
           <a:ln/>
         </p:spPr>
@@ -19577,9 +19869,14 @@
             </a:avLst>
           </a:prstGeom>
           <a:solidFill>
-            <a:srgbClr val="2A2010"/>
+            <a:srgbClr val="0B1A38"/>
           </a:solidFill>
-          <a:ln/>
+          <a:ln w="12700">
+            <a:solidFill>
+              <a:srgbClr val="6BA0F8"/>
+            </a:solidFill>
+            <a:prstDash val="solid"/>
+          </a:ln>
         </p:spPr>
       </p:sp>
       <p:sp>
@@ -19609,7 +19906,7 @@
             <a:r>
               <a:rPr lang="en-US" sz="1000" b="1" dirty="0">
                 <a:solidFill>
-                  <a:srgbClr val="E8A857"/>
+                  <a:srgbClr val="6BA0F8"/>
                 </a:solidFill>
                 <a:latin typeface="Courier New" pitchFamily="34" charset="0"/>
                 <a:ea typeface="Courier New" pitchFamily="34" charset="-122"/>
@@ -19638,7 +19935,7 @@
           <a:noFill/>
           <a:ln w="15875">
             <a:solidFill>
-              <a:srgbClr val="9B7BE8"/>
+              <a:srgbClr val="8F72E6"/>
             </a:solidFill>
             <a:prstDash val="solid"/>
           </a:ln>
@@ -19659,7 +19956,7 @@
             <a:avLst/>
           </a:prstGeom>
           <a:solidFill>
-            <a:srgbClr val="9B7BE8"/>
+            <a:srgbClr val="8F72E6"/>
           </a:solidFill>
           <a:ln/>
         </p:spPr>
@@ -19681,9 +19978,14 @@
             </a:avLst>
           </a:prstGeom>
           <a:solidFill>
-            <a:srgbClr val="102A20"/>
+            <a:srgbClr val="06180F"/>
           </a:solidFill>
-          <a:ln/>
+          <a:ln w="12700">
+            <a:solidFill>
+              <a:srgbClr val="3FCF8E"/>
+            </a:solidFill>
+            <a:prstDash val="solid"/>
+          </a:ln>
         </p:spPr>
       </p:sp>
       <p:sp>
@@ -19713,7 +20015,7 @@
             <a:r>
               <a:rPr lang="en-US" sz="1000" b="1" dirty="0">
                 <a:solidFill>
-                  <a:srgbClr val="5FD6A0"/>
+                  <a:srgbClr val="3FCF8E"/>
                 </a:solidFill>
                 <a:latin typeface="Courier New" pitchFamily="34" charset="0"/>
                 <a:ea typeface="Courier New" pitchFamily="34" charset="-122"/>
@@ -19742,7 +20044,7 @@
             </a:avLst>
           </a:prstGeom>
           <a:solidFill>
-            <a:srgbClr val="1C1140"/>
+            <a:srgbClr val="1A0B3D"/>
           </a:solidFill>
           <a:ln/>
         </p:spPr>
@@ -19774,7 +20076,7 @@
             <a:r>
               <a:rPr lang="en-US" sz="850" b="1" dirty="0">
                 <a:solidFill>
-                  <a:srgbClr val="C9A6FF"/>
+                  <a:srgbClr val="A98BFF"/>
                 </a:solidFill>
                 <a:latin typeface="Courier New" pitchFamily="34" charset="0"/>
                 <a:ea typeface="Courier New" pitchFamily="34" charset="-122"/>
@@ -19791,7 +20093,7 @@
             <a:r>
               <a:rPr lang="en-US" sz="850" b="1" dirty="0">
                 <a:solidFill>
-                  <a:srgbClr val="C9A6FF"/>
+                  <a:srgbClr val="A98BFF"/>
                 </a:solidFill>
                 <a:latin typeface="Courier New" pitchFamily="34" charset="0"/>
                 <a:ea typeface="Courier New" pitchFamily="34" charset="-122"/>
@@ -19820,7 +20122,7 @@
             </a:avLst>
           </a:prstGeom>
           <a:solidFill>
-            <a:srgbClr val="1C1140"/>
+            <a:srgbClr val="1A0B3D"/>
           </a:solidFill>
           <a:ln/>
         </p:spPr>
@@ -19852,7 +20154,7 @@
             <a:r>
               <a:rPr lang="en-US" sz="850" b="1" dirty="0">
                 <a:solidFill>
-                  <a:srgbClr val="C9A6FF"/>
+                  <a:srgbClr val="A98BFF"/>
                 </a:solidFill>
                 <a:latin typeface="Courier New" pitchFamily="34" charset="0"/>
                 <a:ea typeface="Courier New" pitchFamily="34" charset="-122"/>
@@ -19869,7 +20171,7 @@
             <a:r>
               <a:rPr lang="en-US" sz="850" b="1" dirty="0">
                 <a:solidFill>
-                  <a:srgbClr val="C9A6FF"/>
+                  <a:srgbClr val="A98BFF"/>
                 </a:solidFill>
                 <a:latin typeface="Courier New" pitchFamily="34" charset="0"/>
                 <a:ea typeface="Courier New" pitchFamily="34" charset="-122"/>
@@ -19898,7 +20200,7 @@
             </a:avLst>
           </a:prstGeom>
           <a:solidFill>
-            <a:srgbClr val="1C1140"/>
+            <a:srgbClr val="1A0B3D"/>
           </a:solidFill>
           <a:ln/>
         </p:spPr>
@@ -19930,7 +20232,7 @@
             <a:r>
               <a:rPr lang="en-US" sz="850" b="1" dirty="0">
                 <a:solidFill>
-                  <a:srgbClr val="C9A6FF"/>
+                  <a:srgbClr val="A98BFF"/>
                 </a:solidFill>
                 <a:latin typeface="Courier New" pitchFamily="34" charset="0"/>
                 <a:ea typeface="Courier New" pitchFamily="34" charset="-122"/>
@@ -19947,7 +20249,7 @@
             <a:r>
               <a:rPr lang="en-US" sz="850" b="1" dirty="0">
                 <a:solidFill>
-                  <a:srgbClr val="C9A6FF"/>
+                  <a:srgbClr val="A98BFF"/>
                 </a:solidFill>
                 <a:latin typeface="Courier New" pitchFamily="34" charset="0"/>
                 <a:ea typeface="Courier New" pitchFamily="34" charset="-122"/>
@@ -19976,7 +20278,7 @@
             </a:avLst>
           </a:prstGeom>
           <a:solidFill>
-            <a:srgbClr val="1C1140"/>
+            <a:srgbClr val="1A0B3D"/>
           </a:solidFill>
           <a:ln/>
         </p:spPr>
@@ -20008,7 +20310,7 @@
             <a:r>
               <a:rPr lang="en-US" sz="850" b="1" dirty="0">
                 <a:solidFill>
-                  <a:srgbClr val="C9A6FF"/>
+                  <a:srgbClr val="A98BFF"/>
                 </a:solidFill>
                 <a:latin typeface="Courier New" pitchFamily="34" charset="0"/>
                 <a:ea typeface="Courier New" pitchFamily="34" charset="-122"/>
@@ -20025,7 +20327,7 @@
             <a:r>
               <a:rPr lang="en-US" sz="850" b="1" dirty="0">
                 <a:solidFill>
-                  <a:srgbClr val="C9A6FF"/>
+                  <a:srgbClr val="A98BFF"/>
                 </a:solidFill>
                 <a:latin typeface="Courier New" pitchFamily="34" charset="0"/>
                 <a:ea typeface="Courier New" pitchFamily="34" charset="-122"/>
@@ -20054,7 +20356,7 @@
             </a:avLst>
           </a:prstGeom>
           <a:solidFill>
-            <a:srgbClr val="1C1140"/>
+            <a:srgbClr val="1A0B3D"/>
           </a:solidFill>
           <a:ln/>
         </p:spPr>
@@ -20086,7 +20388,7 @@
             <a:r>
               <a:rPr lang="en-US" sz="850" b="1" dirty="0">
                 <a:solidFill>
-                  <a:srgbClr val="C9A6FF"/>
+                  <a:srgbClr val="A98BFF"/>
                 </a:solidFill>
                 <a:latin typeface="Courier New" pitchFamily="34" charset="0"/>
                 <a:ea typeface="Courier New" pitchFamily="34" charset="-122"/>
@@ -20103,7 +20405,7 @@
             <a:r>
               <a:rPr lang="en-US" sz="850" b="1" dirty="0">
                 <a:solidFill>
-                  <a:srgbClr val="C9A6FF"/>
+                  <a:srgbClr val="A98BFF"/>
                 </a:solidFill>
                 <a:latin typeface="Courier New" pitchFamily="34" charset="0"/>
                 <a:ea typeface="Courier New" pitchFamily="34" charset="-122"/>
@@ -20132,7 +20434,7 @@
             </a:avLst>
           </a:prstGeom>
           <a:solidFill>
-            <a:srgbClr val="1C1140"/>
+            <a:srgbClr val="1A0B3D"/>
           </a:solidFill>
           <a:ln/>
         </p:spPr>
@@ -20164,7 +20466,7 @@
             <a:r>
               <a:rPr lang="en-US" sz="850" b="1" dirty="0">
                 <a:solidFill>
-                  <a:srgbClr val="C9A6FF"/>
+                  <a:srgbClr val="A98BFF"/>
                 </a:solidFill>
                 <a:latin typeface="Courier New" pitchFamily="34" charset="0"/>
                 <a:ea typeface="Courier New" pitchFamily="34" charset="-122"/>
@@ -20181,7 +20483,7 @@
             <a:r>
               <a:rPr lang="en-US" sz="850" b="1" dirty="0">
                 <a:solidFill>
-                  <a:srgbClr val="C9A6FF"/>
+                  <a:srgbClr val="A98BFF"/>
                 </a:solidFill>
                 <a:latin typeface="Courier New" pitchFamily="34" charset="0"/>
                 <a:ea typeface="Courier New" pitchFamily="34" charset="-122"/>
@@ -20210,7 +20512,7 @@
             </a:avLst>
           </a:prstGeom>
           <a:solidFill>
-            <a:srgbClr val="1C1140"/>
+            <a:srgbClr val="1A0B3D"/>
           </a:solidFill>
           <a:ln/>
         </p:spPr>
@@ -20242,7 +20544,7 @@
             <a:r>
               <a:rPr lang="en-US" sz="850" b="1" dirty="0">
                 <a:solidFill>
-                  <a:srgbClr val="C9A6FF"/>
+                  <a:srgbClr val="A98BFF"/>
                 </a:solidFill>
                 <a:latin typeface="Courier New" pitchFamily="34" charset="0"/>
                 <a:ea typeface="Courier New" pitchFamily="34" charset="-122"/>
@@ -20259,7 +20561,7 @@
             <a:r>
               <a:rPr lang="en-US" sz="850" b="1" dirty="0">
                 <a:solidFill>
-                  <a:srgbClr val="C9A6FF"/>
+                  <a:srgbClr val="A98BFF"/>
                 </a:solidFill>
                 <a:latin typeface="Courier New" pitchFamily="34" charset="0"/>
                 <a:ea typeface="Courier New" pitchFamily="34" charset="-122"/>
@@ -20288,7 +20590,7 @@
             </a:avLst>
           </a:prstGeom>
           <a:solidFill>
-            <a:srgbClr val="1C1140"/>
+            <a:srgbClr val="1A0B3D"/>
           </a:solidFill>
           <a:ln/>
         </p:spPr>
@@ -20320,7 +20622,7 @@
             <a:r>
               <a:rPr lang="en-US" sz="850" b="1" dirty="0">
                 <a:solidFill>
-                  <a:srgbClr val="C9A6FF"/>
+                  <a:srgbClr val="A98BFF"/>
                 </a:solidFill>
                 <a:latin typeface="Courier New" pitchFamily="34" charset="0"/>
                 <a:ea typeface="Courier New" pitchFamily="34" charset="-122"/>
@@ -20337,7 +20639,7 @@
             <a:r>
               <a:rPr lang="en-US" sz="850" b="1" dirty="0">
                 <a:solidFill>
-                  <a:srgbClr val="C9A6FF"/>
+                  <a:srgbClr val="A98BFF"/>
                 </a:solidFill>
                 <a:latin typeface="Courier New" pitchFamily="34" charset="0"/>
                 <a:ea typeface="Courier New" pitchFamily="34" charset="-122"/>
@@ -20366,7 +20668,7 @@
             </a:avLst>
           </a:prstGeom>
           <a:solidFill>
-            <a:srgbClr val="1C1140"/>
+            <a:srgbClr val="1A0B3D"/>
           </a:solidFill>
           <a:ln/>
         </p:spPr>
@@ -20398,7 +20700,7 @@
             <a:r>
               <a:rPr lang="en-US" sz="850" b="1" dirty="0">
                 <a:solidFill>
-                  <a:srgbClr val="C9A6FF"/>
+                  <a:srgbClr val="A98BFF"/>
                 </a:solidFill>
                 <a:latin typeface="Courier New" pitchFamily="34" charset="0"/>
                 <a:ea typeface="Courier New" pitchFamily="34" charset="-122"/>
@@ -20415,7 +20717,7 @@
             <a:r>
               <a:rPr lang="en-US" sz="850" b="1" dirty="0">
                 <a:solidFill>
-                  <a:srgbClr val="C9A6FF"/>
+                  <a:srgbClr val="A98BFF"/>
                 </a:solidFill>
                 <a:latin typeface="Courier New" pitchFamily="34" charset="0"/>
                 <a:ea typeface="Courier New" pitchFamily="34" charset="-122"/>
@@ -20444,11 +20746,11 @@
             </a:avLst>
           </a:prstGeom>
           <a:solidFill>
-            <a:srgbClr val="17141F"/>
+            <a:srgbClr val="000000"/>
           </a:solidFill>
           <a:ln w="12700">
             <a:solidFill>
-              <a:srgbClr val="2E2A3A"/>
+              <a:srgbClr val="5E4F85"/>
             </a:solidFill>
             <a:prstDash val="solid"/>
           </a:ln>
@@ -20526,7 +20828,7 @@
             <a:lvl1pPr>
               <a:defRPr sz="850">
                 <a:solidFill>
-                  <a:srgbClr val="8A82A0"/>
+                  <a:srgbClr val="9A94AA"/>
                 </a:solidFill>
                 <a:latin typeface="Courier New"/>
                 <a:ea typeface="Courier New"/>
@@ -20596,7 +20898,7 @@
             <a:r>
               <a:rPr lang="en-US" sz="2600" b="1" dirty="0">
                 <a:solidFill>
-                  <a:srgbClr val="C9A6FF"/>
+                  <a:srgbClr val="A98BFF"/>
                 </a:solidFill>
                 <a:latin typeface="Courier New" pitchFamily="34" charset="0"/>
                 <a:ea typeface="Courier New" pitchFamily="34" charset="-122"/>
@@ -20664,9 +20966,14 @@
             </a:avLst>
           </a:prstGeom>
           <a:solidFill>
-            <a:srgbClr val="C9A6FF"/>
+            <a:srgbClr val="1A0B3D"/>
           </a:solidFill>
-          <a:ln/>
+          <a:ln w="12700">
+            <a:solidFill>
+              <a:srgbClr val="5A05F4"/>
+            </a:solidFill>
+            <a:prstDash val="solid"/>
+          </a:ln>
         </p:spPr>
       </p:sp>
       <p:sp>
@@ -20696,7 +21003,7 @@
             <a:r>
               <a:rPr lang="en-US" sz="900" b="1" spc="100" kern="0" dirty="0">
                 <a:solidFill>
-                  <a:srgbClr val="1C1140"/>
+                  <a:srgbClr val="A98BFF"/>
                 </a:solidFill>
                 <a:latin typeface="Courier New" pitchFamily="34" charset="0"/>
                 <a:ea typeface="Courier New" pitchFamily="34" charset="-122"/>
@@ -20771,7 +21078,7 @@
                       <a:r>
                         <a:rPr lang="en-US" sz="900" b="1" spc="100" kern="0" dirty="0">
                           <a:solidFill>
-                            <a:srgbClr val="AFA9BE"/>
+                            <a:srgbClr val="C9C4D6"/>
                           </a:solidFill>
                           <a:latin typeface="Courier New" pitchFamily="34" charset="0"/>
                           <a:ea typeface="Courier New" pitchFamily="34" charset="-122"/>
@@ -20789,7 +21096,7 @@
                   <a:tcPr marL="73152" marR="73152" marT="73152" marB="73152" anchor="ctr">
                     <a:lnL w="6350" cap="flat" cmpd="sng" algn="ctr">
                       <a:solidFill>
-                        <a:srgbClr val="2E2A3A"/>
+                        <a:srgbClr val="5E4F85"/>
                       </a:solidFill>
                       <a:prstDash val="solid"/>
                       <a:round/>
@@ -20798,7 +21105,7 @@
                     </a:lnL>
                     <a:lnR w="6350" cap="flat" cmpd="sng" algn="ctr">
                       <a:solidFill>
-                        <a:srgbClr val="2E2A3A"/>
+                        <a:srgbClr val="5E4F85"/>
                       </a:solidFill>
                       <a:prstDash val="solid"/>
                       <a:round/>
@@ -20807,7 +21114,7 @@
                     </a:lnR>
                     <a:lnT w="6350" cap="flat" cmpd="sng" algn="ctr">
                       <a:solidFill>
-                        <a:srgbClr val="2E2A3A"/>
+                        <a:srgbClr val="5E4F85"/>
                       </a:solidFill>
                       <a:prstDash val="solid"/>
                       <a:round/>
@@ -20816,7 +21123,7 @@
                     </a:lnT>
                     <a:lnB w="6350" cap="flat" cmpd="sng" algn="ctr">
                       <a:solidFill>
-                        <a:srgbClr val="2E2A3A"/>
+                        <a:srgbClr val="5E4F85"/>
                       </a:solidFill>
                       <a:prstDash val="solid"/>
                       <a:round/>
@@ -20824,7 +21131,7 @@
                       <a:tailEnd type="none" w="med" len="med"/>
                     </a:lnB>
                     <a:solidFill>
-                      <a:srgbClr val="1F1B2A"/>
+                      <a:srgbClr val="1A0B3D"/>
                     </a:solidFill>
                   </a:tcPr>
                 </a:tc>
@@ -20839,7 +21146,7 @@
                       <a:r>
                         <a:rPr lang="en-US" sz="900" b="1" spc="100" kern="0" dirty="0">
                           <a:solidFill>
-                            <a:srgbClr val="AFA9BE"/>
+                            <a:srgbClr val="C9C4D6"/>
                           </a:solidFill>
                           <a:latin typeface="Courier New" pitchFamily="34" charset="0"/>
                           <a:ea typeface="Courier New" pitchFamily="34" charset="-122"/>
@@ -20857,7 +21164,7 @@
                   <a:tcPr marL="73152" marR="73152" marT="73152" marB="73152" anchor="ctr">
                     <a:lnL w="6350" cap="flat" cmpd="sng" algn="ctr">
                       <a:solidFill>
-                        <a:srgbClr val="2E2A3A"/>
+                        <a:srgbClr val="5E4F85"/>
                       </a:solidFill>
                       <a:prstDash val="solid"/>
                       <a:round/>
@@ -20866,7 +21173,7 @@
                     </a:lnL>
                     <a:lnR w="6350" cap="flat" cmpd="sng" algn="ctr">
                       <a:solidFill>
-                        <a:srgbClr val="2E2A3A"/>
+                        <a:srgbClr val="5E4F85"/>
                       </a:solidFill>
                       <a:prstDash val="solid"/>
                       <a:round/>
@@ -20875,7 +21182,7 @@
                     </a:lnR>
                     <a:lnT w="6350" cap="flat" cmpd="sng" algn="ctr">
                       <a:solidFill>
-                        <a:srgbClr val="2E2A3A"/>
+                        <a:srgbClr val="5E4F85"/>
                       </a:solidFill>
                       <a:prstDash val="solid"/>
                       <a:round/>
@@ -20884,7 +21191,7 @@
                     </a:lnT>
                     <a:lnB w="6350" cap="flat" cmpd="sng" algn="ctr">
                       <a:solidFill>
-                        <a:srgbClr val="2E2A3A"/>
+                        <a:srgbClr val="5E4F85"/>
                       </a:solidFill>
                       <a:prstDash val="solid"/>
                       <a:round/>
@@ -20892,7 +21199,7 @@
                       <a:tailEnd type="none" w="med" len="med"/>
                     </a:lnB>
                     <a:solidFill>
-                      <a:srgbClr val="1F1B2A"/>
+                      <a:srgbClr val="1A0B3D"/>
                     </a:solidFill>
                   </a:tcPr>
                 </a:tc>
@@ -20907,7 +21214,7 @@
                       <a:r>
                         <a:rPr lang="en-US" sz="900" b="1" spc="100" kern="0" dirty="0">
                           <a:solidFill>
-                            <a:srgbClr val="AFA9BE"/>
+                            <a:srgbClr val="C9C4D6"/>
                           </a:solidFill>
                           <a:latin typeface="Courier New" pitchFamily="34" charset="0"/>
                           <a:ea typeface="Courier New" pitchFamily="34" charset="-122"/>
@@ -20925,7 +21232,7 @@
                   <a:tcPr marL="73152" marR="73152" marT="73152" marB="73152" anchor="ctr">
                     <a:lnL w="6350" cap="flat" cmpd="sng" algn="ctr">
                       <a:solidFill>
-                        <a:srgbClr val="2E2A3A"/>
+                        <a:srgbClr val="5E4F85"/>
                       </a:solidFill>
                       <a:prstDash val="solid"/>
                       <a:round/>
@@ -20934,7 +21241,7 @@
                     </a:lnL>
                     <a:lnR w="6350" cap="flat" cmpd="sng" algn="ctr">
                       <a:solidFill>
-                        <a:srgbClr val="2E2A3A"/>
+                        <a:srgbClr val="5E4F85"/>
                       </a:solidFill>
                       <a:prstDash val="solid"/>
                       <a:round/>
@@ -20943,7 +21250,7 @@
                     </a:lnR>
                     <a:lnT w="6350" cap="flat" cmpd="sng" algn="ctr">
                       <a:solidFill>
-                        <a:srgbClr val="2E2A3A"/>
+                        <a:srgbClr val="5E4F85"/>
                       </a:solidFill>
                       <a:prstDash val="solid"/>
                       <a:round/>
@@ -20952,7 +21259,7 @@
                     </a:lnT>
                     <a:lnB w="6350" cap="flat" cmpd="sng" algn="ctr">
                       <a:solidFill>
-                        <a:srgbClr val="2E2A3A"/>
+                        <a:srgbClr val="5E4F85"/>
                       </a:solidFill>
                       <a:prstDash val="solid"/>
                       <a:round/>
@@ -20960,7 +21267,7 @@
                       <a:tailEnd type="none" w="med" len="med"/>
                     </a:lnB>
                     <a:solidFill>
-                      <a:srgbClr val="1F1B2A"/>
+                      <a:srgbClr val="1A0B3D"/>
                     </a:solidFill>
                   </a:tcPr>
                 </a:tc>
@@ -20995,7 +21302,7 @@
                   <a:tcPr marL="73152" marR="73152" marT="73152" marB="73152" anchor="ctr">
                     <a:lnL w="6350" cap="flat" cmpd="sng" algn="ctr">
                       <a:solidFill>
-                        <a:srgbClr val="2E2A3A"/>
+                        <a:srgbClr val="5E4F85"/>
                       </a:solidFill>
                       <a:prstDash val="solid"/>
                       <a:round/>
@@ -21004,7 +21311,7 @@
                     </a:lnL>
                     <a:lnR w="6350" cap="flat" cmpd="sng" algn="ctr">
                       <a:solidFill>
-                        <a:srgbClr val="2E2A3A"/>
+                        <a:srgbClr val="5E4F85"/>
                       </a:solidFill>
                       <a:prstDash val="solid"/>
                       <a:round/>
@@ -21013,7 +21320,7 @@
                     </a:lnR>
                     <a:lnT w="6350" cap="flat" cmpd="sng" algn="ctr">
                       <a:solidFill>
-                        <a:srgbClr val="2E2A3A"/>
+                        <a:srgbClr val="5E4F85"/>
                       </a:solidFill>
                       <a:prstDash val="solid"/>
                       <a:round/>
@@ -21022,7 +21329,7 @@
                     </a:lnT>
                     <a:lnB w="6350" cap="flat" cmpd="sng" algn="ctr">
                       <a:solidFill>
-                        <a:srgbClr val="2E2A3A"/>
+                        <a:srgbClr val="5E4F85"/>
                       </a:solidFill>
                       <a:prstDash val="solid"/>
                       <a:round/>
@@ -21030,7 +21337,7 @@
                       <a:tailEnd type="none" w="med" len="med"/>
                     </a:lnB>
                     <a:solidFill>
-                      <a:srgbClr val="17141F"/>
+                      <a:srgbClr val="000000"/>
                     </a:solidFill>
                   </a:tcPr>
                 </a:tc>
@@ -21063,7 +21370,7 @@
                   <a:tcPr marL="73152" marR="73152" marT="73152" marB="73152" anchor="ctr">
                     <a:lnL w="6350" cap="flat" cmpd="sng" algn="ctr">
                       <a:solidFill>
-                        <a:srgbClr val="2E2A3A"/>
+                        <a:srgbClr val="5E4F85"/>
                       </a:solidFill>
                       <a:prstDash val="solid"/>
                       <a:round/>
@@ -21072,7 +21379,7 @@
                     </a:lnL>
                     <a:lnR w="6350" cap="flat" cmpd="sng" algn="ctr">
                       <a:solidFill>
-                        <a:srgbClr val="2E2A3A"/>
+                        <a:srgbClr val="5E4F85"/>
                       </a:solidFill>
                       <a:prstDash val="solid"/>
                       <a:round/>
@@ -21081,7 +21388,7 @@
                     </a:lnR>
                     <a:lnT w="6350" cap="flat" cmpd="sng" algn="ctr">
                       <a:solidFill>
-                        <a:srgbClr val="2E2A3A"/>
+                        <a:srgbClr val="5E4F85"/>
                       </a:solidFill>
                       <a:prstDash val="solid"/>
                       <a:round/>
@@ -21090,7 +21397,7 @@
                     </a:lnT>
                     <a:lnB w="6350" cap="flat" cmpd="sng" algn="ctr">
                       <a:solidFill>
-                        <a:srgbClr val="2E2A3A"/>
+                        <a:srgbClr val="5E4F85"/>
                       </a:solidFill>
                       <a:prstDash val="solid"/>
                       <a:round/>
@@ -21098,7 +21405,7 @@
                       <a:tailEnd type="none" w="med" len="med"/>
                     </a:lnB>
                     <a:solidFill>
-                      <a:srgbClr val="17141F"/>
+                      <a:srgbClr val="000000"/>
                     </a:solidFill>
                   </a:tcPr>
                 </a:tc>
@@ -21131,7 +21438,7 @@
                   <a:tcPr marL="73152" marR="73152" marT="73152" marB="73152" anchor="ctr">
                     <a:lnL w="6350" cap="flat" cmpd="sng" algn="ctr">
                       <a:solidFill>
-                        <a:srgbClr val="2E2A3A"/>
+                        <a:srgbClr val="5E4F85"/>
                       </a:solidFill>
                       <a:prstDash val="solid"/>
                       <a:round/>
@@ -21140,7 +21447,7 @@
                     </a:lnL>
                     <a:lnR w="6350" cap="flat" cmpd="sng" algn="ctr">
                       <a:solidFill>
-                        <a:srgbClr val="2E2A3A"/>
+                        <a:srgbClr val="5E4F85"/>
                       </a:solidFill>
                       <a:prstDash val="solid"/>
                       <a:round/>
@@ -21149,7 +21456,7 @@
                     </a:lnR>
                     <a:lnT w="6350" cap="flat" cmpd="sng" algn="ctr">
                       <a:solidFill>
-                        <a:srgbClr val="2E2A3A"/>
+                        <a:srgbClr val="5E4F85"/>
                       </a:solidFill>
                       <a:prstDash val="solid"/>
                       <a:round/>
@@ -21158,7 +21465,7 @@
                     </a:lnT>
                     <a:lnB w="6350" cap="flat" cmpd="sng" algn="ctr">
                       <a:solidFill>
-                        <a:srgbClr val="2E2A3A"/>
+                        <a:srgbClr val="5E4F85"/>
                       </a:solidFill>
                       <a:prstDash val="solid"/>
                       <a:round/>
@@ -21166,7 +21473,7 @@
                       <a:tailEnd type="none" w="med" len="med"/>
                     </a:lnB>
                     <a:solidFill>
-                      <a:srgbClr val="17141F"/>
+                      <a:srgbClr val="000000"/>
                     </a:solidFill>
                   </a:tcPr>
                 </a:tc>
@@ -21183,7 +21490,7 @@
                       <a:r>
                         <a:rPr lang="en-US" sz="1150" b="1" dirty="0">
                           <a:solidFill>
-                            <a:srgbClr val="C9A6FF"/>
+                            <a:srgbClr val="A98BFF"/>
                           </a:solidFill>
                           <a:latin typeface="Montserrat" pitchFamily="34" charset="0"/>
                           <a:ea typeface="Montserrat" pitchFamily="34" charset="-122"/>
@@ -21201,7 +21508,7 @@
                   <a:tcPr marL="73152" marR="73152" marT="73152" marB="73152" anchor="ctr">
                     <a:lnL w="6350" cap="flat" cmpd="sng" algn="ctr">
                       <a:solidFill>
-                        <a:srgbClr val="2E2A3A"/>
+                        <a:srgbClr val="5E4F85"/>
                       </a:solidFill>
                       <a:prstDash val="solid"/>
                       <a:round/>
@@ -21210,7 +21517,7 @@
                     </a:lnL>
                     <a:lnR w="6350" cap="flat" cmpd="sng" algn="ctr">
                       <a:solidFill>
-                        <a:srgbClr val="2E2A3A"/>
+                        <a:srgbClr val="5E4F85"/>
                       </a:solidFill>
                       <a:prstDash val="solid"/>
                       <a:round/>
@@ -21219,7 +21526,7 @@
                     </a:lnR>
                     <a:lnT w="6350" cap="flat" cmpd="sng" algn="ctr">
                       <a:solidFill>
-                        <a:srgbClr val="2E2A3A"/>
+                        <a:srgbClr val="5E4F85"/>
                       </a:solidFill>
                       <a:prstDash val="solid"/>
                       <a:round/>
@@ -21228,7 +21535,7 @@
                     </a:lnT>
                     <a:lnB w="6350" cap="flat" cmpd="sng" algn="ctr">
                       <a:solidFill>
-                        <a:srgbClr val="2E2A3A"/>
+                        <a:srgbClr val="5E4F85"/>
                       </a:solidFill>
                       <a:prstDash val="solid"/>
                       <a:round/>
@@ -21236,7 +21543,7 @@
                       <a:tailEnd type="none" w="med" len="med"/>
                     </a:lnB>
                     <a:solidFill>
-                      <a:srgbClr val="1C1140"/>
+                      <a:srgbClr val="1A0B3D"/>
                     </a:solidFill>
                   </a:tcPr>
                 </a:tc>
@@ -21269,7 +21576,7 @@
                   <a:tcPr marL="73152" marR="73152" marT="73152" marB="73152" anchor="ctr">
                     <a:lnL w="6350" cap="flat" cmpd="sng" algn="ctr">
                       <a:solidFill>
-                        <a:srgbClr val="2E2A3A"/>
+                        <a:srgbClr val="5E4F85"/>
                       </a:solidFill>
                       <a:prstDash val="solid"/>
                       <a:round/>
@@ -21278,7 +21585,7 @@
                     </a:lnL>
                     <a:lnR w="6350" cap="flat" cmpd="sng" algn="ctr">
                       <a:solidFill>
-                        <a:srgbClr val="2E2A3A"/>
+                        <a:srgbClr val="5E4F85"/>
                       </a:solidFill>
                       <a:prstDash val="solid"/>
                       <a:round/>
@@ -21287,7 +21594,7 @@
                     </a:lnR>
                     <a:lnT w="6350" cap="flat" cmpd="sng" algn="ctr">
                       <a:solidFill>
-                        <a:srgbClr val="2E2A3A"/>
+                        <a:srgbClr val="5E4F85"/>
                       </a:solidFill>
                       <a:prstDash val="solid"/>
                       <a:round/>
@@ -21296,7 +21603,7 @@
                     </a:lnT>
                     <a:lnB w="6350" cap="flat" cmpd="sng" algn="ctr">
                       <a:solidFill>
-                        <a:srgbClr val="2E2A3A"/>
+                        <a:srgbClr val="5E4F85"/>
                       </a:solidFill>
                       <a:prstDash val="solid"/>
                       <a:round/>
@@ -21304,7 +21611,7 @@
                       <a:tailEnd type="none" w="med" len="med"/>
                     </a:lnB>
                     <a:solidFill>
-                      <a:srgbClr val="1C1140"/>
+                      <a:srgbClr val="1A0B3D"/>
                     </a:solidFill>
                   </a:tcPr>
                 </a:tc>
@@ -21337,7 +21644,7 @@
                   <a:tcPr marL="73152" marR="73152" marT="73152" marB="73152" anchor="ctr">
                     <a:lnL w="6350" cap="flat" cmpd="sng" algn="ctr">
                       <a:solidFill>
-                        <a:srgbClr val="2E2A3A"/>
+                        <a:srgbClr val="5E4F85"/>
                       </a:solidFill>
                       <a:prstDash val="solid"/>
                       <a:round/>
@@ -21346,7 +21653,7 @@
                     </a:lnL>
                     <a:lnR w="6350" cap="flat" cmpd="sng" algn="ctr">
                       <a:solidFill>
-                        <a:srgbClr val="2E2A3A"/>
+                        <a:srgbClr val="5E4F85"/>
                       </a:solidFill>
                       <a:prstDash val="solid"/>
                       <a:round/>
@@ -21355,7 +21662,7 @@
                     </a:lnR>
                     <a:lnT w="6350" cap="flat" cmpd="sng" algn="ctr">
                       <a:solidFill>
-                        <a:srgbClr val="2E2A3A"/>
+                        <a:srgbClr val="5E4F85"/>
                       </a:solidFill>
                       <a:prstDash val="solid"/>
                       <a:round/>
@@ -21364,7 +21671,7 @@
                     </a:lnT>
                     <a:lnB w="6350" cap="flat" cmpd="sng" algn="ctr">
                       <a:solidFill>
-                        <a:srgbClr val="2E2A3A"/>
+                        <a:srgbClr val="5E4F85"/>
                       </a:solidFill>
                       <a:prstDash val="solid"/>
                       <a:round/>
@@ -21372,7 +21679,7 @@
                       <a:tailEnd type="none" w="med" len="med"/>
                     </a:lnB>
                     <a:solidFill>
-                      <a:srgbClr val="1C1140"/>
+                      <a:srgbClr val="1A0B3D"/>
                     </a:solidFill>
                   </a:tcPr>
                 </a:tc>
@@ -21389,7 +21696,7 @@
                       <a:r>
                         <a:rPr lang="en-US" sz="1150" b="1" dirty="0">
                           <a:solidFill>
-                            <a:srgbClr val="5FD6A0"/>
+                            <a:srgbClr val="3FCF8E"/>
                           </a:solidFill>
                           <a:latin typeface="Montserrat" pitchFamily="34" charset="0"/>
                           <a:ea typeface="Montserrat" pitchFamily="34" charset="-122"/>
@@ -21407,7 +21714,7 @@
                   <a:tcPr marL="73152" marR="73152" marT="73152" marB="73152" anchor="ctr">
                     <a:lnL w="6350" cap="flat" cmpd="sng" algn="ctr">
                       <a:solidFill>
-                        <a:srgbClr val="2E2A3A"/>
+                        <a:srgbClr val="5E4F85"/>
                       </a:solidFill>
                       <a:prstDash val="solid"/>
                       <a:round/>
@@ -21416,7 +21723,7 @@
                     </a:lnL>
                     <a:lnR w="6350" cap="flat" cmpd="sng" algn="ctr">
                       <a:solidFill>
-                        <a:srgbClr val="2E2A3A"/>
+                        <a:srgbClr val="5E4F85"/>
                       </a:solidFill>
                       <a:prstDash val="solid"/>
                       <a:round/>
@@ -21425,7 +21732,7 @@
                     </a:lnR>
                     <a:lnT w="6350" cap="flat" cmpd="sng" algn="ctr">
                       <a:solidFill>
-                        <a:srgbClr val="2E2A3A"/>
+                        <a:srgbClr val="5E4F85"/>
                       </a:solidFill>
                       <a:prstDash val="solid"/>
                       <a:round/>
@@ -21434,7 +21741,7 @@
                     </a:lnT>
                     <a:lnB w="6350" cap="flat" cmpd="sng" algn="ctr">
                       <a:solidFill>
-                        <a:srgbClr val="2E2A3A"/>
+                        <a:srgbClr val="5E4F85"/>
                       </a:solidFill>
                       <a:prstDash val="solid"/>
                       <a:round/>
@@ -21442,7 +21749,7 @@
                       <a:tailEnd type="none" w="med" len="med"/>
                     </a:lnB>
                     <a:solidFill>
-                      <a:srgbClr val="102A20"/>
+                      <a:srgbClr val="06180F"/>
                     </a:solidFill>
                   </a:tcPr>
                 </a:tc>
@@ -21475,7 +21782,7 @@
                   <a:tcPr marL="73152" marR="73152" marT="73152" marB="73152" anchor="ctr">
                     <a:lnL w="6350" cap="flat" cmpd="sng" algn="ctr">
                       <a:solidFill>
-                        <a:srgbClr val="2E2A3A"/>
+                        <a:srgbClr val="5E4F85"/>
                       </a:solidFill>
                       <a:prstDash val="solid"/>
                       <a:round/>
@@ -21484,7 +21791,7 @@
                     </a:lnL>
                     <a:lnR w="6350" cap="flat" cmpd="sng" algn="ctr">
                       <a:solidFill>
-                        <a:srgbClr val="2E2A3A"/>
+                        <a:srgbClr val="5E4F85"/>
                       </a:solidFill>
                       <a:prstDash val="solid"/>
                       <a:round/>
@@ -21493,7 +21800,7 @@
                     </a:lnR>
                     <a:lnT w="6350" cap="flat" cmpd="sng" algn="ctr">
                       <a:solidFill>
-                        <a:srgbClr val="2E2A3A"/>
+                        <a:srgbClr val="5E4F85"/>
                       </a:solidFill>
                       <a:prstDash val="solid"/>
                       <a:round/>
@@ -21502,7 +21809,7 @@
                     </a:lnT>
                     <a:lnB w="6350" cap="flat" cmpd="sng" algn="ctr">
                       <a:solidFill>
-                        <a:srgbClr val="2E2A3A"/>
+                        <a:srgbClr val="5E4F85"/>
                       </a:solidFill>
                       <a:prstDash val="solid"/>
                       <a:round/>
@@ -21510,7 +21817,7 @@
                       <a:tailEnd type="none" w="med" len="med"/>
                     </a:lnB>
                     <a:solidFill>
-                      <a:srgbClr val="102A20"/>
+                      <a:srgbClr val="06180F"/>
                     </a:solidFill>
                   </a:tcPr>
                 </a:tc>
@@ -21543,7 +21850,7 @@
                   <a:tcPr marL="73152" marR="73152" marT="73152" marB="73152" anchor="ctr">
                     <a:lnL w="6350" cap="flat" cmpd="sng" algn="ctr">
                       <a:solidFill>
-                        <a:srgbClr val="2E2A3A"/>
+                        <a:srgbClr val="5E4F85"/>
                       </a:solidFill>
                       <a:prstDash val="solid"/>
                       <a:round/>
@@ -21552,7 +21859,7 @@
                     </a:lnL>
                     <a:lnR w="6350" cap="flat" cmpd="sng" algn="ctr">
                       <a:solidFill>
-                        <a:srgbClr val="2E2A3A"/>
+                        <a:srgbClr val="5E4F85"/>
                       </a:solidFill>
                       <a:prstDash val="solid"/>
                       <a:round/>
@@ -21561,7 +21868,7 @@
                     </a:lnR>
                     <a:lnT w="6350" cap="flat" cmpd="sng" algn="ctr">
                       <a:solidFill>
-                        <a:srgbClr val="2E2A3A"/>
+                        <a:srgbClr val="5E4F85"/>
                       </a:solidFill>
                       <a:prstDash val="solid"/>
                       <a:round/>
@@ -21570,7 +21877,7 @@
                     </a:lnT>
                     <a:lnB w="6350" cap="flat" cmpd="sng" algn="ctr">
                       <a:solidFill>
-                        <a:srgbClr val="2E2A3A"/>
+                        <a:srgbClr val="5E4F85"/>
                       </a:solidFill>
                       <a:prstDash val="solid"/>
                       <a:round/>
@@ -21578,7 +21885,7 @@
                       <a:tailEnd type="none" w="med" len="med"/>
                     </a:lnB>
                     <a:solidFill>
-                      <a:srgbClr val="102A20"/>
+                      <a:srgbClr val="06180F"/>
                     </a:solidFill>
                   </a:tcPr>
                 </a:tc>
@@ -21595,7 +21902,7 @@
                       <a:r>
                         <a:rPr lang="en-US" sz="1150" b="1" dirty="0">
                           <a:solidFill>
-                            <a:srgbClr val="C9A6FF"/>
+                            <a:srgbClr val="A98BFF"/>
                           </a:solidFill>
                           <a:latin typeface="Montserrat" pitchFamily="34" charset="0"/>
                           <a:ea typeface="Montserrat" pitchFamily="34" charset="-122"/>
@@ -21613,7 +21920,7 @@
                   <a:tcPr marL="73152" marR="73152" marT="73152" marB="73152" anchor="ctr">
                     <a:lnL w="6350" cap="flat" cmpd="sng" algn="ctr">
                       <a:solidFill>
-                        <a:srgbClr val="2E2A3A"/>
+                        <a:srgbClr val="5E4F85"/>
                       </a:solidFill>
                       <a:prstDash val="solid"/>
                       <a:round/>
@@ -21622,7 +21929,7 @@
                     </a:lnL>
                     <a:lnR w="6350" cap="flat" cmpd="sng" algn="ctr">
                       <a:solidFill>
-                        <a:srgbClr val="2E2A3A"/>
+                        <a:srgbClr val="5E4F85"/>
                       </a:solidFill>
                       <a:prstDash val="solid"/>
                       <a:round/>
@@ -21631,7 +21938,7 @@
                     </a:lnR>
                     <a:lnT w="6350" cap="flat" cmpd="sng" algn="ctr">
                       <a:solidFill>
-                        <a:srgbClr val="2E2A3A"/>
+                        <a:srgbClr val="5E4F85"/>
                       </a:solidFill>
                       <a:prstDash val="solid"/>
                       <a:round/>
@@ -21640,7 +21947,7 @@
                     </a:lnT>
                     <a:lnB w="6350" cap="flat" cmpd="sng" algn="ctr">
                       <a:solidFill>
-                        <a:srgbClr val="2E2A3A"/>
+                        <a:srgbClr val="5E4F85"/>
                       </a:solidFill>
                       <a:prstDash val="solid"/>
                       <a:round/>
@@ -21648,7 +21955,7 @@
                       <a:tailEnd type="none" w="med" len="med"/>
                     </a:lnB>
                     <a:solidFill>
-                      <a:srgbClr val="1C1140"/>
+                      <a:srgbClr val="1A0B3D"/>
                     </a:solidFill>
                   </a:tcPr>
                 </a:tc>
@@ -21681,7 +21988,7 @@
                   <a:tcPr marL="73152" marR="73152" marT="73152" marB="73152" anchor="ctr">
                     <a:lnL w="6350" cap="flat" cmpd="sng" algn="ctr">
                       <a:solidFill>
-                        <a:srgbClr val="2E2A3A"/>
+                        <a:srgbClr val="5E4F85"/>
                       </a:solidFill>
                       <a:prstDash val="solid"/>
                       <a:round/>
@@ -21690,7 +21997,7 @@
                     </a:lnL>
                     <a:lnR w="6350" cap="flat" cmpd="sng" algn="ctr">
                       <a:solidFill>
-                        <a:srgbClr val="2E2A3A"/>
+                        <a:srgbClr val="5E4F85"/>
                       </a:solidFill>
                       <a:prstDash val="solid"/>
                       <a:round/>
@@ -21699,7 +22006,7 @@
                     </a:lnR>
                     <a:lnT w="6350" cap="flat" cmpd="sng" algn="ctr">
                       <a:solidFill>
-                        <a:srgbClr val="2E2A3A"/>
+                        <a:srgbClr val="5E4F85"/>
                       </a:solidFill>
                       <a:prstDash val="solid"/>
                       <a:round/>
@@ -21708,7 +22015,7 @@
                     </a:lnT>
                     <a:lnB w="6350" cap="flat" cmpd="sng" algn="ctr">
                       <a:solidFill>
-                        <a:srgbClr val="2E2A3A"/>
+                        <a:srgbClr val="5E4F85"/>
                       </a:solidFill>
                       <a:prstDash val="solid"/>
                       <a:round/>
@@ -21716,7 +22023,7 @@
                       <a:tailEnd type="none" w="med" len="med"/>
                     </a:lnB>
                     <a:solidFill>
-                      <a:srgbClr val="1C1140"/>
+                      <a:srgbClr val="1A0B3D"/>
                     </a:solidFill>
                   </a:tcPr>
                 </a:tc>
@@ -21749,7 +22056,7 @@
                   <a:tcPr marL="73152" marR="73152" marT="73152" marB="73152" anchor="ctr">
                     <a:lnL w="6350" cap="flat" cmpd="sng" algn="ctr">
                       <a:solidFill>
-                        <a:srgbClr val="2E2A3A"/>
+                        <a:srgbClr val="5E4F85"/>
                       </a:solidFill>
                       <a:prstDash val="solid"/>
                       <a:round/>
@@ -21758,7 +22065,7 @@
                     </a:lnL>
                     <a:lnR w="6350" cap="flat" cmpd="sng" algn="ctr">
                       <a:solidFill>
-                        <a:srgbClr val="2E2A3A"/>
+                        <a:srgbClr val="5E4F85"/>
                       </a:solidFill>
                       <a:prstDash val="solid"/>
                       <a:round/>
@@ -21767,7 +22074,7 @@
                     </a:lnR>
                     <a:lnT w="6350" cap="flat" cmpd="sng" algn="ctr">
                       <a:solidFill>
-                        <a:srgbClr val="2E2A3A"/>
+                        <a:srgbClr val="5E4F85"/>
                       </a:solidFill>
                       <a:prstDash val="solid"/>
                       <a:round/>
@@ -21776,7 +22083,7 @@
                     </a:lnT>
                     <a:lnB w="6350" cap="flat" cmpd="sng" algn="ctr">
                       <a:solidFill>
-                        <a:srgbClr val="2E2A3A"/>
+                        <a:srgbClr val="5E4F85"/>
                       </a:solidFill>
                       <a:prstDash val="solid"/>
                       <a:round/>
@@ -21784,7 +22091,7 @@
                       <a:tailEnd type="none" w="med" len="med"/>
                     </a:lnB>
                     <a:solidFill>
-                      <a:srgbClr val="1C1140"/>
+                      <a:srgbClr val="1A0B3D"/>
                     </a:solidFill>
                   </a:tcPr>
                 </a:tc>
@@ -21810,9 +22117,14 @@
             </a:avLst>
           </a:prstGeom>
           <a:solidFill>
-            <a:srgbClr val="102A20"/>
+            <a:srgbClr val="06180F"/>
           </a:solidFill>
-          <a:ln/>
+          <a:ln w="12700">
+            <a:solidFill>
+              <a:srgbClr val="3FCF8E"/>
+            </a:solidFill>
+            <a:prstDash val="solid"/>
+          </a:ln>
         </p:spPr>
       </p:sp>
       <p:sp>
@@ -21874,9 +22186,14 @@
             </a:avLst>
           </a:prstGeom>
           <a:solidFill>
-            <a:srgbClr val="2A2010"/>
+            <a:srgbClr val="0B1A38"/>
           </a:solidFill>
-          <a:ln/>
+          <a:ln w="12700">
+            <a:solidFill>
+              <a:srgbClr val="6BA0F8"/>
+            </a:solidFill>
+            <a:prstDash val="solid"/>
+          </a:ln>
         </p:spPr>
       </p:sp>
       <p:sp>
@@ -21951,7 +22268,7 @@
             <a:lvl1pPr>
               <a:defRPr sz="850">
                 <a:solidFill>
-                  <a:srgbClr val="8A82A0"/>
+                  <a:srgbClr val="9A94AA"/>
                 </a:solidFill>
                 <a:latin typeface="Courier New"/>
                 <a:ea typeface="Courier New"/>
@@ -22021,7 +22338,7 @@
             <a:r>
               <a:rPr lang="en-US" sz="2600" b="1" dirty="0">
                 <a:solidFill>
-                  <a:srgbClr val="C9A6FF"/>
+                  <a:srgbClr val="A98BFF"/>
                 </a:solidFill>
                 <a:latin typeface="Courier New" pitchFamily="34" charset="0"/>
                 <a:ea typeface="Courier New" pitchFamily="34" charset="-122"/>
@@ -22089,9 +22406,14 @@
             </a:avLst>
           </a:prstGeom>
           <a:solidFill>
-            <a:srgbClr val="C9A6FF"/>
+            <a:srgbClr val="1A0B3D"/>
           </a:solidFill>
-          <a:ln/>
+          <a:ln w="12700">
+            <a:solidFill>
+              <a:srgbClr val="5A05F4"/>
+            </a:solidFill>
+            <a:prstDash val="solid"/>
+          </a:ln>
         </p:spPr>
       </p:sp>
       <p:sp>
@@ -22121,7 +22443,7 @@
             <a:r>
               <a:rPr lang="en-US" sz="900" b="1" spc="100" kern="0" dirty="0">
                 <a:solidFill>
-                  <a:srgbClr val="1C1140"/>
+                  <a:srgbClr val="A98BFF"/>
                 </a:solidFill>
                 <a:latin typeface="Courier New" pitchFamily="34" charset="0"/>
                 <a:ea typeface="Courier New" pitchFamily="34" charset="-122"/>
@@ -22174,7 +22496,7 @@
           <a:noFill/>
           <a:ln w="25400">
             <a:solidFill>
-              <a:srgbClr val="9B7BE8"/>
+              <a:srgbClr val="8F72E6"/>
             </a:solidFill>
             <a:prstDash val="solid"/>
           </a:ln>
@@ -22195,7 +22517,7 @@
             <a:avLst/>
           </a:prstGeom>
           <a:solidFill>
-            <a:srgbClr val="5FD6A0"/>
+            <a:srgbClr val="3FCF8E"/>
           </a:solidFill>
           <a:ln/>
         </p:spPr>
@@ -22227,7 +22549,7 @@
             <a:r>
               <a:rPr lang="en-US" sz="1050" b="1" dirty="0">
                 <a:solidFill>
-                  <a:srgbClr val="5FD6A0"/>
+                  <a:srgbClr val="3FCF8E"/>
                 </a:solidFill>
                 <a:latin typeface="Courier New" pitchFamily="34" charset="0"/>
                 <a:ea typeface="Courier New" pitchFamily="34" charset="-122"/>
@@ -22266,7 +22588,7 @@
             <a:r>
               <a:rPr lang="en-US" sz="1100" dirty="0">
                 <a:solidFill>
-                  <a:srgbClr val="AFA9BE"/>
+                  <a:srgbClr val="C9C4D6"/>
                 </a:solidFill>
                 <a:latin typeface="Montserrat" pitchFamily="34" charset="0"/>
                 <a:ea typeface="Montserrat" pitchFamily="34" charset="-122"/>
@@ -22293,7 +22615,7 @@
             <a:avLst/>
           </a:prstGeom>
           <a:solidFill>
-            <a:srgbClr val="FF7B7B"/>
+            <a:srgbClr val="FF6B6B"/>
           </a:solidFill>
           <a:ln/>
         </p:spPr>
@@ -22325,7 +22647,7 @@
             <a:r>
               <a:rPr lang="en-US" sz="1050" b="1" dirty="0">
                 <a:solidFill>
-                  <a:srgbClr val="FF7B7B"/>
+                  <a:srgbClr val="FF6B6B"/>
                 </a:solidFill>
                 <a:latin typeface="Courier New" pitchFamily="34" charset="0"/>
                 <a:ea typeface="Courier New" pitchFamily="34" charset="-122"/>
@@ -22364,7 +22686,7 @@
             <a:r>
               <a:rPr lang="en-US" sz="1100" dirty="0">
                 <a:solidFill>
-                  <a:srgbClr val="AFA9BE"/>
+                  <a:srgbClr val="C9C4D6"/>
                 </a:solidFill>
                 <a:latin typeface="Montserrat" pitchFamily="34" charset="0"/>
                 <a:ea typeface="Montserrat" pitchFamily="34" charset="-122"/>
@@ -22391,7 +22713,7 @@
             <a:avLst/>
           </a:prstGeom>
           <a:solidFill>
-            <a:srgbClr val="E8A857"/>
+            <a:srgbClr val="6BA0F8"/>
           </a:solidFill>
           <a:ln/>
         </p:spPr>
@@ -22423,7 +22745,7 @@
             <a:r>
               <a:rPr lang="en-US" sz="1050" b="1" dirty="0">
                 <a:solidFill>
-                  <a:srgbClr val="E8A857"/>
+                  <a:srgbClr val="6BA0F8"/>
                 </a:solidFill>
                 <a:latin typeface="Courier New" pitchFamily="34" charset="0"/>
                 <a:ea typeface="Courier New" pitchFamily="34" charset="-122"/>
@@ -22462,7 +22784,7 @@
             <a:r>
               <a:rPr lang="en-US" sz="1100" dirty="0">
                 <a:solidFill>
-                  <a:srgbClr val="AFA9BE"/>
+                  <a:srgbClr val="C9C4D6"/>
                 </a:solidFill>
                 <a:latin typeface="Montserrat" pitchFamily="34" charset="0"/>
                 <a:ea typeface="Montserrat" pitchFamily="34" charset="-122"/>
@@ -22489,7 +22811,7 @@
             <a:avLst/>
           </a:prstGeom>
           <a:solidFill>
-            <a:srgbClr val="5FD6A0"/>
+            <a:srgbClr val="3FCF8E"/>
           </a:solidFill>
           <a:ln/>
         </p:spPr>
@@ -22521,7 +22843,7 @@
             <a:r>
               <a:rPr lang="en-US" sz="1050" b="1" dirty="0">
                 <a:solidFill>
-                  <a:srgbClr val="5FD6A0"/>
+                  <a:srgbClr val="3FCF8E"/>
                 </a:solidFill>
                 <a:latin typeface="Courier New" pitchFamily="34" charset="0"/>
                 <a:ea typeface="Courier New" pitchFamily="34" charset="-122"/>
@@ -22560,7 +22882,7 @@
             <a:r>
               <a:rPr lang="en-US" sz="1100" dirty="0">
                 <a:solidFill>
-                  <a:srgbClr val="AFA9BE"/>
+                  <a:srgbClr val="C9C4D6"/>
                 </a:solidFill>
                 <a:latin typeface="Montserrat" pitchFamily="34" charset="0"/>
                 <a:ea typeface="Montserrat" pitchFamily="34" charset="-122"/>
@@ -22589,9 +22911,14 @@
             </a:avLst>
           </a:prstGeom>
           <a:solidFill>
-            <a:srgbClr val="2E1418"/>
+            <a:srgbClr val="1A0808"/>
           </a:solidFill>
-          <a:ln/>
+          <a:ln w="12700">
+            <a:solidFill>
+              <a:srgbClr val="FF6B6B"/>
+            </a:solidFill>
+            <a:prstDash val="solid"/>
+          </a:ln>
         </p:spPr>
       </p:sp>
       <p:sp>
@@ -22621,7 +22948,7 @@
             <a:r>
               <a:rPr lang="en-US" sz="950" b="1" spc="150" kern="0" dirty="0">
                 <a:solidFill>
-                  <a:srgbClr val="FF7B7B"/>
+                  <a:srgbClr val="FF6B6B"/>
                 </a:solidFill>
                 <a:latin typeface="Courier New" pitchFamily="34" charset="0"/>
                 <a:ea typeface="Courier New" pitchFamily="34" charset="-122"/>
@@ -22692,11 +23019,11 @@
             </a:avLst>
           </a:prstGeom>
           <a:solidFill>
-            <a:srgbClr val="17141F"/>
+            <a:srgbClr val="000000"/>
           </a:solidFill>
           <a:ln w="12700">
             <a:solidFill>
-              <a:srgbClr val="2E2A3A"/>
+              <a:srgbClr val="5E4F85"/>
             </a:solidFill>
             <a:prstDash val="solid"/>
           </a:ln>
@@ -22774,7 +23101,7 @@
             <a:lvl1pPr>
               <a:defRPr sz="850">
                 <a:solidFill>
-                  <a:srgbClr val="8A82A0"/>
+                  <a:srgbClr val="9A94AA"/>
                 </a:solidFill>
                 <a:latin typeface="Courier New"/>
                 <a:ea typeface="Courier New"/>
@@ -22844,7 +23171,7 @@
             <a:r>
               <a:rPr lang="en-US" sz="2600" b="1" dirty="0">
                 <a:solidFill>
-                  <a:srgbClr val="C9A6FF"/>
+                  <a:srgbClr val="A98BFF"/>
                 </a:solidFill>
                 <a:latin typeface="Courier New" pitchFamily="34" charset="0"/>
                 <a:ea typeface="Courier New" pitchFamily="34" charset="-122"/>
@@ -22912,9 +23239,14 @@
             </a:avLst>
           </a:prstGeom>
           <a:solidFill>
-            <a:srgbClr val="C9A6FF"/>
+            <a:srgbClr val="1A0B3D"/>
           </a:solidFill>
-          <a:ln/>
+          <a:ln w="12700">
+            <a:solidFill>
+              <a:srgbClr val="5A05F4"/>
+            </a:solidFill>
+            <a:prstDash val="solid"/>
+          </a:ln>
         </p:spPr>
       </p:sp>
       <p:sp>
@@ -22944,7 +23276,7 @@
             <a:r>
               <a:rPr lang="en-US" sz="900" b="1" spc="100" kern="0" dirty="0">
                 <a:solidFill>
-                  <a:srgbClr val="1C1140"/>
+                  <a:srgbClr val="A98BFF"/>
                 </a:solidFill>
                 <a:latin typeface="Courier New" pitchFamily="34" charset="0"/>
                 <a:ea typeface="Courier New" pitchFamily="34" charset="-122"/>
@@ -23018,7 +23350,7 @@
                       <a:r>
                         <a:rPr lang="en-US" sz="900" b="1" spc="100" kern="0" dirty="0">
                           <a:solidFill>
-                            <a:srgbClr val="AFA9BE"/>
+                            <a:srgbClr val="C9C4D6"/>
                           </a:solidFill>
                           <a:latin typeface="Courier New" pitchFamily="34" charset="0"/>
                           <a:ea typeface="Courier New" pitchFamily="34" charset="-122"/>
@@ -23036,7 +23368,7 @@
                   <a:tcPr marL="73152" marR="73152" marT="73152" marB="73152" anchor="ctr">
                     <a:lnL w="6350" cap="flat" cmpd="sng" algn="ctr">
                       <a:solidFill>
-                        <a:srgbClr val="2E2A3A"/>
+                        <a:srgbClr val="5E4F85"/>
                       </a:solidFill>
                       <a:prstDash val="solid"/>
                       <a:round/>
@@ -23045,7 +23377,7 @@
                     </a:lnL>
                     <a:lnR w="6350" cap="flat" cmpd="sng" algn="ctr">
                       <a:solidFill>
-                        <a:srgbClr val="2E2A3A"/>
+                        <a:srgbClr val="5E4F85"/>
                       </a:solidFill>
                       <a:prstDash val="solid"/>
                       <a:round/>
@@ -23054,7 +23386,7 @@
                     </a:lnR>
                     <a:lnT w="6350" cap="flat" cmpd="sng" algn="ctr">
                       <a:solidFill>
-                        <a:srgbClr val="2E2A3A"/>
+                        <a:srgbClr val="5E4F85"/>
                       </a:solidFill>
                       <a:prstDash val="solid"/>
                       <a:round/>
@@ -23063,7 +23395,7 @@
                     </a:lnT>
                     <a:lnB w="6350" cap="flat" cmpd="sng" algn="ctr">
                       <a:solidFill>
-                        <a:srgbClr val="2E2A3A"/>
+                        <a:srgbClr val="5E4F85"/>
                       </a:solidFill>
                       <a:prstDash val="solid"/>
                       <a:round/>
@@ -23071,7 +23403,7 @@
                       <a:tailEnd type="none" w="med" len="med"/>
                     </a:lnB>
                     <a:solidFill>
-                      <a:srgbClr val="1F1B2A"/>
+                      <a:srgbClr val="1A0B3D"/>
                     </a:solidFill>
                   </a:tcPr>
                 </a:tc>
@@ -23086,7 +23418,7 @@
                       <a:r>
                         <a:rPr lang="en-US" sz="900" b="1" spc="100" kern="0" dirty="0">
                           <a:solidFill>
-                            <a:srgbClr val="AFA9BE"/>
+                            <a:srgbClr val="C9C4D6"/>
                           </a:solidFill>
                           <a:latin typeface="Courier New" pitchFamily="34" charset="0"/>
                           <a:ea typeface="Courier New" pitchFamily="34" charset="-122"/>
@@ -23104,7 +23436,7 @@
                   <a:tcPr marL="73152" marR="73152" marT="73152" marB="73152" anchor="ctr">
                     <a:lnL w="6350" cap="flat" cmpd="sng" algn="ctr">
                       <a:solidFill>
-                        <a:srgbClr val="2E2A3A"/>
+                        <a:srgbClr val="5E4F85"/>
                       </a:solidFill>
                       <a:prstDash val="solid"/>
                       <a:round/>
@@ -23113,7 +23445,7 @@
                     </a:lnL>
                     <a:lnR w="6350" cap="flat" cmpd="sng" algn="ctr">
                       <a:solidFill>
-                        <a:srgbClr val="2E2A3A"/>
+                        <a:srgbClr val="5E4F85"/>
                       </a:solidFill>
                       <a:prstDash val="solid"/>
                       <a:round/>
@@ -23122,7 +23454,7 @@
                     </a:lnR>
                     <a:lnT w="6350" cap="flat" cmpd="sng" algn="ctr">
                       <a:solidFill>
-                        <a:srgbClr val="2E2A3A"/>
+                        <a:srgbClr val="5E4F85"/>
                       </a:solidFill>
                       <a:prstDash val="solid"/>
                       <a:round/>
@@ -23131,7 +23463,7 @@
                     </a:lnT>
                     <a:lnB w="6350" cap="flat" cmpd="sng" algn="ctr">
                       <a:solidFill>
-                        <a:srgbClr val="2E2A3A"/>
+                        <a:srgbClr val="5E4F85"/>
                       </a:solidFill>
                       <a:prstDash val="solid"/>
                       <a:round/>
@@ -23139,7 +23471,7 @@
                       <a:tailEnd type="none" w="med" len="med"/>
                     </a:lnB>
                     <a:solidFill>
-                      <a:srgbClr val="1F1B2A"/>
+                      <a:srgbClr val="1A0B3D"/>
                     </a:solidFill>
                   </a:tcPr>
                 </a:tc>
@@ -23156,7 +23488,7 @@
                       <a:r>
                         <a:rPr lang="en-US" sz="1150" b="1" dirty="0">
                           <a:solidFill>
-                            <a:srgbClr val="5FD6A0"/>
+                            <a:srgbClr val="3FCF8E"/>
                           </a:solidFill>
                           <a:latin typeface="Montserrat" pitchFamily="34" charset="0"/>
                           <a:ea typeface="Montserrat" pitchFamily="34" charset="-122"/>
@@ -23174,7 +23506,7 @@
                   <a:tcPr marL="73152" marR="73152" marT="73152" marB="73152" anchor="ctr">
                     <a:lnL w="6350" cap="flat" cmpd="sng" algn="ctr">
                       <a:solidFill>
-                        <a:srgbClr val="2E2A3A"/>
+                        <a:srgbClr val="5E4F85"/>
                       </a:solidFill>
                       <a:prstDash val="solid"/>
                       <a:round/>
@@ -23183,7 +23515,7 @@
                     </a:lnL>
                     <a:lnR w="6350" cap="flat" cmpd="sng" algn="ctr">
                       <a:solidFill>
-                        <a:srgbClr val="2E2A3A"/>
+                        <a:srgbClr val="5E4F85"/>
                       </a:solidFill>
                       <a:prstDash val="solid"/>
                       <a:round/>
@@ -23192,7 +23524,7 @@
                     </a:lnR>
                     <a:lnT w="6350" cap="flat" cmpd="sng" algn="ctr">
                       <a:solidFill>
-                        <a:srgbClr val="2E2A3A"/>
+                        <a:srgbClr val="5E4F85"/>
                       </a:solidFill>
                       <a:prstDash val="solid"/>
                       <a:round/>
@@ -23201,7 +23533,7 @@
                     </a:lnT>
                     <a:lnB w="6350" cap="flat" cmpd="sng" algn="ctr">
                       <a:solidFill>
-                        <a:srgbClr val="2E2A3A"/>
+                        <a:srgbClr val="5E4F85"/>
                       </a:solidFill>
                       <a:prstDash val="solid"/>
                       <a:round/>
@@ -23209,7 +23541,7 @@
                       <a:tailEnd type="none" w="med" len="med"/>
                     </a:lnB>
                     <a:solidFill>
-                      <a:srgbClr val="102A20"/>
+                      <a:srgbClr val="06180F"/>
                     </a:solidFill>
                   </a:tcPr>
                 </a:tc>
@@ -23242,7 +23574,7 @@
                   <a:tcPr marL="73152" marR="73152" marT="73152" marB="73152" anchor="ctr">
                     <a:lnL w="6350" cap="flat" cmpd="sng" algn="ctr">
                       <a:solidFill>
-                        <a:srgbClr val="2E2A3A"/>
+                        <a:srgbClr val="5E4F85"/>
                       </a:solidFill>
                       <a:prstDash val="solid"/>
                       <a:round/>
@@ -23251,7 +23583,7 @@
                     </a:lnL>
                     <a:lnR w="6350" cap="flat" cmpd="sng" algn="ctr">
                       <a:solidFill>
-                        <a:srgbClr val="2E2A3A"/>
+                        <a:srgbClr val="5E4F85"/>
                       </a:solidFill>
                       <a:prstDash val="solid"/>
                       <a:round/>
@@ -23260,7 +23592,7 @@
                     </a:lnR>
                     <a:lnT w="6350" cap="flat" cmpd="sng" algn="ctr">
                       <a:solidFill>
-                        <a:srgbClr val="2E2A3A"/>
+                        <a:srgbClr val="5E4F85"/>
                       </a:solidFill>
                       <a:prstDash val="solid"/>
                       <a:round/>
@@ -23269,7 +23601,7 @@
                     </a:lnT>
                     <a:lnB w="6350" cap="flat" cmpd="sng" algn="ctr">
                       <a:solidFill>
-                        <a:srgbClr val="2E2A3A"/>
+                        <a:srgbClr val="5E4F85"/>
                       </a:solidFill>
                       <a:prstDash val="solid"/>
                       <a:round/>
@@ -23277,7 +23609,7 @@
                       <a:tailEnd type="none" w="med" len="med"/>
                     </a:lnB>
                     <a:solidFill>
-                      <a:srgbClr val="102A20"/>
+                      <a:srgbClr val="06180F"/>
                     </a:solidFill>
                   </a:tcPr>
                 </a:tc>
@@ -23312,7 +23644,7 @@
                   <a:tcPr marL="73152" marR="73152" marT="73152" marB="73152" anchor="ctr">
                     <a:lnL w="6350" cap="flat" cmpd="sng" algn="ctr">
                       <a:solidFill>
-                        <a:srgbClr val="2E2A3A"/>
+                        <a:srgbClr val="5E4F85"/>
                       </a:solidFill>
                       <a:prstDash val="solid"/>
                       <a:round/>
@@ -23321,7 +23653,7 @@
                     </a:lnL>
                     <a:lnR w="6350" cap="flat" cmpd="sng" algn="ctr">
                       <a:solidFill>
-                        <a:srgbClr val="2E2A3A"/>
+                        <a:srgbClr val="5E4F85"/>
                       </a:solidFill>
                       <a:prstDash val="solid"/>
                       <a:round/>
@@ -23330,7 +23662,7 @@
                     </a:lnR>
                     <a:lnT w="6350" cap="flat" cmpd="sng" algn="ctr">
                       <a:solidFill>
-                        <a:srgbClr val="2E2A3A"/>
+                        <a:srgbClr val="5E4F85"/>
                       </a:solidFill>
                       <a:prstDash val="solid"/>
                       <a:round/>
@@ -23339,7 +23671,7 @@
                     </a:lnT>
                     <a:lnB w="6350" cap="flat" cmpd="sng" algn="ctr">
                       <a:solidFill>
-                        <a:srgbClr val="2E2A3A"/>
+                        <a:srgbClr val="5E4F85"/>
                       </a:solidFill>
                       <a:prstDash val="solid"/>
                       <a:round/>
@@ -23347,7 +23679,7 @@
                       <a:tailEnd type="none" w="med" len="med"/>
                     </a:lnB>
                     <a:solidFill>
-                      <a:srgbClr val="17141F"/>
+                      <a:srgbClr val="000000"/>
                     </a:solidFill>
                   </a:tcPr>
                 </a:tc>
@@ -23380,7 +23712,7 @@
                   <a:tcPr marL="73152" marR="73152" marT="73152" marB="73152" anchor="ctr">
                     <a:lnL w="6350" cap="flat" cmpd="sng" algn="ctr">
                       <a:solidFill>
-                        <a:srgbClr val="2E2A3A"/>
+                        <a:srgbClr val="5E4F85"/>
                       </a:solidFill>
                       <a:prstDash val="solid"/>
                       <a:round/>
@@ -23389,7 +23721,7 @@
                     </a:lnL>
                     <a:lnR w="6350" cap="flat" cmpd="sng" algn="ctr">
                       <a:solidFill>
-                        <a:srgbClr val="2E2A3A"/>
+                        <a:srgbClr val="5E4F85"/>
                       </a:solidFill>
                       <a:prstDash val="solid"/>
                       <a:round/>
@@ -23398,7 +23730,7 @@
                     </a:lnR>
                     <a:lnT w="6350" cap="flat" cmpd="sng" algn="ctr">
                       <a:solidFill>
-                        <a:srgbClr val="2E2A3A"/>
+                        <a:srgbClr val="5E4F85"/>
                       </a:solidFill>
                       <a:prstDash val="solid"/>
                       <a:round/>
@@ -23407,7 +23739,7 @@
                     </a:lnT>
                     <a:lnB w="6350" cap="flat" cmpd="sng" algn="ctr">
                       <a:solidFill>
-                        <a:srgbClr val="2E2A3A"/>
+                        <a:srgbClr val="5E4F85"/>
                       </a:solidFill>
                       <a:prstDash val="solid"/>
                       <a:round/>
@@ -23415,7 +23747,7 @@
                       <a:tailEnd type="none" w="med" len="med"/>
                     </a:lnB>
                     <a:solidFill>
-                      <a:srgbClr val="17141F"/>
+                      <a:srgbClr val="000000"/>
                     </a:solidFill>
                   </a:tcPr>
                 </a:tc>
@@ -23432,7 +23764,7 @@
                       <a:r>
                         <a:rPr lang="en-US" sz="1150" b="1" dirty="0">
                           <a:solidFill>
-                            <a:srgbClr val="C9A6FF"/>
+                            <a:srgbClr val="A98BFF"/>
                           </a:solidFill>
                           <a:latin typeface="Montserrat" pitchFamily="34" charset="0"/>
                           <a:ea typeface="Montserrat" pitchFamily="34" charset="-122"/>
@@ -23450,7 +23782,7 @@
                   <a:tcPr marL="73152" marR="73152" marT="73152" marB="73152" anchor="ctr">
                     <a:lnL w="6350" cap="flat" cmpd="sng" algn="ctr">
                       <a:solidFill>
-                        <a:srgbClr val="2E2A3A"/>
+                        <a:srgbClr val="5E4F85"/>
                       </a:solidFill>
                       <a:prstDash val="solid"/>
                       <a:round/>
@@ -23459,7 +23791,7 @@
                     </a:lnL>
                     <a:lnR w="6350" cap="flat" cmpd="sng" algn="ctr">
                       <a:solidFill>
-                        <a:srgbClr val="2E2A3A"/>
+                        <a:srgbClr val="5E4F85"/>
                       </a:solidFill>
                       <a:prstDash val="solid"/>
                       <a:round/>
@@ -23468,7 +23800,7 @@
                     </a:lnR>
                     <a:lnT w="6350" cap="flat" cmpd="sng" algn="ctr">
                       <a:solidFill>
-                        <a:srgbClr val="2E2A3A"/>
+                        <a:srgbClr val="5E4F85"/>
                       </a:solidFill>
                       <a:prstDash val="solid"/>
                       <a:round/>
@@ -23477,7 +23809,7 @@
                     </a:lnT>
                     <a:lnB w="6350" cap="flat" cmpd="sng" algn="ctr">
                       <a:solidFill>
-                        <a:srgbClr val="2E2A3A"/>
+                        <a:srgbClr val="5E4F85"/>
                       </a:solidFill>
                       <a:prstDash val="solid"/>
                       <a:round/>
@@ -23485,7 +23817,7 @@
                       <a:tailEnd type="none" w="med" len="med"/>
                     </a:lnB>
                     <a:solidFill>
-                      <a:srgbClr val="1C1140"/>
+                      <a:srgbClr val="1A0B3D"/>
                     </a:solidFill>
                   </a:tcPr>
                 </a:tc>
@@ -23518,7 +23850,7 @@
                   <a:tcPr marL="73152" marR="73152" marT="73152" marB="73152" anchor="ctr">
                     <a:lnL w="6350" cap="flat" cmpd="sng" algn="ctr">
                       <a:solidFill>
-                        <a:srgbClr val="2E2A3A"/>
+                        <a:srgbClr val="5E4F85"/>
                       </a:solidFill>
                       <a:prstDash val="solid"/>
                       <a:round/>
@@ -23527,7 +23859,7 @@
                     </a:lnL>
                     <a:lnR w="6350" cap="flat" cmpd="sng" algn="ctr">
                       <a:solidFill>
-                        <a:srgbClr val="2E2A3A"/>
+                        <a:srgbClr val="5E4F85"/>
                       </a:solidFill>
                       <a:prstDash val="solid"/>
                       <a:round/>
@@ -23536,7 +23868,7 @@
                     </a:lnR>
                     <a:lnT w="6350" cap="flat" cmpd="sng" algn="ctr">
                       <a:solidFill>
-                        <a:srgbClr val="2E2A3A"/>
+                        <a:srgbClr val="5E4F85"/>
                       </a:solidFill>
                       <a:prstDash val="solid"/>
                       <a:round/>
@@ -23545,7 +23877,7 @@
                     </a:lnT>
                     <a:lnB w="6350" cap="flat" cmpd="sng" algn="ctr">
                       <a:solidFill>
-                        <a:srgbClr val="2E2A3A"/>
+                        <a:srgbClr val="5E4F85"/>
                       </a:solidFill>
                       <a:prstDash val="solid"/>
                       <a:round/>
@@ -23553,7 +23885,7 @@
                       <a:tailEnd type="none" w="med" len="med"/>
                     </a:lnB>
                     <a:solidFill>
-                      <a:srgbClr val="1C1140"/>
+                      <a:srgbClr val="1A0B3D"/>
                     </a:solidFill>
                   </a:tcPr>
                 </a:tc>
@@ -23570,7 +23902,7 @@
                       <a:r>
                         <a:rPr lang="en-US" sz="1150" b="1" dirty="0">
                           <a:solidFill>
-                            <a:srgbClr val="5FD6A0"/>
+                            <a:srgbClr val="3FCF8E"/>
                           </a:solidFill>
                           <a:latin typeface="Montserrat" pitchFamily="34" charset="0"/>
                           <a:ea typeface="Montserrat" pitchFamily="34" charset="-122"/>
@@ -23588,7 +23920,7 @@
                   <a:tcPr marL="73152" marR="73152" marT="73152" marB="73152" anchor="ctr">
                     <a:lnL w="6350" cap="flat" cmpd="sng" algn="ctr">
                       <a:solidFill>
-                        <a:srgbClr val="2E2A3A"/>
+                        <a:srgbClr val="5E4F85"/>
                       </a:solidFill>
                       <a:prstDash val="solid"/>
                       <a:round/>
@@ -23597,7 +23929,7 @@
                     </a:lnL>
                     <a:lnR w="6350" cap="flat" cmpd="sng" algn="ctr">
                       <a:solidFill>
-                        <a:srgbClr val="2E2A3A"/>
+                        <a:srgbClr val="5E4F85"/>
                       </a:solidFill>
                       <a:prstDash val="solid"/>
                       <a:round/>
@@ -23606,7 +23938,7 @@
                     </a:lnR>
                     <a:lnT w="6350" cap="flat" cmpd="sng" algn="ctr">
                       <a:solidFill>
-                        <a:srgbClr val="2E2A3A"/>
+                        <a:srgbClr val="5E4F85"/>
                       </a:solidFill>
                       <a:prstDash val="solid"/>
                       <a:round/>
@@ -23615,7 +23947,7 @@
                     </a:lnT>
                     <a:lnB w="6350" cap="flat" cmpd="sng" algn="ctr">
                       <a:solidFill>
-                        <a:srgbClr val="2E2A3A"/>
+                        <a:srgbClr val="5E4F85"/>
                       </a:solidFill>
                       <a:prstDash val="solid"/>
                       <a:round/>
@@ -23623,7 +23955,7 @@
                       <a:tailEnd type="none" w="med" len="med"/>
                     </a:lnB>
                     <a:solidFill>
-                      <a:srgbClr val="102A20"/>
+                      <a:srgbClr val="06180F"/>
                     </a:solidFill>
                   </a:tcPr>
                 </a:tc>
@@ -23656,7 +23988,7 @@
                   <a:tcPr marL="73152" marR="73152" marT="73152" marB="73152" anchor="ctr">
                     <a:lnL w="6350" cap="flat" cmpd="sng" algn="ctr">
                       <a:solidFill>
-                        <a:srgbClr val="2E2A3A"/>
+                        <a:srgbClr val="5E4F85"/>
                       </a:solidFill>
                       <a:prstDash val="solid"/>
                       <a:round/>
@@ -23665,7 +23997,7 @@
                     </a:lnL>
                     <a:lnR w="6350" cap="flat" cmpd="sng" algn="ctr">
                       <a:solidFill>
-                        <a:srgbClr val="2E2A3A"/>
+                        <a:srgbClr val="5E4F85"/>
                       </a:solidFill>
                       <a:prstDash val="solid"/>
                       <a:round/>
@@ -23674,7 +24006,7 @@
                     </a:lnR>
                     <a:lnT w="6350" cap="flat" cmpd="sng" algn="ctr">
                       <a:solidFill>
-                        <a:srgbClr val="2E2A3A"/>
+                        <a:srgbClr val="5E4F85"/>
                       </a:solidFill>
                       <a:prstDash val="solid"/>
                       <a:round/>
@@ -23683,7 +24015,7 @@
                     </a:lnT>
                     <a:lnB w="6350" cap="flat" cmpd="sng" algn="ctr">
                       <a:solidFill>
-                        <a:srgbClr val="2E2A3A"/>
+                        <a:srgbClr val="5E4F85"/>
                       </a:solidFill>
                       <a:prstDash val="solid"/>
                       <a:round/>
@@ -23691,7 +24023,7 @@
                       <a:tailEnd type="none" w="med" len="med"/>
                     </a:lnB>
                     <a:solidFill>
-                      <a:srgbClr val="102A20"/>
+                      <a:srgbClr val="06180F"/>
                     </a:solidFill>
                   </a:tcPr>
                 </a:tc>
@@ -23708,7 +24040,7 @@
                       <a:r>
                         <a:rPr lang="en-US" sz="1150" b="1" dirty="0">
                           <a:solidFill>
-                            <a:srgbClr val="C9A6FF"/>
+                            <a:srgbClr val="A98BFF"/>
                           </a:solidFill>
                           <a:latin typeface="Montserrat" pitchFamily="34" charset="0"/>
                           <a:ea typeface="Montserrat" pitchFamily="34" charset="-122"/>
@@ -23726,7 +24058,7 @@
                   <a:tcPr marL="73152" marR="73152" marT="73152" marB="73152" anchor="ctr">
                     <a:lnL w="6350" cap="flat" cmpd="sng" algn="ctr">
                       <a:solidFill>
-                        <a:srgbClr val="2E2A3A"/>
+                        <a:srgbClr val="5E4F85"/>
                       </a:solidFill>
                       <a:prstDash val="solid"/>
                       <a:round/>
@@ -23735,7 +24067,7 @@
                     </a:lnL>
                     <a:lnR w="6350" cap="flat" cmpd="sng" algn="ctr">
                       <a:solidFill>
-                        <a:srgbClr val="2E2A3A"/>
+                        <a:srgbClr val="5E4F85"/>
                       </a:solidFill>
                       <a:prstDash val="solid"/>
                       <a:round/>
@@ -23744,7 +24076,7 @@
                     </a:lnR>
                     <a:lnT w="6350" cap="flat" cmpd="sng" algn="ctr">
                       <a:solidFill>
-                        <a:srgbClr val="2E2A3A"/>
+                        <a:srgbClr val="5E4F85"/>
                       </a:solidFill>
                       <a:prstDash val="solid"/>
                       <a:round/>
@@ -23753,7 +24085,7 @@
                     </a:lnT>
                     <a:lnB w="6350" cap="flat" cmpd="sng" algn="ctr">
                       <a:solidFill>
-                        <a:srgbClr val="2E2A3A"/>
+                        <a:srgbClr val="5E4F85"/>
                       </a:solidFill>
                       <a:prstDash val="solid"/>
                       <a:round/>
@@ -23761,7 +24093,7 @@
                       <a:tailEnd type="none" w="med" len="med"/>
                     </a:lnB>
                     <a:solidFill>
-                      <a:srgbClr val="1C1140"/>
+                      <a:srgbClr val="1A0B3D"/>
                     </a:solidFill>
                   </a:tcPr>
                 </a:tc>
@@ -23794,7 +24126,7 @@
                   <a:tcPr marL="73152" marR="73152" marT="73152" marB="73152" anchor="ctr">
                     <a:lnL w="6350" cap="flat" cmpd="sng" algn="ctr">
                       <a:solidFill>
-                        <a:srgbClr val="2E2A3A"/>
+                        <a:srgbClr val="5E4F85"/>
                       </a:solidFill>
                       <a:prstDash val="solid"/>
                       <a:round/>
@@ -23803,7 +24135,7 @@
                     </a:lnL>
                     <a:lnR w="6350" cap="flat" cmpd="sng" algn="ctr">
                       <a:solidFill>
-                        <a:srgbClr val="2E2A3A"/>
+                        <a:srgbClr val="5E4F85"/>
                       </a:solidFill>
                       <a:prstDash val="solid"/>
                       <a:round/>
@@ -23812,7 +24144,7 @@
                     </a:lnR>
                     <a:lnT w="6350" cap="flat" cmpd="sng" algn="ctr">
                       <a:solidFill>
-                        <a:srgbClr val="2E2A3A"/>
+                        <a:srgbClr val="5E4F85"/>
                       </a:solidFill>
                       <a:prstDash val="solid"/>
                       <a:round/>
@@ -23821,7 +24153,7 @@
                     </a:lnT>
                     <a:lnB w="6350" cap="flat" cmpd="sng" algn="ctr">
                       <a:solidFill>
-                        <a:srgbClr val="2E2A3A"/>
+                        <a:srgbClr val="5E4F85"/>
                       </a:solidFill>
                       <a:prstDash val="solid"/>
                       <a:round/>
@@ -23829,7 +24161,7 @@
                       <a:tailEnd type="none" w="med" len="med"/>
                     </a:lnB>
                     <a:solidFill>
-                      <a:srgbClr val="1C1140"/>
+                      <a:srgbClr val="1A0B3D"/>
                     </a:solidFill>
                   </a:tcPr>
                 </a:tc>
@@ -23864,7 +24196,7 @@
                   <a:tcPr marL="73152" marR="73152" marT="73152" marB="73152" anchor="ctr">
                     <a:lnL w="6350" cap="flat" cmpd="sng" algn="ctr">
                       <a:solidFill>
-                        <a:srgbClr val="2E2A3A"/>
+                        <a:srgbClr val="5E4F85"/>
                       </a:solidFill>
                       <a:prstDash val="solid"/>
                       <a:round/>
@@ -23873,7 +24205,7 @@
                     </a:lnL>
                     <a:lnR w="6350" cap="flat" cmpd="sng" algn="ctr">
                       <a:solidFill>
-                        <a:srgbClr val="2E2A3A"/>
+                        <a:srgbClr val="5E4F85"/>
                       </a:solidFill>
                       <a:prstDash val="solid"/>
                       <a:round/>
@@ -23882,7 +24214,7 @@
                     </a:lnR>
                     <a:lnT w="6350" cap="flat" cmpd="sng" algn="ctr">
                       <a:solidFill>
-                        <a:srgbClr val="2E2A3A"/>
+                        <a:srgbClr val="5E4F85"/>
                       </a:solidFill>
                       <a:prstDash val="solid"/>
                       <a:round/>
@@ -23891,7 +24223,7 @@
                     </a:lnT>
                     <a:lnB w="6350" cap="flat" cmpd="sng" algn="ctr">
                       <a:solidFill>
-                        <a:srgbClr val="2E2A3A"/>
+                        <a:srgbClr val="5E4F85"/>
                       </a:solidFill>
                       <a:prstDash val="solid"/>
                       <a:round/>
@@ -23899,7 +24231,7 @@
                       <a:tailEnd type="none" w="med" len="med"/>
                     </a:lnB>
                     <a:solidFill>
-                      <a:srgbClr val="17141F"/>
+                      <a:srgbClr val="000000"/>
                     </a:solidFill>
                   </a:tcPr>
                 </a:tc>
@@ -23932,7 +24264,7 @@
                   <a:tcPr marL="73152" marR="73152" marT="73152" marB="73152" anchor="ctr">
                     <a:lnL w="6350" cap="flat" cmpd="sng" algn="ctr">
                       <a:solidFill>
-                        <a:srgbClr val="2E2A3A"/>
+                        <a:srgbClr val="5E4F85"/>
                       </a:solidFill>
                       <a:prstDash val="solid"/>
                       <a:round/>
@@ -23941,7 +24273,7 @@
                     </a:lnL>
                     <a:lnR w="6350" cap="flat" cmpd="sng" algn="ctr">
                       <a:solidFill>
-                        <a:srgbClr val="2E2A3A"/>
+                        <a:srgbClr val="5E4F85"/>
                       </a:solidFill>
                       <a:prstDash val="solid"/>
                       <a:round/>
@@ -23950,7 +24282,7 @@
                     </a:lnR>
                     <a:lnT w="6350" cap="flat" cmpd="sng" algn="ctr">
                       <a:solidFill>
-                        <a:srgbClr val="2E2A3A"/>
+                        <a:srgbClr val="5E4F85"/>
                       </a:solidFill>
                       <a:prstDash val="solid"/>
                       <a:round/>
@@ -23959,7 +24291,7 @@
                     </a:lnT>
                     <a:lnB w="6350" cap="flat" cmpd="sng" algn="ctr">
                       <a:solidFill>
-                        <a:srgbClr val="2E2A3A"/>
+                        <a:srgbClr val="5E4F85"/>
                       </a:solidFill>
                       <a:prstDash val="solid"/>
                       <a:round/>
@@ -23967,7 +24299,7 @@
                       <a:tailEnd type="none" w="med" len="med"/>
                     </a:lnB>
                     <a:solidFill>
-                      <a:srgbClr val="17141F"/>
+                      <a:srgbClr val="000000"/>
                     </a:solidFill>
                   </a:tcPr>
                 </a:tc>
@@ -23993,9 +24325,14 @@
             </a:avLst>
           </a:prstGeom>
           <a:solidFill>
-            <a:srgbClr val="2A2010"/>
+            <a:srgbClr val="0B1A38"/>
           </a:solidFill>
-          <a:ln/>
+          <a:ln w="12700">
+            <a:solidFill>
+              <a:srgbClr val="6BA0F8"/>
+            </a:solidFill>
+            <a:prstDash val="solid"/>
+          </a:ln>
         </p:spPr>
       </p:sp>
       <p:sp>
@@ -24025,7 +24362,7 @@
             <a:r>
               <a:rPr lang="en-US" sz="950" b="1" spc="150" kern="0" dirty="0">
                 <a:solidFill>
-                  <a:srgbClr val="E8A857"/>
+                  <a:srgbClr val="6BA0F8"/>
                 </a:solidFill>
                 <a:latin typeface="Courier New" pitchFamily="34" charset="0"/>
                 <a:ea typeface="Courier New" pitchFamily="34" charset="-122"/>
@@ -24109,7 +24446,7 @@
             <a:lvl1pPr>
               <a:defRPr sz="850">
                 <a:solidFill>
-                  <a:srgbClr val="8A82A0"/>
+                  <a:srgbClr val="9A94AA"/>
                 </a:solidFill>
                 <a:latin typeface="Courier New"/>
                 <a:ea typeface="Courier New"/>

--- a/docs/decks/L12.pptx
+++ b/docs/decks/L12.pptx
@@ -12805,11 +12805,11 @@
         <p:spPr>
           <a:xfrm>
             <a:off x="566928" y="1783080"/>
-            <a:ext cx="3520440" cy="1463040"/>
+            <a:ext cx="3520440" cy="1874520"/>
           </a:xfrm>
           <a:prstGeom prst="roundRect">
             <a:avLst>
-              <a:gd name="adj" fmla="val 7500"/>
+              <a:gd name="adj" fmla="val 5854"/>
             </a:avLst>
           </a:prstGeom>
           <a:solidFill>
@@ -12925,7 +12925,7 @@
         <p:spPr>
           <a:xfrm>
             <a:off x="768096" y="2468880"/>
-            <a:ext cx="3118104" cy="621792"/>
+            <a:ext cx="3118104" cy="1033272"/>
           </a:xfrm>
           <a:prstGeom prst="rect">
             <a:avLst/>
@@ -12967,11 +12967,11 @@
         <p:spPr>
           <a:xfrm>
             <a:off x="4270248" y="1783080"/>
-            <a:ext cx="3520440" cy="1463040"/>
+            <a:ext cx="3520440" cy="1874520"/>
           </a:xfrm>
           <a:prstGeom prst="roundRect">
             <a:avLst>
-              <a:gd name="adj" fmla="val 7500"/>
+              <a:gd name="adj" fmla="val 5854"/>
             </a:avLst>
           </a:prstGeom>
           <a:solidFill>
@@ -13087,7 +13087,7 @@
         <p:spPr>
           <a:xfrm>
             <a:off x="4471416" y="2468880"/>
-            <a:ext cx="3118104" cy="621792"/>
+            <a:ext cx="3118104" cy="1033272"/>
           </a:xfrm>
           <a:prstGeom prst="rect">
             <a:avLst/>
@@ -13129,11 +13129,11 @@
         <p:spPr>
           <a:xfrm>
             <a:off x="7973568" y="1783080"/>
-            <a:ext cx="3520440" cy="1463040"/>
+            <a:ext cx="3520440" cy="1874520"/>
           </a:xfrm>
           <a:prstGeom prst="roundRect">
             <a:avLst>
-              <a:gd name="adj" fmla="val 7500"/>
+              <a:gd name="adj" fmla="val 5854"/>
             </a:avLst>
           </a:prstGeom>
           <a:solidFill>
@@ -13249,7 +13249,7 @@
         <p:spPr>
           <a:xfrm>
             <a:off x="8174736" y="2468880"/>
-            <a:ext cx="3118104" cy="621792"/>
+            <a:ext cx="3118104" cy="1033272"/>
           </a:xfrm>
           <a:prstGeom prst="rect">
             <a:avLst/>
@@ -13290,12 +13290,12 @@
         </p:nvSpPr>
         <p:spPr>
           <a:xfrm>
-            <a:off x="566928" y="3520440"/>
-            <a:ext cx="3520440" cy="1463040"/>
+            <a:off x="566928" y="3886200"/>
+            <a:ext cx="3520440" cy="1874520"/>
           </a:xfrm>
           <a:prstGeom prst="roundRect">
             <a:avLst>
-              <a:gd name="adj" fmla="val 7500"/>
+              <a:gd name="adj" fmla="val 5854"/>
             </a:avLst>
           </a:prstGeom>
           <a:solidFill>
@@ -13312,7 +13312,7 @@
         </p:nvSpPr>
         <p:spPr>
           <a:xfrm>
-            <a:off x="768096" y="3703320"/>
+            <a:off x="768096" y="4069080"/>
             <a:ext cx="384048" cy="384048"/>
           </a:xfrm>
           <a:prstGeom prst="ellipse">
@@ -13332,7 +13332,7 @@
         </p:nvSpPr>
         <p:spPr>
           <a:xfrm>
-            <a:off x="768096" y="3703320"/>
+            <a:off x="768096" y="4069080"/>
             <a:ext cx="384048" cy="384048"/>
           </a:xfrm>
           <a:prstGeom prst="rect">
@@ -13371,7 +13371,7 @@
         </p:nvSpPr>
         <p:spPr>
           <a:xfrm>
-            <a:off x="1280160" y="3675888"/>
+            <a:off x="1280160" y="4041648"/>
             <a:ext cx="2606040" cy="438912"/>
           </a:xfrm>
           <a:prstGeom prst="rect">
@@ -13410,8 +13410,8 @@
         </p:nvSpPr>
         <p:spPr>
           <a:xfrm>
-            <a:off x="768096" y="4206240"/>
-            <a:ext cx="3118104" cy="621792"/>
+            <a:off x="768096" y="4572000"/>
+            <a:ext cx="3118104" cy="1033272"/>
           </a:xfrm>
           <a:prstGeom prst="rect">
             <a:avLst/>
@@ -13452,12 +13452,12 @@
         </p:nvSpPr>
         <p:spPr>
           <a:xfrm>
-            <a:off x="4270248" y="3520440"/>
-            <a:ext cx="3520440" cy="1463040"/>
+            <a:off x="4270248" y="3886200"/>
+            <a:ext cx="3520440" cy="1874520"/>
           </a:xfrm>
           <a:prstGeom prst="roundRect">
             <a:avLst>
-              <a:gd name="adj" fmla="val 7500"/>
+              <a:gd name="adj" fmla="val 5854"/>
             </a:avLst>
           </a:prstGeom>
           <a:solidFill>
@@ -13474,7 +13474,7 @@
         </p:nvSpPr>
         <p:spPr>
           <a:xfrm>
-            <a:off x="4471416" y="3703320"/>
+            <a:off x="4471416" y="4069080"/>
             <a:ext cx="384048" cy="384048"/>
           </a:xfrm>
           <a:prstGeom prst="ellipse">
@@ -13494,7 +13494,7 @@
         </p:nvSpPr>
         <p:spPr>
           <a:xfrm>
-            <a:off x="4471416" y="3703320"/>
+            <a:off x="4471416" y="4069080"/>
             <a:ext cx="384048" cy="384048"/>
           </a:xfrm>
           <a:prstGeom prst="rect">
@@ -13533,7 +13533,7 @@
         </p:nvSpPr>
         <p:spPr>
           <a:xfrm>
-            <a:off x="4983480" y="3675888"/>
+            <a:off x="4983480" y="4041648"/>
             <a:ext cx="2606040" cy="438912"/>
           </a:xfrm>
           <a:prstGeom prst="rect">
@@ -13572,8 +13572,8 @@
         </p:nvSpPr>
         <p:spPr>
           <a:xfrm>
-            <a:off x="4471416" y="4206240"/>
-            <a:ext cx="3118104" cy="621792"/>
+            <a:off x="4471416" y="4572000"/>
+            <a:ext cx="3118104" cy="1033272"/>
           </a:xfrm>
           <a:prstGeom prst="rect">
             <a:avLst/>
@@ -13839,11 +13839,11 @@
         <p:spPr>
           <a:xfrm>
             <a:off x="566928" y="1737360"/>
-            <a:ext cx="3566160" cy="1828800"/>
+            <a:ext cx="3566160" cy="2148840"/>
           </a:xfrm>
           <a:prstGeom prst="roundRect">
             <a:avLst>
-              <a:gd name="adj" fmla="val 6000"/>
+              <a:gd name="adj" fmla="val 5106"/>
             </a:avLst>
           </a:prstGeom>
           <a:solidFill>
@@ -13900,7 +13900,7 @@
         <p:spPr>
           <a:xfrm>
             <a:off x="768096" y="2423160"/>
-            <a:ext cx="3163824" cy="987552"/>
+            <a:ext cx="3163824" cy="1307592"/>
           </a:xfrm>
           <a:prstGeom prst="rect">
             <a:avLst/>
@@ -13942,11 +13942,11 @@
         <p:spPr>
           <a:xfrm>
             <a:off x="4315968" y="1737360"/>
-            <a:ext cx="3566160" cy="1828800"/>
+            <a:ext cx="3566160" cy="2148840"/>
           </a:xfrm>
           <a:prstGeom prst="roundRect">
             <a:avLst>
-              <a:gd name="adj" fmla="val 6000"/>
+              <a:gd name="adj" fmla="val 5106"/>
             </a:avLst>
           </a:prstGeom>
           <a:solidFill>
@@ -14003,7 +14003,7 @@
         <p:spPr>
           <a:xfrm>
             <a:off x="4517136" y="2423160"/>
-            <a:ext cx="3163824" cy="987552"/>
+            <a:ext cx="3163824" cy="1307592"/>
           </a:xfrm>
           <a:prstGeom prst="rect">
             <a:avLst/>
@@ -14045,11 +14045,11 @@
         <p:spPr>
           <a:xfrm>
             <a:off x="8065008" y="1737360"/>
-            <a:ext cx="3566160" cy="1828800"/>
+            <a:ext cx="3566160" cy="2148840"/>
           </a:xfrm>
           <a:prstGeom prst="roundRect">
             <a:avLst>
-              <a:gd name="adj" fmla="val 6000"/>
+              <a:gd name="adj" fmla="val 5106"/>
             </a:avLst>
           </a:prstGeom>
           <a:solidFill>
@@ -14106,7 +14106,7 @@
         <p:spPr>
           <a:xfrm>
             <a:off x="8266176" y="2423160"/>
-            <a:ext cx="3163824" cy="987552"/>
+            <a:ext cx="3163824" cy="1307592"/>
           </a:xfrm>
           <a:prstGeom prst="rect">
             <a:avLst/>
@@ -14147,12 +14147,12 @@
         </p:nvSpPr>
         <p:spPr>
           <a:xfrm>
-            <a:off x="566928" y="3977640"/>
-            <a:ext cx="11064240" cy="1234440"/>
+            <a:off x="566928" y="4297680"/>
+            <a:ext cx="11064240" cy="1600200"/>
           </a:xfrm>
           <a:prstGeom prst="roundRect">
             <a:avLst>
-              <a:gd name="adj" fmla="val 8889"/>
+              <a:gd name="adj" fmla="val 6857"/>
             </a:avLst>
           </a:prstGeom>
           <a:solidFill>
@@ -14174,8 +14174,8 @@
         </p:nvSpPr>
         <p:spPr>
           <a:xfrm>
-            <a:off x="786384" y="4123944"/>
-            <a:ext cx="10625328" cy="941832"/>
+            <a:off x="786384" y="4443984"/>
+            <a:ext cx="10625328" cy="1307592"/>
           </a:xfrm>
           <a:prstGeom prst="rect">
             <a:avLst/>
@@ -14441,11 +14441,11 @@
         <p:spPr>
           <a:xfrm>
             <a:off x="566928" y="1783080"/>
-            <a:ext cx="11064240" cy="1874520"/>
+            <a:ext cx="11064240" cy="3657600"/>
           </a:xfrm>
           <a:prstGeom prst="roundRect">
             <a:avLst>
-              <a:gd name="adj" fmla="val 5854"/>
+              <a:gd name="adj" fmla="val 3000"/>
             </a:avLst>
           </a:prstGeom>
           <a:solidFill>
@@ -14467,7 +14467,7 @@
         </p:nvSpPr>
         <p:spPr>
           <a:xfrm>
-            <a:off x="978408" y="2157984"/>
+            <a:off x="978408" y="2706624"/>
             <a:ext cx="256032" cy="256032"/>
           </a:xfrm>
           <a:prstGeom prst="roundRect">
@@ -14494,7 +14494,7 @@
         </p:nvSpPr>
         <p:spPr>
           <a:xfrm rot="2700000">
-            <a:off x="1041227" y="2297430"/>
+            <a:off x="1041227" y="2846070"/>
             <a:ext cx="58156" cy="27432"/>
           </a:xfrm>
           <a:prstGeom prst="rect">
@@ -14514,7 +14514,7 @@
         </p:nvSpPr>
         <p:spPr>
           <a:xfrm rot="-3000000">
-            <a:off x="1069025" y="2271370"/>
+            <a:off x="1069025" y="2820010"/>
             <a:ext cx="121432" cy="27432"/>
           </a:xfrm>
           <a:prstGeom prst="rect">
@@ -14534,8 +14534,8 @@
         </p:nvSpPr>
         <p:spPr>
           <a:xfrm>
-            <a:off x="1362456" y="2103120"/>
-            <a:ext cx="4617720" cy="384048"/>
+            <a:off x="1362456" y="2505456"/>
+            <a:ext cx="4617720" cy="658368"/>
           </a:xfrm>
           <a:prstGeom prst="rect">
             <a:avLst/>
@@ -14551,7 +14551,7 @@
               <a:buNone/>
             </a:pPr>
             <a:r>
-              <a:rPr lang="en-US" sz="1250" dirty="0">
+              <a:rPr lang="en-US" sz="1400" dirty="0">
                 <a:solidFill>
                   <a:srgbClr val="000000"/>
                 </a:solidFill>
@@ -14561,7 +14561,7 @@
               </a:rPr>
               <a:t>система піднімається з чистого клону</a:t>
             </a:r>
-            <a:endParaRPr lang="en-US" sz="1250" dirty="0"/>
+            <a:endParaRPr lang="en-US" sz="1400" dirty="0"/>
           </a:p>
         </p:txBody>
       </p:sp>
@@ -14573,7 +14573,7 @@
         </p:nvSpPr>
         <p:spPr>
           <a:xfrm>
-            <a:off x="978408" y="2724912"/>
+            <a:off x="978408" y="4169664"/>
             <a:ext cx="256032" cy="256032"/>
           </a:xfrm>
           <a:prstGeom prst="roundRect">
@@ -14600,7 +14600,7 @@
         </p:nvSpPr>
         <p:spPr>
           <a:xfrm rot="2700000">
-            <a:off x="1041227" y="2864358"/>
+            <a:off x="1041227" y="4309110"/>
             <a:ext cx="58156" cy="27432"/>
           </a:xfrm>
           <a:prstGeom prst="rect">
@@ -14620,7 +14620,7 @@
         </p:nvSpPr>
         <p:spPr>
           <a:xfrm rot="-3000000">
-            <a:off x="1069025" y="2838298"/>
+            <a:off x="1069025" y="4283050"/>
             <a:ext cx="121432" cy="27432"/>
           </a:xfrm>
           <a:prstGeom prst="rect">
@@ -14640,8 +14640,8 @@
         </p:nvSpPr>
         <p:spPr>
           <a:xfrm>
-            <a:off x="1362456" y="2670048"/>
-            <a:ext cx="4617720" cy="384048"/>
+            <a:off x="1362456" y="3968496"/>
+            <a:ext cx="4617720" cy="658368"/>
           </a:xfrm>
           <a:prstGeom prst="rect">
             <a:avLst/>
@@ -14657,7 +14657,7 @@
               <a:buNone/>
             </a:pPr>
             <a:r>
-              <a:rPr lang="en-US" sz="1250" dirty="0">
+              <a:rPr lang="en-US" sz="1400" dirty="0">
                 <a:solidFill>
                   <a:srgbClr val="000000"/>
                 </a:solidFill>
@@ -14667,7 +14667,7 @@
               </a:rPr>
               <a:t>проведу інцидент за рунбуком без імпровізації</a:t>
             </a:r>
-            <a:endParaRPr lang="en-US" sz="1250" dirty="0"/>
+            <a:endParaRPr lang="en-US" sz="1400" dirty="0"/>
           </a:p>
         </p:txBody>
       </p:sp>
@@ -14679,7 +14679,7 @@
         </p:nvSpPr>
         <p:spPr>
           <a:xfrm>
-            <a:off x="6144768" y="2157984"/>
+            <a:off x="6144768" y="2706624"/>
             <a:ext cx="256032" cy="256032"/>
           </a:xfrm>
           <a:prstGeom prst="roundRect">
@@ -14706,7 +14706,7 @@
         </p:nvSpPr>
         <p:spPr>
           <a:xfrm rot="2700000">
-            <a:off x="6207587" y="2297430"/>
+            <a:off x="6207587" y="2846070"/>
             <a:ext cx="58156" cy="27432"/>
           </a:xfrm>
           <a:prstGeom prst="rect">
@@ -14726,7 +14726,7 @@
         </p:nvSpPr>
         <p:spPr>
           <a:xfrm rot="-3000000">
-            <a:off x="6235385" y="2271370"/>
+            <a:off x="6235385" y="2820010"/>
             <a:ext cx="121432" cy="27432"/>
           </a:xfrm>
           <a:prstGeom prst="rect">
@@ -14746,8 +14746,8 @@
         </p:nvSpPr>
         <p:spPr>
           <a:xfrm>
-            <a:off x="6528816" y="2103120"/>
-            <a:ext cx="4617720" cy="384048"/>
+            <a:off x="6528816" y="2505456"/>
+            <a:ext cx="4617720" cy="658368"/>
           </a:xfrm>
           <a:prstGeom prst="rect">
             <a:avLst/>
@@ -14763,7 +14763,7 @@
               <a:buNone/>
             </a:pPr>
             <a:r>
-              <a:rPr lang="en-US" sz="1250" dirty="0">
+              <a:rPr lang="en-US" sz="1400" dirty="0">
                 <a:solidFill>
                   <a:srgbClr val="000000"/>
                 </a:solidFill>
@@ -14773,7 +14773,7 @@
               </a:rPr>
               <a:t>поясню кожну плитку мовою наслідків</a:t>
             </a:r>
-            <a:endParaRPr lang="en-US" sz="1250" dirty="0"/>
+            <a:endParaRPr lang="en-US" sz="1400" dirty="0"/>
           </a:p>
         </p:txBody>
       </p:sp>
@@ -14785,7 +14785,7 @@
         </p:nvSpPr>
         <p:spPr>
           <a:xfrm>
-            <a:off x="6144768" y="2724912"/>
+            <a:off x="6144768" y="4169664"/>
             <a:ext cx="256032" cy="256032"/>
           </a:xfrm>
           <a:prstGeom prst="roundRect">
@@ -14812,7 +14812,7 @@
         </p:nvSpPr>
         <p:spPr>
           <a:xfrm rot="2700000">
-            <a:off x="6207587" y="2864358"/>
+            <a:off x="6207587" y="4309110"/>
             <a:ext cx="58156" cy="27432"/>
           </a:xfrm>
           <a:prstGeom prst="rect">
@@ -14832,7 +14832,7 @@
         </p:nvSpPr>
         <p:spPr>
           <a:xfrm rot="-3000000">
-            <a:off x="6235385" y="2838298"/>
+            <a:off x="6235385" y="4283050"/>
             <a:ext cx="121432" cy="27432"/>
           </a:xfrm>
           <a:prstGeom prst="rect">
@@ -14852,8 +14852,8 @@
         </p:nvSpPr>
         <p:spPr>
           <a:xfrm>
-            <a:off x="6528816" y="2670048"/>
-            <a:ext cx="4617720" cy="384048"/>
+            <a:off x="6528816" y="3968496"/>
+            <a:ext cx="4617720" cy="658368"/>
           </a:xfrm>
           <a:prstGeom prst="rect">
             <a:avLst/>
@@ -14869,7 +14869,7 @@
               <a:buNone/>
             </a:pPr>
             <a:r>
-              <a:rPr lang="en-US" sz="1250" dirty="0">
+              <a:rPr lang="en-US" sz="1400" dirty="0">
                 <a:solidFill>
                   <a:srgbClr val="000000"/>
                 </a:solidFill>
@@ -14879,7 +14879,7 @@
               </a:rPr>
               <a:t>мій 30-day план записаний із критеріями «зроблено»</a:t>
             </a:r>
-            <a:endParaRPr lang="en-US" sz="1250" dirty="0"/>
+            <a:endParaRPr lang="en-US" sz="1400" dirty="0"/>
           </a:p>
         </p:txBody>
       </p:sp>
@@ -14891,7 +14891,7 @@
         </p:nvSpPr>
         <p:spPr>
           <a:xfrm>
-            <a:off x="566928" y="3886200"/>
+            <a:off x="566928" y="5669280"/>
             <a:ext cx="10972800" cy="320040"/>
           </a:xfrm>
           <a:prstGeom prst="rect">
@@ -18953,11 +18953,11 @@
         <p:spPr>
           <a:xfrm>
             <a:off x="566928" y="1783080"/>
-            <a:ext cx="3553968" cy="1188720"/>
+            <a:ext cx="3553968" cy="1481328"/>
           </a:xfrm>
           <a:prstGeom prst="roundRect">
             <a:avLst>
-              <a:gd name="adj" fmla="val 7692"/>
+              <a:gd name="adj" fmla="val 6173"/>
             </a:avLst>
           </a:prstGeom>
           <a:solidFill>
@@ -19019,7 +19019,7 @@
         <p:spPr>
           <a:xfrm>
             <a:off x="749808" y="2203704"/>
-            <a:ext cx="3188208" cy="658368"/>
+            <a:ext cx="3188208" cy="950976"/>
           </a:xfrm>
           <a:prstGeom prst="rect">
             <a:avLst/>
@@ -19061,11 +19061,11 @@
         <p:spPr>
           <a:xfrm>
             <a:off x="4322064" y="1783080"/>
-            <a:ext cx="3553968" cy="1188720"/>
+            <a:ext cx="3553968" cy="1481328"/>
           </a:xfrm>
           <a:prstGeom prst="roundRect">
             <a:avLst>
-              <a:gd name="adj" fmla="val 7692"/>
+              <a:gd name="adj" fmla="val 6173"/>
             </a:avLst>
           </a:prstGeom>
           <a:solidFill>
@@ -19127,7 +19127,7 @@
         <p:spPr>
           <a:xfrm>
             <a:off x="4504944" y="2203704"/>
-            <a:ext cx="3188208" cy="658368"/>
+            <a:ext cx="3188208" cy="950976"/>
           </a:xfrm>
           <a:prstGeom prst="rect">
             <a:avLst/>
@@ -19169,11 +19169,11 @@
         <p:spPr>
           <a:xfrm>
             <a:off x="8077200" y="1783080"/>
-            <a:ext cx="3553968" cy="1188720"/>
+            <a:ext cx="3553968" cy="1481328"/>
           </a:xfrm>
           <a:prstGeom prst="roundRect">
             <a:avLst>
-              <a:gd name="adj" fmla="val 7692"/>
+              <a:gd name="adj" fmla="val 6173"/>
             </a:avLst>
           </a:prstGeom>
           <a:solidFill>
@@ -19235,7 +19235,7 @@
         <p:spPr>
           <a:xfrm>
             <a:off x="8260080" y="2203704"/>
-            <a:ext cx="3188208" cy="658368"/>
+            <a:ext cx="3188208" cy="950976"/>
           </a:xfrm>
           <a:prstGeom prst="rect">
             <a:avLst/>
@@ -19276,12 +19276,12 @@
         </p:nvSpPr>
         <p:spPr>
           <a:xfrm>
-            <a:off x="566928" y="3172968"/>
-            <a:ext cx="3553968" cy="1188720"/>
+            <a:off x="566928" y="3465576"/>
+            <a:ext cx="3553968" cy="1481328"/>
           </a:xfrm>
           <a:prstGeom prst="roundRect">
             <a:avLst>
-              <a:gd name="adj" fmla="val 7692"/>
+              <a:gd name="adj" fmla="val 6173"/>
             </a:avLst>
           </a:prstGeom>
           <a:solidFill>
@@ -19303,7 +19303,7 @@
         </p:nvSpPr>
         <p:spPr>
           <a:xfrm>
-            <a:off x="749808" y="3282696"/>
+            <a:off x="749808" y="3575304"/>
             <a:ext cx="3188208" cy="310896"/>
           </a:xfrm>
           <a:prstGeom prst="rect">
@@ -19342,8 +19342,8 @@
         </p:nvSpPr>
         <p:spPr>
           <a:xfrm>
-            <a:off x="749808" y="3593592"/>
-            <a:ext cx="3188208" cy="658368"/>
+            <a:off x="749808" y="3886200"/>
+            <a:ext cx="3188208" cy="950976"/>
           </a:xfrm>
           <a:prstGeom prst="rect">
             <a:avLst/>
@@ -19384,12 +19384,12 @@
         </p:nvSpPr>
         <p:spPr>
           <a:xfrm>
-            <a:off x="4322064" y="3172968"/>
-            <a:ext cx="3553968" cy="1188720"/>
+            <a:off x="4322064" y="3465576"/>
+            <a:ext cx="3553968" cy="1481328"/>
           </a:xfrm>
           <a:prstGeom prst="roundRect">
             <a:avLst>
-              <a:gd name="adj" fmla="val 7692"/>
+              <a:gd name="adj" fmla="val 6173"/>
             </a:avLst>
           </a:prstGeom>
           <a:solidFill>
@@ -19411,7 +19411,7 @@
         </p:nvSpPr>
         <p:spPr>
           <a:xfrm>
-            <a:off x="4504944" y="3282696"/>
+            <a:off x="4504944" y="3575304"/>
             <a:ext cx="3188208" cy="310896"/>
           </a:xfrm>
           <a:prstGeom prst="rect">
@@ -19450,8 +19450,8 @@
         </p:nvSpPr>
         <p:spPr>
           <a:xfrm>
-            <a:off x="4504944" y="3593592"/>
-            <a:ext cx="3188208" cy="658368"/>
+            <a:off x="4504944" y="3886200"/>
+            <a:ext cx="3188208" cy="950976"/>
           </a:xfrm>
           <a:prstGeom prst="rect">
             <a:avLst/>
@@ -19492,12 +19492,12 @@
         </p:nvSpPr>
         <p:spPr>
           <a:xfrm>
-            <a:off x="8077200" y="3172968"/>
-            <a:ext cx="3553968" cy="1188720"/>
+            <a:off x="8077200" y="3465576"/>
+            <a:ext cx="3553968" cy="1481328"/>
           </a:xfrm>
           <a:prstGeom prst="roundRect">
             <a:avLst>
-              <a:gd name="adj" fmla="val 7692"/>
+              <a:gd name="adj" fmla="val 6173"/>
             </a:avLst>
           </a:prstGeom>
           <a:solidFill>
@@ -19519,7 +19519,7 @@
         </p:nvSpPr>
         <p:spPr>
           <a:xfrm>
-            <a:off x="8260080" y="3282696"/>
+            <a:off x="8260080" y="3575304"/>
             <a:ext cx="3188208" cy="310896"/>
           </a:xfrm>
           <a:prstGeom prst="rect">
@@ -19558,8 +19558,8 @@
         </p:nvSpPr>
         <p:spPr>
           <a:xfrm>
-            <a:off x="8260080" y="3593592"/>
-            <a:ext cx="3188208" cy="658368"/>
+            <a:off x="8260080" y="3886200"/>
+            <a:ext cx="3188208" cy="950976"/>
           </a:xfrm>
           <a:prstGeom prst="rect">
             <a:avLst/>
@@ -19600,7 +19600,7 @@
         </p:nvSpPr>
         <p:spPr>
           <a:xfrm>
-            <a:off x="566928" y="4526280"/>
+            <a:off x="566928" y="5138928"/>
             <a:ext cx="11064240" cy="777240"/>
           </a:xfrm>
           <a:prstGeom prst="roundRect">
@@ -19627,7 +19627,7 @@
         </p:nvSpPr>
         <p:spPr>
           <a:xfrm>
-            <a:off x="786384" y="4672584"/>
+            <a:off x="786384" y="5285232"/>
             <a:ext cx="10625328" cy="484632"/>
           </a:xfrm>
           <a:prstGeom prst="rect">

--- a/docs/decks/L12.pptx
+++ b/docs/decks/L12.pptx
@@ -29,9 +29,10 @@
     <p:sldId id="277" r:id="rId23"/>
     <p:sldId id="278" r:id="rId24"/>
     <p:sldId id="279" r:id="rId25"/>
+    <p:sldId id="280" r:id="rId26"/>
   </p:sldIdLst>
   <p:notesMasterIdLst>
-    <p:notesMasterId r:id="rId26"/>
+    <p:notesMasterId r:id="rId27"/>
   </p:notesMasterIdLst>
   <p:sldSz cx="12192000" cy="6858000"/>
   <p:notesSz cx="6858000" cy="12192000"/>
@@ -1957,6 +1958,94 @@
             <a:fld id="{F7021451-1387-4CA6-816F-3879F97B5CBC}" type="slidenum">
               <a:rPr lang="en-US"/>
               <a:t>24</a:t>
+            </a:fld>
+            <a:endParaRPr lang="en-US"/>
+          </a:p>
+        </p:txBody>
+      </p:sp>
+    </p:spTree>
+    <p:extLst>
+      <p:ext uri="{BB962C8B-B14F-4D97-AF65-F5344CB8AC3E}">
+        <p14:creationId xmlns:p14="http://schemas.microsoft.com/office/powerpoint/2010/main" val="1024086991"/>
+      </p:ext>
+    </p:extLst>
+  </p:cSld>
+  <p:clrMapOvr>
+    <a:masterClrMapping/>
+  </p:clrMapOvr>
+</p:notes>
+</file>
+
+<file path=ppt/notesSlides/notesSlide25.xml><?xml version="1.0" encoding="utf-8"?>
+<p:notes xmlns:a="http://schemas.openxmlformats.org/drawingml/2006/main" xmlns:r="http://schemas.openxmlformats.org/officeDocument/2006/relationships" xmlns:p="http://schemas.openxmlformats.org/presentationml/2006/main">
+  <p:cSld>
+    <p:spTree>
+      <p:nvGrpSpPr>
+        <p:cNvPr id="1" name=""/>
+        <p:cNvGrpSpPr/>
+        <p:nvPr/>
+      </p:nvGrpSpPr>
+      <p:grpSpPr>
+        <a:xfrm>
+          <a:off x="0" y="0"/>
+          <a:ext cx="0" cy="0"/>
+          <a:chOff x="0" y="0"/>
+          <a:chExt cx="0" cy="0"/>
+        </a:xfrm>
+      </p:grpSpPr>
+      <p:sp>
+        <p:nvSpPr>
+          <p:cNvPr id="2" name="Slide Image Placeholder 1"/>
+          <p:cNvSpPr>
+            <a:spLocks noGrp="1" noRot="1" noChangeAspect="1"/>
+          </p:cNvSpPr>
+          <p:nvPr>
+            <p:ph type="sldImg"/>
+          </p:nvPr>
+        </p:nvSpPr>
+        <p:spPr/>
+      </p:sp>
+      <p:sp>
+        <p:nvSpPr>
+          <p:cNvPr id="3" name="Notes Placeholder 2"/>
+          <p:cNvSpPr>
+            <a:spLocks noGrp="1"/>
+          </p:cNvSpPr>
+          <p:nvPr>
+            <p:ph type="body" idx="1"/>
+          </p:nvPr>
+        </p:nvSpPr>
+        <p:spPr/>
+        <p:txBody>
+          <a:bodyPr/>
+          <a:lstStyle/>
+          <a:p>
+            <a:r>
+              <a:rPr lang="en-US" dirty="0"/>
+              <a:t/>
+            </a:r>
+            <a:endParaRPr lang="en-US" dirty="0"/>
+          </a:p>
+        </p:txBody>
+      </p:sp>
+      <p:sp>
+        <p:nvSpPr>
+          <p:cNvPr id="4" name="Slide Number Placeholder 3"/>
+          <p:cNvSpPr>
+            <a:spLocks noGrp="1"/>
+          </p:cNvSpPr>
+          <p:nvPr>
+            <p:ph type="sldNum" sz="quarter" idx="10"/>
+          </p:nvPr>
+        </p:nvSpPr>
+        <p:spPr/>
+        <p:txBody>
+          <a:bodyPr/>
+          <a:lstStyle/>
+          <a:p>
+            <a:fld id="{F7021451-1387-4CA6-816F-3879F97B5CBC}" type="slidenum">
+              <a:rPr lang="en-US"/>
+              <a:t>25</a:t>
             </a:fld>
             <a:endParaRPr lang="en-US"/>
           </a:p>
@@ -17001,6 +17090,109 @@
 </p:sld>
 </file>
 
+<file path=ppt/slides/slide25.xml><?xml version="1.0" encoding="utf-8"?>
+<p:sld xmlns:a="http://schemas.openxmlformats.org/drawingml/2006/main" xmlns:r="http://schemas.openxmlformats.org/officeDocument/2006/relationships" xmlns:p="http://schemas.openxmlformats.org/presentationml/2006/main">
+  <p:cSld name="Slide 25">
+    <p:spTree>
+      <p:nvGrpSpPr>
+        <p:cNvPr id="1" name=""/>
+        <p:cNvGrpSpPr/>
+        <p:nvPr/>
+      </p:nvGrpSpPr>
+      <p:grpSpPr>
+        <a:xfrm>
+          <a:off x="0" y="0"/>
+          <a:ext cx="0" cy="0"/>
+          <a:chOff x="0" y="0"/>
+          <a:chExt cx="0" cy="0"/>
+        </a:xfrm>
+      </p:grpSpPr>
+      <p:sp>
+        <p:nvSpPr>
+          <p:cNvPr id="2" name="Text 0"/>
+          <p:cNvSpPr/>
+          <p:nvPr/>
+        </p:nvSpPr>
+        <p:spPr>
+          <a:xfrm>
+            <a:off x="566928" y="384048"/>
+            <a:ext cx="5486400" cy="274320"/>
+          </a:xfrm>
+          <a:prstGeom prst="rect">
+            <a:avLst/>
+          </a:prstGeom>
+          <a:noFill/>
+          <a:ln/>
+        </p:spPr>
+        <p:txBody>
+          <a:bodyPr wrap="square" lIns="0" tIns="0" rIns="0" bIns="0" rtlCol="0" anchor="ctr"/>
+          <a:lstStyle/>
+          <a:p>
+            <a:pPr indent="0" marL="0">
+              <a:buNone/>
+            </a:pPr>
+            <a:r>
+              <a:rPr lang="en-US" sz="1200" b="1" spc="400" kern="0" dirty="0">
+                <a:solidFill>
+                  <a:srgbClr val="FFFFFF"/>
+                </a:solidFill>
+                <a:latin typeface="Montserrat" pitchFamily="34" charset="0"/>
+                <a:ea typeface="Montserrat" pitchFamily="34" charset="-122"/>
+                <a:cs typeface="Montserrat" pitchFamily="34" charset="-120"/>
+              </a:rPr>
+              <a:t>NEOVERSITY</a:t>
+            </a:r>
+            <a:endParaRPr lang="en-US" sz="1200" dirty="0"/>
+          </a:p>
+        </p:txBody>
+      </p:sp>
+      <p:sp>
+        <p:nvSpPr>
+          <p:cNvPr id="3" name="Text 1"/>
+          <p:cNvSpPr/>
+          <p:nvPr/>
+        </p:nvSpPr>
+        <p:spPr>
+          <a:xfrm>
+            <a:off x="566928" y="2834640"/>
+            <a:ext cx="11064240" cy="1463040"/>
+          </a:xfrm>
+          <a:prstGeom prst="rect">
+            <a:avLst/>
+          </a:prstGeom>
+          <a:noFill/>
+          <a:ln/>
+        </p:spPr>
+        <p:txBody>
+          <a:bodyPr wrap="square" lIns="0" tIns="0" rIns="0" bIns="0" rtlCol="0" anchor="ctr"/>
+          <a:lstStyle/>
+          <a:p>
+            <a:pPr indent="0" marL="0">
+              <a:buNone/>
+            </a:pPr>
+            <a:r>
+              <a:rPr lang="en-US" sz="7300" dirty="0">
+                <a:solidFill>
+                  <a:srgbClr val="FFFFFF"/>
+                </a:solidFill>
+                <a:latin typeface="Unbounded" pitchFamily="34" charset="0"/>
+                <a:ea typeface="Unbounded" pitchFamily="34" charset="-122"/>
+                <a:cs typeface="Unbounded" pitchFamily="34" charset="-120"/>
+              </a:rPr>
+              <a:t>ДЯКУЮ</a:t>
+            </a:r>
+            <a:endParaRPr lang="en-US" sz="7300" dirty="0"/>
+          </a:p>
+        </p:txBody>
+      </p:sp>
+    </p:spTree>
+  </p:cSld>
+  <p:clrMapOvr>
+    <a:masterClrMapping/>
+  </p:clrMapOvr>
+</p:sld>
+</file>
+
 <file path=ppt/slides/slide3.xml><?xml version="1.0" encoding="utf-8"?>
 <p:sld xmlns:a="http://schemas.openxmlformats.org/drawingml/2006/main" xmlns:r="http://schemas.openxmlformats.org/officeDocument/2006/relationships" xmlns:p="http://schemas.openxmlformats.org/presentationml/2006/main">
   <p:cSld name="Slide 3">

--- a/docs/decks/L12.pptx
+++ b/docs/decks/L12.pptx
@@ -4145,7 +4145,7 @@
                       <a:tailEnd type="none" w="med" len="med"/>
                     </a:lnB>
                     <a:solidFill>
-                      <a:srgbClr val="000000"/>
+                      <a:srgbClr val="5A05F4"/>
                     </a:solidFill>
                   </a:tcPr>
                 </a:tc>
@@ -4213,7 +4213,7 @@
                       <a:tailEnd type="none" w="med" len="med"/>
                     </a:lnB>
                     <a:solidFill>
-                      <a:srgbClr val="000000"/>
+                      <a:srgbClr val="5A05F4"/>
                     </a:solidFill>
                   </a:tcPr>
                 </a:tc>
@@ -4230,7 +4230,7 @@
                       <a:r>
                         <a:rPr lang="en-US" sz="1150" b="1" dirty="0">
                           <a:solidFill>
-                            <a:srgbClr val="3FCF8E"/>
+                            <a:srgbClr val="106B41"/>
                           </a:solidFill>
                           <a:latin typeface="Montserrat" pitchFamily="34" charset="0"/>
                           <a:ea typeface="Montserrat" pitchFamily="34" charset="-122"/>
@@ -4283,7 +4283,7 @@
                       <a:tailEnd type="none" w="med" len="med"/>
                     </a:lnB>
                     <a:solidFill>
-                      <a:srgbClr val="000000"/>
+                      <a:srgbClr val="F5F3FA"/>
                     </a:solidFill>
                   </a:tcPr>
                 </a:tc>
@@ -4298,7 +4298,7 @@
                       <a:r>
                         <a:rPr lang="en-US" sz="1150" dirty="0">
                           <a:solidFill>
-                            <a:srgbClr val="3FCF8E"/>
+                            <a:srgbClr val="106B41"/>
                           </a:solidFill>
                           <a:latin typeface="Montserrat" pitchFamily="34" charset="0"/>
                           <a:ea typeface="Montserrat" pitchFamily="34" charset="-122"/>
@@ -4351,7 +4351,7 @@
                       <a:tailEnd type="none" w="med" len="med"/>
                     </a:lnB>
                     <a:solidFill>
-                      <a:srgbClr val="000000"/>
+                      <a:srgbClr val="F5F3FA"/>
                     </a:solidFill>
                   </a:tcPr>
                 </a:tc>
@@ -4506,7 +4506,7 @@
                       <a:r>
                         <a:rPr lang="en-US" sz="1150" b="1" dirty="0">
                           <a:solidFill>
-                            <a:srgbClr val="A98BFF"/>
+                            <a:srgbClr val="5A05F4"/>
                           </a:solidFill>
                           <a:latin typeface="Montserrat" pitchFamily="34" charset="0"/>
                           <a:ea typeface="Montserrat" pitchFamily="34" charset="-122"/>
@@ -4559,7 +4559,7 @@
                       <a:tailEnd type="none" w="med" len="med"/>
                     </a:lnB>
                     <a:solidFill>
-                      <a:srgbClr val="000000"/>
+                      <a:srgbClr val="F5F3FA"/>
                     </a:solidFill>
                   </a:tcPr>
                 </a:tc>
@@ -4574,7 +4574,7 @@
                       <a:r>
                         <a:rPr lang="en-US" sz="1150" dirty="0">
                           <a:solidFill>
-                            <a:srgbClr val="A98BFF"/>
+                            <a:srgbClr val="5A05F4"/>
                           </a:solidFill>
                           <a:latin typeface="Montserrat" pitchFamily="34" charset="0"/>
                           <a:ea typeface="Montserrat" pitchFamily="34" charset="-122"/>
@@ -4627,7 +4627,7 @@
                       <a:tailEnd type="none" w="med" len="med"/>
                     </a:lnB>
                     <a:solidFill>
-                      <a:srgbClr val="000000"/>
+                      <a:srgbClr val="F5F3FA"/>
                     </a:solidFill>
                   </a:tcPr>
                 </a:tc>
@@ -4644,7 +4644,7 @@
                       <a:r>
                         <a:rPr lang="en-US" sz="1150" b="1" dirty="0">
                           <a:solidFill>
-                            <a:srgbClr val="3FCF8E"/>
+                            <a:srgbClr val="106B41"/>
                           </a:solidFill>
                           <a:latin typeface="Montserrat" pitchFamily="34" charset="0"/>
                           <a:ea typeface="Montserrat" pitchFamily="34" charset="-122"/>
@@ -4697,7 +4697,7 @@
                       <a:tailEnd type="none" w="med" len="med"/>
                     </a:lnB>
                     <a:solidFill>
-                      <a:srgbClr val="000000"/>
+                      <a:srgbClr val="F5F3FA"/>
                     </a:solidFill>
                   </a:tcPr>
                 </a:tc>
@@ -4712,7 +4712,7 @@
                       <a:r>
                         <a:rPr lang="en-US" sz="1150" dirty="0">
                           <a:solidFill>
-                            <a:srgbClr val="3FCF8E"/>
+                            <a:srgbClr val="106B41"/>
                           </a:solidFill>
                           <a:latin typeface="Montserrat" pitchFamily="34" charset="0"/>
                           <a:ea typeface="Montserrat" pitchFamily="34" charset="-122"/>
@@ -4765,7 +4765,7 @@
                       <a:tailEnd type="none" w="med" len="med"/>
                     </a:lnB>
                     <a:solidFill>
-                      <a:srgbClr val="000000"/>
+                      <a:srgbClr val="F5F3FA"/>
                     </a:solidFill>
                   </a:tcPr>
                 </a:tc>
@@ -4782,7 +4782,7 @@
                       <a:r>
                         <a:rPr lang="en-US" sz="1150" b="1" dirty="0">
                           <a:solidFill>
-                            <a:srgbClr val="A98BFF"/>
+                            <a:srgbClr val="5A05F4"/>
                           </a:solidFill>
                           <a:latin typeface="Montserrat" pitchFamily="34" charset="0"/>
                           <a:ea typeface="Montserrat" pitchFamily="34" charset="-122"/>
@@ -4835,7 +4835,7 @@
                       <a:tailEnd type="none" w="med" len="med"/>
                     </a:lnB>
                     <a:solidFill>
-                      <a:srgbClr val="000000"/>
+                      <a:srgbClr val="F5F3FA"/>
                     </a:solidFill>
                   </a:tcPr>
                 </a:tc>
@@ -4850,7 +4850,7 @@
                       <a:r>
                         <a:rPr lang="en-US" sz="1150" dirty="0">
                           <a:solidFill>
-                            <a:srgbClr val="A98BFF"/>
+                            <a:srgbClr val="5A05F4"/>
                           </a:solidFill>
                           <a:latin typeface="Montserrat" pitchFamily="34" charset="0"/>
                           <a:ea typeface="Montserrat" pitchFamily="34" charset="-122"/>
@@ -4903,7 +4903,7 @@
                       <a:tailEnd type="none" w="med" len="med"/>
                     </a:lnB>
                     <a:solidFill>
-                      <a:srgbClr val="000000"/>
+                      <a:srgbClr val="F5F3FA"/>
                     </a:solidFill>
                   </a:tcPr>
                 </a:tc>
@@ -7530,7 +7530,7 @@
                       <a:tailEnd type="none" w="med" len="med"/>
                     </a:lnB>
                     <a:solidFill>
-                      <a:srgbClr val="000000"/>
+                      <a:srgbClr val="5A05F4"/>
                     </a:solidFill>
                   </a:tcPr>
                 </a:tc>
@@ -7598,7 +7598,7 @@
                       <a:tailEnd type="none" w="med" len="med"/>
                     </a:lnB>
                     <a:solidFill>
-                      <a:srgbClr val="000000"/>
+                      <a:srgbClr val="5A05F4"/>
                     </a:solidFill>
                   </a:tcPr>
                 </a:tc>
@@ -7666,7 +7666,7 @@
                       <a:tailEnd type="none" w="med" len="med"/>
                     </a:lnB>
                     <a:solidFill>
-                      <a:srgbClr val="000000"/>
+                      <a:srgbClr val="5A05F4"/>
                     </a:solidFill>
                   </a:tcPr>
                 </a:tc>
@@ -8507,7 +8507,7 @@
                       <a:r>
                         <a:rPr lang="en-US" sz="1100" b="1" dirty="0">
                           <a:solidFill>
-                            <a:srgbClr val="3FCF8E"/>
+                            <a:srgbClr val="106B41"/>
                           </a:solidFill>
                           <a:latin typeface="Montserrat" pitchFamily="34" charset="0"/>
                           <a:ea typeface="Montserrat" pitchFamily="34" charset="-122"/>
@@ -8560,7 +8560,7 @@
                       <a:tailEnd type="none" w="med" len="med"/>
                     </a:lnB>
                     <a:solidFill>
-                      <a:srgbClr val="000000"/>
+                      <a:srgbClr val="F5F3FA"/>
                     </a:solidFill>
                   </a:tcPr>
                 </a:tc>
@@ -8575,7 +8575,7 @@
                       <a:r>
                         <a:rPr lang="en-US" sz="1100" dirty="0">
                           <a:solidFill>
-                            <a:srgbClr val="3FCF8E"/>
+                            <a:srgbClr val="106B41"/>
                           </a:solidFill>
                           <a:latin typeface="Montserrat" pitchFamily="34" charset="0"/>
                           <a:ea typeface="Montserrat" pitchFamily="34" charset="-122"/>
@@ -8628,7 +8628,7 @@
                       <a:tailEnd type="none" w="med" len="med"/>
                     </a:lnB>
                     <a:solidFill>
-                      <a:srgbClr val="000000"/>
+                      <a:srgbClr val="F5F3FA"/>
                     </a:solidFill>
                   </a:tcPr>
                 </a:tc>
@@ -8643,7 +8643,7 @@
                       <a:r>
                         <a:rPr lang="en-US" sz="1100" dirty="0">
                           <a:solidFill>
-                            <a:srgbClr val="3FCF8E"/>
+                            <a:srgbClr val="106B41"/>
                           </a:solidFill>
                           <a:latin typeface="Montserrat" pitchFamily="34" charset="0"/>
                           <a:ea typeface="Montserrat" pitchFamily="34" charset="-122"/>
@@ -8696,7 +8696,7 @@
                       <a:tailEnd type="none" w="med" len="med"/>
                     </a:lnB>
                     <a:solidFill>
-                      <a:srgbClr val="000000"/>
+                      <a:srgbClr val="F5F3FA"/>
                     </a:solidFill>
                   </a:tcPr>
                 </a:tc>
@@ -23572,7 +23572,7 @@
                       <a:tailEnd type="none" w="med" len="med"/>
                     </a:lnB>
                     <a:solidFill>
-                      <a:srgbClr val="000000"/>
+                      <a:srgbClr val="5A05F4"/>
                     </a:solidFill>
                   </a:tcPr>
                 </a:tc>
@@ -23640,7 +23640,7 @@
                       <a:tailEnd type="none" w="med" len="med"/>
                     </a:lnB>
                     <a:solidFill>
-                      <a:srgbClr val="000000"/>
+                      <a:srgbClr val="5A05F4"/>
                     </a:solidFill>
                   </a:tcPr>
                 </a:tc>
@@ -23708,7 +23708,7 @@
                       <a:tailEnd type="none" w="med" len="med"/>
                     </a:lnB>
                     <a:solidFill>
-                      <a:srgbClr val="000000"/>
+                      <a:srgbClr val="5A05F4"/>
                     </a:solidFill>
                   </a:tcPr>
                 </a:tc>
@@ -23931,7 +23931,7 @@
                       <a:r>
                         <a:rPr lang="en-US" sz="1150" b="1" dirty="0">
                           <a:solidFill>
-                            <a:srgbClr val="A98BFF"/>
+                            <a:srgbClr val="5A05F4"/>
                           </a:solidFill>
                           <a:latin typeface="Montserrat" pitchFamily="34" charset="0"/>
                           <a:ea typeface="Montserrat" pitchFamily="34" charset="-122"/>
@@ -23984,7 +23984,7 @@
                       <a:tailEnd type="none" w="med" len="med"/>
                     </a:lnB>
                     <a:solidFill>
-                      <a:srgbClr val="000000"/>
+                      <a:srgbClr val="F5F3FA"/>
                     </a:solidFill>
                   </a:tcPr>
                 </a:tc>
@@ -23999,7 +23999,7 @@
                       <a:r>
                         <a:rPr lang="en-US" sz="1150" dirty="0">
                           <a:solidFill>
-                            <a:srgbClr val="A98BFF"/>
+                            <a:srgbClr val="5A05F4"/>
                           </a:solidFill>
                           <a:latin typeface="Montserrat" pitchFamily="34" charset="0"/>
                           <a:ea typeface="Montserrat" pitchFamily="34" charset="-122"/>
@@ -24052,7 +24052,7 @@
                       <a:tailEnd type="none" w="med" len="med"/>
                     </a:lnB>
                     <a:solidFill>
-                      <a:srgbClr val="000000"/>
+                      <a:srgbClr val="F5F3FA"/>
                     </a:solidFill>
                   </a:tcPr>
                 </a:tc>
@@ -24067,7 +24067,7 @@
                       <a:r>
                         <a:rPr lang="en-US" sz="1150" dirty="0">
                           <a:solidFill>
-                            <a:srgbClr val="A98BFF"/>
+                            <a:srgbClr val="5A05F4"/>
                           </a:solidFill>
                           <a:latin typeface="Montserrat" pitchFamily="34" charset="0"/>
                           <a:ea typeface="Montserrat" pitchFamily="34" charset="-122"/>
@@ -24120,7 +24120,7 @@
                       <a:tailEnd type="none" w="med" len="med"/>
                     </a:lnB>
                     <a:solidFill>
-                      <a:srgbClr val="000000"/>
+                      <a:srgbClr val="F5F3FA"/>
                     </a:solidFill>
                   </a:tcPr>
                 </a:tc>
@@ -24137,7 +24137,7 @@
                       <a:r>
                         <a:rPr lang="en-US" sz="1150" b="1" dirty="0">
                           <a:solidFill>
-                            <a:srgbClr val="3FCF8E"/>
+                            <a:srgbClr val="106B41"/>
                           </a:solidFill>
                           <a:latin typeface="Montserrat" pitchFamily="34" charset="0"/>
                           <a:ea typeface="Montserrat" pitchFamily="34" charset="-122"/>
@@ -24190,7 +24190,7 @@
                       <a:tailEnd type="none" w="med" len="med"/>
                     </a:lnB>
                     <a:solidFill>
-                      <a:srgbClr val="000000"/>
+                      <a:srgbClr val="F5F3FA"/>
                     </a:solidFill>
                   </a:tcPr>
                 </a:tc>
@@ -24205,7 +24205,7 @@
                       <a:r>
                         <a:rPr lang="en-US" sz="1150" dirty="0">
                           <a:solidFill>
-                            <a:srgbClr val="3FCF8E"/>
+                            <a:srgbClr val="106B41"/>
                           </a:solidFill>
                           <a:latin typeface="Montserrat" pitchFamily="34" charset="0"/>
                           <a:ea typeface="Montserrat" pitchFamily="34" charset="-122"/>
@@ -24258,7 +24258,7 @@
                       <a:tailEnd type="none" w="med" len="med"/>
                     </a:lnB>
                     <a:solidFill>
-                      <a:srgbClr val="000000"/>
+                      <a:srgbClr val="F5F3FA"/>
                     </a:solidFill>
                   </a:tcPr>
                 </a:tc>
@@ -24273,7 +24273,7 @@
                       <a:r>
                         <a:rPr lang="en-US" sz="1150" dirty="0">
                           <a:solidFill>
-                            <a:srgbClr val="3FCF8E"/>
+                            <a:srgbClr val="106B41"/>
                           </a:solidFill>
                           <a:latin typeface="Montserrat" pitchFamily="34" charset="0"/>
                           <a:ea typeface="Montserrat" pitchFamily="34" charset="-122"/>
@@ -24326,7 +24326,7 @@
                       <a:tailEnd type="none" w="med" len="med"/>
                     </a:lnB>
                     <a:solidFill>
-                      <a:srgbClr val="000000"/>
+                      <a:srgbClr val="F5F3FA"/>
                     </a:solidFill>
                   </a:tcPr>
                 </a:tc>
@@ -24343,7 +24343,7 @@
                       <a:r>
                         <a:rPr lang="en-US" sz="1150" b="1" dirty="0">
                           <a:solidFill>
-                            <a:srgbClr val="A98BFF"/>
+                            <a:srgbClr val="5A05F4"/>
                           </a:solidFill>
                           <a:latin typeface="Montserrat" pitchFamily="34" charset="0"/>
                           <a:ea typeface="Montserrat" pitchFamily="34" charset="-122"/>
@@ -24396,7 +24396,7 @@
                       <a:tailEnd type="none" w="med" len="med"/>
                     </a:lnB>
                     <a:solidFill>
-                      <a:srgbClr val="000000"/>
+                      <a:srgbClr val="F5F3FA"/>
                     </a:solidFill>
                   </a:tcPr>
                 </a:tc>
@@ -24411,7 +24411,7 @@
                       <a:r>
                         <a:rPr lang="en-US" sz="1150" dirty="0">
                           <a:solidFill>
-                            <a:srgbClr val="A98BFF"/>
+                            <a:srgbClr val="5A05F4"/>
                           </a:solidFill>
                           <a:latin typeface="Montserrat" pitchFamily="34" charset="0"/>
                           <a:ea typeface="Montserrat" pitchFamily="34" charset="-122"/>
@@ -24464,7 +24464,7 @@
                       <a:tailEnd type="none" w="med" len="med"/>
                     </a:lnB>
                     <a:solidFill>
-                      <a:srgbClr val="000000"/>
+                      <a:srgbClr val="F5F3FA"/>
                     </a:solidFill>
                   </a:tcPr>
                 </a:tc>
@@ -24479,7 +24479,7 @@
                       <a:r>
                         <a:rPr lang="en-US" sz="1150" dirty="0">
                           <a:solidFill>
-                            <a:srgbClr val="A98BFF"/>
+                            <a:srgbClr val="5A05F4"/>
                           </a:solidFill>
                           <a:latin typeface="Montserrat" pitchFamily="34" charset="0"/>
                           <a:ea typeface="Montserrat" pitchFamily="34" charset="-122"/>
@@ -24532,7 +24532,7 @@
                       <a:tailEnd type="none" w="med" len="med"/>
                     </a:lnB>
                     <a:solidFill>
-                      <a:srgbClr val="000000"/>
+                      <a:srgbClr val="F5F3FA"/>
                     </a:solidFill>
                   </a:tcPr>
                 </a:tc>

--- a/docs/decks/L12.pptx
+++ b/docs/decks/L12.pptx
@@ -4230,7 +4230,7 @@
                       <a:r>
                         <a:rPr lang="en-US" sz="1150" b="1" dirty="0">
                           <a:solidFill>
-                            <a:srgbClr val="106B41"/>
+                            <a:srgbClr val="000000"/>
                           </a:solidFill>
                           <a:latin typeface="Montserrat" pitchFamily="34" charset="0"/>
                           <a:ea typeface="Montserrat" pitchFamily="34" charset="-122"/>
@@ -4283,7 +4283,7 @@
                       <a:tailEnd type="none" w="med" len="med"/>
                     </a:lnB>
                     <a:solidFill>
-                      <a:srgbClr val="F5F3FA"/>
+                      <a:srgbClr val="FFFFFF"/>
                     </a:solidFill>
                   </a:tcPr>
                 </a:tc>
@@ -4298,7 +4298,7 @@
                       <a:r>
                         <a:rPr lang="en-US" sz="1150" dirty="0">
                           <a:solidFill>
-                            <a:srgbClr val="106B41"/>
+                            <a:srgbClr val="000000"/>
                           </a:solidFill>
                           <a:latin typeface="Montserrat" pitchFamily="34" charset="0"/>
                           <a:ea typeface="Montserrat" pitchFamily="34" charset="-122"/>
@@ -4351,7 +4351,7 @@
                       <a:tailEnd type="none" w="med" len="med"/>
                     </a:lnB>
                     <a:solidFill>
-                      <a:srgbClr val="F5F3FA"/>
+                      <a:srgbClr val="FFFFFF"/>
                     </a:solidFill>
                   </a:tcPr>
                 </a:tc>
@@ -4506,7 +4506,7 @@
                       <a:r>
                         <a:rPr lang="en-US" sz="1150" b="1" dirty="0">
                           <a:solidFill>
-                            <a:srgbClr val="5A05F4"/>
+                            <a:srgbClr val="000000"/>
                           </a:solidFill>
                           <a:latin typeface="Montserrat" pitchFamily="34" charset="0"/>
                           <a:ea typeface="Montserrat" pitchFamily="34" charset="-122"/>
@@ -4559,7 +4559,7 @@
                       <a:tailEnd type="none" w="med" len="med"/>
                     </a:lnB>
                     <a:solidFill>
-                      <a:srgbClr val="F5F3FA"/>
+                      <a:srgbClr val="FFFFFF"/>
                     </a:solidFill>
                   </a:tcPr>
                 </a:tc>
@@ -4574,7 +4574,7 @@
                       <a:r>
                         <a:rPr lang="en-US" sz="1150" dirty="0">
                           <a:solidFill>
-                            <a:srgbClr val="5A05F4"/>
+                            <a:srgbClr val="000000"/>
                           </a:solidFill>
                           <a:latin typeface="Montserrat" pitchFamily="34" charset="0"/>
                           <a:ea typeface="Montserrat" pitchFamily="34" charset="-122"/>
@@ -4627,7 +4627,7 @@
                       <a:tailEnd type="none" w="med" len="med"/>
                     </a:lnB>
                     <a:solidFill>
-                      <a:srgbClr val="F5F3FA"/>
+                      <a:srgbClr val="FFFFFF"/>
                     </a:solidFill>
                   </a:tcPr>
                 </a:tc>
@@ -4644,7 +4644,7 @@
                       <a:r>
                         <a:rPr lang="en-US" sz="1150" b="1" dirty="0">
                           <a:solidFill>
-                            <a:srgbClr val="106B41"/>
+                            <a:srgbClr val="000000"/>
                           </a:solidFill>
                           <a:latin typeface="Montserrat" pitchFamily="34" charset="0"/>
                           <a:ea typeface="Montserrat" pitchFamily="34" charset="-122"/>
@@ -4697,7 +4697,7 @@
                       <a:tailEnd type="none" w="med" len="med"/>
                     </a:lnB>
                     <a:solidFill>
-                      <a:srgbClr val="F5F3FA"/>
+                      <a:srgbClr val="FFFFFF"/>
                     </a:solidFill>
                   </a:tcPr>
                 </a:tc>
@@ -4712,7 +4712,7 @@
                       <a:r>
                         <a:rPr lang="en-US" sz="1150" dirty="0">
                           <a:solidFill>
-                            <a:srgbClr val="106B41"/>
+                            <a:srgbClr val="000000"/>
                           </a:solidFill>
                           <a:latin typeface="Montserrat" pitchFamily="34" charset="0"/>
                           <a:ea typeface="Montserrat" pitchFamily="34" charset="-122"/>
@@ -4765,7 +4765,7 @@
                       <a:tailEnd type="none" w="med" len="med"/>
                     </a:lnB>
                     <a:solidFill>
-                      <a:srgbClr val="F5F3FA"/>
+                      <a:srgbClr val="FFFFFF"/>
                     </a:solidFill>
                   </a:tcPr>
                 </a:tc>
@@ -4782,7 +4782,7 @@
                       <a:r>
                         <a:rPr lang="en-US" sz="1150" b="1" dirty="0">
                           <a:solidFill>
-                            <a:srgbClr val="5A05F4"/>
+                            <a:srgbClr val="000000"/>
                           </a:solidFill>
                           <a:latin typeface="Montserrat" pitchFamily="34" charset="0"/>
                           <a:ea typeface="Montserrat" pitchFamily="34" charset="-122"/>
@@ -4835,7 +4835,7 @@
                       <a:tailEnd type="none" w="med" len="med"/>
                     </a:lnB>
                     <a:solidFill>
-                      <a:srgbClr val="F5F3FA"/>
+                      <a:srgbClr val="FFFFFF"/>
                     </a:solidFill>
                   </a:tcPr>
                 </a:tc>
@@ -4850,7 +4850,7 @@
                       <a:r>
                         <a:rPr lang="en-US" sz="1150" dirty="0">
                           <a:solidFill>
-                            <a:srgbClr val="5A05F4"/>
+                            <a:srgbClr val="000000"/>
                           </a:solidFill>
                           <a:latin typeface="Montserrat" pitchFamily="34" charset="0"/>
                           <a:ea typeface="Montserrat" pitchFamily="34" charset="-122"/>
@@ -4903,7 +4903,7 @@
                       <a:tailEnd type="none" w="med" len="med"/>
                     </a:lnB>
                     <a:solidFill>
-                      <a:srgbClr val="F5F3FA"/>
+                      <a:srgbClr val="FFFFFF"/>
                     </a:solidFill>
                   </a:tcPr>
                 </a:tc>
@@ -23931,7 +23931,7 @@
                       <a:r>
                         <a:rPr lang="en-US" sz="1150" b="1" dirty="0">
                           <a:solidFill>
-                            <a:srgbClr val="5A05F4"/>
+                            <a:srgbClr val="000000"/>
                           </a:solidFill>
                           <a:latin typeface="Montserrat" pitchFamily="34" charset="0"/>
                           <a:ea typeface="Montserrat" pitchFamily="34" charset="-122"/>
@@ -23984,7 +23984,7 @@
                       <a:tailEnd type="none" w="med" len="med"/>
                     </a:lnB>
                     <a:solidFill>
-                      <a:srgbClr val="F5F3FA"/>
+                      <a:srgbClr val="FFFFFF"/>
                     </a:solidFill>
                   </a:tcPr>
                 </a:tc>
@@ -23999,7 +23999,7 @@
                       <a:r>
                         <a:rPr lang="en-US" sz="1150" dirty="0">
                           <a:solidFill>
-                            <a:srgbClr val="5A05F4"/>
+                            <a:srgbClr val="000000"/>
                           </a:solidFill>
                           <a:latin typeface="Montserrat" pitchFamily="34" charset="0"/>
                           <a:ea typeface="Montserrat" pitchFamily="34" charset="-122"/>
@@ -24052,7 +24052,7 @@
                       <a:tailEnd type="none" w="med" len="med"/>
                     </a:lnB>
                     <a:solidFill>
-                      <a:srgbClr val="F5F3FA"/>
+                      <a:srgbClr val="FFFFFF"/>
                     </a:solidFill>
                   </a:tcPr>
                 </a:tc>
@@ -24067,7 +24067,7 @@
                       <a:r>
                         <a:rPr lang="en-US" sz="1150" dirty="0">
                           <a:solidFill>
-                            <a:srgbClr val="5A05F4"/>
+                            <a:srgbClr val="000000"/>
                           </a:solidFill>
                           <a:latin typeface="Montserrat" pitchFamily="34" charset="0"/>
                           <a:ea typeface="Montserrat" pitchFamily="34" charset="-122"/>
@@ -24120,7 +24120,7 @@
                       <a:tailEnd type="none" w="med" len="med"/>
                     </a:lnB>
                     <a:solidFill>
-                      <a:srgbClr val="F5F3FA"/>
+                      <a:srgbClr val="FFFFFF"/>
                     </a:solidFill>
                   </a:tcPr>
                 </a:tc>
@@ -24137,7 +24137,7 @@
                       <a:r>
                         <a:rPr lang="en-US" sz="1150" b="1" dirty="0">
                           <a:solidFill>
-                            <a:srgbClr val="106B41"/>
+                            <a:srgbClr val="000000"/>
                           </a:solidFill>
                           <a:latin typeface="Montserrat" pitchFamily="34" charset="0"/>
                           <a:ea typeface="Montserrat" pitchFamily="34" charset="-122"/>
@@ -24190,7 +24190,7 @@
                       <a:tailEnd type="none" w="med" len="med"/>
                     </a:lnB>
                     <a:solidFill>
-                      <a:srgbClr val="F5F3FA"/>
+                      <a:srgbClr val="FFFFFF"/>
                     </a:solidFill>
                   </a:tcPr>
                 </a:tc>
@@ -24205,7 +24205,7 @@
                       <a:r>
                         <a:rPr lang="en-US" sz="1150" dirty="0">
                           <a:solidFill>
-                            <a:srgbClr val="106B41"/>
+                            <a:srgbClr val="000000"/>
                           </a:solidFill>
                           <a:latin typeface="Montserrat" pitchFamily="34" charset="0"/>
                           <a:ea typeface="Montserrat" pitchFamily="34" charset="-122"/>
@@ -24258,7 +24258,7 @@
                       <a:tailEnd type="none" w="med" len="med"/>
                     </a:lnB>
                     <a:solidFill>
-                      <a:srgbClr val="F5F3FA"/>
+                      <a:srgbClr val="FFFFFF"/>
                     </a:solidFill>
                   </a:tcPr>
                 </a:tc>
@@ -24273,7 +24273,7 @@
                       <a:r>
                         <a:rPr lang="en-US" sz="1150" dirty="0">
                           <a:solidFill>
-                            <a:srgbClr val="106B41"/>
+                            <a:srgbClr val="000000"/>
                           </a:solidFill>
                           <a:latin typeface="Montserrat" pitchFamily="34" charset="0"/>
                           <a:ea typeface="Montserrat" pitchFamily="34" charset="-122"/>
@@ -24326,7 +24326,7 @@
                       <a:tailEnd type="none" w="med" len="med"/>
                     </a:lnB>
                     <a:solidFill>
-                      <a:srgbClr val="F5F3FA"/>
+                      <a:srgbClr val="FFFFFF"/>
                     </a:solidFill>
                   </a:tcPr>
                 </a:tc>
@@ -24343,7 +24343,7 @@
                       <a:r>
                         <a:rPr lang="en-US" sz="1150" b="1" dirty="0">
                           <a:solidFill>
-                            <a:srgbClr val="5A05F4"/>
+                            <a:srgbClr val="000000"/>
                           </a:solidFill>
                           <a:latin typeface="Montserrat" pitchFamily="34" charset="0"/>
                           <a:ea typeface="Montserrat" pitchFamily="34" charset="-122"/>
@@ -24396,7 +24396,7 @@
                       <a:tailEnd type="none" w="med" len="med"/>
                     </a:lnB>
                     <a:solidFill>
-                      <a:srgbClr val="F5F3FA"/>
+                      <a:srgbClr val="FFFFFF"/>
                     </a:solidFill>
                   </a:tcPr>
                 </a:tc>
@@ -24411,7 +24411,7 @@
                       <a:r>
                         <a:rPr lang="en-US" sz="1150" dirty="0">
                           <a:solidFill>
-                            <a:srgbClr val="5A05F4"/>
+                            <a:srgbClr val="000000"/>
                           </a:solidFill>
                           <a:latin typeface="Montserrat" pitchFamily="34" charset="0"/>
                           <a:ea typeface="Montserrat" pitchFamily="34" charset="-122"/>
@@ -24464,7 +24464,7 @@
                       <a:tailEnd type="none" w="med" len="med"/>
                     </a:lnB>
                     <a:solidFill>
-                      <a:srgbClr val="F5F3FA"/>
+                      <a:srgbClr val="FFFFFF"/>
                     </a:solidFill>
                   </a:tcPr>
                 </a:tc>
@@ -24479,7 +24479,7 @@
                       <a:r>
                         <a:rPr lang="en-US" sz="1150" dirty="0">
                           <a:solidFill>
-                            <a:srgbClr val="5A05F4"/>
+                            <a:srgbClr val="000000"/>
                           </a:solidFill>
                           <a:latin typeface="Montserrat" pitchFamily="34" charset="0"/>
                           <a:ea typeface="Montserrat" pitchFamily="34" charset="-122"/>
@@ -24532,7 +24532,7 @@
                       <a:tailEnd type="none" w="med" len="med"/>
                     </a:lnB>
                     <a:solidFill>
-                      <a:srgbClr val="F5F3FA"/>
+                      <a:srgbClr val="FFFFFF"/>
                     </a:solidFill>
                   </a:tcPr>
                 </a:tc>

--- a/docs/decks/L12.pptx
+++ b/docs/decks/L12.pptx
@@ -4086,7 +4086,7 @@
                     <a:bodyPr/>
                     <a:lstStyle/>
                     <a:p>
-                      <a:pPr indent="0" marL="0">
+                      <a:pPr algn="ctr" indent="0" marL="0">
                         <a:buNone/>
                       </a:pPr>
                       <a:r>
@@ -4154,7 +4154,7 @@
                     <a:bodyPr/>
                     <a:lstStyle/>
                     <a:p>
-                      <a:pPr indent="0" marL="0">
+                      <a:pPr algn="ctr" indent="0" marL="0">
                         <a:buNone/>
                       </a:pPr>
                       <a:r>
@@ -7471,7 +7471,7 @@
                     <a:bodyPr/>
                     <a:lstStyle/>
                     <a:p>
-                      <a:pPr indent="0" marL="0">
+                      <a:pPr algn="ctr" indent="0" marL="0">
                         <a:buNone/>
                       </a:pPr>
                       <a:r>
@@ -7539,7 +7539,7 @@
                     <a:bodyPr/>
                     <a:lstStyle/>
                     <a:p>
-                      <a:pPr indent="0" marL="0">
+                      <a:pPr algn="ctr" indent="0" marL="0">
                         <a:buNone/>
                       </a:pPr>
                       <a:r>
@@ -7607,7 +7607,7 @@
                     <a:bodyPr/>
                     <a:lstStyle/>
                     <a:p>
-                      <a:pPr indent="0" marL="0">
+                      <a:pPr algn="ctr" indent="0" marL="0">
                         <a:buNone/>
                       </a:pPr>
                       <a:r>
@@ -23513,7 +23513,7 @@
                     <a:bodyPr/>
                     <a:lstStyle/>
                     <a:p>
-                      <a:pPr indent="0" marL="0">
+                      <a:pPr algn="ctr" indent="0" marL="0">
                         <a:buNone/>
                       </a:pPr>
                       <a:r>
@@ -23581,7 +23581,7 @@
                     <a:bodyPr/>
                     <a:lstStyle/>
                     <a:p>
-                      <a:pPr indent="0" marL="0">
+                      <a:pPr algn="ctr" indent="0" marL="0">
                         <a:buNone/>
                       </a:pPr>
                       <a:r>
@@ -23649,7 +23649,7 @@
                     <a:bodyPr/>
                     <a:lstStyle/>
                     <a:p>
-                      <a:pPr indent="0" marL="0">
+                      <a:pPr algn="ctr" indent="0" marL="0">
                         <a:buNone/>
                       </a:pPr>
                       <a:r>

--- a/docs/decks/L12.pptx
+++ b/docs/decks/L12.pptx
@@ -4,6 +4,9 @@
   <p:sldMasterIdLst>
     <p:sldMasterId id="2147483648" r:id="rId1"/>
   </p:sldMasterIdLst>
+  <p:notesMasterIdLst>
+    <p:notesMasterId r:id="rId27"/>
+  </p:notesMasterIdLst>
   <p:sldIdLst>
     <p:sldId id="256" r:id="rId2"/>
     <p:sldId id="257" r:id="rId3"/>
@@ -31,9 +34,6 @@
     <p:sldId id="279" r:id="rId25"/>
     <p:sldId id="280" r:id="rId26"/>
   </p:sldIdLst>
-  <p:notesMasterIdLst>
-    <p:notesMasterId r:id="rId27"/>
-  </p:notesMasterIdLst>
   <p:sldSz cx="12192000" cy="6858000"/>
   <p:notesSz cx="6858000" cy="12192000"/>
   <p:defaultTextStyle>
@@ -128,6 +128,11 @@
       </a:defRPr>
     </a:lvl9pPr>
   </p:defaultTextStyle>
+  <p:extLst>
+    <p:ext uri="{EFAFB233-063F-42B5-8137-9DF3F51BA10A}">
+      <p15:sldGuideLst xmlns:p15="http://schemas.microsoft.com/office/powerpoint/2012/main"/>
+    </p:ext>
+  </p:extLst>
 </p:presentation>
 </file>
 
@@ -153,234 +158,10 @@
           <a:chExt cx="0" cy="0"/>
         </a:xfrm>
       </p:grpSpPr>
-      <p:sp>
-        <p:nvSpPr>
-          <p:cNvPr id="2" name="Header Placeholder 1"/>
-          <p:cNvSpPr>
-            <a:spLocks noGrp="1"/>
-          </p:cNvSpPr>
-          <p:nvPr>
-            <p:ph type="hdr" sz="quarter"/>
-          </p:nvPr>
-        </p:nvSpPr>
-        <p:spPr>
-          <a:xfrm>
-            <a:off x="0" y="0"/>
-            <a:ext cx="2971800" cy="458788"/>
-          </a:xfrm>
-          <a:prstGeom prst="rect">
-            <a:avLst/>
-          </a:prstGeom>
-        </p:spPr>
-        <p:txBody>
-          <a:bodyPr vert="horz" lIns="91440" tIns="45720" rIns="91440" bIns="45720" rtlCol="0"/>
-          <a:lstStyle>
-            <a:lvl1pPr algn="l">
-              <a:defRPr sz="1200"/>
-            </a:lvl1pPr>
-          </a:lstStyle>
-          <a:p>
-            <a:endParaRPr lang="en-US"/>
-          </a:p>
-        </p:txBody>
-      </p:sp>
-      <p:sp>
-        <p:nvSpPr>
-          <p:cNvPr id="3" name="Date Placeholder 2"/>
-          <p:cNvSpPr>
-            <a:spLocks noGrp="1"/>
-          </p:cNvSpPr>
-          <p:nvPr>
-            <p:ph type="dt" idx="1"/>
-          </p:nvPr>
-        </p:nvSpPr>
-        <p:spPr>
-          <a:xfrm>
-            <a:off x="3884613" y="0"/>
-            <a:ext cx="2971800" cy="458788"/>
-          </a:xfrm>
-          <a:prstGeom prst="rect">
-            <a:avLst/>
-          </a:prstGeom>
-        </p:spPr>
-        <p:txBody>
-          <a:bodyPr vert="horz" lIns="91440" tIns="45720" rIns="91440" bIns="45720" rtlCol="0"/>
-          <a:lstStyle>
-            <a:lvl1pPr algn="r">
-              <a:defRPr sz="1200"/>
-            </a:lvl1pPr>
-          </a:lstStyle>
-          <a:p>
-            <a:fld id="{5282F153-3F37-0F45-9E97-73ACFA13230C}" type="datetimeFigureOut">
-              <a:rPr lang="en-US"/>
-              <a:t>7/23/19</a:t>
-            </a:fld>
-            <a:endParaRPr lang="en-US"/>
-          </a:p>
-        </p:txBody>
-      </p:sp>
-      <p:sp>
-        <p:nvSpPr>
-          <p:cNvPr id="4" name="Slide Image Placeholder 3"/>
-          <p:cNvSpPr>
-            <a:spLocks noGrp="1" noRot="1" noChangeAspect="1"/>
-          </p:cNvSpPr>
-          <p:nvPr>
-            <p:ph type="sldImg" idx="2"/>
-          </p:nvPr>
-        </p:nvSpPr>
-        <p:spPr>
-          <a:xfrm>
-            <a:off x="685800" y="1143000"/>
-            <a:ext cx="5486400" cy="3086100"/>
-          </a:xfrm>
-          <a:prstGeom prst="rect">
-            <a:avLst/>
-          </a:prstGeom>
-          <a:noFill/>
-          <a:ln w="12700">
-            <a:solidFill>
-              <a:prstClr val="black"/>
-            </a:solidFill>
-          </a:ln>
-        </p:spPr>
-        <p:txBody>
-          <a:bodyPr vert="horz" lIns="91440" tIns="45720" rIns="91440" bIns="45720" rtlCol="0" anchor="ctr"/>
-          <a:lstStyle/>
-          <a:p>
-            <a:endParaRPr lang="en-US"/>
-          </a:p>
-        </p:txBody>
-      </p:sp>
-      <p:sp>
-        <p:nvSpPr>
-          <p:cNvPr id="5" name="Notes Placeholder 4"/>
-          <p:cNvSpPr>
-            <a:spLocks noGrp="1"/>
-          </p:cNvSpPr>
-          <p:nvPr>
-            <p:ph type="body" sz="quarter" idx="3"/>
-          </p:nvPr>
-        </p:nvSpPr>
-        <p:spPr>
-          <a:xfrm>
-            <a:off x="685800" y="4400550"/>
-            <a:ext cx="5486400" cy="3600450"/>
-          </a:xfrm>
-          <a:prstGeom prst="rect">
-            <a:avLst/>
-          </a:prstGeom>
-        </p:spPr>
-        <p:txBody>
-          <a:bodyPr vert="horz" lIns="91440" tIns="45720" rIns="91440" bIns="45720" rtlCol="0"/>
-          <a:lstStyle/>
-          <a:p>
-            <a:pPr lvl="0"/>
-            <a:r>
-              <a:rPr lang="en-US"/>
-              <a:t>Click to edit Master text styles</a:t>
-            </a:r>
-          </a:p>
-          <a:p>
-            <a:pPr lvl="1"/>
-            <a:r>
-              <a:rPr lang="en-US"/>
-              <a:t>Second level</a:t>
-            </a:r>
-          </a:p>
-          <a:p>
-            <a:pPr lvl="2"/>
-            <a:r>
-              <a:rPr lang="en-US"/>
-              <a:t>Third level</a:t>
-            </a:r>
-          </a:p>
-          <a:p>
-            <a:pPr lvl="3"/>
-            <a:r>
-              <a:rPr lang="en-US"/>
-              <a:t>Fourth level</a:t>
-            </a:r>
-          </a:p>
-          <a:p>
-            <a:pPr lvl="4"/>
-            <a:r>
-              <a:rPr lang="en-US"/>
-              <a:t>Fifth level</a:t>
-            </a:r>
-          </a:p>
-        </p:txBody>
-      </p:sp>
-      <p:sp>
-        <p:nvSpPr>
-          <p:cNvPr id="6" name="Footer Placeholder 5"/>
-          <p:cNvSpPr>
-            <a:spLocks noGrp="1"/>
-          </p:cNvSpPr>
-          <p:nvPr>
-            <p:ph type="ftr" sz="quarter" idx="4"/>
-          </p:nvPr>
-        </p:nvSpPr>
-        <p:spPr>
-          <a:xfrm>
-            <a:off x="0" y="8685213"/>
-            <a:ext cx="2971800" cy="458787"/>
-          </a:xfrm>
-          <a:prstGeom prst="rect">
-            <a:avLst/>
-          </a:prstGeom>
-        </p:spPr>
-        <p:txBody>
-          <a:bodyPr vert="horz" lIns="91440" tIns="45720" rIns="91440" bIns="45720" rtlCol="0" anchor="b"/>
-          <a:lstStyle>
-            <a:lvl1pPr algn="l">
-              <a:defRPr sz="1200"/>
-            </a:lvl1pPr>
-          </a:lstStyle>
-          <a:p>
-            <a:endParaRPr lang="en-US"/>
-          </a:p>
-        </p:txBody>
-      </p:sp>
-      <p:sp>
-        <p:nvSpPr>
-          <p:cNvPr id="7" name="Slide Number Placeholder 6"/>
-          <p:cNvSpPr>
-            <a:spLocks noGrp="1"/>
-          </p:cNvSpPr>
-          <p:nvPr>
-            <p:ph type="sldNum" sz="quarter" idx="5"/>
-          </p:nvPr>
-        </p:nvSpPr>
-        <p:spPr>
-          <a:xfrm>
-            <a:off x="3884613" y="8685213"/>
-            <a:ext cx="2971800" cy="458787"/>
-          </a:xfrm>
-          <a:prstGeom prst="rect">
-            <a:avLst/>
-          </a:prstGeom>
-        </p:spPr>
-        <p:txBody>
-          <a:bodyPr vert="horz" lIns="91440" tIns="45720" rIns="91440" bIns="45720" rtlCol="0" anchor="b"/>
-          <a:lstStyle>
-            <a:lvl1pPr algn="r">
-              <a:defRPr sz="1200"/>
-            </a:lvl1pPr>
-          </a:lstStyle>
-          <a:p>
-            <a:fld id="{CE5E9CC1-C706-0F49-92D6-E571CC5EEA8F}" type="slidenum">
-              <a:rPr lang="en-US"/>
-              <a:t>‹#›</a:t>
-            </a:fld>
-            <a:endParaRPr lang="en-US"/>
-          </a:p>
-        </p:txBody>
-      </p:sp>
     </p:spTree>
     <p:extLst>
       <p:ext uri="{BB962C8B-B14F-4D97-AF65-F5344CB8AC3E}">
-        <p14:creationId xmlns:p14="http://schemas.microsoft.com/office/powerpoint/2010/main" val="1024086991"/>
+        <p14:creationId xmlns:p14="http://schemas.microsoft.com/office/powerpoint/2010/main" val="3925313347"/>
       </p:ext>
     </p:extLst>
   </p:cSld>
@@ -524,10 +305,6 @@
           <a:bodyPr/>
           <a:lstStyle/>
           <a:p>
-            <a:r>
-              <a:rPr lang="en-US" dirty="0"/>
-              <a:t/>
-            </a:r>
             <a:endParaRPr lang="en-US" dirty="0"/>
           </a:p>
         </p:txBody>
@@ -612,10 +389,6 @@
           <a:bodyPr/>
           <a:lstStyle/>
           <a:p>
-            <a:r>
-              <a:rPr lang="en-US" dirty="0"/>
-              <a:t/>
-            </a:r>
             <a:endParaRPr lang="en-US" dirty="0"/>
           </a:p>
         </p:txBody>
@@ -700,10 +473,6 @@
           <a:bodyPr/>
           <a:lstStyle/>
           <a:p>
-            <a:r>
-              <a:rPr lang="en-US" dirty="0"/>
-              <a:t/>
-            </a:r>
             <a:endParaRPr lang="en-US" dirty="0"/>
           </a:p>
         </p:txBody>
@@ -788,10 +557,6 @@
           <a:bodyPr/>
           <a:lstStyle/>
           <a:p>
-            <a:r>
-              <a:rPr lang="en-US" dirty="0"/>
-              <a:t/>
-            </a:r>
             <a:endParaRPr lang="en-US" dirty="0"/>
           </a:p>
         </p:txBody>
@@ -876,10 +641,6 @@
           <a:bodyPr/>
           <a:lstStyle/>
           <a:p>
-            <a:r>
-              <a:rPr lang="en-US" dirty="0"/>
-              <a:t/>
-            </a:r>
             <a:endParaRPr lang="en-US" dirty="0"/>
           </a:p>
         </p:txBody>
@@ -964,10 +725,6 @@
           <a:bodyPr/>
           <a:lstStyle/>
           <a:p>
-            <a:r>
-              <a:rPr lang="en-US" dirty="0"/>
-              <a:t/>
-            </a:r>
             <a:endParaRPr lang="en-US" dirty="0"/>
           </a:p>
         </p:txBody>
@@ -1052,10 +809,6 @@
           <a:bodyPr/>
           <a:lstStyle/>
           <a:p>
-            <a:r>
-              <a:rPr lang="en-US" dirty="0"/>
-              <a:t/>
-            </a:r>
             <a:endParaRPr lang="en-US" dirty="0"/>
           </a:p>
         </p:txBody>
@@ -1140,10 +893,6 @@
           <a:bodyPr/>
           <a:lstStyle/>
           <a:p>
-            <a:r>
-              <a:rPr lang="en-US" dirty="0"/>
-              <a:t/>
-            </a:r>
             <a:endParaRPr lang="en-US" dirty="0"/>
           </a:p>
         </p:txBody>
@@ -1228,10 +977,6 @@
           <a:bodyPr/>
           <a:lstStyle/>
           <a:p>
-            <a:r>
-              <a:rPr lang="en-US" dirty="0"/>
-              <a:t/>
-            </a:r>
             <a:endParaRPr lang="en-US" dirty="0"/>
           </a:p>
         </p:txBody>
@@ -1316,10 +1061,6 @@
           <a:bodyPr/>
           <a:lstStyle/>
           <a:p>
-            <a:r>
-              <a:rPr lang="en-US" dirty="0"/>
-              <a:t/>
-            </a:r>
             <a:endParaRPr lang="en-US" dirty="0"/>
           </a:p>
         </p:txBody>
@@ -1404,10 +1145,6 @@
           <a:bodyPr/>
           <a:lstStyle/>
           <a:p>
-            <a:r>
-              <a:rPr lang="en-US" dirty="0"/>
-              <a:t/>
-            </a:r>
             <a:endParaRPr lang="en-US" dirty="0"/>
           </a:p>
         </p:txBody>
@@ -1492,10 +1229,6 @@
           <a:bodyPr/>
           <a:lstStyle/>
           <a:p>
-            <a:r>
-              <a:rPr lang="en-US" dirty="0"/>
-              <a:t/>
-            </a:r>
             <a:endParaRPr lang="en-US" dirty="0"/>
           </a:p>
         </p:txBody>
@@ -1580,10 +1313,6 @@
           <a:bodyPr/>
           <a:lstStyle/>
           <a:p>
-            <a:r>
-              <a:rPr lang="en-US" dirty="0"/>
-              <a:t/>
-            </a:r>
             <a:endParaRPr lang="en-US" dirty="0"/>
           </a:p>
         </p:txBody>
@@ -1668,10 +1397,6 @@
           <a:bodyPr/>
           <a:lstStyle/>
           <a:p>
-            <a:r>
-              <a:rPr lang="en-US" dirty="0"/>
-              <a:t/>
-            </a:r>
             <a:endParaRPr lang="en-US" dirty="0"/>
           </a:p>
         </p:txBody>
@@ -1756,10 +1481,6 @@
           <a:bodyPr/>
           <a:lstStyle/>
           <a:p>
-            <a:r>
-              <a:rPr lang="en-US" dirty="0"/>
-              <a:t/>
-            </a:r>
             <a:endParaRPr lang="en-US" dirty="0"/>
           </a:p>
         </p:txBody>
@@ -1844,10 +1565,6 @@
           <a:bodyPr/>
           <a:lstStyle/>
           <a:p>
-            <a:r>
-              <a:rPr lang="en-US" dirty="0"/>
-              <a:t/>
-            </a:r>
             <a:endParaRPr lang="en-US" dirty="0"/>
           </a:p>
         </p:txBody>
@@ -1932,10 +1649,6 @@
           <a:bodyPr/>
           <a:lstStyle/>
           <a:p>
-            <a:r>
-              <a:rPr lang="en-US" dirty="0"/>
-              <a:t/>
-            </a:r>
             <a:endParaRPr lang="en-US" dirty="0"/>
           </a:p>
         </p:txBody>
@@ -2020,10 +1733,6 @@
           <a:bodyPr/>
           <a:lstStyle/>
           <a:p>
-            <a:r>
-              <a:rPr lang="en-US" dirty="0"/>
-              <a:t/>
-            </a:r>
             <a:endParaRPr lang="en-US" dirty="0"/>
           </a:p>
         </p:txBody>
@@ -2108,10 +1817,6 @@
           <a:bodyPr/>
           <a:lstStyle/>
           <a:p>
-            <a:r>
-              <a:rPr lang="en-US" dirty="0"/>
-              <a:t/>
-            </a:r>
             <a:endParaRPr lang="en-US" dirty="0"/>
           </a:p>
         </p:txBody>
@@ -2196,10 +1901,6 @@
           <a:bodyPr/>
           <a:lstStyle/>
           <a:p>
-            <a:r>
-              <a:rPr lang="en-US" dirty="0"/>
-              <a:t/>
-            </a:r>
             <a:endParaRPr lang="en-US" dirty="0"/>
           </a:p>
         </p:txBody>
@@ -2284,10 +1985,6 @@
           <a:bodyPr/>
           <a:lstStyle/>
           <a:p>
-            <a:r>
-              <a:rPr lang="en-US" dirty="0"/>
-              <a:t/>
-            </a:r>
             <a:endParaRPr lang="en-US" dirty="0"/>
           </a:p>
         </p:txBody>
@@ -2372,10 +2069,6 @@
           <a:bodyPr/>
           <a:lstStyle/>
           <a:p>
-            <a:r>
-              <a:rPr lang="en-US" dirty="0"/>
-              <a:t/>
-            </a:r>
             <a:endParaRPr lang="en-US" dirty="0"/>
           </a:p>
         </p:txBody>
@@ -2460,10 +2153,6 @@
           <a:bodyPr/>
           <a:lstStyle/>
           <a:p>
-            <a:r>
-              <a:rPr lang="en-US" dirty="0"/>
-              <a:t/>
-            </a:r>
             <a:endParaRPr lang="en-US" dirty="0"/>
           </a:p>
         </p:txBody>
@@ -2548,10 +2237,6 @@
           <a:bodyPr/>
           <a:lstStyle/>
           <a:p>
-            <a:r>
-              <a:rPr lang="en-US" dirty="0"/>
-              <a:t/>
-            </a:r>
             <a:endParaRPr lang="en-US" dirty="0"/>
           </a:p>
         </p:txBody>
@@ -2636,10 +2321,6 @@
           <a:bodyPr/>
           <a:lstStyle/>
           <a:p>
-            <a:r>
-              <a:rPr lang="en-US" dirty="0"/>
-              <a:t/>
-            </a:r>
             <a:endParaRPr lang="en-US" dirty="0"/>
           </a:p>
         </p:txBody>
@@ -2722,7 +2403,7 @@
           </a:prstGeom>
           <a:extLst>
             <a:ext uri="{C572A759-6A51-4108-AA02-DFA0A04FC94B}">
-              <ma14:wrappingTextBoxFlag xmlns:ma14="http://schemas.microsoft.com/office/mac/drawingml/2011/main" val="0"/>
+              <ma14:wrappingTextBoxFlag xmlns:ma14="http://schemas.microsoft.com/office/mac/drawingml/2011/main" xmlns="" val="0"/>
             </a:ext>
           </a:extLst>
         </p:spPr>
@@ -2743,8 +2424,8 @@
           <a:p>
             <a:pPr algn="l"/>
             <a:fld id="{F7021451-1387-4CA6-816F-3879F97B5CBC}" type="slidenum">
-              <a:rPr b="0" lang="en-US"/>
-              <a:t>1000</a:t>
+              <a:rPr lang="en-US" b="0"/>
+              <a:t>‹#›</a:t>
             </a:fld>
             <a:endParaRPr lang="en-US"/>
           </a:p>
@@ -2766,6 +2447,7 @@
         <a:solidFill>
           <a:srgbClr val="000000"/>
         </a:solidFill>
+        <a:effectLst/>
       </p:bgPr>
     </p:bg>
     <p:spTree>
@@ -2784,14 +2466,14 @@
       </p:grpSpPr>
       <p:pic>
         <p:nvPicPr>
-          <p:cNvPr id="2" name="Image 0" descr="preencoded.png">    </p:cNvPr>
+          <p:cNvPr id="2" name="Image 0" descr="preencoded.png"/>
           <p:cNvPicPr>
             <a:picLocks noChangeAspect="1"/>
           </p:cNvPicPr>
           <p:nvPr/>
         </p:nvPicPr>
         <p:blipFill>
-          <a:blip r:embed="rId1"/>
+          <a:blip r:embed="rId2"/>
           <a:stretch>
             <a:fillRect/>
           </a:stretch>
@@ -2822,6 +2504,7 @@
         <a:solidFill>
           <a:srgbClr val="000000"/>
         </a:solidFill>
+        <a:effectLst/>
       </p:bgPr>
     </p:bg>
     <p:spTree>
@@ -2840,14 +2523,14 @@
       </p:grpSpPr>
       <p:pic>
         <p:nvPicPr>
-          <p:cNvPr id="2" name="Image 0" descr="preencoded.png">    </p:cNvPr>
+          <p:cNvPr id="2" name="Image 0" descr="preencoded.png"/>
           <p:cNvPicPr>
             <a:picLocks noChangeAspect="1"/>
           </p:cNvPicPr>
           <p:nvPr/>
         </p:nvPicPr>
         <p:blipFill>
-          <a:blip r:embed="rId1"/>
+          <a:blip r:embed="rId2"/>
           <a:stretch>
             <a:fillRect/>
           </a:stretch>
@@ -2878,6 +2561,7 @@
         <a:solidFill>
           <a:srgbClr val="000000"/>
         </a:solidFill>
+        <a:effectLst/>
       </p:bgPr>
     </p:bg>
     <p:spTree>
@@ -2896,14 +2580,14 @@
       </p:grpSpPr>
       <p:pic>
         <p:nvPicPr>
-          <p:cNvPr id="2" name="Image 0" descr="preencoded.png">    </p:cNvPr>
+          <p:cNvPr id="2" name="Image 0" descr="preencoded.png"/>
           <p:cNvPicPr>
             <a:picLocks noChangeAspect="1"/>
           </p:cNvPicPr>
           <p:nvPr/>
         </p:nvPicPr>
         <p:blipFill>
-          <a:blip r:embed="rId1"/>
+          <a:blip r:embed="rId2"/>
           <a:stretch>
             <a:fillRect/>
           </a:stretch>
@@ -2929,6 +2613,11 @@
 <file path=ppt/slideMasters/slideMaster1.xml><?xml version="1.0" encoding="utf-8"?>
 <p:sldMaster xmlns:a="http://schemas.openxmlformats.org/drawingml/2006/main" xmlns:r="http://schemas.openxmlformats.org/officeDocument/2006/relationships" xmlns:p="http://schemas.openxmlformats.org/presentationml/2006/main">
   <p:cSld>
+    <p:bg>
+      <p:bgRef idx="1001">
+        <a:schemeClr val="bg1"/>
+      </p:bgRef>
+    </p:bg>
     <p:spTree>
       <p:nvGrpSpPr>
         <p:cNvPr id="1" name=""/>
@@ -2963,7 +2652,7 @@
           </a:prstGeom>
           <a:extLst>
             <a:ext uri="{C572A759-6A51-4108-AA02-DFA0A04FC94B}">
-              <ma14:wrappingTextBoxFlag xmlns:ma14="http://schemas.microsoft.com/office/mac/drawingml/2011/main" val="0"/>
+              <ma14:wrappingTextBoxFlag xmlns:ma14="http://schemas.microsoft.com/office/mac/drawingml/2011/main" xmlns="" val="0"/>
             </a:ext>
           </a:extLst>
         </p:spPr>
@@ -2984,8 +2673,8 @@
           <a:p>
             <a:pPr algn="l"/>
             <a:fld id="{F7021451-1387-4CA6-816F-3879F97B5CBC}" type="slidenum">
-              <a:rPr b="0" lang="en-US"/>
-              <a:t>null</a:t>
+              <a:rPr lang="en-US" b="0"/>
+              <a:t>‹#›</a:t>
             </a:fld>
             <a:endParaRPr lang="en-US"/>
           </a:p>
@@ -3292,11 +2981,11 @@
           <a:bodyPr wrap="square" lIns="0" tIns="0" rIns="0" bIns="0" rtlCol="0" anchor="ctr"/>
           <a:lstStyle/>
           <a:p>
-            <a:pPr indent="0" marL="0">
-              <a:buNone/>
-            </a:pPr>
-            <a:r>
-              <a:rPr lang="en-US" sz="1200" b="1" spc="400" kern="0" dirty="0">
+            <a:pPr marL="0" indent="0">
+              <a:buNone/>
+            </a:pPr>
+            <a:r>
+              <a:rPr lang="en-US" sz="1200" b="1" kern="0" spc="400" dirty="0">
                 <a:solidFill>
                   <a:srgbClr val="FFFFFF"/>
                 </a:solidFill>
@@ -3331,11 +3020,11 @@
           <a:bodyPr wrap="square" lIns="0" tIns="0" rIns="0" bIns="0" rtlCol="0" anchor="ctr"/>
           <a:lstStyle/>
           <a:p>
-            <a:pPr indent="0" marL="0">
-              <a:buNone/>
-            </a:pPr>
-            <a:r>
-              <a:rPr lang="en-US" sz="1200" b="1" spc="300" kern="0" dirty="0">
+            <a:pPr marL="0" indent="0">
+              <a:buNone/>
+            </a:pPr>
+            <a:r>
+              <a:rPr lang="en-US" sz="1200" b="1" kern="0" spc="300" dirty="0">
                 <a:solidFill>
                   <a:srgbClr val="C4B3F5"/>
                 </a:solidFill>
@@ -3370,7 +3059,7 @@
           <a:bodyPr wrap="square" lIns="0" tIns="0" rIns="0" bIns="0" rtlCol="0" anchor="t"/>
           <a:lstStyle/>
           <a:p>
-            <a:pPr indent="0" marL="0">
+            <a:pPr marL="0" indent="0">
               <a:lnSpc>
                 <a:spcPct val="102000"/>
               </a:lnSpc>
@@ -3390,7 +3079,7 @@
             <a:endParaRPr lang="en-US" sz="3600" dirty="0"/>
           </a:p>
           <a:p>
-            <a:pPr indent="0" marL="0">
+            <a:pPr marL="0" indent="0">
               <a:lnSpc>
                 <a:spcPct val="102000"/>
               </a:lnSpc>
@@ -3432,7 +3121,7 @@
           <a:bodyPr wrap="square" lIns="0" tIns="0" rIns="0" bIns="0" rtlCol="0" anchor="ctr"/>
           <a:lstStyle/>
           <a:p>
-            <a:pPr indent="0" marL="0">
+            <a:pPr marL="0" indent="0">
               <a:lnSpc>
                 <a:spcPct val="120000"/>
               </a:lnSpc>
@@ -3500,7 +3189,7 @@
           <a:bodyPr wrap="square" lIns="0" tIns="0" rIns="0" bIns="0" rtlCol="0" anchor="ctr"/>
           <a:lstStyle/>
           <a:p>
-            <a:pPr algn="ctr" indent="0" marL="0">
+            <a:pPr marL="0" indent="0" algn="ctr">
               <a:buNone/>
             </a:pPr>
             <a:r>
@@ -3565,7 +3254,7 @@
           <a:bodyPr wrap="square" lIns="0" tIns="0" rIns="0" bIns="0" rtlCol="0" anchor="ctr"/>
           <a:lstStyle/>
           <a:p>
-            <a:pPr algn="ctr" indent="0" marL="0">
+            <a:pPr marL="0" indent="0" algn="ctr">
               <a:buNone/>
             </a:pPr>
             <a:r>
@@ -3630,7 +3319,7 @@
           <a:bodyPr wrap="square" lIns="0" tIns="0" rIns="0" bIns="0" rtlCol="0" anchor="ctr"/>
           <a:lstStyle/>
           <a:p>
-            <a:pPr algn="ctr" indent="0" marL="0">
+            <a:pPr marL="0" indent="0" algn="ctr">
               <a:buNone/>
             </a:pPr>
             <a:r>
@@ -3695,7 +3384,7 @@
           <a:bodyPr wrap="square" lIns="0" tIns="0" rIns="0" bIns="0" rtlCol="0" anchor="ctr"/>
           <a:lstStyle/>
           <a:p>
-            <a:pPr algn="ctr" indent="0" marL="0">
+            <a:pPr marL="0" indent="0" algn="ctr">
               <a:buNone/>
             </a:pPr>
             <a:r>
@@ -3760,7 +3449,7 @@
           <a:bodyPr wrap="square" lIns="0" tIns="0" rIns="0" bIns="0" rtlCol="0" anchor="ctr"/>
           <a:lstStyle/>
           <a:p>
-            <a:pPr algn="ctr" indent="0" marL="0">
+            <a:pPr marL="0" indent="0" algn="ctr">
               <a:buNone/>
             </a:pPr>
             <a:r>
@@ -3821,7 +3510,7 @@
           <a:bodyPr wrap="square" lIns="0" tIns="0" rIns="0" bIns="0" rtlCol="0" anchor="ctr"/>
           <a:lstStyle/>
           <a:p>
-            <a:pPr algn="ctr" indent="0" marL="0">
+            <a:pPr marL="0" indent="0" algn="ctr">
               <a:buNone/>
             </a:pPr>
             <a:r>
@@ -3907,7 +3596,7 @@
           <a:bodyPr wrap="square" lIns="0" tIns="0" rIns="0" bIns="0" rtlCol="0" anchor="ctr"/>
           <a:lstStyle/>
           <a:p>
-            <a:pPr algn="l" indent="0" marL="0">
+            <a:pPr marL="0" indent="0" algn="l">
               <a:buNone/>
             </a:pPr>
             <a:r>
@@ -3946,7 +3635,7 @@
           <a:bodyPr wrap="square" lIns="0" tIns="0" rIns="0" bIns="0" rtlCol="0" anchor="ctr"/>
           <a:lstStyle/>
           <a:p>
-            <a:pPr indent="0" marL="0">
+            <a:pPr marL="0" indent="0">
               <a:buNone/>
             </a:pPr>
             <a:r>
@@ -4012,11 +3701,11 @@
           <a:bodyPr wrap="square" lIns="0" tIns="0" rIns="0" bIns="0" rtlCol="0" anchor="ctr"/>
           <a:lstStyle/>
           <a:p>
-            <a:pPr algn="ctr" indent="0" marL="0">
-              <a:buNone/>
-            </a:pPr>
-            <a:r>
-              <a:rPr lang="en-US" sz="900" b="1" spc="100" kern="0" dirty="0">
+            <a:pPr marL="0" indent="0" algn="ctr">
+              <a:buNone/>
+            </a:pPr>
+            <a:r>
+              <a:rPr lang="en-US" sz="900" b="1" kern="0" spc="100" dirty="0">
                 <a:solidFill>
                   <a:srgbClr val="5A05F4"/>
                 </a:solidFill>
@@ -4032,14 +3721,14 @@
       </p:sp>
       <p:pic>
         <p:nvPicPr>
-          <p:cNvPr id="7" name="Image 0" descr="preencoded.png">    </p:cNvPr>
+          <p:cNvPr id="7" name="Image 0" descr="preencoded.png"/>
           <p:cNvPicPr>
             <a:picLocks noChangeAspect="1"/>
           </p:cNvPicPr>
           <p:nvPr/>
         </p:nvPicPr>
         <p:blipFill>
-          <a:blip r:embed="rId1"/>
+          <a:blip r:embed="rId3"/>
           <a:stretch>
             <a:fillRect/>
           </a:stretch>
@@ -4070,15 +3759,27 @@
         </p:nvGraphicFramePr>
         <p:xfrm>
           <a:off x="566928" y="1737360"/>
-          <a:ext cx="11064240" cy="914400"/>
+          <a:ext cx="11064240" cy="3328416"/>
         </p:xfrm>
         <a:graphic>
           <a:graphicData uri="http://schemas.openxmlformats.org/drawingml/2006/table">
             <a:tbl>
               <a:tblPr/>
               <a:tblGrid>
-                <a:gridCol w="4572000"/>
-                <a:gridCol w="6492240"/>
+                <a:gridCol w="4572000">
+                  <a:extLst>
+                    <a:ext uri="{9D8B030D-6E8A-4147-A177-3AD203B41FA5}">
+                      <a16:colId xmlns:a16="http://schemas.microsoft.com/office/drawing/2014/main" val="20000"/>
+                    </a:ext>
+                  </a:extLst>
+                </a:gridCol>
+                <a:gridCol w="6492240">
+                  <a:extLst>
+                    <a:ext uri="{9D8B030D-6E8A-4147-A177-3AD203B41FA5}">
+                      <a16:colId xmlns:a16="http://schemas.microsoft.com/office/drawing/2014/main" val="20001"/>
+                    </a:ext>
+                  </a:extLst>
+                </a:gridCol>
               </a:tblGrid>
               <a:tr h="475488">
                 <a:tc>
@@ -4086,11 +3787,11 @@
                     <a:bodyPr/>
                     <a:lstStyle/>
                     <a:p>
-                      <a:pPr algn="ctr" indent="0" marL="0">
+                      <a:pPr marL="0" indent="0" algn="ctr">
                         <a:buNone/>
                       </a:pPr>
                       <a:r>
-                        <a:rPr lang="en-US" sz="900" b="1" spc="100" kern="0" dirty="0">
+                        <a:rPr lang="en-US" sz="900" b="1" kern="0" spc="100" dirty="0">
                           <a:solidFill>
                             <a:srgbClr val="FFFFFF"/>
                           </a:solidFill>
@@ -4154,11 +3855,11 @@
                     <a:bodyPr/>
                     <a:lstStyle/>
                     <a:p>
-                      <a:pPr algn="ctr" indent="0" marL="0">
+                      <a:pPr marL="0" indent="0" algn="ctr">
                         <a:buNone/>
                       </a:pPr>
                       <a:r>
-                        <a:rPr lang="en-US" sz="900" b="1" spc="100" kern="0" dirty="0">
+                        <a:rPr lang="en-US" sz="900" b="1" kern="0" spc="100" dirty="0">
                           <a:solidFill>
                             <a:srgbClr val="FFFFFF"/>
                           </a:solidFill>
@@ -4217,6 +3918,11 @@
                     </a:solidFill>
                   </a:tcPr>
                 </a:tc>
+                <a:extLst>
+                  <a:ext uri="{0D108BD9-81ED-4DB2-BD59-A6C34878D82A}">
+                    <a16:rowId xmlns:a16="http://schemas.microsoft.com/office/drawing/2014/main" val="10000"/>
+                  </a:ext>
+                </a:extLst>
               </a:tr>
               <a:tr h="475488">
                 <a:tc>
@@ -4224,7 +3930,7 @@
                     <a:bodyPr/>
                     <a:lstStyle/>
                     <a:p>
-                      <a:pPr indent="0" marL="0">
+                      <a:pPr marL="0" indent="0">
                         <a:buNone/>
                       </a:pPr>
                       <a:r>
@@ -4292,7 +3998,7 @@
                     <a:bodyPr/>
                     <a:lstStyle/>
                     <a:p>
-                      <a:pPr indent="0" marL="0">
+                      <a:pPr marL="0" indent="0">
                         <a:buNone/>
                       </a:pPr>
                       <a:r>
@@ -4355,6 +4061,11 @@
                     </a:solidFill>
                   </a:tcPr>
                 </a:tc>
+                <a:extLst>
+                  <a:ext uri="{0D108BD9-81ED-4DB2-BD59-A6C34878D82A}">
+                    <a16:rowId xmlns:a16="http://schemas.microsoft.com/office/drawing/2014/main" val="10001"/>
+                  </a:ext>
+                </a:extLst>
               </a:tr>
               <a:tr h="475488">
                 <a:tc>
@@ -4362,7 +4073,7 @@
                     <a:bodyPr/>
                     <a:lstStyle/>
                     <a:p>
-                      <a:pPr indent="0" marL="0">
+                      <a:pPr marL="0" indent="0">
                         <a:buNone/>
                       </a:pPr>
                       <a:r>
@@ -4430,7 +4141,7 @@
                     <a:bodyPr/>
                     <a:lstStyle/>
                     <a:p>
-                      <a:pPr indent="0" marL="0">
+                      <a:pPr marL="0" indent="0">
                         <a:buNone/>
                       </a:pPr>
                       <a:r>
@@ -4493,6 +4204,11 @@
                     </a:solidFill>
                   </a:tcPr>
                 </a:tc>
+                <a:extLst>
+                  <a:ext uri="{0D108BD9-81ED-4DB2-BD59-A6C34878D82A}">
+                    <a16:rowId xmlns:a16="http://schemas.microsoft.com/office/drawing/2014/main" val="10002"/>
+                  </a:ext>
+                </a:extLst>
               </a:tr>
               <a:tr h="475488">
                 <a:tc>
@@ -4500,7 +4216,7 @@
                     <a:bodyPr/>
                     <a:lstStyle/>
                     <a:p>
-                      <a:pPr indent="0" marL="0">
+                      <a:pPr marL="0" indent="0">
                         <a:buNone/>
                       </a:pPr>
                       <a:r>
@@ -4568,7 +4284,7 @@
                     <a:bodyPr/>
                     <a:lstStyle/>
                     <a:p>
-                      <a:pPr indent="0" marL="0">
+                      <a:pPr marL="0" indent="0">
                         <a:buNone/>
                       </a:pPr>
                       <a:r>
@@ -4631,6 +4347,11 @@
                     </a:solidFill>
                   </a:tcPr>
                 </a:tc>
+                <a:extLst>
+                  <a:ext uri="{0D108BD9-81ED-4DB2-BD59-A6C34878D82A}">
+                    <a16:rowId xmlns:a16="http://schemas.microsoft.com/office/drawing/2014/main" val="10003"/>
+                  </a:ext>
+                </a:extLst>
               </a:tr>
               <a:tr h="475488">
                 <a:tc>
@@ -4638,7 +4359,7 @@
                     <a:bodyPr/>
                     <a:lstStyle/>
                     <a:p>
-                      <a:pPr indent="0" marL="0">
+                      <a:pPr marL="0" indent="0">
                         <a:buNone/>
                       </a:pPr>
                       <a:r>
@@ -4706,7 +4427,7 @@
                     <a:bodyPr/>
                     <a:lstStyle/>
                     <a:p>
-                      <a:pPr indent="0" marL="0">
+                      <a:pPr marL="0" indent="0">
                         <a:buNone/>
                       </a:pPr>
                       <a:r>
@@ -4769,6 +4490,11 @@
                     </a:solidFill>
                   </a:tcPr>
                 </a:tc>
+                <a:extLst>
+                  <a:ext uri="{0D108BD9-81ED-4DB2-BD59-A6C34878D82A}">
+                    <a16:rowId xmlns:a16="http://schemas.microsoft.com/office/drawing/2014/main" val="10004"/>
+                  </a:ext>
+                </a:extLst>
               </a:tr>
               <a:tr h="475488">
                 <a:tc>
@@ -4776,7 +4502,7 @@
                     <a:bodyPr/>
                     <a:lstStyle/>
                     <a:p>
-                      <a:pPr indent="0" marL="0">
+                      <a:pPr marL="0" indent="0">
                         <a:buNone/>
                       </a:pPr>
                       <a:r>
@@ -4844,7 +4570,7 @@
                     <a:bodyPr/>
                     <a:lstStyle/>
                     <a:p>
-                      <a:pPr indent="0" marL="0">
+                      <a:pPr marL="0" indent="0">
                         <a:buNone/>
                       </a:pPr>
                       <a:r>
@@ -4907,6 +4633,11 @@
                     </a:solidFill>
                   </a:tcPr>
                 </a:tc>
+                <a:extLst>
+                  <a:ext uri="{0D108BD9-81ED-4DB2-BD59-A6C34878D82A}">
+                    <a16:rowId xmlns:a16="http://schemas.microsoft.com/office/drawing/2014/main" val="10005"/>
+                  </a:ext>
+                </a:extLst>
               </a:tr>
               <a:tr h="475488">
                 <a:tc>
@@ -4914,7 +4645,7 @@
                     <a:bodyPr/>
                     <a:lstStyle/>
                     <a:p>
-                      <a:pPr indent="0" marL="0">
+                      <a:pPr marL="0" indent="0">
                         <a:buNone/>
                       </a:pPr>
                       <a:r>
@@ -4982,7 +4713,7 @@
                     <a:bodyPr/>
                     <a:lstStyle/>
                     <a:p>
-                      <a:pPr indent="0" marL="0">
+                      <a:pPr marL="0" indent="0">
                         <a:buNone/>
                       </a:pPr>
                       <a:r>
@@ -5045,6 +4776,11 @@
                     </a:solidFill>
                   </a:tcPr>
                 </a:tc>
+                <a:extLst>
+                  <a:ext uri="{0D108BD9-81ED-4DB2-BD59-A6C34878D82A}">
+                    <a16:rowId xmlns:a16="http://schemas.microsoft.com/office/drawing/2014/main" val="10006"/>
+                  </a:ext>
+                </a:extLst>
               </a:tr>
             </a:tbl>
           </a:graphicData>
@@ -5098,11 +4834,11 @@
           <a:bodyPr wrap="square" lIns="0" tIns="0" rIns="0" bIns="0" rtlCol="0" anchor="ctr"/>
           <a:lstStyle/>
           <a:p>
-            <a:pPr indent="0" marL="0">
-              <a:buNone/>
-            </a:pPr>
-            <a:r>
-              <a:rPr lang="en-US" sz="950" b="1" spc="150" kern="0" dirty="0">
+            <a:pPr marL="0" indent="0">
+              <a:buNone/>
+            </a:pPr>
+            <a:r>
+              <a:rPr lang="en-US" sz="950" b="1" kern="0" spc="150" dirty="0">
                 <a:solidFill>
                   <a:srgbClr val="1A4FBF"/>
                 </a:solidFill>
@@ -5118,7 +4854,7 @@
       </p:sp>
       <p:sp>
         <p:nvSpPr>
-          <p:cNvPr id="11" name="Text 7"/>
+          <p:cNvPr id="8" name="Text 7"/>
           <p:cNvSpPr/>
           <p:nvPr/>
         </p:nvSpPr>
@@ -5137,7 +4873,7 @@
           <a:bodyPr wrap="square" lIns="0" tIns="0" rIns="0" bIns="0" rtlCol="0" anchor="ctr"/>
           <a:lstStyle/>
           <a:p>
-            <a:pPr indent="0" marL="0">
+            <a:pPr marL="0" indent="0">
               <a:lnSpc>
                 <a:spcPct val="112000"/>
               </a:lnSpc>
@@ -5178,7 +4914,7 @@
           </a:prstGeom>
           <a:extLst>
             <a:ext uri="{C572A759-6A51-4108-AA02-DFA0A04FC94B}">
-              <ma14:wrappingTextBoxFlag xmlns:ma14="http://schemas.microsoft.com/office/mac/drawingml/2011/main" val="0"/>
+              <ma14:wrappingTextBoxFlag xmlns:ma14="http://schemas.microsoft.com/office/mac/drawingml/2011/main" xmlns="" val="0"/>
             </a:ext>
           </a:extLst>
         </p:spPr>
@@ -5199,7 +4935,7 @@
           <a:p>
             <a:pPr algn="l"/>
             <a:fld id="{F7021451-1387-4CA6-816F-3879F97B5CBC}" type="slidenum">
-              <a:rPr b="0" lang="en-US"/>
+              <a:rPr lang="en-US" b="0"/>
               <a:t>10</a:t>
             </a:fld>
             <a:endParaRPr lang="en-US"/>
@@ -5274,7 +5010,7 @@
           <a:bodyPr wrap="square" lIns="0" tIns="0" rIns="0" bIns="0" rtlCol="0" anchor="ctr"/>
           <a:lstStyle/>
           <a:p>
-            <a:pPr algn="l" indent="0" marL="0">
+            <a:pPr marL="0" indent="0" algn="l">
               <a:buNone/>
             </a:pPr>
             <a:r>
@@ -5313,7 +5049,7 @@
           <a:bodyPr wrap="square" lIns="0" tIns="0" rIns="0" bIns="0" rtlCol="0" anchor="ctr"/>
           <a:lstStyle/>
           <a:p>
-            <a:pPr indent="0" marL="0">
+            <a:pPr marL="0" indent="0">
               <a:buNone/>
             </a:pPr>
             <a:r>
@@ -5379,11 +5115,11 @@
           <a:bodyPr wrap="square" lIns="0" tIns="0" rIns="0" bIns="0" rtlCol="0" anchor="ctr"/>
           <a:lstStyle/>
           <a:p>
-            <a:pPr algn="ctr" indent="0" marL="0">
-              <a:buNone/>
-            </a:pPr>
-            <a:r>
-              <a:rPr lang="en-US" sz="900" b="1" spc="100" kern="0" dirty="0">
+            <a:pPr marL="0" indent="0" algn="ctr">
+              <a:buNone/>
+            </a:pPr>
+            <a:r>
+              <a:rPr lang="en-US" sz="900" b="1" kern="0" spc="100" dirty="0">
                 <a:solidFill>
                   <a:srgbClr val="5A05F4"/>
                 </a:solidFill>
@@ -5399,14 +5135,14 @@
       </p:sp>
       <p:pic>
         <p:nvPicPr>
-          <p:cNvPr id="7" name="Image 0" descr="preencoded.png">    </p:cNvPr>
+          <p:cNvPr id="7" name="Image 0" descr="preencoded.png"/>
           <p:cNvPicPr>
             <a:picLocks noChangeAspect="1"/>
           </p:cNvPicPr>
           <p:nvPr/>
         </p:nvPicPr>
         <p:blipFill>
-          <a:blip r:embed="rId1"/>
+          <a:blip r:embed="rId3"/>
           <a:stretch>
             <a:fillRect/>
           </a:stretch>
@@ -5464,7 +5200,7 @@
           <a:bodyPr wrap="square" lIns="0" tIns="0" rIns="0" bIns="0" rtlCol="0" anchor="ctr"/>
           <a:lstStyle/>
           <a:p>
-            <a:pPr indent="0" marL="0">
+            <a:pPr marL="0" indent="0">
               <a:buNone/>
             </a:pPr>
             <a:r>
@@ -5503,7 +5239,7 @@
           <a:bodyPr wrap="square" lIns="0" tIns="0" rIns="0" bIns="0" rtlCol="0" anchor="ctr"/>
           <a:lstStyle/>
           <a:p>
-            <a:pPr indent="0" marL="0">
+            <a:pPr marL="0" indent="0">
               <a:buNone/>
             </a:pPr>
             <a:r>
@@ -5564,7 +5300,7 @@
           <a:bodyPr wrap="square" lIns="0" tIns="0" rIns="0" bIns="0" rtlCol="0" anchor="ctr"/>
           <a:lstStyle/>
           <a:p>
-            <a:pPr indent="0" marL="0">
+            <a:pPr marL="0" indent="0">
               <a:buNone/>
             </a:pPr>
             <a:r>
@@ -5603,7 +5339,7 @@
           <a:bodyPr wrap="square" lIns="0" tIns="0" rIns="0" bIns="0" rtlCol="0" anchor="ctr"/>
           <a:lstStyle/>
           <a:p>
-            <a:pPr indent="0" marL="0">
+            <a:pPr marL="0" indent="0">
               <a:buNone/>
             </a:pPr>
             <a:r>
@@ -5664,7 +5400,7 @@
           <a:bodyPr wrap="square" lIns="0" tIns="0" rIns="0" bIns="0" rtlCol="0" anchor="ctr"/>
           <a:lstStyle/>
           <a:p>
-            <a:pPr indent="0" marL="0">
+            <a:pPr marL="0" indent="0">
               <a:buNone/>
             </a:pPr>
             <a:r>
@@ -5703,7 +5439,7 @@
           <a:bodyPr wrap="square" lIns="0" tIns="0" rIns="0" bIns="0" rtlCol="0" anchor="ctr"/>
           <a:lstStyle/>
           <a:p>
-            <a:pPr indent="0" marL="0">
+            <a:pPr marL="0" indent="0">
               <a:buNone/>
             </a:pPr>
             <a:r>
@@ -5764,7 +5500,7 @@
           <a:bodyPr wrap="square" lIns="0" tIns="0" rIns="0" bIns="0" rtlCol="0" anchor="ctr"/>
           <a:lstStyle/>
           <a:p>
-            <a:pPr indent="0" marL="0">
+            <a:pPr marL="0" indent="0">
               <a:buNone/>
             </a:pPr>
             <a:r>
@@ -5803,7 +5539,7 @@
           <a:bodyPr wrap="square" lIns="0" tIns="0" rIns="0" bIns="0" rtlCol="0" anchor="ctr"/>
           <a:lstStyle/>
           <a:p>
-            <a:pPr indent="0" marL="0">
+            <a:pPr marL="0" indent="0">
               <a:buNone/>
             </a:pPr>
             <a:r>
@@ -5864,7 +5600,7 @@
           <a:bodyPr wrap="square" lIns="0" tIns="0" rIns="0" bIns="0" rtlCol="0" anchor="ctr"/>
           <a:lstStyle/>
           <a:p>
-            <a:pPr algn="ctr" indent="0" marL="0">
+            <a:pPr marL="0" indent="0" algn="ctr">
               <a:buNone/>
             </a:pPr>
             <a:r>
@@ -5968,7 +5704,7 @@
           <a:bodyPr wrap="square" lIns="0" tIns="0" rIns="0" bIns="0" rtlCol="0" anchor="ctr"/>
           <a:lstStyle/>
           <a:p>
-            <a:pPr algn="ctr" indent="0" marL="0">
+            <a:pPr marL="0" indent="0" algn="ctr">
               <a:buNone/>
             </a:pPr>
             <a:r>
@@ -6072,7 +5808,7 @@
           <a:bodyPr wrap="square" lIns="0" tIns="0" rIns="0" bIns="0" rtlCol="0" anchor="ctr"/>
           <a:lstStyle/>
           <a:p>
-            <a:pPr algn="ctr" indent="0" marL="0">
+            <a:pPr marL="0" indent="0" algn="ctr">
               <a:buNone/>
             </a:pPr>
             <a:r>
@@ -6176,7 +5912,7 @@
           <a:bodyPr wrap="square" lIns="0" tIns="0" rIns="0" bIns="0" rtlCol="0" anchor="ctr"/>
           <a:lstStyle/>
           <a:p>
-            <a:pPr algn="ctr" indent="0" marL="0">
+            <a:pPr marL="0" indent="0" algn="ctr">
               <a:buNone/>
             </a:pPr>
             <a:r>
@@ -6242,11 +5978,11 @@
           <a:bodyPr wrap="square" lIns="0" tIns="0" rIns="0" bIns="0" rtlCol="0" anchor="ctr"/>
           <a:lstStyle/>
           <a:p>
-            <a:pPr indent="0" marL="0">
-              <a:buNone/>
-            </a:pPr>
-            <a:r>
-              <a:rPr lang="en-US" sz="950" b="1" spc="150" kern="0" dirty="0">
+            <a:pPr marL="0" indent="0">
+              <a:buNone/>
+            </a:pPr>
+            <a:r>
+              <a:rPr lang="en-US" sz="950" b="1" kern="0" spc="150" dirty="0">
                 <a:solidFill>
                   <a:srgbClr val="106B41"/>
                 </a:solidFill>
@@ -6281,7 +6017,7 @@
           <a:bodyPr wrap="square" lIns="0" tIns="0" rIns="0" bIns="0" rtlCol="0" anchor="ctr"/>
           <a:lstStyle/>
           <a:p>
-            <a:pPr indent="0" marL="0">
+            <a:pPr marL="0" indent="0">
               <a:lnSpc>
                 <a:spcPct val="112000"/>
               </a:lnSpc>
@@ -6304,7 +6040,7 @@
       </p:sp>
       <p:sp>
         <p:nvSpPr>
-          <p:cNvPr id="25" name="Slide Number Placeholder 0"/>
+          <p:cNvPr id="37" name="Slide Number Placeholder 0"/>
           <p:cNvSpPr>
             <a:spLocks noGrp="1"/>
           </p:cNvSpPr>
@@ -6322,7 +6058,7 @@
           </a:prstGeom>
           <a:extLst>
             <a:ext uri="{C572A759-6A51-4108-AA02-DFA0A04FC94B}">
-              <ma14:wrappingTextBoxFlag xmlns:ma14="http://schemas.microsoft.com/office/mac/drawingml/2011/main" val="0"/>
+              <ma14:wrappingTextBoxFlag xmlns:ma14="http://schemas.microsoft.com/office/mac/drawingml/2011/main" xmlns="" val="0"/>
             </a:ext>
           </a:extLst>
         </p:spPr>
@@ -6343,7 +6079,7 @@
           <a:p>
             <a:pPr algn="l"/>
             <a:fld id="{F7021451-1387-4CA6-816F-3879F97B5CBC}" type="slidenum">
-              <a:rPr b="0" lang="en-US"/>
+              <a:rPr lang="en-US" b="0"/>
               <a:t>11</a:t>
             </a:fld>
             <a:endParaRPr lang="en-US"/>
@@ -6418,7 +6154,7 @@
           <a:bodyPr wrap="square" lIns="0" tIns="0" rIns="0" bIns="0" rtlCol="0" anchor="ctr"/>
           <a:lstStyle/>
           <a:p>
-            <a:pPr algn="l" indent="0" marL="0">
+            <a:pPr marL="0" indent="0" algn="l">
               <a:buNone/>
             </a:pPr>
             <a:r>
@@ -6457,7 +6193,7 @@
           <a:bodyPr wrap="square" lIns="0" tIns="0" rIns="0" bIns="0" rtlCol="0" anchor="ctr"/>
           <a:lstStyle/>
           <a:p>
-            <a:pPr indent="0" marL="0">
+            <a:pPr marL="0" indent="0">
               <a:buNone/>
             </a:pPr>
             <a:r>
@@ -6523,11 +6259,11 @@
           <a:bodyPr wrap="square" lIns="0" tIns="0" rIns="0" bIns="0" rtlCol="0" anchor="ctr"/>
           <a:lstStyle/>
           <a:p>
-            <a:pPr algn="ctr" indent="0" marL="0">
-              <a:buNone/>
-            </a:pPr>
-            <a:r>
-              <a:rPr lang="en-US" sz="900" b="1" spc="100" kern="0" dirty="0">
+            <a:pPr marL="0" indent="0" algn="ctr">
+              <a:buNone/>
+            </a:pPr>
+            <a:r>
+              <a:rPr lang="en-US" sz="900" b="1" kern="0" spc="100" dirty="0">
                 <a:solidFill>
                   <a:srgbClr val="5A05F4"/>
                 </a:solidFill>
@@ -6589,11 +6325,11 @@
           <a:bodyPr wrap="square" lIns="0" tIns="0" rIns="0" bIns="0" rtlCol="0" anchor="ctr"/>
           <a:lstStyle/>
           <a:p>
-            <a:pPr algn="ctr" indent="0" marL="0">
-              <a:buNone/>
-            </a:pPr>
-            <a:r>
-              <a:rPr lang="en-US" sz="900" b="1" spc="100" kern="0" dirty="0">
+            <a:pPr marL="0" indent="0" algn="ctr">
+              <a:buNone/>
+            </a:pPr>
+            <a:r>
+              <a:rPr lang="en-US" sz="900" b="1" kern="0" spc="100" dirty="0">
                 <a:solidFill>
                   <a:srgbClr val="434343"/>
                 </a:solidFill>
@@ -6609,14 +6345,14 @@
       </p:sp>
       <p:pic>
         <p:nvPicPr>
-          <p:cNvPr id="9" name="Image 0" descr="preencoded.png">    </p:cNvPr>
+          <p:cNvPr id="9" name="Image 0" descr="preencoded.png"/>
           <p:cNvPicPr>
             <a:picLocks noChangeAspect="1"/>
           </p:cNvPicPr>
           <p:nvPr/>
         </p:nvPicPr>
         <p:blipFill>
-          <a:blip r:embed="rId1"/>
+          <a:blip r:embed="rId3"/>
           <a:stretch>
             <a:fillRect/>
           </a:stretch>
@@ -6674,7 +6410,7 @@
           <a:bodyPr wrap="square" lIns="0" tIns="0" rIns="0" bIns="0" rtlCol="0" anchor="ctr"/>
           <a:lstStyle/>
           <a:p>
-            <a:pPr algn="ctr" indent="0" marL="0">
+            <a:pPr marL="0" indent="0" algn="ctr">
               <a:buNone/>
             </a:pPr>
             <a:r>
@@ -6778,7 +6514,7 @@
           <a:bodyPr wrap="square" lIns="0" tIns="0" rIns="0" bIns="0" rtlCol="0" anchor="ctr"/>
           <a:lstStyle/>
           <a:p>
-            <a:pPr algn="ctr" indent="0" marL="0">
+            <a:pPr marL="0" indent="0" algn="ctr">
               <a:buNone/>
             </a:pPr>
             <a:r>
@@ -6882,7 +6618,7 @@
           <a:bodyPr wrap="square" lIns="0" tIns="0" rIns="0" bIns="0" rtlCol="0" anchor="ctr"/>
           <a:lstStyle/>
           <a:p>
-            <a:pPr algn="ctr" indent="0" marL="0">
+            <a:pPr marL="0" indent="0" algn="ctr">
               <a:buNone/>
             </a:pPr>
             <a:r>
@@ -6943,7 +6679,7 @@
           <a:bodyPr wrap="square" lIns="0" tIns="0" rIns="0" bIns="0" rtlCol="0" anchor="ctr"/>
           <a:lstStyle/>
           <a:p>
-            <a:pPr indent="0" marL="0">
+            <a:pPr marL="0" indent="0">
               <a:buNone/>
             </a:pPr>
             <a:r>
@@ -6982,7 +6718,7 @@
           <a:bodyPr wrap="square" lIns="0" tIns="0" rIns="0" bIns="0" rtlCol="0" anchor="t"/>
           <a:lstStyle/>
           <a:p>
-            <a:pPr indent="0" marL="0">
+            <a:pPr marL="0" indent="0">
               <a:lnSpc>
                 <a:spcPct val="108000"/>
               </a:lnSpc>
@@ -7046,7 +6782,7 @@
           <a:bodyPr wrap="square" lIns="0" tIns="0" rIns="0" bIns="0" rtlCol="0" anchor="ctr"/>
           <a:lstStyle/>
           <a:p>
-            <a:pPr indent="0" marL="0">
+            <a:pPr marL="0" indent="0">
               <a:buNone/>
             </a:pPr>
             <a:r>
@@ -7085,7 +6821,7 @@
           <a:bodyPr wrap="square" lIns="0" tIns="0" rIns="0" bIns="0" rtlCol="0" anchor="t"/>
           <a:lstStyle/>
           <a:p>
-            <a:pPr indent="0" marL="0">
+            <a:pPr marL="0" indent="0">
               <a:lnSpc>
                 <a:spcPct val="108000"/>
               </a:lnSpc>
@@ -7154,7 +6890,7 @@
           <a:bodyPr wrap="square" lIns="0" tIns="0" rIns="0" bIns="0" rtlCol="0" anchor="ctr"/>
           <a:lstStyle/>
           <a:p>
-            <a:pPr indent="0" marL="0">
+            <a:pPr marL="0" indent="0">
               <a:lnSpc>
                 <a:spcPct val="112000"/>
               </a:lnSpc>
@@ -7177,7 +6913,7 @@
       </p:sp>
       <p:sp>
         <p:nvSpPr>
-          <p:cNvPr id="25" name="Slide Number Placeholder 0"/>
+          <p:cNvPr id="28" name="Slide Number Placeholder 0"/>
           <p:cNvSpPr>
             <a:spLocks noGrp="1"/>
           </p:cNvSpPr>
@@ -7195,7 +6931,7 @@
           </a:prstGeom>
           <a:extLst>
             <a:ext uri="{C572A759-6A51-4108-AA02-DFA0A04FC94B}">
-              <ma14:wrappingTextBoxFlag xmlns:ma14="http://schemas.microsoft.com/office/mac/drawingml/2011/main" val="0"/>
+              <ma14:wrappingTextBoxFlag xmlns:ma14="http://schemas.microsoft.com/office/mac/drawingml/2011/main" xmlns="" val="0"/>
             </a:ext>
           </a:extLst>
         </p:spPr>
@@ -7216,7 +6952,7 @@
           <a:p>
             <a:pPr algn="l"/>
             <a:fld id="{F7021451-1387-4CA6-816F-3879F97B5CBC}" type="slidenum">
-              <a:rPr b="0" lang="en-US"/>
+              <a:rPr lang="en-US" b="0"/>
               <a:t>12</a:t>
             </a:fld>
             <a:endParaRPr lang="en-US"/>
@@ -7291,7 +7027,7 @@
           <a:bodyPr wrap="square" lIns="0" tIns="0" rIns="0" bIns="0" rtlCol="0" anchor="ctr"/>
           <a:lstStyle/>
           <a:p>
-            <a:pPr algn="l" indent="0" marL="0">
+            <a:pPr marL="0" indent="0" algn="l">
               <a:buNone/>
             </a:pPr>
             <a:r>
@@ -7330,7 +7066,7 @@
           <a:bodyPr wrap="square" lIns="0" tIns="0" rIns="0" bIns="0" rtlCol="0" anchor="ctr"/>
           <a:lstStyle/>
           <a:p>
-            <a:pPr indent="0" marL="0">
+            <a:pPr marL="0" indent="0">
               <a:buNone/>
             </a:pPr>
             <a:r>
@@ -7396,11 +7132,11 @@
           <a:bodyPr wrap="square" lIns="0" tIns="0" rIns="0" bIns="0" rtlCol="0" anchor="ctr"/>
           <a:lstStyle/>
           <a:p>
-            <a:pPr algn="ctr" indent="0" marL="0">
-              <a:buNone/>
-            </a:pPr>
-            <a:r>
-              <a:rPr lang="en-US" sz="900" b="1" spc="100" kern="0" dirty="0">
+            <a:pPr marL="0" indent="0" algn="ctr">
+              <a:buNone/>
+            </a:pPr>
+            <a:r>
+              <a:rPr lang="en-US" sz="900" b="1" kern="0" spc="100" dirty="0">
                 <a:solidFill>
                   <a:srgbClr val="5A05F4"/>
                 </a:solidFill>
@@ -7416,14 +7152,14 @@
       </p:sp>
       <p:pic>
         <p:nvPicPr>
-          <p:cNvPr id="7" name="Image 0" descr="preencoded.png">    </p:cNvPr>
+          <p:cNvPr id="7" name="Image 0" descr="preencoded.png"/>
           <p:cNvPicPr>
             <a:picLocks noChangeAspect="1"/>
           </p:cNvPicPr>
           <p:nvPr/>
         </p:nvPicPr>
         <p:blipFill>
-          <a:blip r:embed="rId1"/>
+          <a:blip r:embed="rId3"/>
           <a:stretch>
             <a:fillRect/>
           </a:stretch>
@@ -7454,16 +7190,34 @@
         </p:nvGraphicFramePr>
         <p:xfrm>
           <a:off x="566928" y="1737360"/>
-          <a:ext cx="11064240" cy="914400"/>
+          <a:ext cx="11064240" cy="3291840"/>
         </p:xfrm>
         <a:graphic>
           <a:graphicData uri="http://schemas.openxmlformats.org/drawingml/2006/table">
             <a:tbl>
               <a:tblPr/>
               <a:tblGrid>
-                <a:gridCol w="2743200"/>
-                <a:gridCol w="4480560"/>
-                <a:gridCol w="3840480"/>
+                <a:gridCol w="2743200">
+                  <a:extLst>
+                    <a:ext uri="{9D8B030D-6E8A-4147-A177-3AD203B41FA5}">
+                      <a16:colId xmlns:a16="http://schemas.microsoft.com/office/drawing/2014/main" val="20000"/>
+                    </a:ext>
+                  </a:extLst>
+                </a:gridCol>
+                <a:gridCol w="4480560">
+                  <a:extLst>
+                    <a:ext uri="{9D8B030D-6E8A-4147-A177-3AD203B41FA5}">
+                      <a16:colId xmlns:a16="http://schemas.microsoft.com/office/drawing/2014/main" val="20001"/>
+                    </a:ext>
+                  </a:extLst>
+                </a:gridCol>
+                <a:gridCol w="3840480">
+                  <a:extLst>
+                    <a:ext uri="{9D8B030D-6E8A-4147-A177-3AD203B41FA5}">
+                      <a16:colId xmlns:a16="http://schemas.microsoft.com/office/drawing/2014/main" val="20002"/>
+                    </a:ext>
+                  </a:extLst>
+                </a:gridCol>
               </a:tblGrid>
               <a:tr h="548640">
                 <a:tc>
@@ -7471,11 +7225,11 @@
                     <a:bodyPr/>
                     <a:lstStyle/>
                     <a:p>
-                      <a:pPr algn="ctr" indent="0" marL="0">
+                      <a:pPr marL="0" indent="0" algn="ctr">
                         <a:buNone/>
                       </a:pPr>
                       <a:r>
-                        <a:rPr lang="en-US" sz="900" b="1" spc="100" kern="0" dirty="0">
+                        <a:rPr lang="en-US" sz="900" b="1" kern="0" spc="100" dirty="0">
                           <a:solidFill>
                             <a:srgbClr val="FFFFFF"/>
                           </a:solidFill>
@@ -7539,11 +7293,11 @@
                     <a:bodyPr/>
                     <a:lstStyle/>
                     <a:p>
-                      <a:pPr algn="ctr" indent="0" marL="0">
+                      <a:pPr marL="0" indent="0" algn="ctr">
                         <a:buNone/>
                       </a:pPr>
                       <a:r>
-                        <a:rPr lang="en-US" sz="900" b="1" spc="100" kern="0" dirty="0">
+                        <a:rPr lang="en-US" sz="900" b="1" kern="0" spc="100" dirty="0">
                           <a:solidFill>
                             <a:srgbClr val="FFFFFF"/>
                           </a:solidFill>
@@ -7607,11 +7361,11 @@
                     <a:bodyPr/>
                     <a:lstStyle/>
                     <a:p>
-                      <a:pPr algn="ctr" indent="0" marL="0">
+                      <a:pPr marL="0" indent="0" algn="ctr">
                         <a:buNone/>
                       </a:pPr>
                       <a:r>
-                        <a:rPr lang="en-US" sz="900" b="1" spc="100" kern="0" dirty="0">
+                        <a:rPr lang="en-US" sz="900" b="1" kern="0" spc="100" dirty="0">
                           <a:solidFill>
                             <a:srgbClr val="FFFFFF"/>
                           </a:solidFill>
@@ -7670,6 +7424,11 @@
                     </a:solidFill>
                   </a:tcPr>
                 </a:tc>
+                <a:extLst>
+                  <a:ext uri="{0D108BD9-81ED-4DB2-BD59-A6C34878D82A}">
+                    <a16:rowId xmlns:a16="http://schemas.microsoft.com/office/drawing/2014/main" val="10000"/>
+                  </a:ext>
+                </a:extLst>
               </a:tr>
               <a:tr h="548640">
                 <a:tc>
@@ -7677,7 +7436,7 @@
                     <a:bodyPr/>
                     <a:lstStyle/>
                     <a:p>
-                      <a:pPr indent="0" marL="0">
+                      <a:pPr marL="0" indent="0">
                         <a:buNone/>
                       </a:pPr>
                       <a:r>
@@ -7745,7 +7504,7 @@
                     <a:bodyPr/>
                     <a:lstStyle/>
                     <a:p>
-                      <a:pPr indent="0" marL="0">
+                      <a:pPr marL="0" indent="0">
                         <a:buNone/>
                       </a:pPr>
                       <a:r>
@@ -7813,7 +7572,7 @@
                     <a:bodyPr/>
                     <a:lstStyle/>
                     <a:p>
-                      <a:pPr indent="0" marL="0">
+                      <a:pPr marL="0" indent="0">
                         <a:buNone/>
                       </a:pPr>
                       <a:r>
@@ -7876,6 +7635,11 @@
                     </a:solidFill>
                   </a:tcPr>
                 </a:tc>
+                <a:extLst>
+                  <a:ext uri="{0D108BD9-81ED-4DB2-BD59-A6C34878D82A}">
+                    <a16:rowId xmlns:a16="http://schemas.microsoft.com/office/drawing/2014/main" val="10001"/>
+                  </a:ext>
+                </a:extLst>
               </a:tr>
               <a:tr h="548640">
                 <a:tc>
@@ -7883,7 +7647,7 @@
                     <a:bodyPr/>
                     <a:lstStyle/>
                     <a:p>
-                      <a:pPr indent="0" marL="0">
+                      <a:pPr marL="0" indent="0">
                         <a:buNone/>
                       </a:pPr>
                       <a:r>
@@ -7951,7 +7715,7 @@
                     <a:bodyPr/>
                     <a:lstStyle/>
                     <a:p>
-                      <a:pPr indent="0" marL="0">
+                      <a:pPr marL="0" indent="0">
                         <a:buNone/>
                       </a:pPr>
                       <a:r>
@@ -8019,7 +7783,7 @@
                     <a:bodyPr/>
                     <a:lstStyle/>
                     <a:p>
-                      <a:pPr indent="0" marL="0">
+                      <a:pPr marL="0" indent="0">
                         <a:buNone/>
                       </a:pPr>
                       <a:r>
@@ -8082,6 +7846,11 @@
                     </a:solidFill>
                   </a:tcPr>
                 </a:tc>
+                <a:extLst>
+                  <a:ext uri="{0D108BD9-81ED-4DB2-BD59-A6C34878D82A}">
+                    <a16:rowId xmlns:a16="http://schemas.microsoft.com/office/drawing/2014/main" val="10002"/>
+                  </a:ext>
+                </a:extLst>
               </a:tr>
               <a:tr h="548640">
                 <a:tc>
@@ -8089,7 +7858,7 @@
                     <a:bodyPr/>
                     <a:lstStyle/>
                     <a:p>
-                      <a:pPr indent="0" marL="0">
+                      <a:pPr marL="0" indent="0">
                         <a:buNone/>
                       </a:pPr>
                       <a:r>
@@ -8157,7 +7926,7 @@
                     <a:bodyPr/>
                     <a:lstStyle/>
                     <a:p>
-                      <a:pPr indent="0" marL="0">
+                      <a:pPr marL="0" indent="0">
                         <a:buNone/>
                       </a:pPr>
                       <a:r>
@@ -8225,7 +7994,7 @@
                     <a:bodyPr/>
                     <a:lstStyle/>
                     <a:p>
-                      <a:pPr indent="0" marL="0">
+                      <a:pPr marL="0" indent="0">
                         <a:buNone/>
                       </a:pPr>
                       <a:r>
@@ -8288,6 +8057,11 @@
                     </a:solidFill>
                   </a:tcPr>
                 </a:tc>
+                <a:extLst>
+                  <a:ext uri="{0D108BD9-81ED-4DB2-BD59-A6C34878D82A}">
+                    <a16:rowId xmlns:a16="http://schemas.microsoft.com/office/drawing/2014/main" val="10003"/>
+                  </a:ext>
+                </a:extLst>
               </a:tr>
               <a:tr h="548640">
                 <a:tc>
@@ -8295,7 +8069,7 @@
                     <a:bodyPr/>
                     <a:lstStyle/>
                     <a:p>
-                      <a:pPr indent="0" marL="0">
+                      <a:pPr marL="0" indent="0">
                         <a:buNone/>
                       </a:pPr>
                       <a:r>
@@ -8363,7 +8137,7 @@
                     <a:bodyPr/>
                     <a:lstStyle/>
                     <a:p>
-                      <a:pPr indent="0" marL="0">
+                      <a:pPr marL="0" indent="0">
                         <a:buNone/>
                       </a:pPr>
                       <a:r>
@@ -8431,7 +8205,7 @@
                     <a:bodyPr/>
                     <a:lstStyle/>
                     <a:p>
-                      <a:pPr indent="0" marL="0">
+                      <a:pPr marL="0" indent="0">
                         <a:buNone/>
                       </a:pPr>
                       <a:r>
@@ -8494,6 +8268,11 @@
                     </a:solidFill>
                   </a:tcPr>
                 </a:tc>
+                <a:extLst>
+                  <a:ext uri="{0D108BD9-81ED-4DB2-BD59-A6C34878D82A}">
+                    <a16:rowId xmlns:a16="http://schemas.microsoft.com/office/drawing/2014/main" val="10004"/>
+                  </a:ext>
+                </a:extLst>
               </a:tr>
               <a:tr h="548640">
                 <a:tc>
@@ -8501,7 +8280,7 @@
                     <a:bodyPr/>
                     <a:lstStyle/>
                     <a:p>
-                      <a:pPr indent="0" marL="0">
+                      <a:pPr marL="0" indent="0">
                         <a:buNone/>
                       </a:pPr>
                       <a:r>
@@ -8569,7 +8348,7 @@
                     <a:bodyPr/>
                     <a:lstStyle/>
                     <a:p>
-                      <a:pPr indent="0" marL="0">
+                      <a:pPr marL="0" indent="0">
                         <a:buNone/>
                       </a:pPr>
                       <a:r>
@@ -8637,7 +8416,7 @@
                     <a:bodyPr/>
                     <a:lstStyle/>
                     <a:p>
-                      <a:pPr indent="0" marL="0">
+                      <a:pPr marL="0" indent="0">
                         <a:buNone/>
                       </a:pPr>
                       <a:r>
@@ -8700,6 +8479,11 @@
                     </a:solidFill>
                   </a:tcPr>
                 </a:tc>
+                <a:extLst>
+                  <a:ext uri="{0D108BD9-81ED-4DB2-BD59-A6C34878D82A}">
+                    <a16:rowId xmlns:a16="http://schemas.microsoft.com/office/drawing/2014/main" val="10005"/>
+                  </a:ext>
+                </a:extLst>
               </a:tr>
             </a:tbl>
           </a:graphicData>
@@ -8753,11 +8537,11 @@
           <a:bodyPr wrap="square" lIns="0" tIns="0" rIns="0" bIns="0" rtlCol="0" anchor="ctr"/>
           <a:lstStyle/>
           <a:p>
-            <a:pPr indent="0" marL="0">
-              <a:buNone/>
-            </a:pPr>
-            <a:r>
-              <a:rPr lang="en-US" sz="950" b="1" spc="150" kern="0" dirty="0">
+            <a:pPr marL="0" indent="0">
+              <a:buNone/>
+            </a:pPr>
+            <a:r>
+              <a:rPr lang="en-US" sz="950" b="1" kern="0" spc="150" dirty="0">
                 <a:solidFill>
                   <a:srgbClr val="106B41"/>
                 </a:solidFill>
@@ -8792,7 +8576,7 @@
           <a:bodyPr wrap="square" lIns="0" tIns="0" rIns="0" bIns="0" rtlCol="0" anchor="ctr"/>
           <a:lstStyle/>
           <a:p>
-            <a:pPr indent="0" marL="0">
+            <a:pPr marL="0" indent="0">
               <a:lnSpc>
                 <a:spcPct val="112000"/>
               </a:lnSpc>
@@ -8833,7 +8617,7 @@
           </a:prstGeom>
           <a:extLst>
             <a:ext uri="{C572A759-6A51-4108-AA02-DFA0A04FC94B}">
-              <ma14:wrappingTextBoxFlag xmlns:ma14="http://schemas.microsoft.com/office/mac/drawingml/2011/main" val="0"/>
+              <ma14:wrappingTextBoxFlag xmlns:ma14="http://schemas.microsoft.com/office/mac/drawingml/2011/main" xmlns="" val="0"/>
             </a:ext>
           </a:extLst>
         </p:spPr>
@@ -8854,7 +8638,7 @@
           <a:p>
             <a:pPr algn="l"/>
             <a:fld id="{F7021451-1387-4CA6-816F-3879F97B5CBC}" type="slidenum">
-              <a:rPr b="0" lang="en-US"/>
+              <a:rPr lang="en-US" b="0"/>
               <a:t>13</a:t>
             </a:fld>
             <a:endParaRPr lang="en-US"/>
@@ -8929,7 +8713,7 @@
           <a:bodyPr wrap="square" lIns="0" tIns="0" rIns="0" bIns="0" rtlCol="0" anchor="ctr"/>
           <a:lstStyle/>
           <a:p>
-            <a:pPr algn="l" indent="0" marL="0">
+            <a:pPr marL="0" indent="0" algn="l">
               <a:buNone/>
             </a:pPr>
             <a:r>
@@ -8968,7 +8752,7 @@
           <a:bodyPr wrap="square" lIns="0" tIns="0" rIns="0" bIns="0" rtlCol="0" anchor="ctr"/>
           <a:lstStyle/>
           <a:p>
-            <a:pPr indent="0" marL="0">
+            <a:pPr marL="0" indent="0">
               <a:buNone/>
             </a:pPr>
             <a:r>
@@ -9034,11 +8818,11 @@
           <a:bodyPr wrap="square" lIns="0" tIns="0" rIns="0" bIns="0" rtlCol="0" anchor="ctr"/>
           <a:lstStyle/>
           <a:p>
-            <a:pPr algn="ctr" indent="0" marL="0">
-              <a:buNone/>
-            </a:pPr>
-            <a:r>
-              <a:rPr lang="en-US" sz="900" b="1" spc="100" kern="0" dirty="0">
+            <a:pPr marL="0" indent="0" algn="ctr">
+              <a:buNone/>
+            </a:pPr>
+            <a:r>
+              <a:rPr lang="en-US" sz="900" b="1" kern="0" spc="100" dirty="0">
                 <a:solidFill>
                   <a:srgbClr val="5A05F4"/>
                 </a:solidFill>
@@ -9054,14 +8838,14 @@
       </p:sp>
       <p:pic>
         <p:nvPicPr>
-          <p:cNvPr id="7" name="Image 0" descr="preencoded.png">    </p:cNvPr>
+          <p:cNvPr id="7" name="Image 0" descr="preencoded.png"/>
           <p:cNvPicPr>
             <a:picLocks noChangeAspect="1"/>
           </p:cNvPicPr>
           <p:nvPr/>
         </p:nvPicPr>
         <p:blipFill>
-          <a:blip r:embed="rId1"/>
+          <a:blip r:embed="rId3"/>
           <a:stretch>
             <a:fillRect/>
           </a:stretch>
@@ -9139,7 +8923,7 @@
           <a:bodyPr wrap="square" lIns="0" tIns="0" rIns="0" bIns="0" rtlCol="0" anchor="ctr"/>
           <a:lstStyle/>
           <a:p>
-            <a:pPr algn="ctr" indent="0" marL="0">
+            <a:pPr marL="0" indent="0" algn="ctr">
               <a:buNone/>
             </a:pPr>
             <a:r>
@@ -9178,7 +8962,7 @@
           <a:bodyPr wrap="square" lIns="0" tIns="0" rIns="0" bIns="0" rtlCol="0" anchor="ctr"/>
           <a:lstStyle/>
           <a:p>
-            <a:pPr indent="0" marL="0">
+            <a:pPr marL="0" indent="0">
               <a:buNone/>
             </a:pPr>
             <a:r>
@@ -9217,7 +9001,7 @@
           <a:bodyPr wrap="square" lIns="0" tIns="0" rIns="0" bIns="0" rtlCol="0" anchor="t"/>
           <a:lstStyle/>
           <a:p>
-            <a:pPr indent="0" marL="0">
+            <a:pPr marL="0" indent="0">
               <a:lnSpc>
                 <a:spcPct val="108000"/>
               </a:lnSpc>
@@ -9301,7 +9085,7 @@
           <a:bodyPr wrap="square" lIns="0" tIns="0" rIns="0" bIns="0" rtlCol="0" anchor="ctr"/>
           <a:lstStyle/>
           <a:p>
-            <a:pPr algn="ctr" indent="0" marL="0">
+            <a:pPr marL="0" indent="0" algn="ctr">
               <a:buNone/>
             </a:pPr>
             <a:r>
@@ -9340,7 +9124,7 @@
           <a:bodyPr wrap="square" lIns="0" tIns="0" rIns="0" bIns="0" rtlCol="0" anchor="ctr"/>
           <a:lstStyle/>
           <a:p>
-            <a:pPr indent="0" marL="0">
+            <a:pPr marL="0" indent="0">
               <a:buNone/>
             </a:pPr>
             <a:r>
@@ -9379,7 +9163,7 @@
           <a:bodyPr wrap="square" lIns="0" tIns="0" rIns="0" bIns="0" rtlCol="0" anchor="t"/>
           <a:lstStyle/>
           <a:p>
-            <a:pPr indent="0" marL="0">
+            <a:pPr marL="0" indent="0">
               <a:lnSpc>
                 <a:spcPct val="108000"/>
               </a:lnSpc>
@@ -9408,8 +9192,8 @@
         </p:nvSpPr>
         <p:spPr>
           <a:xfrm>
-            <a:off x="7973568" y="1828800"/>
-            <a:ext cx="3520440" cy="1783080"/>
+            <a:off x="7973567" y="1828800"/>
+            <a:ext cx="3623767" cy="1783080"/>
           </a:xfrm>
           <a:prstGeom prst="roundRect">
             <a:avLst>
@@ -9463,7 +9247,7 @@
           <a:bodyPr wrap="square" lIns="0" tIns="0" rIns="0" bIns="0" rtlCol="0" anchor="ctr"/>
           <a:lstStyle/>
           <a:p>
-            <a:pPr algn="ctr" indent="0" marL="0">
+            <a:pPr marL="0" indent="0" algn="ctr">
               <a:buNone/>
             </a:pPr>
             <a:r>
@@ -9502,7 +9286,7 @@
           <a:bodyPr wrap="square" lIns="0" tIns="0" rIns="0" bIns="0" rtlCol="0" anchor="ctr"/>
           <a:lstStyle/>
           <a:p>
-            <a:pPr indent="0" marL="0">
+            <a:pPr marL="0" indent="0">
               <a:buNone/>
             </a:pPr>
             <a:r>
@@ -9541,7 +9325,7 @@
           <a:bodyPr wrap="square" lIns="0" tIns="0" rIns="0" bIns="0" rtlCol="0" anchor="t"/>
           <a:lstStyle/>
           <a:p>
-            <a:pPr indent="0" marL="0">
+            <a:pPr marL="0" indent="0">
               <a:lnSpc>
                 <a:spcPct val="108000"/>
               </a:lnSpc>
@@ -9610,11 +9394,11 @@
           <a:bodyPr wrap="square" lIns="0" tIns="0" rIns="0" bIns="0" rtlCol="0" anchor="ctr"/>
           <a:lstStyle/>
           <a:p>
-            <a:pPr indent="0" marL="0">
-              <a:buNone/>
-            </a:pPr>
-            <a:r>
-              <a:rPr lang="en-US" sz="950" b="1" spc="150" kern="0" dirty="0">
+            <a:pPr marL="0" indent="0">
+              <a:buNone/>
+            </a:pPr>
+            <a:r>
+              <a:rPr lang="en-US" sz="950" b="1" kern="0" spc="150" dirty="0">
                 <a:solidFill>
                   <a:srgbClr val="106B41"/>
                 </a:solidFill>
@@ -9649,7 +9433,7 @@
           <a:bodyPr wrap="square" lIns="0" tIns="0" rIns="0" bIns="0" rtlCol="0" anchor="ctr"/>
           <a:lstStyle/>
           <a:p>
-            <a:pPr indent="0" marL="0">
+            <a:pPr marL="0" indent="0">
               <a:lnSpc>
                 <a:spcPct val="112000"/>
               </a:lnSpc>
@@ -9672,7 +9456,7 @@
       </p:sp>
       <p:sp>
         <p:nvSpPr>
-          <p:cNvPr id="25" name="Slide Number Placeholder 0"/>
+          <p:cNvPr id="26" name="Slide Number Placeholder 0"/>
           <p:cNvSpPr>
             <a:spLocks noGrp="1"/>
           </p:cNvSpPr>
@@ -9690,7 +9474,7 @@
           </a:prstGeom>
           <a:extLst>
             <a:ext uri="{C572A759-6A51-4108-AA02-DFA0A04FC94B}">
-              <ma14:wrappingTextBoxFlag xmlns:ma14="http://schemas.microsoft.com/office/mac/drawingml/2011/main" val="0"/>
+              <ma14:wrappingTextBoxFlag xmlns:ma14="http://schemas.microsoft.com/office/mac/drawingml/2011/main" xmlns="" val="0"/>
             </a:ext>
           </a:extLst>
         </p:spPr>
@@ -9711,7 +9495,7 @@
           <a:p>
             <a:pPr algn="l"/>
             <a:fld id="{F7021451-1387-4CA6-816F-3879F97B5CBC}" type="slidenum">
-              <a:rPr b="0" lang="en-US"/>
+              <a:rPr lang="en-US" b="0"/>
               <a:t>14</a:t>
             </a:fld>
             <a:endParaRPr lang="en-US"/>
@@ -9786,7 +9570,7 @@
           <a:bodyPr wrap="square" lIns="0" tIns="0" rIns="0" bIns="0" rtlCol="0" anchor="ctr"/>
           <a:lstStyle/>
           <a:p>
-            <a:pPr algn="l" indent="0" marL="0">
+            <a:pPr marL="0" indent="0" algn="l">
               <a:buNone/>
             </a:pPr>
             <a:r>
@@ -9825,7 +9609,7 @@
           <a:bodyPr wrap="square" lIns="0" tIns="0" rIns="0" bIns="0" rtlCol="0" anchor="ctr"/>
           <a:lstStyle/>
           <a:p>
-            <a:pPr indent="0" marL="0">
+            <a:pPr marL="0" indent="0">
               <a:buNone/>
             </a:pPr>
             <a:r>
@@ -9891,11 +9675,11 @@
           <a:bodyPr wrap="square" lIns="0" tIns="0" rIns="0" bIns="0" rtlCol="0" anchor="ctr"/>
           <a:lstStyle/>
           <a:p>
-            <a:pPr algn="ctr" indent="0" marL="0">
-              <a:buNone/>
-            </a:pPr>
-            <a:r>
-              <a:rPr lang="en-US" sz="900" b="1" spc="100" kern="0" dirty="0">
+            <a:pPr marL="0" indent="0" algn="ctr">
+              <a:buNone/>
+            </a:pPr>
+            <a:r>
+              <a:rPr lang="en-US" sz="900" b="1" kern="0" spc="100" dirty="0">
                 <a:solidFill>
                   <a:srgbClr val="5A05F4"/>
                 </a:solidFill>
@@ -9911,14 +9695,14 @@
       </p:sp>
       <p:pic>
         <p:nvPicPr>
-          <p:cNvPr id="7" name="Image 0" descr="preencoded.png">    </p:cNvPr>
+          <p:cNvPr id="7" name="Image 0" descr="preencoded.png"/>
           <p:cNvPicPr>
             <a:picLocks noChangeAspect="1"/>
           </p:cNvPicPr>
           <p:nvPr/>
         </p:nvPicPr>
         <p:blipFill>
-          <a:blip r:embed="rId1"/>
+          <a:blip r:embed="rId3"/>
           <a:stretch>
             <a:fillRect/>
           </a:stretch>
@@ -9981,7 +9765,7 @@
           <a:bodyPr wrap="square" lIns="0" tIns="0" rIns="0" bIns="0" rtlCol="0" anchor="ctr"/>
           <a:lstStyle/>
           <a:p>
-            <a:pPr algn="ctr" indent="0" marL="0">
+            <a:pPr marL="0" indent="0" algn="ctr">
               <a:buNone/>
             </a:pPr>
             <a:r>
@@ -10047,7 +9831,7 @@
           <a:bodyPr wrap="square" lIns="0" tIns="0" rIns="0" bIns="0" rtlCol="0" anchor="ctr"/>
           <a:lstStyle/>
           <a:p>
-            <a:pPr algn="ctr" indent="0" marL="0">
+            <a:pPr marL="0" indent="0" algn="ctr">
               <a:buNone/>
             </a:pPr>
             <a:r>
@@ -10113,7 +9897,7 @@
           <a:bodyPr wrap="square" lIns="0" tIns="0" rIns="0" bIns="0" rtlCol="0" anchor="ctr"/>
           <a:lstStyle/>
           <a:p>
-            <a:pPr algn="ctr" indent="0" marL="0">
+            <a:pPr marL="0" indent="0" algn="ctr">
               <a:buNone/>
             </a:pPr>
             <a:r>
@@ -10179,7 +9963,7 @@
           <a:bodyPr wrap="square" lIns="0" tIns="0" rIns="0" bIns="0" rtlCol="0" anchor="ctr"/>
           <a:lstStyle/>
           <a:p>
-            <a:pPr algn="ctr" indent="0" marL="0">
+            <a:pPr marL="0" indent="0" algn="ctr">
               <a:buNone/>
             </a:pPr>
             <a:r>
@@ -10245,7 +10029,7 @@
           <a:bodyPr wrap="square" lIns="0" tIns="0" rIns="0" bIns="0" rtlCol="0" anchor="ctr"/>
           <a:lstStyle/>
           <a:p>
-            <a:pPr algn="ctr" indent="0" marL="0">
+            <a:pPr marL="0" indent="0" algn="ctr">
               <a:buNone/>
             </a:pPr>
             <a:r>
@@ -10311,7 +10095,7 @@
           <a:bodyPr wrap="square" lIns="0" tIns="0" rIns="0" bIns="0" rtlCol="0" anchor="ctr"/>
           <a:lstStyle/>
           <a:p>
-            <a:pPr algn="ctr" indent="0" marL="0">
+            <a:pPr marL="0" indent="0" algn="ctr">
               <a:buNone/>
             </a:pPr>
             <a:r>
@@ -10377,7 +10161,7 @@
           <a:bodyPr wrap="square" lIns="0" tIns="0" rIns="0" bIns="0" rtlCol="0" anchor="ctr"/>
           <a:lstStyle/>
           <a:p>
-            <a:pPr algn="ctr" indent="0" marL="0">
+            <a:pPr marL="0" indent="0" algn="ctr">
               <a:buNone/>
             </a:pPr>
             <a:r>
@@ -10443,7 +10227,7 @@
           <a:bodyPr wrap="square" lIns="0" tIns="0" rIns="0" bIns="0" rtlCol="0" anchor="ctr"/>
           <a:lstStyle/>
           <a:p>
-            <a:pPr algn="ctr" indent="0" marL="0">
+            <a:pPr marL="0" indent="0" algn="ctr">
               <a:buNone/>
             </a:pPr>
             <a:r>
@@ -10504,7 +10288,7 @@
           <a:bodyPr wrap="square" lIns="0" tIns="0" rIns="0" bIns="0" rtlCol="0" anchor="ctr"/>
           <a:lstStyle/>
           <a:p>
-            <a:pPr indent="0" marL="0">
+            <a:pPr marL="0" indent="0">
               <a:lnSpc>
                 <a:spcPct val="112000"/>
               </a:lnSpc>
@@ -10527,7 +10311,7 @@
       </p:sp>
       <p:sp>
         <p:nvSpPr>
-          <p:cNvPr id="25" name="Slide Number Placeholder 0"/>
+          <p:cNvPr id="26" name="Slide Number Placeholder 0"/>
           <p:cNvSpPr>
             <a:spLocks noGrp="1"/>
           </p:cNvSpPr>
@@ -10545,7 +10329,7 @@
           </a:prstGeom>
           <a:extLst>
             <a:ext uri="{C572A759-6A51-4108-AA02-DFA0A04FC94B}">
-              <ma14:wrappingTextBoxFlag xmlns:ma14="http://schemas.microsoft.com/office/mac/drawingml/2011/main" val="0"/>
+              <ma14:wrappingTextBoxFlag xmlns:ma14="http://schemas.microsoft.com/office/mac/drawingml/2011/main" xmlns="" val="0"/>
             </a:ext>
           </a:extLst>
         </p:spPr>
@@ -10566,7 +10350,7 @@
           <a:p>
             <a:pPr algn="l"/>
             <a:fld id="{F7021451-1387-4CA6-816F-3879F97B5CBC}" type="slidenum">
-              <a:rPr b="0" lang="en-US"/>
+              <a:rPr lang="en-US" b="0"/>
               <a:t>15</a:t>
             </a:fld>
             <a:endParaRPr lang="en-US"/>
@@ -10619,11 +10403,11 @@
           <a:bodyPr wrap="square" lIns="0" tIns="0" rIns="0" bIns="0" rtlCol="0" anchor="ctr"/>
           <a:lstStyle/>
           <a:p>
-            <a:pPr indent="0" marL="0">
-              <a:buNone/>
-            </a:pPr>
-            <a:r>
-              <a:rPr lang="en-US" sz="1200" b="1" spc="400" kern="0" dirty="0">
+            <a:pPr marL="0" indent="0">
+              <a:buNone/>
+            </a:pPr>
+            <a:r>
+              <a:rPr lang="en-US" sz="1200" b="1" kern="0" spc="400" dirty="0">
                 <a:solidFill>
                   <a:srgbClr val="FFFFFF"/>
                 </a:solidFill>
@@ -10658,7 +10442,7 @@
           <a:bodyPr wrap="square" lIns="0" tIns="0" rIns="0" bIns="0" rtlCol="0" anchor="ctr"/>
           <a:lstStyle/>
           <a:p>
-            <a:pPr indent="0" marL="0">
+            <a:pPr marL="0" indent="0">
               <a:buNone/>
             </a:pPr>
             <a:r>
@@ -10697,7 +10481,7 @@
           <a:bodyPr wrap="square" lIns="0" tIns="0" rIns="0" bIns="0" rtlCol="0" anchor="t"/>
           <a:lstStyle/>
           <a:p>
-            <a:pPr indent="0" marL="0">
+            <a:pPr marL="0" indent="0">
               <a:buNone/>
             </a:pPr>
             <a:r>
@@ -10758,7 +10542,7 @@
           <a:bodyPr wrap="square" lIns="0" tIns="0" rIns="0" bIns="0" rtlCol="0" anchor="ctr"/>
           <a:lstStyle/>
           <a:p>
-            <a:pPr algn="ctr" indent="0" marL="0">
+            <a:pPr marL="0" indent="0" algn="ctr">
               <a:buNone/>
             </a:pPr>
             <a:r>
@@ -10844,7 +10628,7 @@
           <a:bodyPr wrap="square" lIns="0" tIns="0" rIns="0" bIns="0" rtlCol="0" anchor="ctr"/>
           <a:lstStyle/>
           <a:p>
-            <a:pPr indent="0" marL="0">
+            <a:pPr marL="0" indent="0">
               <a:buNone/>
             </a:pPr>
             <a:r>
@@ -10905,11 +10689,11 @@
           <a:bodyPr wrap="square" lIns="0" tIns="0" rIns="0" bIns="0" rtlCol="0" anchor="ctr"/>
           <a:lstStyle/>
           <a:p>
-            <a:pPr algn="ctr" indent="0" marL="0">
-              <a:buNone/>
-            </a:pPr>
-            <a:r>
-              <a:rPr lang="en-US" sz="900" b="1" spc="100" kern="0" dirty="0">
+            <a:pPr marL="0" indent="0" algn="ctr">
+              <a:buNone/>
+            </a:pPr>
+            <a:r>
+              <a:rPr lang="en-US" sz="900" b="1" kern="0" spc="100" dirty="0">
                 <a:solidFill>
                   <a:srgbClr val="FFFFFF"/>
                 </a:solidFill>
@@ -10925,14 +10709,14 @@
       </p:sp>
       <p:pic>
         <p:nvPicPr>
-          <p:cNvPr id="6" name="Image 0" descr="preencoded.png">    </p:cNvPr>
+          <p:cNvPr id="6" name="Image 0" descr="preencoded.png"/>
           <p:cNvPicPr>
             <a:picLocks noChangeAspect="1"/>
           </p:cNvPicPr>
           <p:nvPr/>
         </p:nvPicPr>
         <p:blipFill>
-          <a:blip r:embed="rId1"/>
+          <a:blip r:embed="rId3"/>
           <a:stretch>
             <a:fillRect/>
           </a:stretch>
@@ -11010,7 +10794,7 @@
           <a:bodyPr wrap="square" lIns="0" tIns="0" rIns="0" bIns="0" rtlCol="0" anchor="ctr"/>
           <a:lstStyle/>
           <a:p>
-            <a:pPr algn="ctr" indent="0" marL="0">
+            <a:pPr marL="0" indent="0" algn="ctr">
               <a:buNone/>
             </a:pPr>
             <a:r>
@@ -11049,7 +10833,7 @@
           <a:bodyPr wrap="square" lIns="0" tIns="0" rIns="0" bIns="0" rtlCol="0" anchor="ctr"/>
           <a:lstStyle/>
           <a:p>
-            <a:pPr indent="0" marL="0">
+            <a:pPr marL="0" indent="0">
               <a:buNone/>
             </a:pPr>
             <a:r>
@@ -11088,7 +10872,7 @@
           <a:bodyPr wrap="square" lIns="0" tIns="0" rIns="0" bIns="0" rtlCol="0" anchor="t"/>
           <a:lstStyle/>
           <a:p>
-            <a:pPr indent="0" marL="0">
+            <a:pPr marL="0" indent="0">
               <a:lnSpc>
                 <a:spcPct val="108000"/>
               </a:lnSpc>
@@ -11172,7 +10956,7 @@
           <a:bodyPr wrap="square" lIns="0" tIns="0" rIns="0" bIns="0" rtlCol="0" anchor="ctr"/>
           <a:lstStyle/>
           <a:p>
-            <a:pPr algn="ctr" indent="0" marL="0">
+            <a:pPr marL="0" indent="0" algn="ctr">
               <a:buNone/>
             </a:pPr>
             <a:r>
@@ -11211,7 +10995,7 @@
           <a:bodyPr wrap="square" lIns="0" tIns="0" rIns="0" bIns="0" rtlCol="0" anchor="ctr"/>
           <a:lstStyle/>
           <a:p>
-            <a:pPr indent="0" marL="0">
+            <a:pPr marL="0" indent="0">
               <a:buNone/>
             </a:pPr>
             <a:r>
@@ -11250,7 +11034,7 @@
           <a:bodyPr wrap="square" lIns="0" tIns="0" rIns="0" bIns="0" rtlCol="0" anchor="t"/>
           <a:lstStyle/>
           <a:p>
-            <a:pPr indent="0" marL="0">
+            <a:pPr marL="0" indent="0">
               <a:lnSpc>
                 <a:spcPct val="108000"/>
               </a:lnSpc>
@@ -11334,7 +11118,7 @@
           <a:bodyPr wrap="square" lIns="0" tIns="0" rIns="0" bIns="0" rtlCol="0" anchor="ctr"/>
           <a:lstStyle/>
           <a:p>
-            <a:pPr algn="ctr" indent="0" marL="0">
+            <a:pPr marL="0" indent="0" algn="ctr">
               <a:buNone/>
             </a:pPr>
             <a:r>
@@ -11373,7 +11157,7 @@
           <a:bodyPr wrap="square" lIns="0" tIns="0" rIns="0" bIns="0" rtlCol="0" anchor="ctr"/>
           <a:lstStyle/>
           <a:p>
-            <a:pPr indent="0" marL="0">
+            <a:pPr marL="0" indent="0">
               <a:buNone/>
             </a:pPr>
             <a:r>
@@ -11412,7 +11196,7 @@
           <a:bodyPr wrap="square" lIns="0" tIns="0" rIns="0" bIns="0" rtlCol="0" anchor="t"/>
           <a:lstStyle/>
           <a:p>
-            <a:pPr indent="0" marL="0">
+            <a:pPr marL="0" indent="0">
               <a:lnSpc>
                 <a:spcPct val="108000"/>
               </a:lnSpc>
@@ -11496,7 +11280,7 @@
           <a:bodyPr wrap="square" lIns="0" tIns="0" rIns="0" bIns="0" rtlCol="0" anchor="ctr"/>
           <a:lstStyle/>
           <a:p>
-            <a:pPr algn="ctr" indent="0" marL="0">
+            <a:pPr marL="0" indent="0" algn="ctr">
               <a:buNone/>
             </a:pPr>
             <a:r>
@@ -11535,7 +11319,7 @@
           <a:bodyPr wrap="square" lIns="0" tIns="0" rIns="0" bIns="0" rtlCol="0" anchor="ctr"/>
           <a:lstStyle/>
           <a:p>
-            <a:pPr indent="0" marL="0">
+            <a:pPr marL="0" indent="0">
               <a:buNone/>
             </a:pPr>
             <a:r>
@@ -11574,7 +11358,7 @@
           <a:bodyPr wrap="square" lIns="0" tIns="0" rIns="0" bIns="0" rtlCol="0" anchor="t"/>
           <a:lstStyle/>
           <a:p>
-            <a:pPr indent="0" marL="0">
+            <a:pPr marL="0" indent="0">
               <a:lnSpc>
                 <a:spcPct val="108000"/>
               </a:lnSpc>
@@ -11604,7 +11388,7 @@
         <p:spPr>
           <a:xfrm>
             <a:off x="566928" y="5074920"/>
-            <a:ext cx="11064240" cy="1051560"/>
+            <a:ext cx="11247120" cy="1051560"/>
           </a:xfrm>
           <a:prstGeom prst="roundRect">
             <a:avLst>
@@ -11638,11 +11422,11 @@
           <a:bodyPr wrap="square" lIns="0" tIns="0" rIns="0" bIns="0" rtlCol="0" anchor="ctr"/>
           <a:lstStyle/>
           <a:p>
-            <a:pPr indent="0" marL="0">
-              <a:buNone/>
-            </a:pPr>
-            <a:r>
-              <a:rPr lang="en-US" sz="950" b="1" spc="150" kern="0" dirty="0">
+            <a:pPr marL="0" indent="0">
+              <a:buNone/>
+            </a:pPr>
+            <a:r>
+              <a:rPr lang="en-US" sz="950" b="1" kern="0" spc="150" dirty="0">
                 <a:solidFill>
                   <a:srgbClr val="FFFFFF"/>
                 </a:solidFill>
@@ -11677,7 +11461,7 @@
           <a:bodyPr wrap="square" lIns="0" tIns="0" rIns="0" bIns="0" rtlCol="0" anchor="ctr"/>
           <a:lstStyle/>
           <a:p>
-            <a:pPr indent="0" marL="0">
+            <a:pPr marL="0" indent="0">
               <a:lnSpc>
                 <a:spcPct val="112000"/>
               </a:lnSpc>
@@ -11700,7 +11484,7 @@
       </p:sp>
       <p:sp>
         <p:nvSpPr>
-          <p:cNvPr id="25" name="Slide Number Placeholder 0"/>
+          <p:cNvPr id="30" name="Slide Number Placeholder 0"/>
           <p:cNvSpPr>
             <a:spLocks noGrp="1"/>
           </p:cNvSpPr>
@@ -11718,7 +11502,7 @@
           </a:prstGeom>
           <a:extLst>
             <a:ext uri="{C572A759-6A51-4108-AA02-DFA0A04FC94B}">
-              <ma14:wrappingTextBoxFlag xmlns:ma14="http://schemas.microsoft.com/office/mac/drawingml/2011/main" val="0"/>
+              <ma14:wrappingTextBoxFlag xmlns:ma14="http://schemas.microsoft.com/office/mac/drawingml/2011/main" xmlns="" val="0"/>
             </a:ext>
           </a:extLst>
         </p:spPr>
@@ -11739,7 +11523,7 @@
           <a:p>
             <a:pPr algn="l"/>
             <a:fld id="{F7021451-1387-4CA6-816F-3879F97B5CBC}" type="slidenum">
-              <a:rPr b="0" lang="en-US"/>
+              <a:rPr lang="en-US" b="0"/>
               <a:t>17</a:t>
             </a:fld>
             <a:endParaRPr lang="en-US"/>
@@ -11814,7 +11598,7 @@
           <a:bodyPr wrap="square" lIns="0" tIns="0" rIns="0" bIns="0" rtlCol="0" anchor="ctr"/>
           <a:lstStyle/>
           <a:p>
-            <a:pPr indent="0" marL="0">
+            <a:pPr marL="0" indent="0">
               <a:buNone/>
             </a:pPr>
             <a:r>
@@ -11875,11 +11659,11 @@
           <a:bodyPr wrap="square" lIns="0" tIns="0" rIns="0" bIns="0" rtlCol="0" anchor="ctr"/>
           <a:lstStyle/>
           <a:p>
-            <a:pPr algn="ctr" indent="0" marL="0">
-              <a:buNone/>
-            </a:pPr>
-            <a:r>
-              <a:rPr lang="en-US" sz="900" b="1" spc="100" kern="0" dirty="0">
+            <a:pPr marL="0" indent="0" algn="ctr">
+              <a:buNone/>
+            </a:pPr>
+            <a:r>
+              <a:rPr lang="en-US" sz="900" b="1" kern="0" spc="100" dirty="0">
                 <a:solidFill>
                   <a:srgbClr val="FFFFFF"/>
                 </a:solidFill>
@@ -11895,14 +11679,14 @@
       </p:sp>
       <p:pic>
         <p:nvPicPr>
-          <p:cNvPr id="6" name="Image 0" descr="preencoded.png">    </p:cNvPr>
+          <p:cNvPr id="6" name="Image 0" descr="preencoded.png"/>
           <p:cNvPicPr>
             <a:picLocks noChangeAspect="1"/>
           </p:cNvPicPr>
           <p:nvPr/>
         </p:nvPicPr>
         <p:blipFill>
-          <a:blip r:embed="rId1"/>
+          <a:blip r:embed="rId3"/>
           <a:stretch>
             <a:fillRect/>
           </a:stretch>
@@ -11958,7 +11742,7 @@
           <a:bodyPr wrap="square" lIns="0" tIns="0" rIns="0" bIns="0" rtlCol="0" anchor="ctr"/>
           <a:lstStyle/>
           <a:p>
-            <a:pPr algn="ctr" indent="0" marL="0">
+            <a:pPr marL="0" indent="0" algn="ctr">
               <a:buNone/>
             </a:pPr>
             <a:r>
@@ -11997,7 +11781,7 @@
           <a:bodyPr wrap="square" lIns="0" tIns="0" rIns="0" bIns="0" rtlCol="0" anchor="ctr"/>
           <a:lstStyle/>
           <a:p>
-            <a:pPr indent="0" marL="0">
+            <a:pPr marL="0" indent="0">
               <a:buNone/>
             </a:pPr>
             <a:r>
@@ -12011,9 +11795,6 @@
               </a:rPr>
               <a:t>Прогін із чистого клону  </a:t>
             </a:r>
-            <a:pPr indent="0" marL="0">
-              <a:buNone/>
-            </a:pPr>
             <a:r>
               <a:rPr lang="en-US" sz="1200" dirty="0">
                 <a:solidFill>
@@ -12070,7 +11851,7 @@
           <a:bodyPr wrap="square" lIns="0" tIns="0" rIns="0" bIns="0" rtlCol="0" anchor="ctr"/>
           <a:lstStyle/>
           <a:p>
-            <a:pPr algn="ctr" indent="0" marL="0">
+            <a:pPr marL="0" indent="0" algn="ctr">
               <a:buNone/>
             </a:pPr>
             <a:r>
@@ -12109,7 +11890,7 @@
           <a:bodyPr wrap="square" lIns="0" tIns="0" rIns="0" bIns="0" rtlCol="0" anchor="ctr"/>
           <a:lstStyle/>
           <a:p>
-            <a:pPr indent="0" marL="0">
+            <a:pPr marL="0" indent="0">
               <a:buNone/>
             </a:pPr>
             <a:r>
@@ -12123,9 +11904,6 @@
               </a:rPr>
               <a:t>Інцидент за рунбуком  </a:t>
             </a:r>
-            <a:pPr indent="0" marL="0">
-              <a:buNone/>
-            </a:pPr>
             <a:r>
               <a:rPr lang="en-US" sz="1200" dirty="0">
                 <a:solidFill>
@@ -12182,7 +11960,7 @@
           <a:bodyPr wrap="square" lIns="0" tIns="0" rIns="0" bIns="0" rtlCol="0" anchor="ctr"/>
           <a:lstStyle/>
           <a:p>
-            <a:pPr algn="ctr" indent="0" marL="0">
+            <a:pPr marL="0" indent="0" algn="ctr">
               <a:buNone/>
             </a:pPr>
             <a:r>
@@ -12221,7 +11999,7 @@
           <a:bodyPr wrap="square" lIns="0" tIns="0" rIns="0" bIns="0" rtlCol="0" anchor="ctr"/>
           <a:lstStyle/>
           <a:p>
-            <a:pPr indent="0" marL="0">
+            <a:pPr marL="0" indent="0">
               <a:buNone/>
             </a:pPr>
             <a:r>
@@ -12235,9 +12013,6 @@
               </a:rPr>
               <a:t>KPI-проходка  </a:t>
             </a:r>
-            <a:pPr indent="0" marL="0">
-              <a:buNone/>
-            </a:pPr>
             <a:r>
               <a:rPr lang="en-US" sz="1200" dirty="0">
                 <a:solidFill>
@@ -12294,7 +12069,7 @@
           <a:bodyPr wrap="square" lIns="0" tIns="0" rIns="0" bIns="0" rtlCol="0" anchor="ctr"/>
           <a:lstStyle/>
           <a:p>
-            <a:pPr algn="ctr" indent="0" marL="0">
+            <a:pPr marL="0" indent="0" algn="ctr">
               <a:buNone/>
             </a:pPr>
             <a:r>
@@ -12333,7 +12108,7 @@
           <a:bodyPr wrap="square" lIns="0" tIns="0" rIns="0" bIns="0" rtlCol="0" anchor="ctr"/>
           <a:lstStyle/>
           <a:p>
-            <a:pPr indent="0" marL="0">
+            <a:pPr marL="0" indent="0">
               <a:buNone/>
             </a:pPr>
             <a:r>
@@ -12347,9 +12122,6 @@
               </a:rPr>
               <a:t>Свій 30-day rollout  </a:t>
             </a:r>
-            <a:pPr indent="0" marL="0">
-              <a:buNone/>
-            </a:pPr>
             <a:r>
               <a:rPr lang="en-US" sz="1200" dirty="0">
                 <a:solidFill>
@@ -12406,7 +12178,7 @@
           <a:bodyPr wrap="square" lIns="0" tIns="0" rIns="0" bIns="0" rtlCol="0" anchor="ctr"/>
           <a:lstStyle/>
           <a:p>
-            <a:pPr algn="ctr" indent="0" marL="0">
+            <a:pPr marL="0" indent="0" algn="ctr">
               <a:buNone/>
             </a:pPr>
             <a:r>
@@ -12445,7 +12217,7 @@
           <a:bodyPr wrap="square" lIns="0" tIns="0" rIns="0" bIns="0" rtlCol="0" anchor="ctr"/>
           <a:lstStyle/>
           <a:p>
-            <a:pPr indent="0" marL="0">
+            <a:pPr marL="0" indent="0">
               <a:buNone/>
             </a:pPr>
             <a:r>
@@ -12459,9 +12231,6 @@
               </a:rPr>
               <a:t>/metrics · опційно  </a:t>
             </a:r>
-            <a:pPr indent="0" marL="0">
-              <a:buNone/>
-            </a:pPr>
             <a:r>
               <a:rPr lang="en-US" sz="1200" dirty="0">
                 <a:solidFill>
@@ -12497,7 +12266,7 @@
           </a:prstGeom>
           <a:extLst>
             <a:ext uri="{C572A759-6A51-4108-AA02-DFA0A04FC94B}">
-              <ma14:wrappingTextBoxFlag xmlns:ma14="http://schemas.microsoft.com/office/mac/drawingml/2011/main" val="0"/>
+              <ma14:wrappingTextBoxFlag xmlns:ma14="http://schemas.microsoft.com/office/mac/drawingml/2011/main" xmlns="" val="0"/>
             </a:ext>
           </a:extLst>
         </p:spPr>
@@ -12518,7 +12287,7 @@
           <a:p>
             <a:pPr algn="l"/>
             <a:fld id="{F7021451-1387-4CA6-816F-3879F97B5CBC}" type="slidenum">
-              <a:rPr b="0" lang="en-US"/>
+              <a:rPr lang="en-US" b="0"/>
               <a:t>18</a:t>
             </a:fld>
             <a:endParaRPr lang="en-US"/>
@@ -12571,11 +12340,11 @@
           <a:bodyPr wrap="square" lIns="0" tIns="0" rIns="0" bIns="0" rtlCol="0" anchor="ctr"/>
           <a:lstStyle/>
           <a:p>
-            <a:pPr indent="0" marL="0">
-              <a:buNone/>
-            </a:pPr>
-            <a:r>
-              <a:rPr lang="en-US" sz="1200" b="1" spc="400" kern="0" dirty="0">
+            <a:pPr marL="0" indent="0">
+              <a:buNone/>
+            </a:pPr>
+            <a:r>
+              <a:rPr lang="en-US" sz="1200" b="1" kern="0" spc="400" dirty="0">
                 <a:solidFill>
                   <a:srgbClr val="FFFFFF"/>
                 </a:solidFill>
@@ -12610,7 +12379,7 @@
           <a:bodyPr wrap="square" lIns="0" tIns="0" rIns="0" bIns="0" rtlCol="0" anchor="ctr"/>
           <a:lstStyle/>
           <a:p>
-            <a:pPr indent="0" marL="0">
+            <a:pPr marL="0" indent="0">
               <a:buNone/>
             </a:pPr>
             <a:r>
@@ -12649,7 +12418,7 @@
           <a:bodyPr wrap="square" lIns="0" tIns="0" rIns="0" bIns="0" rtlCol="0" anchor="t"/>
           <a:lstStyle/>
           <a:p>
-            <a:pPr indent="0" marL="0">
+            <a:pPr marL="0" indent="0">
               <a:buNone/>
             </a:pPr>
             <a:r>
@@ -12735,7 +12504,7 @@
           <a:bodyPr wrap="square" lIns="0" tIns="0" rIns="0" bIns="0" rtlCol="0" anchor="ctr"/>
           <a:lstStyle/>
           <a:p>
-            <a:pPr indent="0" marL="0">
+            <a:pPr marL="0" indent="0">
               <a:buNone/>
             </a:pPr>
             <a:r>
@@ -12774,7 +12543,7 @@
           <a:bodyPr wrap="square" lIns="0" tIns="0" rIns="0" bIns="0" rtlCol="0" anchor="t"/>
           <a:lstStyle/>
           <a:p>
-            <a:pPr indent="0" marL="0">
+            <a:pPr marL="0" indent="0">
               <a:lnSpc>
                 <a:spcPct val="100000"/>
               </a:lnSpc>
@@ -12843,11 +12612,11 @@
           <a:bodyPr wrap="square" lIns="0" tIns="0" rIns="0" bIns="0" rtlCol="0" anchor="ctr"/>
           <a:lstStyle/>
           <a:p>
-            <a:pPr algn="ctr" indent="0" marL="0">
-              <a:buNone/>
-            </a:pPr>
-            <a:r>
-              <a:rPr lang="en-US" sz="900" b="1" spc="100" kern="0" dirty="0">
+            <a:pPr marL="0" indent="0" algn="ctr">
+              <a:buNone/>
+            </a:pPr>
+            <a:r>
+              <a:rPr lang="en-US" sz="900" b="1" kern="0" spc="100" dirty="0">
                 <a:solidFill>
                   <a:srgbClr val="5A05F4"/>
                 </a:solidFill>
@@ -12863,14 +12632,14 @@
       </p:sp>
       <p:pic>
         <p:nvPicPr>
-          <p:cNvPr id="7" name="Image 0" descr="preencoded.png">    </p:cNvPr>
+          <p:cNvPr id="7" name="Image 0" descr="preencoded.png"/>
           <p:cNvPicPr>
             <a:picLocks noChangeAspect="1"/>
           </p:cNvPicPr>
           <p:nvPr/>
         </p:nvPicPr>
         <p:blipFill>
-          <a:blip r:embed="rId1"/>
+          <a:blip r:embed="rId3"/>
           <a:stretch>
             <a:fillRect/>
           </a:stretch>
@@ -12948,7 +12717,7 @@
           <a:bodyPr wrap="square" lIns="0" tIns="0" rIns="0" bIns="0" rtlCol="0" anchor="ctr"/>
           <a:lstStyle/>
           <a:p>
-            <a:pPr algn="ctr" indent="0" marL="0">
+            <a:pPr marL="0" indent="0" algn="ctr">
               <a:buNone/>
             </a:pPr>
             <a:r>
@@ -12987,7 +12756,7 @@
           <a:bodyPr wrap="square" lIns="0" tIns="0" rIns="0" bIns="0" rtlCol="0" anchor="ctr"/>
           <a:lstStyle/>
           <a:p>
-            <a:pPr indent="0" marL="0">
+            <a:pPr marL="0" indent="0">
               <a:buNone/>
             </a:pPr>
             <a:r>
@@ -13026,7 +12795,7 @@
           <a:bodyPr wrap="square" lIns="0" tIns="0" rIns="0" bIns="0" rtlCol="0" anchor="t"/>
           <a:lstStyle/>
           <a:p>
-            <a:pPr indent="0" marL="0">
+            <a:pPr marL="0" indent="0">
               <a:lnSpc>
                 <a:spcPct val="108000"/>
               </a:lnSpc>
@@ -13110,7 +12879,7 @@
           <a:bodyPr wrap="square" lIns="0" tIns="0" rIns="0" bIns="0" rtlCol="0" anchor="ctr"/>
           <a:lstStyle/>
           <a:p>
-            <a:pPr algn="ctr" indent="0" marL="0">
+            <a:pPr marL="0" indent="0" algn="ctr">
               <a:buNone/>
             </a:pPr>
             <a:r>
@@ -13149,7 +12918,7 @@
           <a:bodyPr wrap="square" lIns="0" tIns="0" rIns="0" bIns="0" rtlCol="0" anchor="ctr"/>
           <a:lstStyle/>
           <a:p>
-            <a:pPr indent="0" marL="0">
+            <a:pPr marL="0" indent="0">
               <a:buNone/>
             </a:pPr>
             <a:r>
@@ -13188,7 +12957,7 @@
           <a:bodyPr wrap="square" lIns="0" tIns="0" rIns="0" bIns="0" rtlCol="0" anchor="t"/>
           <a:lstStyle/>
           <a:p>
-            <a:pPr indent="0" marL="0">
+            <a:pPr marL="0" indent="0">
               <a:lnSpc>
                 <a:spcPct val="108000"/>
               </a:lnSpc>
@@ -13272,7 +13041,7 @@
           <a:bodyPr wrap="square" lIns="0" tIns="0" rIns="0" bIns="0" rtlCol="0" anchor="ctr"/>
           <a:lstStyle/>
           <a:p>
-            <a:pPr algn="ctr" indent="0" marL="0">
+            <a:pPr marL="0" indent="0" algn="ctr">
               <a:buNone/>
             </a:pPr>
             <a:r>
@@ -13311,7 +13080,7 @@
           <a:bodyPr wrap="square" lIns="0" tIns="0" rIns="0" bIns="0" rtlCol="0" anchor="ctr"/>
           <a:lstStyle/>
           <a:p>
-            <a:pPr indent="0" marL="0">
+            <a:pPr marL="0" indent="0">
               <a:buNone/>
             </a:pPr>
             <a:r>
@@ -13350,7 +13119,7 @@
           <a:bodyPr wrap="square" lIns="0" tIns="0" rIns="0" bIns="0" rtlCol="0" anchor="t"/>
           <a:lstStyle/>
           <a:p>
-            <a:pPr indent="0" marL="0">
+            <a:pPr marL="0" indent="0">
               <a:lnSpc>
                 <a:spcPct val="108000"/>
               </a:lnSpc>
@@ -13434,7 +13203,7 @@
           <a:bodyPr wrap="square" lIns="0" tIns="0" rIns="0" bIns="0" rtlCol="0" anchor="ctr"/>
           <a:lstStyle/>
           <a:p>
-            <a:pPr algn="ctr" indent="0" marL="0">
+            <a:pPr marL="0" indent="0" algn="ctr">
               <a:buNone/>
             </a:pPr>
             <a:r>
@@ -13473,7 +13242,7 @@
           <a:bodyPr wrap="square" lIns="0" tIns="0" rIns="0" bIns="0" rtlCol="0" anchor="ctr"/>
           <a:lstStyle/>
           <a:p>
-            <a:pPr indent="0" marL="0">
+            <a:pPr marL="0" indent="0">
               <a:buNone/>
             </a:pPr>
             <a:r>
@@ -13512,7 +13281,7 @@
           <a:bodyPr wrap="square" lIns="0" tIns="0" rIns="0" bIns="0" rtlCol="0" anchor="t"/>
           <a:lstStyle/>
           <a:p>
-            <a:pPr indent="0" marL="0">
+            <a:pPr marL="0" indent="0">
               <a:lnSpc>
                 <a:spcPct val="108000"/>
               </a:lnSpc>
@@ -13596,7 +13365,7 @@
           <a:bodyPr wrap="square" lIns="0" tIns="0" rIns="0" bIns="0" rtlCol="0" anchor="ctr"/>
           <a:lstStyle/>
           <a:p>
-            <a:pPr algn="ctr" indent="0" marL="0">
+            <a:pPr marL="0" indent="0" algn="ctr">
               <a:buNone/>
             </a:pPr>
             <a:r>
@@ -13635,7 +13404,7 @@
           <a:bodyPr wrap="square" lIns="0" tIns="0" rIns="0" bIns="0" rtlCol="0" anchor="ctr"/>
           <a:lstStyle/>
           <a:p>
-            <a:pPr indent="0" marL="0">
+            <a:pPr marL="0" indent="0">
               <a:buNone/>
             </a:pPr>
             <a:r>
@@ -13674,7 +13443,7 @@
           <a:bodyPr wrap="square" lIns="0" tIns="0" rIns="0" bIns="0" rtlCol="0" anchor="t"/>
           <a:lstStyle/>
           <a:p>
-            <a:pPr indent="0" marL="0">
+            <a:pPr marL="0" indent="0">
               <a:lnSpc>
                 <a:spcPct val="108000"/>
               </a:lnSpc>
@@ -13697,7 +13466,7 @@
       </p:sp>
       <p:sp>
         <p:nvSpPr>
-          <p:cNvPr id="25" name="Slide Number Placeholder 0"/>
+          <p:cNvPr id="33" name="Slide Number Placeholder 0"/>
           <p:cNvSpPr>
             <a:spLocks noGrp="1"/>
           </p:cNvSpPr>
@@ -13715,7 +13484,7 @@
           </a:prstGeom>
           <a:extLst>
             <a:ext uri="{C572A759-6A51-4108-AA02-DFA0A04FC94B}">
-              <ma14:wrappingTextBoxFlag xmlns:ma14="http://schemas.microsoft.com/office/mac/drawingml/2011/main" val="0"/>
+              <ma14:wrappingTextBoxFlag xmlns:ma14="http://schemas.microsoft.com/office/mac/drawingml/2011/main" xmlns="" val="0"/>
             </a:ext>
           </a:extLst>
         </p:spPr>
@@ -13736,7 +13505,7 @@
           <a:p>
             <a:pPr algn="l"/>
             <a:fld id="{F7021451-1387-4CA6-816F-3879F97B5CBC}" type="slidenum">
-              <a:rPr b="0" lang="en-US"/>
+              <a:rPr lang="en-US" b="0"/>
               <a:t>2</a:t>
             </a:fld>
             <a:endParaRPr lang="en-US"/>
@@ -13811,7 +13580,7 @@
           <a:bodyPr wrap="square" lIns="0" tIns="0" rIns="0" bIns="0" rtlCol="0" anchor="ctr"/>
           <a:lstStyle/>
           <a:p>
-            <a:pPr indent="0" marL="0">
+            <a:pPr marL="0" indent="0">
               <a:buNone/>
             </a:pPr>
             <a:r>
@@ -13877,11 +13646,11 @@
           <a:bodyPr wrap="square" lIns="0" tIns="0" rIns="0" bIns="0" rtlCol="0" anchor="ctr"/>
           <a:lstStyle/>
           <a:p>
-            <a:pPr algn="ctr" indent="0" marL="0">
-              <a:buNone/>
-            </a:pPr>
-            <a:r>
-              <a:rPr lang="en-US" sz="900" b="1" spc="100" kern="0" dirty="0">
+            <a:pPr marL="0" indent="0" algn="ctr">
+              <a:buNone/>
+            </a:pPr>
+            <a:r>
+              <a:rPr lang="en-US" sz="900" b="1" kern="0" spc="100" dirty="0">
                 <a:solidFill>
                   <a:srgbClr val="1A4FBF"/>
                 </a:solidFill>
@@ -13897,14 +13666,14 @@
       </p:sp>
       <p:pic>
         <p:nvPicPr>
-          <p:cNvPr id="6" name="Image 0" descr="preencoded.png">    </p:cNvPr>
+          <p:cNvPr id="6" name="Image 0" descr="preencoded.png"/>
           <p:cNvPicPr>
             <a:picLocks noChangeAspect="1"/>
           </p:cNvPicPr>
           <p:nvPr/>
         </p:nvPicPr>
         <p:blipFill>
-          <a:blip r:embed="rId1"/>
+          <a:blip r:embed="rId3"/>
           <a:stretch>
             <a:fillRect/>
           </a:stretch>
@@ -13962,7 +13731,7 @@
           <a:bodyPr wrap="square" lIns="0" tIns="0" rIns="0" bIns="0" rtlCol="0" anchor="ctr"/>
           <a:lstStyle/>
           <a:p>
-            <a:pPr indent="0" marL="0">
+            <a:pPr marL="0" indent="0">
               <a:buNone/>
             </a:pPr>
             <a:r>
@@ -14001,7 +13770,7 @@
           <a:bodyPr wrap="square" lIns="0" tIns="0" rIns="0" bIns="0" rtlCol="0" anchor="t"/>
           <a:lstStyle/>
           <a:p>
-            <a:pPr indent="0" marL="0">
+            <a:pPr marL="0" indent="0">
               <a:lnSpc>
                 <a:spcPct val="108000"/>
               </a:lnSpc>
@@ -14065,7 +13834,7 @@
           <a:bodyPr wrap="square" lIns="0" tIns="0" rIns="0" bIns="0" rtlCol="0" anchor="ctr"/>
           <a:lstStyle/>
           <a:p>
-            <a:pPr indent="0" marL="0">
+            <a:pPr marL="0" indent="0">
               <a:buNone/>
             </a:pPr>
             <a:r>
@@ -14104,7 +13873,7 @@
           <a:bodyPr wrap="square" lIns="0" tIns="0" rIns="0" bIns="0" rtlCol="0" anchor="t"/>
           <a:lstStyle/>
           <a:p>
-            <a:pPr indent="0" marL="0">
+            <a:pPr marL="0" indent="0">
               <a:lnSpc>
                 <a:spcPct val="108000"/>
               </a:lnSpc>
@@ -14168,7 +13937,7 @@
           <a:bodyPr wrap="square" lIns="0" tIns="0" rIns="0" bIns="0" rtlCol="0" anchor="ctr"/>
           <a:lstStyle/>
           <a:p>
-            <a:pPr indent="0" marL="0">
+            <a:pPr marL="0" indent="0">
               <a:buNone/>
             </a:pPr>
             <a:r>
@@ -14207,7 +13976,7 @@
           <a:bodyPr wrap="square" lIns="0" tIns="0" rIns="0" bIns="0" rtlCol="0" anchor="t"/>
           <a:lstStyle/>
           <a:p>
-            <a:pPr indent="0" marL="0">
+            <a:pPr marL="0" indent="0">
               <a:lnSpc>
                 <a:spcPct val="108000"/>
               </a:lnSpc>
@@ -14276,7 +14045,7 @@
           <a:bodyPr wrap="square" lIns="0" tIns="0" rIns="0" bIns="0" rtlCol="0" anchor="ctr"/>
           <a:lstStyle/>
           <a:p>
-            <a:pPr indent="0" marL="0">
+            <a:pPr marL="0" indent="0">
               <a:lnSpc>
                 <a:spcPct val="112000"/>
               </a:lnSpc>
@@ -14317,7 +14086,7 @@
           </a:prstGeom>
           <a:extLst>
             <a:ext uri="{C572A759-6A51-4108-AA02-DFA0A04FC94B}">
-              <ma14:wrappingTextBoxFlag xmlns:ma14="http://schemas.microsoft.com/office/mac/drawingml/2011/main" val="0"/>
+              <ma14:wrappingTextBoxFlag xmlns:ma14="http://schemas.microsoft.com/office/mac/drawingml/2011/main" xmlns="" val="0"/>
             </a:ext>
           </a:extLst>
         </p:spPr>
@@ -14338,7 +14107,7 @@
           <a:p>
             <a:pPr algn="l"/>
             <a:fld id="{F7021451-1387-4CA6-816F-3879F97B5CBC}" type="slidenum">
-              <a:rPr b="0" lang="en-US"/>
+              <a:rPr lang="en-US" b="0"/>
               <a:t>20</a:t>
             </a:fld>
             <a:endParaRPr lang="en-US"/>
@@ -14413,7 +14182,7 @@
           <a:bodyPr wrap="square" lIns="0" tIns="0" rIns="0" bIns="0" rtlCol="0" anchor="ctr"/>
           <a:lstStyle/>
           <a:p>
-            <a:pPr indent="0" marL="0">
+            <a:pPr marL="0" indent="0">
               <a:buNone/>
             </a:pPr>
             <a:r>
@@ -14479,11 +14248,11 @@
           <a:bodyPr wrap="square" lIns="0" tIns="0" rIns="0" bIns="0" rtlCol="0" anchor="ctr"/>
           <a:lstStyle/>
           <a:p>
-            <a:pPr algn="ctr" indent="0" marL="0">
-              <a:buNone/>
-            </a:pPr>
-            <a:r>
-              <a:rPr lang="en-US" sz="900" b="1" spc="100" kern="0" dirty="0">
+            <a:pPr marL="0" indent="0" algn="ctr">
+              <a:buNone/>
+            </a:pPr>
+            <a:r>
+              <a:rPr lang="en-US" sz="900" b="1" kern="0" spc="100" dirty="0">
                 <a:solidFill>
                   <a:srgbClr val="1A4FBF"/>
                 </a:solidFill>
@@ -14499,14 +14268,14 @@
       </p:sp>
       <p:pic>
         <p:nvPicPr>
-          <p:cNvPr id="6" name="Image 0" descr="preencoded.png">    </p:cNvPr>
+          <p:cNvPr id="6" name="Image 0" descr="preencoded.png"/>
           <p:cNvPicPr>
             <a:picLocks noChangeAspect="1"/>
           </p:cNvPicPr>
           <p:nvPr/>
         </p:nvPicPr>
         <p:blipFill>
-          <a:blip r:embed="rId1"/>
+          <a:blip r:embed="rId3"/>
           <a:stretch>
             <a:fillRect/>
           </a:stretch>
@@ -14636,7 +14405,7 @@
           <a:bodyPr wrap="square" lIns="0" tIns="0" rIns="0" bIns="0" rtlCol="0" anchor="ctr"/>
           <a:lstStyle/>
           <a:p>
-            <a:pPr indent="0" marL="0">
+            <a:pPr marL="0" indent="0">
               <a:buNone/>
             </a:pPr>
             <a:r>
@@ -14742,7 +14511,7 @@
           <a:bodyPr wrap="square" lIns="0" tIns="0" rIns="0" bIns="0" rtlCol="0" anchor="ctr"/>
           <a:lstStyle/>
           <a:p>
-            <a:pPr indent="0" marL="0">
+            <a:pPr marL="0" indent="0">
               <a:buNone/>
             </a:pPr>
             <a:r>
@@ -14848,7 +14617,7 @@
           <a:bodyPr wrap="square" lIns="0" tIns="0" rIns="0" bIns="0" rtlCol="0" anchor="ctr"/>
           <a:lstStyle/>
           <a:p>
-            <a:pPr indent="0" marL="0">
+            <a:pPr marL="0" indent="0">
               <a:buNone/>
             </a:pPr>
             <a:r>
@@ -14954,7 +14723,7 @@
           <a:bodyPr wrap="square" lIns="0" tIns="0" rIns="0" bIns="0" rtlCol="0" anchor="ctr"/>
           <a:lstStyle/>
           <a:p>
-            <a:pPr indent="0" marL="0">
+            <a:pPr marL="0" indent="0">
               <a:buNone/>
             </a:pPr>
             <a:r>
@@ -14993,7 +14762,7 @@
           <a:bodyPr wrap="square" lIns="0" tIns="0" rIns="0" bIns="0" rtlCol="0" anchor="ctr"/>
           <a:lstStyle/>
           <a:p>
-            <a:pPr indent="0" marL="0">
+            <a:pPr marL="0" indent="0">
               <a:buNone/>
             </a:pPr>
             <a:r>
@@ -15031,7 +14800,7 @@
           </a:prstGeom>
           <a:extLst>
             <a:ext uri="{C572A759-6A51-4108-AA02-DFA0A04FC94B}">
-              <ma14:wrappingTextBoxFlag xmlns:ma14="http://schemas.microsoft.com/office/mac/drawingml/2011/main" val="0"/>
+              <ma14:wrappingTextBoxFlag xmlns:ma14="http://schemas.microsoft.com/office/mac/drawingml/2011/main" xmlns="" val="0"/>
             </a:ext>
           </a:extLst>
         </p:spPr>
@@ -15052,7 +14821,7 @@
           <a:p>
             <a:pPr algn="l"/>
             <a:fld id="{F7021451-1387-4CA6-816F-3879F97B5CBC}" type="slidenum">
-              <a:rPr b="0" lang="en-US"/>
+              <a:rPr lang="en-US" b="0"/>
               <a:t>21</a:t>
             </a:fld>
             <a:endParaRPr lang="en-US"/>
@@ -15127,7 +14896,7 @@
           <a:bodyPr wrap="square" lIns="0" tIns="0" rIns="0" bIns="0" rtlCol="0" anchor="ctr"/>
           <a:lstStyle/>
           <a:p>
-            <a:pPr indent="0" marL="0">
+            <a:pPr marL="0" indent="0">
               <a:buNone/>
             </a:pPr>
             <a:r>
@@ -15193,11 +14962,11 @@
           <a:bodyPr wrap="square" lIns="0" tIns="0" rIns="0" bIns="0" rtlCol="0" anchor="ctr"/>
           <a:lstStyle/>
           <a:p>
-            <a:pPr algn="ctr" indent="0" marL="0">
-              <a:buNone/>
-            </a:pPr>
-            <a:r>
-              <a:rPr lang="en-US" sz="900" b="1" spc="100" kern="0" dirty="0">
+            <a:pPr marL="0" indent="0" algn="ctr">
+              <a:buNone/>
+            </a:pPr>
+            <a:r>
+              <a:rPr lang="en-US" sz="900" b="1" kern="0" spc="100" dirty="0">
                 <a:solidFill>
                   <a:srgbClr val="1A4FBF"/>
                 </a:solidFill>
@@ -15213,14 +14982,14 @@
       </p:sp>
       <p:pic>
         <p:nvPicPr>
-          <p:cNvPr id="6" name="Image 0" descr="preencoded.png">    </p:cNvPr>
+          <p:cNvPr id="6" name="Image 0" descr="preencoded.png"/>
           <p:cNvPicPr>
             <a:picLocks noChangeAspect="1"/>
           </p:cNvPicPr>
           <p:nvPr/>
         </p:nvPicPr>
         <p:blipFill>
-          <a:blip r:embed="rId1"/>
+          <a:blip r:embed="rId3"/>
           <a:stretch>
             <a:fillRect/>
           </a:stretch>
@@ -15348,7 +15117,7 @@
           <a:bodyPr wrap="square" lIns="0" tIns="0" rIns="0" bIns="0" rtlCol="0" anchor="ctr"/>
           <a:lstStyle/>
           <a:p>
-            <a:pPr indent="0" marL="0">
+            <a:pPr marL="0" indent="0">
               <a:buNone/>
             </a:pPr>
             <a:r>
@@ -15362,9 +15131,6 @@
               </a:rPr>
               <a:t>«Працює на моїй машині»   </a:t>
             </a:r>
-            <a:pPr indent="0" marL="0">
-              <a:buNone/>
-            </a:pPr>
             <a:r>
               <a:rPr lang="en-US" sz="1200" dirty="0">
                 <a:solidFill>
@@ -15493,7 +15259,7 @@
           <a:bodyPr wrap="square" lIns="0" tIns="0" rIns="0" bIns="0" rtlCol="0" anchor="ctr"/>
           <a:lstStyle/>
           <a:p>
-            <a:pPr indent="0" marL="0">
+            <a:pPr marL="0" indent="0">
               <a:buNone/>
             </a:pPr>
             <a:r>
@@ -15507,9 +15273,6 @@
               </a:rPr>
               <a:t>Постмортем із винними   </a:t>
             </a:r>
-            <a:pPr indent="0" marL="0">
-              <a:buNone/>
-            </a:pPr>
             <a:r>
               <a:rPr lang="en-US" sz="1200" dirty="0">
                 <a:solidFill>
@@ -15638,7 +15401,7 @@
           <a:bodyPr wrap="square" lIns="0" tIns="0" rIns="0" bIns="0" rtlCol="0" anchor="ctr"/>
           <a:lstStyle/>
           <a:p>
-            <a:pPr indent="0" marL="0">
+            <a:pPr marL="0" indent="0">
               <a:buNone/>
             </a:pPr>
             <a:r>
@@ -15652,9 +15415,6 @@
               </a:rPr>
               <a:t>Демо без артефактів   </a:t>
             </a:r>
-            <a:pPr indent="0" marL="0">
-              <a:buNone/>
-            </a:pPr>
             <a:r>
               <a:rPr lang="en-US" sz="1200" dirty="0">
                 <a:solidFill>
@@ -15783,7 +15543,7 @@
           <a:bodyPr wrap="square" lIns="0" tIns="0" rIns="0" bIns="0" rtlCol="0" anchor="ctr"/>
           <a:lstStyle/>
           <a:p>
-            <a:pPr indent="0" marL="0">
+            <a:pPr marL="0" indent="0">
               <a:buNone/>
             </a:pPr>
             <a:r>
@@ -15797,9 +15557,6 @@
               </a:rPr>
               <a:t>Наступний шар «бо модно»   </a:t>
             </a:r>
-            <a:pPr indent="0" marL="0">
-              <a:buNone/>
-            </a:pPr>
             <a:r>
               <a:rPr lang="en-US" sz="1200" dirty="0">
                 <a:solidFill>
@@ -15817,7 +15574,7 @@
       </p:sp>
       <p:sp>
         <p:nvSpPr>
-          <p:cNvPr id="25" name="Slide Number Placeholder 0"/>
+          <p:cNvPr id="27" name="Slide Number Placeholder 0"/>
           <p:cNvSpPr>
             <a:spLocks noGrp="1"/>
           </p:cNvSpPr>
@@ -15835,7 +15592,7 @@
           </a:prstGeom>
           <a:extLst>
             <a:ext uri="{C572A759-6A51-4108-AA02-DFA0A04FC94B}">
-              <ma14:wrappingTextBoxFlag xmlns:ma14="http://schemas.microsoft.com/office/mac/drawingml/2011/main" val="0"/>
+              <ma14:wrappingTextBoxFlag xmlns:ma14="http://schemas.microsoft.com/office/mac/drawingml/2011/main" xmlns="" val="0"/>
             </a:ext>
           </a:extLst>
         </p:spPr>
@@ -15856,7 +15613,7 @@
           <a:p>
             <a:pPr algn="l"/>
             <a:fld id="{F7021451-1387-4CA6-816F-3879F97B5CBC}" type="slidenum">
-              <a:rPr b="0" lang="en-US"/>
+              <a:rPr lang="en-US" b="0"/>
               <a:t>22</a:t>
             </a:fld>
             <a:endParaRPr lang="en-US"/>
@@ -15931,7 +15688,7 @@
           <a:bodyPr wrap="square" lIns="0" tIns="0" rIns="0" bIns="0" rtlCol="0" anchor="ctr"/>
           <a:lstStyle/>
           <a:p>
-            <a:pPr indent="0" marL="0">
+            <a:pPr marL="0" indent="0">
               <a:buNone/>
             </a:pPr>
             <a:r>
@@ -15992,11 +15749,11 @@
           <a:bodyPr wrap="square" lIns="0" tIns="0" rIns="0" bIns="0" rtlCol="0" anchor="ctr"/>
           <a:lstStyle/>
           <a:p>
-            <a:pPr algn="ctr" indent="0" marL="0">
-              <a:buNone/>
-            </a:pPr>
-            <a:r>
-              <a:rPr lang="en-US" sz="900" b="1" spc="100" kern="0" dirty="0">
+            <a:pPr marL="0" indent="0" algn="ctr">
+              <a:buNone/>
+            </a:pPr>
+            <a:r>
+              <a:rPr lang="en-US" sz="900" b="1" kern="0" spc="100" dirty="0">
                 <a:solidFill>
                   <a:srgbClr val="FFFFFF"/>
                 </a:solidFill>
@@ -16012,14 +15769,14 @@
       </p:sp>
       <p:pic>
         <p:nvPicPr>
-          <p:cNvPr id="6" name="Image 0" descr="preencoded.png">    </p:cNvPr>
+          <p:cNvPr id="6" name="Image 0" descr="preencoded.png"/>
           <p:cNvPicPr>
             <a:picLocks noChangeAspect="1"/>
           </p:cNvPicPr>
           <p:nvPr/>
         </p:nvPicPr>
         <p:blipFill>
-          <a:blip r:embed="rId1"/>
+          <a:blip r:embed="rId3"/>
           <a:stretch>
             <a:fillRect/>
           </a:stretch>
@@ -16082,7 +15839,7 @@
           <a:bodyPr wrap="square" lIns="0" tIns="0" rIns="0" bIns="0" rtlCol="0" anchor="ctr"/>
           <a:lstStyle/>
           <a:p>
-            <a:pPr indent="0" marL="0">
+            <a:pPr marL="0" indent="0">
               <a:buNone/>
             </a:pPr>
             <a:r>
@@ -16121,7 +15878,7 @@
           <a:bodyPr wrap="square" lIns="0" tIns="0" rIns="0" bIns="0" rtlCol="0" anchor="ctr"/>
           <a:lstStyle/>
           <a:p>
-            <a:pPr indent="0" marL="0">
+            <a:pPr marL="0" indent="0">
               <a:buNone/>
             </a:pPr>
             <a:r>
@@ -16160,11 +15917,11 @@
           <a:bodyPr wrap="square" lIns="0" tIns="0" rIns="0" bIns="0" rtlCol="0" anchor="ctr"/>
           <a:lstStyle/>
           <a:p>
-            <a:pPr indent="0" marL="0">
-              <a:buNone/>
-            </a:pPr>
-            <a:r>
-              <a:rPr lang="en-US" sz="950" b="1" spc="100" kern="0" dirty="0">
+            <a:pPr marL="0" indent="0">
+              <a:buNone/>
+            </a:pPr>
+            <a:r>
+              <a:rPr lang="en-US" sz="950" b="1" kern="0" spc="100" dirty="0">
                 <a:solidFill>
                   <a:srgbClr val="6B6B6B"/>
                 </a:solidFill>
@@ -16199,7 +15956,7 @@
           <a:bodyPr wrap="square" lIns="0" tIns="0" rIns="0" bIns="0" rtlCol="0" anchor="ctr"/>
           <a:lstStyle/>
           <a:p>
-            <a:pPr indent="0" marL="0">
+            <a:pPr marL="0" indent="0">
               <a:buNone/>
             </a:pPr>
             <a:r>
@@ -16213,9 +15970,6 @@
               </a:rPr>
               <a:t>•  </a:t>
             </a:r>
-            <a:pPr indent="0" marL="0">
-              <a:buNone/>
-            </a:pPr>
             <a:r>
               <a:rPr lang="en-US" sz="1250" dirty="0">
                 <a:solidFill>
@@ -16252,7 +16006,7 @@
           <a:bodyPr wrap="square" lIns="0" tIns="0" rIns="0" bIns="0" rtlCol="0" anchor="ctr"/>
           <a:lstStyle/>
           <a:p>
-            <a:pPr indent="0" marL="0">
+            <a:pPr marL="0" indent="0">
               <a:buNone/>
             </a:pPr>
             <a:r>
@@ -16266,9 +16020,6 @@
               </a:rPr>
               <a:t>•  </a:t>
             </a:r>
-            <a:pPr indent="0" marL="0">
-              <a:buNone/>
-            </a:pPr>
             <a:r>
               <a:rPr lang="en-US" sz="1250" dirty="0">
                 <a:solidFill>
@@ -16305,7 +16056,7 @@
           <a:bodyPr wrap="square" lIns="0" tIns="0" rIns="0" bIns="0" rtlCol="0" anchor="ctr"/>
           <a:lstStyle/>
           <a:p>
-            <a:pPr indent="0" marL="0">
+            <a:pPr marL="0" indent="0">
               <a:buNone/>
             </a:pPr>
             <a:r>
@@ -16319,9 +16070,6 @@
               </a:rPr>
               <a:t>•  </a:t>
             </a:r>
-            <a:pPr indent="0" marL="0">
-              <a:buNone/>
-            </a:pPr>
             <a:r>
               <a:rPr lang="en-US" sz="1250" dirty="0">
                 <a:solidFill>
@@ -16358,7 +16106,7 @@
           <a:bodyPr wrap="square" lIns="0" tIns="0" rIns="0" bIns="0" rtlCol="0" anchor="ctr"/>
           <a:lstStyle/>
           <a:p>
-            <a:pPr indent="0" marL="0">
+            <a:pPr marL="0" indent="0">
               <a:buNone/>
             </a:pPr>
             <a:r>
@@ -16372,9 +16120,6 @@
               </a:rPr>
               <a:t>•  </a:t>
             </a:r>
-            <a:pPr indent="0" marL="0">
-              <a:buNone/>
-            </a:pPr>
             <a:r>
               <a:rPr lang="en-US" sz="1250" dirty="0">
                 <a:solidFill>
@@ -16433,7 +16178,7 @@
           <a:bodyPr wrap="square" lIns="0" tIns="0" rIns="0" bIns="0" rtlCol="0" anchor="ctr"/>
           <a:lstStyle/>
           <a:p>
-            <a:pPr indent="0" marL="0">
+            <a:pPr marL="0" indent="0">
               <a:buNone/>
             </a:pPr>
             <a:r>
@@ -16472,7 +16217,7 @@
           <a:bodyPr wrap="square" lIns="0" tIns="0" rIns="0" bIns="0" rtlCol="0" anchor="t"/>
           <a:lstStyle/>
           <a:p>
-            <a:pPr indent="0" marL="0">
+            <a:pPr marL="0" indent="0">
               <a:lnSpc>
                 <a:spcPct val="108000"/>
               </a:lnSpc>
@@ -16492,7 +16237,7 @@
             <a:endParaRPr lang="en-US" sz="1200" dirty="0"/>
           </a:p>
           <a:p>
-            <a:pPr indent="0" marL="0">
+            <a:pPr marL="0" indent="0">
               <a:lnSpc>
                 <a:spcPct val="108000"/>
               </a:lnSpc>
@@ -16533,7 +16278,7 @@
           </a:prstGeom>
           <a:extLst>
             <a:ext uri="{C572A759-6A51-4108-AA02-DFA0A04FC94B}">
-              <ma14:wrappingTextBoxFlag xmlns:ma14="http://schemas.microsoft.com/office/mac/drawingml/2011/main" val="0"/>
+              <ma14:wrappingTextBoxFlag xmlns:ma14="http://schemas.microsoft.com/office/mac/drawingml/2011/main" xmlns="" val="0"/>
             </a:ext>
           </a:extLst>
         </p:spPr>
@@ -16554,7 +16299,7 @@
           <a:p>
             <a:pPr algn="l"/>
             <a:fld id="{F7021451-1387-4CA6-816F-3879F97B5CBC}" type="slidenum">
-              <a:rPr b="0" lang="en-US"/>
+              <a:rPr lang="en-US" b="0"/>
               <a:t>23</a:t>
             </a:fld>
             <a:endParaRPr lang="en-US"/>
@@ -16607,11 +16352,11 @@
           <a:bodyPr wrap="square" lIns="0" tIns="0" rIns="0" bIns="0" rtlCol="0" anchor="ctr"/>
           <a:lstStyle/>
           <a:p>
-            <a:pPr indent="0" marL="0">
-              <a:buNone/>
-            </a:pPr>
-            <a:r>
-              <a:rPr lang="en-US" sz="1200" b="1" spc="400" kern="0" dirty="0">
+            <a:pPr marL="0" indent="0">
+              <a:buNone/>
+            </a:pPr>
+            <a:r>
+              <a:rPr lang="en-US" sz="1200" b="1" kern="0" spc="400" dirty="0">
                 <a:solidFill>
                   <a:srgbClr val="FFFFFF"/>
                 </a:solidFill>
@@ -16646,11 +16391,11 @@
           <a:bodyPr wrap="square" lIns="0" tIns="0" rIns="0" bIns="0" rtlCol="0" anchor="ctr"/>
           <a:lstStyle/>
           <a:p>
-            <a:pPr indent="0" marL="0">
-              <a:buNone/>
-            </a:pPr>
-            <a:r>
-              <a:rPr lang="en-US" sz="1100" b="1" spc="300" kern="0" dirty="0">
+            <a:pPr marL="0" indent="0">
+              <a:buNone/>
+            </a:pPr>
+            <a:r>
+              <a:rPr lang="en-US" sz="1100" b="1" kern="0" spc="300" dirty="0">
                 <a:solidFill>
                   <a:srgbClr val="C4B3F5"/>
                 </a:solidFill>
@@ -16705,7 +16450,7 @@
           <a:bodyPr wrap="square" lIns="0" tIns="0" rIns="0" bIns="0" rtlCol="0" anchor="t"/>
           <a:lstStyle/>
           <a:p>
-            <a:pPr indent="0" marL="0">
+            <a:pPr marL="0" indent="0">
               <a:lnSpc>
                 <a:spcPct val="110000"/>
               </a:lnSpc>
@@ -16767,7 +16512,7 @@
           <a:bodyPr wrap="square" lIns="0" tIns="0" rIns="0" bIns="0" rtlCol="0" anchor="t"/>
           <a:lstStyle/>
           <a:p>
-            <a:pPr indent="0" marL="0">
+            <a:pPr marL="0" indent="0">
               <a:lnSpc>
                 <a:spcPct val="110000"/>
               </a:lnSpc>
@@ -16829,7 +16574,7 @@
           <a:bodyPr wrap="square" lIns="0" tIns="0" rIns="0" bIns="0" rtlCol="0" anchor="t"/>
           <a:lstStyle/>
           <a:p>
-            <a:pPr indent="0" marL="0">
+            <a:pPr marL="0" indent="0">
               <a:lnSpc>
                 <a:spcPct val="110000"/>
               </a:lnSpc>
@@ -16891,7 +16636,7 @@
           <a:bodyPr wrap="square" lIns="0" tIns="0" rIns="0" bIns="0" rtlCol="0" anchor="t"/>
           <a:lstStyle/>
           <a:p>
-            <a:pPr indent="0" marL="0">
+            <a:pPr marL="0" indent="0">
               <a:lnSpc>
                 <a:spcPct val="110000"/>
               </a:lnSpc>
@@ -16953,7 +16698,7 @@
           <a:bodyPr wrap="square" lIns="0" tIns="0" rIns="0" bIns="0" rtlCol="0" anchor="t"/>
           <a:lstStyle/>
           <a:p>
-            <a:pPr indent="0" marL="0">
+            <a:pPr marL="0" indent="0">
               <a:lnSpc>
                 <a:spcPct val="110000"/>
               </a:lnSpc>
@@ -17022,7 +16767,7 @@
           <a:bodyPr wrap="square" lIns="0" tIns="0" rIns="0" bIns="0" rtlCol="0" anchor="ctr"/>
           <a:lstStyle/>
           <a:p>
-            <a:pPr indent="0" marL="0">
+            <a:pPr marL="0" indent="0">
               <a:buNone/>
             </a:pPr>
             <a:r>
@@ -17061,7 +16806,7 @@
           <a:bodyPr wrap="square" lIns="0" tIns="0" rIns="0" bIns="0" rtlCol="0" anchor="t"/>
           <a:lstStyle/>
           <a:p>
-            <a:pPr indent="0" marL="0">
+            <a:pPr marL="0" indent="0">
               <a:lnSpc>
                 <a:spcPct val="115000"/>
               </a:lnSpc>
@@ -17128,11 +16873,11 @@
           <a:bodyPr wrap="square" lIns="0" tIns="0" rIns="0" bIns="0" rtlCol="0" anchor="ctr"/>
           <a:lstStyle/>
           <a:p>
-            <a:pPr indent="0" marL="0">
-              <a:buNone/>
-            </a:pPr>
-            <a:r>
-              <a:rPr lang="en-US" sz="1200" b="1" spc="400" kern="0" dirty="0">
+            <a:pPr marL="0" indent="0">
+              <a:buNone/>
+            </a:pPr>
+            <a:r>
+              <a:rPr lang="en-US" sz="1200" b="1" kern="0" spc="400" dirty="0">
                 <a:solidFill>
                   <a:srgbClr val="FFFFFF"/>
                 </a:solidFill>
@@ -17167,7 +16912,7 @@
           <a:bodyPr wrap="square" lIns="0" tIns="0" rIns="0" bIns="0" rtlCol="0" anchor="ctr"/>
           <a:lstStyle/>
           <a:p>
-            <a:pPr indent="0" marL="0">
+            <a:pPr marL="0" indent="0">
               <a:buNone/>
             </a:pPr>
             <a:r>
@@ -17253,7 +16998,7 @@
           <a:bodyPr wrap="square" lIns="0" tIns="0" rIns="0" bIns="0" rtlCol="0" anchor="ctr"/>
           <a:lstStyle/>
           <a:p>
-            <a:pPr indent="0" marL="0">
+            <a:pPr marL="0" indent="0">
               <a:buNone/>
             </a:pPr>
             <a:r>
@@ -17319,11 +17064,11 @@
           <a:bodyPr wrap="square" lIns="0" tIns="0" rIns="0" bIns="0" rtlCol="0" anchor="ctr"/>
           <a:lstStyle/>
           <a:p>
-            <a:pPr algn="ctr" indent="0" marL="0">
-              <a:buNone/>
-            </a:pPr>
-            <a:r>
-              <a:rPr lang="en-US" sz="900" b="1" spc="100" kern="0" dirty="0">
+            <a:pPr marL="0" indent="0" algn="ctr">
+              <a:buNone/>
+            </a:pPr>
+            <a:r>
+              <a:rPr lang="en-US" sz="900" b="1" kern="0" spc="100" dirty="0">
                 <a:solidFill>
                   <a:srgbClr val="5A05F4"/>
                 </a:solidFill>
@@ -17339,14 +17084,14 @@
       </p:sp>
       <p:pic>
         <p:nvPicPr>
-          <p:cNvPr id="6" name="Image 0" descr="preencoded.png">    </p:cNvPr>
+          <p:cNvPr id="6" name="Image 0" descr="preencoded.png"/>
           <p:cNvPicPr>
             <a:picLocks noChangeAspect="1"/>
           </p:cNvPicPr>
           <p:nvPr/>
         </p:nvPicPr>
         <p:blipFill>
-          <a:blip r:embed="rId1"/>
+          <a:blip r:embed="rId3"/>
           <a:stretch>
             <a:fillRect/>
           </a:stretch>
@@ -17424,7 +17169,7 @@
           <a:bodyPr wrap="square" lIns="0" tIns="0" rIns="0" bIns="0" rtlCol="0" anchor="ctr"/>
           <a:lstStyle/>
           <a:p>
-            <a:pPr algn="ctr" indent="0" marL="0">
+            <a:pPr marL="0" indent="0" algn="ctr">
               <a:buNone/>
             </a:pPr>
             <a:r>
@@ -17463,7 +17208,7 @@
           <a:bodyPr wrap="square" lIns="0" tIns="0" rIns="0" bIns="0" rtlCol="0" anchor="ctr"/>
           <a:lstStyle/>
           <a:p>
-            <a:pPr indent="0" marL="0">
+            <a:pPr marL="0" indent="0">
               <a:buNone/>
             </a:pPr>
             <a:r>
@@ -17544,7 +17289,7 @@
           <a:bodyPr wrap="square" lIns="0" tIns="0" rIns="0" bIns="0" rtlCol="0" anchor="ctr"/>
           <a:lstStyle/>
           <a:p>
-            <a:pPr algn="ctr" indent="0" marL="0">
+            <a:pPr marL="0" indent="0" algn="ctr">
               <a:buNone/>
             </a:pPr>
             <a:r>
@@ -17583,7 +17328,7 @@
           <a:bodyPr wrap="square" lIns="0" tIns="0" rIns="0" bIns="0" rtlCol="0" anchor="ctr"/>
           <a:lstStyle/>
           <a:p>
-            <a:pPr indent="0" marL="0">
+            <a:pPr marL="0" indent="0">
               <a:buNone/>
             </a:pPr>
             <a:r>
@@ -17664,7 +17409,7 @@
           <a:bodyPr wrap="square" lIns="0" tIns="0" rIns="0" bIns="0" rtlCol="0" anchor="ctr"/>
           <a:lstStyle/>
           <a:p>
-            <a:pPr algn="ctr" indent="0" marL="0">
+            <a:pPr marL="0" indent="0" algn="ctr">
               <a:buNone/>
             </a:pPr>
             <a:r>
@@ -17703,7 +17448,7 @@
           <a:bodyPr wrap="square" lIns="0" tIns="0" rIns="0" bIns="0" rtlCol="0" anchor="ctr"/>
           <a:lstStyle/>
           <a:p>
-            <a:pPr indent="0" marL="0">
+            <a:pPr marL="0" indent="0">
               <a:buNone/>
             </a:pPr>
             <a:r>
@@ -17784,7 +17529,7 @@
           <a:bodyPr wrap="square" lIns="0" tIns="0" rIns="0" bIns="0" rtlCol="0" anchor="ctr"/>
           <a:lstStyle/>
           <a:p>
-            <a:pPr algn="ctr" indent="0" marL="0">
+            <a:pPr marL="0" indent="0" algn="ctr">
               <a:buNone/>
             </a:pPr>
             <a:r>
@@ -17823,7 +17568,7 @@
           <a:bodyPr wrap="square" lIns="0" tIns="0" rIns="0" bIns="0" rtlCol="0" anchor="ctr"/>
           <a:lstStyle/>
           <a:p>
-            <a:pPr indent="0" marL="0">
+            <a:pPr marL="0" indent="0">
               <a:buNone/>
             </a:pPr>
             <a:r>
@@ -17904,7 +17649,7 @@
           <a:bodyPr wrap="square" lIns="0" tIns="0" rIns="0" bIns="0" rtlCol="0" anchor="ctr"/>
           <a:lstStyle/>
           <a:p>
-            <a:pPr algn="ctr" indent="0" marL="0">
+            <a:pPr marL="0" indent="0" algn="ctr">
               <a:buNone/>
             </a:pPr>
             <a:r>
@@ -17943,7 +17688,7 @@
           <a:bodyPr wrap="square" lIns="0" tIns="0" rIns="0" bIns="0" rtlCol="0" anchor="ctr"/>
           <a:lstStyle/>
           <a:p>
-            <a:pPr indent="0" marL="0">
+            <a:pPr marL="0" indent="0">
               <a:buNone/>
             </a:pPr>
             <a:r>
@@ -18024,7 +17769,7 @@
           <a:bodyPr wrap="square" lIns="0" tIns="0" rIns="0" bIns="0" rtlCol="0" anchor="ctr"/>
           <a:lstStyle/>
           <a:p>
-            <a:pPr algn="ctr" indent="0" marL="0">
+            <a:pPr marL="0" indent="0" algn="ctr">
               <a:buNone/>
             </a:pPr>
             <a:r>
@@ -18063,7 +17808,7 @@
           <a:bodyPr wrap="square" lIns="0" tIns="0" rIns="0" bIns="0" rtlCol="0" anchor="ctr"/>
           <a:lstStyle/>
           <a:p>
-            <a:pPr indent="0" marL="0">
+            <a:pPr marL="0" indent="0">
               <a:buNone/>
             </a:pPr>
             <a:r>
@@ -18144,7 +17889,7 @@
           <a:bodyPr wrap="square" lIns="0" tIns="0" rIns="0" bIns="0" rtlCol="0" anchor="ctr"/>
           <a:lstStyle/>
           <a:p>
-            <a:pPr algn="ctr" indent="0" marL="0">
+            <a:pPr marL="0" indent="0" algn="ctr">
               <a:buNone/>
             </a:pPr>
             <a:r>
@@ -18183,7 +17928,7 @@
           <a:bodyPr wrap="square" lIns="0" tIns="0" rIns="0" bIns="0" rtlCol="0" anchor="ctr"/>
           <a:lstStyle/>
           <a:p>
-            <a:pPr indent="0" marL="0">
+            <a:pPr marL="0" indent="0">
               <a:buNone/>
             </a:pPr>
             <a:r>
@@ -18264,7 +18009,7 @@
           <a:bodyPr wrap="square" lIns="0" tIns="0" rIns="0" bIns="0" rtlCol="0" anchor="ctr"/>
           <a:lstStyle/>
           <a:p>
-            <a:pPr algn="ctr" indent="0" marL="0">
+            <a:pPr marL="0" indent="0" algn="ctr">
               <a:buNone/>
             </a:pPr>
             <a:r>
@@ -18303,7 +18048,7 @@
           <a:bodyPr wrap="square" lIns="0" tIns="0" rIns="0" bIns="0" rtlCol="0" anchor="ctr"/>
           <a:lstStyle/>
           <a:p>
-            <a:pPr indent="0" marL="0">
+            <a:pPr marL="0" indent="0">
               <a:buNone/>
             </a:pPr>
             <a:r>
@@ -18384,7 +18129,7 @@
           <a:bodyPr wrap="square" lIns="0" tIns="0" rIns="0" bIns="0" rtlCol="0" anchor="ctr"/>
           <a:lstStyle/>
           <a:p>
-            <a:pPr algn="ctr" indent="0" marL="0">
+            <a:pPr marL="0" indent="0" algn="ctr">
               <a:buNone/>
             </a:pPr>
             <a:r>
@@ -18423,7 +18168,7 @@
           <a:bodyPr wrap="square" lIns="0" tIns="0" rIns="0" bIns="0" rtlCol="0" anchor="ctr"/>
           <a:lstStyle/>
           <a:p>
-            <a:pPr indent="0" marL="0">
+            <a:pPr marL="0" indent="0">
               <a:buNone/>
             </a:pPr>
             <a:r>
@@ -18504,7 +18249,7 @@
           <a:bodyPr wrap="square" lIns="0" tIns="0" rIns="0" bIns="0" rtlCol="0" anchor="ctr"/>
           <a:lstStyle/>
           <a:p>
-            <a:pPr algn="ctr" indent="0" marL="0">
+            <a:pPr marL="0" indent="0" algn="ctr">
               <a:buNone/>
             </a:pPr>
             <a:r>
@@ -18543,7 +18288,7 @@
           <a:bodyPr wrap="square" lIns="0" tIns="0" rIns="0" bIns="0" rtlCol="0" anchor="ctr"/>
           <a:lstStyle/>
           <a:p>
-            <a:pPr indent="0" marL="0">
+            <a:pPr marL="0" indent="0">
               <a:buNone/>
             </a:pPr>
             <a:r>
@@ -18624,7 +18369,7 @@
           <a:bodyPr wrap="square" lIns="0" tIns="0" rIns="0" bIns="0" rtlCol="0" anchor="ctr"/>
           <a:lstStyle/>
           <a:p>
-            <a:pPr algn="ctr" indent="0" marL="0">
+            <a:pPr marL="0" indent="0" algn="ctr">
               <a:buNone/>
             </a:pPr>
             <a:r>
@@ -18663,7 +18408,7 @@
           <a:bodyPr wrap="square" lIns="0" tIns="0" rIns="0" bIns="0" rtlCol="0" anchor="ctr"/>
           <a:lstStyle/>
           <a:p>
-            <a:pPr indent="0" marL="0">
+            <a:pPr marL="0" indent="0">
               <a:buNone/>
             </a:pPr>
             <a:r>
@@ -18744,7 +18489,7 @@
           <a:bodyPr wrap="square" lIns="0" tIns="0" rIns="0" bIns="0" rtlCol="0" anchor="ctr"/>
           <a:lstStyle/>
           <a:p>
-            <a:pPr algn="ctr" indent="0" marL="0">
+            <a:pPr marL="0" indent="0" algn="ctr">
               <a:buNone/>
             </a:pPr>
             <a:r>
@@ -18783,7 +18528,7 @@
           <a:bodyPr wrap="square" lIns="0" tIns="0" rIns="0" bIns="0" rtlCol="0" anchor="ctr"/>
           <a:lstStyle/>
           <a:p>
-            <a:pPr indent="0" marL="0">
+            <a:pPr marL="0" indent="0">
               <a:buNone/>
             </a:pPr>
             <a:r>
@@ -18810,7 +18555,7 @@
         <p:spPr>
           <a:xfrm>
             <a:off x="566928" y="5779008"/>
-            <a:ext cx="11064240" cy="402336"/>
+            <a:ext cx="10927080" cy="402336"/>
           </a:xfrm>
           <a:prstGeom prst="roundRect">
             <a:avLst>
@@ -18849,7 +18594,7 @@
           <a:bodyPr wrap="square" lIns="0" tIns="0" rIns="0" bIns="0" rtlCol="0" anchor="ctr"/>
           <a:lstStyle/>
           <a:p>
-            <a:pPr indent="0" marL="0">
+            <a:pPr marL="0" indent="0">
               <a:lnSpc>
                 <a:spcPct val="112000"/>
               </a:lnSpc>
@@ -18872,7 +18617,7 @@
       </p:sp>
       <p:sp>
         <p:nvSpPr>
-          <p:cNvPr id="25" name="Slide Number Placeholder 0"/>
+          <p:cNvPr id="57" name="Slide Number Placeholder 0"/>
           <p:cNvSpPr>
             <a:spLocks noGrp="1"/>
           </p:cNvSpPr>
@@ -18890,7 +18635,7 @@
           </a:prstGeom>
           <a:extLst>
             <a:ext uri="{C572A759-6A51-4108-AA02-DFA0A04FC94B}">
-              <ma14:wrappingTextBoxFlag xmlns:ma14="http://schemas.microsoft.com/office/mac/drawingml/2011/main" val="0"/>
+              <ma14:wrappingTextBoxFlag xmlns:ma14="http://schemas.microsoft.com/office/mac/drawingml/2011/main" xmlns="" val="0"/>
             </a:ext>
           </a:extLst>
         </p:spPr>
@@ -18911,7 +18656,7 @@
           <a:p>
             <a:pPr algn="l"/>
             <a:fld id="{F7021451-1387-4CA6-816F-3879F97B5CBC}" type="slidenum">
-              <a:rPr b="0" lang="en-US"/>
+              <a:rPr lang="en-US" b="0"/>
               <a:t>3</a:t>
             </a:fld>
             <a:endParaRPr lang="en-US"/>
@@ -18986,7 +18731,7 @@
           <a:bodyPr wrap="square" lIns="0" tIns="0" rIns="0" bIns="0" rtlCol="0" anchor="ctr"/>
           <a:lstStyle/>
           <a:p>
-            <a:pPr indent="0" marL="0">
+            <a:pPr marL="0" indent="0">
               <a:buNone/>
             </a:pPr>
             <a:r>
@@ -19025,7 +18770,7 @@
           <a:bodyPr wrap="square" lIns="0" tIns="0" rIns="0" bIns="0" rtlCol="0" anchor="t"/>
           <a:lstStyle/>
           <a:p>
-            <a:pPr indent="0" marL="0">
+            <a:pPr marL="0" indent="0">
               <a:lnSpc>
                 <a:spcPct val="100000"/>
               </a:lnSpc>
@@ -19094,11 +18839,11 @@
           <a:bodyPr wrap="square" lIns="0" tIns="0" rIns="0" bIns="0" rtlCol="0" anchor="ctr"/>
           <a:lstStyle/>
           <a:p>
-            <a:pPr algn="ctr" indent="0" marL="0">
-              <a:buNone/>
-            </a:pPr>
-            <a:r>
-              <a:rPr lang="en-US" sz="900" b="1" spc="100" kern="0" dirty="0">
+            <a:pPr marL="0" indent="0" algn="ctr">
+              <a:buNone/>
+            </a:pPr>
+            <a:r>
+              <a:rPr lang="en-US" sz="900" b="1" kern="0" spc="100" dirty="0">
                 <a:solidFill>
                   <a:srgbClr val="5A05F4"/>
                 </a:solidFill>
@@ -19114,14 +18859,14 @@
       </p:sp>
       <p:pic>
         <p:nvPicPr>
-          <p:cNvPr id="7" name="Image 0" descr="preencoded.png">    </p:cNvPr>
+          <p:cNvPr id="7" name="Image 0" descr="preencoded.png"/>
           <p:cNvPicPr>
             <a:picLocks noChangeAspect="1"/>
           </p:cNvPicPr>
           <p:nvPr/>
         </p:nvPicPr>
         <p:blipFill>
-          <a:blip r:embed="rId1"/>
+          <a:blip r:embed="rId3"/>
           <a:stretch>
             <a:fillRect/>
           </a:stretch>
@@ -19184,7 +18929,7 @@
           <a:bodyPr wrap="square" lIns="0" tIns="0" rIns="0" bIns="0" rtlCol="0" anchor="ctr"/>
           <a:lstStyle/>
           <a:p>
-            <a:pPr indent="0" marL="0">
+            <a:pPr marL="0" indent="0">
               <a:buNone/>
             </a:pPr>
             <a:r>
@@ -19223,7 +18968,7 @@
           <a:bodyPr wrap="square" lIns="0" tIns="0" rIns="0" bIns="0" rtlCol="0" anchor="t"/>
           <a:lstStyle/>
           <a:p>
-            <a:pPr indent="0" marL="0">
+            <a:pPr marL="0" indent="0">
               <a:lnSpc>
                 <a:spcPct val="105000"/>
               </a:lnSpc>
@@ -19292,7 +19037,7 @@
           <a:bodyPr wrap="square" lIns="0" tIns="0" rIns="0" bIns="0" rtlCol="0" anchor="ctr"/>
           <a:lstStyle/>
           <a:p>
-            <a:pPr indent="0" marL="0">
+            <a:pPr marL="0" indent="0">
               <a:buNone/>
             </a:pPr>
             <a:r>
@@ -19331,7 +19076,7 @@
           <a:bodyPr wrap="square" lIns="0" tIns="0" rIns="0" bIns="0" rtlCol="0" anchor="t"/>
           <a:lstStyle/>
           <a:p>
-            <a:pPr indent="0" marL="0">
+            <a:pPr marL="0" indent="0">
               <a:lnSpc>
                 <a:spcPct val="105000"/>
               </a:lnSpc>
@@ -19400,7 +19145,7 @@
           <a:bodyPr wrap="square" lIns="0" tIns="0" rIns="0" bIns="0" rtlCol="0" anchor="ctr"/>
           <a:lstStyle/>
           <a:p>
-            <a:pPr indent="0" marL="0">
+            <a:pPr marL="0" indent="0">
               <a:buNone/>
             </a:pPr>
             <a:r>
@@ -19439,7 +19184,7 @@
           <a:bodyPr wrap="square" lIns="0" tIns="0" rIns="0" bIns="0" rtlCol="0" anchor="t"/>
           <a:lstStyle/>
           <a:p>
-            <a:pPr indent="0" marL="0">
+            <a:pPr marL="0" indent="0">
               <a:lnSpc>
                 <a:spcPct val="105000"/>
               </a:lnSpc>
@@ -19508,7 +19253,7 @@
           <a:bodyPr wrap="square" lIns="0" tIns="0" rIns="0" bIns="0" rtlCol="0" anchor="ctr"/>
           <a:lstStyle/>
           <a:p>
-            <a:pPr indent="0" marL="0">
+            <a:pPr marL="0" indent="0">
               <a:buNone/>
             </a:pPr>
             <a:r>
@@ -19547,7 +19292,7 @@
           <a:bodyPr wrap="square" lIns="0" tIns="0" rIns="0" bIns="0" rtlCol="0" anchor="t"/>
           <a:lstStyle/>
           <a:p>
-            <a:pPr indent="0" marL="0">
+            <a:pPr marL="0" indent="0">
               <a:lnSpc>
                 <a:spcPct val="105000"/>
               </a:lnSpc>
@@ -19616,7 +19361,7 @@
           <a:bodyPr wrap="square" lIns="0" tIns="0" rIns="0" bIns="0" rtlCol="0" anchor="ctr"/>
           <a:lstStyle/>
           <a:p>
-            <a:pPr indent="0" marL="0">
+            <a:pPr marL="0" indent="0">
               <a:buNone/>
             </a:pPr>
             <a:r>
@@ -19655,7 +19400,7 @@
           <a:bodyPr wrap="square" lIns="0" tIns="0" rIns="0" bIns="0" rtlCol="0" anchor="t"/>
           <a:lstStyle/>
           <a:p>
-            <a:pPr indent="0" marL="0">
+            <a:pPr marL="0" indent="0">
               <a:lnSpc>
                 <a:spcPct val="105000"/>
               </a:lnSpc>
@@ -19724,7 +19469,7 @@
           <a:bodyPr wrap="square" lIns="0" tIns="0" rIns="0" bIns="0" rtlCol="0" anchor="ctr"/>
           <a:lstStyle/>
           <a:p>
-            <a:pPr indent="0" marL="0">
+            <a:pPr marL="0" indent="0">
               <a:buNone/>
             </a:pPr>
             <a:r>
@@ -19763,7 +19508,7 @@
           <a:bodyPr wrap="square" lIns="0" tIns="0" rIns="0" bIns="0" rtlCol="0" anchor="t"/>
           <a:lstStyle/>
           <a:p>
-            <a:pPr indent="0" marL="0">
+            <a:pPr marL="0" indent="0">
               <a:lnSpc>
                 <a:spcPct val="105000"/>
               </a:lnSpc>
@@ -19832,7 +19577,7 @@
           <a:bodyPr wrap="square" lIns="0" tIns="0" rIns="0" bIns="0" rtlCol="0" anchor="ctr"/>
           <a:lstStyle/>
           <a:p>
-            <a:pPr indent="0" marL="0">
+            <a:pPr marL="0" indent="0">
               <a:lnSpc>
                 <a:spcPct val="112000"/>
               </a:lnSpc>
@@ -19855,7 +19600,7 @@
       </p:sp>
       <p:sp>
         <p:nvSpPr>
-          <p:cNvPr id="25" name="Slide Number Placeholder 0"/>
+          <p:cNvPr id="28" name="Slide Number Placeholder 0"/>
           <p:cNvSpPr>
             <a:spLocks noGrp="1"/>
           </p:cNvSpPr>
@@ -19873,7 +19618,7 @@
           </a:prstGeom>
           <a:extLst>
             <a:ext uri="{C572A759-6A51-4108-AA02-DFA0A04FC94B}">
-              <ma14:wrappingTextBoxFlag xmlns:ma14="http://schemas.microsoft.com/office/mac/drawingml/2011/main" val="0"/>
+              <ma14:wrappingTextBoxFlag xmlns:ma14="http://schemas.microsoft.com/office/mac/drawingml/2011/main" xmlns="" val="0"/>
             </a:ext>
           </a:extLst>
         </p:spPr>
@@ -19894,7 +19639,7 @@
           <a:p>
             <a:pPr algn="l"/>
             <a:fld id="{F7021451-1387-4CA6-816F-3879F97B5CBC}" type="slidenum">
-              <a:rPr b="0" lang="en-US"/>
+              <a:rPr lang="en-US" b="0"/>
               <a:t>4</a:t>
             </a:fld>
             <a:endParaRPr lang="en-US"/>
@@ -19947,11 +19692,11 @@
           <a:bodyPr wrap="square" lIns="0" tIns="0" rIns="0" bIns="0" rtlCol="0" anchor="ctr"/>
           <a:lstStyle/>
           <a:p>
-            <a:pPr indent="0" marL="0">
-              <a:buNone/>
-            </a:pPr>
-            <a:r>
-              <a:rPr lang="en-US" sz="1200" b="1" spc="400" kern="0" dirty="0">
+            <a:pPr marL="0" indent="0">
+              <a:buNone/>
+            </a:pPr>
+            <a:r>
+              <a:rPr lang="en-US" sz="1200" b="1" kern="0" spc="400" dirty="0">
                 <a:solidFill>
                   <a:srgbClr val="FFFFFF"/>
                 </a:solidFill>
@@ -19986,7 +19731,7 @@
           <a:bodyPr wrap="square" lIns="0" tIns="0" rIns="0" bIns="0" rtlCol="0" anchor="ctr"/>
           <a:lstStyle/>
           <a:p>
-            <a:pPr indent="0" marL="0">
+            <a:pPr marL="0" indent="0">
               <a:buNone/>
             </a:pPr>
             <a:r>
@@ -20025,7 +19770,7 @@
           <a:bodyPr wrap="square" lIns="0" tIns="0" rIns="0" bIns="0" rtlCol="0" anchor="t"/>
           <a:lstStyle/>
           <a:p>
-            <a:pPr indent="0" marL="0">
+            <a:pPr marL="0" indent="0">
               <a:buNone/>
             </a:pPr>
             <a:r>
@@ -20111,7 +19856,7 @@
           <a:bodyPr wrap="square" lIns="0" tIns="0" rIns="0" bIns="0" rtlCol="0" anchor="ctr"/>
           <a:lstStyle/>
           <a:p>
-            <a:pPr algn="l" indent="0" marL="0">
+            <a:pPr marL="0" indent="0" algn="l">
               <a:buNone/>
             </a:pPr>
             <a:r>
@@ -20150,7 +19895,7 @@
           <a:bodyPr wrap="square" lIns="0" tIns="0" rIns="0" bIns="0" rtlCol="0" anchor="ctr"/>
           <a:lstStyle/>
           <a:p>
-            <a:pPr indent="0" marL="0">
+            <a:pPr marL="0" indent="0">
               <a:buNone/>
             </a:pPr>
             <a:r>
@@ -20216,11 +19961,11 @@
           <a:bodyPr wrap="square" lIns="0" tIns="0" rIns="0" bIns="0" rtlCol="0" anchor="ctr"/>
           <a:lstStyle/>
           <a:p>
-            <a:pPr algn="ctr" indent="0" marL="0">
-              <a:buNone/>
-            </a:pPr>
-            <a:r>
-              <a:rPr lang="en-US" sz="900" b="1" spc="100" kern="0" dirty="0">
+            <a:pPr marL="0" indent="0" algn="ctr">
+              <a:buNone/>
+            </a:pPr>
+            <a:r>
+              <a:rPr lang="en-US" sz="900" b="1" kern="0" spc="100" dirty="0">
                 <a:solidFill>
                   <a:srgbClr val="5A05F4"/>
                 </a:solidFill>
@@ -20236,14 +19981,14 @@
       </p:sp>
       <p:pic>
         <p:nvPicPr>
-          <p:cNvPr id="7" name="Image 0" descr="preencoded.png">    </p:cNvPr>
+          <p:cNvPr id="7" name="Image 0" descr="preencoded.png"/>
           <p:cNvPicPr>
             <a:picLocks noChangeAspect="1"/>
           </p:cNvPicPr>
           <p:nvPr/>
         </p:nvPicPr>
         <p:blipFill>
-          <a:blip r:embed="rId1"/>
+          <a:blip r:embed="rId3"/>
           <a:stretch>
             <a:fillRect/>
           </a:stretch>
@@ -20301,7 +20046,7 @@
           <a:bodyPr wrap="square" lIns="0" tIns="0" rIns="0" bIns="0" rtlCol="0" anchor="ctr"/>
           <a:lstStyle/>
           <a:p>
-            <a:pPr indent="0" marL="0">
+            <a:pPr marL="0" indent="0">
               <a:buNone/>
             </a:pPr>
             <a:r>
@@ -20340,7 +20085,7 @@
           <a:bodyPr wrap="square" lIns="0" tIns="0" rIns="0" bIns="0" rtlCol="0" anchor="t"/>
           <a:lstStyle/>
           <a:p>
-            <a:pPr indent="0" marL="0">
+            <a:pPr marL="0" indent="0">
               <a:lnSpc>
                 <a:spcPct val="108000"/>
               </a:lnSpc>
@@ -20404,7 +20149,7 @@
           <a:bodyPr wrap="square" lIns="0" tIns="0" rIns="0" bIns="0" rtlCol="0" anchor="ctr"/>
           <a:lstStyle/>
           <a:p>
-            <a:pPr indent="0" marL="0">
+            <a:pPr marL="0" indent="0">
               <a:buNone/>
             </a:pPr>
             <a:r>
@@ -20443,7 +20188,7 @@
           <a:bodyPr wrap="square" lIns="0" tIns="0" rIns="0" bIns="0" rtlCol="0" anchor="t"/>
           <a:lstStyle/>
           <a:p>
-            <a:pPr indent="0" marL="0">
+            <a:pPr marL="0" indent="0">
               <a:lnSpc>
                 <a:spcPct val="108000"/>
               </a:lnSpc>
@@ -20527,7 +20272,7 @@
           <a:bodyPr wrap="square" lIns="0" tIns="0" rIns="0" bIns="0" rtlCol="0" anchor="ctr"/>
           <a:lstStyle/>
           <a:p>
-            <a:pPr algn="ctr" indent="0" marL="0">
+            <a:pPr marL="0" indent="0" algn="ctr">
               <a:buNone/>
             </a:pPr>
             <a:r>
@@ -20566,7 +20311,7 @@
           <a:bodyPr wrap="square" lIns="0" tIns="0" rIns="0" bIns="0" rtlCol="0" anchor="ctr"/>
           <a:lstStyle/>
           <a:p>
-            <a:pPr indent="0" marL="0">
+            <a:pPr marL="0" indent="0">
               <a:buNone/>
             </a:pPr>
             <a:r>
@@ -20605,7 +20350,7 @@
           <a:bodyPr wrap="square" lIns="0" tIns="0" rIns="0" bIns="0" rtlCol="0" anchor="t"/>
           <a:lstStyle/>
           <a:p>
-            <a:pPr indent="0" marL="0">
+            <a:pPr marL="0" indent="0">
               <a:lnSpc>
                 <a:spcPct val="108000"/>
               </a:lnSpc>
@@ -20689,7 +20434,7 @@
           <a:bodyPr wrap="square" lIns="0" tIns="0" rIns="0" bIns="0" rtlCol="0" anchor="ctr"/>
           <a:lstStyle/>
           <a:p>
-            <a:pPr algn="ctr" indent="0" marL="0">
+            <a:pPr marL="0" indent="0" algn="ctr">
               <a:buNone/>
             </a:pPr>
             <a:r>
@@ -20728,7 +20473,7 @@
           <a:bodyPr wrap="square" lIns="0" tIns="0" rIns="0" bIns="0" rtlCol="0" anchor="ctr"/>
           <a:lstStyle/>
           <a:p>
-            <a:pPr indent="0" marL="0">
+            <a:pPr marL="0" indent="0">
               <a:buNone/>
             </a:pPr>
             <a:r>
@@ -20767,7 +20512,7 @@
           <a:bodyPr wrap="square" lIns="0" tIns="0" rIns="0" bIns="0" rtlCol="0" anchor="t"/>
           <a:lstStyle/>
           <a:p>
-            <a:pPr indent="0" marL="0">
+            <a:pPr marL="0" indent="0">
               <a:lnSpc>
                 <a:spcPct val="108000"/>
               </a:lnSpc>
@@ -20796,8 +20541,8 @@
         </p:nvSpPr>
         <p:spPr>
           <a:xfrm>
-            <a:off x="7973568" y="3429000"/>
-            <a:ext cx="3520440" cy="1554480"/>
+            <a:off x="7991856" y="3429000"/>
+            <a:ext cx="3639312" cy="1554480"/>
           </a:xfrm>
           <a:prstGeom prst="roundRect">
             <a:avLst>
@@ -20851,7 +20596,7 @@
           <a:bodyPr wrap="square" lIns="0" tIns="0" rIns="0" bIns="0" rtlCol="0" anchor="ctr"/>
           <a:lstStyle/>
           <a:p>
-            <a:pPr algn="ctr" indent="0" marL="0">
+            <a:pPr marL="0" indent="0" algn="ctr">
               <a:buNone/>
             </a:pPr>
             <a:r>
@@ -20890,7 +20635,7 @@
           <a:bodyPr wrap="square" lIns="0" tIns="0" rIns="0" bIns="0" rtlCol="0" anchor="ctr"/>
           <a:lstStyle/>
           <a:p>
-            <a:pPr indent="0" marL="0">
+            <a:pPr marL="0" indent="0">
               <a:buNone/>
             </a:pPr>
             <a:r>
@@ -20929,7 +20674,7 @@
           <a:bodyPr wrap="square" lIns="0" tIns="0" rIns="0" bIns="0" rtlCol="0" anchor="t"/>
           <a:lstStyle/>
           <a:p>
-            <a:pPr indent="0" marL="0">
+            <a:pPr marL="0" indent="0">
               <a:lnSpc>
                 <a:spcPct val="108000"/>
               </a:lnSpc>
@@ -20998,7 +20743,7 @@
           <a:bodyPr wrap="square" lIns="0" tIns="0" rIns="0" bIns="0" rtlCol="0" anchor="ctr"/>
           <a:lstStyle/>
           <a:p>
-            <a:pPr indent="0" marL="0">
+            <a:pPr marL="0" indent="0">
               <a:lnSpc>
                 <a:spcPct val="112000"/>
               </a:lnSpc>
@@ -21021,7 +20766,7 @@
       </p:sp>
       <p:sp>
         <p:nvSpPr>
-          <p:cNvPr id="25" name="Slide Number Placeholder 0"/>
+          <p:cNvPr id="31" name="Slide Number Placeholder 0"/>
           <p:cNvSpPr>
             <a:spLocks noGrp="1"/>
           </p:cNvSpPr>
@@ -21039,7 +20784,7 @@
           </a:prstGeom>
           <a:extLst>
             <a:ext uri="{C572A759-6A51-4108-AA02-DFA0A04FC94B}">
-              <ma14:wrappingTextBoxFlag xmlns:ma14="http://schemas.microsoft.com/office/mac/drawingml/2011/main" val="0"/>
+              <ma14:wrappingTextBoxFlag xmlns:ma14="http://schemas.microsoft.com/office/mac/drawingml/2011/main" xmlns="" val="0"/>
             </a:ext>
           </a:extLst>
         </p:spPr>
@@ -21060,7 +20805,7 @@
           <a:p>
             <a:pPr algn="l"/>
             <a:fld id="{F7021451-1387-4CA6-816F-3879F97B5CBC}" type="slidenum">
-              <a:rPr b="0" lang="en-US"/>
+              <a:rPr lang="en-US" b="0"/>
               <a:t>6</a:t>
             </a:fld>
             <a:endParaRPr lang="en-US"/>
@@ -21135,7 +20880,7 @@
           <a:bodyPr wrap="square" lIns="0" tIns="0" rIns="0" bIns="0" rtlCol="0" anchor="ctr"/>
           <a:lstStyle/>
           <a:p>
-            <a:pPr algn="l" indent="0" marL="0">
+            <a:pPr marL="0" indent="0" algn="l">
               <a:buNone/>
             </a:pPr>
             <a:r>
@@ -21174,7 +20919,7 @@
           <a:bodyPr wrap="square" lIns="0" tIns="0" rIns="0" bIns="0" rtlCol="0" anchor="ctr"/>
           <a:lstStyle/>
           <a:p>
-            <a:pPr indent="0" marL="0">
+            <a:pPr marL="0" indent="0">
               <a:buNone/>
             </a:pPr>
             <a:r>
@@ -21240,11 +20985,11 @@
           <a:bodyPr wrap="square" lIns="0" tIns="0" rIns="0" bIns="0" rtlCol="0" anchor="ctr"/>
           <a:lstStyle/>
           <a:p>
-            <a:pPr algn="ctr" indent="0" marL="0">
-              <a:buNone/>
-            </a:pPr>
-            <a:r>
-              <a:rPr lang="en-US" sz="900" b="1" spc="100" kern="0" dirty="0">
+            <a:pPr marL="0" indent="0" algn="ctr">
+              <a:buNone/>
+            </a:pPr>
+            <a:r>
+              <a:rPr lang="en-US" sz="900" b="1" kern="0" spc="100" dirty="0">
                 <a:solidFill>
                   <a:srgbClr val="5A05F4"/>
                 </a:solidFill>
@@ -21260,14 +21005,14 @@
       </p:sp>
       <p:pic>
         <p:nvPicPr>
-          <p:cNvPr id="7" name="Image 0" descr="preencoded.png">    </p:cNvPr>
+          <p:cNvPr id="7" name="Image 0" descr="preencoded.png"/>
           <p:cNvPicPr>
             <a:picLocks noChangeAspect="1"/>
           </p:cNvPicPr>
           <p:nvPr/>
         </p:nvPicPr>
         <p:blipFill>
-          <a:blip r:embed="rId1"/>
+          <a:blip r:embed="rId3"/>
           <a:stretch>
             <a:fillRect/>
           </a:stretch>
@@ -21325,7 +21070,7 @@
           <a:bodyPr wrap="square" lIns="0" tIns="0" rIns="0" bIns="0" rtlCol="0" anchor="ctr"/>
           <a:lstStyle/>
           <a:p>
-            <a:pPr algn="ctr" indent="0" marL="0">
+            <a:pPr marL="0" indent="0" algn="ctr">
               <a:buNone/>
             </a:pPr>
             <a:r>
@@ -21429,7 +21174,7 @@
           <a:bodyPr wrap="square" lIns="0" tIns="0" rIns="0" bIns="0" rtlCol="0" anchor="ctr"/>
           <a:lstStyle/>
           <a:p>
-            <a:pPr algn="ctr" indent="0" marL="0">
+            <a:pPr marL="0" indent="0" algn="ctr">
               <a:buNone/>
             </a:pPr>
             <a:r>
@@ -21533,7 +21278,7 @@
           <a:bodyPr wrap="square" lIns="0" tIns="0" rIns="0" bIns="0" rtlCol="0" anchor="ctr"/>
           <a:lstStyle/>
           <a:p>
-            <a:pPr algn="ctr" indent="0" marL="0">
+            <a:pPr marL="0" indent="0" algn="ctr">
               <a:buNone/>
             </a:pPr>
             <a:r>
@@ -21637,7 +21382,7 @@
           <a:bodyPr wrap="square" lIns="0" tIns="0" rIns="0" bIns="0" rtlCol="0" anchor="ctr"/>
           <a:lstStyle/>
           <a:p>
-            <a:pPr algn="ctr" indent="0" marL="0">
+            <a:pPr marL="0" indent="0" algn="ctr">
               <a:buNone/>
             </a:pPr>
             <a:r>
@@ -21741,7 +21486,7 @@
           <a:bodyPr wrap="square" lIns="0" tIns="0" rIns="0" bIns="0" rtlCol="0" anchor="ctr"/>
           <a:lstStyle/>
           <a:p>
-            <a:pPr algn="ctr" indent="0" marL="0">
+            <a:pPr marL="0" indent="0" algn="ctr">
               <a:buNone/>
             </a:pPr>
             <a:r>
@@ -21845,7 +21590,7 @@
           <a:bodyPr wrap="square" lIns="0" tIns="0" rIns="0" bIns="0" rtlCol="0" anchor="ctr"/>
           <a:lstStyle/>
           <a:p>
-            <a:pPr algn="ctr" indent="0" marL="0">
+            <a:pPr marL="0" indent="0" algn="ctr">
               <a:buNone/>
             </a:pPr>
             <a:r>
@@ -21906,7 +21651,7 @@
           <a:bodyPr wrap="square" lIns="0" tIns="0" rIns="0" bIns="0" rtlCol="0" anchor="ctr"/>
           <a:lstStyle/>
           <a:p>
-            <a:pPr algn="ctr" indent="0" marL="0">
+            <a:pPr marL="0" indent="0" algn="ctr">
               <a:buNone/>
             </a:pPr>
             <a:r>
@@ -22010,7 +21755,7 @@
           <a:bodyPr wrap="square" lIns="0" tIns="0" rIns="0" bIns="0" rtlCol="0" anchor="ctr"/>
           <a:lstStyle/>
           <a:p>
-            <a:pPr algn="ctr" indent="0" marL="0">
+            <a:pPr marL="0" indent="0" algn="ctr">
               <a:buNone/>
             </a:pPr>
             <a:r>
@@ -22114,7 +21859,7 @@
           <a:bodyPr wrap="square" lIns="0" tIns="0" rIns="0" bIns="0" rtlCol="0" anchor="ctr"/>
           <a:lstStyle/>
           <a:p>
-            <a:pPr algn="ctr" indent="0" marL="0">
+            <a:pPr marL="0" indent="0" algn="ctr">
               <a:buNone/>
             </a:pPr>
             <a:r>
@@ -22175,7 +21920,7 @@
           <a:bodyPr wrap="square" lIns="0" tIns="0" rIns="0" bIns="0" rtlCol="0" anchor="ctr"/>
           <a:lstStyle/>
           <a:p>
-            <a:pPr algn="ctr" indent="0" marL="0">
+            <a:pPr marL="0" indent="0" algn="ctr">
               <a:buNone/>
             </a:pPr>
             <a:r>
@@ -22279,7 +22024,7 @@
           <a:bodyPr wrap="square" lIns="0" tIns="0" rIns="0" bIns="0" rtlCol="0" anchor="ctr"/>
           <a:lstStyle/>
           <a:p>
-            <a:pPr algn="ctr" indent="0" marL="0">
+            <a:pPr marL="0" indent="0" algn="ctr">
               <a:buNone/>
             </a:pPr>
             <a:r>
@@ -22383,7 +22128,7 @@
           <a:bodyPr wrap="square" lIns="0" tIns="0" rIns="0" bIns="0" rtlCol="0" anchor="ctr"/>
           <a:lstStyle/>
           <a:p>
-            <a:pPr algn="ctr" indent="0" marL="0">
+            <a:pPr marL="0" indent="0" algn="ctr">
               <a:buNone/>
             </a:pPr>
             <a:r>
@@ -22449,7 +22194,7 @@
           <a:bodyPr wrap="square" lIns="0" tIns="0" rIns="0" bIns="0" rtlCol="0" anchor="ctr"/>
           <a:lstStyle/>
           <a:p>
-            <a:pPr algn="ctr" indent="0" marL="0">
+            <a:pPr marL="0" indent="0" algn="ctr">
               <a:buNone/>
             </a:pPr>
             <a:r>
@@ -22466,7 +22211,7 @@
             <a:endParaRPr lang="en-US" sz="850" dirty="0"/>
           </a:p>
           <a:p>
-            <a:pPr algn="ctr" indent="0" marL="0">
+            <a:pPr marL="0" indent="0" algn="ctr">
               <a:buNone/>
             </a:pPr>
             <a:r>
@@ -22532,7 +22277,7 @@
           <a:bodyPr wrap="square" lIns="0" tIns="0" rIns="0" bIns="0" rtlCol="0" anchor="ctr"/>
           <a:lstStyle/>
           <a:p>
-            <a:pPr algn="ctr" indent="0" marL="0">
+            <a:pPr marL="0" indent="0" algn="ctr">
               <a:buNone/>
             </a:pPr>
             <a:r>
@@ -22549,7 +22294,7 @@
             <a:endParaRPr lang="en-US" sz="850" dirty="0"/>
           </a:p>
           <a:p>
-            <a:pPr algn="ctr" indent="0" marL="0">
+            <a:pPr marL="0" indent="0" algn="ctr">
               <a:buNone/>
             </a:pPr>
             <a:r>
@@ -22615,7 +22360,7 @@
           <a:bodyPr wrap="square" lIns="0" tIns="0" rIns="0" bIns="0" rtlCol="0" anchor="ctr"/>
           <a:lstStyle/>
           <a:p>
-            <a:pPr algn="ctr" indent="0" marL="0">
+            <a:pPr marL="0" indent="0" algn="ctr">
               <a:buNone/>
             </a:pPr>
             <a:r>
@@ -22632,7 +22377,7 @@
             <a:endParaRPr lang="en-US" sz="850" dirty="0"/>
           </a:p>
           <a:p>
-            <a:pPr algn="ctr" indent="0" marL="0">
+            <a:pPr marL="0" indent="0" algn="ctr">
               <a:buNone/>
             </a:pPr>
             <a:r>
@@ -22698,7 +22443,7 @@
           <a:bodyPr wrap="square" lIns="0" tIns="0" rIns="0" bIns="0" rtlCol="0" anchor="ctr"/>
           <a:lstStyle/>
           <a:p>
-            <a:pPr algn="ctr" indent="0" marL="0">
+            <a:pPr marL="0" indent="0" algn="ctr">
               <a:buNone/>
             </a:pPr>
             <a:r>
@@ -22715,7 +22460,7 @@
             <a:endParaRPr lang="en-US" sz="850" dirty="0"/>
           </a:p>
           <a:p>
-            <a:pPr algn="ctr" indent="0" marL="0">
+            <a:pPr marL="0" indent="0" algn="ctr">
               <a:buNone/>
             </a:pPr>
             <a:r>
@@ -22781,7 +22526,7 @@
           <a:bodyPr wrap="square" lIns="0" tIns="0" rIns="0" bIns="0" rtlCol="0" anchor="ctr"/>
           <a:lstStyle/>
           <a:p>
-            <a:pPr algn="ctr" indent="0" marL="0">
+            <a:pPr marL="0" indent="0" algn="ctr">
               <a:buNone/>
             </a:pPr>
             <a:r>
@@ -22798,7 +22543,7 @@
             <a:endParaRPr lang="en-US" sz="850" dirty="0"/>
           </a:p>
           <a:p>
-            <a:pPr algn="ctr" indent="0" marL="0">
+            <a:pPr marL="0" indent="0" algn="ctr">
               <a:buNone/>
             </a:pPr>
             <a:r>
@@ -22864,7 +22609,7 @@
           <a:bodyPr wrap="square" lIns="0" tIns="0" rIns="0" bIns="0" rtlCol="0" anchor="ctr"/>
           <a:lstStyle/>
           <a:p>
-            <a:pPr algn="ctr" indent="0" marL="0">
+            <a:pPr marL="0" indent="0" algn="ctr">
               <a:buNone/>
             </a:pPr>
             <a:r>
@@ -22881,7 +22626,7 @@
             <a:endParaRPr lang="en-US" sz="850" dirty="0"/>
           </a:p>
           <a:p>
-            <a:pPr algn="ctr" indent="0" marL="0">
+            <a:pPr marL="0" indent="0" algn="ctr">
               <a:buNone/>
             </a:pPr>
             <a:r>
@@ -22947,7 +22692,7 @@
           <a:bodyPr wrap="square" lIns="0" tIns="0" rIns="0" bIns="0" rtlCol="0" anchor="ctr"/>
           <a:lstStyle/>
           <a:p>
-            <a:pPr algn="ctr" indent="0" marL="0">
+            <a:pPr marL="0" indent="0" algn="ctr">
               <a:buNone/>
             </a:pPr>
             <a:r>
@@ -22964,7 +22709,7 @@
             <a:endParaRPr lang="en-US" sz="850" dirty="0"/>
           </a:p>
           <a:p>
-            <a:pPr algn="ctr" indent="0" marL="0">
+            <a:pPr marL="0" indent="0" algn="ctr">
               <a:buNone/>
             </a:pPr>
             <a:r>
@@ -23030,7 +22775,7 @@
           <a:bodyPr wrap="square" lIns="0" tIns="0" rIns="0" bIns="0" rtlCol="0" anchor="ctr"/>
           <a:lstStyle/>
           <a:p>
-            <a:pPr algn="ctr" indent="0" marL="0">
+            <a:pPr marL="0" indent="0" algn="ctr">
               <a:buNone/>
             </a:pPr>
             <a:r>
@@ -23047,7 +22792,7 @@
             <a:endParaRPr lang="en-US" sz="850" dirty="0"/>
           </a:p>
           <a:p>
-            <a:pPr algn="ctr" indent="0" marL="0">
+            <a:pPr marL="0" indent="0" algn="ctr">
               <a:buNone/>
             </a:pPr>
             <a:r>
@@ -23113,7 +22858,7 @@
           <a:bodyPr wrap="square" lIns="0" tIns="0" rIns="0" bIns="0" rtlCol="0" anchor="ctr"/>
           <a:lstStyle/>
           <a:p>
-            <a:pPr algn="ctr" indent="0" marL="0">
+            <a:pPr marL="0" indent="0" algn="ctr">
               <a:buNone/>
             </a:pPr>
             <a:r>
@@ -23130,7 +22875,7 @@
             <a:endParaRPr lang="en-US" sz="850" dirty="0"/>
           </a:p>
           <a:p>
-            <a:pPr algn="ctr" indent="0" marL="0">
+            <a:pPr marL="0" indent="0" algn="ctr">
               <a:buNone/>
             </a:pPr>
             <a:r>
@@ -23196,7 +22941,7 @@
           <a:bodyPr wrap="square" lIns="0" tIns="0" rIns="0" bIns="0" rtlCol="0" anchor="ctr"/>
           <a:lstStyle/>
           <a:p>
-            <a:pPr indent="0" marL="0">
+            <a:pPr marL="0" indent="0">
               <a:lnSpc>
                 <a:spcPct val="112000"/>
               </a:lnSpc>
@@ -23219,7 +22964,7 @@
       </p:sp>
       <p:sp>
         <p:nvSpPr>
-          <p:cNvPr id="25" name="Slide Number Placeholder 0"/>
+          <p:cNvPr id="70" name="Slide Number Placeholder 0"/>
           <p:cNvSpPr>
             <a:spLocks noGrp="1"/>
           </p:cNvSpPr>
@@ -23237,7 +22982,7 @@
           </a:prstGeom>
           <a:extLst>
             <a:ext uri="{C572A759-6A51-4108-AA02-DFA0A04FC94B}">
-              <ma14:wrappingTextBoxFlag xmlns:ma14="http://schemas.microsoft.com/office/mac/drawingml/2011/main" val="0"/>
+              <ma14:wrappingTextBoxFlag xmlns:ma14="http://schemas.microsoft.com/office/mac/drawingml/2011/main" xmlns="" val="0"/>
             </a:ext>
           </a:extLst>
         </p:spPr>
@@ -23258,7 +23003,7 @@
           <a:p>
             <a:pPr algn="l"/>
             <a:fld id="{F7021451-1387-4CA6-816F-3879F97B5CBC}" type="slidenum">
-              <a:rPr b="0" lang="en-US"/>
+              <a:rPr lang="en-US" b="0"/>
               <a:t>7</a:t>
             </a:fld>
             <a:endParaRPr lang="en-US"/>
@@ -23333,7 +23078,7 @@
           <a:bodyPr wrap="square" lIns="0" tIns="0" rIns="0" bIns="0" rtlCol="0" anchor="ctr"/>
           <a:lstStyle/>
           <a:p>
-            <a:pPr algn="l" indent="0" marL="0">
+            <a:pPr marL="0" indent="0" algn="l">
               <a:buNone/>
             </a:pPr>
             <a:r>
@@ -23372,7 +23117,7 @@
           <a:bodyPr wrap="square" lIns="0" tIns="0" rIns="0" bIns="0" rtlCol="0" anchor="ctr"/>
           <a:lstStyle/>
           <a:p>
-            <a:pPr indent="0" marL="0">
+            <a:pPr marL="0" indent="0">
               <a:buNone/>
             </a:pPr>
             <a:r>
@@ -23438,11 +23183,11 @@
           <a:bodyPr wrap="square" lIns="0" tIns="0" rIns="0" bIns="0" rtlCol="0" anchor="ctr"/>
           <a:lstStyle/>
           <a:p>
-            <a:pPr algn="ctr" indent="0" marL="0">
-              <a:buNone/>
-            </a:pPr>
-            <a:r>
-              <a:rPr lang="en-US" sz="900" b="1" spc="100" kern="0" dirty="0">
+            <a:pPr marL="0" indent="0" algn="ctr">
+              <a:buNone/>
+            </a:pPr>
+            <a:r>
+              <a:rPr lang="en-US" sz="900" b="1" kern="0" spc="100" dirty="0">
                 <a:solidFill>
                   <a:srgbClr val="5A05F4"/>
                 </a:solidFill>
@@ -23458,14 +23203,14 @@
       </p:sp>
       <p:pic>
         <p:nvPicPr>
-          <p:cNvPr id="7" name="Image 0" descr="preencoded.png">    </p:cNvPr>
+          <p:cNvPr id="7" name="Image 0" descr="preencoded.png"/>
           <p:cNvPicPr>
             <a:picLocks noChangeAspect="1"/>
           </p:cNvPicPr>
           <p:nvPr/>
         </p:nvPicPr>
         <p:blipFill>
-          <a:blip r:embed="rId1"/>
+          <a:blip r:embed="rId3"/>
           <a:stretch>
             <a:fillRect/>
           </a:stretch>
@@ -23496,16 +23241,34 @@
         </p:nvGraphicFramePr>
         <p:xfrm>
           <a:off x="566928" y="1737360"/>
-          <a:ext cx="11064240" cy="914400"/>
+          <a:ext cx="11064240" cy="2560320"/>
         </p:xfrm>
         <a:graphic>
           <a:graphicData uri="http://schemas.openxmlformats.org/drawingml/2006/table">
             <a:tbl>
               <a:tblPr/>
               <a:tblGrid>
-                <a:gridCol w="2194560"/>
-                <a:gridCol w="3108960"/>
-                <a:gridCol w="5760720"/>
+                <a:gridCol w="2194560">
+                  <a:extLst>
+                    <a:ext uri="{9D8B030D-6E8A-4147-A177-3AD203B41FA5}">
+                      <a16:colId xmlns:a16="http://schemas.microsoft.com/office/drawing/2014/main" val="20000"/>
+                    </a:ext>
+                  </a:extLst>
+                </a:gridCol>
+                <a:gridCol w="3108960">
+                  <a:extLst>
+                    <a:ext uri="{9D8B030D-6E8A-4147-A177-3AD203B41FA5}">
+                      <a16:colId xmlns:a16="http://schemas.microsoft.com/office/drawing/2014/main" val="20001"/>
+                    </a:ext>
+                  </a:extLst>
+                </a:gridCol>
+                <a:gridCol w="5760720">
+                  <a:extLst>
+                    <a:ext uri="{9D8B030D-6E8A-4147-A177-3AD203B41FA5}">
+                      <a16:colId xmlns:a16="http://schemas.microsoft.com/office/drawing/2014/main" val="20002"/>
+                    </a:ext>
+                  </a:extLst>
+                </a:gridCol>
               </a:tblGrid>
               <a:tr h="512064">
                 <a:tc>
@@ -23513,11 +23276,11 @@
                     <a:bodyPr/>
                     <a:lstStyle/>
                     <a:p>
-                      <a:pPr algn="ctr" indent="0" marL="0">
+                      <a:pPr marL="0" indent="0" algn="ctr">
                         <a:buNone/>
                       </a:pPr>
                       <a:r>
-                        <a:rPr lang="en-US" sz="900" b="1" spc="100" kern="0" dirty="0">
+                        <a:rPr lang="en-US" sz="900" b="1" kern="0" spc="100" dirty="0">
                           <a:solidFill>
                             <a:srgbClr val="FFFFFF"/>
                           </a:solidFill>
@@ -23581,11 +23344,11 @@
                     <a:bodyPr/>
                     <a:lstStyle/>
                     <a:p>
-                      <a:pPr algn="ctr" indent="0" marL="0">
+                      <a:pPr marL="0" indent="0" algn="ctr">
                         <a:buNone/>
                       </a:pPr>
                       <a:r>
-                        <a:rPr lang="en-US" sz="900" b="1" spc="100" kern="0" dirty="0">
+                        <a:rPr lang="en-US" sz="900" b="1" kern="0" spc="100" dirty="0">
                           <a:solidFill>
                             <a:srgbClr val="FFFFFF"/>
                           </a:solidFill>
@@ -23649,11 +23412,11 @@
                     <a:bodyPr/>
                     <a:lstStyle/>
                     <a:p>
-                      <a:pPr algn="ctr" indent="0" marL="0">
+                      <a:pPr marL="0" indent="0" algn="ctr">
                         <a:buNone/>
                       </a:pPr>
                       <a:r>
-                        <a:rPr lang="en-US" sz="900" b="1" spc="100" kern="0" dirty="0">
+                        <a:rPr lang="en-US" sz="900" b="1" kern="0" spc="100" dirty="0">
                           <a:solidFill>
                             <a:srgbClr val="FFFFFF"/>
                           </a:solidFill>
@@ -23712,6 +23475,11 @@
                     </a:solidFill>
                   </a:tcPr>
                 </a:tc>
+                <a:extLst>
+                  <a:ext uri="{0D108BD9-81ED-4DB2-BD59-A6C34878D82A}">
+                    <a16:rowId xmlns:a16="http://schemas.microsoft.com/office/drawing/2014/main" val="10000"/>
+                  </a:ext>
+                </a:extLst>
               </a:tr>
               <a:tr h="512064">
                 <a:tc>
@@ -23719,7 +23487,7 @@
                     <a:bodyPr/>
                     <a:lstStyle/>
                     <a:p>
-                      <a:pPr indent="0" marL="0">
+                      <a:pPr marL="0" indent="0">
                         <a:buNone/>
                       </a:pPr>
                       <a:r>
@@ -23787,7 +23555,7 @@
                     <a:bodyPr/>
                     <a:lstStyle/>
                     <a:p>
-                      <a:pPr indent="0" marL="0">
+                      <a:pPr marL="0" indent="0">
                         <a:buNone/>
                       </a:pPr>
                       <a:r>
@@ -23855,7 +23623,7 @@
                     <a:bodyPr/>
                     <a:lstStyle/>
                     <a:p>
-                      <a:pPr indent="0" marL="0">
+                      <a:pPr marL="0" indent="0">
                         <a:buNone/>
                       </a:pPr>
                       <a:r>
@@ -23918,6 +23686,11 @@
                     </a:solidFill>
                   </a:tcPr>
                 </a:tc>
+                <a:extLst>
+                  <a:ext uri="{0D108BD9-81ED-4DB2-BD59-A6C34878D82A}">
+                    <a16:rowId xmlns:a16="http://schemas.microsoft.com/office/drawing/2014/main" val="10001"/>
+                  </a:ext>
+                </a:extLst>
               </a:tr>
               <a:tr h="512064">
                 <a:tc>
@@ -23925,7 +23698,7 @@
                     <a:bodyPr/>
                     <a:lstStyle/>
                     <a:p>
-                      <a:pPr indent="0" marL="0">
+                      <a:pPr marL="0" indent="0">
                         <a:buNone/>
                       </a:pPr>
                       <a:r>
@@ -23993,7 +23766,7 @@
                     <a:bodyPr/>
                     <a:lstStyle/>
                     <a:p>
-                      <a:pPr indent="0" marL="0">
+                      <a:pPr marL="0" indent="0">
                         <a:buNone/>
                       </a:pPr>
                       <a:r>
@@ -24061,7 +23834,7 @@
                     <a:bodyPr/>
                     <a:lstStyle/>
                     <a:p>
-                      <a:pPr indent="0" marL="0">
+                      <a:pPr marL="0" indent="0">
                         <a:buNone/>
                       </a:pPr>
                       <a:r>
@@ -24124,6 +23897,11 @@
                     </a:solidFill>
                   </a:tcPr>
                 </a:tc>
+                <a:extLst>
+                  <a:ext uri="{0D108BD9-81ED-4DB2-BD59-A6C34878D82A}">
+                    <a16:rowId xmlns:a16="http://schemas.microsoft.com/office/drawing/2014/main" val="10002"/>
+                  </a:ext>
+                </a:extLst>
               </a:tr>
               <a:tr h="512064">
                 <a:tc>
@@ -24131,7 +23909,7 @@
                     <a:bodyPr/>
                     <a:lstStyle/>
                     <a:p>
-                      <a:pPr indent="0" marL="0">
+                      <a:pPr marL="0" indent="0">
                         <a:buNone/>
                       </a:pPr>
                       <a:r>
@@ -24199,7 +23977,7 @@
                     <a:bodyPr/>
                     <a:lstStyle/>
                     <a:p>
-                      <a:pPr indent="0" marL="0">
+                      <a:pPr marL="0" indent="0">
                         <a:buNone/>
                       </a:pPr>
                       <a:r>
@@ -24267,7 +24045,7 @@
                     <a:bodyPr/>
                     <a:lstStyle/>
                     <a:p>
-                      <a:pPr indent="0" marL="0">
+                      <a:pPr marL="0" indent="0">
                         <a:buNone/>
                       </a:pPr>
                       <a:r>
@@ -24330,6 +24108,11 @@
                     </a:solidFill>
                   </a:tcPr>
                 </a:tc>
+                <a:extLst>
+                  <a:ext uri="{0D108BD9-81ED-4DB2-BD59-A6C34878D82A}">
+                    <a16:rowId xmlns:a16="http://schemas.microsoft.com/office/drawing/2014/main" val="10003"/>
+                  </a:ext>
+                </a:extLst>
               </a:tr>
               <a:tr h="512064">
                 <a:tc>
@@ -24337,7 +24120,7 @@
                     <a:bodyPr/>
                     <a:lstStyle/>
                     <a:p>
-                      <a:pPr indent="0" marL="0">
+                      <a:pPr marL="0" indent="0">
                         <a:buNone/>
                       </a:pPr>
                       <a:r>
@@ -24405,7 +24188,7 @@
                     <a:bodyPr/>
                     <a:lstStyle/>
                     <a:p>
-                      <a:pPr indent="0" marL="0">
+                      <a:pPr marL="0" indent="0">
                         <a:buNone/>
                       </a:pPr>
                       <a:r>
@@ -24473,7 +24256,7 @@
                     <a:bodyPr/>
                     <a:lstStyle/>
                     <a:p>
-                      <a:pPr indent="0" marL="0">
+                      <a:pPr marL="0" indent="0">
                         <a:buNone/>
                       </a:pPr>
                       <a:r>
@@ -24536,6 +24319,11 @@
                     </a:solidFill>
                   </a:tcPr>
                 </a:tc>
+                <a:extLst>
+                  <a:ext uri="{0D108BD9-81ED-4DB2-BD59-A6C34878D82A}">
+                    <a16:rowId xmlns:a16="http://schemas.microsoft.com/office/drawing/2014/main" val="10004"/>
+                  </a:ext>
+                </a:extLst>
               </a:tr>
             </a:tbl>
           </a:graphicData>
@@ -24543,7 +24331,7 @@
       </p:graphicFrame>
       <p:sp>
         <p:nvSpPr>
-          <p:cNvPr id="9" name="Shape 5"/>
+          <p:cNvPr id="8" name="Shape 5"/>
           <p:cNvSpPr/>
           <p:nvPr/>
         </p:nvSpPr>
@@ -24589,7 +24377,7 @@
           <a:bodyPr wrap="square" lIns="0" tIns="0" rIns="0" bIns="0" rtlCol="0" anchor="ctr"/>
           <a:lstStyle/>
           <a:p>
-            <a:pPr indent="0" marL="0">
+            <a:pPr marL="0" indent="0">
               <a:lnSpc>
                 <a:spcPct val="112000"/>
               </a:lnSpc>
@@ -24658,7 +24446,7 @@
           <a:bodyPr wrap="square" lIns="0" tIns="0" rIns="0" bIns="0" rtlCol="0" anchor="ctr"/>
           <a:lstStyle/>
           <a:p>
-            <a:pPr indent="0" marL="0">
+            <a:pPr marL="0" indent="0">
               <a:lnSpc>
                 <a:spcPct val="112000"/>
               </a:lnSpc>
@@ -24699,7 +24487,7 @@
           </a:prstGeom>
           <a:extLst>
             <a:ext uri="{C572A759-6A51-4108-AA02-DFA0A04FC94B}">
-              <ma14:wrappingTextBoxFlag xmlns:ma14="http://schemas.microsoft.com/office/mac/drawingml/2011/main" val="0"/>
+              <ma14:wrappingTextBoxFlag xmlns:ma14="http://schemas.microsoft.com/office/mac/drawingml/2011/main" xmlns="" val="0"/>
             </a:ext>
           </a:extLst>
         </p:spPr>
@@ -24720,7 +24508,7 @@
           <a:p>
             <a:pPr algn="l"/>
             <a:fld id="{F7021451-1387-4CA6-816F-3879F97B5CBC}" type="slidenum">
-              <a:rPr b="0" lang="en-US"/>
+              <a:rPr lang="en-US" b="0"/>
               <a:t>8</a:t>
             </a:fld>
             <a:endParaRPr lang="en-US"/>
@@ -24795,7 +24583,7 @@
           <a:bodyPr wrap="square" lIns="0" tIns="0" rIns="0" bIns="0" rtlCol="0" anchor="ctr"/>
           <a:lstStyle/>
           <a:p>
-            <a:pPr algn="l" indent="0" marL="0">
+            <a:pPr marL="0" indent="0" algn="l">
               <a:buNone/>
             </a:pPr>
             <a:r>
@@ -24834,7 +24622,7 @@
           <a:bodyPr wrap="square" lIns="0" tIns="0" rIns="0" bIns="0" rtlCol="0" anchor="ctr"/>
           <a:lstStyle/>
           <a:p>
-            <a:pPr indent="0" marL="0">
+            <a:pPr marL="0" indent="0">
               <a:buNone/>
             </a:pPr>
             <a:r>
@@ -24900,11 +24688,11 @@
           <a:bodyPr wrap="square" lIns="0" tIns="0" rIns="0" bIns="0" rtlCol="0" anchor="ctr"/>
           <a:lstStyle/>
           <a:p>
-            <a:pPr algn="ctr" indent="0" marL="0">
-              <a:buNone/>
-            </a:pPr>
-            <a:r>
-              <a:rPr lang="en-US" sz="900" b="1" spc="100" kern="0" dirty="0">
+            <a:pPr marL="0" indent="0" algn="ctr">
+              <a:buNone/>
+            </a:pPr>
+            <a:r>
+              <a:rPr lang="en-US" sz="900" b="1" kern="0" spc="100" dirty="0">
                 <a:solidFill>
                   <a:srgbClr val="5A05F4"/>
                 </a:solidFill>
@@ -24920,14 +24708,14 @@
       </p:sp>
       <p:pic>
         <p:nvPicPr>
-          <p:cNvPr id="7" name="Image 0" descr="preencoded.png">    </p:cNvPr>
+          <p:cNvPr id="7" name="Image 0" descr="preencoded.png"/>
           <p:cNvPicPr>
             <a:picLocks noChangeAspect="1"/>
           </p:cNvPicPr>
           <p:nvPr/>
         </p:nvPicPr>
         <p:blipFill>
-          <a:blip r:embed="rId1"/>
+          <a:blip r:embed="rId3"/>
           <a:stretch>
             <a:fillRect/>
           </a:stretch>
@@ -25006,7 +24794,7 @@
           <a:bodyPr wrap="square" lIns="0" tIns="0" rIns="0" bIns="0" rtlCol="0" anchor="ctr"/>
           <a:lstStyle/>
           <a:p>
-            <a:pPr algn="ctr" indent="0" marL="0">
+            <a:pPr marL="0" indent="0" algn="ctr">
               <a:buNone/>
             </a:pPr>
             <a:r>
@@ -25045,7 +24833,7 @@
           <a:bodyPr wrap="square" lIns="0" tIns="0" rIns="0" bIns="0" rtlCol="0" anchor="t"/>
           <a:lstStyle/>
           <a:p>
-            <a:pPr algn="ctr" indent="0" marL="0">
+            <a:pPr marL="0" indent="0" algn="ctr">
               <a:buNone/>
             </a:pPr>
             <a:r>
@@ -25104,7 +24892,7 @@
           <a:bodyPr wrap="square" lIns="0" tIns="0" rIns="0" bIns="0" rtlCol="0" anchor="ctr"/>
           <a:lstStyle/>
           <a:p>
-            <a:pPr algn="ctr" indent="0" marL="0">
+            <a:pPr marL="0" indent="0" algn="ctr">
               <a:buNone/>
             </a:pPr>
             <a:r>
@@ -25143,7 +24931,7 @@
           <a:bodyPr wrap="square" lIns="0" tIns="0" rIns="0" bIns="0" rtlCol="0" anchor="t"/>
           <a:lstStyle/>
           <a:p>
-            <a:pPr algn="ctr" indent="0" marL="0">
+            <a:pPr marL="0" indent="0" algn="ctr">
               <a:buNone/>
             </a:pPr>
             <a:r>
@@ -25202,7 +24990,7 @@
           <a:bodyPr wrap="square" lIns="0" tIns="0" rIns="0" bIns="0" rtlCol="0" anchor="ctr"/>
           <a:lstStyle/>
           <a:p>
-            <a:pPr algn="ctr" indent="0" marL="0">
+            <a:pPr marL="0" indent="0" algn="ctr">
               <a:buNone/>
             </a:pPr>
             <a:r>
@@ -25241,7 +25029,7 @@
           <a:bodyPr wrap="square" lIns="0" tIns="0" rIns="0" bIns="0" rtlCol="0" anchor="t"/>
           <a:lstStyle/>
           <a:p>
-            <a:pPr algn="ctr" indent="0" marL="0">
+            <a:pPr marL="0" indent="0" algn="ctr">
               <a:buNone/>
             </a:pPr>
             <a:r>
@@ -25300,7 +25088,7 @@
           <a:bodyPr wrap="square" lIns="0" tIns="0" rIns="0" bIns="0" rtlCol="0" anchor="ctr"/>
           <a:lstStyle/>
           <a:p>
-            <a:pPr algn="ctr" indent="0" marL="0">
+            <a:pPr marL="0" indent="0" algn="ctr">
               <a:buNone/>
             </a:pPr>
             <a:r>
@@ -25339,7 +25127,7 @@
           <a:bodyPr wrap="square" lIns="0" tIns="0" rIns="0" bIns="0" rtlCol="0" anchor="t"/>
           <a:lstStyle/>
           <a:p>
-            <a:pPr algn="ctr" indent="0" marL="0">
+            <a:pPr marL="0" indent="0" algn="ctr">
               <a:buNone/>
             </a:pPr>
             <a:r>
@@ -25405,11 +25193,11 @@
           <a:bodyPr wrap="square" lIns="0" tIns="0" rIns="0" bIns="0" rtlCol="0" anchor="ctr"/>
           <a:lstStyle/>
           <a:p>
-            <a:pPr indent="0" marL="0">
-              <a:buNone/>
-            </a:pPr>
-            <a:r>
-              <a:rPr lang="en-US" sz="950" b="1" spc="150" kern="0" dirty="0">
+            <a:pPr marL="0" indent="0">
+              <a:buNone/>
+            </a:pPr>
+            <a:r>
+              <a:rPr lang="en-US" sz="950" b="1" kern="0" spc="150" dirty="0">
                 <a:solidFill>
                   <a:srgbClr val="B3261E"/>
                 </a:solidFill>
@@ -25444,7 +25232,7 @@
           <a:bodyPr wrap="square" lIns="0" tIns="0" rIns="0" bIns="0" rtlCol="0" anchor="ctr"/>
           <a:lstStyle/>
           <a:p>
-            <a:pPr indent="0" marL="0">
+            <a:pPr marL="0" indent="0">
               <a:lnSpc>
                 <a:spcPct val="112000"/>
               </a:lnSpc>
@@ -25513,7 +25301,7 @@
           <a:bodyPr wrap="square" lIns="0" tIns="0" rIns="0" bIns="0" rtlCol="0" anchor="ctr"/>
           <a:lstStyle/>
           <a:p>
-            <a:pPr indent="0" marL="0">
+            <a:pPr marL="0" indent="0">
               <a:lnSpc>
                 <a:spcPct val="112000"/>
               </a:lnSpc>
@@ -25536,7 +25324,7 @@
       </p:sp>
       <p:sp>
         <p:nvSpPr>
-          <p:cNvPr id="25" name="Slide Number Placeholder 0"/>
+          <p:cNvPr id="26" name="Slide Number Placeholder 0"/>
           <p:cNvSpPr>
             <a:spLocks noGrp="1"/>
           </p:cNvSpPr>
@@ -25554,7 +25342,7 @@
           </a:prstGeom>
           <a:extLst>
             <a:ext uri="{C572A759-6A51-4108-AA02-DFA0A04FC94B}">
-              <ma14:wrappingTextBoxFlag xmlns:ma14="http://schemas.microsoft.com/office/mac/drawingml/2011/main" val="0"/>
+              <ma14:wrappingTextBoxFlag xmlns:ma14="http://schemas.microsoft.com/office/mac/drawingml/2011/main" xmlns="" val="0"/>
             </a:ext>
           </a:extLst>
         </p:spPr>
@@ -25575,7 +25363,7 @@
           <a:p>
             <a:pPr algn="l"/>
             <a:fld id="{F7021451-1387-4CA6-816F-3879F97B5CBC}" type="slidenum">
-              <a:rPr b="0" lang="en-US"/>
+              <a:rPr lang="en-US" b="0"/>
               <a:t>9</a:t>
             </a:fld>
             <a:endParaRPr lang="en-US"/>
@@ -25883,4 +25671,299 @@
     </a:ext>
   </a:extLst>
 </a:theme>
+</file>
+
+<file path=ppt/theme/theme2.xml><?xml version="1.0" encoding="utf-8"?>
+<a:theme xmlns:a="http://schemas.openxmlformats.org/drawingml/2006/main" name="Office Theme">
+  <a:themeElements>
+    <a:clrScheme name="Office">
+      <a:dk1>
+        <a:sysClr val="windowText" lastClr="000000"/>
+      </a:dk1>
+      <a:lt1>
+        <a:sysClr val="window" lastClr="FFFFFF"/>
+      </a:lt1>
+      <a:dk2>
+        <a:srgbClr val="44546A"/>
+      </a:dk2>
+      <a:lt2>
+        <a:srgbClr val="E7E6E6"/>
+      </a:lt2>
+      <a:accent1>
+        <a:srgbClr val="4472C4"/>
+      </a:accent1>
+      <a:accent2>
+        <a:srgbClr val="ED7D31"/>
+      </a:accent2>
+      <a:accent3>
+        <a:srgbClr val="A5A5A5"/>
+      </a:accent3>
+      <a:accent4>
+        <a:srgbClr val="FFC000"/>
+      </a:accent4>
+      <a:accent5>
+        <a:srgbClr val="5B9BD5"/>
+      </a:accent5>
+      <a:accent6>
+        <a:srgbClr val="70AD47"/>
+      </a:accent6>
+      <a:hlink>
+        <a:srgbClr val="0563C1"/>
+      </a:hlink>
+      <a:folHlink>
+        <a:srgbClr val="954F72"/>
+      </a:folHlink>
+    </a:clrScheme>
+    <a:fontScheme name="Office">
+      <a:majorFont>
+        <a:latin typeface="Calibri Light" panose="020F0302020204030204"/>
+        <a:ea typeface=""/>
+        <a:cs typeface=""/>
+        <a:font script="Jpan" typeface="游ゴシック Light"/>
+        <a:font script="Hang" typeface="맑은 고딕"/>
+        <a:font script="Hans" typeface="等线 Light"/>
+        <a:font script="Hant" typeface="新細明體"/>
+        <a:font script="Arab" typeface="Times New Roman"/>
+        <a:font script="Hebr" typeface="Times New Roman"/>
+        <a:font script="Thai" typeface="Angsana New"/>
+        <a:font script="Ethi" typeface="Nyala"/>
+        <a:font script="Beng" typeface="Vrinda"/>
+        <a:font script="Gujr" typeface="Shruti"/>
+        <a:font script="Khmr" typeface="MoolBoran"/>
+        <a:font script="Knda" typeface="Tunga"/>
+        <a:font script="Guru" typeface="Raavi"/>
+        <a:font script="Cans" typeface="Euphemia"/>
+        <a:font script="Cher" typeface="Plantagenet Cherokee"/>
+        <a:font script="Yiii" typeface="Microsoft Yi Baiti"/>
+        <a:font script="Tibt" typeface="Microsoft Himalaya"/>
+        <a:font script="Thaa" typeface="MV Boli"/>
+        <a:font script="Deva" typeface="Mangal"/>
+        <a:font script="Telu" typeface="Gautami"/>
+        <a:font script="Taml" typeface="Latha"/>
+        <a:font script="Syrc" typeface="Estrangelo Edessa"/>
+        <a:font script="Orya" typeface="Kalinga"/>
+        <a:font script="Mlym" typeface="Kartika"/>
+        <a:font script="Laoo" typeface="DokChampa"/>
+        <a:font script="Sinh" typeface="Iskoola Pota"/>
+        <a:font script="Mong" typeface="Mongolian Baiti"/>
+        <a:font script="Viet" typeface="Times New Roman"/>
+        <a:font script="Uigh" typeface="Microsoft Uighur"/>
+        <a:font script="Geor" typeface="Sylfaen"/>
+        <a:font script="Armn" typeface="Arial"/>
+        <a:font script="Bugi" typeface="Leelawadee UI"/>
+        <a:font script="Bopo" typeface="Microsoft JhengHei"/>
+        <a:font script="Java" typeface="Javanese Text"/>
+        <a:font script="Lisu" typeface="Segoe UI"/>
+        <a:font script="Mymr" typeface="Myanmar Text"/>
+        <a:font script="Nkoo" typeface="Ebrima"/>
+        <a:font script="Olck" typeface="Nirmala UI"/>
+        <a:font script="Osma" typeface="Ebrima"/>
+        <a:font script="Phag" typeface="Phagspa"/>
+        <a:font script="Syrn" typeface="Estrangelo Edessa"/>
+        <a:font script="Syrj" typeface="Estrangelo Edessa"/>
+        <a:font script="Syre" typeface="Estrangelo Edessa"/>
+        <a:font script="Sora" typeface="Nirmala UI"/>
+        <a:font script="Tale" typeface="Microsoft Tai Le"/>
+        <a:font script="Talu" typeface="Microsoft New Tai Lue"/>
+        <a:font script="Tfng" typeface="Ebrima"/>
+      </a:majorFont>
+      <a:minorFont>
+        <a:latin typeface="Calibri" panose="020F0502020204030204"/>
+        <a:ea typeface=""/>
+        <a:cs typeface=""/>
+        <a:font script="Jpan" typeface="游ゴシック"/>
+        <a:font script="Hang" typeface="맑은 고딕"/>
+        <a:font script="Hans" typeface="等线"/>
+        <a:font script="Hant" typeface="新細明體"/>
+        <a:font script="Arab" typeface="Arial"/>
+        <a:font script="Hebr" typeface="Arial"/>
+        <a:font script="Thai" typeface="Cordia New"/>
+        <a:font script="Ethi" typeface="Nyala"/>
+        <a:font script="Beng" typeface="Vrinda"/>
+        <a:font script="Gujr" typeface="Shruti"/>
+        <a:font script="Khmr" typeface="DaunPenh"/>
+        <a:font script="Knda" typeface="Tunga"/>
+        <a:font script="Guru" typeface="Raavi"/>
+        <a:font script="Cans" typeface="Euphemia"/>
+        <a:font script="Cher" typeface="Plantagenet Cherokee"/>
+        <a:font script="Yiii" typeface="Microsoft Yi Baiti"/>
+        <a:font script="Tibt" typeface="Microsoft Himalaya"/>
+        <a:font script="Thaa" typeface="MV Boli"/>
+        <a:font script="Deva" typeface="Mangal"/>
+        <a:font script="Telu" typeface="Gautami"/>
+        <a:font script="Taml" typeface="Latha"/>
+        <a:font script="Syrc" typeface="Estrangelo Edessa"/>
+        <a:font script="Orya" typeface="Kalinga"/>
+        <a:font script="Mlym" typeface="Kartika"/>
+        <a:font script="Laoo" typeface="DokChampa"/>
+        <a:font script="Sinh" typeface="Iskoola Pota"/>
+        <a:font script="Mong" typeface="Mongolian Baiti"/>
+        <a:font script="Viet" typeface="Arial"/>
+        <a:font script="Uigh" typeface="Microsoft Uighur"/>
+        <a:font script="Geor" typeface="Sylfaen"/>
+        <a:font script="Armn" typeface="Arial"/>
+        <a:font script="Bugi" typeface="Leelawadee UI"/>
+        <a:font script="Bopo" typeface="Microsoft JhengHei"/>
+        <a:font script="Java" typeface="Javanese Text"/>
+        <a:font script="Lisu" typeface="Segoe UI"/>
+        <a:font script="Mymr" typeface="Myanmar Text"/>
+        <a:font script="Nkoo" typeface="Ebrima"/>
+        <a:font script="Olck" typeface="Nirmala UI"/>
+        <a:font script="Osma" typeface="Ebrima"/>
+        <a:font script="Phag" typeface="Phagspa"/>
+        <a:font script="Syrn" typeface="Estrangelo Edessa"/>
+        <a:font script="Syrj" typeface="Estrangelo Edessa"/>
+        <a:font script="Syre" typeface="Estrangelo Edessa"/>
+        <a:font script="Sora" typeface="Nirmala UI"/>
+        <a:font script="Tale" typeface="Microsoft Tai Le"/>
+        <a:font script="Talu" typeface="Microsoft New Tai Lue"/>
+        <a:font script="Tfng" typeface="Ebrima"/>
+      </a:minorFont>
+    </a:fontScheme>
+    <a:fmtScheme name="Office">
+      <a:fillStyleLst>
+        <a:solidFill>
+          <a:schemeClr val="phClr"/>
+        </a:solidFill>
+        <a:gradFill rotWithShape="1">
+          <a:gsLst>
+            <a:gs pos="0">
+              <a:schemeClr val="phClr">
+                <a:lumMod val="110000"/>
+                <a:satMod val="105000"/>
+                <a:tint val="67000"/>
+              </a:schemeClr>
+            </a:gs>
+            <a:gs pos="50000">
+              <a:schemeClr val="phClr">
+                <a:lumMod val="105000"/>
+                <a:satMod val="103000"/>
+                <a:tint val="73000"/>
+              </a:schemeClr>
+            </a:gs>
+            <a:gs pos="100000">
+              <a:schemeClr val="phClr">
+                <a:lumMod val="105000"/>
+                <a:satMod val="109000"/>
+                <a:tint val="81000"/>
+              </a:schemeClr>
+            </a:gs>
+          </a:gsLst>
+          <a:lin ang="5400000" scaled="0"/>
+        </a:gradFill>
+        <a:gradFill rotWithShape="1">
+          <a:gsLst>
+            <a:gs pos="0">
+              <a:schemeClr val="phClr">
+                <a:satMod val="103000"/>
+                <a:lumMod val="102000"/>
+                <a:tint val="94000"/>
+              </a:schemeClr>
+            </a:gs>
+            <a:gs pos="50000">
+              <a:schemeClr val="phClr">
+                <a:satMod val="110000"/>
+                <a:lumMod val="100000"/>
+                <a:shade val="100000"/>
+              </a:schemeClr>
+            </a:gs>
+            <a:gs pos="100000">
+              <a:schemeClr val="phClr">
+                <a:lumMod val="99000"/>
+                <a:satMod val="120000"/>
+                <a:shade val="78000"/>
+              </a:schemeClr>
+            </a:gs>
+          </a:gsLst>
+          <a:lin ang="5400000" scaled="0"/>
+        </a:gradFill>
+      </a:fillStyleLst>
+      <a:lnStyleLst>
+        <a:ln w="6350" cap="flat" cmpd="sng" algn="ctr">
+          <a:solidFill>
+            <a:schemeClr val="phClr"/>
+          </a:solidFill>
+          <a:prstDash val="solid"/>
+          <a:miter lim="800000"/>
+        </a:ln>
+        <a:ln w="12700" cap="flat" cmpd="sng" algn="ctr">
+          <a:solidFill>
+            <a:schemeClr val="phClr"/>
+          </a:solidFill>
+          <a:prstDash val="solid"/>
+          <a:miter lim="800000"/>
+        </a:ln>
+        <a:ln w="19050" cap="flat" cmpd="sng" algn="ctr">
+          <a:solidFill>
+            <a:schemeClr val="phClr"/>
+          </a:solidFill>
+          <a:prstDash val="solid"/>
+          <a:miter lim="800000"/>
+        </a:ln>
+      </a:lnStyleLst>
+      <a:effectStyleLst>
+        <a:effectStyle>
+          <a:effectLst/>
+        </a:effectStyle>
+        <a:effectStyle>
+          <a:effectLst/>
+        </a:effectStyle>
+        <a:effectStyle>
+          <a:effectLst>
+            <a:outerShdw blurRad="57150" dist="19050" dir="5400000" algn="ctr" rotWithShape="0">
+              <a:srgbClr val="000000">
+                <a:alpha val="63000"/>
+              </a:srgbClr>
+            </a:outerShdw>
+          </a:effectLst>
+        </a:effectStyle>
+      </a:effectStyleLst>
+      <a:bgFillStyleLst>
+        <a:solidFill>
+          <a:schemeClr val="phClr"/>
+        </a:solidFill>
+        <a:solidFill>
+          <a:schemeClr val="phClr">
+            <a:tint val="95000"/>
+            <a:satMod val="170000"/>
+          </a:schemeClr>
+        </a:solidFill>
+        <a:gradFill rotWithShape="1">
+          <a:gsLst>
+            <a:gs pos="0">
+              <a:schemeClr val="phClr">
+                <a:tint val="93000"/>
+                <a:satMod val="150000"/>
+                <a:shade val="98000"/>
+                <a:lumMod val="102000"/>
+              </a:schemeClr>
+            </a:gs>
+            <a:gs pos="50000">
+              <a:schemeClr val="phClr">
+                <a:tint val="98000"/>
+                <a:satMod val="130000"/>
+                <a:shade val="90000"/>
+                <a:lumMod val="103000"/>
+              </a:schemeClr>
+            </a:gs>
+            <a:gs pos="100000">
+              <a:schemeClr val="phClr">
+                <a:shade val="63000"/>
+                <a:satMod val="120000"/>
+              </a:schemeClr>
+            </a:gs>
+          </a:gsLst>
+          <a:lin ang="5400000" scaled="0"/>
+        </a:gradFill>
+      </a:bgFillStyleLst>
+    </a:fmtScheme>
+  </a:themeElements>
+  <a:objectDefaults/>
+  <a:extraClrSchemeLst/>
+  <a:extLst>
+    <a:ext uri="{05A4C25C-085E-4340-85A3-A5531E510DB2}">
+      <thm15:themeFamily xmlns:thm15="http://schemas.microsoft.com/office/thememl/2012/main" name="Office Theme" id="{62F939B6-93AF-4DB8-9C6B-D6C7DFDC589F}" vid="{4A3C46E8-61CC-4603-A589-7422A47A8E4A}"/>
+    </a:ext>
+  </a:extLst>
+</a:theme>
 </file>
--- a/docs/decks/L12.pptx
+++ b/docs/decks/L12.pptx
@@ -8974,7 +8974,7 @@
                 <a:ea typeface="Montserrat" pitchFamily="34" charset="-122"/>
                 <a:cs typeface="Montserrat" pitchFamily="34" charset="-120"/>
               </a:rPr>
-              <a:t>Більше автономності</a:t>
+              <a:t>Модель зміниться</a:t>
             </a:r>
             <a:endParaRPr lang="en-US" sz="1450" dirty="0"/>
           </a:p>
@@ -9016,7 +9016,7 @@
                 <a:ea typeface="Montserrat" pitchFamily="34" charset="-122"/>
                 <a:cs typeface="Montserrat" pitchFamily="34" charset="-120"/>
               </a:rPr>
-              <a:t>агентні сценарії — і та сама межа: незворотне через людину</a:t>
+              <a:t>снапшот запінений — зміна не приїде сама; перехід на нову — PR через eval-гейт</a:t>
             </a:r>
             <a:endParaRPr lang="en-US" sz="1200" dirty="0"/>
           </a:p>
@@ -9136,7 +9136,7 @@
                 <a:ea typeface="Montserrat" pitchFamily="34" charset="-122"/>
                 <a:cs typeface="Montserrat" pitchFamily="34" charset="-120"/>
               </a:rPr>
-              <a:t>Більше провайдерів</a:t>
+              <a:t>Промптів стане більше</a:t>
             </a:r>
             <a:endParaRPr lang="en-US" sz="1450" dirty="0"/>
           </a:p>
@@ -9178,7 +9178,7 @@
                 <a:ea typeface="Montserrat" pitchFamily="34" charset="-122"/>
                 <a:cs typeface="Montserrat" pitchFamily="34" charset="-120"/>
               </a:rPr>
-              <a:t>той самий контур; змінюється лише список імен у конфізі</a:t>
+              <a:t>усе, що впливає на поведінку, — у реєстрі з версіями, одним релізом</a:t>
             </a:r>
             <a:endParaRPr lang="en-US" sz="1200" dirty="0"/>
           </a:p>
@@ -9298,7 +9298,7 @@
                 <a:ea typeface="Montserrat" pitchFamily="34" charset="-122"/>
                 <a:cs typeface="Montserrat" pitchFamily="34" charset="-120"/>
               </a:rPr>
-              <a:t>Більше вимог ззовні</a:t>
+              <a:t>Вартість виросте нелінійно</a:t>
             </a:r>
             <a:endParaRPr lang="en-US" sz="1450" dirty="0"/>
           </a:p>
@@ -9340,7 +9340,7 @@
                 <a:ea typeface="Montserrat" pitchFamily="34" charset="-122"/>
                 <a:cs typeface="Montserrat" pitchFamily="34" charset="-120"/>
               </a:rPr>
-              <a:t>аудит, регуляції — і ваш лог уже містить те, що спитають</a:t>
+              <a:t>контексти довшають — облік по зверненню, бюджет з алертом, кеш із метрикою</a:t>
             </a:r>
             <a:endParaRPr lang="en-US" sz="1200" dirty="0"/>
           </a:p>

--- a/docs/decks/L12.pptx
+++ b/docs/decks/L12.pptx
@@ -4,9 +4,6 @@
   <p:sldMasterIdLst>
     <p:sldMasterId id="2147483648" r:id="rId1"/>
   </p:sldMasterIdLst>
-  <p:notesMasterIdLst>
-    <p:notesMasterId r:id="rId27"/>
-  </p:notesMasterIdLst>
   <p:sldIdLst>
     <p:sldId id="256" r:id="rId2"/>
     <p:sldId id="257" r:id="rId3"/>
@@ -34,6 +31,9 @@
     <p:sldId id="279" r:id="rId25"/>
     <p:sldId id="280" r:id="rId26"/>
   </p:sldIdLst>
+  <p:notesMasterIdLst>
+    <p:notesMasterId r:id="rId27"/>
+  </p:notesMasterIdLst>
   <p:sldSz cx="12192000" cy="6858000"/>
   <p:notesSz cx="6858000" cy="12192000"/>
   <p:defaultTextStyle>
@@ -128,11 +128,6 @@
       </a:defRPr>
     </a:lvl9pPr>
   </p:defaultTextStyle>
-  <p:extLst>
-    <p:ext uri="{EFAFB233-063F-42B5-8137-9DF3F51BA10A}">
-      <p15:sldGuideLst xmlns:p15="http://schemas.microsoft.com/office/powerpoint/2012/main"/>
-    </p:ext>
-  </p:extLst>
 </p:presentation>
 </file>
 
@@ -158,10 +153,234 @@
           <a:chExt cx="0" cy="0"/>
         </a:xfrm>
       </p:grpSpPr>
+      <p:sp>
+        <p:nvSpPr>
+          <p:cNvPr id="2" name="Header Placeholder 1"/>
+          <p:cNvSpPr>
+            <a:spLocks noGrp="1"/>
+          </p:cNvSpPr>
+          <p:nvPr>
+            <p:ph type="hdr" sz="quarter"/>
+          </p:nvPr>
+        </p:nvSpPr>
+        <p:spPr>
+          <a:xfrm>
+            <a:off x="0" y="0"/>
+            <a:ext cx="2971800" cy="458788"/>
+          </a:xfrm>
+          <a:prstGeom prst="rect">
+            <a:avLst/>
+          </a:prstGeom>
+        </p:spPr>
+        <p:txBody>
+          <a:bodyPr vert="horz" lIns="91440" tIns="45720" rIns="91440" bIns="45720" rtlCol="0"/>
+          <a:lstStyle>
+            <a:lvl1pPr algn="l">
+              <a:defRPr sz="1200"/>
+            </a:lvl1pPr>
+          </a:lstStyle>
+          <a:p>
+            <a:endParaRPr lang="en-US"/>
+          </a:p>
+        </p:txBody>
+      </p:sp>
+      <p:sp>
+        <p:nvSpPr>
+          <p:cNvPr id="3" name="Date Placeholder 2"/>
+          <p:cNvSpPr>
+            <a:spLocks noGrp="1"/>
+          </p:cNvSpPr>
+          <p:nvPr>
+            <p:ph type="dt" idx="1"/>
+          </p:nvPr>
+        </p:nvSpPr>
+        <p:spPr>
+          <a:xfrm>
+            <a:off x="3884613" y="0"/>
+            <a:ext cx="2971800" cy="458788"/>
+          </a:xfrm>
+          <a:prstGeom prst="rect">
+            <a:avLst/>
+          </a:prstGeom>
+        </p:spPr>
+        <p:txBody>
+          <a:bodyPr vert="horz" lIns="91440" tIns="45720" rIns="91440" bIns="45720" rtlCol="0"/>
+          <a:lstStyle>
+            <a:lvl1pPr algn="r">
+              <a:defRPr sz="1200"/>
+            </a:lvl1pPr>
+          </a:lstStyle>
+          <a:p>
+            <a:fld id="{5282F153-3F37-0F45-9E97-73ACFA13230C}" type="datetimeFigureOut">
+              <a:rPr lang="en-US"/>
+              <a:t>7/23/19</a:t>
+            </a:fld>
+            <a:endParaRPr lang="en-US"/>
+          </a:p>
+        </p:txBody>
+      </p:sp>
+      <p:sp>
+        <p:nvSpPr>
+          <p:cNvPr id="4" name="Slide Image Placeholder 3"/>
+          <p:cNvSpPr>
+            <a:spLocks noGrp="1" noRot="1" noChangeAspect="1"/>
+          </p:cNvSpPr>
+          <p:nvPr>
+            <p:ph type="sldImg" idx="2"/>
+          </p:nvPr>
+        </p:nvSpPr>
+        <p:spPr>
+          <a:xfrm>
+            <a:off x="685800" y="1143000"/>
+            <a:ext cx="5486400" cy="3086100"/>
+          </a:xfrm>
+          <a:prstGeom prst="rect">
+            <a:avLst/>
+          </a:prstGeom>
+          <a:noFill/>
+          <a:ln w="12700">
+            <a:solidFill>
+              <a:prstClr val="black"/>
+            </a:solidFill>
+          </a:ln>
+        </p:spPr>
+        <p:txBody>
+          <a:bodyPr vert="horz" lIns="91440" tIns="45720" rIns="91440" bIns="45720" rtlCol="0" anchor="ctr"/>
+          <a:lstStyle/>
+          <a:p>
+            <a:endParaRPr lang="en-US"/>
+          </a:p>
+        </p:txBody>
+      </p:sp>
+      <p:sp>
+        <p:nvSpPr>
+          <p:cNvPr id="5" name="Notes Placeholder 4"/>
+          <p:cNvSpPr>
+            <a:spLocks noGrp="1"/>
+          </p:cNvSpPr>
+          <p:nvPr>
+            <p:ph type="body" sz="quarter" idx="3"/>
+          </p:nvPr>
+        </p:nvSpPr>
+        <p:spPr>
+          <a:xfrm>
+            <a:off x="685800" y="4400550"/>
+            <a:ext cx="5486400" cy="3600450"/>
+          </a:xfrm>
+          <a:prstGeom prst="rect">
+            <a:avLst/>
+          </a:prstGeom>
+        </p:spPr>
+        <p:txBody>
+          <a:bodyPr vert="horz" lIns="91440" tIns="45720" rIns="91440" bIns="45720" rtlCol="0"/>
+          <a:lstStyle/>
+          <a:p>
+            <a:pPr lvl="0"/>
+            <a:r>
+              <a:rPr lang="en-US"/>
+              <a:t>Click to edit Master text styles</a:t>
+            </a:r>
+          </a:p>
+          <a:p>
+            <a:pPr lvl="1"/>
+            <a:r>
+              <a:rPr lang="en-US"/>
+              <a:t>Second level</a:t>
+            </a:r>
+          </a:p>
+          <a:p>
+            <a:pPr lvl="2"/>
+            <a:r>
+              <a:rPr lang="en-US"/>
+              <a:t>Third level</a:t>
+            </a:r>
+          </a:p>
+          <a:p>
+            <a:pPr lvl="3"/>
+            <a:r>
+              <a:rPr lang="en-US"/>
+              <a:t>Fourth level</a:t>
+            </a:r>
+          </a:p>
+          <a:p>
+            <a:pPr lvl="4"/>
+            <a:r>
+              <a:rPr lang="en-US"/>
+              <a:t>Fifth level</a:t>
+            </a:r>
+          </a:p>
+        </p:txBody>
+      </p:sp>
+      <p:sp>
+        <p:nvSpPr>
+          <p:cNvPr id="6" name="Footer Placeholder 5"/>
+          <p:cNvSpPr>
+            <a:spLocks noGrp="1"/>
+          </p:cNvSpPr>
+          <p:nvPr>
+            <p:ph type="ftr" sz="quarter" idx="4"/>
+          </p:nvPr>
+        </p:nvSpPr>
+        <p:spPr>
+          <a:xfrm>
+            <a:off x="0" y="8685213"/>
+            <a:ext cx="2971800" cy="458787"/>
+          </a:xfrm>
+          <a:prstGeom prst="rect">
+            <a:avLst/>
+          </a:prstGeom>
+        </p:spPr>
+        <p:txBody>
+          <a:bodyPr vert="horz" lIns="91440" tIns="45720" rIns="91440" bIns="45720" rtlCol="0" anchor="b"/>
+          <a:lstStyle>
+            <a:lvl1pPr algn="l">
+              <a:defRPr sz="1200"/>
+            </a:lvl1pPr>
+          </a:lstStyle>
+          <a:p>
+            <a:endParaRPr lang="en-US"/>
+          </a:p>
+        </p:txBody>
+      </p:sp>
+      <p:sp>
+        <p:nvSpPr>
+          <p:cNvPr id="7" name="Slide Number Placeholder 6"/>
+          <p:cNvSpPr>
+            <a:spLocks noGrp="1"/>
+          </p:cNvSpPr>
+          <p:nvPr>
+            <p:ph type="sldNum" sz="quarter" idx="5"/>
+          </p:nvPr>
+        </p:nvSpPr>
+        <p:spPr>
+          <a:xfrm>
+            <a:off x="3884613" y="8685213"/>
+            <a:ext cx="2971800" cy="458787"/>
+          </a:xfrm>
+          <a:prstGeom prst="rect">
+            <a:avLst/>
+          </a:prstGeom>
+        </p:spPr>
+        <p:txBody>
+          <a:bodyPr vert="horz" lIns="91440" tIns="45720" rIns="91440" bIns="45720" rtlCol="0" anchor="b"/>
+          <a:lstStyle>
+            <a:lvl1pPr algn="r">
+              <a:defRPr sz="1200"/>
+            </a:lvl1pPr>
+          </a:lstStyle>
+          <a:p>
+            <a:fld id="{CE5E9CC1-C706-0F49-92D6-E571CC5EEA8F}" type="slidenum">
+              <a:rPr lang="en-US"/>
+              <a:t>‹#›</a:t>
+            </a:fld>
+            <a:endParaRPr lang="en-US"/>
+          </a:p>
+        </p:txBody>
+      </p:sp>
     </p:spTree>
     <p:extLst>
       <p:ext uri="{BB962C8B-B14F-4D97-AF65-F5344CB8AC3E}">
-        <p14:creationId xmlns:p14="http://schemas.microsoft.com/office/powerpoint/2010/main" val="3925313347"/>
+        <p14:creationId xmlns:p14="http://schemas.microsoft.com/office/powerpoint/2010/main" val="1024086991"/>
       </p:ext>
     </p:extLst>
   </p:cSld>
@@ -305,6 +524,10 @@
           <a:bodyPr/>
           <a:lstStyle/>
           <a:p>
+            <a:r>
+              <a:rPr lang="en-US" dirty="0"/>
+              <a:t/>
+            </a:r>
             <a:endParaRPr lang="en-US" dirty="0"/>
           </a:p>
         </p:txBody>
@@ -389,6 +612,10 @@
           <a:bodyPr/>
           <a:lstStyle/>
           <a:p>
+            <a:r>
+              <a:rPr lang="en-US" dirty="0"/>
+              <a:t/>
+            </a:r>
             <a:endParaRPr lang="en-US" dirty="0"/>
           </a:p>
         </p:txBody>
@@ -473,6 +700,10 @@
           <a:bodyPr/>
           <a:lstStyle/>
           <a:p>
+            <a:r>
+              <a:rPr lang="en-US" dirty="0"/>
+              <a:t/>
+            </a:r>
             <a:endParaRPr lang="en-US" dirty="0"/>
           </a:p>
         </p:txBody>
@@ -557,6 +788,10 @@
           <a:bodyPr/>
           <a:lstStyle/>
           <a:p>
+            <a:r>
+              <a:rPr lang="en-US" dirty="0"/>
+              <a:t/>
+            </a:r>
             <a:endParaRPr lang="en-US" dirty="0"/>
           </a:p>
         </p:txBody>
@@ -641,6 +876,10 @@
           <a:bodyPr/>
           <a:lstStyle/>
           <a:p>
+            <a:r>
+              <a:rPr lang="en-US" dirty="0"/>
+              <a:t/>
+            </a:r>
             <a:endParaRPr lang="en-US" dirty="0"/>
           </a:p>
         </p:txBody>
@@ -725,6 +964,10 @@
           <a:bodyPr/>
           <a:lstStyle/>
           <a:p>
+            <a:r>
+              <a:rPr lang="en-US" dirty="0"/>
+              <a:t/>
+            </a:r>
             <a:endParaRPr lang="en-US" dirty="0"/>
           </a:p>
         </p:txBody>
@@ -809,6 +1052,10 @@
           <a:bodyPr/>
           <a:lstStyle/>
           <a:p>
+            <a:r>
+              <a:rPr lang="en-US" dirty="0"/>
+              <a:t/>
+            </a:r>
             <a:endParaRPr lang="en-US" dirty="0"/>
           </a:p>
         </p:txBody>
@@ -893,6 +1140,10 @@
           <a:bodyPr/>
           <a:lstStyle/>
           <a:p>
+            <a:r>
+              <a:rPr lang="en-US" dirty="0"/>
+              <a:t/>
+            </a:r>
             <a:endParaRPr lang="en-US" dirty="0"/>
           </a:p>
         </p:txBody>
@@ -977,6 +1228,10 @@
           <a:bodyPr/>
           <a:lstStyle/>
           <a:p>
+            <a:r>
+              <a:rPr lang="en-US" dirty="0"/>
+              <a:t/>
+            </a:r>
             <a:endParaRPr lang="en-US" dirty="0"/>
           </a:p>
         </p:txBody>
@@ -1061,6 +1316,10 @@
           <a:bodyPr/>
           <a:lstStyle/>
           <a:p>
+            <a:r>
+              <a:rPr lang="en-US" dirty="0"/>
+              <a:t/>
+            </a:r>
             <a:endParaRPr lang="en-US" dirty="0"/>
           </a:p>
         </p:txBody>
@@ -1145,6 +1404,10 @@
           <a:bodyPr/>
           <a:lstStyle/>
           <a:p>
+            <a:r>
+              <a:rPr lang="en-US" dirty="0"/>
+              <a:t/>
+            </a:r>
             <a:endParaRPr lang="en-US" dirty="0"/>
           </a:p>
         </p:txBody>
@@ -1229,6 +1492,10 @@
           <a:bodyPr/>
           <a:lstStyle/>
           <a:p>
+            <a:r>
+              <a:rPr lang="en-US" dirty="0"/>
+              <a:t/>
+            </a:r>
             <a:endParaRPr lang="en-US" dirty="0"/>
           </a:p>
         </p:txBody>
@@ -1313,6 +1580,10 @@
           <a:bodyPr/>
           <a:lstStyle/>
           <a:p>
+            <a:r>
+              <a:rPr lang="en-US" dirty="0"/>
+              <a:t/>
+            </a:r>
             <a:endParaRPr lang="en-US" dirty="0"/>
           </a:p>
         </p:txBody>
@@ -1397,6 +1668,10 @@
           <a:bodyPr/>
           <a:lstStyle/>
           <a:p>
+            <a:r>
+              <a:rPr lang="en-US" dirty="0"/>
+              <a:t/>
+            </a:r>
             <a:endParaRPr lang="en-US" dirty="0"/>
           </a:p>
         </p:txBody>
@@ -1481,6 +1756,10 @@
           <a:bodyPr/>
           <a:lstStyle/>
           <a:p>
+            <a:r>
+              <a:rPr lang="en-US" dirty="0"/>
+              <a:t/>
+            </a:r>
             <a:endParaRPr lang="en-US" dirty="0"/>
           </a:p>
         </p:txBody>
@@ -1565,6 +1844,10 @@
           <a:bodyPr/>
           <a:lstStyle/>
           <a:p>
+            <a:r>
+              <a:rPr lang="en-US" dirty="0"/>
+              <a:t/>
+            </a:r>
             <a:endParaRPr lang="en-US" dirty="0"/>
           </a:p>
         </p:txBody>
@@ -1649,6 +1932,10 @@
           <a:bodyPr/>
           <a:lstStyle/>
           <a:p>
+            <a:r>
+              <a:rPr lang="en-US" dirty="0"/>
+              <a:t/>
+            </a:r>
             <a:endParaRPr lang="en-US" dirty="0"/>
           </a:p>
         </p:txBody>
@@ -1733,6 +2020,10 @@
           <a:bodyPr/>
           <a:lstStyle/>
           <a:p>
+            <a:r>
+              <a:rPr lang="en-US" dirty="0"/>
+              <a:t/>
+            </a:r>
             <a:endParaRPr lang="en-US" dirty="0"/>
           </a:p>
         </p:txBody>
@@ -1817,6 +2108,10 @@
           <a:bodyPr/>
           <a:lstStyle/>
           <a:p>
+            <a:r>
+              <a:rPr lang="en-US" dirty="0"/>
+              <a:t/>
+            </a:r>
             <a:endParaRPr lang="en-US" dirty="0"/>
           </a:p>
         </p:txBody>
@@ -1901,6 +2196,10 @@
           <a:bodyPr/>
           <a:lstStyle/>
           <a:p>
+            <a:r>
+              <a:rPr lang="en-US" dirty="0"/>
+              <a:t/>
+            </a:r>
             <a:endParaRPr lang="en-US" dirty="0"/>
           </a:p>
         </p:txBody>
@@ -1985,6 +2284,10 @@
           <a:bodyPr/>
           <a:lstStyle/>
           <a:p>
+            <a:r>
+              <a:rPr lang="en-US" dirty="0"/>
+              <a:t/>
+            </a:r>
             <a:endParaRPr lang="en-US" dirty="0"/>
           </a:p>
         </p:txBody>
@@ -2069,6 +2372,10 @@
           <a:bodyPr/>
           <a:lstStyle/>
           <a:p>
+            <a:r>
+              <a:rPr lang="en-US" dirty="0"/>
+              <a:t/>
+            </a:r>
             <a:endParaRPr lang="en-US" dirty="0"/>
           </a:p>
         </p:txBody>
@@ -2153,6 +2460,10 @@
           <a:bodyPr/>
           <a:lstStyle/>
           <a:p>
+            <a:r>
+              <a:rPr lang="en-US" dirty="0"/>
+              <a:t/>
+            </a:r>
             <a:endParaRPr lang="en-US" dirty="0"/>
           </a:p>
         </p:txBody>
@@ -2237,6 +2548,10 @@
           <a:bodyPr/>
           <a:lstStyle/>
           <a:p>
+            <a:r>
+              <a:rPr lang="en-US" dirty="0"/>
+              <a:t/>
+            </a:r>
             <a:endParaRPr lang="en-US" dirty="0"/>
           </a:p>
         </p:txBody>
@@ -2321,6 +2636,10 @@
           <a:bodyPr/>
           <a:lstStyle/>
           <a:p>
+            <a:r>
+              <a:rPr lang="en-US" dirty="0"/>
+              <a:t/>
+            </a:r>
             <a:endParaRPr lang="en-US" dirty="0"/>
           </a:p>
         </p:txBody>
@@ -2403,7 +2722,7 @@
           </a:prstGeom>
           <a:extLst>
             <a:ext uri="{C572A759-6A51-4108-AA02-DFA0A04FC94B}">
-              <ma14:wrappingTextBoxFlag xmlns:ma14="http://schemas.microsoft.com/office/mac/drawingml/2011/main" xmlns="" val="0"/>
+              <ma14:wrappingTextBoxFlag xmlns:ma14="http://schemas.microsoft.com/office/mac/drawingml/2011/main" val="0"/>
             </a:ext>
           </a:extLst>
         </p:spPr>
@@ -2424,8 +2743,8 @@
           <a:p>
             <a:pPr algn="l"/>
             <a:fld id="{F7021451-1387-4CA6-816F-3879F97B5CBC}" type="slidenum">
-              <a:rPr lang="en-US" b="0"/>
-              <a:t>‹#›</a:t>
+              <a:rPr b="0" lang="en-US"/>
+              <a:t>1000</a:t>
             </a:fld>
             <a:endParaRPr lang="en-US"/>
           </a:p>
@@ -2447,7 +2766,6 @@
         <a:solidFill>
           <a:srgbClr val="000000"/>
         </a:solidFill>
-        <a:effectLst/>
       </p:bgPr>
     </p:bg>
     <p:spTree>
@@ -2466,14 +2784,14 @@
       </p:grpSpPr>
       <p:pic>
         <p:nvPicPr>
-          <p:cNvPr id="2" name="Image 0" descr="preencoded.png"/>
+          <p:cNvPr id="2" name="Image 0" descr="preencoded.png">    </p:cNvPr>
           <p:cNvPicPr>
             <a:picLocks noChangeAspect="1"/>
           </p:cNvPicPr>
           <p:nvPr/>
         </p:nvPicPr>
         <p:blipFill>
-          <a:blip r:embed="rId2"/>
+          <a:blip r:embed="rId1"/>
           <a:stretch>
             <a:fillRect/>
           </a:stretch>
@@ -2504,7 +2822,6 @@
         <a:solidFill>
           <a:srgbClr val="000000"/>
         </a:solidFill>
-        <a:effectLst/>
       </p:bgPr>
     </p:bg>
     <p:spTree>
@@ -2523,14 +2840,14 @@
       </p:grpSpPr>
       <p:pic>
         <p:nvPicPr>
-          <p:cNvPr id="2" name="Image 0" descr="preencoded.png"/>
+          <p:cNvPr id="2" name="Image 0" descr="preencoded.png">    </p:cNvPr>
           <p:cNvPicPr>
             <a:picLocks noChangeAspect="1"/>
           </p:cNvPicPr>
           <p:nvPr/>
         </p:nvPicPr>
         <p:blipFill>
-          <a:blip r:embed="rId2"/>
+          <a:blip r:embed="rId1"/>
           <a:stretch>
             <a:fillRect/>
           </a:stretch>
@@ -2561,7 +2878,6 @@
         <a:solidFill>
           <a:srgbClr val="000000"/>
         </a:solidFill>
-        <a:effectLst/>
       </p:bgPr>
     </p:bg>
     <p:spTree>
@@ -2580,14 +2896,14 @@
       </p:grpSpPr>
       <p:pic>
         <p:nvPicPr>
-          <p:cNvPr id="2" name="Image 0" descr="preencoded.png"/>
+          <p:cNvPr id="2" name="Image 0" descr="preencoded.png">    </p:cNvPr>
           <p:cNvPicPr>
             <a:picLocks noChangeAspect="1"/>
           </p:cNvPicPr>
           <p:nvPr/>
         </p:nvPicPr>
         <p:blipFill>
-          <a:blip r:embed="rId2"/>
+          <a:blip r:embed="rId1"/>
           <a:stretch>
             <a:fillRect/>
           </a:stretch>
@@ -2613,11 +2929,6 @@
 <file path=ppt/slideMasters/slideMaster1.xml><?xml version="1.0" encoding="utf-8"?>
 <p:sldMaster xmlns:a="http://schemas.openxmlformats.org/drawingml/2006/main" xmlns:r="http://schemas.openxmlformats.org/officeDocument/2006/relationships" xmlns:p="http://schemas.openxmlformats.org/presentationml/2006/main">
   <p:cSld>
-    <p:bg>
-      <p:bgRef idx="1001">
-        <a:schemeClr val="bg1"/>
-      </p:bgRef>
-    </p:bg>
     <p:spTree>
       <p:nvGrpSpPr>
         <p:cNvPr id="1" name=""/>
@@ -2652,7 +2963,7 @@
           </a:prstGeom>
           <a:extLst>
             <a:ext uri="{C572A759-6A51-4108-AA02-DFA0A04FC94B}">
-              <ma14:wrappingTextBoxFlag xmlns:ma14="http://schemas.microsoft.com/office/mac/drawingml/2011/main" xmlns="" val="0"/>
+              <ma14:wrappingTextBoxFlag xmlns:ma14="http://schemas.microsoft.com/office/mac/drawingml/2011/main" val="0"/>
             </a:ext>
           </a:extLst>
         </p:spPr>
@@ -2673,8 +2984,8 @@
           <a:p>
             <a:pPr algn="l"/>
             <a:fld id="{F7021451-1387-4CA6-816F-3879F97B5CBC}" type="slidenum">
-              <a:rPr lang="en-US" b="0"/>
-              <a:t>‹#›</a:t>
+              <a:rPr b="0" lang="en-US"/>
+              <a:t>null</a:t>
             </a:fld>
             <a:endParaRPr lang="en-US"/>
           </a:p>
@@ -2981,11 +3292,11 @@
           <a:bodyPr wrap="square" lIns="0" tIns="0" rIns="0" bIns="0" rtlCol="0" anchor="ctr"/>
           <a:lstStyle/>
           <a:p>
-            <a:pPr marL="0" indent="0">
-              <a:buNone/>
-            </a:pPr>
-            <a:r>
-              <a:rPr lang="en-US" sz="1200" b="1" kern="0" spc="400" dirty="0">
+            <a:pPr indent="0" marL="0">
+              <a:buNone/>
+            </a:pPr>
+            <a:r>
+              <a:rPr lang="en-US" sz="1200" b="1" spc="400" kern="0" dirty="0">
                 <a:solidFill>
                   <a:srgbClr val="FFFFFF"/>
                 </a:solidFill>
@@ -3020,11 +3331,11 @@
           <a:bodyPr wrap="square" lIns="0" tIns="0" rIns="0" bIns="0" rtlCol="0" anchor="ctr"/>
           <a:lstStyle/>
           <a:p>
-            <a:pPr marL="0" indent="0">
-              <a:buNone/>
-            </a:pPr>
-            <a:r>
-              <a:rPr lang="en-US" sz="1200" b="1" kern="0" spc="300" dirty="0">
+            <a:pPr indent="0" marL="0">
+              <a:buNone/>
+            </a:pPr>
+            <a:r>
+              <a:rPr lang="en-US" sz="1200" b="1" spc="300" kern="0" dirty="0">
                 <a:solidFill>
                   <a:srgbClr val="C4B3F5"/>
                 </a:solidFill>
@@ -3059,7 +3370,7 @@
           <a:bodyPr wrap="square" lIns="0" tIns="0" rIns="0" bIns="0" rtlCol="0" anchor="t"/>
           <a:lstStyle/>
           <a:p>
-            <a:pPr marL="0" indent="0">
+            <a:pPr indent="0" marL="0">
               <a:lnSpc>
                 <a:spcPct val="102000"/>
               </a:lnSpc>
@@ -3079,7 +3390,7 @@
             <a:endParaRPr lang="en-US" sz="3600" dirty="0"/>
           </a:p>
           <a:p>
-            <a:pPr marL="0" indent="0">
+            <a:pPr indent="0" marL="0">
               <a:lnSpc>
                 <a:spcPct val="102000"/>
               </a:lnSpc>
@@ -3121,7 +3432,7 @@
           <a:bodyPr wrap="square" lIns="0" tIns="0" rIns="0" bIns="0" rtlCol="0" anchor="ctr"/>
           <a:lstStyle/>
           <a:p>
-            <a:pPr marL="0" indent="0">
+            <a:pPr indent="0" marL="0">
               <a:lnSpc>
                 <a:spcPct val="120000"/>
               </a:lnSpc>
@@ -3189,7 +3500,7 @@
           <a:bodyPr wrap="square" lIns="0" tIns="0" rIns="0" bIns="0" rtlCol="0" anchor="ctr"/>
           <a:lstStyle/>
           <a:p>
-            <a:pPr marL="0" indent="0" algn="ctr">
+            <a:pPr algn="ctr" indent="0" marL="0">
               <a:buNone/>
             </a:pPr>
             <a:r>
@@ -3254,7 +3565,7 @@
           <a:bodyPr wrap="square" lIns="0" tIns="0" rIns="0" bIns="0" rtlCol="0" anchor="ctr"/>
           <a:lstStyle/>
           <a:p>
-            <a:pPr marL="0" indent="0" algn="ctr">
+            <a:pPr algn="ctr" indent="0" marL="0">
               <a:buNone/>
             </a:pPr>
             <a:r>
@@ -3319,7 +3630,7 @@
           <a:bodyPr wrap="square" lIns="0" tIns="0" rIns="0" bIns="0" rtlCol="0" anchor="ctr"/>
           <a:lstStyle/>
           <a:p>
-            <a:pPr marL="0" indent="0" algn="ctr">
+            <a:pPr algn="ctr" indent="0" marL="0">
               <a:buNone/>
             </a:pPr>
             <a:r>
@@ -3384,7 +3695,7 @@
           <a:bodyPr wrap="square" lIns="0" tIns="0" rIns="0" bIns="0" rtlCol="0" anchor="ctr"/>
           <a:lstStyle/>
           <a:p>
-            <a:pPr marL="0" indent="0" algn="ctr">
+            <a:pPr algn="ctr" indent="0" marL="0">
               <a:buNone/>
             </a:pPr>
             <a:r>
@@ -3449,7 +3760,7 @@
           <a:bodyPr wrap="square" lIns="0" tIns="0" rIns="0" bIns="0" rtlCol="0" anchor="ctr"/>
           <a:lstStyle/>
           <a:p>
-            <a:pPr marL="0" indent="0" algn="ctr">
+            <a:pPr algn="ctr" indent="0" marL="0">
               <a:buNone/>
             </a:pPr>
             <a:r>
@@ -3510,7 +3821,7 @@
           <a:bodyPr wrap="square" lIns="0" tIns="0" rIns="0" bIns="0" rtlCol="0" anchor="ctr"/>
           <a:lstStyle/>
           <a:p>
-            <a:pPr marL="0" indent="0" algn="ctr">
+            <a:pPr algn="ctr" indent="0" marL="0">
               <a:buNone/>
             </a:pPr>
             <a:r>
@@ -3596,7 +3907,7 @@
           <a:bodyPr wrap="square" lIns="0" tIns="0" rIns="0" bIns="0" rtlCol="0" anchor="ctr"/>
           <a:lstStyle/>
           <a:p>
-            <a:pPr marL="0" indent="0" algn="l">
+            <a:pPr algn="l" indent="0" marL="0">
               <a:buNone/>
             </a:pPr>
             <a:r>
@@ -3635,7 +3946,7 @@
           <a:bodyPr wrap="square" lIns="0" tIns="0" rIns="0" bIns="0" rtlCol="0" anchor="ctr"/>
           <a:lstStyle/>
           <a:p>
-            <a:pPr marL="0" indent="0">
+            <a:pPr indent="0" marL="0">
               <a:buNone/>
             </a:pPr>
             <a:r>
@@ -3701,11 +4012,11 @@
           <a:bodyPr wrap="square" lIns="0" tIns="0" rIns="0" bIns="0" rtlCol="0" anchor="ctr"/>
           <a:lstStyle/>
           <a:p>
-            <a:pPr marL="0" indent="0" algn="ctr">
-              <a:buNone/>
-            </a:pPr>
-            <a:r>
-              <a:rPr lang="en-US" sz="900" b="1" kern="0" spc="100" dirty="0">
+            <a:pPr algn="ctr" indent="0" marL="0">
+              <a:buNone/>
+            </a:pPr>
+            <a:r>
+              <a:rPr lang="en-US" sz="900" b="1" spc="100" kern="0" dirty="0">
                 <a:solidFill>
                   <a:srgbClr val="5A05F4"/>
                 </a:solidFill>
@@ -3721,14 +4032,14 @@
       </p:sp>
       <p:pic>
         <p:nvPicPr>
-          <p:cNvPr id="7" name="Image 0" descr="preencoded.png"/>
+          <p:cNvPr id="7" name="Image 0" descr="preencoded.png">    </p:cNvPr>
           <p:cNvPicPr>
             <a:picLocks noChangeAspect="1"/>
           </p:cNvPicPr>
           <p:nvPr/>
         </p:nvPicPr>
         <p:blipFill>
-          <a:blip r:embed="rId3"/>
+          <a:blip r:embed="rId1"/>
           <a:stretch>
             <a:fillRect/>
           </a:stretch>
@@ -3759,27 +4070,15 @@
         </p:nvGraphicFramePr>
         <p:xfrm>
           <a:off x="566928" y="1737360"/>
-          <a:ext cx="11064240" cy="3328416"/>
+          <a:ext cx="11064240" cy="914400"/>
         </p:xfrm>
         <a:graphic>
           <a:graphicData uri="http://schemas.openxmlformats.org/drawingml/2006/table">
             <a:tbl>
               <a:tblPr/>
               <a:tblGrid>
-                <a:gridCol w="4572000">
-                  <a:extLst>
-                    <a:ext uri="{9D8B030D-6E8A-4147-A177-3AD203B41FA5}">
-                      <a16:colId xmlns:a16="http://schemas.microsoft.com/office/drawing/2014/main" val="20000"/>
-                    </a:ext>
-                  </a:extLst>
-                </a:gridCol>
-                <a:gridCol w="6492240">
-                  <a:extLst>
-                    <a:ext uri="{9D8B030D-6E8A-4147-A177-3AD203B41FA5}">
-                      <a16:colId xmlns:a16="http://schemas.microsoft.com/office/drawing/2014/main" val="20001"/>
-                    </a:ext>
-                  </a:extLst>
-                </a:gridCol>
+                <a:gridCol w="4572000"/>
+                <a:gridCol w="6492240"/>
               </a:tblGrid>
               <a:tr h="475488">
                 <a:tc>
@@ -3787,11 +4086,11 @@
                     <a:bodyPr/>
                     <a:lstStyle/>
                     <a:p>
-                      <a:pPr marL="0" indent="0" algn="ctr">
+                      <a:pPr algn="ctr" indent="0" marL="0">
                         <a:buNone/>
                       </a:pPr>
                       <a:r>
-                        <a:rPr lang="en-US" sz="900" b="1" kern="0" spc="100" dirty="0">
+                        <a:rPr lang="en-US" sz="900" b="1" spc="100" kern="0" dirty="0">
                           <a:solidFill>
                             <a:srgbClr val="FFFFFF"/>
                           </a:solidFill>
@@ -3855,11 +4154,11 @@
                     <a:bodyPr/>
                     <a:lstStyle/>
                     <a:p>
-                      <a:pPr marL="0" indent="0" algn="ctr">
+                      <a:pPr algn="ctr" indent="0" marL="0">
                         <a:buNone/>
                       </a:pPr>
                       <a:r>
-                        <a:rPr lang="en-US" sz="900" b="1" kern="0" spc="100" dirty="0">
+                        <a:rPr lang="en-US" sz="900" b="1" spc="100" kern="0" dirty="0">
                           <a:solidFill>
                             <a:srgbClr val="FFFFFF"/>
                           </a:solidFill>
@@ -3918,11 +4217,6 @@
                     </a:solidFill>
                   </a:tcPr>
                 </a:tc>
-                <a:extLst>
-                  <a:ext uri="{0D108BD9-81ED-4DB2-BD59-A6C34878D82A}">
-                    <a16:rowId xmlns:a16="http://schemas.microsoft.com/office/drawing/2014/main" val="10000"/>
-                  </a:ext>
-                </a:extLst>
               </a:tr>
               <a:tr h="475488">
                 <a:tc>
@@ -3930,7 +4224,7 @@
                     <a:bodyPr/>
                     <a:lstStyle/>
                     <a:p>
-                      <a:pPr marL="0" indent="0">
+                      <a:pPr indent="0" marL="0">
                         <a:buNone/>
                       </a:pPr>
                       <a:r>
@@ -3998,7 +4292,7 @@
                     <a:bodyPr/>
                     <a:lstStyle/>
                     <a:p>
-                      <a:pPr marL="0" indent="0">
+                      <a:pPr indent="0" marL="0">
                         <a:buNone/>
                       </a:pPr>
                       <a:r>
@@ -4061,11 +4355,6 @@
                     </a:solidFill>
                   </a:tcPr>
                 </a:tc>
-                <a:extLst>
-                  <a:ext uri="{0D108BD9-81ED-4DB2-BD59-A6C34878D82A}">
-                    <a16:rowId xmlns:a16="http://schemas.microsoft.com/office/drawing/2014/main" val="10001"/>
-                  </a:ext>
-                </a:extLst>
               </a:tr>
               <a:tr h="475488">
                 <a:tc>
@@ -4073,7 +4362,7 @@
                     <a:bodyPr/>
                     <a:lstStyle/>
                     <a:p>
-                      <a:pPr marL="0" indent="0">
+                      <a:pPr indent="0" marL="0">
                         <a:buNone/>
                       </a:pPr>
                       <a:r>
@@ -4141,7 +4430,7 @@
                     <a:bodyPr/>
                     <a:lstStyle/>
                     <a:p>
-                      <a:pPr marL="0" indent="0">
+                      <a:pPr indent="0" marL="0">
                         <a:buNone/>
                       </a:pPr>
                       <a:r>
@@ -4204,11 +4493,6 @@
                     </a:solidFill>
                   </a:tcPr>
                 </a:tc>
-                <a:extLst>
-                  <a:ext uri="{0D108BD9-81ED-4DB2-BD59-A6C34878D82A}">
-                    <a16:rowId xmlns:a16="http://schemas.microsoft.com/office/drawing/2014/main" val="10002"/>
-                  </a:ext>
-                </a:extLst>
               </a:tr>
               <a:tr h="475488">
                 <a:tc>
@@ -4216,7 +4500,7 @@
                     <a:bodyPr/>
                     <a:lstStyle/>
                     <a:p>
-                      <a:pPr marL="0" indent="0">
+                      <a:pPr indent="0" marL="0">
                         <a:buNone/>
                       </a:pPr>
                       <a:r>
@@ -4284,7 +4568,7 @@
                     <a:bodyPr/>
                     <a:lstStyle/>
                     <a:p>
-                      <a:pPr marL="0" indent="0">
+                      <a:pPr indent="0" marL="0">
                         <a:buNone/>
                       </a:pPr>
                       <a:r>
@@ -4347,11 +4631,6 @@
                     </a:solidFill>
                   </a:tcPr>
                 </a:tc>
-                <a:extLst>
-                  <a:ext uri="{0D108BD9-81ED-4DB2-BD59-A6C34878D82A}">
-                    <a16:rowId xmlns:a16="http://schemas.microsoft.com/office/drawing/2014/main" val="10003"/>
-                  </a:ext>
-                </a:extLst>
               </a:tr>
               <a:tr h="475488">
                 <a:tc>
@@ -4359,7 +4638,7 @@
                     <a:bodyPr/>
                     <a:lstStyle/>
                     <a:p>
-                      <a:pPr marL="0" indent="0">
+                      <a:pPr indent="0" marL="0">
                         <a:buNone/>
                       </a:pPr>
                       <a:r>
@@ -4427,7 +4706,7 @@
                     <a:bodyPr/>
                     <a:lstStyle/>
                     <a:p>
-                      <a:pPr marL="0" indent="0">
+                      <a:pPr indent="0" marL="0">
                         <a:buNone/>
                       </a:pPr>
                       <a:r>
@@ -4490,11 +4769,6 @@
                     </a:solidFill>
                   </a:tcPr>
                 </a:tc>
-                <a:extLst>
-                  <a:ext uri="{0D108BD9-81ED-4DB2-BD59-A6C34878D82A}">
-                    <a16:rowId xmlns:a16="http://schemas.microsoft.com/office/drawing/2014/main" val="10004"/>
-                  </a:ext>
-                </a:extLst>
               </a:tr>
               <a:tr h="475488">
                 <a:tc>
@@ -4502,7 +4776,7 @@
                     <a:bodyPr/>
                     <a:lstStyle/>
                     <a:p>
-                      <a:pPr marL="0" indent="0">
+                      <a:pPr indent="0" marL="0">
                         <a:buNone/>
                       </a:pPr>
                       <a:r>
@@ -4570,7 +4844,7 @@
                     <a:bodyPr/>
                     <a:lstStyle/>
                     <a:p>
-                      <a:pPr marL="0" indent="0">
+                      <a:pPr indent="0" marL="0">
                         <a:buNone/>
                       </a:pPr>
                       <a:r>
@@ -4633,11 +4907,6 @@
                     </a:solidFill>
                   </a:tcPr>
                 </a:tc>
-                <a:extLst>
-                  <a:ext uri="{0D108BD9-81ED-4DB2-BD59-A6C34878D82A}">
-                    <a16:rowId xmlns:a16="http://schemas.microsoft.com/office/drawing/2014/main" val="10005"/>
-                  </a:ext>
-                </a:extLst>
               </a:tr>
               <a:tr h="475488">
                 <a:tc>
@@ -4645,7 +4914,7 @@
                     <a:bodyPr/>
                     <a:lstStyle/>
                     <a:p>
-                      <a:pPr marL="0" indent="0">
+                      <a:pPr indent="0" marL="0">
                         <a:buNone/>
                       </a:pPr>
                       <a:r>
@@ -4713,7 +4982,7 @@
                     <a:bodyPr/>
                     <a:lstStyle/>
                     <a:p>
-                      <a:pPr marL="0" indent="0">
+                      <a:pPr indent="0" marL="0">
                         <a:buNone/>
                       </a:pPr>
                       <a:r>
@@ -4776,11 +5045,6 @@
                     </a:solidFill>
                   </a:tcPr>
                 </a:tc>
-                <a:extLst>
-                  <a:ext uri="{0D108BD9-81ED-4DB2-BD59-A6C34878D82A}">
-                    <a16:rowId xmlns:a16="http://schemas.microsoft.com/office/drawing/2014/main" val="10006"/>
-                  </a:ext>
-                </a:extLst>
               </a:tr>
             </a:tbl>
           </a:graphicData>
@@ -4815,14 +5079,34 @@
       </p:sp>
       <p:sp>
         <p:nvSpPr>
-          <p:cNvPr id="10" name="Text 6"/>
-          <p:cNvSpPr/>
-          <p:nvPr/>
-        </p:nvSpPr>
-        <p:spPr>
-          <a:xfrm>
-            <a:off x="786384" y="5385816"/>
-            <a:ext cx="10625328" cy="219456"/>
+          <p:cNvPr id="10" name="Shape 6"/>
+          <p:cNvSpPr/>
+          <p:nvPr/>
+        </p:nvSpPr>
+        <p:spPr>
+          <a:xfrm>
+            <a:off x="749808" y="5445252"/>
+            <a:ext cx="310896" cy="310896"/>
+          </a:xfrm>
+          <a:prstGeom prst="ellipse">
+            <a:avLst/>
+          </a:prstGeom>
+          <a:solidFill>
+            <a:srgbClr val="1A4FBF"/>
+          </a:solidFill>
+          <a:ln/>
+        </p:spPr>
+      </p:sp>
+      <p:sp>
+        <p:nvSpPr>
+          <p:cNvPr id="11" name="Text 7"/>
+          <p:cNvSpPr/>
+          <p:nvPr/>
+        </p:nvSpPr>
+        <p:spPr>
+          <a:xfrm>
+            <a:off x="749808" y="5445252"/>
+            <a:ext cx="310896" cy="310896"/>
           </a:xfrm>
           <a:prstGeom prst="rect">
             <a:avLst/>
@@ -4834,11 +5118,50 @@
           <a:bodyPr wrap="square" lIns="0" tIns="0" rIns="0" bIns="0" rtlCol="0" anchor="ctr"/>
           <a:lstStyle/>
           <a:p>
-            <a:pPr marL="0" indent="0">
-              <a:buNone/>
-            </a:pPr>
-            <a:r>
-              <a:rPr lang="en-US" sz="950" b="1" kern="0" spc="150" dirty="0">
+            <a:pPr algn="ctr" indent="0" marL="0">
+              <a:buNone/>
+            </a:pPr>
+            <a:r>
+              <a:rPr lang="en-US" sz="1200" b="1" dirty="0">
+                <a:solidFill>
+                  <a:srgbClr val="FFFFFF"/>
+                </a:solidFill>
+                <a:latin typeface="Arial" pitchFamily="34" charset="0"/>
+                <a:ea typeface="Arial" pitchFamily="34" charset="-122"/>
+                <a:cs typeface="Arial" pitchFamily="34" charset="-120"/>
+              </a:rPr>
+              <a:t>★</a:t>
+            </a:r>
+            <a:endParaRPr lang="en-US" sz="1200" dirty="0"/>
+          </a:p>
+        </p:txBody>
+      </p:sp>
+      <p:sp>
+        <p:nvSpPr>
+          <p:cNvPr id="12" name="Text 8"/>
+          <p:cNvSpPr/>
+          <p:nvPr/>
+        </p:nvSpPr>
+        <p:spPr>
+          <a:xfrm>
+            <a:off x="1243584" y="5385816"/>
+            <a:ext cx="10168128" cy="219456"/>
+          </a:xfrm>
+          <a:prstGeom prst="rect">
+            <a:avLst/>
+          </a:prstGeom>
+          <a:noFill/>
+          <a:ln/>
+        </p:spPr>
+        <p:txBody>
+          <a:bodyPr wrap="square" lIns="0" tIns="0" rIns="0" bIns="0" rtlCol="0" anchor="ctr"/>
+          <a:lstStyle/>
+          <a:p>
+            <a:pPr indent="0" marL="0">
+              <a:buNone/>
+            </a:pPr>
+            <a:r>
+              <a:rPr lang="en-US" sz="950" b="1" spc="150" kern="0" dirty="0">
                 <a:solidFill>
                   <a:srgbClr val="1A4FBF"/>
                 </a:solidFill>
@@ -4846,7 +5169,7 @@
                 <a:ea typeface="Courier New" pitchFamily="34" charset="-122"/>
                 <a:cs typeface="Courier New" pitchFamily="34" charset="-120"/>
               </a:rPr>
-              <a:t>ЛАЙФХАК</a:t>
+              <a:t>ПОРАДА</a:t>
             </a:r>
             <a:endParaRPr lang="en-US" sz="950" dirty="0"/>
           </a:p>
@@ -4854,14 +5177,14 @@
       </p:sp>
       <p:sp>
         <p:nvSpPr>
-          <p:cNvPr id="8" name="Text 7"/>
-          <p:cNvSpPr/>
-          <p:nvPr/>
-        </p:nvSpPr>
-        <p:spPr>
-          <a:xfrm>
-            <a:off x="786384" y="5641848"/>
-            <a:ext cx="10625328" cy="173736"/>
+          <p:cNvPr id="13" name="Text 9"/>
+          <p:cNvSpPr/>
+          <p:nvPr/>
+        </p:nvSpPr>
+        <p:spPr>
+          <a:xfrm>
+            <a:off x="1243584" y="5641848"/>
+            <a:ext cx="10168128" cy="173736"/>
           </a:xfrm>
           <a:prstGeom prst="rect">
             <a:avLst/>
@@ -4873,7 +5196,7 @@
           <a:bodyPr wrap="square" lIns="0" tIns="0" rIns="0" bIns="0" rtlCol="0" anchor="ctr"/>
           <a:lstStyle/>
           <a:p>
-            <a:pPr marL="0" indent="0">
+            <a:pPr indent="0" marL="0">
               <a:lnSpc>
                 <a:spcPct val="112000"/>
               </a:lnSpc>
@@ -4914,7 +5237,7 @@
           </a:prstGeom>
           <a:extLst>
             <a:ext uri="{C572A759-6A51-4108-AA02-DFA0A04FC94B}">
-              <ma14:wrappingTextBoxFlag xmlns:ma14="http://schemas.microsoft.com/office/mac/drawingml/2011/main" xmlns="" val="0"/>
+              <ma14:wrappingTextBoxFlag xmlns:ma14="http://schemas.microsoft.com/office/mac/drawingml/2011/main" val="0"/>
             </a:ext>
           </a:extLst>
         </p:spPr>
@@ -4935,7 +5258,7 @@
           <a:p>
             <a:pPr algn="l"/>
             <a:fld id="{F7021451-1387-4CA6-816F-3879F97B5CBC}" type="slidenum">
-              <a:rPr lang="en-US" b="0"/>
+              <a:rPr b="0" lang="en-US"/>
               <a:t>10</a:t>
             </a:fld>
             <a:endParaRPr lang="en-US"/>
@@ -5010,7 +5333,7 @@
           <a:bodyPr wrap="square" lIns="0" tIns="0" rIns="0" bIns="0" rtlCol="0" anchor="ctr"/>
           <a:lstStyle/>
           <a:p>
-            <a:pPr marL="0" indent="0" algn="l">
+            <a:pPr algn="l" indent="0" marL="0">
               <a:buNone/>
             </a:pPr>
             <a:r>
@@ -5049,7 +5372,7 @@
           <a:bodyPr wrap="square" lIns="0" tIns="0" rIns="0" bIns="0" rtlCol="0" anchor="ctr"/>
           <a:lstStyle/>
           <a:p>
-            <a:pPr marL="0" indent="0">
+            <a:pPr indent="0" marL="0">
               <a:buNone/>
             </a:pPr>
             <a:r>
@@ -5115,11 +5438,11 @@
           <a:bodyPr wrap="square" lIns="0" tIns="0" rIns="0" bIns="0" rtlCol="0" anchor="ctr"/>
           <a:lstStyle/>
           <a:p>
-            <a:pPr marL="0" indent="0" algn="ctr">
-              <a:buNone/>
-            </a:pPr>
-            <a:r>
-              <a:rPr lang="en-US" sz="900" b="1" kern="0" spc="100" dirty="0">
+            <a:pPr algn="ctr" indent="0" marL="0">
+              <a:buNone/>
+            </a:pPr>
+            <a:r>
+              <a:rPr lang="en-US" sz="900" b="1" spc="100" kern="0" dirty="0">
                 <a:solidFill>
                   <a:srgbClr val="5A05F4"/>
                 </a:solidFill>
@@ -5135,14 +5458,14 @@
       </p:sp>
       <p:pic>
         <p:nvPicPr>
-          <p:cNvPr id="7" name="Image 0" descr="preencoded.png"/>
+          <p:cNvPr id="7" name="Image 0" descr="preencoded.png">    </p:cNvPr>
           <p:cNvPicPr>
             <a:picLocks noChangeAspect="1"/>
           </p:cNvPicPr>
           <p:nvPr/>
         </p:nvPicPr>
         <p:blipFill>
-          <a:blip r:embed="rId3"/>
+          <a:blip r:embed="rId1"/>
           <a:stretch>
             <a:fillRect/>
           </a:stretch>
@@ -5200,7 +5523,7 @@
           <a:bodyPr wrap="square" lIns="0" tIns="0" rIns="0" bIns="0" rtlCol="0" anchor="ctr"/>
           <a:lstStyle/>
           <a:p>
-            <a:pPr marL="0" indent="0">
+            <a:pPr indent="0" marL="0">
               <a:buNone/>
             </a:pPr>
             <a:r>
@@ -5239,7 +5562,7 @@
           <a:bodyPr wrap="square" lIns="0" tIns="0" rIns="0" bIns="0" rtlCol="0" anchor="ctr"/>
           <a:lstStyle/>
           <a:p>
-            <a:pPr marL="0" indent="0">
+            <a:pPr indent="0" marL="0">
               <a:buNone/>
             </a:pPr>
             <a:r>
@@ -5300,7 +5623,7 @@
           <a:bodyPr wrap="square" lIns="0" tIns="0" rIns="0" bIns="0" rtlCol="0" anchor="ctr"/>
           <a:lstStyle/>
           <a:p>
-            <a:pPr marL="0" indent="0">
+            <a:pPr indent="0" marL="0">
               <a:buNone/>
             </a:pPr>
             <a:r>
@@ -5339,7 +5662,7 @@
           <a:bodyPr wrap="square" lIns="0" tIns="0" rIns="0" bIns="0" rtlCol="0" anchor="ctr"/>
           <a:lstStyle/>
           <a:p>
-            <a:pPr marL="0" indent="0">
+            <a:pPr indent="0" marL="0">
               <a:buNone/>
             </a:pPr>
             <a:r>
@@ -5400,7 +5723,7 @@
           <a:bodyPr wrap="square" lIns="0" tIns="0" rIns="0" bIns="0" rtlCol="0" anchor="ctr"/>
           <a:lstStyle/>
           <a:p>
-            <a:pPr marL="0" indent="0">
+            <a:pPr indent="0" marL="0">
               <a:buNone/>
             </a:pPr>
             <a:r>
@@ -5439,7 +5762,7 @@
           <a:bodyPr wrap="square" lIns="0" tIns="0" rIns="0" bIns="0" rtlCol="0" anchor="ctr"/>
           <a:lstStyle/>
           <a:p>
-            <a:pPr marL="0" indent="0">
+            <a:pPr indent="0" marL="0">
               <a:buNone/>
             </a:pPr>
             <a:r>
@@ -5500,7 +5823,7 @@
           <a:bodyPr wrap="square" lIns="0" tIns="0" rIns="0" bIns="0" rtlCol="0" anchor="ctr"/>
           <a:lstStyle/>
           <a:p>
-            <a:pPr marL="0" indent="0">
+            <a:pPr indent="0" marL="0">
               <a:buNone/>
             </a:pPr>
             <a:r>
@@ -5539,7 +5862,7 @@
           <a:bodyPr wrap="square" lIns="0" tIns="0" rIns="0" bIns="0" rtlCol="0" anchor="ctr"/>
           <a:lstStyle/>
           <a:p>
-            <a:pPr marL="0" indent="0">
+            <a:pPr indent="0" marL="0">
               <a:buNone/>
             </a:pPr>
             <a:r>
@@ -5600,7 +5923,7 @@
           <a:bodyPr wrap="square" lIns="0" tIns="0" rIns="0" bIns="0" rtlCol="0" anchor="ctr"/>
           <a:lstStyle/>
           <a:p>
-            <a:pPr marL="0" indent="0" algn="ctr">
+            <a:pPr algn="ctr" indent="0" marL="0">
               <a:buNone/>
             </a:pPr>
             <a:r>
@@ -5704,7 +6027,7 @@
           <a:bodyPr wrap="square" lIns="0" tIns="0" rIns="0" bIns="0" rtlCol="0" anchor="ctr"/>
           <a:lstStyle/>
           <a:p>
-            <a:pPr marL="0" indent="0" algn="ctr">
+            <a:pPr algn="ctr" indent="0" marL="0">
               <a:buNone/>
             </a:pPr>
             <a:r>
@@ -5808,7 +6131,7 @@
           <a:bodyPr wrap="square" lIns="0" tIns="0" rIns="0" bIns="0" rtlCol="0" anchor="ctr"/>
           <a:lstStyle/>
           <a:p>
-            <a:pPr marL="0" indent="0" algn="ctr">
+            <a:pPr algn="ctr" indent="0" marL="0">
               <a:buNone/>
             </a:pPr>
             <a:r>
@@ -5912,7 +6235,7 @@
           <a:bodyPr wrap="square" lIns="0" tIns="0" rIns="0" bIns="0" rtlCol="0" anchor="ctr"/>
           <a:lstStyle/>
           <a:p>
-            <a:pPr marL="0" indent="0" algn="ctr">
+            <a:pPr algn="ctr" indent="0" marL="0">
               <a:buNone/>
             </a:pPr>
             <a:r>
@@ -5978,11 +6301,11 @@
           <a:bodyPr wrap="square" lIns="0" tIns="0" rIns="0" bIns="0" rtlCol="0" anchor="ctr"/>
           <a:lstStyle/>
           <a:p>
-            <a:pPr marL="0" indent="0">
-              <a:buNone/>
-            </a:pPr>
-            <a:r>
-              <a:rPr lang="en-US" sz="950" b="1" kern="0" spc="150" dirty="0">
+            <a:pPr indent="0" marL="0">
+              <a:buNone/>
+            </a:pPr>
+            <a:r>
+              <a:rPr lang="en-US" sz="950" b="1" spc="150" kern="0" dirty="0">
                 <a:solidFill>
                   <a:srgbClr val="106B41"/>
                 </a:solidFill>
@@ -6017,7 +6340,7 @@
           <a:bodyPr wrap="square" lIns="0" tIns="0" rIns="0" bIns="0" rtlCol="0" anchor="ctr"/>
           <a:lstStyle/>
           <a:p>
-            <a:pPr marL="0" indent="0">
+            <a:pPr indent="0" marL="0">
               <a:lnSpc>
                 <a:spcPct val="112000"/>
               </a:lnSpc>
@@ -6040,7 +6363,7 @@
       </p:sp>
       <p:sp>
         <p:nvSpPr>
-          <p:cNvPr id="37" name="Slide Number Placeholder 0"/>
+          <p:cNvPr id="25" name="Slide Number Placeholder 0"/>
           <p:cNvSpPr>
             <a:spLocks noGrp="1"/>
           </p:cNvSpPr>
@@ -6058,7 +6381,7 @@
           </a:prstGeom>
           <a:extLst>
             <a:ext uri="{C572A759-6A51-4108-AA02-DFA0A04FC94B}">
-              <ma14:wrappingTextBoxFlag xmlns:ma14="http://schemas.microsoft.com/office/mac/drawingml/2011/main" xmlns="" val="0"/>
+              <ma14:wrappingTextBoxFlag xmlns:ma14="http://schemas.microsoft.com/office/mac/drawingml/2011/main" val="0"/>
             </a:ext>
           </a:extLst>
         </p:spPr>
@@ -6079,7 +6402,7 @@
           <a:p>
             <a:pPr algn="l"/>
             <a:fld id="{F7021451-1387-4CA6-816F-3879F97B5CBC}" type="slidenum">
-              <a:rPr lang="en-US" b="0"/>
+              <a:rPr b="0" lang="en-US"/>
               <a:t>11</a:t>
             </a:fld>
             <a:endParaRPr lang="en-US"/>
@@ -6154,7 +6477,7 @@
           <a:bodyPr wrap="square" lIns="0" tIns="0" rIns="0" bIns="0" rtlCol="0" anchor="ctr"/>
           <a:lstStyle/>
           <a:p>
-            <a:pPr marL="0" indent="0" algn="l">
+            <a:pPr algn="l" indent="0" marL="0">
               <a:buNone/>
             </a:pPr>
             <a:r>
@@ -6193,7 +6516,7 @@
           <a:bodyPr wrap="square" lIns="0" tIns="0" rIns="0" bIns="0" rtlCol="0" anchor="ctr"/>
           <a:lstStyle/>
           <a:p>
-            <a:pPr marL="0" indent="0">
+            <a:pPr indent="0" marL="0">
               <a:buNone/>
             </a:pPr>
             <a:r>
@@ -6259,11 +6582,11 @@
           <a:bodyPr wrap="square" lIns="0" tIns="0" rIns="0" bIns="0" rtlCol="0" anchor="ctr"/>
           <a:lstStyle/>
           <a:p>
-            <a:pPr marL="0" indent="0" algn="ctr">
-              <a:buNone/>
-            </a:pPr>
-            <a:r>
-              <a:rPr lang="en-US" sz="900" b="1" kern="0" spc="100" dirty="0">
+            <a:pPr algn="ctr" indent="0" marL="0">
+              <a:buNone/>
+            </a:pPr>
+            <a:r>
+              <a:rPr lang="en-US" sz="900" b="1" spc="100" kern="0" dirty="0">
                 <a:solidFill>
                   <a:srgbClr val="5A05F4"/>
                 </a:solidFill>
@@ -6325,11 +6648,11 @@
           <a:bodyPr wrap="square" lIns="0" tIns="0" rIns="0" bIns="0" rtlCol="0" anchor="ctr"/>
           <a:lstStyle/>
           <a:p>
-            <a:pPr marL="0" indent="0" algn="ctr">
-              <a:buNone/>
-            </a:pPr>
-            <a:r>
-              <a:rPr lang="en-US" sz="900" b="1" kern="0" spc="100" dirty="0">
+            <a:pPr algn="ctr" indent="0" marL="0">
+              <a:buNone/>
+            </a:pPr>
+            <a:r>
+              <a:rPr lang="en-US" sz="900" b="1" spc="100" kern="0" dirty="0">
                 <a:solidFill>
                   <a:srgbClr val="434343"/>
                 </a:solidFill>
@@ -6345,14 +6668,14 @@
       </p:sp>
       <p:pic>
         <p:nvPicPr>
-          <p:cNvPr id="9" name="Image 0" descr="preencoded.png"/>
+          <p:cNvPr id="9" name="Image 0" descr="preencoded.png">    </p:cNvPr>
           <p:cNvPicPr>
             <a:picLocks noChangeAspect="1"/>
           </p:cNvPicPr>
           <p:nvPr/>
         </p:nvPicPr>
         <p:blipFill>
-          <a:blip r:embed="rId3"/>
+          <a:blip r:embed="rId1"/>
           <a:stretch>
             <a:fillRect/>
           </a:stretch>
@@ -6410,7 +6733,7 @@
           <a:bodyPr wrap="square" lIns="0" tIns="0" rIns="0" bIns="0" rtlCol="0" anchor="ctr"/>
           <a:lstStyle/>
           <a:p>
-            <a:pPr marL="0" indent="0" algn="ctr">
+            <a:pPr algn="ctr" indent="0" marL="0">
               <a:buNone/>
             </a:pPr>
             <a:r>
@@ -6514,7 +6837,7 @@
           <a:bodyPr wrap="square" lIns="0" tIns="0" rIns="0" bIns="0" rtlCol="0" anchor="ctr"/>
           <a:lstStyle/>
           <a:p>
-            <a:pPr marL="0" indent="0" algn="ctr">
+            <a:pPr algn="ctr" indent="0" marL="0">
               <a:buNone/>
             </a:pPr>
             <a:r>
@@ -6618,7 +6941,7 @@
           <a:bodyPr wrap="square" lIns="0" tIns="0" rIns="0" bIns="0" rtlCol="0" anchor="ctr"/>
           <a:lstStyle/>
           <a:p>
-            <a:pPr marL="0" indent="0" algn="ctr">
+            <a:pPr algn="ctr" indent="0" marL="0">
               <a:buNone/>
             </a:pPr>
             <a:r>
@@ -6679,7 +7002,7 @@
           <a:bodyPr wrap="square" lIns="0" tIns="0" rIns="0" bIns="0" rtlCol="0" anchor="ctr"/>
           <a:lstStyle/>
           <a:p>
-            <a:pPr marL="0" indent="0">
+            <a:pPr indent="0" marL="0">
               <a:buNone/>
             </a:pPr>
             <a:r>
@@ -6718,7 +7041,7 @@
           <a:bodyPr wrap="square" lIns="0" tIns="0" rIns="0" bIns="0" rtlCol="0" anchor="t"/>
           <a:lstStyle/>
           <a:p>
-            <a:pPr marL="0" indent="0">
+            <a:pPr indent="0" marL="0">
               <a:lnSpc>
                 <a:spcPct val="108000"/>
               </a:lnSpc>
@@ -6782,7 +7105,7 @@
           <a:bodyPr wrap="square" lIns="0" tIns="0" rIns="0" bIns="0" rtlCol="0" anchor="ctr"/>
           <a:lstStyle/>
           <a:p>
-            <a:pPr marL="0" indent="0">
+            <a:pPr indent="0" marL="0">
               <a:buNone/>
             </a:pPr>
             <a:r>
@@ -6821,7 +7144,7 @@
           <a:bodyPr wrap="square" lIns="0" tIns="0" rIns="0" bIns="0" rtlCol="0" anchor="t"/>
           <a:lstStyle/>
           <a:p>
-            <a:pPr marL="0" indent="0">
+            <a:pPr indent="0" marL="0">
               <a:lnSpc>
                 <a:spcPct val="108000"/>
               </a:lnSpc>
@@ -6890,7 +7213,7 @@
           <a:bodyPr wrap="square" lIns="0" tIns="0" rIns="0" bIns="0" rtlCol="0" anchor="ctr"/>
           <a:lstStyle/>
           <a:p>
-            <a:pPr marL="0" indent="0">
+            <a:pPr indent="0" marL="0">
               <a:lnSpc>
                 <a:spcPct val="112000"/>
               </a:lnSpc>
@@ -6913,7 +7236,7 @@
       </p:sp>
       <p:sp>
         <p:nvSpPr>
-          <p:cNvPr id="28" name="Slide Number Placeholder 0"/>
+          <p:cNvPr id="25" name="Slide Number Placeholder 0"/>
           <p:cNvSpPr>
             <a:spLocks noGrp="1"/>
           </p:cNvSpPr>
@@ -6931,7 +7254,7 @@
           </a:prstGeom>
           <a:extLst>
             <a:ext uri="{C572A759-6A51-4108-AA02-DFA0A04FC94B}">
-              <ma14:wrappingTextBoxFlag xmlns:ma14="http://schemas.microsoft.com/office/mac/drawingml/2011/main" xmlns="" val="0"/>
+              <ma14:wrappingTextBoxFlag xmlns:ma14="http://schemas.microsoft.com/office/mac/drawingml/2011/main" val="0"/>
             </a:ext>
           </a:extLst>
         </p:spPr>
@@ -6952,7 +7275,7 @@
           <a:p>
             <a:pPr algn="l"/>
             <a:fld id="{F7021451-1387-4CA6-816F-3879F97B5CBC}" type="slidenum">
-              <a:rPr lang="en-US" b="0"/>
+              <a:rPr b="0" lang="en-US"/>
               <a:t>12</a:t>
             </a:fld>
             <a:endParaRPr lang="en-US"/>
@@ -7027,7 +7350,7 @@
           <a:bodyPr wrap="square" lIns="0" tIns="0" rIns="0" bIns="0" rtlCol="0" anchor="ctr"/>
           <a:lstStyle/>
           <a:p>
-            <a:pPr marL="0" indent="0" algn="l">
+            <a:pPr algn="l" indent="0" marL="0">
               <a:buNone/>
             </a:pPr>
             <a:r>
@@ -7066,7 +7389,7 @@
           <a:bodyPr wrap="square" lIns="0" tIns="0" rIns="0" bIns="0" rtlCol="0" anchor="ctr"/>
           <a:lstStyle/>
           <a:p>
-            <a:pPr marL="0" indent="0">
+            <a:pPr indent="0" marL="0">
               <a:buNone/>
             </a:pPr>
             <a:r>
@@ -7132,11 +7455,11 @@
           <a:bodyPr wrap="square" lIns="0" tIns="0" rIns="0" bIns="0" rtlCol="0" anchor="ctr"/>
           <a:lstStyle/>
           <a:p>
-            <a:pPr marL="0" indent="0" algn="ctr">
-              <a:buNone/>
-            </a:pPr>
-            <a:r>
-              <a:rPr lang="en-US" sz="900" b="1" kern="0" spc="100" dirty="0">
+            <a:pPr algn="ctr" indent="0" marL="0">
+              <a:buNone/>
+            </a:pPr>
+            <a:r>
+              <a:rPr lang="en-US" sz="900" b="1" spc="100" kern="0" dirty="0">
                 <a:solidFill>
                   <a:srgbClr val="5A05F4"/>
                 </a:solidFill>
@@ -7152,14 +7475,14 @@
       </p:sp>
       <p:pic>
         <p:nvPicPr>
-          <p:cNvPr id="7" name="Image 0" descr="preencoded.png"/>
+          <p:cNvPr id="7" name="Image 0" descr="preencoded.png">    </p:cNvPr>
           <p:cNvPicPr>
             <a:picLocks noChangeAspect="1"/>
           </p:cNvPicPr>
           <p:nvPr/>
         </p:nvPicPr>
         <p:blipFill>
-          <a:blip r:embed="rId3"/>
+          <a:blip r:embed="rId1"/>
           <a:stretch>
             <a:fillRect/>
           </a:stretch>
@@ -7190,34 +7513,16 @@
         </p:nvGraphicFramePr>
         <p:xfrm>
           <a:off x="566928" y="1737360"/>
-          <a:ext cx="11064240" cy="3291840"/>
+          <a:ext cx="11064240" cy="914400"/>
         </p:xfrm>
         <a:graphic>
           <a:graphicData uri="http://schemas.openxmlformats.org/drawingml/2006/table">
             <a:tbl>
               <a:tblPr/>
               <a:tblGrid>
-                <a:gridCol w="2743200">
-                  <a:extLst>
-                    <a:ext uri="{9D8B030D-6E8A-4147-A177-3AD203B41FA5}">
-                      <a16:colId xmlns:a16="http://schemas.microsoft.com/office/drawing/2014/main" val="20000"/>
-                    </a:ext>
-                  </a:extLst>
-                </a:gridCol>
-                <a:gridCol w="4480560">
-                  <a:extLst>
-                    <a:ext uri="{9D8B030D-6E8A-4147-A177-3AD203B41FA5}">
-                      <a16:colId xmlns:a16="http://schemas.microsoft.com/office/drawing/2014/main" val="20001"/>
-                    </a:ext>
-                  </a:extLst>
-                </a:gridCol>
-                <a:gridCol w="3840480">
-                  <a:extLst>
-                    <a:ext uri="{9D8B030D-6E8A-4147-A177-3AD203B41FA5}">
-                      <a16:colId xmlns:a16="http://schemas.microsoft.com/office/drawing/2014/main" val="20002"/>
-                    </a:ext>
-                  </a:extLst>
-                </a:gridCol>
+                <a:gridCol w="2743200"/>
+                <a:gridCol w="4480560"/>
+                <a:gridCol w="3840480"/>
               </a:tblGrid>
               <a:tr h="548640">
                 <a:tc>
@@ -7225,11 +7530,11 @@
                     <a:bodyPr/>
                     <a:lstStyle/>
                     <a:p>
-                      <a:pPr marL="0" indent="0" algn="ctr">
+                      <a:pPr algn="ctr" indent="0" marL="0">
                         <a:buNone/>
                       </a:pPr>
                       <a:r>
-                        <a:rPr lang="en-US" sz="900" b="1" kern="0" spc="100" dirty="0">
+                        <a:rPr lang="en-US" sz="900" b="1" spc="100" kern="0" dirty="0">
                           <a:solidFill>
                             <a:srgbClr val="FFFFFF"/>
                           </a:solidFill>
@@ -7293,11 +7598,11 @@
                     <a:bodyPr/>
                     <a:lstStyle/>
                     <a:p>
-                      <a:pPr marL="0" indent="0" algn="ctr">
+                      <a:pPr algn="ctr" indent="0" marL="0">
                         <a:buNone/>
                       </a:pPr>
                       <a:r>
-                        <a:rPr lang="en-US" sz="900" b="1" kern="0" spc="100" dirty="0">
+                        <a:rPr lang="en-US" sz="900" b="1" spc="100" kern="0" dirty="0">
                           <a:solidFill>
                             <a:srgbClr val="FFFFFF"/>
                           </a:solidFill>
@@ -7361,11 +7666,11 @@
                     <a:bodyPr/>
                     <a:lstStyle/>
                     <a:p>
-                      <a:pPr marL="0" indent="0" algn="ctr">
+                      <a:pPr algn="ctr" indent="0" marL="0">
                         <a:buNone/>
                       </a:pPr>
                       <a:r>
-                        <a:rPr lang="en-US" sz="900" b="1" kern="0" spc="100" dirty="0">
+                        <a:rPr lang="en-US" sz="900" b="1" spc="100" kern="0" dirty="0">
                           <a:solidFill>
                             <a:srgbClr val="FFFFFF"/>
                           </a:solidFill>
@@ -7424,11 +7729,6 @@
                     </a:solidFill>
                   </a:tcPr>
                 </a:tc>
-                <a:extLst>
-                  <a:ext uri="{0D108BD9-81ED-4DB2-BD59-A6C34878D82A}">
-                    <a16:rowId xmlns:a16="http://schemas.microsoft.com/office/drawing/2014/main" val="10000"/>
-                  </a:ext>
-                </a:extLst>
               </a:tr>
               <a:tr h="548640">
                 <a:tc>
@@ -7436,7 +7736,7 @@
                     <a:bodyPr/>
                     <a:lstStyle/>
                     <a:p>
-                      <a:pPr marL="0" indent="0">
+                      <a:pPr indent="0" marL="0">
                         <a:buNone/>
                       </a:pPr>
                       <a:r>
@@ -7504,7 +7804,7 @@
                     <a:bodyPr/>
                     <a:lstStyle/>
                     <a:p>
-                      <a:pPr marL="0" indent="0">
+                      <a:pPr indent="0" marL="0">
                         <a:buNone/>
                       </a:pPr>
                       <a:r>
@@ -7572,7 +7872,7 @@
                     <a:bodyPr/>
                     <a:lstStyle/>
                     <a:p>
-                      <a:pPr marL="0" indent="0">
+                      <a:pPr indent="0" marL="0">
                         <a:buNone/>
                       </a:pPr>
                       <a:r>
@@ -7635,11 +7935,6 @@
                     </a:solidFill>
                   </a:tcPr>
                 </a:tc>
-                <a:extLst>
-                  <a:ext uri="{0D108BD9-81ED-4DB2-BD59-A6C34878D82A}">
-                    <a16:rowId xmlns:a16="http://schemas.microsoft.com/office/drawing/2014/main" val="10001"/>
-                  </a:ext>
-                </a:extLst>
               </a:tr>
               <a:tr h="548640">
                 <a:tc>
@@ -7647,7 +7942,7 @@
                     <a:bodyPr/>
                     <a:lstStyle/>
                     <a:p>
-                      <a:pPr marL="0" indent="0">
+                      <a:pPr indent="0" marL="0">
                         <a:buNone/>
                       </a:pPr>
                       <a:r>
@@ -7715,7 +8010,7 @@
                     <a:bodyPr/>
                     <a:lstStyle/>
                     <a:p>
-                      <a:pPr marL="0" indent="0">
+                      <a:pPr indent="0" marL="0">
                         <a:buNone/>
                       </a:pPr>
                       <a:r>
@@ -7783,7 +8078,7 @@
                     <a:bodyPr/>
                     <a:lstStyle/>
                     <a:p>
-                      <a:pPr marL="0" indent="0">
+                      <a:pPr indent="0" marL="0">
                         <a:buNone/>
                       </a:pPr>
                       <a:r>
@@ -7846,11 +8141,6 @@
                     </a:solidFill>
                   </a:tcPr>
                 </a:tc>
-                <a:extLst>
-                  <a:ext uri="{0D108BD9-81ED-4DB2-BD59-A6C34878D82A}">
-                    <a16:rowId xmlns:a16="http://schemas.microsoft.com/office/drawing/2014/main" val="10002"/>
-                  </a:ext>
-                </a:extLst>
               </a:tr>
               <a:tr h="548640">
                 <a:tc>
@@ -7858,7 +8148,7 @@
                     <a:bodyPr/>
                     <a:lstStyle/>
                     <a:p>
-                      <a:pPr marL="0" indent="0">
+                      <a:pPr indent="0" marL="0">
                         <a:buNone/>
                       </a:pPr>
                       <a:r>
@@ -7926,7 +8216,7 @@
                     <a:bodyPr/>
                     <a:lstStyle/>
                     <a:p>
-                      <a:pPr marL="0" indent="0">
+                      <a:pPr indent="0" marL="0">
                         <a:buNone/>
                       </a:pPr>
                       <a:r>
@@ -7994,7 +8284,7 @@
                     <a:bodyPr/>
                     <a:lstStyle/>
                     <a:p>
-                      <a:pPr marL="0" indent="0">
+                      <a:pPr indent="0" marL="0">
                         <a:buNone/>
                       </a:pPr>
                       <a:r>
@@ -8057,11 +8347,6 @@
                     </a:solidFill>
                   </a:tcPr>
                 </a:tc>
-                <a:extLst>
-                  <a:ext uri="{0D108BD9-81ED-4DB2-BD59-A6C34878D82A}">
-                    <a16:rowId xmlns:a16="http://schemas.microsoft.com/office/drawing/2014/main" val="10003"/>
-                  </a:ext>
-                </a:extLst>
               </a:tr>
               <a:tr h="548640">
                 <a:tc>
@@ -8069,7 +8354,7 @@
                     <a:bodyPr/>
                     <a:lstStyle/>
                     <a:p>
-                      <a:pPr marL="0" indent="0">
+                      <a:pPr indent="0" marL="0">
                         <a:buNone/>
                       </a:pPr>
                       <a:r>
@@ -8137,7 +8422,7 @@
                     <a:bodyPr/>
                     <a:lstStyle/>
                     <a:p>
-                      <a:pPr marL="0" indent="0">
+                      <a:pPr indent="0" marL="0">
                         <a:buNone/>
                       </a:pPr>
                       <a:r>
@@ -8205,7 +8490,7 @@
                     <a:bodyPr/>
                     <a:lstStyle/>
                     <a:p>
-                      <a:pPr marL="0" indent="0">
+                      <a:pPr indent="0" marL="0">
                         <a:buNone/>
                       </a:pPr>
                       <a:r>
@@ -8268,11 +8553,6 @@
                     </a:solidFill>
                   </a:tcPr>
                 </a:tc>
-                <a:extLst>
-                  <a:ext uri="{0D108BD9-81ED-4DB2-BD59-A6C34878D82A}">
-                    <a16:rowId xmlns:a16="http://schemas.microsoft.com/office/drawing/2014/main" val="10004"/>
-                  </a:ext>
-                </a:extLst>
               </a:tr>
               <a:tr h="548640">
                 <a:tc>
@@ -8280,7 +8560,7 @@
                     <a:bodyPr/>
                     <a:lstStyle/>
                     <a:p>
-                      <a:pPr marL="0" indent="0">
+                      <a:pPr indent="0" marL="0">
                         <a:buNone/>
                       </a:pPr>
                       <a:r>
@@ -8348,7 +8628,7 @@
                     <a:bodyPr/>
                     <a:lstStyle/>
                     <a:p>
-                      <a:pPr marL="0" indent="0">
+                      <a:pPr indent="0" marL="0">
                         <a:buNone/>
                       </a:pPr>
                       <a:r>
@@ -8416,7 +8696,7 @@
                     <a:bodyPr/>
                     <a:lstStyle/>
                     <a:p>
-                      <a:pPr marL="0" indent="0">
+                      <a:pPr indent="0" marL="0">
                         <a:buNone/>
                       </a:pPr>
                       <a:r>
@@ -8479,11 +8759,6 @@
                     </a:solidFill>
                   </a:tcPr>
                 </a:tc>
-                <a:extLst>
-                  <a:ext uri="{0D108BD9-81ED-4DB2-BD59-A6C34878D82A}">
-                    <a16:rowId xmlns:a16="http://schemas.microsoft.com/office/drawing/2014/main" val="10005"/>
-                  </a:ext>
-                </a:extLst>
               </a:tr>
             </a:tbl>
           </a:graphicData>
@@ -8518,14 +8793,34 @@
       </p:sp>
       <p:sp>
         <p:nvSpPr>
-          <p:cNvPr id="10" name="Text 6"/>
-          <p:cNvSpPr/>
-          <p:nvPr/>
-        </p:nvSpPr>
-        <p:spPr>
-          <a:xfrm>
-            <a:off x="786384" y="5294376"/>
-            <a:ext cx="10625328" cy="219456"/>
+          <p:cNvPr id="10" name="Shape 6"/>
+          <p:cNvSpPr/>
+          <p:nvPr/>
+        </p:nvSpPr>
+        <p:spPr>
+          <a:xfrm>
+            <a:off x="749808" y="5376672"/>
+            <a:ext cx="310896" cy="310896"/>
+          </a:xfrm>
+          <a:prstGeom prst="ellipse">
+            <a:avLst/>
+          </a:prstGeom>
+          <a:solidFill>
+            <a:srgbClr val="106B41"/>
+          </a:solidFill>
+          <a:ln/>
+        </p:spPr>
+      </p:sp>
+      <p:sp>
+        <p:nvSpPr>
+          <p:cNvPr id="11" name="Text 7"/>
+          <p:cNvSpPr/>
+          <p:nvPr/>
+        </p:nvSpPr>
+        <p:spPr>
+          <a:xfrm>
+            <a:off x="749808" y="5376672"/>
+            <a:ext cx="310896" cy="310896"/>
           </a:xfrm>
           <a:prstGeom prst="rect">
             <a:avLst/>
@@ -8537,11 +8832,50 @@
           <a:bodyPr wrap="square" lIns="0" tIns="0" rIns="0" bIns="0" rtlCol="0" anchor="ctr"/>
           <a:lstStyle/>
           <a:p>
-            <a:pPr marL="0" indent="0">
-              <a:buNone/>
-            </a:pPr>
-            <a:r>
-              <a:rPr lang="en-US" sz="950" b="1" kern="0" spc="150" dirty="0">
+            <a:pPr algn="ctr" indent="0" marL="0">
+              <a:buNone/>
+            </a:pPr>
+            <a:r>
+              <a:rPr lang="en-US" sz="1200" b="1" dirty="0">
+                <a:solidFill>
+                  <a:srgbClr val="FFFFFF"/>
+                </a:solidFill>
+                <a:latin typeface="Arial" pitchFamily="34" charset="0"/>
+                <a:ea typeface="Arial" pitchFamily="34" charset="-122"/>
+                <a:cs typeface="Arial" pitchFamily="34" charset="-120"/>
+              </a:rPr>
+              <a:t>◆</a:t>
+            </a:r>
+            <a:endParaRPr lang="en-US" sz="1200" dirty="0"/>
+          </a:p>
+        </p:txBody>
+      </p:sp>
+      <p:sp>
+        <p:nvSpPr>
+          <p:cNvPr id="12" name="Text 8"/>
+          <p:cNvSpPr/>
+          <p:nvPr/>
+        </p:nvSpPr>
+        <p:spPr>
+          <a:xfrm>
+            <a:off x="1243584" y="5294376"/>
+            <a:ext cx="10168128" cy="219456"/>
+          </a:xfrm>
+          <a:prstGeom prst="rect">
+            <a:avLst/>
+          </a:prstGeom>
+          <a:noFill/>
+          <a:ln/>
+        </p:spPr>
+        <p:txBody>
+          <a:bodyPr wrap="square" lIns="0" tIns="0" rIns="0" bIns="0" rtlCol="0" anchor="ctr"/>
+          <a:lstStyle/>
+          <a:p>
+            <a:pPr indent="0" marL="0">
+              <a:buNone/>
+            </a:pPr>
+            <a:r>
+              <a:rPr lang="en-US" sz="950" b="1" spc="150" kern="0" dirty="0">
                 <a:solidFill>
                   <a:srgbClr val="106B41"/>
                 </a:solidFill>
@@ -8557,14 +8891,14 @@
       </p:sp>
       <p:sp>
         <p:nvSpPr>
-          <p:cNvPr id="11" name="Text 7"/>
-          <p:cNvSpPr/>
-          <p:nvPr/>
-        </p:nvSpPr>
-        <p:spPr>
-          <a:xfrm>
-            <a:off x="786384" y="5550408"/>
-            <a:ext cx="10625328" cy="219456"/>
+          <p:cNvPr id="13" name="Text 9"/>
+          <p:cNvSpPr/>
+          <p:nvPr/>
+        </p:nvSpPr>
+        <p:spPr>
+          <a:xfrm>
+            <a:off x="1243584" y="5550408"/>
+            <a:ext cx="10168128" cy="219456"/>
           </a:xfrm>
           <a:prstGeom prst="rect">
             <a:avLst/>
@@ -8576,7 +8910,7 @@
           <a:bodyPr wrap="square" lIns="0" tIns="0" rIns="0" bIns="0" rtlCol="0" anchor="ctr"/>
           <a:lstStyle/>
           <a:p>
-            <a:pPr marL="0" indent="0">
+            <a:pPr indent="0" marL="0">
               <a:lnSpc>
                 <a:spcPct val="112000"/>
               </a:lnSpc>
@@ -8617,7 +8951,7 @@
           </a:prstGeom>
           <a:extLst>
             <a:ext uri="{C572A759-6A51-4108-AA02-DFA0A04FC94B}">
-              <ma14:wrappingTextBoxFlag xmlns:ma14="http://schemas.microsoft.com/office/mac/drawingml/2011/main" xmlns="" val="0"/>
+              <ma14:wrappingTextBoxFlag xmlns:ma14="http://schemas.microsoft.com/office/mac/drawingml/2011/main" val="0"/>
             </a:ext>
           </a:extLst>
         </p:spPr>
@@ -8638,7 +8972,7 @@
           <a:p>
             <a:pPr algn="l"/>
             <a:fld id="{F7021451-1387-4CA6-816F-3879F97B5CBC}" type="slidenum">
-              <a:rPr lang="en-US" b="0"/>
+              <a:rPr b="0" lang="en-US"/>
               <a:t>13</a:t>
             </a:fld>
             <a:endParaRPr lang="en-US"/>
@@ -8713,7 +9047,7 @@
           <a:bodyPr wrap="square" lIns="0" tIns="0" rIns="0" bIns="0" rtlCol="0" anchor="ctr"/>
           <a:lstStyle/>
           <a:p>
-            <a:pPr marL="0" indent="0" algn="l">
+            <a:pPr algn="l" indent="0" marL="0">
               <a:buNone/>
             </a:pPr>
             <a:r>
@@ -8752,7 +9086,7 @@
           <a:bodyPr wrap="square" lIns="0" tIns="0" rIns="0" bIns="0" rtlCol="0" anchor="ctr"/>
           <a:lstStyle/>
           <a:p>
-            <a:pPr marL="0" indent="0">
+            <a:pPr indent="0" marL="0">
               <a:buNone/>
             </a:pPr>
             <a:r>
@@ -8818,11 +9152,11 @@
           <a:bodyPr wrap="square" lIns="0" tIns="0" rIns="0" bIns="0" rtlCol="0" anchor="ctr"/>
           <a:lstStyle/>
           <a:p>
-            <a:pPr marL="0" indent="0" algn="ctr">
-              <a:buNone/>
-            </a:pPr>
-            <a:r>
-              <a:rPr lang="en-US" sz="900" b="1" kern="0" spc="100" dirty="0">
+            <a:pPr algn="ctr" indent="0" marL="0">
+              <a:buNone/>
+            </a:pPr>
+            <a:r>
+              <a:rPr lang="en-US" sz="900" b="1" spc="100" kern="0" dirty="0">
                 <a:solidFill>
                   <a:srgbClr val="5A05F4"/>
                 </a:solidFill>
@@ -8838,14 +9172,14 @@
       </p:sp>
       <p:pic>
         <p:nvPicPr>
-          <p:cNvPr id="7" name="Image 0" descr="preencoded.png"/>
+          <p:cNvPr id="7" name="Image 0" descr="preencoded.png">    </p:cNvPr>
           <p:cNvPicPr>
             <a:picLocks noChangeAspect="1"/>
           </p:cNvPicPr>
           <p:nvPr/>
         </p:nvPicPr>
         <p:blipFill>
-          <a:blip r:embed="rId3"/>
+          <a:blip r:embed="rId1"/>
           <a:stretch>
             <a:fillRect/>
           </a:stretch>
@@ -8923,7 +9257,7 @@
           <a:bodyPr wrap="square" lIns="0" tIns="0" rIns="0" bIns="0" rtlCol="0" anchor="ctr"/>
           <a:lstStyle/>
           <a:p>
-            <a:pPr marL="0" indent="0" algn="ctr">
+            <a:pPr algn="ctr" indent="0" marL="0">
               <a:buNone/>
             </a:pPr>
             <a:r>
@@ -8962,7 +9296,7 @@
           <a:bodyPr wrap="square" lIns="0" tIns="0" rIns="0" bIns="0" rtlCol="0" anchor="ctr"/>
           <a:lstStyle/>
           <a:p>
-            <a:pPr marL="0" indent="0">
+            <a:pPr indent="0" marL="0">
               <a:buNone/>
             </a:pPr>
             <a:r>
@@ -9001,7 +9335,7 @@
           <a:bodyPr wrap="square" lIns="0" tIns="0" rIns="0" bIns="0" rtlCol="0" anchor="t"/>
           <a:lstStyle/>
           <a:p>
-            <a:pPr marL="0" indent="0">
+            <a:pPr indent="0" marL="0">
               <a:lnSpc>
                 <a:spcPct val="108000"/>
               </a:lnSpc>
@@ -9085,7 +9419,7 @@
           <a:bodyPr wrap="square" lIns="0" tIns="0" rIns="0" bIns="0" rtlCol="0" anchor="ctr"/>
           <a:lstStyle/>
           <a:p>
-            <a:pPr marL="0" indent="0" algn="ctr">
+            <a:pPr algn="ctr" indent="0" marL="0">
               <a:buNone/>
             </a:pPr>
             <a:r>
@@ -9124,7 +9458,7 @@
           <a:bodyPr wrap="square" lIns="0" tIns="0" rIns="0" bIns="0" rtlCol="0" anchor="ctr"/>
           <a:lstStyle/>
           <a:p>
-            <a:pPr marL="0" indent="0">
+            <a:pPr indent="0" marL="0">
               <a:buNone/>
             </a:pPr>
             <a:r>
@@ -9163,7 +9497,7 @@
           <a:bodyPr wrap="square" lIns="0" tIns="0" rIns="0" bIns="0" rtlCol="0" anchor="t"/>
           <a:lstStyle/>
           <a:p>
-            <a:pPr marL="0" indent="0">
+            <a:pPr indent="0" marL="0">
               <a:lnSpc>
                 <a:spcPct val="108000"/>
               </a:lnSpc>
@@ -9192,8 +9526,8 @@
         </p:nvSpPr>
         <p:spPr>
           <a:xfrm>
-            <a:off x="7973567" y="1828800"/>
-            <a:ext cx="3623767" cy="1783080"/>
+            <a:off x="7973568" y="1828800"/>
+            <a:ext cx="3520440" cy="1783080"/>
           </a:xfrm>
           <a:prstGeom prst="roundRect">
             <a:avLst>
@@ -9247,7 +9581,7 @@
           <a:bodyPr wrap="square" lIns="0" tIns="0" rIns="0" bIns="0" rtlCol="0" anchor="ctr"/>
           <a:lstStyle/>
           <a:p>
-            <a:pPr marL="0" indent="0" algn="ctr">
+            <a:pPr algn="ctr" indent="0" marL="0">
               <a:buNone/>
             </a:pPr>
             <a:r>
@@ -9286,7 +9620,7 @@
           <a:bodyPr wrap="square" lIns="0" tIns="0" rIns="0" bIns="0" rtlCol="0" anchor="ctr"/>
           <a:lstStyle/>
           <a:p>
-            <a:pPr marL="0" indent="0">
+            <a:pPr indent="0" marL="0">
               <a:buNone/>
             </a:pPr>
             <a:r>
@@ -9325,7 +9659,7 @@
           <a:bodyPr wrap="square" lIns="0" tIns="0" rIns="0" bIns="0" rtlCol="0" anchor="t"/>
           <a:lstStyle/>
           <a:p>
-            <a:pPr marL="0" indent="0">
+            <a:pPr indent="0" marL="0">
               <a:lnSpc>
                 <a:spcPct val="108000"/>
               </a:lnSpc>
@@ -9375,14 +9709,34 @@
       </p:sp>
       <p:sp>
         <p:nvSpPr>
-          <p:cNvPr id="24" name="Text 21"/>
-          <p:cNvSpPr/>
-          <p:nvPr/>
-        </p:nvSpPr>
-        <p:spPr>
-          <a:xfrm>
-            <a:off x="786384" y="4105656"/>
-            <a:ext cx="10625328" cy="219456"/>
+          <p:cNvPr id="24" name="Shape 21"/>
+          <p:cNvSpPr/>
+          <p:nvPr/>
+        </p:nvSpPr>
+        <p:spPr>
+          <a:xfrm>
+            <a:off x="749808" y="4485132"/>
+            <a:ext cx="310896" cy="310896"/>
+          </a:xfrm>
+          <a:prstGeom prst="ellipse">
+            <a:avLst/>
+          </a:prstGeom>
+          <a:solidFill>
+            <a:srgbClr val="106B41"/>
+          </a:solidFill>
+          <a:ln/>
+        </p:spPr>
+      </p:sp>
+      <p:sp>
+        <p:nvSpPr>
+          <p:cNvPr id="25" name="Text 22"/>
+          <p:cNvSpPr/>
+          <p:nvPr/>
+        </p:nvSpPr>
+        <p:spPr>
+          <a:xfrm>
+            <a:off x="749808" y="4485132"/>
+            <a:ext cx="310896" cy="310896"/>
           </a:xfrm>
           <a:prstGeom prst="rect">
             <a:avLst/>
@@ -9394,11 +9748,50 @@
           <a:bodyPr wrap="square" lIns="0" tIns="0" rIns="0" bIns="0" rtlCol="0" anchor="ctr"/>
           <a:lstStyle/>
           <a:p>
-            <a:pPr marL="0" indent="0">
-              <a:buNone/>
-            </a:pPr>
-            <a:r>
-              <a:rPr lang="en-US" sz="950" b="1" kern="0" spc="150" dirty="0">
+            <a:pPr algn="ctr" indent="0" marL="0">
+              <a:buNone/>
+            </a:pPr>
+            <a:r>
+              <a:rPr lang="en-US" sz="1200" b="1" dirty="0">
+                <a:solidFill>
+                  <a:srgbClr val="FFFFFF"/>
+                </a:solidFill>
+                <a:latin typeface="Arial" pitchFamily="34" charset="0"/>
+                <a:ea typeface="Arial" pitchFamily="34" charset="-122"/>
+                <a:cs typeface="Arial" pitchFamily="34" charset="-120"/>
+              </a:rPr>
+              <a:t>◆</a:t>
+            </a:r>
+            <a:endParaRPr lang="en-US" sz="1200" dirty="0"/>
+          </a:p>
+        </p:txBody>
+      </p:sp>
+      <p:sp>
+        <p:nvSpPr>
+          <p:cNvPr id="26" name="Text 23"/>
+          <p:cNvSpPr/>
+          <p:nvPr/>
+        </p:nvSpPr>
+        <p:spPr>
+          <a:xfrm>
+            <a:off x="1243584" y="4105656"/>
+            <a:ext cx="10168128" cy="219456"/>
+          </a:xfrm>
+          <a:prstGeom prst="rect">
+            <a:avLst/>
+          </a:prstGeom>
+          <a:noFill/>
+          <a:ln/>
+        </p:spPr>
+        <p:txBody>
+          <a:bodyPr wrap="square" lIns="0" tIns="0" rIns="0" bIns="0" rtlCol="0" anchor="ctr"/>
+          <a:lstStyle/>
+          <a:p>
+            <a:pPr indent="0" marL="0">
+              <a:buNone/>
+            </a:pPr>
+            <a:r>
+              <a:rPr lang="en-US" sz="950" b="1" spc="150" kern="0" dirty="0">
                 <a:solidFill>
                   <a:srgbClr val="106B41"/>
                 </a:solidFill>
@@ -9414,14 +9807,14 @@
       </p:sp>
       <p:sp>
         <p:nvSpPr>
-          <p:cNvPr id="25" name="Text 22"/>
-          <p:cNvSpPr/>
-          <p:nvPr/>
-        </p:nvSpPr>
-        <p:spPr>
-          <a:xfrm>
-            <a:off x="786384" y="4361688"/>
-            <a:ext cx="10625328" cy="813816"/>
+          <p:cNvPr id="27" name="Text 24"/>
+          <p:cNvSpPr/>
+          <p:nvPr/>
+        </p:nvSpPr>
+        <p:spPr>
+          <a:xfrm>
+            <a:off x="1243584" y="4361688"/>
+            <a:ext cx="10168128" cy="813816"/>
           </a:xfrm>
           <a:prstGeom prst="rect">
             <a:avLst/>
@@ -9433,7 +9826,7 @@
           <a:bodyPr wrap="square" lIns="0" tIns="0" rIns="0" bIns="0" rtlCol="0" anchor="ctr"/>
           <a:lstStyle/>
           <a:p>
-            <a:pPr marL="0" indent="0">
+            <a:pPr indent="0" marL="0">
               <a:lnSpc>
                 <a:spcPct val="112000"/>
               </a:lnSpc>
@@ -9456,7 +9849,7 @@
       </p:sp>
       <p:sp>
         <p:nvSpPr>
-          <p:cNvPr id="26" name="Slide Number Placeholder 0"/>
+          <p:cNvPr id="25" name="Slide Number Placeholder 0"/>
           <p:cNvSpPr>
             <a:spLocks noGrp="1"/>
           </p:cNvSpPr>
@@ -9474,7 +9867,7 @@
           </a:prstGeom>
           <a:extLst>
             <a:ext uri="{C572A759-6A51-4108-AA02-DFA0A04FC94B}">
-              <ma14:wrappingTextBoxFlag xmlns:ma14="http://schemas.microsoft.com/office/mac/drawingml/2011/main" xmlns="" val="0"/>
+              <ma14:wrappingTextBoxFlag xmlns:ma14="http://schemas.microsoft.com/office/mac/drawingml/2011/main" val="0"/>
             </a:ext>
           </a:extLst>
         </p:spPr>
@@ -9495,7 +9888,7 @@
           <a:p>
             <a:pPr algn="l"/>
             <a:fld id="{F7021451-1387-4CA6-816F-3879F97B5CBC}" type="slidenum">
-              <a:rPr lang="en-US" b="0"/>
+              <a:rPr b="0" lang="en-US"/>
               <a:t>14</a:t>
             </a:fld>
             <a:endParaRPr lang="en-US"/>
@@ -9570,7 +9963,7 @@
           <a:bodyPr wrap="square" lIns="0" tIns="0" rIns="0" bIns="0" rtlCol="0" anchor="ctr"/>
           <a:lstStyle/>
           <a:p>
-            <a:pPr marL="0" indent="0" algn="l">
+            <a:pPr algn="l" indent="0" marL="0">
               <a:buNone/>
             </a:pPr>
             <a:r>
@@ -9609,7 +10002,7 @@
           <a:bodyPr wrap="square" lIns="0" tIns="0" rIns="0" bIns="0" rtlCol="0" anchor="ctr"/>
           <a:lstStyle/>
           <a:p>
-            <a:pPr marL="0" indent="0">
+            <a:pPr indent="0" marL="0">
               <a:buNone/>
             </a:pPr>
             <a:r>
@@ -9675,11 +10068,11 @@
           <a:bodyPr wrap="square" lIns="0" tIns="0" rIns="0" bIns="0" rtlCol="0" anchor="ctr"/>
           <a:lstStyle/>
           <a:p>
-            <a:pPr marL="0" indent="0" algn="ctr">
-              <a:buNone/>
-            </a:pPr>
-            <a:r>
-              <a:rPr lang="en-US" sz="900" b="1" kern="0" spc="100" dirty="0">
+            <a:pPr algn="ctr" indent="0" marL="0">
+              <a:buNone/>
+            </a:pPr>
+            <a:r>
+              <a:rPr lang="en-US" sz="900" b="1" spc="100" kern="0" dirty="0">
                 <a:solidFill>
                   <a:srgbClr val="5A05F4"/>
                 </a:solidFill>
@@ -9695,14 +10088,14 @@
       </p:sp>
       <p:pic>
         <p:nvPicPr>
-          <p:cNvPr id="7" name="Image 0" descr="preencoded.png"/>
+          <p:cNvPr id="7" name="Image 0" descr="preencoded.png">    </p:cNvPr>
           <p:cNvPicPr>
             <a:picLocks noChangeAspect="1"/>
           </p:cNvPicPr>
           <p:nvPr/>
         </p:nvPicPr>
         <p:blipFill>
-          <a:blip r:embed="rId3"/>
+          <a:blip r:embed="rId1"/>
           <a:stretch>
             <a:fillRect/>
           </a:stretch>
@@ -9765,7 +10158,7 @@
           <a:bodyPr wrap="square" lIns="0" tIns="0" rIns="0" bIns="0" rtlCol="0" anchor="ctr"/>
           <a:lstStyle/>
           <a:p>
-            <a:pPr marL="0" indent="0" algn="ctr">
+            <a:pPr algn="ctr" indent="0" marL="0">
               <a:buNone/>
             </a:pPr>
             <a:r>
@@ -9831,7 +10224,7 @@
           <a:bodyPr wrap="square" lIns="0" tIns="0" rIns="0" bIns="0" rtlCol="0" anchor="ctr"/>
           <a:lstStyle/>
           <a:p>
-            <a:pPr marL="0" indent="0" algn="ctr">
+            <a:pPr algn="ctr" indent="0" marL="0">
               <a:buNone/>
             </a:pPr>
             <a:r>
@@ -9897,7 +10290,7 @@
           <a:bodyPr wrap="square" lIns="0" tIns="0" rIns="0" bIns="0" rtlCol="0" anchor="ctr"/>
           <a:lstStyle/>
           <a:p>
-            <a:pPr marL="0" indent="0" algn="ctr">
+            <a:pPr algn="ctr" indent="0" marL="0">
               <a:buNone/>
             </a:pPr>
             <a:r>
@@ -9963,7 +10356,7 @@
           <a:bodyPr wrap="square" lIns="0" tIns="0" rIns="0" bIns="0" rtlCol="0" anchor="ctr"/>
           <a:lstStyle/>
           <a:p>
-            <a:pPr marL="0" indent="0" algn="ctr">
+            <a:pPr algn="ctr" indent="0" marL="0">
               <a:buNone/>
             </a:pPr>
             <a:r>
@@ -10029,7 +10422,7 @@
           <a:bodyPr wrap="square" lIns="0" tIns="0" rIns="0" bIns="0" rtlCol="0" anchor="ctr"/>
           <a:lstStyle/>
           <a:p>
-            <a:pPr marL="0" indent="0" algn="ctr">
+            <a:pPr algn="ctr" indent="0" marL="0">
               <a:buNone/>
             </a:pPr>
             <a:r>
@@ -10095,7 +10488,7 @@
           <a:bodyPr wrap="square" lIns="0" tIns="0" rIns="0" bIns="0" rtlCol="0" anchor="ctr"/>
           <a:lstStyle/>
           <a:p>
-            <a:pPr marL="0" indent="0" algn="ctr">
+            <a:pPr algn="ctr" indent="0" marL="0">
               <a:buNone/>
             </a:pPr>
             <a:r>
@@ -10161,7 +10554,7 @@
           <a:bodyPr wrap="square" lIns="0" tIns="0" rIns="0" bIns="0" rtlCol="0" anchor="ctr"/>
           <a:lstStyle/>
           <a:p>
-            <a:pPr marL="0" indent="0" algn="ctr">
+            <a:pPr algn="ctr" indent="0" marL="0">
               <a:buNone/>
             </a:pPr>
             <a:r>
@@ -10227,7 +10620,7 @@
           <a:bodyPr wrap="square" lIns="0" tIns="0" rIns="0" bIns="0" rtlCol="0" anchor="ctr"/>
           <a:lstStyle/>
           <a:p>
-            <a:pPr marL="0" indent="0" algn="ctr">
+            <a:pPr algn="ctr" indent="0" marL="0">
               <a:buNone/>
             </a:pPr>
             <a:r>
@@ -10288,7 +10681,7 @@
           <a:bodyPr wrap="square" lIns="0" tIns="0" rIns="0" bIns="0" rtlCol="0" anchor="ctr"/>
           <a:lstStyle/>
           <a:p>
-            <a:pPr marL="0" indent="0">
+            <a:pPr indent="0" marL="0">
               <a:lnSpc>
                 <a:spcPct val="112000"/>
               </a:lnSpc>
@@ -10311,7 +10704,7 @@
       </p:sp>
       <p:sp>
         <p:nvSpPr>
-          <p:cNvPr id="26" name="Slide Number Placeholder 0"/>
+          <p:cNvPr id="25" name="Slide Number Placeholder 0"/>
           <p:cNvSpPr>
             <a:spLocks noGrp="1"/>
           </p:cNvSpPr>
@@ -10329,7 +10722,7 @@
           </a:prstGeom>
           <a:extLst>
             <a:ext uri="{C572A759-6A51-4108-AA02-DFA0A04FC94B}">
-              <ma14:wrappingTextBoxFlag xmlns:ma14="http://schemas.microsoft.com/office/mac/drawingml/2011/main" xmlns="" val="0"/>
+              <ma14:wrappingTextBoxFlag xmlns:ma14="http://schemas.microsoft.com/office/mac/drawingml/2011/main" val="0"/>
             </a:ext>
           </a:extLst>
         </p:spPr>
@@ -10350,7 +10743,7 @@
           <a:p>
             <a:pPr algn="l"/>
             <a:fld id="{F7021451-1387-4CA6-816F-3879F97B5CBC}" type="slidenum">
-              <a:rPr lang="en-US" b="0"/>
+              <a:rPr b="0" lang="en-US"/>
               <a:t>15</a:t>
             </a:fld>
             <a:endParaRPr lang="en-US"/>
@@ -10403,11 +10796,11 @@
           <a:bodyPr wrap="square" lIns="0" tIns="0" rIns="0" bIns="0" rtlCol="0" anchor="ctr"/>
           <a:lstStyle/>
           <a:p>
-            <a:pPr marL="0" indent="0">
-              <a:buNone/>
-            </a:pPr>
-            <a:r>
-              <a:rPr lang="en-US" sz="1200" b="1" kern="0" spc="400" dirty="0">
+            <a:pPr indent="0" marL="0">
+              <a:buNone/>
+            </a:pPr>
+            <a:r>
+              <a:rPr lang="en-US" sz="1200" b="1" spc="400" kern="0" dirty="0">
                 <a:solidFill>
                   <a:srgbClr val="FFFFFF"/>
                 </a:solidFill>
@@ -10442,7 +10835,7 @@
           <a:bodyPr wrap="square" lIns="0" tIns="0" rIns="0" bIns="0" rtlCol="0" anchor="ctr"/>
           <a:lstStyle/>
           <a:p>
-            <a:pPr marL="0" indent="0">
+            <a:pPr indent="0" marL="0">
               <a:buNone/>
             </a:pPr>
             <a:r>
@@ -10481,7 +10874,7 @@
           <a:bodyPr wrap="square" lIns="0" tIns="0" rIns="0" bIns="0" rtlCol="0" anchor="t"/>
           <a:lstStyle/>
           <a:p>
-            <a:pPr marL="0" indent="0">
+            <a:pPr indent="0" marL="0">
               <a:buNone/>
             </a:pPr>
             <a:r>
@@ -10542,7 +10935,7 @@
           <a:bodyPr wrap="square" lIns="0" tIns="0" rIns="0" bIns="0" rtlCol="0" anchor="ctr"/>
           <a:lstStyle/>
           <a:p>
-            <a:pPr marL="0" indent="0" algn="ctr">
+            <a:pPr algn="ctr" indent="0" marL="0">
               <a:buNone/>
             </a:pPr>
             <a:r>
@@ -10628,7 +11021,7 @@
           <a:bodyPr wrap="square" lIns="0" tIns="0" rIns="0" bIns="0" rtlCol="0" anchor="ctr"/>
           <a:lstStyle/>
           <a:p>
-            <a:pPr marL="0" indent="0">
+            <a:pPr indent="0" marL="0">
               <a:buNone/>
             </a:pPr>
             <a:r>
@@ -10689,11 +11082,11 @@
           <a:bodyPr wrap="square" lIns="0" tIns="0" rIns="0" bIns="0" rtlCol="0" anchor="ctr"/>
           <a:lstStyle/>
           <a:p>
-            <a:pPr marL="0" indent="0" algn="ctr">
-              <a:buNone/>
-            </a:pPr>
-            <a:r>
-              <a:rPr lang="en-US" sz="900" b="1" kern="0" spc="100" dirty="0">
+            <a:pPr algn="ctr" indent="0" marL="0">
+              <a:buNone/>
+            </a:pPr>
+            <a:r>
+              <a:rPr lang="en-US" sz="900" b="1" spc="100" kern="0" dirty="0">
                 <a:solidFill>
                   <a:srgbClr val="FFFFFF"/>
                 </a:solidFill>
@@ -10709,14 +11102,14 @@
       </p:sp>
       <p:pic>
         <p:nvPicPr>
-          <p:cNvPr id="6" name="Image 0" descr="preencoded.png"/>
+          <p:cNvPr id="6" name="Image 0" descr="preencoded.png">    </p:cNvPr>
           <p:cNvPicPr>
             <a:picLocks noChangeAspect="1"/>
           </p:cNvPicPr>
           <p:nvPr/>
         </p:nvPicPr>
         <p:blipFill>
-          <a:blip r:embed="rId3"/>
+          <a:blip r:embed="rId1"/>
           <a:stretch>
             <a:fillRect/>
           </a:stretch>
@@ -10794,7 +11187,7 @@
           <a:bodyPr wrap="square" lIns="0" tIns="0" rIns="0" bIns="0" rtlCol="0" anchor="ctr"/>
           <a:lstStyle/>
           <a:p>
-            <a:pPr marL="0" indent="0" algn="ctr">
+            <a:pPr algn="ctr" indent="0" marL="0">
               <a:buNone/>
             </a:pPr>
             <a:r>
@@ -10833,7 +11226,7 @@
           <a:bodyPr wrap="square" lIns="0" tIns="0" rIns="0" bIns="0" rtlCol="0" anchor="ctr"/>
           <a:lstStyle/>
           <a:p>
-            <a:pPr marL="0" indent="0">
+            <a:pPr indent="0" marL="0">
               <a:buNone/>
             </a:pPr>
             <a:r>
@@ -10872,7 +11265,7 @@
           <a:bodyPr wrap="square" lIns="0" tIns="0" rIns="0" bIns="0" rtlCol="0" anchor="t"/>
           <a:lstStyle/>
           <a:p>
-            <a:pPr marL="0" indent="0">
+            <a:pPr indent="0" marL="0">
               <a:lnSpc>
                 <a:spcPct val="108000"/>
               </a:lnSpc>
@@ -10956,7 +11349,7 @@
           <a:bodyPr wrap="square" lIns="0" tIns="0" rIns="0" bIns="0" rtlCol="0" anchor="ctr"/>
           <a:lstStyle/>
           <a:p>
-            <a:pPr marL="0" indent="0" algn="ctr">
+            <a:pPr algn="ctr" indent="0" marL="0">
               <a:buNone/>
             </a:pPr>
             <a:r>
@@ -10995,7 +11388,7 @@
           <a:bodyPr wrap="square" lIns="0" tIns="0" rIns="0" bIns="0" rtlCol="0" anchor="ctr"/>
           <a:lstStyle/>
           <a:p>
-            <a:pPr marL="0" indent="0">
+            <a:pPr indent="0" marL="0">
               <a:buNone/>
             </a:pPr>
             <a:r>
@@ -11034,7 +11427,7 @@
           <a:bodyPr wrap="square" lIns="0" tIns="0" rIns="0" bIns="0" rtlCol="0" anchor="t"/>
           <a:lstStyle/>
           <a:p>
-            <a:pPr marL="0" indent="0">
+            <a:pPr indent="0" marL="0">
               <a:lnSpc>
                 <a:spcPct val="108000"/>
               </a:lnSpc>
@@ -11118,7 +11511,7 @@
           <a:bodyPr wrap="square" lIns="0" tIns="0" rIns="0" bIns="0" rtlCol="0" anchor="ctr"/>
           <a:lstStyle/>
           <a:p>
-            <a:pPr marL="0" indent="0" algn="ctr">
+            <a:pPr algn="ctr" indent="0" marL="0">
               <a:buNone/>
             </a:pPr>
             <a:r>
@@ -11157,7 +11550,7 @@
           <a:bodyPr wrap="square" lIns="0" tIns="0" rIns="0" bIns="0" rtlCol="0" anchor="ctr"/>
           <a:lstStyle/>
           <a:p>
-            <a:pPr marL="0" indent="0">
+            <a:pPr indent="0" marL="0">
               <a:buNone/>
             </a:pPr>
             <a:r>
@@ -11196,7 +11589,7 @@
           <a:bodyPr wrap="square" lIns="0" tIns="0" rIns="0" bIns="0" rtlCol="0" anchor="t"/>
           <a:lstStyle/>
           <a:p>
-            <a:pPr marL="0" indent="0">
+            <a:pPr indent="0" marL="0">
               <a:lnSpc>
                 <a:spcPct val="108000"/>
               </a:lnSpc>
@@ -11280,7 +11673,7 @@
           <a:bodyPr wrap="square" lIns="0" tIns="0" rIns="0" bIns="0" rtlCol="0" anchor="ctr"/>
           <a:lstStyle/>
           <a:p>
-            <a:pPr marL="0" indent="0" algn="ctr">
+            <a:pPr algn="ctr" indent="0" marL="0">
               <a:buNone/>
             </a:pPr>
             <a:r>
@@ -11319,7 +11712,7 @@
           <a:bodyPr wrap="square" lIns="0" tIns="0" rIns="0" bIns="0" rtlCol="0" anchor="ctr"/>
           <a:lstStyle/>
           <a:p>
-            <a:pPr marL="0" indent="0">
+            <a:pPr indent="0" marL="0">
               <a:buNone/>
             </a:pPr>
             <a:r>
@@ -11358,7 +11751,7 @@
           <a:bodyPr wrap="square" lIns="0" tIns="0" rIns="0" bIns="0" rtlCol="0" anchor="t"/>
           <a:lstStyle/>
           <a:p>
-            <a:pPr marL="0" indent="0">
+            <a:pPr indent="0" marL="0">
               <a:lnSpc>
                 <a:spcPct val="108000"/>
               </a:lnSpc>
@@ -11388,7 +11781,7 @@
         <p:spPr>
           <a:xfrm>
             <a:off x="566928" y="5074920"/>
-            <a:ext cx="11247120" cy="1051560"/>
+            <a:ext cx="11064240" cy="1051560"/>
           </a:xfrm>
           <a:prstGeom prst="roundRect">
             <a:avLst>
@@ -11403,14 +11796,34 @@
       </p:sp>
       <p:sp>
         <p:nvSpPr>
-          <p:cNvPr id="28" name="Text 25"/>
-          <p:cNvSpPr/>
-          <p:nvPr/>
-        </p:nvSpPr>
-        <p:spPr>
-          <a:xfrm>
-            <a:off x="786384" y="5202936"/>
-            <a:ext cx="10625328" cy="219456"/>
+          <p:cNvPr id="28" name="Shape 25"/>
+          <p:cNvSpPr/>
+          <p:nvPr/>
+        </p:nvSpPr>
+        <p:spPr>
+          <a:xfrm>
+            <a:off x="749808" y="5445252"/>
+            <a:ext cx="310896" cy="310896"/>
+          </a:xfrm>
+          <a:prstGeom prst="ellipse">
+            <a:avLst/>
+          </a:prstGeom>
+          <a:solidFill>
+            <a:srgbClr val="FFFFFF"/>
+          </a:solidFill>
+          <a:ln/>
+        </p:spPr>
+      </p:sp>
+      <p:sp>
+        <p:nvSpPr>
+          <p:cNvPr id="29" name="Text 26"/>
+          <p:cNvSpPr/>
+          <p:nvPr/>
+        </p:nvSpPr>
+        <p:spPr>
+          <a:xfrm>
+            <a:off x="749808" y="5445252"/>
+            <a:ext cx="310896" cy="310896"/>
           </a:xfrm>
           <a:prstGeom prst="rect">
             <a:avLst/>
@@ -11422,11 +11835,50 @@
           <a:bodyPr wrap="square" lIns="0" tIns="0" rIns="0" bIns="0" rtlCol="0" anchor="ctr"/>
           <a:lstStyle/>
           <a:p>
-            <a:pPr marL="0" indent="0">
-              <a:buNone/>
-            </a:pPr>
-            <a:r>
-              <a:rPr lang="en-US" sz="950" b="1" kern="0" spc="150" dirty="0">
+            <a:pPr algn="ctr" indent="0" marL="0">
+              <a:buNone/>
+            </a:pPr>
+            <a:r>
+              <a:rPr lang="en-US" sz="1200" b="1" dirty="0">
+                <a:solidFill>
+                  <a:srgbClr val="5A05F4"/>
+                </a:solidFill>
+                <a:latin typeface="Arial" pitchFamily="34" charset="0"/>
+                <a:ea typeface="Arial" pitchFamily="34" charset="-122"/>
+                <a:cs typeface="Arial" pitchFamily="34" charset="-120"/>
+              </a:rPr>
+              <a:t>?</a:t>
+            </a:r>
+            <a:endParaRPr lang="en-US" sz="1200" dirty="0"/>
+          </a:p>
+        </p:txBody>
+      </p:sp>
+      <p:sp>
+        <p:nvSpPr>
+          <p:cNvPr id="30" name="Text 27"/>
+          <p:cNvSpPr/>
+          <p:nvPr/>
+        </p:nvSpPr>
+        <p:spPr>
+          <a:xfrm>
+            <a:off x="1243584" y="5202936"/>
+            <a:ext cx="10168128" cy="219456"/>
+          </a:xfrm>
+          <a:prstGeom prst="rect">
+            <a:avLst/>
+          </a:prstGeom>
+          <a:noFill/>
+          <a:ln/>
+        </p:spPr>
+        <p:txBody>
+          <a:bodyPr wrap="square" lIns="0" tIns="0" rIns="0" bIns="0" rtlCol="0" anchor="ctr"/>
+          <a:lstStyle/>
+          <a:p>
+            <a:pPr indent="0" marL="0">
+              <a:buNone/>
+            </a:pPr>
+            <a:r>
+              <a:rPr lang="en-US" sz="950" b="1" spc="150" kern="0" dirty="0">
                 <a:solidFill>
                   <a:srgbClr val="FFFFFF"/>
                 </a:solidFill>
@@ -11442,14 +11894,14 @@
       </p:sp>
       <p:sp>
         <p:nvSpPr>
-          <p:cNvPr id="29" name="Text 26"/>
-          <p:cNvSpPr/>
-          <p:nvPr/>
-        </p:nvSpPr>
-        <p:spPr>
-          <a:xfrm>
-            <a:off x="786384" y="5458968"/>
-            <a:ext cx="10625328" cy="539496"/>
+          <p:cNvPr id="31" name="Text 28"/>
+          <p:cNvSpPr/>
+          <p:nvPr/>
+        </p:nvSpPr>
+        <p:spPr>
+          <a:xfrm>
+            <a:off x="1243584" y="5458968"/>
+            <a:ext cx="10168128" cy="539496"/>
           </a:xfrm>
           <a:prstGeom prst="rect">
             <a:avLst/>
@@ -11461,7 +11913,7 @@
           <a:bodyPr wrap="square" lIns="0" tIns="0" rIns="0" bIns="0" rtlCol="0" anchor="ctr"/>
           <a:lstStyle/>
           <a:p>
-            <a:pPr marL="0" indent="0">
+            <a:pPr indent="0" marL="0">
               <a:lnSpc>
                 <a:spcPct val="112000"/>
               </a:lnSpc>
@@ -11484,7 +11936,7 @@
       </p:sp>
       <p:sp>
         <p:nvSpPr>
-          <p:cNvPr id="30" name="Slide Number Placeholder 0"/>
+          <p:cNvPr id="25" name="Slide Number Placeholder 0"/>
           <p:cNvSpPr>
             <a:spLocks noGrp="1"/>
           </p:cNvSpPr>
@@ -11502,7 +11954,7 @@
           </a:prstGeom>
           <a:extLst>
             <a:ext uri="{C572A759-6A51-4108-AA02-DFA0A04FC94B}">
-              <ma14:wrappingTextBoxFlag xmlns:ma14="http://schemas.microsoft.com/office/mac/drawingml/2011/main" xmlns="" val="0"/>
+              <ma14:wrappingTextBoxFlag xmlns:ma14="http://schemas.microsoft.com/office/mac/drawingml/2011/main" val="0"/>
             </a:ext>
           </a:extLst>
         </p:spPr>
@@ -11523,7 +11975,7 @@
           <a:p>
             <a:pPr algn="l"/>
             <a:fld id="{F7021451-1387-4CA6-816F-3879F97B5CBC}" type="slidenum">
-              <a:rPr lang="en-US" b="0"/>
+              <a:rPr b="0" lang="en-US"/>
               <a:t>17</a:t>
             </a:fld>
             <a:endParaRPr lang="en-US"/>
@@ -11598,7 +12050,7 @@
           <a:bodyPr wrap="square" lIns="0" tIns="0" rIns="0" bIns="0" rtlCol="0" anchor="ctr"/>
           <a:lstStyle/>
           <a:p>
-            <a:pPr marL="0" indent="0">
+            <a:pPr indent="0" marL="0">
               <a:buNone/>
             </a:pPr>
             <a:r>
@@ -11659,11 +12111,11 @@
           <a:bodyPr wrap="square" lIns="0" tIns="0" rIns="0" bIns="0" rtlCol="0" anchor="ctr"/>
           <a:lstStyle/>
           <a:p>
-            <a:pPr marL="0" indent="0" algn="ctr">
-              <a:buNone/>
-            </a:pPr>
-            <a:r>
-              <a:rPr lang="en-US" sz="900" b="1" kern="0" spc="100" dirty="0">
+            <a:pPr algn="ctr" indent="0" marL="0">
+              <a:buNone/>
+            </a:pPr>
+            <a:r>
+              <a:rPr lang="en-US" sz="900" b="1" spc="100" kern="0" dirty="0">
                 <a:solidFill>
                   <a:srgbClr val="FFFFFF"/>
                 </a:solidFill>
@@ -11679,14 +12131,14 @@
       </p:sp>
       <p:pic>
         <p:nvPicPr>
-          <p:cNvPr id="6" name="Image 0" descr="preencoded.png"/>
+          <p:cNvPr id="6" name="Image 0" descr="preencoded.png">    </p:cNvPr>
           <p:cNvPicPr>
             <a:picLocks noChangeAspect="1"/>
           </p:cNvPicPr>
           <p:nvPr/>
         </p:nvPicPr>
         <p:blipFill>
-          <a:blip r:embed="rId3"/>
+          <a:blip r:embed="rId1"/>
           <a:stretch>
             <a:fillRect/>
           </a:stretch>
@@ -11742,7 +12194,7 @@
           <a:bodyPr wrap="square" lIns="0" tIns="0" rIns="0" bIns="0" rtlCol="0" anchor="ctr"/>
           <a:lstStyle/>
           <a:p>
-            <a:pPr marL="0" indent="0" algn="ctr">
+            <a:pPr algn="ctr" indent="0" marL="0">
               <a:buNone/>
             </a:pPr>
             <a:r>
@@ -11781,7 +12233,7 @@
           <a:bodyPr wrap="square" lIns="0" tIns="0" rIns="0" bIns="0" rtlCol="0" anchor="ctr"/>
           <a:lstStyle/>
           <a:p>
-            <a:pPr marL="0" indent="0">
+            <a:pPr indent="0" marL="0">
               <a:buNone/>
             </a:pPr>
             <a:r>
@@ -11795,6 +12247,9 @@
               </a:rPr>
               <a:t>Прогін із чистого клону  </a:t>
             </a:r>
+            <a:pPr indent="0" marL="0">
+              <a:buNone/>
+            </a:pPr>
             <a:r>
               <a:rPr lang="en-US" sz="1200" dirty="0">
                 <a:solidFill>
@@ -11851,7 +12306,7 @@
           <a:bodyPr wrap="square" lIns="0" tIns="0" rIns="0" bIns="0" rtlCol="0" anchor="ctr"/>
           <a:lstStyle/>
           <a:p>
-            <a:pPr marL="0" indent="0" algn="ctr">
+            <a:pPr algn="ctr" indent="0" marL="0">
               <a:buNone/>
             </a:pPr>
             <a:r>
@@ -11890,7 +12345,7 @@
           <a:bodyPr wrap="square" lIns="0" tIns="0" rIns="0" bIns="0" rtlCol="0" anchor="ctr"/>
           <a:lstStyle/>
           <a:p>
-            <a:pPr marL="0" indent="0">
+            <a:pPr indent="0" marL="0">
               <a:buNone/>
             </a:pPr>
             <a:r>
@@ -11904,6 +12359,9 @@
               </a:rPr>
               <a:t>Інцидент за рунбуком  </a:t>
             </a:r>
+            <a:pPr indent="0" marL="0">
+              <a:buNone/>
+            </a:pPr>
             <a:r>
               <a:rPr lang="en-US" sz="1200" dirty="0">
                 <a:solidFill>
@@ -11960,7 +12418,7 @@
           <a:bodyPr wrap="square" lIns="0" tIns="0" rIns="0" bIns="0" rtlCol="0" anchor="ctr"/>
           <a:lstStyle/>
           <a:p>
-            <a:pPr marL="0" indent="0" algn="ctr">
+            <a:pPr algn="ctr" indent="0" marL="0">
               <a:buNone/>
             </a:pPr>
             <a:r>
@@ -11999,7 +12457,7 @@
           <a:bodyPr wrap="square" lIns="0" tIns="0" rIns="0" bIns="0" rtlCol="0" anchor="ctr"/>
           <a:lstStyle/>
           <a:p>
-            <a:pPr marL="0" indent="0">
+            <a:pPr indent="0" marL="0">
               <a:buNone/>
             </a:pPr>
             <a:r>
@@ -12013,6 +12471,9 @@
               </a:rPr>
               <a:t>KPI-проходка  </a:t>
             </a:r>
+            <a:pPr indent="0" marL="0">
+              <a:buNone/>
+            </a:pPr>
             <a:r>
               <a:rPr lang="en-US" sz="1200" dirty="0">
                 <a:solidFill>
@@ -12069,7 +12530,7 @@
           <a:bodyPr wrap="square" lIns="0" tIns="0" rIns="0" bIns="0" rtlCol="0" anchor="ctr"/>
           <a:lstStyle/>
           <a:p>
-            <a:pPr marL="0" indent="0" algn="ctr">
+            <a:pPr algn="ctr" indent="0" marL="0">
               <a:buNone/>
             </a:pPr>
             <a:r>
@@ -12108,7 +12569,7 @@
           <a:bodyPr wrap="square" lIns="0" tIns="0" rIns="0" bIns="0" rtlCol="0" anchor="ctr"/>
           <a:lstStyle/>
           <a:p>
-            <a:pPr marL="0" indent="0">
+            <a:pPr indent="0" marL="0">
               <a:buNone/>
             </a:pPr>
             <a:r>
@@ -12122,6 +12583,9 @@
               </a:rPr>
               <a:t>Свій 30-day rollout  </a:t>
             </a:r>
+            <a:pPr indent="0" marL="0">
+              <a:buNone/>
+            </a:pPr>
             <a:r>
               <a:rPr lang="en-US" sz="1200" dirty="0">
                 <a:solidFill>
@@ -12178,7 +12642,7 @@
           <a:bodyPr wrap="square" lIns="0" tIns="0" rIns="0" bIns="0" rtlCol="0" anchor="ctr"/>
           <a:lstStyle/>
           <a:p>
-            <a:pPr marL="0" indent="0" algn="ctr">
+            <a:pPr algn="ctr" indent="0" marL="0">
               <a:buNone/>
             </a:pPr>
             <a:r>
@@ -12217,7 +12681,7 @@
           <a:bodyPr wrap="square" lIns="0" tIns="0" rIns="0" bIns="0" rtlCol="0" anchor="ctr"/>
           <a:lstStyle/>
           <a:p>
-            <a:pPr marL="0" indent="0">
+            <a:pPr indent="0" marL="0">
               <a:buNone/>
             </a:pPr>
             <a:r>
@@ -12231,6 +12695,9 @@
               </a:rPr>
               <a:t>/metrics · опційно  </a:t>
             </a:r>
+            <a:pPr indent="0" marL="0">
+              <a:buNone/>
+            </a:pPr>
             <a:r>
               <a:rPr lang="en-US" sz="1200" dirty="0">
                 <a:solidFill>
@@ -12266,7 +12733,7 @@
           </a:prstGeom>
           <a:extLst>
             <a:ext uri="{C572A759-6A51-4108-AA02-DFA0A04FC94B}">
-              <ma14:wrappingTextBoxFlag xmlns:ma14="http://schemas.microsoft.com/office/mac/drawingml/2011/main" xmlns="" val="0"/>
+              <ma14:wrappingTextBoxFlag xmlns:ma14="http://schemas.microsoft.com/office/mac/drawingml/2011/main" val="0"/>
             </a:ext>
           </a:extLst>
         </p:spPr>
@@ -12287,7 +12754,7 @@
           <a:p>
             <a:pPr algn="l"/>
             <a:fld id="{F7021451-1387-4CA6-816F-3879F97B5CBC}" type="slidenum">
-              <a:rPr lang="en-US" b="0"/>
+              <a:rPr b="0" lang="en-US"/>
               <a:t>18</a:t>
             </a:fld>
             <a:endParaRPr lang="en-US"/>
@@ -12340,11 +12807,11 @@
           <a:bodyPr wrap="square" lIns="0" tIns="0" rIns="0" bIns="0" rtlCol="0" anchor="ctr"/>
           <a:lstStyle/>
           <a:p>
-            <a:pPr marL="0" indent="0">
-              <a:buNone/>
-            </a:pPr>
-            <a:r>
-              <a:rPr lang="en-US" sz="1200" b="1" kern="0" spc="400" dirty="0">
+            <a:pPr indent="0" marL="0">
+              <a:buNone/>
+            </a:pPr>
+            <a:r>
+              <a:rPr lang="en-US" sz="1200" b="1" spc="400" kern="0" dirty="0">
                 <a:solidFill>
                   <a:srgbClr val="FFFFFF"/>
                 </a:solidFill>
@@ -12379,7 +12846,7 @@
           <a:bodyPr wrap="square" lIns="0" tIns="0" rIns="0" bIns="0" rtlCol="0" anchor="ctr"/>
           <a:lstStyle/>
           <a:p>
-            <a:pPr marL="0" indent="0">
+            <a:pPr indent="0" marL="0">
               <a:buNone/>
             </a:pPr>
             <a:r>
@@ -12418,7 +12885,7 @@
           <a:bodyPr wrap="square" lIns="0" tIns="0" rIns="0" bIns="0" rtlCol="0" anchor="t"/>
           <a:lstStyle/>
           <a:p>
-            <a:pPr marL="0" indent="0">
+            <a:pPr indent="0" marL="0">
               <a:buNone/>
             </a:pPr>
             <a:r>
@@ -12504,7 +12971,7 @@
           <a:bodyPr wrap="square" lIns="0" tIns="0" rIns="0" bIns="0" rtlCol="0" anchor="ctr"/>
           <a:lstStyle/>
           <a:p>
-            <a:pPr marL="0" indent="0">
+            <a:pPr indent="0" marL="0">
               <a:buNone/>
             </a:pPr>
             <a:r>
@@ -12543,7 +13010,7 @@
           <a:bodyPr wrap="square" lIns="0" tIns="0" rIns="0" bIns="0" rtlCol="0" anchor="t"/>
           <a:lstStyle/>
           <a:p>
-            <a:pPr marL="0" indent="0">
+            <a:pPr indent="0" marL="0">
               <a:lnSpc>
                 <a:spcPct val="100000"/>
               </a:lnSpc>
@@ -12612,11 +13079,11 @@
           <a:bodyPr wrap="square" lIns="0" tIns="0" rIns="0" bIns="0" rtlCol="0" anchor="ctr"/>
           <a:lstStyle/>
           <a:p>
-            <a:pPr marL="0" indent="0" algn="ctr">
-              <a:buNone/>
-            </a:pPr>
-            <a:r>
-              <a:rPr lang="en-US" sz="900" b="1" kern="0" spc="100" dirty="0">
+            <a:pPr algn="ctr" indent="0" marL="0">
+              <a:buNone/>
+            </a:pPr>
+            <a:r>
+              <a:rPr lang="en-US" sz="900" b="1" spc="100" kern="0" dirty="0">
                 <a:solidFill>
                   <a:srgbClr val="5A05F4"/>
                 </a:solidFill>
@@ -12632,14 +13099,14 @@
       </p:sp>
       <p:pic>
         <p:nvPicPr>
-          <p:cNvPr id="7" name="Image 0" descr="preencoded.png"/>
+          <p:cNvPr id="7" name="Image 0" descr="preencoded.png">    </p:cNvPr>
           <p:cNvPicPr>
             <a:picLocks noChangeAspect="1"/>
           </p:cNvPicPr>
           <p:nvPr/>
         </p:nvPicPr>
         <p:blipFill>
-          <a:blip r:embed="rId3"/>
+          <a:blip r:embed="rId1"/>
           <a:stretch>
             <a:fillRect/>
           </a:stretch>
@@ -12717,7 +13184,7 @@
           <a:bodyPr wrap="square" lIns="0" tIns="0" rIns="0" bIns="0" rtlCol="0" anchor="ctr"/>
           <a:lstStyle/>
           <a:p>
-            <a:pPr marL="0" indent="0" algn="ctr">
+            <a:pPr algn="ctr" indent="0" marL="0">
               <a:buNone/>
             </a:pPr>
             <a:r>
@@ -12756,7 +13223,7 @@
           <a:bodyPr wrap="square" lIns="0" tIns="0" rIns="0" bIns="0" rtlCol="0" anchor="ctr"/>
           <a:lstStyle/>
           <a:p>
-            <a:pPr marL="0" indent="0">
+            <a:pPr indent="0" marL="0">
               <a:buNone/>
             </a:pPr>
             <a:r>
@@ -12795,7 +13262,7 @@
           <a:bodyPr wrap="square" lIns="0" tIns="0" rIns="0" bIns="0" rtlCol="0" anchor="t"/>
           <a:lstStyle/>
           <a:p>
-            <a:pPr marL="0" indent="0">
+            <a:pPr indent="0" marL="0">
               <a:lnSpc>
                 <a:spcPct val="108000"/>
               </a:lnSpc>
@@ -12879,7 +13346,7 @@
           <a:bodyPr wrap="square" lIns="0" tIns="0" rIns="0" bIns="0" rtlCol="0" anchor="ctr"/>
           <a:lstStyle/>
           <a:p>
-            <a:pPr marL="0" indent="0" algn="ctr">
+            <a:pPr algn="ctr" indent="0" marL="0">
               <a:buNone/>
             </a:pPr>
             <a:r>
@@ -12918,7 +13385,7 @@
           <a:bodyPr wrap="square" lIns="0" tIns="0" rIns="0" bIns="0" rtlCol="0" anchor="ctr"/>
           <a:lstStyle/>
           <a:p>
-            <a:pPr marL="0" indent="0">
+            <a:pPr indent="0" marL="0">
               <a:buNone/>
             </a:pPr>
             <a:r>
@@ -12957,7 +13424,7 @@
           <a:bodyPr wrap="square" lIns="0" tIns="0" rIns="0" bIns="0" rtlCol="0" anchor="t"/>
           <a:lstStyle/>
           <a:p>
-            <a:pPr marL="0" indent="0">
+            <a:pPr indent="0" marL="0">
               <a:lnSpc>
                 <a:spcPct val="108000"/>
               </a:lnSpc>
@@ -13041,7 +13508,7 @@
           <a:bodyPr wrap="square" lIns="0" tIns="0" rIns="0" bIns="0" rtlCol="0" anchor="ctr"/>
           <a:lstStyle/>
           <a:p>
-            <a:pPr marL="0" indent="0" algn="ctr">
+            <a:pPr algn="ctr" indent="0" marL="0">
               <a:buNone/>
             </a:pPr>
             <a:r>
@@ -13080,7 +13547,7 @@
           <a:bodyPr wrap="square" lIns="0" tIns="0" rIns="0" bIns="0" rtlCol="0" anchor="ctr"/>
           <a:lstStyle/>
           <a:p>
-            <a:pPr marL="0" indent="0">
+            <a:pPr indent="0" marL="0">
               <a:buNone/>
             </a:pPr>
             <a:r>
@@ -13119,7 +13586,7 @@
           <a:bodyPr wrap="square" lIns="0" tIns="0" rIns="0" bIns="0" rtlCol="0" anchor="t"/>
           <a:lstStyle/>
           <a:p>
-            <a:pPr marL="0" indent="0">
+            <a:pPr indent="0" marL="0">
               <a:lnSpc>
                 <a:spcPct val="108000"/>
               </a:lnSpc>
@@ -13203,7 +13670,7 @@
           <a:bodyPr wrap="square" lIns="0" tIns="0" rIns="0" bIns="0" rtlCol="0" anchor="ctr"/>
           <a:lstStyle/>
           <a:p>
-            <a:pPr marL="0" indent="0" algn="ctr">
+            <a:pPr algn="ctr" indent="0" marL="0">
               <a:buNone/>
             </a:pPr>
             <a:r>
@@ -13242,7 +13709,7 @@
           <a:bodyPr wrap="square" lIns="0" tIns="0" rIns="0" bIns="0" rtlCol="0" anchor="ctr"/>
           <a:lstStyle/>
           <a:p>
-            <a:pPr marL="0" indent="0">
+            <a:pPr indent="0" marL="0">
               <a:buNone/>
             </a:pPr>
             <a:r>
@@ -13281,7 +13748,7 @@
           <a:bodyPr wrap="square" lIns="0" tIns="0" rIns="0" bIns="0" rtlCol="0" anchor="t"/>
           <a:lstStyle/>
           <a:p>
-            <a:pPr marL="0" indent="0">
+            <a:pPr indent="0" marL="0">
               <a:lnSpc>
                 <a:spcPct val="108000"/>
               </a:lnSpc>
@@ -13365,7 +13832,7 @@
           <a:bodyPr wrap="square" lIns="0" tIns="0" rIns="0" bIns="0" rtlCol="0" anchor="ctr"/>
           <a:lstStyle/>
           <a:p>
-            <a:pPr marL="0" indent="0" algn="ctr">
+            <a:pPr algn="ctr" indent="0" marL="0">
               <a:buNone/>
             </a:pPr>
             <a:r>
@@ -13404,7 +13871,7 @@
           <a:bodyPr wrap="square" lIns="0" tIns="0" rIns="0" bIns="0" rtlCol="0" anchor="ctr"/>
           <a:lstStyle/>
           <a:p>
-            <a:pPr marL="0" indent="0">
+            <a:pPr indent="0" marL="0">
               <a:buNone/>
             </a:pPr>
             <a:r>
@@ -13443,7 +13910,7 @@
           <a:bodyPr wrap="square" lIns="0" tIns="0" rIns="0" bIns="0" rtlCol="0" anchor="t"/>
           <a:lstStyle/>
           <a:p>
-            <a:pPr marL="0" indent="0">
+            <a:pPr indent="0" marL="0">
               <a:lnSpc>
                 <a:spcPct val="108000"/>
               </a:lnSpc>
@@ -13466,7 +13933,7 @@
       </p:sp>
       <p:sp>
         <p:nvSpPr>
-          <p:cNvPr id="33" name="Slide Number Placeholder 0"/>
+          <p:cNvPr id="25" name="Slide Number Placeholder 0"/>
           <p:cNvSpPr>
             <a:spLocks noGrp="1"/>
           </p:cNvSpPr>
@@ -13484,7 +13951,7 @@
           </a:prstGeom>
           <a:extLst>
             <a:ext uri="{C572A759-6A51-4108-AA02-DFA0A04FC94B}">
-              <ma14:wrappingTextBoxFlag xmlns:ma14="http://schemas.microsoft.com/office/mac/drawingml/2011/main" xmlns="" val="0"/>
+              <ma14:wrappingTextBoxFlag xmlns:ma14="http://schemas.microsoft.com/office/mac/drawingml/2011/main" val="0"/>
             </a:ext>
           </a:extLst>
         </p:spPr>
@@ -13505,7 +13972,7 @@
           <a:p>
             <a:pPr algn="l"/>
             <a:fld id="{F7021451-1387-4CA6-816F-3879F97B5CBC}" type="slidenum">
-              <a:rPr lang="en-US" b="0"/>
+              <a:rPr b="0" lang="en-US"/>
               <a:t>2</a:t>
             </a:fld>
             <a:endParaRPr lang="en-US"/>
@@ -13580,7 +14047,7 @@
           <a:bodyPr wrap="square" lIns="0" tIns="0" rIns="0" bIns="0" rtlCol="0" anchor="ctr"/>
           <a:lstStyle/>
           <a:p>
-            <a:pPr marL="0" indent="0">
+            <a:pPr indent="0" marL="0">
               <a:buNone/>
             </a:pPr>
             <a:r>
@@ -13646,11 +14113,11 @@
           <a:bodyPr wrap="square" lIns="0" tIns="0" rIns="0" bIns="0" rtlCol="0" anchor="ctr"/>
           <a:lstStyle/>
           <a:p>
-            <a:pPr marL="0" indent="0" algn="ctr">
-              <a:buNone/>
-            </a:pPr>
-            <a:r>
-              <a:rPr lang="en-US" sz="900" b="1" kern="0" spc="100" dirty="0">
+            <a:pPr algn="ctr" indent="0" marL="0">
+              <a:buNone/>
+            </a:pPr>
+            <a:r>
+              <a:rPr lang="en-US" sz="900" b="1" spc="100" kern="0" dirty="0">
                 <a:solidFill>
                   <a:srgbClr val="1A4FBF"/>
                 </a:solidFill>
@@ -13666,14 +14133,14 @@
       </p:sp>
       <p:pic>
         <p:nvPicPr>
-          <p:cNvPr id="6" name="Image 0" descr="preencoded.png"/>
+          <p:cNvPr id="6" name="Image 0" descr="preencoded.png">    </p:cNvPr>
           <p:cNvPicPr>
             <a:picLocks noChangeAspect="1"/>
           </p:cNvPicPr>
           <p:nvPr/>
         </p:nvPicPr>
         <p:blipFill>
-          <a:blip r:embed="rId3"/>
+          <a:blip r:embed="rId1"/>
           <a:stretch>
             <a:fillRect/>
           </a:stretch>
@@ -13731,7 +14198,7 @@
           <a:bodyPr wrap="square" lIns="0" tIns="0" rIns="0" bIns="0" rtlCol="0" anchor="ctr"/>
           <a:lstStyle/>
           <a:p>
-            <a:pPr marL="0" indent="0">
+            <a:pPr indent="0" marL="0">
               <a:buNone/>
             </a:pPr>
             <a:r>
@@ -13770,7 +14237,7 @@
           <a:bodyPr wrap="square" lIns="0" tIns="0" rIns="0" bIns="0" rtlCol="0" anchor="t"/>
           <a:lstStyle/>
           <a:p>
-            <a:pPr marL="0" indent="0">
+            <a:pPr indent="0" marL="0">
               <a:lnSpc>
                 <a:spcPct val="108000"/>
               </a:lnSpc>
@@ -13834,7 +14301,7 @@
           <a:bodyPr wrap="square" lIns="0" tIns="0" rIns="0" bIns="0" rtlCol="0" anchor="ctr"/>
           <a:lstStyle/>
           <a:p>
-            <a:pPr marL="0" indent="0">
+            <a:pPr indent="0" marL="0">
               <a:buNone/>
             </a:pPr>
             <a:r>
@@ -13873,7 +14340,7 @@
           <a:bodyPr wrap="square" lIns="0" tIns="0" rIns="0" bIns="0" rtlCol="0" anchor="t"/>
           <a:lstStyle/>
           <a:p>
-            <a:pPr marL="0" indent="0">
+            <a:pPr indent="0" marL="0">
               <a:lnSpc>
                 <a:spcPct val="108000"/>
               </a:lnSpc>
@@ -13937,7 +14404,7 @@
           <a:bodyPr wrap="square" lIns="0" tIns="0" rIns="0" bIns="0" rtlCol="0" anchor="ctr"/>
           <a:lstStyle/>
           <a:p>
-            <a:pPr marL="0" indent="0">
+            <a:pPr indent="0" marL="0">
               <a:buNone/>
             </a:pPr>
             <a:r>
@@ -13976,7 +14443,7 @@
           <a:bodyPr wrap="square" lIns="0" tIns="0" rIns="0" bIns="0" rtlCol="0" anchor="t"/>
           <a:lstStyle/>
           <a:p>
-            <a:pPr marL="0" indent="0">
+            <a:pPr indent="0" marL="0">
               <a:lnSpc>
                 <a:spcPct val="108000"/>
               </a:lnSpc>
@@ -14045,7 +14512,7 @@
           <a:bodyPr wrap="square" lIns="0" tIns="0" rIns="0" bIns="0" rtlCol="0" anchor="ctr"/>
           <a:lstStyle/>
           <a:p>
-            <a:pPr marL="0" indent="0">
+            <a:pPr indent="0" marL="0">
               <a:lnSpc>
                 <a:spcPct val="112000"/>
               </a:lnSpc>
@@ -14086,7 +14553,7 @@
           </a:prstGeom>
           <a:extLst>
             <a:ext uri="{C572A759-6A51-4108-AA02-DFA0A04FC94B}">
-              <ma14:wrappingTextBoxFlag xmlns:ma14="http://schemas.microsoft.com/office/mac/drawingml/2011/main" xmlns="" val="0"/>
+              <ma14:wrappingTextBoxFlag xmlns:ma14="http://schemas.microsoft.com/office/mac/drawingml/2011/main" val="0"/>
             </a:ext>
           </a:extLst>
         </p:spPr>
@@ -14107,7 +14574,7 @@
           <a:p>
             <a:pPr algn="l"/>
             <a:fld id="{F7021451-1387-4CA6-816F-3879F97B5CBC}" type="slidenum">
-              <a:rPr lang="en-US" b="0"/>
+              <a:rPr b="0" lang="en-US"/>
               <a:t>20</a:t>
             </a:fld>
             <a:endParaRPr lang="en-US"/>
@@ -14182,7 +14649,7 @@
           <a:bodyPr wrap="square" lIns="0" tIns="0" rIns="0" bIns="0" rtlCol="0" anchor="ctr"/>
           <a:lstStyle/>
           <a:p>
-            <a:pPr marL="0" indent="0">
+            <a:pPr indent="0" marL="0">
               <a:buNone/>
             </a:pPr>
             <a:r>
@@ -14248,11 +14715,11 @@
           <a:bodyPr wrap="square" lIns="0" tIns="0" rIns="0" bIns="0" rtlCol="0" anchor="ctr"/>
           <a:lstStyle/>
           <a:p>
-            <a:pPr marL="0" indent="0" algn="ctr">
-              <a:buNone/>
-            </a:pPr>
-            <a:r>
-              <a:rPr lang="en-US" sz="900" b="1" kern="0" spc="100" dirty="0">
+            <a:pPr algn="ctr" indent="0" marL="0">
+              <a:buNone/>
+            </a:pPr>
+            <a:r>
+              <a:rPr lang="en-US" sz="900" b="1" spc="100" kern="0" dirty="0">
                 <a:solidFill>
                   <a:srgbClr val="1A4FBF"/>
                 </a:solidFill>
@@ -14268,14 +14735,14 @@
       </p:sp>
       <p:pic>
         <p:nvPicPr>
-          <p:cNvPr id="6" name="Image 0" descr="preencoded.png"/>
+          <p:cNvPr id="6" name="Image 0" descr="preencoded.png">    </p:cNvPr>
           <p:cNvPicPr>
             <a:picLocks noChangeAspect="1"/>
           </p:cNvPicPr>
           <p:nvPr/>
         </p:nvPicPr>
         <p:blipFill>
-          <a:blip r:embed="rId3"/>
+          <a:blip r:embed="rId1"/>
           <a:stretch>
             <a:fillRect/>
           </a:stretch>
@@ -14405,7 +14872,7 @@
           <a:bodyPr wrap="square" lIns="0" tIns="0" rIns="0" bIns="0" rtlCol="0" anchor="ctr"/>
           <a:lstStyle/>
           <a:p>
-            <a:pPr marL="0" indent="0">
+            <a:pPr indent="0" marL="0">
               <a:buNone/>
             </a:pPr>
             <a:r>
@@ -14511,7 +14978,7 @@
           <a:bodyPr wrap="square" lIns="0" tIns="0" rIns="0" bIns="0" rtlCol="0" anchor="ctr"/>
           <a:lstStyle/>
           <a:p>
-            <a:pPr marL="0" indent="0">
+            <a:pPr indent="0" marL="0">
               <a:buNone/>
             </a:pPr>
             <a:r>
@@ -14617,7 +15084,7 @@
           <a:bodyPr wrap="square" lIns="0" tIns="0" rIns="0" bIns="0" rtlCol="0" anchor="ctr"/>
           <a:lstStyle/>
           <a:p>
-            <a:pPr marL="0" indent="0">
+            <a:pPr indent="0" marL="0">
               <a:buNone/>
             </a:pPr>
             <a:r>
@@ -14723,7 +15190,7 @@
           <a:bodyPr wrap="square" lIns="0" tIns="0" rIns="0" bIns="0" rtlCol="0" anchor="ctr"/>
           <a:lstStyle/>
           <a:p>
-            <a:pPr marL="0" indent="0">
+            <a:pPr indent="0" marL="0">
               <a:buNone/>
             </a:pPr>
             <a:r>
@@ -14762,7 +15229,7 @@
           <a:bodyPr wrap="square" lIns="0" tIns="0" rIns="0" bIns="0" rtlCol="0" anchor="ctr"/>
           <a:lstStyle/>
           <a:p>
-            <a:pPr marL="0" indent="0">
+            <a:pPr indent="0" marL="0">
               <a:buNone/>
             </a:pPr>
             <a:r>
@@ -14800,7 +15267,7 @@
           </a:prstGeom>
           <a:extLst>
             <a:ext uri="{C572A759-6A51-4108-AA02-DFA0A04FC94B}">
-              <ma14:wrappingTextBoxFlag xmlns:ma14="http://schemas.microsoft.com/office/mac/drawingml/2011/main" xmlns="" val="0"/>
+              <ma14:wrappingTextBoxFlag xmlns:ma14="http://schemas.microsoft.com/office/mac/drawingml/2011/main" val="0"/>
             </a:ext>
           </a:extLst>
         </p:spPr>
@@ -14821,7 +15288,7 @@
           <a:p>
             <a:pPr algn="l"/>
             <a:fld id="{F7021451-1387-4CA6-816F-3879F97B5CBC}" type="slidenum">
-              <a:rPr lang="en-US" b="0"/>
+              <a:rPr b="0" lang="en-US"/>
               <a:t>21</a:t>
             </a:fld>
             <a:endParaRPr lang="en-US"/>
@@ -14896,7 +15363,7 @@
           <a:bodyPr wrap="square" lIns="0" tIns="0" rIns="0" bIns="0" rtlCol="0" anchor="ctr"/>
           <a:lstStyle/>
           <a:p>
-            <a:pPr marL="0" indent="0">
+            <a:pPr indent="0" marL="0">
               <a:buNone/>
             </a:pPr>
             <a:r>
@@ -14962,11 +15429,11 @@
           <a:bodyPr wrap="square" lIns="0" tIns="0" rIns="0" bIns="0" rtlCol="0" anchor="ctr"/>
           <a:lstStyle/>
           <a:p>
-            <a:pPr marL="0" indent="0" algn="ctr">
-              <a:buNone/>
-            </a:pPr>
-            <a:r>
-              <a:rPr lang="en-US" sz="900" b="1" kern="0" spc="100" dirty="0">
+            <a:pPr algn="ctr" indent="0" marL="0">
+              <a:buNone/>
+            </a:pPr>
+            <a:r>
+              <a:rPr lang="en-US" sz="900" b="1" spc="100" kern="0" dirty="0">
                 <a:solidFill>
                   <a:srgbClr val="1A4FBF"/>
                 </a:solidFill>
@@ -14982,14 +15449,14 @@
       </p:sp>
       <p:pic>
         <p:nvPicPr>
-          <p:cNvPr id="6" name="Image 0" descr="preencoded.png"/>
+          <p:cNvPr id="6" name="Image 0" descr="preencoded.png">    </p:cNvPr>
           <p:cNvPicPr>
             <a:picLocks noChangeAspect="1"/>
           </p:cNvPicPr>
           <p:nvPr/>
         </p:nvPicPr>
         <p:blipFill>
-          <a:blip r:embed="rId3"/>
+          <a:blip r:embed="rId1"/>
           <a:stretch>
             <a:fillRect/>
           </a:stretch>
@@ -15117,7 +15584,7 @@
           <a:bodyPr wrap="square" lIns="0" tIns="0" rIns="0" bIns="0" rtlCol="0" anchor="ctr"/>
           <a:lstStyle/>
           <a:p>
-            <a:pPr marL="0" indent="0">
+            <a:pPr indent="0" marL="0">
               <a:buNone/>
             </a:pPr>
             <a:r>
@@ -15131,6 +15598,9 @@
               </a:rPr>
               <a:t>«Працює на моїй машині»   </a:t>
             </a:r>
+            <a:pPr indent="0" marL="0">
+              <a:buNone/>
+            </a:pPr>
             <a:r>
               <a:rPr lang="en-US" sz="1200" dirty="0">
                 <a:solidFill>
@@ -15259,7 +15729,7 @@
           <a:bodyPr wrap="square" lIns="0" tIns="0" rIns="0" bIns="0" rtlCol="0" anchor="ctr"/>
           <a:lstStyle/>
           <a:p>
-            <a:pPr marL="0" indent="0">
+            <a:pPr indent="0" marL="0">
               <a:buNone/>
             </a:pPr>
             <a:r>
@@ -15273,6 +15743,9 @@
               </a:rPr>
               <a:t>Постмортем із винними   </a:t>
             </a:r>
+            <a:pPr indent="0" marL="0">
+              <a:buNone/>
+            </a:pPr>
             <a:r>
               <a:rPr lang="en-US" sz="1200" dirty="0">
                 <a:solidFill>
@@ -15401,7 +15874,7 @@
           <a:bodyPr wrap="square" lIns="0" tIns="0" rIns="0" bIns="0" rtlCol="0" anchor="ctr"/>
           <a:lstStyle/>
           <a:p>
-            <a:pPr marL="0" indent="0">
+            <a:pPr indent="0" marL="0">
               <a:buNone/>
             </a:pPr>
             <a:r>
@@ -15415,6 +15888,9 @@
               </a:rPr>
               <a:t>Демо без артефактів   </a:t>
             </a:r>
+            <a:pPr indent="0" marL="0">
+              <a:buNone/>
+            </a:pPr>
             <a:r>
               <a:rPr lang="en-US" sz="1200" dirty="0">
                 <a:solidFill>
@@ -15543,7 +16019,7 @@
           <a:bodyPr wrap="square" lIns="0" tIns="0" rIns="0" bIns="0" rtlCol="0" anchor="ctr"/>
           <a:lstStyle/>
           <a:p>
-            <a:pPr marL="0" indent="0">
+            <a:pPr indent="0" marL="0">
               <a:buNone/>
             </a:pPr>
             <a:r>
@@ -15557,6 +16033,9 @@
               </a:rPr>
               <a:t>Наступний шар «бо модно»   </a:t>
             </a:r>
+            <a:pPr indent="0" marL="0">
+              <a:buNone/>
+            </a:pPr>
             <a:r>
               <a:rPr lang="en-US" sz="1200" dirty="0">
                 <a:solidFill>
@@ -15574,7 +16053,7 @@
       </p:sp>
       <p:sp>
         <p:nvSpPr>
-          <p:cNvPr id="27" name="Slide Number Placeholder 0"/>
+          <p:cNvPr id="25" name="Slide Number Placeholder 0"/>
           <p:cNvSpPr>
             <a:spLocks noGrp="1"/>
           </p:cNvSpPr>
@@ -15592,7 +16071,7 @@
           </a:prstGeom>
           <a:extLst>
             <a:ext uri="{C572A759-6A51-4108-AA02-DFA0A04FC94B}">
-              <ma14:wrappingTextBoxFlag xmlns:ma14="http://schemas.microsoft.com/office/mac/drawingml/2011/main" xmlns="" val="0"/>
+              <ma14:wrappingTextBoxFlag xmlns:ma14="http://schemas.microsoft.com/office/mac/drawingml/2011/main" val="0"/>
             </a:ext>
           </a:extLst>
         </p:spPr>
@@ -15613,7 +16092,7 @@
           <a:p>
             <a:pPr algn="l"/>
             <a:fld id="{F7021451-1387-4CA6-816F-3879F97B5CBC}" type="slidenum">
-              <a:rPr lang="en-US" b="0"/>
+              <a:rPr b="0" lang="en-US"/>
               <a:t>22</a:t>
             </a:fld>
             <a:endParaRPr lang="en-US"/>
@@ -15688,7 +16167,7 @@
           <a:bodyPr wrap="square" lIns="0" tIns="0" rIns="0" bIns="0" rtlCol="0" anchor="ctr"/>
           <a:lstStyle/>
           <a:p>
-            <a:pPr marL="0" indent="0">
+            <a:pPr indent="0" marL="0">
               <a:buNone/>
             </a:pPr>
             <a:r>
@@ -15749,11 +16228,11 @@
           <a:bodyPr wrap="square" lIns="0" tIns="0" rIns="0" bIns="0" rtlCol="0" anchor="ctr"/>
           <a:lstStyle/>
           <a:p>
-            <a:pPr marL="0" indent="0" algn="ctr">
-              <a:buNone/>
-            </a:pPr>
-            <a:r>
-              <a:rPr lang="en-US" sz="900" b="1" kern="0" spc="100" dirty="0">
+            <a:pPr algn="ctr" indent="0" marL="0">
+              <a:buNone/>
+            </a:pPr>
+            <a:r>
+              <a:rPr lang="en-US" sz="900" b="1" spc="100" kern="0" dirty="0">
                 <a:solidFill>
                   <a:srgbClr val="FFFFFF"/>
                 </a:solidFill>
@@ -15769,14 +16248,14 @@
       </p:sp>
       <p:pic>
         <p:nvPicPr>
-          <p:cNvPr id="6" name="Image 0" descr="preencoded.png"/>
+          <p:cNvPr id="6" name="Image 0" descr="preencoded.png">    </p:cNvPr>
           <p:cNvPicPr>
             <a:picLocks noChangeAspect="1"/>
           </p:cNvPicPr>
           <p:nvPr/>
         </p:nvPicPr>
         <p:blipFill>
-          <a:blip r:embed="rId3"/>
+          <a:blip r:embed="rId1"/>
           <a:stretch>
             <a:fillRect/>
           </a:stretch>
@@ -15839,7 +16318,7 @@
           <a:bodyPr wrap="square" lIns="0" tIns="0" rIns="0" bIns="0" rtlCol="0" anchor="ctr"/>
           <a:lstStyle/>
           <a:p>
-            <a:pPr marL="0" indent="0">
+            <a:pPr indent="0" marL="0">
               <a:buNone/>
             </a:pPr>
             <a:r>
@@ -15878,7 +16357,7 @@
           <a:bodyPr wrap="square" lIns="0" tIns="0" rIns="0" bIns="0" rtlCol="0" anchor="ctr"/>
           <a:lstStyle/>
           <a:p>
-            <a:pPr marL="0" indent="0">
+            <a:pPr indent="0" marL="0">
               <a:buNone/>
             </a:pPr>
             <a:r>
@@ -15917,11 +16396,11 @@
           <a:bodyPr wrap="square" lIns="0" tIns="0" rIns="0" bIns="0" rtlCol="0" anchor="ctr"/>
           <a:lstStyle/>
           <a:p>
-            <a:pPr marL="0" indent="0">
-              <a:buNone/>
-            </a:pPr>
-            <a:r>
-              <a:rPr lang="en-US" sz="950" b="1" kern="0" spc="100" dirty="0">
+            <a:pPr indent="0" marL="0">
+              <a:buNone/>
+            </a:pPr>
+            <a:r>
+              <a:rPr lang="en-US" sz="950" b="1" spc="100" kern="0" dirty="0">
                 <a:solidFill>
                   <a:srgbClr val="6B6B6B"/>
                 </a:solidFill>
@@ -15956,7 +16435,7 @@
           <a:bodyPr wrap="square" lIns="0" tIns="0" rIns="0" bIns="0" rtlCol="0" anchor="ctr"/>
           <a:lstStyle/>
           <a:p>
-            <a:pPr marL="0" indent="0">
+            <a:pPr indent="0" marL="0">
               <a:buNone/>
             </a:pPr>
             <a:r>
@@ -15970,6 +16449,9 @@
               </a:rPr>
               <a:t>•  </a:t>
             </a:r>
+            <a:pPr indent="0" marL="0">
+              <a:buNone/>
+            </a:pPr>
             <a:r>
               <a:rPr lang="en-US" sz="1250" dirty="0">
                 <a:solidFill>
@@ -16006,7 +16488,7 @@
           <a:bodyPr wrap="square" lIns="0" tIns="0" rIns="0" bIns="0" rtlCol="0" anchor="ctr"/>
           <a:lstStyle/>
           <a:p>
-            <a:pPr marL="0" indent="0">
+            <a:pPr indent="0" marL="0">
               <a:buNone/>
             </a:pPr>
             <a:r>
@@ -16020,6 +16502,9 @@
               </a:rPr>
               <a:t>•  </a:t>
             </a:r>
+            <a:pPr indent="0" marL="0">
+              <a:buNone/>
+            </a:pPr>
             <a:r>
               <a:rPr lang="en-US" sz="1250" dirty="0">
                 <a:solidFill>
@@ -16056,7 +16541,7 @@
           <a:bodyPr wrap="square" lIns="0" tIns="0" rIns="0" bIns="0" rtlCol="0" anchor="ctr"/>
           <a:lstStyle/>
           <a:p>
-            <a:pPr marL="0" indent="0">
+            <a:pPr indent="0" marL="0">
               <a:buNone/>
             </a:pPr>
             <a:r>
@@ -16070,6 +16555,9 @@
               </a:rPr>
               <a:t>•  </a:t>
             </a:r>
+            <a:pPr indent="0" marL="0">
+              <a:buNone/>
+            </a:pPr>
             <a:r>
               <a:rPr lang="en-US" sz="1250" dirty="0">
                 <a:solidFill>
@@ -16106,7 +16594,7 @@
           <a:bodyPr wrap="square" lIns="0" tIns="0" rIns="0" bIns="0" rtlCol="0" anchor="ctr"/>
           <a:lstStyle/>
           <a:p>
-            <a:pPr marL="0" indent="0">
+            <a:pPr indent="0" marL="0">
               <a:buNone/>
             </a:pPr>
             <a:r>
@@ -16120,6 +16608,9 @@
               </a:rPr>
               <a:t>•  </a:t>
             </a:r>
+            <a:pPr indent="0" marL="0">
+              <a:buNone/>
+            </a:pPr>
             <a:r>
               <a:rPr lang="en-US" sz="1250" dirty="0">
                 <a:solidFill>
@@ -16178,7 +16669,7 @@
           <a:bodyPr wrap="square" lIns="0" tIns="0" rIns="0" bIns="0" rtlCol="0" anchor="ctr"/>
           <a:lstStyle/>
           <a:p>
-            <a:pPr marL="0" indent="0">
+            <a:pPr indent="0" marL="0">
               <a:buNone/>
             </a:pPr>
             <a:r>
@@ -16217,7 +16708,7 @@
           <a:bodyPr wrap="square" lIns="0" tIns="0" rIns="0" bIns="0" rtlCol="0" anchor="t"/>
           <a:lstStyle/>
           <a:p>
-            <a:pPr marL="0" indent="0">
+            <a:pPr indent="0" marL="0">
               <a:lnSpc>
                 <a:spcPct val="108000"/>
               </a:lnSpc>
@@ -16237,7 +16728,7 @@
             <a:endParaRPr lang="en-US" sz="1200" dirty="0"/>
           </a:p>
           <a:p>
-            <a:pPr marL="0" indent="0">
+            <a:pPr indent="0" marL="0">
               <a:lnSpc>
                 <a:spcPct val="108000"/>
               </a:lnSpc>
@@ -16278,7 +16769,7 @@
           </a:prstGeom>
           <a:extLst>
             <a:ext uri="{C572A759-6A51-4108-AA02-DFA0A04FC94B}">
-              <ma14:wrappingTextBoxFlag xmlns:ma14="http://schemas.microsoft.com/office/mac/drawingml/2011/main" xmlns="" val="0"/>
+              <ma14:wrappingTextBoxFlag xmlns:ma14="http://schemas.microsoft.com/office/mac/drawingml/2011/main" val="0"/>
             </a:ext>
           </a:extLst>
         </p:spPr>
@@ -16299,7 +16790,7 @@
           <a:p>
             <a:pPr algn="l"/>
             <a:fld id="{F7021451-1387-4CA6-816F-3879F97B5CBC}" type="slidenum">
-              <a:rPr lang="en-US" b="0"/>
+              <a:rPr b="0" lang="en-US"/>
               <a:t>23</a:t>
             </a:fld>
             <a:endParaRPr lang="en-US"/>
@@ -16352,11 +16843,11 @@
           <a:bodyPr wrap="square" lIns="0" tIns="0" rIns="0" bIns="0" rtlCol="0" anchor="ctr"/>
           <a:lstStyle/>
           <a:p>
-            <a:pPr marL="0" indent="0">
-              <a:buNone/>
-            </a:pPr>
-            <a:r>
-              <a:rPr lang="en-US" sz="1200" b="1" kern="0" spc="400" dirty="0">
+            <a:pPr indent="0" marL="0">
+              <a:buNone/>
+            </a:pPr>
+            <a:r>
+              <a:rPr lang="en-US" sz="1200" b="1" spc="400" kern="0" dirty="0">
                 <a:solidFill>
                   <a:srgbClr val="FFFFFF"/>
                 </a:solidFill>
@@ -16391,11 +16882,11 @@
           <a:bodyPr wrap="square" lIns="0" tIns="0" rIns="0" bIns="0" rtlCol="0" anchor="ctr"/>
           <a:lstStyle/>
           <a:p>
-            <a:pPr marL="0" indent="0">
-              <a:buNone/>
-            </a:pPr>
-            <a:r>
-              <a:rPr lang="en-US" sz="1100" b="1" kern="0" spc="300" dirty="0">
+            <a:pPr indent="0" marL="0">
+              <a:buNone/>
+            </a:pPr>
+            <a:r>
+              <a:rPr lang="en-US" sz="1100" b="1" spc="300" kern="0" dirty="0">
                 <a:solidFill>
                   <a:srgbClr val="C4B3F5"/>
                 </a:solidFill>
@@ -16450,7 +16941,7 @@
           <a:bodyPr wrap="square" lIns="0" tIns="0" rIns="0" bIns="0" rtlCol="0" anchor="t"/>
           <a:lstStyle/>
           <a:p>
-            <a:pPr marL="0" indent="0">
+            <a:pPr indent="0" marL="0">
               <a:lnSpc>
                 <a:spcPct val="110000"/>
               </a:lnSpc>
@@ -16512,7 +17003,7 @@
           <a:bodyPr wrap="square" lIns="0" tIns="0" rIns="0" bIns="0" rtlCol="0" anchor="t"/>
           <a:lstStyle/>
           <a:p>
-            <a:pPr marL="0" indent="0">
+            <a:pPr indent="0" marL="0">
               <a:lnSpc>
                 <a:spcPct val="110000"/>
               </a:lnSpc>
@@ -16574,7 +17065,7 @@
           <a:bodyPr wrap="square" lIns="0" tIns="0" rIns="0" bIns="0" rtlCol="0" anchor="t"/>
           <a:lstStyle/>
           <a:p>
-            <a:pPr marL="0" indent="0">
+            <a:pPr indent="0" marL="0">
               <a:lnSpc>
                 <a:spcPct val="110000"/>
               </a:lnSpc>
@@ -16636,7 +17127,7 @@
           <a:bodyPr wrap="square" lIns="0" tIns="0" rIns="0" bIns="0" rtlCol="0" anchor="t"/>
           <a:lstStyle/>
           <a:p>
-            <a:pPr marL="0" indent="0">
+            <a:pPr indent="0" marL="0">
               <a:lnSpc>
                 <a:spcPct val="110000"/>
               </a:lnSpc>
@@ -16698,7 +17189,7 @@
           <a:bodyPr wrap="square" lIns="0" tIns="0" rIns="0" bIns="0" rtlCol="0" anchor="t"/>
           <a:lstStyle/>
           <a:p>
-            <a:pPr marL="0" indent="0">
+            <a:pPr indent="0" marL="0">
               <a:lnSpc>
                 <a:spcPct val="110000"/>
               </a:lnSpc>
@@ -16767,7 +17258,7 @@
           <a:bodyPr wrap="square" lIns="0" tIns="0" rIns="0" bIns="0" rtlCol="0" anchor="ctr"/>
           <a:lstStyle/>
           <a:p>
-            <a:pPr marL="0" indent="0">
+            <a:pPr indent="0" marL="0">
               <a:buNone/>
             </a:pPr>
             <a:r>
@@ -16806,7 +17297,7 @@
           <a:bodyPr wrap="square" lIns="0" tIns="0" rIns="0" bIns="0" rtlCol="0" anchor="t"/>
           <a:lstStyle/>
           <a:p>
-            <a:pPr marL="0" indent="0">
+            <a:pPr indent="0" marL="0">
               <a:lnSpc>
                 <a:spcPct val="115000"/>
               </a:lnSpc>
@@ -16873,11 +17364,11 @@
           <a:bodyPr wrap="square" lIns="0" tIns="0" rIns="0" bIns="0" rtlCol="0" anchor="ctr"/>
           <a:lstStyle/>
           <a:p>
-            <a:pPr marL="0" indent="0">
-              <a:buNone/>
-            </a:pPr>
-            <a:r>
-              <a:rPr lang="en-US" sz="1200" b="1" kern="0" spc="400" dirty="0">
+            <a:pPr indent="0" marL="0">
+              <a:buNone/>
+            </a:pPr>
+            <a:r>
+              <a:rPr lang="en-US" sz="1200" b="1" spc="400" kern="0" dirty="0">
                 <a:solidFill>
                   <a:srgbClr val="FFFFFF"/>
                 </a:solidFill>
@@ -16912,7 +17403,7 @@
           <a:bodyPr wrap="square" lIns="0" tIns="0" rIns="0" bIns="0" rtlCol="0" anchor="ctr"/>
           <a:lstStyle/>
           <a:p>
-            <a:pPr marL="0" indent="0">
+            <a:pPr indent="0" marL="0">
               <a:buNone/>
             </a:pPr>
             <a:r>
@@ -16998,7 +17489,7 @@
           <a:bodyPr wrap="square" lIns="0" tIns="0" rIns="0" bIns="0" rtlCol="0" anchor="ctr"/>
           <a:lstStyle/>
           <a:p>
-            <a:pPr marL="0" indent="0">
+            <a:pPr indent="0" marL="0">
               <a:buNone/>
             </a:pPr>
             <a:r>
@@ -17064,11 +17555,11 @@
           <a:bodyPr wrap="square" lIns="0" tIns="0" rIns="0" bIns="0" rtlCol="0" anchor="ctr"/>
           <a:lstStyle/>
           <a:p>
-            <a:pPr marL="0" indent="0" algn="ctr">
-              <a:buNone/>
-            </a:pPr>
-            <a:r>
-              <a:rPr lang="en-US" sz="900" b="1" kern="0" spc="100" dirty="0">
+            <a:pPr algn="ctr" indent="0" marL="0">
+              <a:buNone/>
+            </a:pPr>
+            <a:r>
+              <a:rPr lang="en-US" sz="900" b="1" spc="100" kern="0" dirty="0">
                 <a:solidFill>
                   <a:srgbClr val="5A05F4"/>
                 </a:solidFill>
@@ -17084,14 +17575,14 @@
       </p:sp>
       <p:pic>
         <p:nvPicPr>
-          <p:cNvPr id="6" name="Image 0" descr="preencoded.png"/>
+          <p:cNvPr id="6" name="Image 0" descr="preencoded.png">    </p:cNvPr>
           <p:cNvPicPr>
             <a:picLocks noChangeAspect="1"/>
           </p:cNvPicPr>
           <p:nvPr/>
         </p:nvPicPr>
         <p:blipFill>
-          <a:blip r:embed="rId3"/>
+          <a:blip r:embed="rId1"/>
           <a:stretch>
             <a:fillRect/>
           </a:stretch>
@@ -17169,7 +17660,7 @@
           <a:bodyPr wrap="square" lIns="0" tIns="0" rIns="0" bIns="0" rtlCol="0" anchor="ctr"/>
           <a:lstStyle/>
           <a:p>
-            <a:pPr marL="0" indent="0" algn="ctr">
+            <a:pPr algn="ctr" indent="0" marL="0">
               <a:buNone/>
             </a:pPr>
             <a:r>
@@ -17208,7 +17699,7 @@
           <a:bodyPr wrap="square" lIns="0" tIns="0" rIns="0" bIns="0" rtlCol="0" anchor="ctr"/>
           <a:lstStyle/>
           <a:p>
-            <a:pPr marL="0" indent="0">
+            <a:pPr indent="0" marL="0">
               <a:buNone/>
             </a:pPr>
             <a:r>
@@ -17289,7 +17780,7 @@
           <a:bodyPr wrap="square" lIns="0" tIns="0" rIns="0" bIns="0" rtlCol="0" anchor="ctr"/>
           <a:lstStyle/>
           <a:p>
-            <a:pPr marL="0" indent="0" algn="ctr">
+            <a:pPr algn="ctr" indent="0" marL="0">
               <a:buNone/>
             </a:pPr>
             <a:r>
@@ -17328,7 +17819,7 @@
           <a:bodyPr wrap="square" lIns="0" tIns="0" rIns="0" bIns="0" rtlCol="0" anchor="ctr"/>
           <a:lstStyle/>
           <a:p>
-            <a:pPr marL="0" indent="0">
+            <a:pPr indent="0" marL="0">
               <a:buNone/>
             </a:pPr>
             <a:r>
@@ -17409,7 +17900,7 @@
           <a:bodyPr wrap="square" lIns="0" tIns="0" rIns="0" bIns="0" rtlCol="0" anchor="ctr"/>
           <a:lstStyle/>
           <a:p>
-            <a:pPr marL="0" indent="0" algn="ctr">
+            <a:pPr algn="ctr" indent="0" marL="0">
               <a:buNone/>
             </a:pPr>
             <a:r>
@@ -17448,7 +17939,7 @@
           <a:bodyPr wrap="square" lIns="0" tIns="0" rIns="0" bIns="0" rtlCol="0" anchor="ctr"/>
           <a:lstStyle/>
           <a:p>
-            <a:pPr marL="0" indent="0">
+            <a:pPr indent="0" marL="0">
               <a:buNone/>
             </a:pPr>
             <a:r>
@@ -17529,7 +18020,7 @@
           <a:bodyPr wrap="square" lIns="0" tIns="0" rIns="0" bIns="0" rtlCol="0" anchor="ctr"/>
           <a:lstStyle/>
           <a:p>
-            <a:pPr marL="0" indent="0" algn="ctr">
+            <a:pPr algn="ctr" indent="0" marL="0">
               <a:buNone/>
             </a:pPr>
             <a:r>
@@ -17568,7 +18059,7 @@
           <a:bodyPr wrap="square" lIns="0" tIns="0" rIns="0" bIns="0" rtlCol="0" anchor="ctr"/>
           <a:lstStyle/>
           <a:p>
-            <a:pPr marL="0" indent="0">
+            <a:pPr indent="0" marL="0">
               <a:buNone/>
             </a:pPr>
             <a:r>
@@ -17649,7 +18140,7 @@
           <a:bodyPr wrap="square" lIns="0" tIns="0" rIns="0" bIns="0" rtlCol="0" anchor="ctr"/>
           <a:lstStyle/>
           <a:p>
-            <a:pPr marL="0" indent="0" algn="ctr">
+            <a:pPr algn="ctr" indent="0" marL="0">
               <a:buNone/>
             </a:pPr>
             <a:r>
@@ -17688,7 +18179,7 @@
           <a:bodyPr wrap="square" lIns="0" tIns="0" rIns="0" bIns="0" rtlCol="0" anchor="ctr"/>
           <a:lstStyle/>
           <a:p>
-            <a:pPr marL="0" indent="0">
+            <a:pPr indent="0" marL="0">
               <a:buNone/>
             </a:pPr>
             <a:r>
@@ -17769,7 +18260,7 @@
           <a:bodyPr wrap="square" lIns="0" tIns="0" rIns="0" bIns="0" rtlCol="0" anchor="ctr"/>
           <a:lstStyle/>
           <a:p>
-            <a:pPr marL="0" indent="0" algn="ctr">
+            <a:pPr algn="ctr" indent="0" marL="0">
               <a:buNone/>
             </a:pPr>
             <a:r>
@@ -17808,7 +18299,7 @@
           <a:bodyPr wrap="square" lIns="0" tIns="0" rIns="0" bIns="0" rtlCol="0" anchor="ctr"/>
           <a:lstStyle/>
           <a:p>
-            <a:pPr marL="0" indent="0">
+            <a:pPr indent="0" marL="0">
               <a:buNone/>
             </a:pPr>
             <a:r>
@@ -17889,7 +18380,7 @@
           <a:bodyPr wrap="square" lIns="0" tIns="0" rIns="0" bIns="0" rtlCol="0" anchor="ctr"/>
           <a:lstStyle/>
           <a:p>
-            <a:pPr marL="0" indent="0" algn="ctr">
+            <a:pPr algn="ctr" indent="0" marL="0">
               <a:buNone/>
             </a:pPr>
             <a:r>
@@ -17928,7 +18419,7 @@
           <a:bodyPr wrap="square" lIns="0" tIns="0" rIns="0" bIns="0" rtlCol="0" anchor="ctr"/>
           <a:lstStyle/>
           <a:p>
-            <a:pPr marL="0" indent="0">
+            <a:pPr indent="0" marL="0">
               <a:buNone/>
             </a:pPr>
             <a:r>
@@ -18009,7 +18500,7 @@
           <a:bodyPr wrap="square" lIns="0" tIns="0" rIns="0" bIns="0" rtlCol="0" anchor="ctr"/>
           <a:lstStyle/>
           <a:p>
-            <a:pPr marL="0" indent="0" algn="ctr">
+            <a:pPr algn="ctr" indent="0" marL="0">
               <a:buNone/>
             </a:pPr>
             <a:r>
@@ -18048,7 +18539,7 @@
           <a:bodyPr wrap="square" lIns="0" tIns="0" rIns="0" bIns="0" rtlCol="0" anchor="ctr"/>
           <a:lstStyle/>
           <a:p>
-            <a:pPr marL="0" indent="0">
+            <a:pPr indent="0" marL="0">
               <a:buNone/>
             </a:pPr>
             <a:r>
@@ -18129,7 +18620,7 @@
           <a:bodyPr wrap="square" lIns="0" tIns="0" rIns="0" bIns="0" rtlCol="0" anchor="ctr"/>
           <a:lstStyle/>
           <a:p>
-            <a:pPr marL="0" indent="0" algn="ctr">
+            <a:pPr algn="ctr" indent="0" marL="0">
               <a:buNone/>
             </a:pPr>
             <a:r>
@@ -18168,7 +18659,7 @@
           <a:bodyPr wrap="square" lIns="0" tIns="0" rIns="0" bIns="0" rtlCol="0" anchor="ctr"/>
           <a:lstStyle/>
           <a:p>
-            <a:pPr marL="0" indent="0">
+            <a:pPr indent="0" marL="0">
               <a:buNone/>
             </a:pPr>
             <a:r>
@@ -18249,7 +18740,7 @@
           <a:bodyPr wrap="square" lIns="0" tIns="0" rIns="0" bIns="0" rtlCol="0" anchor="ctr"/>
           <a:lstStyle/>
           <a:p>
-            <a:pPr marL="0" indent="0" algn="ctr">
+            <a:pPr algn="ctr" indent="0" marL="0">
               <a:buNone/>
             </a:pPr>
             <a:r>
@@ -18288,7 +18779,7 @@
           <a:bodyPr wrap="square" lIns="0" tIns="0" rIns="0" bIns="0" rtlCol="0" anchor="ctr"/>
           <a:lstStyle/>
           <a:p>
-            <a:pPr marL="0" indent="0">
+            <a:pPr indent="0" marL="0">
               <a:buNone/>
             </a:pPr>
             <a:r>
@@ -18369,7 +18860,7 @@
           <a:bodyPr wrap="square" lIns="0" tIns="0" rIns="0" bIns="0" rtlCol="0" anchor="ctr"/>
           <a:lstStyle/>
           <a:p>
-            <a:pPr marL="0" indent="0" algn="ctr">
+            <a:pPr algn="ctr" indent="0" marL="0">
               <a:buNone/>
             </a:pPr>
             <a:r>
@@ -18408,7 +18899,7 @@
           <a:bodyPr wrap="square" lIns="0" tIns="0" rIns="0" bIns="0" rtlCol="0" anchor="ctr"/>
           <a:lstStyle/>
           <a:p>
-            <a:pPr marL="0" indent="0">
+            <a:pPr indent="0" marL="0">
               <a:buNone/>
             </a:pPr>
             <a:r>
@@ -18489,7 +18980,7 @@
           <a:bodyPr wrap="square" lIns="0" tIns="0" rIns="0" bIns="0" rtlCol="0" anchor="ctr"/>
           <a:lstStyle/>
           <a:p>
-            <a:pPr marL="0" indent="0" algn="ctr">
+            <a:pPr algn="ctr" indent="0" marL="0">
               <a:buNone/>
             </a:pPr>
             <a:r>
@@ -18528,7 +19019,7 @@
           <a:bodyPr wrap="square" lIns="0" tIns="0" rIns="0" bIns="0" rtlCol="0" anchor="ctr"/>
           <a:lstStyle/>
           <a:p>
-            <a:pPr marL="0" indent="0">
+            <a:pPr indent="0" marL="0">
               <a:buNone/>
             </a:pPr>
             <a:r>
@@ -18555,7 +19046,7 @@
         <p:spPr>
           <a:xfrm>
             <a:off x="566928" y="5779008"/>
-            <a:ext cx="10927080" cy="402336"/>
+            <a:ext cx="11064240" cy="402336"/>
           </a:xfrm>
           <a:prstGeom prst="roundRect">
             <a:avLst>
@@ -18594,7 +19085,7 @@
           <a:bodyPr wrap="square" lIns="0" tIns="0" rIns="0" bIns="0" rtlCol="0" anchor="ctr"/>
           <a:lstStyle/>
           <a:p>
-            <a:pPr marL="0" indent="0">
+            <a:pPr indent="0" marL="0">
               <a:lnSpc>
                 <a:spcPct val="112000"/>
               </a:lnSpc>
@@ -18617,7 +19108,7 @@
       </p:sp>
       <p:sp>
         <p:nvSpPr>
-          <p:cNvPr id="57" name="Slide Number Placeholder 0"/>
+          <p:cNvPr id="25" name="Slide Number Placeholder 0"/>
           <p:cNvSpPr>
             <a:spLocks noGrp="1"/>
           </p:cNvSpPr>
@@ -18635,7 +19126,7 @@
           </a:prstGeom>
           <a:extLst>
             <a:ext uri="{C572A759-6A51-4108-AA02-DFA0A04FC94B}">
-              <ma14:wrappingTextBoxFlag xmlns:ma14="http://schemas.microsoft.com/office/mac/drawingml/2011/main" xmlns="" val="0"/>
+              <ma14:wrappingTextBoxFlag xmlns:ma14="http://schemas.microsoft.com/office/mac/drawingml/2011/main" val="0"/>
             </a:ext>
           </a:extLst>
         </p:spPr>
@@ -18656,7 +19147,7 @@
           <a:p>
             <a:pPr algn="l"/>
             <a:fld id="{F7021451-1387-4CA6-816F-3879F97B5CBC}" type="slidenum">
-              <a:rPr lang="en-US" b="0"/>
+              <a:rPr b="0" lang="en-US"/>
               <a:t>3</a:t>
             </a:fld>
             <a:endParaRPr lang="en-US"/>
@@ -18731,7 +19222,7 @@
           <a:bodyPr wrap="square" lIns="0" tIns="0" rIns="0" bIns="0" rtlCol="0" anchor="ctr"/>
           <a:lstStyle/>
           <a:p>
-            <a:pPr marL="0" indent="0">
+            <a:pPr indent="0" marL="0">
               <a:buNone/>
             </a:pPr>
             <a:r>
@@ -18770,7 +19261,7 @@
           <a:bodyPr wrap="square" lIns="0" tIns="0" rIns="0" bIns="0" rtlCol="0" anchor="t"/>
           <a:lstStyle/>
           <a:p>
-            <a:pPr marL="0" indent="0">
+            <a:pPr indent="0" marL="0">
               <a:lnSpc>
                 <a:spcPct val="100000"/>
               </a:lnSpc>
@@ -18839,11 +19330,11 @@
           <a:bodyPr wrap="square" lIns="0" tIns="0" rIns="0" bIns="0" rtlCol="0" anchor="ctr"/>
           <a:lstStyle/>
           <a:p>
-            <a:pPr marL="0" indent="0" algn="ctr">
-              <a:buNone/>
-            </a:pPr>
-            <a:r>
-              <a:rPr lang="en-US" sz="900" b="1" kern="0" spc="100" dirty="0">
+            <a:pPr algn="ctr" indent="0" marL="0">
+              <a:buNone/>
+            </a:pPr>
+            <a:r>
+              <a:rPr lang="en-US" sz="900" b="1" spc="100" kern="0" dirty="0">
                 <a:solidFill>
                   <a:srgbClr val="5A05F4"/>
                 </a:solidFill>
@@ -18859,14 +19350,14 @@
       </p:sp>
       <p:pic>
         <p:nvPicPr>
-          <p:cNvPr id="7" name="Image 0" descr="preencoded.png"/>
+          <p:cNvPr id="7" name="Image 0" descr="preencoded.png">    </p:cNvPr>
           <p:cNvPicPr>
             <a:picLocks noChangeAspect="1"/>
           </p:cNvPicPr>
           <p:nvPr/>
         </p:nvPicPr>
         <p:blipFill>
-          <a:blip r:embed="rId3"/>
+          <a:blip r:embed="rId1"/>
           <a:stretch>
             <a:fillRect/>
           </a:stretch>
@@ -18929,7 +19420,7 @@
           <a:bodyPr wrap="square" lIns="0" tIns="0" rIns="0" bIns="0" rtlCol="0" anchor="ctr"/>
           <a:lstStyle/>
           <a:p>
-            <a:pPr marL="0" indent="0">
+            <a:pPr indent="0" marL="0">
               <a:buNone/>
             </a:pPr>
             <a:r>
@@ -18968,7 +19459,7 @@
           <a:bodyPr wrap="square" lIns="0" tIns="0" rIns="0" bIns="0" rtlCol="0" anchor="t"/>
           <a:lstStyle/>
           <a:p>
-            <a:pPr marL="0" indent="0">
+            <a:pPr indent="0" marL="0">
               <a:lnSpc>
                 <a:spcPct val="105000"/>
               </a:lnSpc>
@@ -19037,7 +19528,7 @@
           <a:bodyPr wrap="square" lIns="0" tIns="0" rIns="0" bIns="0" rtlCol="0" anchor="ctr"/>
           <a:lstStyle/>
           <a:p>
-            <a:pPr marL="0" indent="0">
+            <a:pPr indent="0" marL="0">
               <a:buNone/>
             </a:pPr>
             <a:r>
@@ -19076,7 +19567,7 @@
           <a:bodyPr wrap="square" lIns="0" tIns="0" rIns="0" bIns="0" rtlCol="0" anchor="t"/>
           <a:lstStyle/>
           <a:p>
-            <a:pPr marL="0" indent="0">
+            <a:pPr indent="0" marL="0">
               <a:lnSpc>
                 <a:spcPct val="105000"/>
               </a:lnSpc>
@@ -19145,7 +19636,7 @@
           <a:bodyPr wrap="square" lIns="0" tIns="0" rIns="0" bIns="0" rtlCol="0" anchor="ctr"/>
           <a:lstStyle/>
           <a:p>
-            <a:pPr marL="0" indent="0">
+            <a:pPr indent="0" marL="0">
               <a:buNone/>
             </a:pPr>
             <a:r>
@@ -19184,7 +19675,7 @@
           <a:bodyPr wrap="square" lIns="0" tIns="0" rIns="0" bIns="0" rtlCol="0" anchor="t"/>
           <a:lstStyle/>
           <a:p>
-            <a:pPr marL="0" indent="0">
+            <a:pPr indent="0" marL="0">
               <a:lnSpc>
                 <a:spcPct val="105000"/>
               </a:lnSpc>
@@ -19253,7 +19744,7 @@
           <a:bodyPr wrap="square" lIns="0" tIns="0" rIns="0" bIns="0" rtlCol="0" anchor="ctr"/>
           <a:lstStyle/>
           <a:p>
-            <a:pPr marL="0" indent="0">
+            <a:pPr indent="0" marL="0">
               <a:buNone/>
             </a:pPr>
             <a:r>
@@ -19292,7 +19783,7 @@
           <a:bodyPr wrap="square" lIns="0" tIns="0" rIns="0" bIns="0" rtlCol="0" anchor="t"/>
           <a:lstStyle/>
           <a:p>
-            <a:pPr marL="0" indent="0">
+            <a:pPr indent="0" marL="0">
               <a:lnSpc>
                 <a:spcPct val="105000"/>
               </a:lnSpc>
@@ -19361,7 +19852,7 @@
           <a:bodyPr wrap="square" lIns="0" tIns="0" rIns="0" bIns="0" rtlCol="0" anchor="ctr"/>
           <a:lstStyle/>
           <a:p>
-            <a:pPr marL="0" indent="0">
+            <a:pPr indent="0" marL="0">
               <a:buNone/>
             </a:pPr>
             <a:r>
@@ -19400,7 +19891,7 @@
           <a:bodyPr wrap="square" lIns="0" tIns="0" rIns="0" bIns="0" rtlCol="0" anchor="t"/>
           <a:lstStyle/>
           <a:p>
-            <a:pPr marL="0" indent="0">
+            <a:pPr indent="0" marL="0">
               <a:lnSpc>
                 <a:spcPct val="105000"/>
               </a:lnSpc>
@@ -19469,7 +19960,7 @@
           <a:bodyPr wrap="square" lIns="0" tIns="0" rIns="0" bIns="0" rtlCol="0" anchor="ctr"/>
           <a:lstStyle/>
           <a:p>
-            <a:pPr marL="0" indent="0">
+            <a:pPr indent="0" marL="0">
               <a:buNone/>
             </a:pPr>
             <a:r>
@@ -19508,7 +19999,7 @@
           <a:bodyPr wrap="square" lIns="0" tIns="0" rIns="0" bIns="0" rtlCol="0" anchor="t"/>
           <a:lstStyle/>
           <a:p>
-            <a:pPr marL="0" indent="0">
+            <a:pPr indent="0" marL="0">
               <a:lnSpc>
                 <a:spcPct val="105000"/>
               </a:lnSpc>
@@ -19577,7 +20068,7 @@
           <a:bodyPr wrap="square" lIns="0" tIns="0" rIns="0" bIns="0" rtlCol="0" anchor="ctr"/>
           <a:lstStyle/>
           <a:p>
-            <a:pPr marL="0" indent="0">
+            <a:pPr indent="0" marL="0">
               <a:lnSpc>
                 <a:spcPct val="112000"/>
               </a:lnSpc>
@@ -19600,7 +20091,7 @@
       </p:sp>
       <p:sp>
         <p:nvSpPr>
-          <p:cNvPr id="28" name="Slide Number Placeholder 0"/>
+          <p:cNvPr id="25" name="Slide Number Placeholder 0"/>
           <p:cNvSpPr>
             <a:spLocks noGrp="1"/>
           </p:cNvSpPr>
@@ -19618,7 +20109,7 @@
           </a:prstGeom>
           <a:extLst>
             <a:ext uri="{C572A759-6A51-4108-AA02-DFA0A04FC94B}">
-              <ma14:wrappingTextBoxFlag xmlns:ma14="http://schemas.microsoft.com/office/mac/drawingml/2011/main" xmlns="" val="0"/>
+              <ma14:wrappingTextBoxFlag xmlns:ma14="http://schemas.microsoft.com/office/mac/drawingml/2011/main" val="0"/>
             </a:ext>
           </a:extLst>
         </p:spPr>
@@ -19639,7 +20130,7 @@
           <a:p>
             <a:pPr algn="l"/>
             <a:fld id="{F7021451-1387-4CA6-816F-3879F97B5CBC}" type="slidenum">
-              <a:rPr lang="en-US" b="0"/>
+              <a:rPr b="0" lang="en-US"/>
               <a:t>4</a:t>
             </a:fld>
             <a:endParaRPr lang="en-US"/>
@@ -19692,11 +20183,11 @@
           <a:bodyPr wrap="square" lIns="0" tIns="0" rIns="0" bIns="0" rtlCol="0" anchor="ctr"/>
           <a:lstStyle/>
           <a:p>
-            <a:pPr marL="0" indent="0">
-              <a:buNone/>
-            </a:pPr>
-            <a:r>
-              <a:rPr lang="en-US" sz="1200" b="1" kern="0" spc="400" dirty="0">
+            <a:pPr indent="0" marL="0">
+              <a:buNone/>
+            </a:pPr>
+            <a:r>
+              <a:rPr lang="en-US" sz="1200" b="1" spc="400" kern="0" dirty="0">
                 <a:solidFill>
                   <a:srgbClr val="FFFFFF"/>
                 </a:solidFill>
@@ -19731,7 +20222,7 @@
           <a:bodyPr wrap="square" lIns="0" tIns="0" rIns="0" bIns="0" rtlCol="0" anchor="ctr"/>
           <a:lstStyle/>
           <a:p>
-            <a:pPr marL="0" indent="0">
+            <a:pPr indent="0" marL="0">
               <a:buNone/>
             </a:pPr>
             <a:r>
@@ -19770,7 +20261,7 @@
           <a:bodyPr wrap="square" lIns="0" tIns="0" rIns="0" bIns="0" rtlCol="0" anchor="t"/>
           <a:lstStyle/>
           <a:p>
-            <a:pPr marL="0" indent="0">
+            <a:pPr indent="0" marL="0">
               <a:buNone/>
             </a:pPr>
             <a:r>
@@ -19856,7 +20347,7 @@
           <a:bodyPr wrap="square" lIns="0" tIns="0" rIns="0" bIns="0" rtlCol="0" anchor="ctr"/>
           <a:lstStyle/>
           <a:p>
-            <a:pPr marL="0" indent="0" algn="l">
+            <a:pPr algn="l" indent="0" marL="0">
               <a:buNone/>
             </a:pPr>
             <a:r>
@@ -19895,7 +20386,7 @@
           <a:bodyPr wrap="square" lIns="0" tIns="0" rIns="0" bIns="0" rtlCol="0" anchor="ctr"/>
           <a:lstStyle/>
           <a:p>
-            <a:pPr marL="0" indent="0">
+            <a:pPr indent="0" marL="0">
               <a:buNone/>
             </a:pPr>
             <a:r>
@@ -19961,11 +20452,11 @@
           <a:bodyPr wrap="square" lIns="0" tIns="0" rIns="0" bIns="0" rtlCol="0" anchor="ctr"/>
           <a:lstStyle/>
           <a:p>
-            <a:pPr marL="0" indent="0" algn="ctr">
-              <a:buNone/>
-            </a:pPr>
-            <a:r>
-              <a:rPr lang="en-US" sz="900" b="1" kern="0" spc="100" dirty="0">
+            <a:pPr algn="ctr" indent="0" marL="0">
+              <a:buNone/>
+            </a:pPr>
+            <a:r>
+              <a:rPr lang="en-US" sz="900" b="1" spc="100" kern="0" dirty="0">
                 <a:solidFill>
                   <a:srgbClr val="5A05F4"/>
                 </a:solidFill>
@@ -19981,14 +20472,14 @@
       </p:sp>
       <p:pic>
         <p:nvPicPr>
-          <p:cNvPr id="7" name="Image 0" descr="preencoded.png"/>
+          <p:cNvPr id="7" name="Image 0" descr="preencoded.png">    </p:cNvPr>
           <p:cNvPicPr>
             <a:picLocks noChangeAspect="1"/>
           </p:cNvPicPr>
           <p:nvPr/>
         </p:nvPicPr>
         <p:blipFill>
-          <a:blip r:embed="rId3"/>
+          <a:blip r:embed="rId1"/>
           <a:stretch>
             <a:fillRect/>
           </a:stretch>
@@ -20046,7 +20537,7 @@
           <a:bodyPr wrap="square" lIns="0" tIns="0" rIns="0" bIns="0" rtlCol="0" anchor="ctr"/>
           <a:lstStyle/>
           <a:p>
-            <a:pPr marL="0" indent="0">
+            <a:pPr indent="0" marL="0">
               <a:buNone/>
             </a:pPr>
             <a:r>
@@ -20085,7 +20576,7 @@
           <a:bodyPr wrap="square" lIns="0" tIns="0" rIns="0" bIns="0" rtlCol="0" anchor="t"/>
           <a:lstStyle/>
           <a:p>
-            <a:pPr marL="0" indent="0">
+            <a:pPr indent="0" marL="0">
               <a:lnSpc>
                 <a:spcPct val="108000"/>
               </a:lnSpc>
@@ -20149,7 +20640,7 @@
           <a:bodyPr wrap="square" lIns="0" tIns="0" rIns="0" bIns="0" rtlCol="0" anchor="ctr"/>
           <a:lstStyle/>
           <a:p>
-            <a:pPr marL="0" indent="0">
+            <a:pPr indent="0" marL="0">
               <a:buNone/>
             </a:pPr>
             <a:r>
@@ -20188,7 +20679,7 @@
           <a:bodyPr wrap="square" lIns="0" tIns="0" rIns="0" bIns="0" rtlCol="0" anchor="t"/>
           <a:lstStyle/>
           <a:p>
-            <a:pPr marL="0" indent="0">
+            <a:pPr indent="0" marL="0">
               <a:lnSpc>
                 <a:spcPct val="108000"/>
               </a:lnSpc>
@@ -20272,7 +20763,7 @@
           <a:bodyPr wrap="square" lIns="0" tIns="0" rIns="0" bIns="0" rtlCol="0" anchor="ctr"/>
           <a:lstStyle/>
           <a:p>
-            <a:pPr marL="0" indent="0" algn="ctr">
+            <a:pPr algn="ctr" indent="0" marL="0">
               <a:buNone/>
             </a:pPr>
             <a:r>
@@ -20311,7 +20802,7 @@
           <a:bodyPr wrap="square" lIns="0" tIns="0" rIns="0" bIns="0" rtlCol="0" anchor="ctr"/>
           <a:lstStyle/>
           <a:p>
-            <a:pPr marL="0" indent="0">
+            <a:pPr indent="0" marL="0">
               <a:buNone/>
             </a:pPr>
             <a:r>
@@ -20350,7 +20841,7 @@
           <a:bodyPr wrap="square" lIns="0" tIns="0" rIns="0" bIns="0" rtlCol="0" anchor="t"/>
           <a:lstStyle/>
           <a:p>
-            <a:pPr marL="0" indent="0">
+            <a:pPr indent="0" marL="0">
               <a:lnSpc>
                 <a:spcPct val="108000"/>
               </a:lnSpc>
@@ -20434,7 +20925,7 @@
           <a:bodyPr wrap="square" lIns="0" tIns="0" rIns="0" bIns="0" rtlCol="0" anchor="ctr"/>
           <a:lstStyle/>
           <a:p>
-            <a:pPr marL="0" indent="0" algn="ctr">
+            <a:pPr algn="ctr" indent="0" marL="0">
               <a:buNone/>
             </a:pPr>
             <a:r>
@@ -20473,7 +20964,7 @@
           <a:bodyPr wrap="square" lIns="0" tIns="0" rIns="0" bIns="0" rtlCol="0" anchor="ctr"/>
           <a:lstStyle/>
           <a:p>
-            <a:pPr marL="0" indent="0">
+            <a:pPr indent="0" marL="0">
               <a:buNone/>
             </a:pPr>
             <a:r>
@@ -20512,7 +21003,7 @@
           <a:bodyPr wrap="square" lIns="0" tIns="0" rIns="0" bIns="0" rtlCol="0" anchor="t"/>
           <a:lstStyle/>
           <a:p>
-            <a:pPr marL="0" indent="0">
+            <a:pPr indent="0" marL="0">
               <a:lnSpc>
                 <a:spcPct val="108000"/>
               </a:lnSpc>
@@ -20541,8 +21032,8 @@
         </p:nvSpPr>
         <p:spPr>
           <a:xfrm>
-            <a:off x="7991856" y="3429000"/>
-            <a:ext cx="3639312" cy="1554480"/>
+            <a:off x="7973568" y="3429000"/>
+            <a:ext cx="3520440" cy="1554480"/>
           </a:xfrm>
           <a:prstGeom prst="roundRect">
             <a:avLst>
@@ -20596,7 +21087,7 @@
           <a:bodyPr wrap="square" lIns="0" tIns="0" rIns="0" bIns="0" rtlCol="0" anchor="ctr"/>
           <a:lstStyle/>
           <a:p>
-            <a:pPr marL="0" indent="0" algn="ctr">
+            <a:pPr algn="ctr" indent="0" marL="0">
               <a:buNone/>
             </a:pPr>
             <a:r>
@@ -20635,7 +21126,7 @@
           <a:bodyPr wrap="square" lIns="0" tIns="0" rIns="0" bIns="0" rtlCol="0" anchor="ctr"/>
           <a:lstStyle/>
           <a:p>
-            <a:pPr marL="0" indent="0">
+            <a:pPr indent="0" marL="0">
               <a:buNone/>
             </a:pPr>
             <a:r>
@@ -20674,7 +21165,7 @@
           <a:bodyPr wrap="square" lIns="0" tIns="0" rIns="0" bIns="0" rtlCol="0" anchor="t"/>
           <a:lstStyle/>
           <a:p>
-            <a:pPr marL="0" indent="0">
+            <a:pPr indent="0" marL="0">
               <a:lnSpc>
                 <a:spcPct val="108000"/>
               </a:lnSpc>
@@ -20743,7 +21234,7 @@
           <a:bodyPr wrap="square" lIns="0" tIns="0" rIns="0" bIns="0" rtlCol="0" anchor="ctr"/>
           <a:lstStyle/>
           <a:p>
-            <a:pPr marL="0" indent="0">
+            <a:pPr indent="0" marL="0">
               <a:lnSpc>
                 <a:spcPct val="112000"/>
               </a:lnSpc>
@@ -20766,7 +21257,7 @@
       </p:sp>
       <p:sp>
         <p:nvSpPr>
-          <p:cNvPr id="31" name="Slide Number Placeholder 0"/>
+          <p:cNvPr id="25" name="Slide Number Placeholder 0"/>
           <p:cNvSpPr>
             <a:spLocks noGrp="1"/>
           </p:cNvSpPr>
@@ -20784,7 +21275,7 @@
           </a:prstGeom>
           <a:extLst>
             <a:ext uri="{C572A759-6A51-4108-AA02-DFA0A04FC94B}">
-              <ma14:wrappingTextBoxFlag xmlns:ma14="http://schemas.microsoft.com/office/mac/drawingml/2011/main" xmlns="" val="0"/>
+              <ma14:wrappingTextBoxFlag xmlns:ma14="http://schemas.microsoft.com/office/mac/drawingml/2011/main" val="0"/>
             </a:ext>
           </a:extLst>
         </p:spPr>
@@ -20805,7 +21296,7 @@
           <a:p>
             <a:pPr algn="l"/>
             <a:fld id="{F7021451-1387-4CA6-816F-3879F97B5CBC}" type="slidenum">
-              <a:rPr lang="en-US" b="0"/>
+              <a:rPr b="0" lang="en-US"/>
               <a:t>6</a:t>
             </a:fld>
             <a:endParaRPr lang="en-US"/>
@@ -20880,7 +21371,7 @@
           <a:bodyPr wrap="square" lIns="0" tIns="0" rIns="0" bIns="0" rtlCol="0" anchor="ctr"/>
           <a:lstStyle/>
           <a:p>
-            <a:pPr marL="0" indent="0" algn="l">
+            <a:pPr algn="l" indent="0" marL="0">
               <a:buNone/>
             </a:pPr>
             <a:r>
@@ -20919,7 +21410,7 @@
           <a:bodyPr wrap="square" lIns="0" tIns="0" rIns="0" bIns="0" rtlCol="0" anchor="ctr"/>
           <a:lstStyle/>
           <a:p>
-            <a:pPr marL="0" indent="0">
+            <a:pPr indent="0" marL="0">
               <a:buNone/>
             </a:pPr>
             <a:r>
@@ -20985,11 +21476,11 @@
           <a:bodyPr wrap="square" lIns="0" tIns="0" rIns="0" bIns="0" rtlCol="0" anchor="ctr"/>
           <a:lstStyle/>
           <a:p>
-            <a:pPr marL="0" indent="0" algn="ctr">
-              <a:buNone/>
-            </a:pPr>
-            <a:r>
-              <a:rPr lang="en-US" sz="900" b="1" kern="0" spc="100" dirty="0">
+            <a:pPr algn="ctr" indent="0" marL="0">
+              <a:buNone/>
+            </a:pPr>
+            <a:r>
+              <a:rPr lang="en-US" sz="900" b="1" spc="100" kern="0" dirty="0">
                 <a:solidFill>
                   <a:srgbClr val="5A05F4"/>
                 </a:solidFill>
@@ -21005,14 +21496,14 @@
       </p:sp>
       <p:pic>
         <p:nvPicPr>
-          <p:cNvPr id="7" name="Image 0" descr="preencoded.png"/>
+          <p:cNvPr id="7" name="Image 0" descr="preencoded.png">    </p:cNvPr>
           <p:cNvPicPr>
             <a:picLocks noChangeAspect="1"/>
           </p:cNvPicPr>
           <p:nvPr/>
         </p:nvPicPr>
         <p:blipFill>
-          <a:blip r:embed="rId3"/>
+          <a:blip r:embed="rId1"/>
           <a:stretch>
             <a:fillRect/>
           </a:stretch>
@@ -21070,7 +21561,7 @@
           <a:bodyPr wrap="square" lIns="0" tIns="0" rIns="0" bIns="0" rtlCol="0" anchor="ctr"/>
           <a:lstStyle/>
           <a:p>
-            <a:pPr marL="0" indent="0" algn="ctr">
+            <a:pPr algn="ctr" indent="0" marL="0">
               <a:buNone/>
             </a:pPr>
             <a:r>
@@ -21174,7 +21665,7 @@
           <a:bodyPr wrap="square" lIns="0" tIns="0" rIns="0" bIns="0" rtlCol="0" anchor="ctr"/>
           <a:lstStyle/>
           <a:p>
-            <a:pPr marL="0" indent="0" algn="ctr">
+            <a:pPr algn="ctr" indent="0" marL="0">
               <a:buNone/>
             </a:pPr>
             <a:r>
@@ -21278,7 +21769,7 @@
           <a:bodyPr wrap="square" lIns="0" tIns="0" rIns="0" bIns="0" rtlCol="0" anchor="ctr"/>
           <a:lstStyle/>
           <a:p>
-            <a:pPr marL="0" indent="0" algn="ctr">
+            <a:pPr algn="ctr" indent="0" marL="0">
               <a:buNone/>
             </a:pPr>
             <a:r>
@@ -21382,7 +21873,7 @@
           <a:bodyPr wrap="square" lIns="0" tIns="0" rIns="0" bIns="0" rtlCol="0" anchor="ctr"/>
           <a:lstStyle/>
           <a:p>
-            <a:pPr marL="0" indent="0" algn="ctr">
+            <a:pPr algn="ctr" indent="0" marL="0">
               <a:buNone/>
             </a:pPr>
             <a:r>
@@ -21486,7 +21977,7 @@
           <a:bodyPr wrap="square" lIns="0" tIns="0" rIns="0" bIns="0" rtlCol="0" anchor="ctr"/>
           <a:lstStyle/>
           <a:p>
-            <a:pPr marL="0" indent="0" algn="ctr">
+            <a:pPr algn="ctr" indent="0" marL="0">
               <a:buNone/>
             </a:pPr>
             <a:r>
@@ -21590,7 +22081,7 @@
           <a:bodyPr wrap="square" lIns="0" tIns="0" rIns="0" bIns="0" rtlCol="0" anchor="ctr"/>
           <a:lstStyle/>
           <a:p>
-            <a:pPr marL="0" indent="0" algn="ctr">
+            <a:pPr algn="ctr" indent="0" marL="0">
               <a:buNone/>
             </a:pPr>
             <a:r>
@@ -21651,7 +22142,7 @@
           <a:bodyPr wrap="square" lIns="0" tIns="0" rIns="0" bIns="0" rtlCol="0" anchor="ctr"/>
           <a:lstStyle/>
           <a:p>
-            <a:pPr marL="0" indent="0" algn="ctr">
+            <a:pPr algn="ctr" indent="0" marL="0">
               <a:buNone/>
             </a:pPr>
             <a:r>
@@ -21755,7 +22246,7 @@
           <a:bodyPr wrap="square" lIns="0" tIns="0" rIns="0" bIns="0" rtlCol="0" anchor="ctr"/>
           <a:lstStyle/>
           <a:p>
-            <a:pPr marL="0" indent="0" algn="ctr">
+            <a:pPr algn="ctr" indent="0" marL="0">
               <a:buNone/>
             </a:pPr>
             <a:r>
@@ -21859,7 +22350,7 @@
           <a:bodyPr wrap="square" lIns="0" tIns="0" rIns="0" bIns="0" rtlCol="0" anchor="ctr"/>
           <a:lstStyle/>
           <a:p>
-            <a:pPr marL="0" indent="0" algn="ctr">
+            <a:pPr algn="ctr" indent="0" marL="0">
               <a:buNone/>
             </a:pPr>
             <a:r>
@@ -21920,7 +22411,7 @@
           <a:bodyPr wrap="square" lIns="0" tIns="0" rIns="0" bIns="0" rtlCol="0" anchor="ctr"/>
           <a:lstStyle/>
           <a:p>
-            <a:pPr marL="0" indent="0" algn="ctr">
+            <a:pPr algn="ctr" indent="0" marL="0">
               <a:buNone/>
             </a:pPr>
             <a:r>
@@ -22024,7 +22515,7 @@
           <a:bodyPr wrap="square" lIns="0" tIns="0" rIns="0" bIns="0" rtlCol="0" anchor="ctr"/>
           <a:lstStyle/>
           <a:p>
-            <a:pPr marL="0" indent="0" algn="ctr">
+            <a:pPr algn="ctr" indent="0" marL="0">
               <a:buNone/>
             </a:pPr>
             <a:r>
@@ -22128,7 +22619,7 @@
           <a:bodyPr wrap="square" lIns="0" tIns="0" rIns="0" bIns="0" rtlCol="0" anchor="ctr"/>
           <a:lstStyle/>
           <a:p>
-            <a:pPr marL="0" indent="0" algn="ctr">
+            <a:pPr algn="ctr" indent="0" marL="0">
               <a:buNone/>
             </a:pPr>
             <a:r>
@@ -22194,7 +22685,7 @@
           <a:bodyPr wrap="square" lIns="0" tIns="0" rIns="0" bIns="0" rtlCol="0" anchor="ctr"/>
           <a:lstStyle/>
           <a:p>
-            <a:pPr marL="0" indent="0" algn="ctr">
+            <a:pPr algn="ctr" indent="0" marL="0">
               <a:buNone/>
             </a:pPr>
             <a:r>
@@ -22211,7 +22702,7 @@
             <a:endParaRPr lang="en-US" sz="850" dirty="0"/>
           </a:p>
           <a:p>
-            <a:pPr marL="0" indent="0" algn="ctr">
+            <a:pPr algn="ctr" indent="0" marL="0">
               <a:buNone/>
             </a:pPr>
             <a:r>
@@ -22277,7 +22768,7 @@
           <a:bodyPr wrap="square" lIns="0" tIns="0" rIns="0" bIns="0" rtlCol="0" anchor="ctr"/>
           <a:lstStyle/>
           <a:p>
-            <a:pPr marL="0" indent="0" algn="ctr">
+            <a:pPr algn="ctr" indent="0" marL="0">
               <a:buNone/>
             </a:pPr>
             <a:r>
@@ -22294,7 +22785,7 @@
             <a:endParaRPr lang="en-US" sz="850" dirty="0"/>
           </a:p>
           <a:p>
-            <a:pPr marL="0" indent="0" algn="ctr">
+            <a:pPr algn="ctr" indent="0" marL="0">
               <a:buNone/>
             </a:pPr>
             <a:r>
@@ -22360,7 +22851,7 @@
           <a:bodyPr wrap="square" lIns="0" tIns="0" rIns="0" bIns="0" rtlCol="0" anchor="ctr"/>
           <a:lstStyle/>
           <a:p>
-            <a:pPr marL="0" indent="0" algn="ctr">
+            <a:pPr algn="ctr" indent="0" marL="0">
               <a:buNone/>
             </a:pPr>
             <a:r>
@@ -22377,7 +22868,7 @@
             <a:endParaRPr lang="en-US" sz="850" dirty="0"/>
           </a:p>
           <a:p>
-            <a:pPr marL="0" indent="0" algn="ctr">
+            <a:pPr algn="ctr" indent="0" marL="0">
               <a:buNone/>
             </a:pPr>
             <a:r>
@@ -22443,7 +22934,7 @@
           <a:bodyPr wrap="square" lIns="0" tIns="0" rIns="0" bIns="0" rtlCol="0" anchor="ctr"/>
           <a:lstStyle/>
           <a:p>
-            <a:pPr marL="0" indent="0" algn="ctr">
+            <a:pPr algn="ctr" indent="0" marL="0">
               <a:buNone/>
             </a:pPr>
             <a:r>
@@ -22460,7 +22951,7 @@
             <a:endParaRPr lang="en-US" sz="850" dirty="0"/>
           </a:p>
           <a:p>
-            <a:pPr marL="0" indent="0" algn="ctr">
+            <a:pPr algn="ctr" indent="0" marL="0">
               <a:buNone/>
             </a:pPr>
             <a:r>
@@ -22526,7 +23017,7 @@
           <a:bodyPr wrap="square" lIns="0" tIns="0" rIns="0" bIns="0" rtlCol="0" anchor="ctr"/>
           <a:lstStyle/>
           <a:p>
-            <a:pPr marL="0" indent="0" algn="ctr">
+            <a:pPr algn="ctr" indent="0" marL="0">
               <a:buNone/>
             </a:pPr>
             <a:r>
@@ -22543,7 +23034,7 @@
             <a:endParaRPr lang="en-US" sz="850" dirty="0"/>
           </a:p>
           <a:p>
-            <a:pPr marL="0" indent="0" algn="ctr">
+            <a:pPr algn="ctr" indent="0" marL="0">
               <a:buNone/>
             </a:pPr>
             <a:r>
@@ -22609,7 +23100,7 @@
           <a:bodyPr wrap="square" lIns="0" tIns="0" rIns="0" bIns="0" rtlCol="0" anchor="ctr"/>
           <a:lstStyle/>
           <a:p>
-            <a:pPr marL="0" indent="0" algn="ctr">
+            <a:pPr algn="ctr" indent="0" marL="0">
               <a:buNone/>
             </a:pPr>
             <a:r>
@@ -22626,7 +23117,7 @@
             <a:endParaRPr lang="en-US" sz="850" dirty="0"/>
           </a:p>
           <a:p>
-            <a:pPr marL="0" indent="0" algn="ctr">
+            <a:pPr algn="ctr" indent="0" marL="0">
               <a:buNone/>
             </a:pPr>
             <a:r>
@@ -22692,7 +23183,7 @@
           <a:bodyPr wrap="square" lIns="0" tIns="0" rIns="0" bIns="0" rtlCol="0" anchor="ctr"/>
           <a:lstStyle/>
           <a:p>
-            <a:pPr marL="0" indent="0" algn="ctr">
+            <a:pPr algn="ctr" indent="0" marL="0">
               <a:buNone/>
             </a:pPr>
             <a:r>
@@ -22709,7 +23200,7 @@
             <a:endParaRPr lang="en-US" sz="850" dirty="0"/>
           </a:p>
           <a:p>
-            <a:pPr marL="0" indent="0" algn="ctr">
+            <a:pPr algn="ctr" indent="0" marL="0">
               <a:buNone/>
             </a:pPr>
             <a:r>
@@ -22775,7 +23266,7 @@
           <a:bodyPr wrap="square" lIns="0" tIns="0" rIns="0" bIns="0" rtlCol="0" anchor="ctr"/>
           <a:lstStyle/>
           <a:p>
-            <a:pPr marL="0" indent="0" algn="ctr">
+            <a:pPr algn="ctr" indent="0" marL="0">
               <a:buNone/>
             </a:pPr>
             <a:r>
@@ -22792,7 +23283,7 @@
             <a:endParaRPr lang="en-US" sz="850" dirty="0"/>
           </a:p>
           <a:p>
-            <a:pPr marL="0" indent="0" algn="ctr">
+            <a:pPr algn="ctr" indent="0" marL="0">
               <a:buNone/>
             </a:pPr>
             <a:r>
@@ -22858,7 +23349,7 @@
           <a:bodyPr wrap="square" lIns="0" tIns="0" rIns="0" bIns="0" rtlCol="0" anchor="ctr"/>
           <a:lstStyle/>
           <a:p>
-            <a:pPr marL="0" indent="0" algn="ctr">
+            <a:pPr algn="ctr" indent="0" marL="0">
               <a:buNone/>
             </a:pPr>
             <a:r>
@@ -22875,7 +23366,7 @@
             <a:endParaRPr lang="en-US" sz="850" dirty="0"/>
           </a:p>
           <a:p>
-            <a:pPr marL="0" indent="0" algn="ctr">
+            <a:pPr algn="ctr" indent="0" marL="0">
               <a:buNone/>
             </a:pPr>
             <a:r>
@@ -22941,7 +23432,7 @@
           <a:bodyPr wrap="square" lIns="0" tIns="0" rIns="0" bIns="0" rtlCol="0" anchor="ctr"/>
           <a:lstStyle/>
           <a:p>
-            <a:pPr marL="0" indent="0">
+            <a:pPr indent="0" marL="0">
               <a:lnSpc>
                 <a:spcPct val="112000"/>
               </a:lnSpc>
@@ -22964,7 +23455,7 @@
       </p:sp>
       <p:sp>
         <p:nvSpPr>
-          <p:cNvPr id="70" name="Slide Number Placeholder 0"/>
+          <p:cNvPr id="25" name="Slide Number Placeholder 0"/>
           <p:cNvSpPr>
             <a:spLocks noGrp="1"/>
           </p:cNvSpPr>
@@ -22982,7 +23473,7 @@
           </a:prstGeom>
           <a:extLst>
             <a:ext uri="{C572A759-6A51-4108-AA02-DFA0A04FC94B}">
-              <ma14:wrappingTextBoxFlag xmlns:ma14="http://schemas.microsoft.com/office/mac/drawingml/2011/main" xmlns="" val="0"/>
+              <ma14:wrappingTextBoxFlag xmlns:ma14="http://schemas.microsoft.com/office/mac/drawingml/2011/main" val="0"/>
             </a:ext>
           </a:extLst>
         </p:spPr>
@@ -23003,7 +23494,7 @@
           <a:p>
             <a:pPr algn="l"/>
             <a:fld id="{F7021451-1387-4CA6-816F-3879F97B5CBC}" type="slidenum">
-              <a:rPr lang="en-US" b="0"/>
+              <a:rPr b="0" lang="en-US"/>
               <a:t>7</a:t>
             </a:fld>
             <a:endParaRPr lang="en-US"/>
@@ -23078,7 +23569,7 @@
           <a:bodyPr wrap="square" lIns="0" tIns="0" rIns="0" bIns="0" rtlCol="0" anchor="ctr"/>
           <a:lstStyle/>
           <a:p>
-            <a:pPr marL="0" indent="0" algn="l">
+            <a:pPr algn="l" indent="0" marL="0">
               <a:buNone/>
             </a:pPr>
             <a:r>
@@ -23117,7 +23608,7 @@
           <a:bodyPr wrap="square" lIns="0" tIns="0" rIns="0" bIns="0" rtlCol="0" anchor="ctr"/>
           <a:lstStyle/>
           <a:p>
-            <a:pPr marL="0" indent="0">
+            <a:pPr indent="0" marL="0">
               <a:buNone/>
             </a:pPr>
             <a:r>
@@ -23183,11 +23674,11 @@
           <a:bodyPr wrap="square" lIns="0" tIns="0" rIns="0" bIns="0" rtlCol="0" anchor="ctr"/>
           <a:lstStyle/>
           <a:p>
-            <a:pPr marL="0" indent="0" algn="ctr">
-              <a:buNone/>
-            </a:pPr>
-            <a:r>
-              <a:rPr lang="en-US" sz="900" b="1" kern="0" spc="100" dirty="0">
+            <a:pPr algn="ctr" indent="0" marL="0">
+              <a:buNone/>
+            </a:pPr>
+            <a:r>
+              <a:rPr lang="en-US" sz="900" b="1" spc="100" kern="0" dirty="0">
                 <a:solidFill>
                   <a:srgbClr val="5A05F4"/>
                 </a:solidFill>
@@ -23203,14 +23694,14 @@
       </p:sp>
       <p:pic>
         <p:nvPicPr>
-          <p:cNvPr id="7" name="Image 0" descr="preencoded.png"/>
+          <p:cNvPr id="7" name="Image 0" descr="preencoded.png">    </p:cNvPr>
           <p:cNvPicPr>
             <a:picLocks noChangeAspect="1"/>
           </p:cNvPicPr>
           <p:nvPr/>
         </p:nvPicPr>
         <p:blipFill>
-          <a:blip r:embed="rId3"/>
+          <a:blip r:embed="rId1"/>
           <a:stretch>
             <a:fillRect/>
           </a:stretch>
@@ -23241,34 +23732,16 @@
         </p:nvGraphicFramePr>
         <p:xfrm>
           <a:off x="566928" y="1737360"/>
-          <a:ext cx="11064240" cy="2560320"/>
+          <a:ext cx="11064240" cy="914400"/>
         </p:xfrm>
         <a:graphic>
           <a:graphicData uri="http://schemas.openxmlformats.org/drawingml/2006/table">
             <a:tbl>
               <a:tblPr/>
               <a:tblGrid>
-                <a:gridCol w="2194560">
-                  <a:extLst>
-                    <a:ext uri="{9D8B030D-6E8A-4147-A177-3AD203B41FA5}">
-                      <a16:colId xmlns:a16="http://schemas.microsoft.com/office/drawing/2014/main" val="20000"/>
-                    </a:ext>
-                  </a:extLst>
-                </a:gridCol>
-                <a:gridCol w="3108960">
-                  <a:extLst>
-                    <a:ext uri="{9D8B030D-6E8A-4147-A177-3AD203B41FA5}">
-                      <a16:colId xmlns:a16="http://schemas.microsoft.com/office/drawing/2014/main" val="20001"/>
-                    </a:ext>
-                  </a:extLst>
-                </a:gridCol>
-                <a:gridCol w="5760720">
-                  <a:extLst>
-                    <a:ext uri="{9D8B030D-6E8A-4147-A177-3AD203B41FA5}">
-                      <a16:colId xmlns:a16="http://schemas.microsoft.com/office/drawing/2014/main" val="20002"/>
-                    </a:ext>
-                  </a:extLst>
-                </a:gridCol>
+                <a:gridCol w="2194560"/>
+                <a:gridCol w="3108960"/>
+                <a:gridCol w="5760720"/>
               </a:tblGrid>
               <a:tr h="512064">
                 <a:tc>
@@ -23276,11 +23749,11 @@
                     <a:bodyPr/>
                     <a:lstStyle/>
                     <a:p>
-                      <a:pPr marL="0" indent="0" algn="ctr">
+                      <a:pPr algn="ctr" indent="0" marL="0">
                         <a:buNone/>
                       </a:pPr>
                       <a:r>
-                        <a:rPr lang="en-US" sz="900" b="1" kern="0" spc="100" dirty="0">
+                        <a:rPr lang="en-US" sz="900" b="1" spc="100" kern="0" dirty="0">
                           <a:solidFill>
                             <a:srgbClr val="FFFFFF"/>
                           </a:solidFill>
@@ -23344,11 +23817,11 @@
                     <a:bodyPr/>
                     <a:lstStyle/>
                     <a:p>
-                      <a:pPr marL="0" indent="0" algn="ctr">
+                      <a:pPr algn="ctr" indent="0" marL="0">
                         <a:buNone/>
                       </a:pPr>
                       <a:r>
-                        <a:rPr lang="en-US" sz="900" b="1" kern="0" spc="100" dirty="0">
+                        <a:rPr lang="en-US" sz="900" b="1" spc="100" kern="0" dirty="0">
                           <a:solidFill>
                             <a:srgbClr val="FFFFFF"/>
                           </a:solidFill>
@@ -23412,11 +23885,11 @@
                     <a:bodyPr/>
                     <a:lstStyle/>
                     <a:p>
-                      <a:pPr marL="0" indent="0" algn="ctr">
+                      <a:pPr algn="ctr" indent="0" marL="0">
                         <a:buNone/>
                       </a:pPr>
                       <a:r>
-                        <a:rPr lang="en-US" sz="900" b="1" kern="0" spc="100" dirty="0">
+                        <a:rPr lang="en-US" sz="900" b="1" spc="100" kern="0" dirty="0">
                           <a:solidFill>
                             <a:srgbClr val="FFFFFF"/>
                           </a:solidFill>
@@ -23475,11 +23948,6 @@
                     </a:solidFill>
                   </a:tcPr>
                 </a:tc>
-                <a:extLst>
-                  <a:ext uri="{0D108BD9-81ED-4DB2-BD59-A6C34878D82A}">
-                    <a16:rowId xmlns:a16="http://schemas.microsoft.com/office/drawing/2014/main" val="10000"/>
-                  </a:ext>
-                </a:extLst>
               </a:tr>
               <a:tr h="512064">
                 <a:tc>
@@ -23487,7 +23955,7 @@
                     <a:bodyPr/>
                     <a:lstStyle/>
                     <a:p>
-                      <a:pPr marL="0" indent="0">
+                      <a:pPr indent="0" marL="0">
                         <a:buNone/>
                       </a:pPr>
                       <a:r>
@@ -23555,7 +24023,7 @@
                     <a:bodyPr/>
                     <a:lstStyle/>
                     <a:p>
-                      <a:pPr marL="0" indent="0">
+                      <a:pPr indent="0" marL="0">
                         <a:buNone/>
                       </a:pPr>
                       <a:r>
@@ -23623,7 +24091,7 @@
                     <a:bodyPr/>
                     <a:lstStyle/>
                     <a:p>
-                      <a:pPr marL="0" indent="0">
+                      <a:pPr indent="0" marL="0">
                         <a:buNone/>
                       </a:pPr>
                       <a:r>
@@ -23686,11 +24154,6 @@
                     </a:solidFill>
                   </a:tcPr>
                 </a:tc>
-                <a:extLst>
-                  <a:ext uri="{0D108BD9-81ED-4DB2-BD59-A6C34878D82A}">
-                    <a16:rowId xmlns:a16="http://schemas.microsoft.com/office/drawing/2014/main" val="10001"/>
-                  </a:ext>
-                </a:extLst>
               </a:tr>
               <a:tr h="512064">
                 <a:tc>
@@ -23698,7 +24161,7 @@
                     <a:bodyPr/>
                     <a:lstStyle/>
                     <a:p>
-                      <a:pPr marL="0" indent="0">
+                      <a:pPr indent="0" marL="0">
                         <a:buNone/>
                       </a:pPr>
                       <a:r>
@@ -23766,7 +24229,7 @@
                     <a:bodyPr/>
                     <a:lstStyle/>
                     <a:p>
-                      <a:pPr marL="0" indent="0">
+                      <a:pPr indent="0" marL="0">
                         <a:buNone/>
                       </a:pPr>
                       <a:r>
@@ -23834,7 +24297,7 @@
                     <a:bodyPr/>
                     <a:lstStyle/>
                     <a:p>
-                      <a:pPr marL="0" indent="0">
+                      <a:pPr indent="0" marL="0">
                         <a:buNone/>
                       </a:pPr>
                       <a:r>
@@ -23897,11 +24360,6 @@
                     </a:solidFill>
                   </a:tcPr>
                 </a:tc>
-                <a:extLst>
-                  <a:ext uri="{0D108BD9-81ED-4DB2-BD59-A6C34878D82A}">
-                    <a16:rowId xmlns:a16="http://schemas.microsoft.com/office/drawing/2014/main" val="10002"/>
-                  </a:ext>
-                </a:extLst>
               </a:tr>
               <a:tr h="512064">
                 <a:tc>
@@ -23909,7 +24367,7 @@
                     <a:bodyPr/>
                     <a:lstStyle/>
                     <a:p>
-                      <a:pPr marL="0" indent="0">
+                      <a:pPr indent="0" marL="0">
                         <a:buNone/>
                       </a:pPr>
                       <a:r>
@@ -23977,7 +24435,7 @@
                     <a:bodyPr/>
                     <a:lstStyle/>
                     <a:p>
-                      <a:pPr marL="0" indent="0">
+                      <a:pPr indent="0" marL="0">
                         <a:buNone/>
                       </a:pPr>
                       <a:r>
@@ -24045,7 +24503,7 @@
                     <a:bodyPr/>
                     <a:lstStyle/>
                     <a:p>
-                      <a:pPr marL="0" indent="0">
+                      <a:pPr indent="0" marL="0">
                         <a:buNone/>
                       </a:pPr>
                       <a:r>
@@ -24108,11 +24566,6 @@
                     </a:solidFill>
                   </a:tcPr>
                 </a:tc>
-                <a:extLst>
-                  <a:ext uri="{0D108BD9-81ED-4DB2-BD59-A6C34878D82A}">
-                    <a16:rowId xmlns:a16="http://schemas.microsoft.com/office/drawing/2014/main" val="10003"/>
-                  </a:ext>
-                </a:extLst>
               </a:tr>
               <a:tr h="512064">
                 <a:tc>
@@ -24120,7 +24573,7 @@
                     <a:bodyPr/>
                     <a:lstStyle/>
                     <a:p>
-                      <a:pPr marL="0" indent="0">
+                      <a:pPr indent="0" marL="0">
                         <a:buNone/>
                       </a:pPr>
                       <a:r>
@@ -24188,7 +24641,7 @@
                     <a:bodyPr/>
                     <a:lstStyle/>
                     <a:p>
-                      <a:pPr marL="0" indent="0">
+                      <a:pPr indent="0" marL="0">
                         <a:buNone/>
                       </a:pPr>
                       <a:r>
@@ -24256,7 +24709,7 @@
                     <a:bodyPr/>
                     <a:lstStyle/>
                     <a:p>
-                      <a:pPr marL="0" indent="0">
+                      <a:pPr indent="0" marL="0">
                         <a:buNone/>
                       </a:pPr>
                       <a:r>
@@ -24319,11 +24772,6 @@
                     </a:solidFill>
                   </a:tcPr>
                 </a:tc>
-                <a:extLst>
-                  <a:ext uri="{0D108BD9-81ED-4DB2-BD59-A6C34878D82A}">
-                    <a16:rowId xmlns:a16="http://schemas.microsoft.com/office/drawing/2014/main" val="10004"/>
-                  </a:ext>
-                </a:extLst>
               </a:tr>
             </a:tbl>
           </a:graphicData>
@@ -24331,7 +24779,7 @@
       </p:graphicFrame>
       <p:sp>
         <p:nvSpPr>
-          <p:cNvPr id="8" name="Shape 5"/>
+          <p:cNvPr id="9" name="Shape 5"/>
           <p:cNvSpPr/>
           <p:nvPr/>
         </p:nvSpPr>
@@ -24377,7 +24825,7 @@
           <a:bodyPr wrap="square" lIns="0" tIns="0" rIns="0" bIns="0" rtlCol="0" anchor="ctr"/>
           <a:lstStyle/>
           <a:p>
-            <a:pPr marL="0" indent="0">
+            <a:pPr indent="0" marL="0">
               <a:lnSpc>
                 <a:spcPct val="112000"/>
               </a:lnSpc>
@@ -24446,7 +24894,7 @@
           <a:bodyPr wrap="square" lIns="0" tIns="0" rIns="0" bIns="0" rtlCol="0" anchor="ctr"/>
           <a:lstStyle/>
           <a:p>
-            <a:pPr marL="0" indent="0">
+            <a:pPr indent="0" marL="0">
               <a:lnSpc>
                 <a:spcPct val="112000"/>
               </a:lnSpc>
@@ -24487,7 +24935,7 @@
           </a:prstGeom>
           <a:extLst>
             <a:ext uri="{C572A759-6A51-4108-AA02-DFA0A04FC94B}">
-              <ma14:wrappingTextBoxFlag xmlns:ma14="http://schemas.microsoft.com/office/mac/drawingml/2011/main" xmlns="" val="0"/>
+              <ma14:wrappingTextBoxFlag xmlns:ma14="http://schemas.microsoft.com/office/mac/drawingml/2011/main" val="0"/>
             </a:ext>
           </a:extLst>
         </p:spPr>
@@ -24508,7 +24956,7 @@
           <a:p>
             <a:pPr algn="l"/>
             <a:fld id="{F7021451-1387-4CA6-816F-3879F97B5CBC}" type="slidenum">
-              <a:rPr lang="en-US" b="0"/>
+              <a:rPr b="0" lang="en-US"/>
               <a:t>8</a:t>
             </a:fld>
             <a:endParaRPr lang="en-US"/>
@@ -24583,7 +25031,7 @@
           <a:bodyPr wrap="square" lIns="0" tIns="0" rIns="0" bIns="0" rtlCol="0" anchor="ctr"/>
           <a:lstStyle/>
           <a:p>
-            <a:pPr marL="0" indent="0" algn="l">
+            <a:pPr algn="l" indent="0" marL="0">
               <a:buNone/>
             </a:pPr>
             <a:r>
@@ -24622,7 +25070,7 @@
           <a:bodyPr wrap="square" lIns="0" tIns="0" rIns="0" bIns="0" rtlCol="0" anchor="ctr"/>
           <a:lstStyle/>
           <a:p>
-            <a:pPr marL="0" indent="0">
+            <a:pPr indent="0" marL="0">
               <a:buNone/>
             </a:pPr>
             <a:r>
@@ -24688,11 +25136,11 @@
           <a:bodyPr wrap="square" lIns="0" tIns="0" rIns="0" bIns="0" rtlCol="0" anchor="ctr"/>
           <a:lstStyle/>
           <a:p>
-            <a:pPr marL="0" indent="0" algn="ctr">
-              <a:buNone/>
-            </a:pPr>
-            <a:r>
-              <a:rPr lang="en-US" sz="900" b="1" kern="0" spc="100" dirty="0">
+            <a:pPr algn="ctr" indent="0" marL="0">
+              <a:buNone/>
+            </a:pPr>
+            <a:r>
+              <a:rPr lang="en-US" sz="900" b="1" spc="100" kern="0" dirty="0">
                 <a:solidFill>
                   <a:srgbClr val="5A05F4"/>
                 </a:solidFill>
@@ -24708,14 +25156,14 @@
       </p:sp>
       <p:pic>
         <p:nvPicPr>
-          <p:cNvPr id="7" name="Image 0" descr="preencoded.png"/>
+          <p:cNvPr id="7" name="Image 0" descr="preencoded.png">    </p:cNvPr>
           <p:cNvPicPr>
             <a:picLocks noChangeAspect="1"/>
           </p:cNvPicPr>
           <p:nvPr/>
         </p:nvPicPr>
         <p:blipFill>
-          <a:blip r:embed="rId3"/>
+          <a:blip r:embed="rId1"/>
           <a:stretch>
             <a:fillRect/>
           </a:stretch>
@@ -24794,7 +25242,7 @@
           <a:bodyPr wrap="square" lIns="0" tIns="0" rIns="0" bIns="0" rtlCol="0" anchor="ctr"/>
           <a:lstStyle/>
           <a:p>
-            <a:pPr marL="0" indent="0" algn="ctr">
+            <a:pPr algn="ctr" indent="0" marL="0">
               <a:buNone/>
             </a:pPr>
             <a:r>
@@ -24833,7 +25281,7 @@
           <a:bodyPr wrap="square" lIns="0" tIns="0" rIns="0" bIns="0" rtlCol="0" anchor="t"/>
           <a:lstStyle/>
           <a:p>
-            <a:pPr marL="0" indent="0" algn="ctr">
+            <a:pPr algn="ctr" indent="0" marL="0">
               <a:buNone/>
             </a:pPr>
             <a:r>
@@ -24892,7 +25340,7 @@
           <a:bodyPr wrap="square" lIns="0" tIns="0" rIns="0" bIns="0" rtlCol="0" anchor="ctr"/>
           <a:lstStyle/>
           <a:p>
-            <a:pPr marL="0" indent="0" algn="ctr">
+            <a:pPr algn="ctr" indent="0" marL="0">
               <a:buNone/>
             </a:pPr>
             <a:r>
@@ -24931,7 +25379,7 @@
           <a:bodyPr wrap="square" lIns="0" tIns="0" rIns="0" bIns="0" rtlCol="0" anchor="t"/>
           <a:lstStyle/>
           <a:p>
-            <a:pPr marL="0" indent="0" algn="ctr">
+            <a:pPr algn="ctr" indent="0" marL="0">
               <a:buNone/>
             </a:pPr>
             <a:r>
@@ -24990,7 +25438,7 @@
           <a:bodyPr wrap="square" lIns="0" tIns="0" rIns="0" bIns="0" rtlCol="0" anchor="ctr"/>
           <a:lstStyle/>
           <a:p>
-            <a:pPr marL="0" indent="0" algn="ctr">
+            <a:pPr algn="ctr" indent="0" marL="0">
               <a:buNone/>
             </a:pPr>
             <a:r>
@@ -25029,7 +25477,7 @@
           <a:bodyPr wrap="square" lIns="0" tIns="0" rIns="0" bIns="0" rtlCol="0" anchor="t"/>
           <a:lstStyle/>
           <a:p>
-            <a:pPr marL="0" indent="0" algn="ctr">
+            <a:pPr algn="ctr" indent="0" marL="0">
               <a:buNone/>
             </a:pPr>
             <a:r>
@@ -25088,7 +25536,7 @@
           <a:bodyPr wrap="square" lIns="0" tIns="0" rIns="0" bIns="0" rtlCol="0" anchor="ctr"/>
           <a:lstStyle/>
           <a:p>
-            <a:pPr marL="0" indent="0" algn="ctr">
+            <a:pPr algn="ctr" indent="0" marL="0">
               <a:buNone/>
             </a:pPr>
             <a:r>
@@ -25127,7 +25575,7 @@
           <a:bodyPr wrap="square" lIns="0" tIns="0" rIns="0" bIns="0" rtlCol="0" anchor="t"/>
           <a:lstStyle/>
           <a:p>
-            <a:pPr marL="0" indent="0" algn="ctr">
+            <a:pPr algn="ctr" indent="0" marL="0">
               <a:buNone/>
             </a:pPr>
             <a:r>
@@ -25174,14 +25622,34 @@
       </p:sp>
       <p:sp>
         <p:nvSpPr>
-          <p:cNvPr id="22" name="Text 19"/>
-          <p:cNvSpPr/>
-          <p:nvPr/>
-        </p:nvSpPr>
-        <p:spPr>
-          <a:xfrm>
-            <a:off x="786384" y="4471416"/>
-            <a:ext cx="10625328" cy="219456"/>
+          <p:cNvPr id="22" name="Shape 19"/>
+          <p:cNvSpPr/>
+          <p:nvPr/>
+        </p:nvSpPr>
+        <p:spPr>
+          <a:xfrm>
+            <a:off x="749808" y="4759452"/>
+            <a:ext cx="310896" cy="310896"/>
+          </a:xfrm>
+          <a:prstGeom prst="ellipse">
+            <a:avLst/>
+          </a:prstGeom>
+          <a:solidFill>
+            <a:srgbClr val="B3261E"/>
+          </a:solidFill>
+          <a:ln/>
+        </p:spPr>
+      </p:sp>
+      <p:sp>
+        <p:nvSpPr>
+          <p:cNvPr id="23" name="Text 20"/>
+          <p:cNvSpPr/>
+          <p:nvPr/>
+        </p:nvSpPr>
+        <p:spPr>
+          <a:xfrm>
+            <a:off x="749808" y="4759452"/>
+            <a:ext cx="310896" cy="310896"/>
           </a:xfrm>
           <a:prstGeom prst="rect">
             <a:avLst/>
@@ -25193,11 +25661,50 @@
           <a:bodyPr wrap="square" lIns="0" tIns="0" rIns="0" bIns="0" rtlCol="0" anchor="ctr"/>
           <a:lstStyle/>
           <a:p>
-            <a:pPr marL="0" indent="0">
-              <a:buNone/>
-            </a:pPr>
-            <a:r>
-              <a:rPr lang="en-US" sz="950" b="1" kern="0" spc="150" dirty="0">
+            <a:pPr algn="ctr" indent="0" marL="0">
+              <a:buNone/>
+            </a:pPr>
+            <a:r>
+              <a:rPr lang="en-US" sz="1200" b="1" dirty="0">
+                <a:solidFill>
+                  <a:srgbClr val="FFFFFF"/>
+                </a:solidFill>
+                <a:latin typeface="Arial" pitchFamily="34" charset="0"/>
+                <a:ea typeface="Arial" pitchFamily="34" charset="-122"/>
+                <a:cs typeface="Arial" pitchFamily="34" charset="-120"/>
+              </a:rPr>
+              <a:t>✕</a:t>
+            </a:r>
+            <a:endParaRPr lang="en-US" sz="1200" dirty="0"/>
+          </a:p>
+        </p:txBody>
+      </p:sp>
+      <p:sp>
+        <p:nvSpPr>
+          <p:cNvPr id="24" name="Text 21"/>
+          <p:cNvSpPr/>
+          <p:nvPr/>
+        </p:nvSpPr>
+        <p:spPr>
+          <a:xfrm>
+            <a:off x="1243584" y="4471416"/>
+            <a:ext cx="10168128" cy="219456"/>
+          </a:xfrm>
+          <a:prstGeom prst="rect">
+            <a:avLst/>
+          </a:prstGeom>
+          <a:noFill/>
+          <a:ln/>
+        </p:spPr>
+        <p:txBody>
+          <a:bodyPr wrap="square" lIns="0" tIns="0" rIns="0" bIns="0" rtlCol="0" anchor="ctr"/>
+          <a:lstStyle/>
+          <a:p>
+            <a:pPr indent="0" marL="0">
+              <a:buNone/>
+            </a:pPr>
+            <a:r>
+              <a:rPr lang="en-US" sz="950" b="1" spc="150" kern="0" dirty="0">
                 <a:solidFill>
                   <a:srgbClr val="B3261E"/>
                 </a:solidFill>
@@ -25213,14 +25720,14 @@
       </p:sp>
       <p:sp>
         <p:nvSpPr>
-          <p:cNvPr id="23" name="Text 20"/>
-          <p:cNvSpPr/>
-          <p:nvPr/>
-        </p:nvSpPr>
-        <p:spPr>
-          <a:xfrm>
-            <a:off x="786384" y="4727448"/>
-            <a:ext cx="10625328" cy="630936"/>
+          <p:cNvPr id="25" name="Text 22"/>
+          <p:cNvSpPr/>
+          <p:nvPr/>
+        </p:nvSpPr>
+        <p:spPr>
+          <a:xfrm>
+            <a:off x="1243584" y="4727448"/>
+            <a:ext cx="10168128" cy="630936"/>
           </a:xfrm>
           <a:prstGeom prst="rect">
             <a:avLst/>
@@ -25232,7 +25739,7 @@
           <a:bodyPr wrap="square" lIns="0" tIns="0" rIns="0" bIns="0" rtlCol="0" anchor="ctr"/>
           <a:lstStyle/>
           <a:p>
-            <a:pPr marL="0" indent="0">
+            <a:pPr indent="0" marL="0">
               <a:lnSpc>
                 <a:spcPct val="112000"/>
               </a:lnSpc>
@@ -25255,7 +25762,7 @@
       </p:sp>
       <p:sp>
         <p:nvSpPr>
-          <p:cNvPr id="24" name="Shape 21"/>
+          <p:cNvPr id="26" name="Shape 23"/>
           <p:cNvSpPr/>
           <p:nvPr/>
         </p:nvSpPr>
@@ -25282,7 +25789,7 @@
       </p:sp>
       <p:sp>
         <p:nvSpPr>
-          <p:cNvPr id="25" name="Text 22"/>
+          <p:cNvPr id="27" name="Text 24"/>
           <p:cNvSpPr/>
           <p:nvPr/>
         </p:nvSpPr>
@@ -25301,7 +25808,7 @@
           <a:bodyPr wrap="square" lIns="0" tIns="0" rIns="0" bIns="0" rtlCol="0" anchor="ctr"/>
           <a:lstStyle/>
           <a:p>
-            <a:pPr marL="0" indent="0">
+            <a:pPr indent="0" marL="0">
               <a:lnSpc>
                 <a:spcPct val="112000"/>
               </a:lnSpc>
@@ -25324,7 +25831,7 @@
       </p:sp>
       <p:sp>
         <p:nvSpPr>
-          <p:cNvPr id="26" name="Slide Number Placeholder 0"/>
+          <p:cNvPr id="25" name="Slide Number Placeholder 0"/>
           <p:cNvSpPr>
             <a:spLocks noGrp="1"/>
           </p:cNvSpPr>
@@ -25342,7 +25849,7 @@
           </a:prstGeom>
           <a:extLst>
             <a:ext uri="{C572A759-6A51-4108-AA02-DFA0A04FC94B}">
-              <ma14:wrappingTextBoxFlag xmlns:ma14="http://schemas.microsoft.com/office/mac/drawingml/2011/main" xmlns="" val="0"/>
+              <ma14:wrappingTextBoxFlag xmlns:ma14="http://schemas.microsoft.com/office/mac/drawingml/2011/main" val="0"/>
             </a:ext>
           </a:extLst>
         </p:spPr>
@@ -25363,7 +25870,7 @@
           <a:p>
             <a:pPr algn="l"/>
             <a:fld id="{F7021451-1387-4CA6-816F-3879F97B5CBC}" type="slidenum">
-              <a:rPr lang="en-US" b="0"/>
+              <a:rPr b="0" lang="en-US"/>
               <a:t>9</a:t>
             </a:fld>
             <a:endParaRPr lang="en-US"/>
@@ -25671,299 +26178,4 @@
     </a:ext>
   </a:extLst>
 </a:theme>
-</file>
-
-<file path=ppt/theme/theme2.xml><?xml version="1.0" encoding="utf-8"?>
-<a:theme xmlns:a="http://schemas.openxmlformats.org/drawingml/2006/main" name="Office Theme">
-  <a:themeElements>
-    <a:clrScheme name="Office">
-      <a:dk1>
-        <a:sysClr val="windowText" lastClr="000000"/>
-      </a:dk1>
-      <a:lt1>
-        <a:sysClr val="window" lastClr="FFFFFF"/>
-      </a:lt1>
-      <a:dk2>
-        <a:srgbClr val="44546A"/>
-      </a:dk2>
-      <a:lt2>
-        <a:srgbClr val="E7E6E6"/>
-      </a:lt2>
-      <a:accent1>
-        <a:srgbClr val="4472C4"/>
-      </a:accent1>
-      <a:accent2>
-        <a:srgbClr val="ED7D31"/>
-      </a:accent2>
-      <a:accent3>
-        <a:srgbClr val="A5A5A5"/>
-      </a:accent3>
-      <a:accent4>
-        <a:srgbClr val="FFC000"/>
-      </a:accent4>
-      <a:accent5>
-        <a:srgbClr val="5B9BD5"/>
-      </a:accent5>
-      <a:accent6>
-        <a:srgbClr val="70AD47"/>
-      </a:accent6>
-      <a:hlink>
-        <a:srgbClr val="0563C1"/>
-      </a:hlink>
-      <a:folHlink>
-        <a:srgbClr val="954F72"/>
-      </a:folHlink>
-    </a:clrScheme>
-    <a:fontScheme name="Office">
-      <a:majorFont>
-        <a:latin typeface="Calibri Light" panose="020F0302020204030204"/>
-        <a:ea typeface=""/>
-        <a:cs typeface=""/>
-        <a:font script="Jpan" typeface="游ゴシック Light"/>
-        <a:font script="Hang" typeface="맑은 고딕"/>
-        <a:font script="Hans" typeface="等线 Light"/>
-        <a:font script="Hant" typeface="新細明體"/>
-        <a:font script="Arab" typeface="Times New Roman"/>
-        <a:font script="Hebr" typeface="Times New Roman"/>
-        <a:font script="Thai" typeface="Angsana New"/>
-        <a:font script="Ethi" typeface="Nyala"/>
-        <a:font script="Beng" typeface="Vrinda"/>
-        <a:font script="Gujr" typeface="Shruti"/>
-        <a:font script="Khmr" typeface="MoolBoran"/>
-        <a:font script="Knda" typeface="Tunga"/>
-        <a:font script="Guru" typeface="Raavi"/>
-        <a:font script="Cans" typeface="Euphemia"/>
-        <a:font script="Cher" typeface="Plantagenet Cherokee"/>
-        <a:font script="Yiii" typeface="Microsoft Yi Baiti"/>
-        <a:font script="Tibt" typeface="Microsoft Himalaya"/>
-        <a:font script="Thaa" typeface="MV Boli"/>
-        <a:font script="Deva" typeface="Mangal"/>
-        <a:font script="Telu" typeface="Gautami"/>
-        <a:font script="Taml" typeface="Latha"/>
-        <a:font script="Syrc" typeface="Estrangelo Edessa"/>
-        <a:font script="Orya" typeface="Kalinga"/>
-        <a:font script="Mlym" typeface="Kartika"/>
-        <a:font script="Laoo" typeface="DokChampa"/>
-        <a:font script="Sinh" typeface="Iskoola Pota"/>
-        <a:font script="Mong" typeface="Mongolian Baiti"/>
-        <a:font script="Viet" typeface="Times New Roman"/>
-        <a:font script="Uigh" typeface="Microsoft Uighur"/>
-        <a:font script="Geor" typeface="Sylfaen"/>
-        <a:font script="Armn" typeface="Arial"/>
-        <a:font script="Bugi" typeface="Leelawadee UI"/>
-        <a:font script="Bopo" typeface="Microsoft JhengHei"/>
-        <a:font script="Java" typeface="Javanese Text"/>
-        <a:font script="Lisu" typeface="Segoe UI"/>
-        <a:font script="Mymr" typeface="Myanmar Text"/>
-        <a:font script="Nkoo" typeface="Ebrima"/>
-        <a:font script="Olck" typeface="Nirmala UI"/>
-        <a:font script="Osma" typeface="Ebrima"/>
-        <a:font script="Phag" typeface="Phagspa"/>
-        <a:font script="Syrn" typeface="Estrangelo Edessa"/>
-        <a:font script="Syrj" typeface="Estrangelo Edessa"/>
-        <a:font script="Syre" typeface="Estrangelo Edessa"/>
-        <a:font script="Sora" typeface="Nirmala UI"/>
-        <a:font script="Tale" typeface="Microsoft Tai Le"/>
-        <a:font script="Talu" typeface="Microsoft New Tai Lue"/>
-        <a:font script="Tfng" typeface="Ebrima"/>
-      </a:majorFont>
-      <a:minorFont>
-        <a:latin typeface="Calibri" panose="020F0502020204030204"/>
-        <a:ea typeface=""/>
-        <a:cs typeface=""/>
-        <a:font script="Jpan" typeface="游ゴシック"/>
-        <a:font script="Hang" typeface="맑은 고딕"/>
-        <a:font script="Hans" typeface="等线"/>
-        <a:font script="Hant" typeface="新細明體"/>
-        <a:font script="Arab" typeface="Arial"/>
-        <a:font script="Hebr" typeface="Arial"/>
-        <a:font script="Thai" typeface="Cordia New"/>
-        <a:font script="Ethi" typeface="Nyala"/>
-        <a:font script="Beng" typeface="Vrinda"/>
-        <a:font script="Gujr" typeface="Shruti"/>
-        <a:font script="Khmr" typeface="DaunPenh"/>
-        <a:font script="Knda" typeface="Tunga"/>
-        <a:font script="Guru" typeface="Raavi"/>
-        <a:font script="Cans" typeface="Euphemia"/>
-        <a:font script="Cher" typeface="Plantagenet Cherokee"/>
-        <a:font script="Yiii" typeface="Microsoft Yi Baiti"/>
-        <a:font script="Tibt" typeface="Microsoft Himalaya"/>
-        <a:font script="Thaa" typeface="MV Boli"/>
-        <a:font script="Deva" typeface="Mangal"/>
-        <a:font script="Telu" typeface="Gautami"/>
-        <a:font script="Taml" typeface="Latha"/>
-        <a:font script="Syrc" typeface="Estrangelo Edessa"/>
-        <a:font script="Orya" typeface="Kalinga"/>
-        <a:font script="Mlym" typeface="Kartika"/>
-        <a:font script="Laoo" typeface="DokChampa"/>
-        <a:font script="Sinh" typeface="Iskoola Pota"/>
-        <a:font script="Mong" typeface="Mongolian Baiti"/>
-        <a:font script="Viet" typeface="Arial"/>
-        <a:font script="Uigh" typeface="Microsoft Uighur"/>
-        <a:font script="Geor" typeface="Sylfaen"/>
-        <a:font script="Armn" typeface="Arial"/>
-        <a:font script="Bugi" typeface="Leelawadee UI"/>
-        <a:font script="Bopo" typeface="Microsoft JhengHei"/>
-        <a:font script="Java" typeface="Javanese Text"/>
-        <a:font script="Lisu" typeface="Segoe UI"/>
-        <a:font script="Mymr" typeface="Myanmar Text"/>
-        <a:font script="Nkoo" typeface="Ebrima"/>
-        <a:font script="Olck" typeface="Nirmala UI"/>
-        <a:font script="Osma" typeface="Ebrima"/>
-        <a:font script="Phag" typeface="Phagspa"/>
-        <a:font script="Syrn" typeface="Estrangelo Edessa"/>
-        <a:font script="Syrj" typeface="Estrangelo Edessa"/>
-        <a:font script="Syre" typeface="Estrangelo Edessa"/>
-        <a:font script="Sora" typeface="Nirmala UI"/>
-        <a:font script="Tale" typeface="Microsoft Tai Le"/>
-        <a:font script="Talu" typeface="Microsoft New Tai Lue"/>
-        <a:font script="Tfng" typeface="Ebrima"/>
-      </a:minorFont>
-    </a:fontScheme>
-    <a:fmtScheme name="Office">
-      <a:fillStyleLst>
-        <a:solidFill>
-          <a:schemeClr val="phClr"/>
-        </a:solidFill>
-        <a:gradFill rotWithShape="1">
-          <a:gsLst>
-            <a:gs pos="0">
-              <a:schemeClr val="phClr">
-                <a:lumMod val="110000"/>
-                <a:satMod val="105000"/>
-                <a:tint val="67000"/>
-              </a:schemeClr>
-            </a:gs>
-            <a:gs pos="50000">
-              <a:schemeClr val="phClr">
-                <a:lumMod val="105000"/>
-                <a:satMod val="103000"/>
-                <a:tint val="73000"/>
-              </a:schemeClr>
-            </a:gs>
-            <a:gs pos="100000">
-              <a:schemeClr val="phClr">
-                <a:lumMod val="105000"/>
-                <a:satMod val="109000"/>
-                <a:tint val="81000"/>
-              </a:schemeClr>
-            </a:gs>
-          </a:gsLst>
-          <a:lin ang="5400000" scaled="0"/>
-        </a:gradFill>
-        <a:gradFill rotWithShape="1">
-          <a:gsLst>
-            <a:gs pos="0">
-              <a:schemeClr val="phClr">
-                <a:satMod val="103000"/>
-                <a:lumMod val="102000"/>
-                <a:tint val="94000"/>
-              </a:schemeClr>
-            </a:gs>
-            <a:gs pos="50000">
-              <a:schemeClr val="phClr">
-                <a:satMod val="110000"/>
-                <a:lumMod val="100000"/>
-                <a:shade val="100000"/>
-              </a:schemeClr>
-            </a:gs>
-            <a:gs pos="100000">
-              <a:schemeClr val="phClr">
-                <a:lumMod val="99000"/>
-                <a:satMod val="120000"/>
-                <a:shade val="78000"/>
-              </a:schemeClr>
-            </a:gs>
-          </a:gsLst>
-          <a:lin ang="5400000" scaled="0"/>
-        </a:gradFill>
-      </a:fillStyleLst>
-      <a:lnStyleLst>
-        <a:ln w="6350" cap="flat" cmpd="sng" algn="ctr">
-          <a:solidFill>
-            <a:schemeClr val="phClr"/>
-          </a:solidFill>
-          <a:prstDash val="solid"/>
-          <a:miter lim="800000"/>
-        </a:ln>
-        <a:ln w="12700" cap="flat" cmpd="sng" algn="ctr">
-          <a:solidFill>
-            <a:schemeClr val="phClr"/>
-          </a:solidFill>
-          <a:prstDash val="solid"/>
-          <a:miter lim="800000"/>
-        </a:ln>
-        <a:ln w="19050" cap="flat" cmpd="sng" algn="ctr">
-          <a:solidFill>
-            <a:schemeClr val="phClr"/>
-          </a:solidFill>
-          <a:prstDash val="solid"/>
-          <a:miter lim="800000"/>
-        </a:ln>
-      </a:lnStyleLst>
-      <a:effectStyleLst>
-        <a:effectStyle>
-          <a:effectLst/>
-        </a:effectStyle>
-        <a:effectStyle>
-          <a:effectLst/>
-        </a:effectStyle>
-        <a:effectStyle>
-          <a:effectLst>
-            <a:outerShdw blurRad="57150" dist="19050" dir="5400000" algn="ctr" rotWithShape="0">
-              <a:srgbClr val="000000">
-                <a:alpha val="63000"/>
-              </a:srgbClr>
-            </a:outerShdw>
-          </a:effectLst>
-        </a:effectStyle>
-      </a:effectStyleLst>
-      <a:bgFillStyleLst>
-        <a:solidFill>
-          <a:schemeClr val="phClr"/>
-        </a:solidFill>
-        <a:solidFill>
-          <a:schemeClr val="phClr">
-            <a:tint val="95000"/>
-            <a:satMod val="170000"/>
-          </a:schemeClr>
-        </a:solidFill>
-        <a:gradFill rotWithShape="1">
-          <a:gsLst>
-            <a:gs pos="0">
-              <a:schemeClr val="phClr">
-                <a:tint val="93000"/>
-                <a:satMod val="150000"/>
-                <a:shade val="98000"/>
-                <a:lumMod val="102000"/>
-              </a:schemeClr>
-            </a:gs>
-            <a:gs pos="50000">
-              <a:schemeClr val="phClr">
-                <a:tint val="98000"/>
-                <a:satMod val="130000"/>
-                <a:shade val="90000"/>
-                <a:lumMod val="103000"/>
-              </a:schemeClr>
-            </a:gs>
-            <a:gs pos="100000">
-              <a:schemeClr val="phClr">
-                <a:shade val="63000"/>
-                <a:satMod val="120000"/>
-              </a:schemeClr>
-            </a:gs>
-          </a:gsLst>
-          <a:lin ang="5400000" scaled="0"/>
-        </a:gradFill>
-      </a:bgFillStyleLst>
-    </a:fmtScheme>
-  </a:themeElements>
-  <a:objectDefaults/>
-  <a:extraClrSchemeLst/>
-  <a:extLst>
-    <a:ext uri="{05A4C25C-085E-4340-85A3-A5531E510DB2}">
-      <thm15:themeFamily xmlns:thm15="http://schemas.microsoft.com/office/thememl/2012/main" name="Office Theme" id="{62F939B6-93AF-4DB8-9C6B-D6C7DFDC589F}" vid="{4A3C46E8-61CC-4603-A589-7422A47A8E4A}"/>
-    </a:ext>
-  </a:extLst>
-</a:theme>
 </file>
--- a/docs/decks/L12.pptx
+++ b/docs/decks/L12.pptx
@@ -14472,16 +14472,16 @@
         </p:nvSpPr>
         <p:spPr>
           <a:xfrm>
-            <a:off x="566928" y="4297680"/>
-            <a:ext cx="11064240" cy="1600200"/>
+            <a:off x="566928" y="4114800"/>
+            <a:ext cx="4892040" cy="1828800"/>
           </a:xfrm>
           <a:prstGeom prst="roundRect">
             <a:avLst>
-              <a:gd name="adj" fmla="val 6857"/>
+              <a:gd name="adj" fmla="val 4000"/>
             </a:avLst>
           </a:prstGeom>
           <a:solidFill>
-            <a:srgbClr val="FFFFFF"/>
+            <a:srgbClr val="0A0810"/>
           </a:solidFill>
           <a:ln w="12700">
             <a:solidFill>
@@ -14493,14 +14493,74 @@
       </p:sp>
       <p:sp>
         <p:nvSpPr>
-          <p:cNvPr id="17" name="Text 14"/>
-          <p:cNvSpPr/>
-          <p:nvPr/>
-        </p:nvSpPr>
-        <p:spPr>
-          <a:xfrm>
-            <a:off x="786384" y="4443984"/>
-            <a:ext cx="10625328" cy="1307592"/>
+          <p:cNvPr id="17" name="Shape 14"/>
+          <p:cNvSpPr/>
+          <p:nvPr/>
+        </p:nvSpPr>
+        <p:spPr>
+          <a:xfrm>
+            <a:off x="694944" y="4233672"/>
+            <a:ext cx="73152" cy="73152"/>
+          </a:xfrm>
+          <a:prstGeom prst="ellipse">
+            <a:avLst/>
+          </a:prstGeom>
+          <a:solidFill>
+            <a:srgbClr val="FF6B6B"/>
+          </a:solidFill>
+          <a:ln/>
+        </p:spPr>
+      </p:sp>
+      <p:sp>
+        <p:nvSpPr>
+          <p:cNvPr id="18" name="Shape 15"/>
+          <p:cNvSpPr/>
+          <p:nvPr/>
+        </p:nvSpPr>
+        <p:spPr>
+          <a:xfrm>
+            <a:off x="841248" y="4233672"/>
+            <a:ext cx="73152" cy="73152"/>
+          </a:xfrm>
+          <a:prstGeom prst="ellipse">
+            <a:avLst/>
+          </a:prstGeom>
+          <a:solidFill>
+            <a:srgbClr val="6BA0F8"/>
+          </a:solidFill>
+          <a:ln/>
+        </p:spPr>
+      </p:sp>
+      <p:sp>
+        <p:nvSpPr>
+          <p:cNvPr id="19" name="Shape 16"/>
+          <p:cNvSpPr/>
+          <p:nvPr/>
+        </p:nvSpPr>
+        <p:spPr>
+          <a:xfrm>
+            <a:off x="987552" y="4233672"/>
+            <a:ext cx="73152" cy="73152"/>
+          </a:xfrm>
+          <a:prstGeom prst="ellipse">
+            <a:avLst/>
+          </a:prstGeom>
+          <a:solidFill>
+            <a:srgbClr val="3FCF8E"/>
+          </a:solidFill>
+          <a:ln/>
+        </p:spPr>
+      </p:sp>
+      <p:sp>
+        <p:nvSpPr>
+          <p:cNvPr id="20" name="Text 17"/>
+          <p:cNvSpPr/>
+          <p:nvPr/>
+        </p:nvSpPr>
+        <p:spPr>
+          <a:xfrm>
+            <a:off x="1170432" y="4114800"/>
+            <a:ext cx="4178808" cy="310896"/>
           </a:xfrm>
           <a:prstGeom prst="rect">
             <a:avLst/>
@@ -14513,23 +14573,1530 @@
           <a:lstStyle/>
           <a:p>
             <a:pPr indent="0" marL="0">
-              <a:lnSpc>
-                <a:spcPct val="112000"/>
-              </a:lnSpc>
-              <a:buNone/>
-            </a:pPr>
-            <a:r>
-              <a:rPr lang="en-US" sz="1300" dirty="0">
-                <a:solidFill>
-                  <a:srgbClr val="000000"/>
+              <a:buNone/>
+            </a:pPr>
+            <a:r>
+              <a:rPr lang="en-US" sz="800" dirty="0">
+                <a:solidFill>
+                  <a:srgbClr val="9A94AA"/>
+                </a:solidFill>
+                <a:latin typeface="Courier New" pitchFamily="34" charset="0"/>
+                <a:ea typeface="Courier New" pitchFamily="34" charset="-122"/>
+                <a:cs typeface="Courier New" pitchFamily="34" charset="-120"/>
+              </a:rPr>
+              <a:t>точка А · урок 1</a:t>
+            </a:r>
+            <a:endParaRPr lang="en-US" sz="800" dirty="0"/>
+          </a:p>
+        </p:txBody>
+      </p:sp>
+      <p:sp>
+        <p:nvSpPr>
+          <p:cNvPr id="21" name="Shape 18"/>
+          <p:cNvSpPr/>
+          <p:nvPr/>
+        </p:nvSpPr>
+        <p:spPr>
+          <a:xfrm>
+            <a:off x="566928" y="4425696"/>
+            <a:ext cx="4892040" cy="0"/>
+          </a:xfrm>
+          <a:prstGeom prst="line">
+            <a:avLst/>
+          </a:prstGeom>
+          <a:noFill/>
+          <a:ln w="9525">
+            <a:solidFill>
+              <a:srgbClr val="2A2438"/>
+            </a:solidFill>
+            <a:prstDash val="solid"/>
+          </a:ln>
+        </p:spPr>
+      </p:sp>
+      <p:sp>
+        <p:nvSpPr>
+          <p:cNvPr id="22" name="Shape 19"/>
+          <p:cNvSpPr/>
+          <p:nvPr/>
+        </p:nvSpPr>
+        <p:spPr>
+          <a:xfrm>
+            <a:off x="676656" y="4517136"/>
+            <a:ext cx="1484376" cy="621792"/>
+          </a:xfrm>
+          <a:prstGeom prst="roundRect">
+            <a:avLst>
+              <a:gd name="adj" fmla="val 7353"/>
+            </a:avLst>
+          </a:prstGeom>
+          <a:solidFill>
+            <a:srgbClr val="0A0810"/>
+          </a:solidFill>
+          <a:ln w="12700">
+            <a:solidFill>
+              <a:srgbClr val="2A2438"/>
+            </a:solidFill>
+            <a:prstDash val="solid"/>
+          </a:ln>
+        </p:spPr>
+      </p:sp>
+      <p:sp>
+        <p:nvSpPr>
+          <p:cNvPr id="23" name="Text 20"/>
+          <p:cNvSpPr/>
+          <p:nvPr/>
+        </p:nvSpPr>
+        <p:spPr>
+          <a:xfrm>
+            <a:off x="749808" y="4553712"/>
+            <a:ext cx="1338072" cy="161666"/>
+          </a:xfrm>
+          <a:prstGeom prst="rect">
+            <a:avLst/>
+          </a:prstGeom>
+          <a:noFill/>
+          <a:ln/>
+        </p:spPr>
+        <p:txBody>
+          <a:bodyPr wrap="square" lIns="0" tIns="0" rIns="0" bIns="0" rtlCol="0" anchor="t"/>
+          <a:lstStyle/>
+          <a:p>
+            <a:pPr indent="0" marL="0">
+              <a:buNone/>
+            </a:pPr>
+            <a:r>
+              <a:rPr lang="en-US" sz="750" dirty="0">
+                <a:solidFill>
+                  <a:srgbClr val="9A94AA"/>
+                </a:solidFill>
+                <a:latin typeface="Courier New" pitchFamily="34" charset="0"/>
+                <a:ea typeface="Courier New" pitchFamily="34" charset="-122"/>
+                <a:cs typeface="Courier New" pitchFamily="34" charset="-120"/>
+              </a:rPr>
+              <a:t>requests</a:t>
+            </a:r>
+            <a:endParaRPr lang="en-US" sz="750" dirty="0"/>
+          </a:p>
+        </p:txBody>
+      </p:sp>
+      <p:sp>
+        <p:nvSpPr>
+          <p:cNvPr id="24" name="Text 21"/>
+          <p:cNvSpPr/>
+          <p:nvPr/>
+        </p:nvSpPr>
+        <p:spPr>
+          <a:xfrm>
+            <a:off x="749808" y="4728545"/>
+            <a:ext cx="1338072" cy="360639"/>
+          </a:xfrm>
+          <a:prstGeom prst="rect">
+            <a:avLst/>
+          </a:prstGeom>
+          <a:noFill/>
+          <a:ln/>
+        </p:spPr>
+        <p:txBody>
+          <a:bodyPr wrap="square" lIns="0" tIns="0" rIns="0" bIns="0" rtlCol="0" anchor="ctr"/>
+          <a:lstStyle/>
+          <a:p>
+            <a:pPr indent="0" marL="0">
+              <a:buNone/>
+            </a:pPr>
+            <a:r>
+              <a:rPr lang="en-US" sz="1500" dirty="0">
+                <a:solidFill>
+                  <a:srgbClr val="9A94AA"/>
+                </a:solidFill>
+                <a:latin typeface="Courier New" pitchFamily="34" charset="0"/>
+                <a:ea typeface="Courier New" pitchFamily="34" charset="-122"/>
+                <a:cs typeface="Courier New" pitchFamily="34" charset="-120"/>
+              </a:rPr>
+              <a:t>—</a:t>
+            </a:r>
+            <a:endParaRPr lang="en-US" sz="1500" dirty="0"/>
+          </a:p>
+        </p:txBody>
+      </p:sp>
+      <p:sp>
+        <p:nvSpPr>
+          <p:cNvPr id="25" name="Shape 22"/>
+          <p:cNvSpPr/>
+          <p:nvPr/>
+        </p:nvSpPr>
+        <p:spPr>
+          <a:xfrm>
+            <a:off x="2270760" y="4517136"/>
+            <a:ext cx="1484376" cy="621792"/>
+          </a:xfrm>
+          <a:prstGeom prst="roundRect">
+            <a:avLst>
+              <a:gd name="adj" fmla="val 7353"/>
+            </a:avLst>
+          </a:prstGeom>
+          <a:solidFill>
+            <a:srgbClr val="0A0810"/>
+          </a:solidFill>
+          <a:ln w="12700">
+            <a:solidFill>
+              <a:srgbClr val="2A2438"/>
+            </a:solidFill>
+            <a:prstDash val="solid"/>
+          </a:ln>
+        </p:spPr>
+      </p:sp>
+      <p:sp>
+        <p:nvSpPr>
+          <p:cNvPr id="26" name="Text 23"/>
+          <p:cNvSpPr/>
+          <p:nvPr/>
+        </p:nvSpPr>
+        <p:spPr>
+          <a:xfrm>
+            <a:off x="2343912" y="4553712"/>
+            <a:ext cx="1338072" cy="161666"/>
+          </a:xfrm>
+          <a:prstGeom prst="rect">
+            <a:avLst/>
+          </a:prstGeom>
+          <a:noFill/>
+          <a:ln/>
+        </p:spPr>
+        <p:txBody>
+          <a:bodyPr wrap="square" lIns="0" tIns="0" rIns="0" bIns="0" rtlCol="0" anchor="t"/>
+          <a:lstStyle/>
+          <a:p>
+            <a:pPr indent="0" marL="0">
+              <a:buNone/>
+            </a:pPr>
+            <a:r>
+              <a:rPr lang="en-US" sz="750" dirty="0">
+                <a:solidFill>
+                  <a:srgbClr val="9A94AA"/>
+                </a:solidFill>
+                <a:latin typeface="Courier New" pitchFamily="34" charset="0"/>
+                <a:ea typeface="Courier New" pitchFamily="34" charset="-122"/>
+                <a:cs typeface="Courier New" pitchFamily="34" charset="-120"/>
+              </a:rPr>
+              <a:t>cost</a:t>
+            </a:r>
+            <a:endParaRPr lang="en-US" sz="750" dirty="0"/>
+          </a:p>
+        </p:txBody>
+      </p:sp>
+      <p:sp>
+        <p:nvSpPr>
+          <p:cNvPr id="27" name="Text 24"/>
+          <p:cNvSpPr/>
+          <p:nvPr/>
+        </p:nvSpPr>
+        <p:spPr>
+          <a:xfrm>
+            <a:off x="2343912" y="4728545"/>
+            <a:ext cx="1338072" cy="360639"/>
+          </a:xfrm>
+          <a:prstGeom prst="rect">
+            <a:avLst/>
+          </a:prstGeom>
+          <a:noFill/>
+          <a:ln/>
+        </p:spPr>
+        <p:txBody>
+          <a:bodyPr wrap="square" lIns="0" tIns="0" rIns="0" bIns="0" rtlCol="0" anchor="ctr"/>
+          <a:lstStyle/>
+          <a:p>
+            <a:pPr indent="0" marL="0">
+              <a:buNone/>
+            </a:pPr>
+            <a:r>
+              <a:rPr lang="en-US" sz="1500" dirty="0">
+                <a:solidFill>
+                  <a:srgbClr val="9A94AA"/>
+                </a:solidFill>
+                <a:latin typeface="Courier New" pitchFamily="34" charset="0"/>
+                <a:ea typeface="Courier New" pitchFamily="34" charset="-122"/>
+                <a:cs typeface="Courier New" pitchFamily="34" charset="-120"/>
+              </a:rPr>
+              <a:t>—</a:t>
+            </a:r>
+            <a:endParaRPr lang="en-US" sz="1500" dirty="0"/>
+          </a:p>
+        </p:txBody>
+      </p:sp>
+      <p:sp>
+        <p:nvSpPr>
+          <p:cNvPr id="28" name="Shape 25"/>
+          <p:cNvSpPr/>
+          <p:nvPr/>
+        </p:nvSpPr>
+        <p:spPr>
+          <a:xfrm>
+            <a:off x="3864864" y="4517136"/>
+            <a:ext cx="1484376" cy="621792"/>
+          </a:xfrm>
+          <a:prstGeom prst="roundRect">
+            <a:avLst>
+              <a:gd name="adj" fmla="val 7353"/>
+            </a:avLst>
+          </a:prstGeom>
+          <a:solidFill>
+            <a:srgbClr val="0A0810"/>
+          </a:solidFill>
+          <a:ln w="12700">
+            <a:solidFill>
+              <a:srgbClr val="2A2438"/>
+            </a:solidFill>
+            <a:prstDash val="solid"/>
+          </a:ln>
+        </p:spPr>
+      </p:sp>
+      <p:sp>
+        <p:nvSpPr>
+          <p:cNvPr id="29" name="Text 26"/>
+          <p:cNvSpPr/>
+          <p:nvPr/>
+        </p:nvSpPr>
+        <p:spPr>
+          <a:xfrm>
+            <a:off x="3938016" y="4553712"/>
+            <a:ext cx="1338072" cy="161666"/>
+          </a:xfrm>
+          <a:prstGeom prst="rect">
+            <a:avLst/>
+          </a:prstGeom>
+          <a:noFill/>
+          <a:ln/>
+        </p:spPr>
+        <p:txBody>
+          <a:bodyPr wrap="square" lIns="0" tIns="0" rIns="0" bIns="0" rtlCol="0" anchor="t"/>
+          <a:lstStyle/>
+          <a:p>
+            <a:pPr indent="0" marL="0">
+              <a:buNone/>
+            </a:pPr>
+            <a:r>
+              <a:rPr lang="en-US" sz="750" dirty="0">
+                <a:solidFill>
+                  <a:srgbClr val="9A94AA"/>
+                </a:solidFill>
+                <a:latin typeface="Courier New" pitchFamily="34" charset="0"/>
+                <a:ea typeface="Courier New" pitchFamily="34" charset="-122"/>
+                <a:cs typeface="Courier New" pitchFamily="34" charset="-120"/>
+              </a:rPr>
+              <a:t>p95</a:t>
+            </a:r>
+            <a:endParaRPr lang="en-US" sz="750" dirty="0"/>
+          </a:p>
+        </p:txBody>
+      </p:sp>
+      <p:sp>
+        <p:nvSpPr>
+          <p:cNvPr id="30" name="Text 27"/>
+          <p:cNvSpPr/>
+          <p:nvPr/>
+        </p:nvSpPr>
+        <p:spPr>
+          <a:xfrm>
+            <a:off x="3938016" y="4728545"/>
+            <a:ext cx="1338072" cy="360639"/>
+          </a:xfrm>
+          <a:prstGeom prst="rect">
+            <a:avLst/>
+          </a:prstGeom>
+          <a:noFill/>
+          <a:ln/>
+        </p:spPr>
+        <p:txBody>
+          <a:bodyPr wrap="square" lIns="0" tIns="0" rIns="0" bIns="0" rtlCol="0" anchor="ctr"/>
+          <a:lstStyle/>
+          <a:p>
+            <a:pPr indent="0" marL="0">
+              <a:buNone/>
+            </a:pPr>
+            <a:r>
+              <a:rPr lang="en-US" sz="1500" dirty="0">
+                <a:solidFill>
+                  <a:srgbClr val="9A94AA"/>
+                </a:solidFill>
+                <a:latin typeface="Courier New" pitchFamily="34" charset="0"/>
+                <a:ea typeface="Courier New" pitchFamily="34" charset="-122"/>
+                <a:cs typeface="Courier New" pitchFamily="34" charset="-120"/>
+              </a:rPr>
+              <a:t>—</a:t>
+            </a:r>
+            <a:endParaRPr lang="en-US" sz="1500" dirty="0"/>
+          </a:p>
+        </p:txBody>
+      </p:sp>
+      <p:sp>
+        <p:nvSpPr>
+          <p:cNvPr id="31" name="Shape 28"/>
+          <p:cNvSpPr/>
+          <p:nvPr/>
+        </p:nvSpPr>
+        <p:spPr>
+          <a:xfrm>
+            <a:off x="676656" y="5230368"/>
+            <a:ext cx="1484376" cy="621792"/>
+          </a:xfrm>
+          <a:prstGeom prst="roundRect">
+            <a:avLst>
+              <a:gd name="adj" fmla="val 7353"/>
+            </a:avLst>
+          </a:prstGeom>
+          <a:solidFill>
+            <a:srgbClr val="0A0810"/>
+          </a:solidFill>
+          <a:ln w="12700">
+            <a:solidFill>
+              <a:srgbClr val="2A2438"/>
+            </a:solidFill>
+            <a:prstDash val="solid"/>
+          </a:ln>
+        </p:spPr>
+      </p:sp>
+      <p:sp>
+        <p:nvSpPr>
+          <p:cNvPr id="32" name="Text 29"/>
+          <p:cNvSpPr/>
+          <p:nvPr/>
+        </p:nvSpPr>
+        <p:spPr>
+          <a:xfrm>
+            <a:off x="749808" y="5266944"/>
+            <a:ext cx="1338072" cy="161666"/>
+          </a:xfrm>
+          <a:prstGeom prst="rect">
+            <a:avLst/>
+          </a:prstGeom>
+          <a:noFill/>
+          <a:ln/>
+        </p:spPr>
+        <p:txBody>
+          <a:bodyPr wrap="square" lIns="0" tIns="0" rIns="0" bIns="0" rtlCol="0" anchor="t"/>
+          <a:lstStyle/>
+          <a:p>
+            <a:pPr indent="0" marL="0">
+              <a:buNone/>
+            </a:pPr>
+            <a:r>
+              <a:rPr lang="en-US" sz="750" dirty="0">
+                <a:solidFill>
+                  <a:srgbClr val="9A94AA"/>
+                </a:solidFill>
+                <a:latin typeface="Courier New" pitchFamily="34" charset="0"/>
+                <a:ea typeface="Courier New" pitchFamily="34" charset="-122"/>
+                <a:cs typeface="Courier New" pitchFamily="34" charset="-120"/>
+              </a:rPr>
+              <a:t>error</a:t>
+            </a:r>
+            <a:endParaRPr lang="en-US" sz="750" dirty="0"/>
+          </a:p>
+        </p:txBody>
+      </p:sp>
+      <p:sp>
+        <p:nvSpPr>
+          <p:cNvPr id="33" name="Text 30"/>
+          <p:cNvSpPr/>
+          <p:nvPr/>
+        </p:nvSpPr>
+        <p:spPr>
+          <a:xfrm>
+            <a:off x="749808" y="5441777"/>
+            <a:ext cx="1338072" cy="360639"/>
+          </a:xfrm>
+          <a:prstGeom prst="rect">
+            <a:avLst/>
+          </a:prstGeom>
+          <a:noFill/>
+          <a:ln/>
+        </p:spPr>
+        <p:txBody>
+          <a:bodyPr wrap="square" lIns="0" tIns="0" rIns="0" bIns="0" rtlCol="0" anchor="ctr"/>
+          <a:lstStyle/>
+          <a:p>
+            <a:pPr indent="0" marL="0">
+              <a:buNone/>
+            </a:pPr>
+            <a:r>
+              <a:rPr lang="en-US" sz="1500" dirty="0">
+                <a:solidFill>
+                  <a:srgbClr val="9A94AA"/>
+                </a:solidFill>
+                <a:latin typeface="Courier New" pitchFamily="34" charset="0"/>
+                <a:ea typeface="Courier New" pitchFamily="34" charset="-122"/>
+                <a:cs typeface="Courier New" pitchFamily="34" charset="-120"/>
+              </a:rPr>
+              <a:t>—</a:t>
+            </a:r>
+            <a:endParaRPr lang="en-US" sz="1500" dirty="0"/>
+          </a:p>
+        </p:txBody>
+      </p:sp>
+      <p:sp>
+        <p:nvSpPr>
+          <p:cNvPr id="34" name="Shape 31"/>
+          <p:cNvSpPr/>
+          <p:nvPr/>
+        </p:nvSpPr>
+        <p:spPr>
+          <a:xfrm>
+            <a:off x="2270760" y="5230368"/>
+            <a:ext cx="1484376" cy="621792"/>
+          </a:xfrm>
+          <a:prstGeom prst="roundRect">
+            <a:avLst>
+              <a:gd name="adj" fmla="val 7353"/>
+            </a:avLst>
+          </a:prstGeom>
+          <a:solidFill>
+            <a:srgbClr val="0A0810"/>
+          </a:solidFill>
+          <a:ln w="12700">
+            <a:solidFill>
+              <a:srgbClr val="2A2438"/>
+            </a:solidFill>
+            <a:prstDash val="solid"/>
+          </a:ln>
+        </p:spPr>
+      </p:sp>
+      <p:sp>
+        <p:nvSpPr>
+          <p:cNvPr id="35" name="Text 32"/>
+          <p:cNvSpPr/>
+          <p:nvPr/>
+        </p:nvSpPr>
+        <p:spPr>
+          <a:xfrm>
+            <a:off x="2343912" y="5266944"/>
+            <a:ext cx="1338072" cy="161666"/>
+          </a:xfrm>
+          <a:prstGeom prst="rect">
+            <a:avLst/>
+          </a:prstGeom>
+          <a:noFill/>
+          <a:ln/>
+        </p:spPr>
+        <p:txBody>
+          <a:bodyPr wrap="square" lIns="0" tIns="0" rIns="0" bIns="0" rtlCol="0" anchor="t"/>
+          <a:lstStyle/>
+          <a:p>
+            <a:pPr indent="0" marL="0">
+              <a:buNone/>
+            </a:pPr>
+            <a:r>
+              <a:rPr lang="en-US" sz="750" dirty="0">
+                <a:solidFill>
+                  <a:srgbClr val="9A94AA"/>
+                </a:solidFill>
+                <a:latin typeface="Courier New" pitchFamily="34" charset="0"/>
+                <a:ea typeface="Courier New" pitchFamily="34" charset="-122"/>
+                <a:cs typeface="Courier New" pitchFamily="34" charset="-120"/>
+              </a:rPr>
+              <a:t>cache-hit</a:t>
+            </a:r>
+            <a:endParaRPr lang="en-US" sz="750" dirty="0"/>
+          </a:p>
+        </p:txBody>
+      </p:sp>
+      <p:sp>
+        <p:nvSpPr>
+          <p:cNvPr id="36" name="Text 33"/>
+          <p:cNvSpPr/>
+          <p:nvPr/>
+        </p:nvSpPr>
+        <p:spPr>
+          <a:xfrm>
+            <a:off x="2343912" y="5441777"/>
+            <a:ext cx="1338072" cy="360639"/>
+          </a:xfrm>
+          <a:prstGeom prst="rect">
+            <a:avLst/>
+          </a:prstGeom>
+          <a:noFill/>
+          <a:ln/>
+        </p:spPr>
+        <p:txBody>
+          <a:bodyPr wrap="square" lIns="0" tIns="0" rIns="0" bIns="0" rtlCol="0" anchor="ctr"/>
+          <a:lstStyle/>
+          <a:p>
+            <a:pPr indent="0" marL="0">
+              <a:buNone/>
+            </a:pPr>
+            <a:r>
+              <a:rPr lang="en-US" sz="1500" dirty="0">
+                <a:solidFill>
+                  <a:srgbClr val="9A94AA"/>
+                </a:solidFill>
+                <a:latin typeface="Courier New" pitchFamily="34" charset="0"/>
+                <a:ea typeface="Courier New" pitchFamily="34" charset="-122"/>
+                <a:cs typeface="Courier New" pitchFamily="34" charset="-120"/>
+              </a:rPr>
+              <a:t>—</a:t>
+            </a:r>
+            <a:endParaRPr lang="en-US" sz="1500" dirty="0"/>
+          </a:p>
+        </p:txBody>
+      </p:sp>
+      <p:sp>
+        <p:nvSpPr>
+          <p:cNvPr id="37" name="Shape 34"/>
+          <p:cNvSpPr/>
+          <p:nvPr/>
+        </p:nvSpPr>
+        <p:spPr>
+          <a:xfrm>
+            <a:off x="3864864" y="5230368"/>
+            <a:ext cx="1484376" cy="621792"/>
+          </a:xfrm>
+          <a:prstGeom prst="roundRect">
+            <a:avLst>
+              <a:gd name="adj" fmla="val 7353"/>
+            </a:avLst>
+          </a:prstGeom>
+          <a:solidFill>
+            <a:srgbClr val="0A0810"/>
+          </a:solidFill>
+          <a:ln w="12700">
+            <a:solidFill>
+              <a:srgbClr val="2A2438"/>
+            </a:solidFill>
+            <a:prstDash val="solid"/>
+          </a:ln>
+        </p:spPr>
+      </p:sp>
+      <p:sp>
+        <p:nvSpPr>
+          <p:cNvPr id="38" name="Text 35"/>
+          <p:cNvSpPr/>
+          <p:nvPr/>
+        </p:nvSpPr>
+        <p:spPr>
+          <a:xfrm>
+            <a:off x="3938016" y="5266944"/>
+            <a:ext cx="1338072" cy="161666"/>
+          </a:xfrm>
+          <a:prstGeom prst="rect">
+            <a:avLst/>
+          </a:prstGeom>
+          <a:noFill/>
+          <a:ln/>
+        </p:spPr>
+        <p:txBody>
+          <a:bodyPr wrap="square" lIns="0" tIns="0" rIns="0" bIns="0" rtlCol="0" anchor="t"/>
+          <a:lstStyle/>
+          <a:p>
+            <a:pPr indent="0" marL="0">
+              <a:buNone/>
+            </a:pPr>
+            <a:r>
+              <a:rPr lang="en-US" sz="750" dirty="0">
+                <a:solidFill>
+                  <a:srgbClr val="9A94AA"/>
+                </a:solidFill>
+                <a:latin typeface="Courier New" pitchFamily="34" charset="0"/>
+                <a:ea typeface="Courier New" pitchFamily="34" charset="-122"/>
+                <a:cs typeface="Courier New" pitchFamily="34" charset="-120"/>
+              </a:rPr>
+              <a:t>fallback</a:t>
+            </a:r>
+            <a:endParaRPr lang="en-US" sz="750" dirty="0"/>
+          </a:p>
+        </p:txBody>
+      </p:sp>
+      <p:sp>
+        <p:nvSpPr>
+          <p:cNvPr id="39" name="Text 36"/>
+          <p:cNvSpPr/>
+          <p:nvPr/>
+        </p:nvSpPr>
+        <p:spPr>
+          <a:xfrm>
+            <a:off x="3938016" y="5441777"/>
+            <a:ext cx="1338072" cy="360639"/>
+          </a:xfrm>
+          <a:prstGeom prst="rect">
+            <a:avLst/>
+          </a:prstGeom>
+          <a:noFill/>
+          <a:ln/>
+        </p:spPr>
+        <p:txBody>
+          <a:bodyPr wrap="square" lIns="0" tIns="0" rIns="0" bIns="0" rtlCol="0" anchor="ctr"/>
+          <a:lstStyle/>
+          <a:p>
+            <a:pPr indent="0" marL="0">
+              <a:buNone/>
+            </a:pPr>
+            <a:r>
+              <a:rPr lang="en-US" sz="1500" dirty="0">
+                <a:solidFill>
+                  <a:srgbClr val="9A94AA"/>
+                </a:solidFill>
+                <a:latin typeface="Courier New" pitchFamily="34" charset="0"/>
+                <a:ea typeface="Courier New" pitchFamily="34" charset="-122"/>
+                <a:cs typeface="Courier New" pitchFamily="34" charset="-120"/>
+              </a:rPr>
+              <a:t>—</a:t>
+            </a:r>
+            <a:endParaRPr lang="en-US" sz="1500" dirty="0"/>
+          </a:p>
+        </p:txBody>
+      </p:sp>
+      <p:sp>
+        <p:nvSpPr>
+          <p:cNvPr id="40" name="Text 37"/>
+          <p:cNvSpPr/>
+          <p:nvPr/>
+        </p:nvSpPr>
+        <p:spPr>
+          <a:xfrm>
+            <a:off x="5532120" y="4114800"/>
+            <a:ext cx="1097280" cy="1828800"/>
+          </a:xfrm>
+          <a:prstGeom prst="rect">
+            <a:avLst/>
+          </a:prstGeom>
+          <a:noFill/>
+          <a:ln/>
+        </p:spPr>
+        <p:txBody>
+          <a:bodyPr wrap="square" lIns="0" tIns="0" rIns="0" bIns="0" rtlCol="0" anchor="ctr"/>
+          <a:lstStyle/>
+          <a:p>
+            <a:pPr algn="ctr" indent="0" marL="0">
+              <a:buNone/>
+            </a:pPr>
+            <a:r>
+              <a:rPr lang="en-US" sz="2600" b="1" dirty="0">
+                <a:solidFill>
+                  <a:srgbClr val="5A05F4"/>
                 </a:solidFill>
                 <a:latin typeface="Montserrat" pitchFamily="34" charset="0"/>
                 <a:ea typeface="Montserrat" pitchFamily="34" charset="-122"/>
                 <a:cs typeface="Montserrat" pitchFamily="34" charset="-120"/>
               </a:rPr>
-              <a:t>Порівняйте з точкою А з уроку 1: та сама консоль, ті самі плитки — і жодного «—». Це і є різниця, яку ви зробили за шість тижнів.</a:t>
+              <a:t>→</a:t>
+            </a:r>
+            <a:endParaRPr lang="en-US" sz="2600" dirty="0"/>
+          </a:p>
+        </p:txBody>
+      </p:sp>
+      <p:sp>
+        <p:nvSpPr>
+          <p:cNvPr id="41" name="Shape 38"/>
+          <p:cNvSpPr/>
+          <p:nvPr/>
+        </p:nvSpPr>
+        <p:spPr>
+          <a:xfrm>
+            <a:off x="6739128" y="4114800"/>
+            <a:ext cx="4892040" cy="1828800"/>
+          </a:xfrm>
+          <a:prstGeom prst="roundRect">
+            <a:avLst>
+              <a:gd name="adj" fmla="val 4000"/>
+            </a:avLst>
+          </a:prstGeom>
+          <a:solidFill>
+            <a:srgbClr val="0A0810"/>
+          </a:solidFill>
+          <a:ln w="12700">
+            <a:solidFill>
+              <a:srgbClr val="D9D9D9"/>
+            </a:solidFill>
+            <a:prstDash val="solid"/>
+          </a:ln>
+        </p:spPr>
+      </p:sp>
+      <p:sp>
+        <p:nvSpPr>
+          <p:cNvPr id="42" name="Shape 39"/>
+          <p:cNvSpPr/>
+          <p:nvPr/>
+        </p:nvSpPr>
+        <p:spPr>
+          <a:xfrm>
+            <a:off x="6867144" y="4233672"/>
+            <a:ext cx="73152" cy="73152"/>
+          </a:xfrm>
+          <a:prstGeom prst="ellipse">
+            <a:avLst/>
+          </a:prstGeom>
+          <a:solidFill>
+            <a:srgbClr val="FF6B6B"/>
+          </a:solidFill>
+          <a:ln/>
+        </p:spPr>
+      </p:sp>
+      <p:sp>
+        <p:nvSpPr>
+          <p:cNvPr id="43" name="Shape 40"/>
+          <p:cNvSpPr/>
+          <p:nvPr/>
+        </p:nvSpPr>
+        <p:spPr>
+          <a:xfrm>
+            <a:off x="7013448" y="4233672"/>
+            <a:ext cx="73152" cy="73152"/>
+          </a:xfrm>
+          <a:prstGeom prst="ellipse">
+            <a:avLst/>
+          </a:prstGeom>
+          <a:solidFill>
+            <a:srgbClr val="6BA0F8"/>
+          </a:solidFill>
+          <a:ln/>
+        </p:spPr>
+      </p:sp>
+      <p:sp>
+        <p:nvSpPr>
+          <p:cNvPr id="44" name="Shape 41"/>
+          <p:cNvSpPr/>
+          <p:nvPr/>
+        </p:nvSpPr>
+        <p:spPr>
+          <a:xfrm>
+            <a:off x="7159752" y="4233672"/>
+            <a:ext cx="73152" cy="73152"/>
+          </a:xfrm>
+          <a:prstGeom prst="ellipse">
+            <a:avLst/>
+          </a:prstGeom>
+          <a:solidFill>
+            <a:srgbClr val="3FCF8E"/>
+          </a:solidFill>
+          <a:ln/>
+        </p:spPr>
+      </p:sp>
+      <p:sp>
+        <p:nvSpPr>
+          <p:cNvPr id="45" name="Text 42"/>
+          <p:cNvSpPr/>
+          <p:nvPr/>
+        </p:nvSpPr>
+        <p:spPr>
+          <a:xfrm>
+            <a:off x="7342632" y="4114800"/>
+            <a:ext cx="4178808" cy="310896"/>
+          </a:xfrm>
+          <a:prstGeom prst="rect">
+            <a:avLst/>
+          </a:prstGeom>
+          <a:noFill/>
+          <a:ln/>
+        </p:spPr>
+        <p:txBody>
+          <a:bodyPr wrap="square" lIns="0" tIns="0" rIns="0" bIns="0" rtlCol="0" anchor="ctr"/>
+          <a:lstStyle/>
+          <a:p>
+            <a:pPr indent="0" marL="0">
+              <a:buNone/>
+            </a:pPr>
+            <a:r>
+              <a:rPr lang="en-US" sz="800" dirty="0">
+                <a:solidFill>
+                  <a:srgbClr val="9A94AA"/>
+                </a:solidFill>
+                <a:latin typeface="Courier New" pitchFamily="34" charset="0"/>
+                <a:ea typeface="Courier New" pitchFamily="34" charset="-122"/>
+                <a:cs typeface="Courier New" pitchFamily="34" charset="-120"/>
+              </a:rPr>
+              <a:t>точка Б · урок 12</a:t>
+            </a:r>
+            <a:endParaRPr lang="en-US" sz="800" dirty="0"/>
+          </a:p>
+        </p:txBody>
+      </p:sp>
+      <p:sp>
+        <p:nvSpPr>
+          <p:cNvPr id="46" name="Shape 43"/>
+          <p:cNvSpPr/>
+          <p:nvPr/>
+        </p:nvSpPr>
+        <p:spPr>
+          <a:xfrm>
+            <a:off x="6739128" y="4425696"/>
+            <a:ext cx="4892040" cy="0"/>
+          </a:xfrm>
+          <a:prstGeom prst="line">
+            <a:avLst/>
+          </a:prstGeom>
+          <a:noFill/>
+          <a:ln w="9525">
+            <a:solidFill>
+              <a:srgbClr val="2A2438"/>
+            </a:solidFill>
+            <a:prstDash val="solid"/>
+          </a:ln>
+        </p:spPr>
+      </p:sp>
+      <p:sp>
+        <p:nvSpPr>
+          <p:cNvPr id="47" name="Shape 44"/>
+          <p:cNvSpPr/>
+          <p:nvPr/>
+        </p:nvSpPr>
+        <p:spPr>
+          <a:xfrm>
+            <a:off x="6848856" y="4517136"/>
+            <a:ext cx="1484376" cy="621792"/>
+          </a:xfrm>
+          <a:prstGeom prst="roundRect">
+            <a:avLst>
+              <a:gd name="adj" fmla="val 7353"/>
+            </a:avLst>
+          </a:prstGeom>
+          <a:solidFill>
+            <a:srgbClr val="0A0810"/>
+          </a:solidFill>
+          <a:ln w="12700">
+            <a:solidFill>
+              <a:srgbClr val="2A2438"/>
+            </a:solidFill>
+            <a:prstDash val="solid"/>
+          </a:ln>
+        </p:spPr>
+      </p:sp>
+      <p:sp>
+        <p:nvSpPr>
+          <p:cNvPr id="48" name="Text 45"/>
+          <p:cNvSpPr/>
+          <p:nvPr/>
+        </p:nvSpPr>
+        <p:spPr>
+          <a:xfrm>
+            <a:off x="6922008" y="4553712"/>
+            <a:ext cx="1338072" cy="161666"/>
+          </a:xfrm>
+          <a:prstGeom prst="rect">
+            <a:avLst/>
+          </a:prstGeom>
+          <a:noFill/>
+          <a:ln/>
+        </p:spPr>
+        <p:txBody>
+          <a:bodyPr wrap="square" lIns="0" tIns="0" rIns="0" bIns="0" rtlCol="0" anchor="t"/>
+          <a:lstStyle/>
+          <a:p>
+            <a:pPr indent="0" marL="0">
+              <a:buNone/>
+            </a:pPr>
+            <a:r>
+              <a:rPr lang="en-US" sz="750" dirty="0">
+                <a:solidFill>
+                  <a:srgbClr val="9A94AA"/>
+                </a:solidFill>
+                <a:latin typeface="Courier New" pitchFamily="34" charset="0"/>
+                <a:ea typeface="Courier New" pitchFamily="34" charset="-122"/>
+                <a:cs typeface="Courier New" pitchFamily="34" charset="-120"/>
+              </a:rPr>
+              <a:t>requests</a:t>
+            </a:r>
+            <a:endParaRPr lang="en-US" sz="750" dirty="0"/>
+          </a:p>
+        </p:txBody>
+      </p:sp>
+      <p:sp>
+        <p:nvSpPr>
+          <p:cNvPr id="49" name="Text 46"/>
+          <p:cNvSpPr/>
+          <p:nvPr/>
+        </p:nvSpPr>
+        <p:spPr>
+          <a:xfrm>
+            <a:off x="6922008" y="4728545"/>
+            <a:ext cx="1338072" cy="360639"/>
+          </a:xfrm>
+          <a:prstGeom prst="rect">
+            <a:avLst/>
+          </a:prstGeom>
+          <a:noFill/>
+          <a:ln/>
+        </p:spPr>
+        <p:txBody>
+          <a:bodyPr wrap="square" lIns="0" tIns="0" rIns="0" bIns="0" rtlCol="0" anchor="ctr"/>
+          <a:lstStyle/>
+          <a:p>
+            <a:pPr indent="0" marL="0">
+              <a:buNone/>
+            </a:pPr>
+            <a:r>
+              <a:rPr lang="en-US" sz="1300" b="1" dirty="0">
+                <a:solidFill>
+                  <a:srgbClr val="D8D4E4"/>
+                </a:solidFill>
+                <a:latin typeface="Courier New" pitchFamily="34" charset="0"/>
+                <a:ea typeface="Courier New" pitchFamily="34" charset="-122"/>
+                <a:cs typeface="Courier New" pitchFamily="34" charset="-120"/>
+              </a:rPr>
+              <a:t>128</a:t>
             </a:r>
             <a:endParaRPr lang="en-US" sz="1300" dirty="0"/>
+          </a:p>
+        </p:txBody>
+      </p:sp>
+      <p:sp>
+        <p:nvSpPr>
+          <p:cNvPr id="50" name="Shape 47"/>
+          <p:cNvSpPr/>
+          <p:nvPr/>
+        </p:nvSpPr>
+        <p:spPr>
+          <a:xfrm>
+            <a:off x="8442960" y="4517136"/>
+            <a:ext cx="1484376" cy="621792"/>
+          </a:xfrm>
+          <a:prstGeom prst="roundRect">
+            <a:avLst>
+              <a:gd name="adj" fmla="val 7353"/>
+            </a:avLst>
+          </a:prstGeom>
+          <a:solidFill>
+            <a:srgbClr val="0A0810"/>
+          </a:solidFill>
+          <a:ln w="12700">
+            <a:solidFill>
+              <a:srgbClr val="2A2438"/>
+            </a:solidFill>
+            <a:prstDash val="solid"/>
+          </a:ln>
+        </p:spPr>
+      </p:sp>
+      <p:sp>
+        <p:nvSpPr>
+          <p:cNvPr id="51" name="Text 48"/>
+          <p:cNvSpPr/>
+          <p:nvPr/>
+        </p:nvSpPr>
+        <p:spPr>
+          <a:xfrm>
+            <a:off x="8516112" y="4553712"/>
+            <a:ext cx="1338072" cy="161666"/>
+          </a:xfrm>
+          <a:prstGeom prst="rect">
+            <a:avLst/>
+          </a:prstGeom>
+          <a:noFill/>
+          <a:ln/>
+        </p:spPr>
+        <p:txBody>
+          <a:bodyPr wrap="square" lIns="0" tIns="0" rIns="0" bIns="0" rtlCol="0" anchor="t"/>
+          <a:lstStyle/>
+          <a:p>
+            <a:pPr indent="0" marL="0">
+              <a:buNone/>
+            </a:pPr>
+            <a:r>
+              <a:rPr lang="en-US" sz="750" dirty="0">
+                <a:solidFill>
+                  <a:srgbClr val="9A94AA"/>
+                </a:solidFill>
+                <a:latin typeface="Courier New" pitchFamily="34" charset="0"/>
+                <a:ea typeface="Courier New" pitchFamily="34" charset="-122"/>
+                <a:cs typeface="Courier New" pitchFamily="34" charset="-120"/>
+              </a:rPr>
+              <a:t>cost</a:t>
+            </a:r>
+            <a:endParaRPr lang="en-US" sz="750" dirty="0"/>
+          </a:p>
+        </p:txBody>
+      </p:sp>
+      <p:sp>
+        <p:nvSpPr>
+          <p:cNvPr id="52" name="Text 49"/>
+          <p:cNvSpPr/>
+          <p:nvPr/>
+        </p:nvSpPr>
+        <p:spPr>
+          <a:xfrm>
+            <a:off x="8516112" y="4728545"/>
+            <a:ext cx="1338072" cy="360639"/>
+          </a:xfrm>
+          <a:prstGeom prst="rect">
+            <a:avLst/>
+          </a:prstGeom>
+          <a:noFill/>
+          <a:ln/>
+        </p:spPr>
+        <p:txBody>
+          <a:bodyPr wrap="square" lIns="0" tIns="0" rIns="0" bIns="0" rtlCol="0" anchor="ctr"/>
+          <a:lstStyle/>
+          <a:p>
+            <a:pPr indent="0" marL="0">
+              <a:buNone/>
+            </a:pPr>
+            <a:r>
+              <a:rPr lang="en-US" sz="1300" b="1" dirty="0">
+                <a:solidFill>
+                  <a:srgbClr val="D8D4E4"/>
+                </a:solidFill>
+                <a:latin typeface="Courier New" pitchFamily="34" charset="0"/>
+                <a:ea typeface="Courier New" pitchFamily="34" charset="-122"/>
+                <a:cs typeface="Courier New" pitchFamily="34" charset="-120"/>
+              </a:rPr>
+              <a:t>$0.42</a:t>
+            </a:r>
+            <a:endParaRPr lang="en-US" sz="1300" dirty="0"/>
+          </a:p>
+        </p:txBody>
+      </p:sp>
+      <p:sp>
+        <p:nvSpPr>
+          <p:cNvPr id="53" name="Shape 50"/>
+          <p:cNvSpPr/>
+          <p:nvPr/>
+        </p:nvSpPr>
+        <p:spPr>
+          <a:xfrm>
+            <a:off x="10037064" y="4517136"/>
+            <a:ext cx="1484376" cy="621792"/>
+          </a:xfrm>
+          <a:prstGeom prst="roundRect">
+            <a:avLst>
+              <a:gd name="adj" fmla="val 7353"/>
+            </a:avLst>
+          </a:prstGeom>
+          <a:solidFill>
+            <a:srgbClr val="0A0810"/>
+          </a:solidFill>
+          <a:ln w="12700">
+            <a:solidFill>
+              <a:srgbClr val="2A2438"/>
+            </a:solidFill>
+            <a:prstDash val="solid"/>
+          </a:ln>
+        </p:spPr>
+      </p:sp>
+      <p:sp>
+        <p:nvSpPr>
+          <p:cNvPr id="54" name="Text 51"/>
+          <p:cNvSpPr/>
+          <p:nvPr/>
+        </p:nvSpPr>
+        <p:spPr>
+          <a:xfrm>
+            <a:off x="10110216" y="4553712"/>
+            <a:ext cx="1338072" cy="161666"/>
+          </a:xfrm>
+          <a:prstGeom prst="rect">
+            <a:avLst/>
+          </a:prstGeom>
+          <a:noFill/>
+          <a:ln/>
+        </p:spPr>
+        <p:txBody>
+          <a:bodyPr wrap="square" lIns="0" tIns="0" rIns="0" bIns="0" rtlCol="0" anchor="t"/>
+          <a:lstStyle/>
+          <a:p>
+            <a:pPr indent="0" marL="0">
+              <a:buNone/>
+            </a:pPr>
+            <a:r>
+              <a:rPr lang="en-US" sz="750" dirty="0">
+                <a:solidFill>
+                  <a:srgbClr val="9A94AA"/>
+                </a:solidFill>
+                <a:latin typeface="Courier New" pitchFamily="34" charset="0"/>
+                <a:ea typeface="Courier New" pitchFamily="34" charset="-122"/>
+                <a:cs typeface="Courier New" pitchFamily="34" charset="-120"/>
+              </a:rPr>
+              <a:t>p95</a:t>
+            </a:r>
+            <a:endParaRPr lang="en-US" sz="750" dirty="0"/>
+          </a:p>
+        </p:txBody>
+      </p:sp>
+      <p:sp>
+        <p:nvSpPr>
+          <p:cNvPr id="55" name="Text 52"/>
+          <p:cNvSpPr/>
+          <p:nvPr/>
+        </p:nvSpPr>
+        <p:spPr>
+          <a:xfrm>
+            <a:off x="10110216" y="4728545"/>
+            <a:ext cx="1338072" cy="360639"/>
+          </a:xfrm>
+          <a:prstGeom prst="rect">
+            <a:avLst/>
+          </a:prstGeom>
+          <a:noFill/>
+          <a:ln/>
+        </p:spPr>
+        <p:txBody>
+          <a:bodyPr wrap="square" lIns="0" tIns="0" rIns="0" bIns="0" rtlCol="0" anchor="ctr"/>
+          <a:lstStyle/>
+          <a:p>
+            <a:pPr indent="0" marL="0">
+              <a:buNone/>
+            </a:pPr>
+            <a:r>
+              <a:rPr lang="en-US" sz="1300" b="1" dirty="0">
+                <a:solidFill>
+                  <a:srgbClr val="D8D4E4"/>
+                </a:solidFill>
+                <a:latin typeface="Courier New" pitchFamily="34" charset="0"/>
+                <a:ea typeface="Courier New" pitchFamily="34" charset="-122"/>
+                <a:cs typeface="Courier New" pitchFamily="34" charset="-120"/>
+              </a:rPr>
+              <a:t>1.8 s</a:t>
+            </a:r>
+            <a:endParaRPr lang="en-US" sz="1300" dirty="0"/>
+          </a:p>
+        </p:txBody>
+      </p:sp>
+      <p:sp>
+        <p:nvSpPr>
+          <p:cNvPr id="56" name="Shape 53"/>
+          <p:cNvSpPr/>
+          <p:nvPr/>
+        </p:nvSpPr>
+        <p:spPr>
+          <a:xfrm>
+            <a:off x="6848856" y="5230368"/>
+            <a:ext cx="1484376" cy="621792"/>
+          </a:xfrm>
+          <a:prstGeom prst="roundRect">
+            <a:avLst>
+              <a:gd name="adj" fmla="val 7353"/>
+            </a:avLst>
+          </a:prstGeom>
+          <a:solidFill>
+            <a:srgbClr val="0A0810"/>
+          </a:solidFill>
+          <a:ln w="12700">
+            <a:solidFill>
+              <a:srgbClr val="2A2438"/>
+            </a:solidFill>
+            <a:prstDash val="solid"/>
+          </a:ln>
+        </p:spPr>
+      </p:sp>
+      <p:sp>
+        <p:nvSpPr>
+          <p:cNvPr id="57" name="Text 54"/>
+          <p:cNvSpPr/>
+          <p:nvPr/>
+        </p:nvSpPr>
+        <p:spPr>
+          <a:xfrm>
+            <a:off x="6922008" y="5266944"/>
+            <a:ext cx="1338072" cy="161666"/>
+          </a:xfrm>
+          <a:prstGeom prst="rect">
+            <a:avLst/>
+          </a:prstGeom>
+          <a:noFill/>
+          <a:ln/>
+        </p:spPr>
+        <p:txBody>
+          <a:bodyPr wrap="square" lIns="0" tIns="0" rIns="0" bIns="0" rtlCol="0" anchor="t"/>
+          <a:lstStyle/>
+          <a:p>
+            <a:pPr indent="0" marL="0">
+              <a:buNone/>
+            </a:pPr>
+            <a:r>
+              <a:rPr lang="en-US" sz="750" dirty="0">
+                <a:solidFill>
+                  <a:srgbClr val="9A94AA"/>
+                </a:solidFill>
+                <a:latin typeface="Courier New" pitchFamily="34" charset="0"/>
+                <a:ea typeface="Courier New" pitchFamily="34" charset="-122"/>
+                <a:cs typeface="Courier New" pitchFamily="34" charset="-120"/>
+              </a:rPr>
+              <a:t>error</a:t>
+            </a:r>
+            <a:endParaRPr lang="en-US" sz="750" dirty="0"/>
+          </a:p>
+        </p:txBody>
+      </p:sp>
+      <p:sp>
+        <p:nvSpPr>
+          <p:cNvPr id="58" name="Text 55"/>
+          <p:cNvSpPr/>
+          <p:nvPr/>
+        </p:nvSpPr>
+        <p:spPr>
+          <a:xfrm>
+            <a:off x="6922008" y="5441777"/>
+            <a:ext cx="1338072" cy="360639"/>
+          </a:xfrm>
+          <a:prstGeom prst="rect">
+            <a:avLst/>
+          </a:prstGeom>
+          <a:noFill/>
+          <a:ln/>
+        </p:spPr>
+        <p:txBody>
+          <a:bodyPr wrap="square" lIns="0" tIns="0" rIns="0" bIns="0" rtlCol="0" anchor="ctr"/>
+          <a:lstStyle/>
+          <a:p>
+            <a:pPr indent="0" marL="0">
+              <a:buNone/>
+            </a:pPr>
+            <a:r>
+              <a:rPr lang="en-US" sz="1300" b="1" dirty="0">
+                <a:solidFill>
+                  <a:srgbClr val="D8D4E4"/>
+                </a:solidFill>
+                <a:latin typeface="Courier New" pitchFamily="34" charset="0"/>
+                <a:ea typeface="Courier New" pitchFamily="34" charset="-122"/>
+                <a:cs typeface="Courier New" pitchFamily="34" charset="-120"/>
+              </a:rPr>
+              <a:t>1.4%</a:t>
+            </a:r>
+            <a:endParaRPr lang="en-US" sz="1300" dirty="0"/>
+          </a:p>
+        </p:txBody>
+      </p:sp>
+      <p:sp>
+        <p:nvSpPr>
+          <p:cNvPr id="59" name="Shape 56"/>
+          <p:cNvSpPr/>
+          <p:nvPr/>
+        </p:nvSpPr>
+        <p:spPr>
+          <a:xfrm>
+            <a:off x="8442960" y="5230368"/>
+            <a:ext cx="1484376" cy="621792"/>
+          </a:xfrm>
+          <a:prstGeom prst="roundRect">
+            <a:avLst>
+              <a:gd name="adj" fmla="val 7353"/>
+            </a:avLst>
+          </a:prstGeom>
+          <a:solidFill>
+            <a:srgbClr val="0A0810"/>
+          </a:solidFill>
+          <a:ln w="12700">
+            <a:solidFill>
+              <a:srgbClr val="2A2438"/>
+            </a:solidFill>
+            <a:prstDash val="solid"/>
+          </a:ln>
+        </p:spPr>
+      </p:sp>
+      <p:sp>
+        <p:nvSpPr>
+          <p:cNvPr id="60" name="Text 57"/>
+          <p:cNvSpPr/>
+          <p:nvPr/>
+        </p:nvSpPr>
+        <p:spPr>
+          <a:xfrm>
+            <a:off x="8516112" y="5266944"/>
+            <a:ext cx="1338072" cy="161666"/>
+          </a:xfrm>
+          <a:prstGeom prst="rect">
+            <a:avLst/>
+          </a:prstGeom>
+          <a:noFill/>
+          <a:ln/>
+        </p:spPr>
+        <p:txBody>
+          <a:bodyPr wrap="square" lIns="0" tIns="0" rIns="0" bIns="0" rtlCol="0" anchor="t"/>
+          <a:lstStyle/>
+          <a:p>
+            <a:pPr indent="0" marL="0">
+              <a:buNone/>
+            </a:pPr>
+            <a:r>
+              <a:rPr lang="en-US" sz="750" dirty="0">
+                <a:solidFill>
+                  <a:srgbClr val="9A94AA"/>
+                </a:solidFill>
+                <a:latin typeface="Courier New" pitchFamily="34" charset="0"/>
+                <a:ea typeface="Courier New" pitchFamily="34" charset="-122"/>
+                <a:cs typeface="Courier New" pitchFamily="34" charset="-120"/>
+              </a:rPr>
+              <a:t>cache-hit</a:t>
+            </a:r>
+            <a:endParaRPr lang="en-US" sz="750" dirty="0"/>
+          </a:p>
+        </p:txBody>
+      </p:sp>
+      <p:sp>
+        <p:nvSpPr>
+          <p:cNvPr id="61" name="Text 58"/>
+          <p:cNvSpPr/>
+          <p:nvPr/>
+        </p:nvSpPr>
+        <p:spPr>
+          <a:xfrm>
+            <a:off x="8516112" y="5441777"/>
+            <a:ext cx="1338072" cy="360639"/>
+          </a:xfrm>
+          <a:prstGeom prst="rect">
+            <a:avLst/>
+          </a:prstGeom>
+          <a:noFill/>
+          <a:ln/>
+        </p:spPr>
+        <p:txBody>
+          <a:bodyPr wrap="square" lIns="0" tIns="0" rIns="0" bIns="0" rtlCol="0" anchor="ctr"/>
+          <a:lstStyle/>
+          <a:p>
+            <a:pPr indent="0" marL="0">
+              <a:buNone/>
+            </a:pPr>
+            <a:r>
+              <a:rPr lang="en-US" sz="1300" b="1" dirty="0">
+                <a:solidFill>
+                  <a:srgbClr val="D8D4E4"/>
+                </a:solidFill>
+                <a:latin typeface="Courier New" pitchFamily="34" charset="0"/>
+                <a:ea typeface="Courier New" pitchFamily="34" charset="-122"/>
+                <a:cs typeface="Courier New" pitchFamily="34" charset="-120"/>
+              </a:rPr>
+              <a:t>31%</a:t>
+            </a:r>
+            <a:endParaRPr lang="en-US" sz="1300" dirty="0"/>
+          </a:p>
+        </p:txBody>
+      </p:sp>
+      <p:sp>
+        <p:nvSpPr>
+          <p:cNvPr id="62" name="Shape 59"/>
+          <p:cNvSpPr/>
+          <p:nvPr/>
+        </p:nvSpPr>
+        <p:spPr>
+          <a:xfrm>
+            <a:off x="10037064" y="5230368"/>
+            <a:ext cx="1484376" cy="621792"/>
+          </a:xfrm>
+          <a:prstGeom prst="roundRect">
+            <a:avLst>
+              <a:gd name="adj" fmla="val 7353"/>
+            </a:avLst>
+          </a:prstGeom>
+          <a:solidFill>
+            <a:srgbClr val="0A0810"/>
+          </a:solidFill>
+          <a:ln w="12700">
+            <a:solidFill>
+              <a:srgbClr val="2A2438"/>
+            </a:solidFill>
+            <a:prstDash val="solid"/>
+          </a:ln>
+        </p:spPr>
+      </p:sp>
+      <p:sp>
+        <p:nvSpPr>
+          <p:cNvPr id="63" name="Text 60"/>
+          <p:cNvSpPr/>
+          <p:nvPr/>
+        </p:nvSpPr>
+        <p:spPr>
+          <a:xfrm>
+            <a:off x="10110216" y="5266944"/>
+            <a:ext cx="1338072" cy="161666"/>
+          </a:xfrm>
+          <a:prstGeom prst="rect">
+            <a:avLst/>
+          </a:prstGeom>
+          <a:noFill/>
+          <a:ln/>
+        </p:spPr>
+        <p:txBody>
+          <a:bodyPr wrap="square" lIns="0" tIns="0" rIns="0" bIns="0" rtlCol="0" anchor="t"/>
+          <a:lstStyle/>
+          <a:p>
+            <a:pPr indent="0" marL="0">
+              <a:buNone/>
+            </a:pPr>
+            <a:r>
+              <a:rPr lang="en-US" sz="750" dirty="0">
+                <a:solidFill>
+                  <a:srgbClr val="9A94AA"/>
+                </a:solidFill>
+                <a:latin typeface="Courier New" pitchFamily="34" charset="0"/>
+                <a:ea typeface="Courier New" pitchFamily="34" charset="-122"/>
+                <a:cs typeface="Courier New" pitchFamily="34" charset="-120"/>
+              </a:rPr>
+              <a:t>fallback</a:t>
+            </a:r>
+            <a:endParaRPr lang="en-US" sz="750" dirty="0"/>
+          </a:p>
+        </p:txBody>
+      </p:sp>
+      <p:sp>
+        <p:nvSpPr>
+          <p:cNvPr id="64" name="Text 61"/>
+          <p:cNvSpPr/>
+          <p:nvPr/>
+        </p:nvSpPr>
+        <p:spPr>
+          <a:xfrm>
+            <a:off x="10110216" y="5441777"/>
+            <a:ext cx="1338072" cy="360639"/>
+          </a:xfrm>
+          <a:prstGeom prst="rect">
+            <a:avLst/>
+          </a:prstGeom>
+          <a:noFill/>
+          <a:ln/>
+        </p:spPr>
+        <p:txBody>
+          <a:bodyPr wrap="square" lIns="0" tIns="0" rIns="0" bIns="0" rtlCol="0" anchor="ctr"/>
+          <a:lstStyle/>
+          <a:p>
+            <a:pPr indent="0" marL="0">
+              <a:buNone/>
+            </a:pPr>
+            <a:r>
+              <a:rPr lang="en-US" sz="1300" b="1" dirty="0">
+                <a:solidFill>
+                  <a:srgbClr val="D8D4E4"/>
+                </a:solidFill>
+                <a:latin typeface="Courier New" pitchFamily="34" charset="0"/>
+                <a:ea typeface="Courier New" pitchFamily="34" charset="-122"/>
+                <a:cs typeface="Courier New" pitchFamily="34" charset="-120"/>
+              </a:rPr>
+              <a:t>3</a:t>
+            </a:r>
+            <a:endParaRPr lang="en-US" sz="1300" dirty="0"/>
+          </a:p>
+        </p:txBody>
+      </p:sp>
+      <p:sp>
+        <p:nvSpPr>
+          <p:cNvPr id="65" name="Text 62"/>
+          <p:cNvSpPr/>
+          <p:nvPr/>
+        </p:nvSpPr>
+        <p:spPr>
+          <a:xfrm>
+            <a:off x="566928" y="6016752"/>
+            <a:ext cx="11064240" cy="274320"/>
+          </a:xfrm>
+          <a:prstGeom prst="rect">
+            <a:avLst/>
+          </a:prstGeom>
+          <a:noFill/>
+          <a:ln/>
+        </p:spPr>
+        <p:txBody>
+          <a:bodyPr wrap="square" lIns="0" tIns="0" rIns="0" bIns="0" rtlCol="0" anchor="ctr"/>
+          <a:lstStyle/>
+          <a:p>
+            <a:pPr indent="0" marL="0">
+              <a:buNone/>
+            </a:pPr>
+            <a:r>
+              <a:rPr lang="en-US" sz="1150" i="1" dirty="0">
+                <a:solidFill>
+                  <a:srgbClr val="434343"/>
+                </a:solidFill>
+                <a:latin typeface="Montserrat" pitchFamily="34" charset="0"/>
+                <a:ea typeface="Montserrat" pitchFamily="34" charset="-122"/>
+                <a:cs typeface="Montserrat" pitchFamily="34" charset="-120"/>
+              </a:rPr>
+              <a:t>Та сама консоль, ті самі плитки — і жодного «—». Це і є різниця, яку ви зробили за шість тижнів.</a:t>
+            </a:r>
+            <a:endParaRPr lang="en-US" sz="1150" dirty="0"/>
           </a:p>
         </p:txBody>
       </p:sp>

--- a/docs/decks/L12.pptx
+++ b/docs/decks/L12.pptx
@@ -3343,7 +3343,7 @@
                 <a:ea typeface="Courier New" pitchFamily="34" charset="-122"/>
                 <a:cs typeface="Courier New" pitchFamily="34" charset="-120"/>
               </a:rPr>
-              <a:t>ТИЖДЕНЬ 6 · УРОК 12 З 12</a:t>
+              <a:t>ТИЖДЕНЬ 6 · ТЕМА 12 З 12</a:t>
             </a:r>
             <a:endParaRPr lang="en-US" sz="1200" dirty="0"/>
           </a:p>
@@ -3447,7 +3447,7 @@
                 <a:ea typeface="Montserrat" pitchFamily="34" charset="-122"/>
                 <a:cs typeface="Montserrat" pitchFamily="34" charset="-120"/>
               </a:rPr>
-              <a:t>Система зібрана. Останній крок — переконатися, що ви нею володієте: наскрізний прогін із чистого клону, інцидент за рунбуком і вміння говорити про це мовою, за яку дають бюджет.</a:t>
+              <a:t>Система зібрана. Останній крок — переконатися, що Ви нею володієте: наскрізний прогін із чистого клону, інцидент за рунбуком і вміння говорити про це мовою, за яку дають бюджет.</a:t>
             </a:r>
             <a:endParaRPr lang="en-US" sz="1500" dirty="0"/>
           </a:p>
@@ -6745,7 +6745,7 @@
                 <a:ea typeface="Courier New" pitchFamily="34" charset="-122"/>
                 <a:cs typeface="Courier New" pitchFamily="34" charset="-120"/>
               </a:rPr>
-              <a:t>ваш лог</a:t>
+              <a:t>Ваш лог</a:t>
             </a:r>
             <a:endParaRPr lang="en-US" sz="1150" dirty="0"/>
           </a:p>
@@ -10696,7 +10696,7 @@
                 <a:ea typeface="Montserrat" pitchFamily="34" charset="-122"/>
                 <a:cs typeface="Montserrat" pitchFamily="34" charset="-120"/>
               </a:rPr>
-              <a:t>Жоден із цих напрямків не скасовує того, що ви збудували: усі вони додаються поверх контуру керування — і всі потребують лога, версій, перевірок і гейта.</a:t>
+              <a:t>Жоден із цих напрямків не скасовує того, що Ви збудували: усі вони додаються поверх контуру керування — і всі потребують лога, версій, перевірок і гейта.</a:t>
             </a:r>
             <a:endParaRPr lang="en-US" sz="1300" dirty="0"/>
           </a:p>
@@ -11033,7 +11033,7 @@
                 <a:ea typeface="Unbounded" pitchFamily="34" charset="-122"/>
                 <a:cs typeface="Unbounded" pitchFamily="34" charset="-120"/>
               </a:rPr>
-              <a:t>Зараз ви побачите — і навіщо</a:t>
+              <a:t>Зараз Ви побачите — і навіщо</a:t>
             </a:r>
             <a:endParaRPr lang="en-US" sz="2400" dirty="0"/>
           </a:p>
@@ -11928,7 +11928,7 @@
                 <a:ea typeface="Montserrat" pitchFamily="34" charset="-122"/>
                 <a:cs typeface="Montserrat" pitchFamily="34" charset="-120"/>
               </a:rPr>
-              <a:t>Переконатися, що система працює не «на моїй машині», а з чистого клону — і що ви можете провести її через інцидент, не імпровізуючи.</a:t>
+              <a:t>Переконатися, що система працює не «на моїй машині», а з чистого клону — і що Ви можете провести її через інцидент, не імпровізуючи.</a:t>
             </a:r>
             <a:endParaRPr lang="en-US" sz="1300" dirty="0"/>
           </a:p>
@@ -12983,7 +12983,7 @@
                 <a:ea typeface="Unbounded" pitchFamily="34" charset="-122"/>
                 <a:cs typeface="Unbounded" pitchFamily="34" charset="-120"/>
               </a:rPr>
-              <a:t>Що ви зможете після уроку</a:t>
+              <a:t>Що Ви зможете після теми</a:t>
             </a:r>
             <a:endParaRPr lang="en-US" sz="2400" dirty="0"/>
           </a:p>
@@ -14584,7 +14584,7 @@
                 <a:ea typeface="Courier New" pitchFamily="34" charset="-122"/>
                 <a:cs typeface="Courier New" pitchFamily="34" charset="-120"/>
               </a:rPr>
-              <a:t>точка А · урок 1</a:t>
+              <a:t>точка А · Тема 1</a:t>
             </a:r>
             <a:endParaRPr lang="en-US" sz="800" dirty="0"/>
           </a:p>
@@ -15402,7 +15402,7 @@
                 <a:ea typeface="Courier New" pitchFamily="34" charset="-122"/>
                 <a:cs typeface="Courier New" pitchFamily="34" charset="-120"/>
               </a:rPr>
-              <a:t>точка Б · урок 12</a:t>
+              <a:t>точка Б · Тема 12</a:t>
             </a:r>
             <a:endParaRPr lang="en-US" sz="800" dirty="0"/>
           </a:p>
@@ -16094,7 +16094,7 @@
                 <a:ea typeface="Montserrat" pitchFamily="34" charset="-122"/>
                 <a:cs typeface="Montserrat" pitchFamily="34" charset="-120"/>
               </a:rPr>
-              <a:t>Та сама консоль, ті самі плитки — і жодного «—». Це і є різниця, яку ви зробили за шість тижнів.</a:t>
+              <a:t>Та сама консоль, ті самі плитки — і жодного «—». Це і є різниця, яку Ви зробили за шість тижнів.</a:t>
             </a:r>
             <a:endParaRPr lang="en-US" sz="1150" dirty="0"/>
           </a:p>
@@ -17936,7 +17936,7 @@
                 <a:ea typeface="Montserrat" pitchFamily="34" charset="-122"/>
                 <a:cs typeface="Montserrat" pitchFamily="34" charset="-120"/>
               </a:rPr>
-              <a:t>Останнє ДЗ, і воно ж ваш зібраний капстоун.</a:t>
+              <a:t>Останнє ДЗ, і воно ж Ваш зібраний капстоун.</a:t>
             </a:r>
             <a:endParaRPr lang="en-US" sz="1250" dirty="0"/>
           </a:p>
@@ -18461,7 +18461,7 @@
                 <a:ea typeface="Courier New" pitchFamily="34" charset="-122"/>
                 <a:cs typeface="Courier New" pitchFamily="34" charset="-120"/>
               </a:rPr>
-              <a:t>ПІДСУМОК УРОКУ 12</a:t>
+              <a:t>ПІДСУМОК ТЕМИ 12</a:t>
             </a:r>
             <a:endParaRPr lang="en-US" sz="1100" dirty="0"/>
           </a:p>
@@ -18837,7 +18837,7 @@
                 <a:ea typeface="Montserrat" pitchFamily="34" charset="-122"/>
                 <a:cs typeface="Montserrat" pitchFamily="34" charset="-120"/>
               </a:rPr>
-              <a:t>Наступний крок → ваша система</a:t>
+              <a:t>Наступний крок → Ваша система</a:t>
             </a:r>
             <a:endParaRPr lang="en-US" sz="1500" dirty="0"/>
           </a:p>
@@ -18879,7 +18879,7 @@
                 <a:ea typeface="Montserrat" pitchFamily="34" charset="-122"/>
                 <a:cs typeface="Montserrat" pitchFamily="34" charset="-120"/>
               </a:rPr>
-              <a:t>Здайте ДЗ тижня 6 — ваш зібраний капстоун. Далі: додавайте реальний ключ, підключайте справжніх провайдерів, тягніть практики в робочі проєкти — по шару на тиждень, як у rollout-плані. Контур, який ви збудували, — не навчальний макет, а зменшена копія того, як LLM-системи експлуатують у проді; різниця тільки в масштабі.</a:t>
+              <a:t>Здайте ДЗ тижня 6 — Ваш зібраний капстоун. Далі: додавайте реальний ключ, підключайте справжніх провайдерів, тягніть практики в робочі проєкти — по шару на тиждень, як у rollout-плані. Контур, який Ви збудували, — не навчальний макет, а зменшена копія того, як LLM-системи експлуатують у проді; різниця тільки в масштабі.</a:t>
             </a:r>
             <a:endParaRPr lang="en-US" sz="1250" dirty="0"/>
           </a:p>
@@ -20843,7 +20843,7 @@
                 <a:ea typeface="Montserrat" pitchFamily="34" charset="-122"/>
                 <a:cs typeface="Montserrat" pitchFamily="34" charset="-120"/>
               </a:rPr>
-              <a:t>Шість слів сьогоднішнього уроку</a:t>
+              <a:t>Шість слів сьогоднішньої теми</a:t>
             </a:r>
             <a:endParaRPr lang="en-US" sz="1300" dirty="0"/>
           </a:p>
@@ -25014,7 +25014,7 @@
                 <a:ea typeface="Montserrat" pitchFamily="34" charset="-122"/>
                 <a:cs typeface="Montserrat" pitchFamily="34" charset="-120"/>
               </a:rPr>
-              <a:t>Кожна ланка — конкретний урок: де спіткнулися, туди й повертаєтесь.</a:t>
+              <a:t>Кожна ланка — конкретна тема: де спіткнулися, туди й повертаєтесь.</a:t>
             </a:r>
             <a:endParaRPr lang="en-US" sz="1300" dirty="0"/>
           </a:p>

--- a/docs/decks/L12.pptx
+++ b/docs/decks/L12.pptx
@@ -9203,11 +9203,11 @@
         <p:spPr>
           <a:xfrm>
             <a:off x="566928" y="1828800"/>
-            <a:ext cx="3520440" cy="1783080"/>
+            <a:ext cx="3520440" cy="1645920"/>
           </a:xfrm>
           <a:prstGeom prst="roundRect">
             <a:avLst>
-              <a:gd name="adj" fmla="val 6154"/>
+              <a:gd name="adj" fmla="val 6667"/>
             </a:avLst>
           </a:prstGeom>
           <a:solidFill>
@@ -9323,7 +9323,7 @@
         <p:spPr>
           <a:xfrm>
             <a:off x="768096" y="2514600"/>
-            <a:ext cx="3118104" cy="941832"/>
+            <a:ext cx="3118104" cy="804672"/>
           </a:xfrm>
           <a:prstGeom prst="rect">
             <a:avLst/>
@@ -9365,11 +9365,11 @@
         <p:spPr>
           <a:xfrm>
             <a:off x="4270248" y="1828800"/>
-            <a:ext cx="3520440" cy="1783080"/>
+            <a:ext cx="3520440" cy="1645920"/>
           </a:xfrm>
           <a:prstGeom prst="roundRect">
             <a:avLst>
-              <a:gd name="adj" fmla="val 6154"/>
+              <a:gd name="adj" fmla="val 6667"/>
             </a:avLst>
           </a:prstGeom>
           <a:solidFill>
@@ -9485,7 +9485,7 @@
         <p:spPr>
           <a:xfrm>
             <a:off x="4471416" y="2514600"/>
-            <a:ext cx="3118104" cy="941832"/>
+            <a:ext cx="3118104" cy="804672"/>
           </a:xfrm>
           <a:prstGeom prst="rect">
             <a:avLst/>
@@ -9527,11 +9527,11 @@
         <p:spPr>
           <a:xfrm>
             <a:off x="7973568" y="1828800"/>
-            <a:ext cx="3520440" cy="1783080"/>
+            <a:ext cx="3520440" cy="1645920"/>
           </a:xfrm>
           <a:prstGeom prst="roundRect">
             <a:avLst>
-              <a:gd name="adj" fmla="val 6154"/>
+              <a:gd name="adj" fmla="val 6667"/>
             </a:avLst>
           </a:prstGeom>
           <a:solidFill>
@@ -9647,7 +9647,7 @@
         <p:spPr>
           <a:xfrm>
             <a:off x="8174736" y="2514600"/>
-            <a:ext cx="3118104" cy="941832"/>
+            <a:ext cx="3118104" cy="804672"/>
           </a:xfrm>
           <a:prstGeom prst="rect">
             <a:avLst/>
@@ -9688,12 +9688,463 @@
         </p:nvSpPr>
         <p:spPr>
           <a:xfrm>
-            <a:off x="566928" y="3977640"/>
-            <a:ext cx="11064240" cy="1325880"/>
+            <a:off x="566928" y="3703320"/>
+            <a:ext cx="2423160" cy="512064"/>
           </a:xfrm>
           <a:prstGeom prst="roundRect">
             <a:avLst>
-              <a:gd name="adj" fmla="val 8276"/>
+              <a:gd name="adj" fmla="val 17857"/>
+            </a:avLst>
+          </a:prstGeom>
+          <a:solidFill>
+            <a:srgbClr val="000000"/>
+          </a:solidFill>
+          <a:ln/>
+        </p:spPr>
+      </p:sp>
+      <p:sp>
+        <p:nvSpPr>
+          <p:cNvPr id="24" name="Text 21"/>
+          <p:cNvSpPr/>
+          <p:nvPr/>
+        </p:nvSpPr>
+        <p:spPr>
+          <a:xfrm>
+            <a:off x="621792" y="3703320"/>
+            <a:ext cx="2313432" cy="512064"/>
+          </a:xfrm>
+          <a:prstGeom prst="rect">
+            <a:avLst/>
+          </a:prstGeom>
+          <a:noFill/>
+          <a:ln/>
+        </p:spPr>
+        <p:txBody>
+          <a:bodyPr wrap="square" lIns="0" tIns="0" rIns="0" bIns="0" rtlCol="0" anchor="ctr"/>
+          <a:lstStyle/>
+          <a:p>
+            <a:pPr algn="ctr" indent="0" marL="0">
+              <a:buNone/>
+            </a:pPr>
+            <a:r>
+              <a:rPr lang="en-US" sz="1050" b="1" dirty="0">
+                <a:solidFill>
+                  <a:srgbClr val="6BA0F8"/>
+                </a:solidFill>
+                <a:latin typeface="Courier New" pitchFamily="34" charset="0"/>
+                <a:ea typeface="Courier New" pitchFamily="34" charset="-122"/>
+                <a:cs typeface="Courier New" pitchFamily="34" charset="-120"/>
+              </a:rPr>
+              <a:t>провайдер оновив снапшот</a:t>
+            </a:r>
+            <a:endParaRPr lang="en-US" sz="1050" dirty="0"/>
+          </a:p>
+        </p:txBody>
+      </p:sp>
+      <p:sp>
+        <p:nvSpPr>
+          <p:cNvPr id="25" name="Shape 22"/>
+          <p:cNvSpPr/>
+          <p:nvPr/>
+        </p:nvSpPr>
+        <p:spPr>
+          <a:xfrm>
+            <a:off x="3081528" y="3959352"/>
+            <a:ext cx="164592" cy="0"/>
+          </a:xfrm>
+          <a:prstGeom prst="line">
+            <a:avLst/>
+          </a:prstGeom>
+          <a:noFill/>
+          <a:ln w="15875">
+            <a:solidFill>
+              <a:srgbClr val="5A05F4"/>
+            </a:solidFill>
+            <a:prstDash val="solid"/>
+          </a:ln>
+        </p:spPr>
+      </p:sp>
+      <p:sp>
+        <p:nvSpPr>
+          <p:cNvPr id="26" name="Shape 23"/>
+          <p:cNvSpPr/>
+          <p:nvPr/>
+        </p:nvSpPr>
+        <p:spPr>
+          <a:xfrm rot="5400000">
+            <a:off x="3209544" y="3890772"/>
+            <a:ext cx="146304" cy="137160"/>
+          </a:xfrm>
+          <a:prstGeom prst="triangle">
+            <a:avLst/>
+          </a:prstGeom>
+          <a:solidFill>
+            <a:srgbClr val="5A05F4"/>
+          </a:solidFill>
+          <a:ln/>
+        </p:spPr>
+      </p:sp>
+      <p:sp>
+        <p:nvSpPr>
+          <p:cNvPr id="27" name="Shape 24"/>
+          <p:cNvSpPr/>
+          <p:nvPr/>
+        </p:nvSpPr>
+        <p:spPr>
+          <a:xfrm>
+            <a:off x="3447288" y="3703320"/>
+            <a:ext cx="2423160" cy="512064"/>
+          </a:xfrm>
+          <a:prstGeom prst="roundRect">
+            <a:avLst>
+              <a:gd name="adj" fmla="val 17857"/>
+            </a:avLst>
+          </a:prstGeom>
+          <a:solidFill>
+            <a:srgbClr val="000000"/>
+          </a:solidFill>
+          <a:ln/>
+        </p:spPr>
+      </p:sp>
+      <p:sp>
+        <p:nvSpPr>
+          <p:cNvPr id="28" name="Text 25"/>
+          <p:cNvSpPr/>
+          <p:nvPr/>
+        </p:nvSpPr>
+        <p:spPr>
+          <a:xfrm>
+            <a:off x="3502152" y="3703320"/>
+            <a:ext cx="2313432" cy="512064"/>
+          </a:xfrm>
+          <a:prstGeom prst="rect">
+            <a:avLst/>
+          </a:prstGeom>
+          <a:noFill/>
+          <a:ln/>
+        </p:spPr>
+        <p:txBody>
+          <a:bodyPr wrap="square" lIns="0" tIns="0" rIns="0" bIns="0" rtlCol="0" anchor="ctr"/>
+          <a:lstStyle/>
+          <a:p>
+            <a:pPr algn="ctr" indent="0" marL="0">
+              <a:buNone/>
+            </a:pPr>
+            <a:r>
+              <a:rPr lang="en-US" sz="1050" b="1" dirty="0">
+                <a:solidFill>
+                  <a:srgbClr val="A98BFF"/>
+                </a:solidFill>
+                <a:latin typeface="Courier New" pitchFamily="34" charset="0"/>
+                <a:ea typeface="Courier New" pitchFamily="34" charset="-122"/>
+                <a:cs typeface="Courier New" pitchFamily="34" charset="-120"/>
+              </a:rPr>
+              <a:t>PR: нова версія моделі</a:t>
+            </a:r>
+            <a:endParaRPr lang="en-US" sz="1050" dirty="0"/>
+          </a:p>
+        </p:txBody>
+      </p:sp>
+      <p:sp>
+        <p:nvSpPr>
+          <p:cNvPr id="29" name="Text 26"/>
+          <p:cNvSpPr/>
+          <p:nvPr/>
+        </p:nvSpPr>
+        <p:spPr>
+          <a:xfrm>
+            <a:off x="3447288" y="4251960"/>
+            <a:ext cx="2423160" cy="274320"/>
+          </a:xfrm>
+          <a:prstGeom prst="rect">
+            <a:avLst/>
+          </a:prstGeom>
+          <a:noFill/>
+          <a:ln/>
+        </p:spPr>
+        <p:txBody>
+          <a:bodyPr wrap="square" lIns="0" tIns="0" rIns="0" bIns="0" rtlCol="0" anchor="ctr"/>
+          <a:lstStyle/>
+          <a:p>
+            <a:pPr algn="ctr" indent="0" marL="0">
+              <a:buNone/>
+            </a:pPr>
+            <a:r>
+              <a:rPr lang="en-US" sz="1000" dirty="0">
+                <a:solidFill>
+                  <a:srgbClr val="6B6B6B"/>
+                </a:solidFill>
+                <a:latin typeface="Montserrat" pitchFamily="34" charset="0"/>
+                <a:ea typeface="Montserrat" pitchFamily="34" charset="-122"/>
+                <a:cs typeface="Montserrat" pitchFamily="34" charset="-120"/>
+              </a:rPr>
+              <a:t>зміна не приїде сама</a:t>
+            </a:r>
+            <a:endParaRPr lang="en-US" sz="1000" dirty="0"/>
+          </a:p>
+        </p:txBody>
+      </p:sp>
+      <p:sp>
+        <p:nvSpPr>
+          <p:cNvPr id="30" name="Shape 27"/>
+          <p:cNvSpPr/>
+          <p:nvPr/>
+        </p:nvSpPr>
+        <p:spPr>
+          <a:xfrm>
+            <a:off x="5961888" y="3959352"/>
+            <a:ext cx="164592" cy="0"/>
+          </a:xfrm>
+          <a:prstGeom prst="line">
+            <a:avLst/>
+          </a:prstGeom>
+          <a:noFill/>
+          <a:ln w="15875">
+            <a:solidFill>
+              <a:srgbClr val="5A05F4"/>
+            </a:solidFill>
+            <a:prstDash val="solid"/>
+          </a:ln>
+        </p:spPr>
+      </p:sp>
+      <p:sp>
+        <p:nvSpPr>
+          <p:cNvPr id="31" name="Shape 28"/>
+          <p:cNvSpPr/>
+          <p:nvPr/>
+        </p:nvSpPr>
+        <p:spPr>
+          <a:xfrm rot="5400000">
+            <a:off x="6089904" y="3890772"/>
+            <a:ext cx="146304" cy="137160"/>
+          </a:xfrm>
+          <a:prstGeom prst="triangle">
+            <a:avLst/>
+          </a:prstGeom>
+          <a:solidFill>
+            <a:srgbClr val="5A05F4"/>
+          </a:solidFill>
+          <a:ln/>
+        </p:spPr>
+      </p:sp>
+      <p:sp>
+        <p:nvSpPr>
+          <p:cNvPr id="32" name="Shape 29"/>
+          <p:cNvSpPr/>
+          <p:nvPr/>
+        </p:nvSpPr>
+        <p:spPr>
+          <a:xfrm>
+            <a:off x="6327648" y="3703320"/>
+            <a:ext cx="2423160" cy="512064"/>
+          </a:xfrm>
+          <a:prstGeom prst="roundRect">
+            <a:avLst>
+              <a:gd name="adj" fmla="val 17857"/>
+            </a:avLst>
+          </a:prstGeom>
+          <a:solidFill>
+            <a:srgbClr val="000000"/>
+          </a:solidFill>
+          <a:ln/>
+        </p:spPr>
+      </p:sp>
+      <p:sp>
+        <p:nvSpPr>
+          <p:cNvPr id="33" name="Text 30"/>
+          <p:cNvSpPr/>
+          <p:nvPr/>
+        </p:nvSpPr>
+        <p:spPr>
+          <a:xfrm>
+            <a:off x="6382512" y="3703320"/>
+            <a:ext cx="2313432" cy="512064"/>
+          </a:xfrm>
+          <a:prstGeom prst="rect">
+            <a:avLst/>
+          </a:prstGeom>
+          <a:noFill/>
+          <a:ln/>
+        </p:spPr>
+        <p:txBody>
+          <a:bodyPr wrap="square" lIns="0" tIns="0" rIns="0" bIns="0" rtlCol="0" anchor="ctr"/>
+          <a:lstStyle/>
+          <a:p>
+            <a:pPr algn="ctr" indent="0" marL="0">
+              <a:buNone/>
+            </a:pPr>
+            <a:r>
+              <a:rPr lang="en-US" sz="1050" b="1" dirty="0">
+                <a:solidFill>
+                  <a:srgbClr val="FF6B6B"/>
+                </a:solidFill>
+                <a:latin typeface="Courier New" pitchFamily="34" charset="0"/>
+                <a:ea typeface="Courier New" pitchFamily="34" charset="-122"/>
+                <a:cs typeface="Courier New" pitchFamily="34" charset="-120"/>
+              </a:rPr>
+              <a:t>eval-гейт</a:t>
+            </a:r>
+            <a:endParaRPr lang="en-US" sz="1050" dirty="0"/>
+          </a:p>
+        </p:txBody>
+      </p:sp>
+      <p:sp>
+        <p:nvSpPr>
+          <p:cNvPr id="34" name="Text 31"/>
+          <p:cNvSpPr/>
+          <p:nvPr/>
+        </p:nvSpPr>
+        <p:spPr>
+          <a:xfrm>
+            <a:off x="6327648" y="4251960"/>
+            <a:ext cx="2423160" cy="274320"/>
+          </a:xfrm>
+          <a:prstGeom prst="rect">
+            <a:avLst/>
+          </a:prstGeom>
+          <a:noFill/>
+          <a:ln/>
+        </p:spPr>
+        <p:txBody>
+          <a:bodyPr wrap="square" lIns="0" tIns="0" rIns="0" bIns="0" rtlCol="0" anchor="ctr"/>
+          <a:lstStyle/>
+          <a:p>
+            <a:pPr algn="ctr" indent="0" marL="0">
+              <a:buNone/>
+            </a:pPr>
+            <a:r>
+              <a:rPr lang="en-US" sz="1000" dirty="0">
+                <a:solidFill>
+                  <a:srgbClr val="6B6B6B"/>
+                </a:solidFill>
+                <a:latin typeface="Montserrat" pitchFamily="34" charset="0"/>
+                <a:ea typeface="Montserrat" pitchFamily="34" charset="-122"/>
+                <a:cs typeface="Montserrat" pitchFamily="34" charset="-120"/>
+              </a:rPr>
+              <a:t>червоний → не мержиться</a:t>
+            </a:r>
+            <a:endParaRPr lang="en-US" sz="1000" dirty="0"/>
+          </a:p>
+        </p:txBody>
+      </p:sp>
+      <p:sp>
+        <p:nvSpPr>
+          <p:cNvPr id="35" name="Shape 32"/>
+          <p:cNvSpPr/>
+          <p:nvPr/>
+        </p:nvSpPr>
+        <p:spPr>
+          <a:xfrm>
+            <a:off x="8842248" y="3959352"/>
+            <a:ext cx="164592" cy="0"/>
+          </a:xfrm>
+          <a:prstGeom prst="line">
+            <a:avLst/>
+          </a:prstGeom>
+          <a:noFill/>
+          <a:ln w="15875">
+            <a:solidFill>
+              <a:srgbClr val="5A05F4"/>
+            </a:solidFill>
+            <a:prstDash val="solid"/>
+          </a:ln>
+        </p:spPr>
+      </p:sp>
+      <p:sp>
+        <p:nvSpPr>
+          <p:cNvPr id="36" name="Shape 33"/>
+          <p:cNvSpPr/>
+          <p:nvPr/>
+        </p:nvSpPr>
+        <p:spPr>
+          <a:xfrm rot="5400000">
+            <a:off x="8970264" y="3890772"/>
+            <a:ext cx="146304" cy="137160"/>
+          </a:xfrm>
+          <a:prstGeom prst="triangle">
+            <a:avLst/>
+          </a:prstGeom>
+          <a:solidFill>
+            <a:srgbClr val="5A05F4"/>
+          </a:solidFill>
+          <a:ln/>
+        </p:spPr>
+      </p:sp>
+      <p:sp>
+        <p:nvSpPr>
+          <p:cNvPr id="37" name="Shape 34"/>
+          <p:cNvSpPr/>
+          <p:nvPr/>
+        </p:nvSpPr>
+        <p:spPr>
+          <a:xfrm>
+            <a:off x="9208008" y="3703320"/>
+            <a:ext cx="2423160" cy="512064"/>
+          </a:xfrm>
+          <a:prstGeom prst="roundRect">
+            <a:avLst>
+              <a:gd name="adj" fmla="val 17857"/>
+            </a:avLst>
+          </a:prstGeom>
+          <a:solidFill>
+            <a:srgbClr val="000000"/>
+          </a:solidFill>
+          <a:ln/>
+        </p:spPr>
+      </p:sp>
+      <p:sp>
+        <p:nvSpPr>
+          <p:cNvPr id="38" name="Text 35"/>
+          <p:cNvSpPr/>
+          <p:nvPr/>
+        </p:nvSpPr>
+        <p:spPr>
+          <a:xfrm>
+            <a:off x="9262872" y="3703320"/>
+            <a:ext cx="2313432" cy="512064"/>
+          </a:xfrm>
+          <a:prstGeom prst="rect">
+            <a:avLst/>
+          </a:prstGeom>
+          <a:noFill/>
+          <a:ln/>
+        </p:spPr>
+        <p:txBody>
+          <a:bodyPr wrap="square" lIns="0" tIns="0" rIns="0" bIns="0" rtlCol="0" anchor="ctr"/>
+          <a:lstStyle/>
+          <a:p>
+            <a:pPr algn="ctr" indent="0" marL="0">
+              <a:buNone/>
+            </a:pPr>
+            <a:r>
+              <a:rPr lang="en-US" sz="1050" b="1" dirty="0">
+                <a:solidFill>
+                  <a:srgbClr val="3FCF8E"/>
+                </a:solidFill>
+                <a:latin typeface="Courier New" pitchFamily="34" charset="0"/>
+                <a:ea typeface="Courier New" pitchFamily="34" charset="-122"/>
+                <a:cs typeface="Courier New" pitchFamily="34" charset="-120"/>
+              </a:rPr>
+              <a:t>деплой без сюрпризу</a:t>
+            </a:r>
+            <a:endParaRPr lang="en-US" sz="1050" dirty="0"/>
+          </a:p>
+        </p:txBody>
+      </p:sp>
+      <p:sp>
+        <p:nvSpPr>
+          <p:cNvPr id="39" name="Shape 36"/>
+          <p:cNvSpPr/>
+          <p:nvPr/>
+        </p:nvSpPr>
+        <p:spPr>
+          <a:xfrm>
+            <a:off x="566928" y="4754880"/>
+            <a:ext cx="11064240" cy="1143000"/>
+          </a:xfrm>
+          <a:prstGeom prst="roundRect">
+            <a:avLst>
+              <a:gd name="adj" fmla="val 9600"/>
             </a:avLst>
           </a:prstGeom>
           <a:solidFill>
@@ -9709,13 +10160,13 @@
       </p:sp>
       <p:sp>
         <p:nvSpPr>
-          <p:cNvPr id="24" name="Shape 21"/>
-          <p:cNvSpPr/>
-          <p:nvPr/>
-        </p:nvSpPr>
-        <p:spPr>
-          <a:xfrm>
-            <a:off x="749808" y="4485132"/>
+          <p:cNvPr id="40" name="Shape 37"/>
+          <p:cNvSpPr/>
+          <p:nvPr/>
+        </p:nvSpPr>
+        <p:spPr>
+          <a:xfrm>
+            <a:off x="749808" y="5170932"/>
             <a:ext cx="310896" cy="310896"/>
           </a:xfrm>
           <a:prstGeom prst="ellipse">
@@ -9729,13 +10180,13 @@
       </p:sp>
       <p:sp>
         <p:nvSpPr>
-          <p:cNvPr id="25" name="Text 22"/>
-          <p:cNvSpPr/>
-          <p:nvPr/>
-        </p:nvSpPr>
-        <p:spPr>
-          <a:xfrm>
-            <a:off x="749808" y="4485132"/>
+          <p:cNvPr id="41" name="Text 38"/>
+          <p:cNvSpPr/>
+          <p:nvPr/>
+        </p:nvSpPr>
+        <p:spPr>
+          <a:xfrm>
+            <a:off x="749808" y="5170932"/>
             <a:ext cx="310896" cy="310896"/>
           </a:xfrm>
           <a:prstGeom prst="rect">
@@ -9768,13 +10219,13 @@
       </p:sp>
       <p:sp>
         <p:nvSpPr>
-          <p:cNvPr id="26" name="Text 23"/>
-          <p:cNvSpPr/>
-          <p:nvPr/>
-        </p:nvSpPr>
-        <p:spPr>
-          <a:xfrm>
-            <a:off x="1243584" y="4105656"/>
+          <p:cNvPr id="42" name="Text 39"/>
+          <p:cNvSpPr/>
+          <p:nvPr/>
+        </p:nvSpPr>
+        <p:spPr>
+          <a:xfrm>
+            <a:off x="1243584" y="4882896"/>
             <a:ext cx="10168128" cy="219456"/>
           </a:xfrm>
           <a:prstGeom prst="rect">
@@ -9807,14 +10258,14 @@
       </p:sp>
       <p:sp>
         <p:nvSpPr>
-          <p:cNvPr id="27" name="Text 24"/>
-          <p:cNvSpPr/>
-          <p:nvPr/>
-        </p:nvSpPr>
-        <p:spPr>
-          <a:xfrm>
-            <a:off x="1243584" y="4361688"/>
-            <a:ext cx="10168128" cy="813816"/>
+          <p:cNvPr id="43" name="Text 40"/>
+          <p:cNvSpPr/>
+          <p:nvPr/>
+        </p:nvSpPr>
+        <p:spPr>
+          <a:xfrm>
+            <a:off x="1243584" y="5138928"/>
+            <a:ext cx="10168128" cy="630936"/>
           </a:xfrm>
           <a:prstGeom prst="rect">
             <a:avLst/>
@@ -22069,12 +22520,721 @@
         </p:nvSpPr>
         <p:spPr>
           <a:xfrm>
-            <a:off x="566928" y="1737360"/>
-            <a:ext cx="5349240" cy="1508760"/>
+            <a:off x="1389888" y="2240280"/>
+            <a:ext cx="9418320" cy="0"/>
+          </a:xfrm>
+          <a:prstGeom prst="line">
+            <a:avLst/>
+          </a:prstGeom>
+          <a:noFill/>
+          <a:ln w="25400">
+            <a:solidFill>
+              <a:srgbClr val="5A05F4"/>
+            </a:solidFill>
+            <a:prstDash val="solid"/>
+          </a:ln>
+        </p:spPr>
+      </p:sp>
+      <p:sp>
+        <p:nvSpPr>
+          <p:cNvPr id="9" name="Shape 6"/>
+          <p:cNvSpPr/>
+          <p:nvPr/>
+        </p:nvSpPr>
+        <p:spPr>
+          <a:xfrm>
+            <a:off x="1307592" y="2157984"/>
+            <a:ext cx="164592" cy="164592"/>
+          </a:xfrm>
+          <a:prstGeom prst="ellipse">
+            <a:avLst/>
+          </a:prstGeom>
+          <a:solidFill>
+            <a:srgbClr val="B3261E"/>
+          </a:solidFill>
+          <a:ln/>
+        </p:spPr>
+      </p:sp>
+      <p:sp>
+        <p:nvSpPr>
+          <p:cNvPr id="10" name="Text 7"/>
+          <p:cNvSpPr/>
+          <p:nvPr/>
+        </p:nvSpPr>
+        <p:spPr>
+          <a:xfrm>
+            <a:off x="704088" y="1673352"/>
+            <a:ext cx="1371600" cy="274320"/>
+          </a:xfrm>
+          <a:prstGeom prst="rect">
+            <a:avLst/>
+          </a:prstGeom>
+          <a:noFill/>
+          <a:ln/>
+        </p:spPr>
+        <p:txBody>
+          <a:bodyPr wrap="square" lIns="0" tIns="0" rIns="0" bIns="0" rtlCol="0" anchor="ctr"/>
+          <a:lstStyle/>
+          <a:p>
+            <a:pPr algn="ctr" indent="0" marL="0">
+              <a:buNone/>
+            </a:pPr>
+            <a:r>
+              <a:rPr lang="en-US" sz="1050" b="1" dirty="0">
+                <a:solidFill>
+                  <a:srgbClr val="B3261E"/>
+                </a:solidFill>
+                <a:latin typeface="Courier New" pitchFamily="34" charset="0"/>
+                <a:ea typeface="Courier New" pitchFamily="34" charset="-122"/>
+                <a:cs typeface="Courier New" pitchFamily="34" charset="-120"/>
+              </a:rPr>
+              <a:t>тоді</a:t>
+            </a:r>
+            <a:endParaRPr lang="en-US" sz="1050" dirty="0"/>
+          </a:p>
+        </p:txBody>
+      </p:sp>
+      <p:sp>
+        <p:nvSpPr>
+          <p:cNvPr id="11" name="Text 8"/>
+          <p:cNvSpPr/>
+          <p:nvPr/>
+        </p:nvSpPr>
+        <p:spPr>
+          <a:xfrm>
+            <a:off x="521208" y="2423160"/>
+            <a:ext cx="1737360" cy="640080"/>
+          </a:xfrm>
+          <a:prstGeom prst="rect">
+            <a:avLst/>
+          </a:prstGeom>
+          <a:noFill/>
+          <a:ln/>
+        </p:spPr>
+        <p:txBody>
+          <a:bodyPr wrap="square" lIns="0" tIns="0" rIns="0" bIns="0" rtlCol="0" anchor="t"/>
+          <a:lstStyle/>
+          <a:p>
+            <a:pPr algn="ctr" indent="0" marL="0">
+              <a:buNone/>
+            </a:pPr>
+            <a:r>
+              <a:rPr lang="en-US" sz="1100" dirty="0">
+                <a:solidFill>
+                  <a:srgbClr val="434343"/>
+                </a:solidFill>
+                <a:latin typeface="Montserrat" pitchFamily="34" charset="0"/>
+                <a:ea typeface="Montserrat" pitchFamily="34" charset="-122"/>
+                <a:cs typeface="Montserrat" pitchFamily="34" charset="-120"/>
+              </a:rPr>
+              <a:t>три рядки коду + 4 питання без відповідей</a:t>
+            </a:r>
+            <a:endParaRPr lang="en-US" sz="1100" dirty="0"/>
+          </a:p>
+        </p:txBody>
+      </p:sp>
+      <p:sp>
+        <p:nvSpPr>
+          <p:cNvPr id="12" name="Shape 9"/>
+          <p:cNvSpPr/>
+          <p:nvPr/>
+        </p:nvSpPr>
+        <p:spPr>
+          <a:xfrm>
+            <a:off x="2877312" y="2157984"/>
+            <a:ext cx="164592" cy="164592"/>
+          </a:xfrm>
+          <a:prstGeom prst="ellipse">
+            <a:avLst/>
+          </a:prstGeom>
+          <a:solidFill>
+            <a:srgbClr val="5A05F4"/>
+          </a:solidFill>
+          <a:ln/>
+        </p:spPr>
+      </p:sp>
+      <p:sp>
+        <p:nvSpPr>
+          <p:cNvPr id="13" name="Text 10"/>
+          <p:cNvSpPr/>
+          <p:nvPr/>
+        </p:nvSpPr>
+        <p:spPr>
+          <a:xfrm>
+            <a:off x="2273808" y="1673352"/>
+            <a:ext cx="1371600" cy="274320"/>
+          </a:xfrm>
+          <a:prstGeom prst="rect">
+            <a:avLst/>
+          </a:prstGeom>
+          <a:noFill/>
+          <a:ln/>
+        </p:spPr>
+        <p:txBody>
+          <a:bodyPr wrap="square" lIns="0" tIns="0" rIns="0" bIns="0" rtlCol="0" anchor="ctr"/>
+          <a:lstStyle/>
+          <a:p>
+            <a:pPr algn="ctr" indent="0" marL="0">
+              <a:buNone/>
+            </a:pPr>
+            <a:r>
+              <a:rPr lang="en-US" sz="1050" b="1" dirty="0">
+                <a:solidFill>
+                  <a:srgbClr val="5A05F4"/>
+                </a:solidFill>
+                <a:latin typeface="Courier New" pitchFamily="34" charset="0"/>
+                <a:ea typeface="Courier New" pitchFamily="34" charset="-122"/>
+                <a:cs typeface="Courier New" pitchFamily="34" charset="-120"/>
+              </a:rPr>
+              <a:t>W1</a:t>
+            </a:r>
+            <a:endParaRPr lang="en-US" sz="1050" dirty="0"/>
+          </a:p>
+        </p:txBody>
+      </p:sp>
+      <p:sp>
+        <p:nvSpPr>
+          <p:cNvPr id="14" name="Text 11"/>
+          <p:cNvSpPr/>
+          <p:nvPr/>
+        </p:nvSpPr>
+        <p:spPr>
+          <a:xfrm>
+            <a:off x="2090928" y="2423160"/>
+            <a:ext cx="1737360" cy="640080"/>
+          </a:xfrm>
+          <a:prstGeom prst="rect">
+            <a:avLst/>
+          </a:prstGeom>
+          <a:noFill/>
+          <a:ln/>
+        </p:spPr>
+        <p:txBody>
+          <a:bodyPr wrap="square" lIns="0" tIns="0" rIns="0" bIns="0" rtlCol="0" anchor="t"/>
+          <a:lstStyle/>
+          <a:p>
+            <a:pPr algn="ctr" indent="0" marL="0">
+              <a:buNone/>
+            </a:pPr>
+            <a:r>
+              <a:rPr lang="en-US" sz="1100" dirty="0">
+                <a:solidFill>
+                  <a:srgbClr val="434343"/>
+                </a:solidFill>
+                <a:latin typeface="Montserrat" pitchFamily="34" charset="0"/>
+                <a:ea typeface="Montserrat" pitchFamily="34" charset="-122"/>
+                <a:cs typeface="Montserrat" pitchFamily="34" charset="-120"/>
+              </a:rPr>
+              <a:t>unified log · реєстр промптів</a:t>
+            </a:r>
+            <a:endParaRPr lang="en-US" sz="1100" dirty="0"/>
+          </a:p>
+        </p:txBody>
+      </p:sp>
+      <p:sp>
+        <p:nvSpPr>
+          <p:cNvPr id="15" name="Shape 12"/>
+          <p:cNvSpPr/>
+          <p:nvPr/>
+        </p:nvSpPr>
+        <p:spPr>
+          <a:xfrm>
+            <a:off x="4447032" y="2157984"/>
+            <a:ext cx="164592" cy="164592"/>
+          </a:xfrm>
+          <a:prstGeom prst="ellipse">
+            <a:avLst/>
+          </a:prstGeom>
+          <a:solidFill>
+            <a:srgbClr val="5A05F4"/>
+          </a:solidFill>
+          <a:ln/>
+        </p:spPr>
+      </p:sp>
+      <p:sp>
+        <p:nvSpPr>
+          <p:cNvPr id="16" name="Text 13"/>
+          <p:cNvSpPr/>
+          <p:nvPr/>
+        </p:nvSpPr>
+        <p:spPr>
+          <a:xfrm>
+            <a:off x="3843528" y="1673352"/>
+            <a:ext cx="1371600" cy="274320"/>
+          </a:xfrm>
+          <a:prstGeom prst="rect">
+            <a:avLst/>
+          </a:prstGeom>
+          <a:noFill/>
+          <a:ln/>
+        </p:spPr>
+        <p:txBody>
+          <a:bodyPr wrap="square" lIns="0" tIns="0" rIns="0" bIns="0" rtlCol="0" anchor="ctr"/>
+          <a:lstStyle/>
+          <a:p>
+            <a:pPr algn="ctr" indent="0" marL="0">
+              <a:buNone/>
+            </a:pPr>
+            <a:r>
+              <a:rPr lang="en-US" sz="1050" b="1" dirty="0">
+                <a:solidFill>
+                  <a:srgbClr val="5A05F4"/>
+                </a:solidFill>
+                <a:latin typeface="Courier New" pitchFamily="34" charset="0"/>
+                <a:ea typeface="Courier New" pitchFamily="34" charset="-122"/>
+                <a:cs typeface="Courier New" pitchFamily="34" charset="-120"/>
+              </a:rPr>
+              <a:t>W2</a:t>
+            </a:r>
+            <a:endParaRPr lang="en-US" sz="1050" dirty="0"/>
+          </a:p>
+        </p:txBody>
+      </p:sp>
+      <p:sp>
+        <p:nvSpPr>
+          <p:cNvPr id="17" name="Text 14"/>
+          <p:cNvSpPr/>
+          <p:nvPr/>
+        </p:nvSpPr>
+        <p:spPr>
+          <a:xfrm>
+            <a:off x="3660648" y="2423160"/>
+            <a:ext cx="1737360" cy="640080"/>
+          </a:xfrm>
+          <a:prstGeom prst="rect">
+            <a:avLst/>
+          </a:prstGeom>
+          <a:noFill/>
+          <a:ln/>
+        </p:spPr>
+        <p:txBody>
+          <a:bodyPr wrap="square" lIns="0" tIns="0" rIns="0" bIns="0" rtlCol="0" anchor="t"/>
+          <a:lstStyle/>
+          <a:p>
+            <a:pPr algn="ctr" indent="0" marL="0">
+              <a:buNone/>
+            </a:pPr>
+            <a:r>
+              <a:rPr lang="en-US" sz="1100" dirty="0">
+                <a:solidFill>
+                  <a:srgbClr val="434343"/>
+                </a:solidFill>
+                <a:latin typeface="Montserrat" pitchFamily="34" charset="0"/>
+                <a:ea typeface="Montserrat" pitchFamily="34" charset="-122"/>
+                <a:cs typeface="Montserrat" pitchFamily="34" charset="-120"/>
+              </a:rPr>
+              <a:t>routing · cost</a:t>
+            </a:r>
+            <a:endParaRPr lang="en-US" sz="1100" dirty="0"/>
+          </a:p>
+        </p:txBody>
+      </p:sp>
+      <p:sp>
+        <p:nvSpPr>
+          <p:cNvPr id="18" name="Shape 15"/>
+          <p:cNvSpPr/>
+          <p:nvPr/>
+        </p:nvSpPr>
+        <p:spPr>
+          <a:xfrm>
+            <a:off x="6016752" y="2157984"/>
+            <a:ext cx="164592" cy="164592"/>
+          </a:xfrm>
+          <a:prstGeom prst="ellipse">
+            <a:avLst/>
+          </a:prstGeom>
+          <a:solidFill>
+            <a:srgbClr val="5A05F4"/>
+          </a:solidFill>
+          <a:ln/>
+        </p:spPr>
+      </p:sp>
+      <p:sp>
+        <p:nvSpPr>
+          <p:cNvPr id="19" name="Text 16"/>
+          <p:cNvSpPr/>
+          <p:nvPr/>
+        </p:nvSpPr>
+        <p:spPr>
+          <a:xfrm>
+            <a:off x="5413248" y="1673352"/>
+            <a:ext cx="1371600" cy="274320"/>
+          </a:xfrm>
+          <a:prstGeom prst="rect">
+            <a:avLst/>
+          </a:prstGeom>
+          <a:noFill/>
+          <a:ln/>
+        </p:spPr>
+        <p:txBody>
+          <a:bodyPr wrap="square" lIns="0" tIns="0" rIns="0" bIns="0" rtlCol="0" anchor="ctr"/>
+          <a:lstStyle/>
+          <a:p>
+            <a:pPr algn="ctr" indent="0" marL="0">
+              <a:buNone/>
+            </a:pPr>
+            <a:r>
+              <a:rPr lang="en-US" sz="1050" b="1" dirty="0">
+                <a:solidFill>
+                  <a:srgbClr val="5A05F4"/>
+                </a:solidFill>
+                <a:latin typeface="Courier New" pitchFamily="34" charset="0"/>
+                <a:ea typeface="Courier New" pitchFamily="34" charset="-122"/>
+                <a:cs typeface="Courier New" pitchFamily="34" charset="-120"/>
+              </a:rPr>
+              <a:t>W3</a:t>
+            </a:r>
+            <a:endParaRPr lang="en-US" sz="1050" dirty="0"/>
+          </a:p>
+        </p:txBody>
+      </p:sp>
+      <p:sp>
+        <p:nvSpPr>
+          <p:cNvPr id="20" name="Text 17"/>
+          <p:cNvSpPr/>
+          <p:nvPr/>
+        </p:nvSpPr>
+        <p:spPr>
+          <a:xfrm>
+            <a:off x="5230368" y="2423160"/>
+            <a:ext cx="1737360" cy="640080"/>
+          </a:xfrm>
+          <a:prstGeom prst="rect">
+            <a:avLst/>
+          </a:prstGeom>
+          <a:noFill/>
+          <a:ln/>
+        </p:spPr>
+        <p:txBody>
+          <a:bodyPr wrap="square" lIns="0" tIns="0" rIns="0" bIns="0" rtlCol="0" anchor="t"/>
+          <a:lstStyle/>
+          <a:p>
+            <a:pPr algn="ctr" indent="0" marL="0">
+              <a:buNone/>
+            </a:pPr>
+            <a:r>
+              <a:rPr lang="en-US" sz="1100" dirty="0">
+                <a:solidFill>
+                  <a:srgbClr val="434343"/>
+                </a:solidFill>
+                <a:latin typeface="Montserrat" pitchFamily="34" charset="0"/>
+                <a:ea typeface="Montserrat" pitchFamily="34" charset="-122"/>
+                <a:cs typeface="Montserrat" pitchFamily="34" charset="-120"/>
+              </a:rPr>
+              <a:t>кеш · tools</a:t>
+            </a:r>
+            <a:endParaRPr lang="en-US" sz="1100" dirty="0"/>
+          </a:p>
+        </p:txBody>
+      </p:sp>
+      <p:sp>
+        <p:nvSpPr>
+          <p:cNvPr id="21" name="Shape 18"/>
+          <p:cNvSpPr/>
+          <p:nvPr/>
+        </p:nvSpPr>
+        <p:spPr>
+          <a:xfrm>
+            <a:off x="7586472" y="2157984"/>
+            <a:ext cx="164592" cy="164592"/>
+          </a:xfrm>
+          <a:prstGeom prst="ellipse">
+            <a:avLst/>
+          </a:prstGeom>
+          <a:solidFill>
+            <a:srgbClr val="5A05F4"/>
+          </a:solidFill>
+          <a:ln/>
+        </p:spPr>
+      </p:sp>
+      <p:sp>
+        <p:nvSpPr>
+          <p:cNvPr id="22" name="Text 19"/>
+          <p:cNvSpPr/>
+          <p:nvPr/>
+        </p:nvSpPr>
+        <p:spPr>
+          <a:xfrm>
+            <a:off x="6982968" y="1673352"/>
+            <a:ext cx="1371600" cy="274320"/>
+          </a:xfrm>
+          <a:prstGeom prst="rect">
+            <a:avLst/>
+          </a:prstGeom>
+          <a:noFill/>
+          <a:ln/>
+        </p:spPr>
+        <p:txBody>
+          <a:bodyPr wrap="square" lIns="0" tIns="0" rIns="0" bIns="0" rtlCol="0" anchor="ctr"/>
+          <a:lstStyle/>
+          <a:p>
+            <a:pPr algn="ctr" indent="0" marL="0">
+              <a:buNone/>
+            </a:pPr>
+            <a:r>
+              <a:rPr lang="en-US" sz="1050" b="1" dirty="0">
+                <a:solidFill>
+                  <a:srgbClr val="5A05F4"/>
+                </a:solidFill>
+                <a:latin typeface="Courier New" pitchFamily="34" charset="0"/>
+                <a:ea typeface="Courier New" pitchFamily="34" charset="-122"/>
+                <a:cs typeface="Courier New" pitchFamily="34" charset="-120"/>
+              </a:rPr>
+              <a:t>W4</a:t>
+            </a:r>
+            <a:endParaRPr lang="en-US" sz="1050" dirty="0"/>
+          </a:p>
+        </p:txBody>
+      </p:sp>
+      <p:sp>
+        <p:nvSpPr>
+          <p:cNvPr id="23" name="Text 20"/>
+          <p:cNvSpPr/>
+          <p:nvPr/>
+        </p:nvSpPr>
+        <p:spPr>
+          <a:xfrm>
+            <a:off x="6800088" y="2423160"/>
+            <a:ext cx="1737360" cy="640080"/>
+          </a:xfrm>
+          <a:prstGeom prst="rect">
+            <a:avLst/>
+          </a:prstGeom>
+          <a:noFill/>
+          <a:ln/>
+        </p:spPr>
+        <p:txBody>
+          <a:bodyPr wrap="square" lIns="0" tIns="0" rIns="0" bIns="0" rtlCol="0" anchor="t"/>
+          <a:lstStyle/>
+          <a:p>
+            <a:pPr algn="ctr" indent="0" marL="0">
+              <a:buNone/>
+            </a:pPr>
+            <a:r>
+              <a:rPr lang="en-US" sz="1100" dirty="0">
+                <a:solidFill>
+                  <a:srgbClr val="434343"/>
+                </a:solidFill>
+                <a:latin typeface="Montserrat" pitchFamily="34" charset="0"/>
+                <a:ea typeface="Montserrat" pitchFamily="34" charset="-122"/>
+                <a:cs typeface="Montserrat" pitchFamily="34" charset="-120"/>
+              </a:rPr>
+              <a:t>fallback · guardrail · HITL</a:t>
+            </a:r>
+            <a:endParaRPr lang="en-US" sz="1100" dirty="0"/>
+          </a:p>
+        </p:txBody>
+      </p:sp>
+      <p:sp>
+        <p:nvSpPr>
+          <p:cNvPr id="24" name="Shape 21"/>
+          <p:cNvSpPr/>
+          <p:nvPr/>
+        </p:nvSpPr>
+        <p:spPr>
+          <a:xfrm>
+            <a:off x="9156192" y="2157984"/>
+            <a:ext cx="164592" cy="164592"/>
+          </a:xfrm>
+          <a:prstGeom prst="ellipse">
+            <a:avLst/>
+          </a:prstGeom>
+          <a:solidFill>
+            <a:srgbClr val="5A05F4"/>
+          </a:solidFill>
+          <a:ln/>
+        </p:spPr>
+      </p:sp>
+      <p:sp>
+        <p:nvSpPr>
+          <p:cNvPr id="25" name="Text 22"/>
+          <p:cNvSpPr/>
+          <p:nvPr/>
+        </p:nvSpPr>
+        <p:spPr>
+          <a:xfrm>
+            <a:off x="8552688" y="1673352"/>
+            <a:ext cx="1371600" cy="274320"/>
+          </a:xfrm>
+          <a:prstGeom prst="rect">
+            <a:avLst/>
+          </a:prstGeom>
+          <a:noFill/>
+          <a:ln/>
+        </p:spPr>
+        <p:txBody>
+          <a:bodyPr wrap="square" lIns="0" tIns="0" rIns="0" bIns="0" rtlCol="0" anchor="ctr"/>
+          <a:lstStyle/>
+          <a:p>
+            <a:pPr algn="ctr" indent="0" marL="0">
+              <a:buNone/>
+            </a:pPr>
+            <a:r>
+              <a:rPr lang="en-US" sz="1050" b="1" dirty="0">
+                <a:solidFill>
+                  <a:srgbClr val="5A05F4"/>
+                </a:solidFill>
+                <a:latin typeface="Courier New" pitchFamily="34" charset="0"/>
+                <a:ea typeface="Courier New" pitchFamily="34" charset="-122"/>
+                <a:cs typeface="Courier New" pitchFamily="34" charset="-120"/>
+              </a:rPr>
+              <a:t>W5</a:t>
+            </a:r>
+            <a:endParaRPr lang="en-US" sz="1050" dirty="0"/>
+          </a:p>
+        </p:txBody>
+      </p:sp>
+      <p:sp>
+        <p:nvSpPr>
+          <p:cNvPr id="26" name="Text 23"/>
+          <p:cNvSpPr/>
+          <p:nvPr/>
+        </p:nvSpPr>
+        <p:spPr>
+          <a:xfrm>
+            <a:off x="8369808" y="2423160"/>
+            <a:ext cx="1737360" cy="640080"/>
+          </a:xfrm>
+          <a:prstGeom prst="rect">
+            <a:avLst/>
+          </a:prstGeom>
+          <a:noFill/>
+          <a:ln/>
+        </p:spPr>
+        <p:txBody>
+          <a:bodyPr wrap="square" lIns="0" tIns="0" rIns="0" bIns="0" rtlCol="0" anchor="t"/>
+          <a:lstStyle/>
+          <a:p>
+            <a:pPr algn="ctr" indent="0" marL="0">
+              <a:buNone/>
+            </a:pPr>
+            <a:r>
+              <a:rPr lang="en-US" sz="1100" dirty="0">
+                <a:solidFill>
+                  <a:srgbClr val="434343"/>
+                </a:solidFill>
+                <a:latin typeface="Montserrat" pitchFamily="34" charset="0"/>
+                <a:ea typeface="Montserrat" pitchFamily="34" charset="-122"/>
+                <a:cs typeface="Montserrat" pitchFamily="34" charset="-120"/>
+              </a:rPr>
+              <a:t>метрики · evals</a:t>
+            </a:r>
+            <a:endParaRPr lang="en-US" sz="1100" dirty="0"/>
+          </a:p>
+        </p:txBody>
+      </p:sp>
+      <p:sp>
+        <p:nvSpPr>
+          <p:cNvPr id="27" name="Shape 24"/>
+          <p:cNvSpPr/>
+          <p:nvPr/>
+        </p:nvSpPr>
+        <p:spPr>
+          <a:xfrm>
+            <a:off x="10725912" y="2157984"/>
+            <a:ext cx="164592" cy="164592"/>
+          </a:xfrm>
+          <a:prstGeom prst="ellipse">
+            <a:avLst/>
+          </a:prstGeom>
+          <a:solidFill>
+            <a:srgbClr val="106B41"/>
+          </a:solidFill>
+          <a:ln/>
+        </p:spPr>
+      </p:sp>
+      <p:sp>
+        <p:nvSpPr>
+          <p:cNvPr id="28" name="Text 25"/>
+          <p:cNvSpPr/>
+          <p:nvPr/>
+        </p:nvSpPr>
+        <p:spPr>
+          <a:xfrm>
+            <a:off x="10122408" y="1673352"/>
+            <a:ext cx="1371600" cy="274320"/>
+          </a:xfrm>
+          <a:prstGeom prst="rect">
+            <a:avLst/>
+          </a:prstGeom>
+          <a:noFill/>
+          <a:ln/>
+        </p:spPr>
+        <p:txBody>
+          <a:bodyPr wrap="square" lIns="0" tIns="0" rIns="0" bIns="0" rtlCol="0" anchor="ctr"/>
+          <a:lstStyle/>
+          <a:p>
+            <a:pPr algn="ctr" indent="0" marL="0">
+              <a:buNone/>
+            </a:pPr>
+            <a:r>
+              <a:rPr lang="en-US" sz="1050" b="1" dirty="0">
+                <a:solidFill>
+                  <a:srgbClr val="106B41"/>
+                </a:solidFill>
+                <a:latin typeface="Courier New" pitchFamily="34" charset="0"/>
+                <a:ea typeface="Courier New" pitchFamily="34" charset="-122"/>
+                <a:cs typeface="Courier New" pitchFamily="34" charset="-120"/>
+              </a:rPr>
+              <a:t>W6</a:t>
+            </a:r>
+            <a:endParaRPr lang="en-US" sz="1050" dirty="0"/>
+          </a:p>
+        </p:txBody>
+      </p:sp>
+      <p:sp>
+        <p:nvSpPr>
+          <p:cNvPr id="29" name="Text 26"/>
+          <p:cNvSpPr/>
+          <p:nvPr/>
+        </p:nvSpPr>
+        <p:spPr>
+          <a:xfrm>
+            <a:off x="9939528" y="2423160"/>
+            <a:ext cx="1737360" cy="640080"/>
+          </a:xfrm>
+          <a:prstGeom prst="rect">
+            <a:avLst/>
+          </a:prstGeom>
+          <a:noFill/>
+          <a:ln/>
+        </p:spPr>
+        <p:txBody>
+          <a:bodyPr wrap="square" lIns="0" tIns="0" rIns="0" bIns="0" rtlCol="0" anchor="t"/>
+          <a:lstStyle/>
+          <a:p>
+            <a:pPr algn="ctr" indent="0" marL="0">
+              <a:buNone/>
+            </a:pPr>
+            <a:r>
+              <a:rPr lang="en-US" sz="1100" dirty="0">
+                <a:solidFill>
+                  <a:srgbClr val="434343"/>
+                </a:solidFill>
+                <a:latin typeface="Montserrat" pitchFamily="34" charset="0"/>
+                <a:ea typeface="Montserrat" pitchFamily="34" charset="-122"/>
+                <a:cs typeface="Montserrat" pitchFamily="34" charset="-120"/>
+              </a:rPr>
+              <a:t>CI-гейт → контур керування</a:t>
+            </a:r>
+            <a:endParaRPr lang="en-US" sz="1100" dirty="0"/>
+          </a:p>
+        </p:txBody>
+      </p:sp>
+      <p:sp>
+        <p:nvSpPr>
+          <p:cNvPr id="30" name="Shape 27"/>
+          <p:cNvSpPr/>
+          <p:nvPr/>
+        </p:nvSpPr>
+        <p:spPr>
+          <a:xfrm>
+            <a:off x="566928" y="3429000"/>
+            <a:ext cx="3520440" cy="1554480"/>
           </a:xfrm>
           <a:prstGeom prst="roundRect">
             <a:avLst>
-              <a:gd name="adj" fmla="val 7273"/>
+              <a:gd name="adj" fmla="val 7059"/>
             </a:avLst>
           </a:prstGeom>
           <a:solidFill>
@@ -22085,14 +23245,34 @@
       </p:sp>
       <p:sp>
         <p:nvSpPr>
-          <p:cNvPr id="9" name="Text 6"/>
-          <p:cNvSpPr/>
-          <p:nvPr/>
-        </p:nvSpPr>
-        <p:spPr>
-          <a:xfrm>
-            <a:off x="768096" y="1892808"/>
-            <a:ext cx="4946904" cy="438912"/>
+          <p:cNvPr id="31" name="Shape 28"/>
+          <p:cNvSpPr/>
+          <p:nvPr/>
+        </p:nvSpPr>
+        <p:spPr>
+          <a:xfrm>
+            <a:off x="768096" y="3611880"/>
+            <a:ext cx="384048" cy="384048"/>
+          </a:xfrm>
+          <a:prstGeom prst="ellipse">
+            <a:avLst/>
+          </a:prstGeom>
+          <a:solidFill>
+            <a:srgbClr val="5A05F4"/>
+          </a:solidFill>
+          <a:ln/>
+        </p:spPr>
+      </p:sp>
+      <p:sp>
+        <p:nvSpPr>
+          <p:cNvPr id="32" name="Text 29"/>
+          <p:cNvSpPr/>
+          <p:nvPr/>
+        </p:nvSpPr>
+        <p:spPr>
+          <a:xfrm>
+            <a:off x="768096" y="3611880"/>
+            <a:ext cx="384048" cy="384048"/>
           </a:xfrm>
           <a:prstGeom prst="rect">
             <a:avLst/>
@@ -22104,19 +23284,58 @@
           <a:bodyPr wrap="square" lIns="0" tIns="0" rIns="0" bIns="0" rtlCol="0" anchor="ctr"/>
           <a:lstStyle/>
           <a:p>
+            <a:pPr algn="ctr" indent="0" marL="0">
+              <a:buNone/>
+            </a:pPr>
+            <a:r>
+              <a:rPr lang="en-US" sz="1200" b="1" dirty="0">
+                <a:solidFill>
+                  <a:srgbClr val="FFFFFF"/>
+                </a:solidFill>
+                <a:latin typeface="Courier New" pitchFamily="34" charset="0"/>
+                <a:ea typeface="Courier New" pitchFamily="34" charset="-122"/>
+                <a:cs typeface="Courier New" pitchFamily="34" charset="-120"/>
+              </a:rPr>
+              <a:t>1</a:t>
+            </a:r>
+            <a:endParaRPr lang="en-US" sz="1200" dirty="0"/>
+          </a:p>
+        </p:txBody>
+      </p:sp>
+      <p:sp>
+        <p:nvSpPr>
+          <p:cNvPr id="33" name="Text 30"/>
+          <p:cNvSpPr/>
+          <p:nvPr/>
+        </p:nvSpPr>
+        <p:spPr>
+          <a:xfrm>
+            <a:off x="1280160" y="3584448"/>
+            <a:ext cx="2606040" cy="438912"/>
+          </a:xfrm>
+          <a:prstGeom prst="rect">
+            <a:avLst/>
+          </a:prstGeom>
+          <a:noFill/>
+          <a:ln/>
+        </p:spPr>
+        <p:txBody>
+          <a:bodyPr wrap="square" lIns="0" tIns="0" rIns="0" bIns="0" rtlCol="0" anchor="ctr"/>
+          <a:lstStyle/>
+          <a:p>
             <a:pPr indent="0" marL="0">
               <a:buNone/>
             </a:pPr>
             <a:r>
               <a:rPr lang="en-US" sz="1450" b="1" dirty="0">
                 <a:solidFill>
-                  <a:srgbClr val="FF6B6B"/>
+                  <a:srgbClr val="A98BFF"/>
                 </a:solidFill>
                 <a:latin typeface="Montserrat" pitchFamily="34" charset="0"/>
                 <a:ea typeface="Montserrat" pitchFamily="34" charset="-122"/>
                 <a:cs typeface="Montserrat" pitchFamily="34" charset="-120"/>
               </a:rPr>
-              <a:t>Тоді</a:t>
+              <a:t>Підняти</a:t>
             </a:r>
             <a:endParaRPr lang="en-US" sz="1450" dirty="0"/>
           </a:p>
@@ -22124,14 +23343,14 @@
       </p:sp>
       <p:sp>
         <p:nvSpPr>
-          <p:cNvPr id="10" name="Text 7"/>
-          <p:cNvSpPr/>
-          <p:nvPr/>
-        </p:nvSpPr>
-        <p:spPr>
-          <a:xfrm>
-            <a:off x="768096" y="2423160"/>
-            <a:ext cx="4946904" cy="667512"/>
+          <p:cNvPr id="34" name="Text 31"/>
+          <p:cNvSpPr/>
+          <p:nvPr/>
+        </p:nvSpPr>
+        <p:spPr>
+          <a:xfrm>
+            <a:off x="768096" y="4114800"/>
+            <a:ext cx="3118104" cy="713232"/>
           </a:xfrm>
           <a:prstGeom prst="rect">
             <a:avLst/>
@@ -22158,7 +23377,7 @@
                 <a:ea typeface="Montserrat" pitchFamily="34" charset="-122"/>
                 <a:cs typeface="Montserrat" pitchFamily="34" charset="-120"/>
               </a:rPr>
-              <a:t>три рядки коду + чотири питання без відповідей: гроші, надійність, якість, видимість</a:t>
+              <a:t>упевнено, відтворювано, з чистого клону</a:t>
             </a:r>
             <a:endParaRPr lang="en-US" sz="1200" dirty="0"/>
           </a:p>
@@ -22166,18 +23385,18 @@
       </p:sp>
       <p:sp>
         <p:nvSpPr>
-          <p:cNvPr id="11" name="Shape 8"/>
-          <p:cNvSpPr/>
-          <p:nvPr/>
-        </p:nvSpPr>
-        <p:spPr>
-          <a:xfrm>
-            <a:off x="6281928" y="1737360"/>
-            <a:ext cx="5349240" cy="1508760"/>
+          <p:cNvPr id="35" name="Shape 32"/>
+          <p:cNvSpPr/>
+          <p:nvPr/>
+        </p:nvSpPr>
+        <p:spPr>
+          <a:xfrm>
+            <a:off x="4270248" y="3429000"/>
+            <a:ext cx="3520440" cy="1554480"/>
           </a:xfrm>
           <a:prstGeom prst="roundRect">
             <a:avLst>
-              <a:gd name="adj" fmla="val 7273"/>
+              <a:gd name="adj" fmla="val 7059"/>
             </a:avLst>
           </a:prstGeom>
           <a:solidFill>
@@ -22188,14 +23407,34 @@
       </p:sp>
       <p:sp>
         <p:nvSpPr>
-          <p:cNvPr id="12" name="Text 9"/>
-          <p:cNvSpPr/>
-          <p:nvPr/>
-        </p:nvSpPr>
-        <p:spPr>
-          <a:xfrm>
-            <a:off x="6483096" y="1892808"/>
-            <a:ext cx="4946904" cy="438912"/>
+          <p:cNvPr id="36" name="Shape 33"/>
+          <p:cNvSpPr/>
+          <p:nvPr/>
+        </p:nvSpPr>
+        <p:spPr>
+          <a:xfrm>
+            <a:off x="4471416" y="3611880"/>
+            <a:ext cx="384048" cy="384048"/>
+          </a:xfrm>
+          <a:prstGeom prst="ellipse">
+            <a:avLst/>
+          </a:prstGeom>
+          <a:solidFill>
+            <a:srgbClr val="5A05F4"/>
+          </a:solidFill>
+          <a:ln/>
+        </p:spPr>
+      </p:sp>
+      <p:sp>
+        <p:nvSpPr>
+          <p:cNvPr id="37" name="Text 34"/>
+          <p:cNvSpPr/>
+          <p:nvPr/>
+        </p:nvSpPr>
+        <p:spPr>
+          <a:xfrm>
+            <a:off x="4471416" y="3611880"/>
+            <a:ext cx="384048" cy="384048"/>
           </a:xfrm>
           <a:prstGeom prst="rect">
             <a:avLst/>
@@ -22207,19 +23446,58 @@
           <a:bodyPr wrap="square" lIns="0" tIns="0" rIns="0" bIns="0" rtlCol="0" anchor="ctr"/>
           <a:lstStyle/>
           <a:p>
+            <a:pPr algn="ctr" indent="0" marL="0">
+              <a:buNone/>
+            </a:pPr>
+            <a:r>
+              <a:rPr lang="en-US" sz="1200" b="1" dirty="0">
+                <a:solidFill>
+                  <a:srgbClr val="FFFFFF"/>
+                </a:solidFill>
+                <a:latin typeface="Courier New" pitchFamily="34" charset="0"/>
+                <a:ea typeface="Courier New" pitchFamily="34" charset="-122"/>
+                <a:cs typeface="Courier New" pitchFamily="34" charset="-120"/>
+              </a:rPr>
+              <a:t>2</a:t>
+            </a:r>
+            <a:endParaRPr lang="en-US" sz="1200" dirty="0"/>
+          </a:p>
+        </p:txBody>
+      </p:sp>
+      <p:sp>
+        <p:nvSpPr>
+          <p:cNvPr id="38" name="Text 35"/>
+          <p:cNvSpPr/>
+          <p:nvPr/>
+        </p:nvSpPr>
+        <p:spPr>
+          <a:xfrm>
+            <a:off x="4983480" y="3584448"/>
+            <a:ext cx="2606040" cy="438912"/>
+          </a:xfrm>
+          <a:prstGeom prst="rect">
+            <a:avLst/>
+          </a:prstGeom>
+          <a:noFill/>
+          <a:ln/>
+        </p:spPr>
+        <p:txBody>
+          <a:bodyPr wrap="square" lIns="0" tIns="0" rIns="0" bIns="0" rtlCol="0" anchor="ctr"/>
+          <a:lstStyle/>
+          <a:p>
             <a:pPr indent="0" marL="0">
               <a:buNone/>
             </a:pPr>
             <a:r>
               <a:rPr lang="en-US" sz="1450" b="1" dirty="0">
                 <a:solidFill>
-                  <a:srgbClr val="3FCF8E"/>
+                  <a:srgbClr val="A98BFF"/>
                 </a:solidFill>
                 <a:latin typeface="Montserrat" pitchFamily="34" charset="0"/>
                 <a:ea typeface="Montserrat" pitchFamily="34" charset="-122"/>
                 <a:cs typeface="Montserrat" pitchFamily="34" charset="-120"/>
               </a:rPr>
-              <a:t>Тепер</a:t>
+              <a:t>Пережити інцидент</a:t>
             </a:r>
             <a:endParaRPr lang="en-US" sz="1450" dirty="0"/>
           </a:p>
@@ -22227,14 +23505,14 @@
       </p:sp>
       <p:sp>
         <p:nvSpPr>
-          <p:cNvPr id="13" name="Text 10"/>
-          <p:cNvSpPr/>
-          <p:nvPr/>
-        </p:nvSpPr>
-        <p:spPr>
-          <a:xfrm>
-            <a:off x="6483096" y="2423160"/>
-            <a:ext cx="4946904" cy="667512"/>
+          <p:cNvPr id="39" name="Text 36"/>
+          <p:cNvSpPr/>
+          <p:nvPr/>
+        </p:nvSpPr>
+        <p:spPr>
+          <a:xfrm>
+            <a:off x="4471416" y="4114800"/>
+            <a:ext cx="3118104" cy="713232"/>
           </a:xfrm>
           <a:prstGeom prst="rect">
             <a:avLst/>
@@ -22261,7 +23539,7 @@
                 <a:ea typeface="Montserrat" pitchFamily="34" charset="-122"/>
                 <a:cs typeface="Montserrat" pitchFamily="34" charset="-120"/>
               </a:rPr>
-              <a:t>routing · cost · кеш · tools + HITL · fallback · guardrail · метрики · eval-гейт</a:t>
+              <a:t>виявити → деградувати → відновити → зафіксувати</a:t>
             </a:r>
             <a:endParaRPr lang="en-US" sz="1200" dirty="0"/>
           </a:p>
@@ -22269,13 +23547,13 @@
       </p:sp>
       <p:sp>
         <p:nvSpPr>
-          <p:cNvPr id="14" name="Shape 11"/>
-          <p:cNvSpPr/>
-          <p:nvPr/>
-        </p:nvSpPr>
-        <p:spPr>
-          <a:xfrm>
-            <a:off x="566928" y="3429000"/>
+          <p:cNvPr id="40" name="Shape 37"/>
+          <p:cNvSpPr/>
+          <p:nvPr/>
+        </p:nvSpPr>
+        <p:spPr>
+          <a:xfrm>
+            <a:off x="7973568" y="3429000"/>
             <a:ext cx="3520440" cy="1554480"/>
           </a:xfrm>
           <a:prstGeom prst="roundRect">
@@ -22291,13 +23569,13 @@
       </p:sp>
       <p:sp>
         <p:nvSpPr>
-          <p:cNvPr id="15" name="Shape 12"/>
-          <p:cNvSpPr/>
-          <p:nvPr/>
-        </p:nvSpPr>
-        <p:spPr>
-          <a:xfrm>
-            <a:off x="768096" y="3611880"/>
+          <p:cNvPr id="41" name="Shape 38"/>
+          <p:cNvSpPr/>
+          <p:nvPr/>
+        </p:nvSpPr>
+        <p:spPr>
+          <a:xfrm>
+            <a:off x="8174736" y="3611880"/>
             <a:ext cx="384048" cy="384048"/>
           </a:xfrm>
           <a:prstGeom prst="ellipse">
@@ -22311,13 +23589,13 @@
       </p:sp>
       <p:sp>
         <p:nvSpPr>
-          <p:cNvPr id="16" name="Text 13"/>
-          <p:cNvSpPr/>
-          <p:nvPr/>
-        </p:nvSpPr>
-        <p:spPr>
-          <a:xfrm>
-            <a:off x="768096" y="3611880"/>
+          <p:cNvPr id="42" name="Text 39"/>
+          <p:cNvSpPr/>
+          <p:nvPr/>
+        </p:nvSpPr>
+        <p:spPr>
+          <a:xfrm>
+            <a:off x="8174736" y="3611880"/>
             <a:ext cx="384048" cy="384048"/>
           </a:xfrm>
           <a:prstGeom prst="rect">
@@ -22342,7 +23620,7 @@
                 <a:ea typeface="Courier New" pitchFamily="34" charset="-122"/>
                 <a:cs typeface="Courier New" pitchFamily="34" charset="-120"/>
               </a:rPr>
-              <a:t>1</a:t>
+              <a:t>3</a:t>
             </a:r>
             <a:endParaRPr lang="en-US" sz="1200" dirty="0"/>
           </a:p>
@@ -22350,13 +23628,13 @@
       </p:sp>
       <p:sp>
         <p:nvSpPr>
-          <p:cNvPr id="17" name="Text 14"/>
-          <p:cNvSpPr/>
-          <p:nvPr/>
-        </p:nvSpPr>
-        <p:spPr>
-          <a:xfrm>
-            <a:off x="1280160" y="3584448"/>
+          <p:cNvPr id="43" name="Text 40"/>
+          <p:cNvSpPr/>
+          <p:nvPr/>
+        </p:nvSpPr>
+        <p:spPr>
+          <a:xfrm>
+            <a:off x="8686800" y="3584448"/>
             <a:ext cx="2606040" cy="438912"/>
           </a:xfrm>
           <a:prstGeom prst="rect">
@@ -22381,7 +23659,7 @@
                 <a:ea typeface="Montserrat" pitchFamily="34" charset="-122"/>
                 <a:cs typeface="Montserrat" pitchFamily="34" charset="-120"/>
               </a:rPr>
-              <a:t>Підняти</a:t>
+              <a:t>Пояснити</a:t>
             </a:r>
             <a:endParaRPr lang="en-US" sz="1450" dirty="0"/>
           </a:p>
@@ -22389,13 +23667,13 @@
       </p:sp>
       <p:sp>
         <p:nvSpPr>
-          <p:cNvPr id="18" name="Text 15"/>
-          <p:cNvSpPr/>
-          <p:nvPr/>
-        </p:nvSpPr>
-        <p:spPr>
-          <a:xfrm>
-            <a:off x="768096" y="4114800"/>
+          <p:cNvPr id="44" name="Text 41"/>
+          <p:cNvSpPr/>
+          <p:nvPr/>
+        </p:nvSpPr>
+        <p:spPr>
+          <a:xfrm>
+            <a:off x="8174736" y="4114800"/>
             <a:ext cx="3118104" cy="713232"/>
           </a:xfrm>
           <a:prstGeom prst="rect">
@@ -22423,7 +23701,7 @@
                 <a:ea typeface="Montserrat" pitchFamily="34" charset="-122"/>
                 <a:cs typeface="Montserrat" pitchFamily="34" charset="-120"/>
               </a:rPr>
-              <a:t>упевнено, відтворювано, з чистого клону</a:t>
+              <a:t>через наслідки, а не через список технологій</a:t>
             </a:r>
             <a:endParaRPr lang="en-US" sz="1200" dirty="0"/>
           </a:p>
@@ -22431,331 +23709,7 @@
       </p:sp>
       <p:sp>
         <p:nvSpPr>
-          <p:cNvPr id="19" name="Shape 16"/>
-          <p:cNvSpPr/>
-          <p:nvPr/>
-        </p:nvSpPr>
-        <p:spPr>
-          <a:xfrm>
-            <a:off x="4270248" y="3429000"/>
-            <a:ext cx="3520440" cy="1554480"/>
-          </a:xfrm>
-          <a:prstGeom prst="roundRect">
-            <a:avLst>
-              <a:gd name="adj" fmla="val 7059"/>
-            </a:avLst>
-          </a:prstGeom>
-          <a:solidFill>
-            <a:srgbClr val="000000"/>
-          </a:solidFill>
-          <a:ln/>
-        </p:spPr>
-      </p:sp>
-      <p:sp>
-        <p:nvSpPr>
-          <p:cNvPr id="20" name="Shape 17"/>
-          <p:cNvSpPr/>
-          <p:nvPr/>
-        </p:nvSpPr>
-        <p:spPr>
-          <a:xfrm>
-            <a:off x="4471416" y="3611880"/>
-            <a:ext cx="384048" cy="384048"/>
-          </a:xfrm>
-          <a:prstGeom prst="ellipse">
-            <a:avLst/>
-          </a:prstGeom>
-          <a:solidFill>
-            <a:srgbClr val="5A05F4"/>
-          </a:solidFill>
-          <a:ln/>
-        </p:spPr>
-      </p:sp>
-      <p:sp>
-        <p:nvSpPr>
-          <p:cNvPr id="21" name="Text 18"/>
-          <p:cNvSpPr/>
-          <p:nvPr/>
-        </p:nvSpPr>
-        <p:spPr>
-          <a:xfrm>
-            <a:off x="4471416" y="3611880"/>
-            <a:ext cx="384048" cy="384048"/>
-          </a:xfrm>
-          <a:prstGeom prst="rect">
-            <a:avLst/>
-          </a:prstGeom>
-          <a:noFill/>
-          <a:ln/>
-        </p:spPr>
-        <p:txBody>
-          <a:bodyPr wrap="square" lIns="0" tIns="0" rIns="0" bIns="0" rtlCol="0" anchor="ctr"/>
-          <a:lstStyle/>
-          <a:p>
-            <a:pPr algn="ctr" indent="0" marL="0">
-              <a:buNone/>
-            </a:pPr>
-            <a:r>
-              <a:rPr lang="en-US" sz="1200" b="1" dirty="0">
-                <a:solidFill>
-                  <a:srgbClr val="FFFFFF"/>
-                </a:solidFill>
-                <a:latin typeface="Courier New" pitchFamily="34" charset="0"/>
-                <a:ea typeface="Courier New" pitchFamily="34" charset="-122"/>
-                <a:cs typeface="Courier New" pitchFamily="34" charset="-120"/>
-              </a:rPr>
-              <a:t>2</a:t>
-            </a:r>
-            <a:endParaRPr lang="en-US" sz="1200" dirty="0"/>
-          </a:p>
-        </p:txBody>
-      </p:sp>
-      <p:sp>
-        <p:nvSpPr>
-          <p:cNvPr id="22" name="Text 19"/>
-          <p:cNvSpPr/>
-          <p:nvPr/>
-        </p:nvSpPr>
-        <p:spPr>
-          <a:xfrm>
-            <a:off x="4983480" y="3584448"/>
-            <a:ext cx="2606040" cy="438912"/>
-          </a:xfrm>
-          <a:prstGeom prst="rect">
-            <a:avLst/>
-          </a:prstGeom>
-          <a:noFill/>
-          <a:ln/>
-        </p:spPr>
-        <p:txBody>
-          <a:bodyPr wrap="square" lIns="0" tIns="0" rIns="0" bIns="0" rtlCol="0" anchor="ctr"/>
-          <a:lstStyle/>
-          <a:p>
-            <a:pPr indent="0" marL="0">
-              <a:buNone/>
-            </a:pPr>
-            <a:r>
-              <a:rPr lang="en-US" sz="1450" b="1" dirty="0">
-                <a:solidFill>
-                  <a:srgbClr val="A98BFF"/>
-                </a:solidFill>
-                <a:latin typeface="Montserrat" pitchFamily="34" charset="0"/>
-                <a:ea typeface="Montserrat" pitchFamily="34" charset="-122"/>
-                <a:cs typeface="Montserrat" pitchFamily="34" charset="-120"/>
-              </a:rPr>
-              <a:t>Пережити інцидент</a:t>
-            </a:r>
-            <a:endParaRPr lang="en-US" sz="1450" dirty="0"/>
-          </a:p>
-        </p:txBody>
-      </p:sp>
-      <p:sp>
-        <p:nvSpPr>
-          <p:cNvPr id="23" name="Text 20"/>
-          <p:cNvSpPr/>
-          <p:nvPr/>
-        </p:nvSpPr>
-        <p:spPr>
-          <a:xfrm>
-            <a:off x="4471416" y="4114800"/>
-            <a:ext cx="3118104" cy="713232"/>
-          </a:xfrm>
-          <a:prstGeom prst="rect">
-            <a:avLst/>
-          </a:prstGeom>
-          <a:noFill/>
-          <a:ln/>
-        </p:spPr>
-        <p:txBody>
-          <a:bodyPr wrap="square" lIns="0" tIns="0" rIns="0" bIns="0" rtlCol="0" anchor="t"/>
-          <a:lstStyle/>
-          <a:p>
-            <a:pPr indent="0" marL="0">
-              <a:lnSpc>
-                <a:spcPct val="108000"/>
-              </a:lnSpc>
-              <a:buNone/>
-            </a:pPr>
-            <a:r>
-              <a:rPr lang="en-US" sz="1200" dirty="0">
-                <a:solidFill>
-                  <a:srgbClr val="E9E4F7"/>
-                </a:solidFill>
-                <a:latin typeface="Montserrat" pitchFamily="34" charset="0"/>
-                <a:ea typeface="Montserrat" pitchFamily="34" charset="-122"/>
-                <a:cs typeface="Montserrat" pitchFamily="34" charset="-120"/>
-              </a:rPr>
-              <a:t>виявити → деградувати → відновити → зафіксувати</a:t>
-            </a:r>
-            <a:endParaRPr lang="en-US" sz="1200" dirty="0"/>
-          </a:p>
-        </p:txBody>
-      </p:sp>
-      <p:sp>
-        <p:nvSpPr>
-          <p:cNvPr id="24" name="Shape 21"/>
-          <p:cNvSpPr/>
-          <p:nvPr/>
-        </p:nvSpPr>
-        <p:spPr>
-          <a:xfrm>
-            <a:off x="7973568" y="3429000"/>
-            <a:ext cx="3520440" cy="1554480"/>
-          </a:xfrm>
-          <a:prstGeom prst="roundRect">
-            <a:avLst>
-              <a:gd name="adj" fmla="val 7059"/>
-            </a:avLst>
-          </a:prstGeom>
-          <a:solidFill>
-            <a:srgbClr val="000000"/>
-          </a:solidFill>
-          <a:ln/>
-        </p:spPr>
-      </p:sp>
-      <p:sp>
-        <p:nvSpPr>
-          <p:cNvPr id="25" name="Shape 22"/>
-          <p:cNvSpPr/>
-          <p:nvPr/>
-        </p:nvSpPr>
-        <p:spPr>
-          <a:xfrm>
-            <a:off x="8174736" y="3611880"/>
-            <a:ext cx="384048" cy="384048"/>
-          </a:xfrm>
-          <a:prstGeom prst="ellipse">
-            <a:avLst/>
-          </a:prstGeom>
-          <a:solidFill>
-            <a:srgbClr val="5A05F4"/>
-          </a:solidFill>
-          <a:ln/>
-        </p:spPr>
-      </p:sp>
-      <p:sp>
-        <p:nvSpPr>
-          <p:cNvPr id="26" name="Text 23"/>
-          <p:cNvSpPr/>
-          <p:nvPr/>
-        </p:nvSpPr>
-        <p:spPr>
-          <a:xfrm>
-            <a:off x="8174736" y="3611880"/>
-            <a:ext cx="384048" cy="384048"/>
-          </a:xfrm>
-          <a:prstGeom prst="rect">
-            <a:avLst/>
-          </a:prstGeom>
-          <a:noFill/>
-          <a:ln/>
-        </p:spPr>
-        <p:txBody>
-          <a:bodyPr wrap="square" lIns="0" tIns="0" rIns="0" bIns="0" rtlCol="0" anchor="ctr"/>
-          <a:lstStyle/>
-          <a:p>
-            <a:pPr algn="ctr" indent="0" marL="0">
-              <a:buNone/>
-            </a:pPr>
-            <a:r>
-              <a:rPr lang="en-US" sz="1200" b="1" dirty="0">
-                <a:solidFill>
-                  <a:srgbClr val="FFFFFF"/>
-                </a:solidFill>
-                <a:latin typeface="Courier New" pitchFamily="34" charset="0"/>
-                <a:ea typeface="Courier New" pitchFamily="34" charset="-122"/>
-                <a:cs typeface="Courier New" pitchFamily="34" charset="-120"/>
-              </a:rPr>
-              <a:t>3</a:t>
-            </a:r>
-            <a:endParaRPr lang="en-US" sz="1200" dirty="0"/>
-          </a:p>
-        </p:txBody>
-      </p:sp>
-      <p:sp>
-        <p:nvSpPr>
-          <p:cNvPr id="27" name="Text 24"/>
-          <p:cNvSpPr/>
-          <p:nvPr/>
-        </p:nvSpPr>
-        <p:spPr>
-          <a:xfrm>
-            <a:off x="8686800" y="3584448"/>
-            <a:ext cx="2606040" cy="438912"/>
-          </a:xfrm>
-          <a:prstGeom prst="rect">
-            <a:avLst/>
-          </a:prstGeom>
-          <a:noFill/>
-          <a:ln/>
-        </p:spPr>
-        <p:txBody>
-          <a:bodyPr wrap="square" lIns="0" tIns="0" rIns="0" bIns="0" rtlCol="0" anchor="ctr"/>
-          <a:lstStyle/>
-          <a:p>
-            <a:pPr indent="0" marL="0">
-              <a:buNone/>
-            </a:pPr>
-            <a:r>
-              <a:rPr lang="en-US" sz="1450" b="1" dirty="0">
-                <a:solidFill>
-                  <a:srgbClr val="A98BFF"/>
-                </a:solidFill>
-                <a:latin typeface="Montserrat" pitchFamily="34" charset="0"/>
-                <a:ea typeface="Montserrat" pitchFamily="34" charset="-122"/>
-                <a:cs typeface="Montserrat" pitchFamily="34" charset="-120"/>
-              </a:rPr>
-              <a:t>Пояснити</a:t>
-            </a:r>
-            <a:endParaRPr lang="en-US" sz="1450" dirty="0"/>
-          </a:p>
-        </p:txBody>
-      </p:sp>
-      <p:sp>
-        <p:nvSpPr>
-          <p:cNvPr id="28" name="Text 25"/>
-          <p:cNvSpPr/>
-          <p:nvPr/>
-        </p:nvSpPr>
-        <p:spPr>
-          <a:xfrm>
-            <a:off x="8174736" y="4114800"/>
-            <a:ext cx="3118104" cy="713232"/>
-          </a:xfrm>
-          <a:prstGeom prst="rect">
-            <a:avLst/>
-          </a:prstGeom>
-          <a:noFill/>
-          <a:ln/>
-        </p:spPr>
-        <p:txBody>
-          <a:bodyPr wrap="square" lIns="0" tIns="0" rIns="0" bIns="0" rtlCol="0" anchor="t"/>
-          <a:lstStyle/>
-          <a:p>
-            <a:pPr indent="0" marL="0">
-              <a:lnSpc>
-                <a:spcPct val="108000"/>
-              </a:lnSpc>
-              <a:buNone/>
-            </a:pPr>
-            <a:r>
-              <a:rPr lang="en-US" sz="1200" dirty="0">
-                <a:solidFill>
-                  <a:srgbClr val="E9E4F7"/>
-                </a:solidFill>
-                <a:latin typeface="Montserrat" pitchFamily="34" charset="0"/>
-                <a:ea typeface="Montserrat" pitchFamily="34" charset="-122"/>
-                <a:cs typeface="Montserrat" pitchFamily="34" charset="-120"/>
-              </a:rPr>
-              <a:t>через наслідки, а не через список технологій</a:t>
-            </a:r>
-            <a:endParaRPr lang="en-US" sz="1200" dirty="0"/>
-          </a:p>
-        </p:txBody>
-      </p:sp>
-      <p:sp>
-        <p:nvSpPr>
-          <p:cNvPr id="29" name="Shape 26"/>
+          <p:cNvPr id="45" name="Shape 42"/>
           <p:cNvSpPr/>
           <p:nvPr/>
         </p:nvSpPr>
@@ -22782,7 +23736,7 @@
       </p:sp>
       <p:sp>
         <p:nvSpPr>
-          <p:cNvPr id="30" name="Text 27"/>
+          <p:cNvPr id="46" name="Text 43"/>
           <p:cNvSpPr/>
           <p:nvPr/>
         </p:nvSpPr>

--- a/docs/decks/L12.pptx
+++ b/docs/decks/L12.pptx
@@ -13348,7 +13348,7 @@
                 <a:ea typeface="Montserrat" pitchFamily="34" charset="-122"/>
                 <a:cs typeface="Montserrat" pitchFamily="34" charset="-120"/>
               </a:rPr>
-              <a:t>що це довело · перевір себе · антипатерни фіналу</a:t>
+              <a:t>що це довело · перевірте себе · антипатерни фіналу</a:t>
             </a:r>
             <a:endParaRPr lang="en-US" sz="1500" dirty="0"/>
           </a:p>
@@ -16679,7 +16679,7 @@
                 <a:ea typeface="Unbounded" pitchFamily="34" charset="-122"/>
                 <a:cs typeface="Unbounded" pitchFamily="34" charset="-120"/>
               </a:rPr>
-              <a:t>Перевір себе</a:t>
+              <a:t>Перевірте себе</a:t>
             </a:r>
             <a:endParaRPr lang="en-US" sz="2400" dirty="0"/>
           </a:p>
